--- a/plugins/gradient-cio/assets/examples/gradient-portfolio-construction-real-assets.pptx
+++ b/plugins/gradient-cio/assets/examples/gradient-portfolio-construction-real-assets.pptx
@@ -1449,6 +1449,59 @@
               </a:solidFill>
             </c:spPr>
           </c:dPt>
+          <c:dLbls>
+            <c:dLbl>
+              <c:idx val="0"/>
+              <c:tx>
+                <c:rich>
+                  <a:bodyPr/>
+                  <a:lstStyle/>
+                  <a:p>
+                    <a:r>
+                      <a:rPr lang="en-US" sz="800"/>
+                      <a:t>6.9%</a:t>
+                    </a:r>
+                  </a:p>
+                </c:rich>
+              </c:tx>
+              <c:dLblPos val="outEnd"/>
+              <c:showLegendKey val="0"/>
+              <c:showVal val="0"/>
+              <c:showCatName val="0"/>
+              <c:showSerName val="0"/>
+              <c:showPercent val="0"/>
+              <c:showBubbleSize val="0"/>
+            </c:dLbl>
+            <c:dLbl>
+              <c:idx val="1"/>
+              <c:tx>
+                <c:rich>
+                  <a:bodyPr/>
+                  <a:lstStyle/>
+                  <a:p>
+                    <a:r>
+                      <a:rPr lang="en-US" sz="800"/>
+                      <a:t>14.2%</a:t>
+                    </a:r>
+                  </a:p>
+                </c:rich>
+              </c:tx>
+              <c:dLblPos val="outEnd"/>
+              <c:showLegendKey val="0"/>
+              <c:showVal val="0"/>
+              <c:showCatName val="0"/>
+              <c:showSerName val="0"/>
+              <c:showPercent val="0"/>
+              <c:showBubbleSize val="0"/>
+            </c:dLbl>
+            <c:dLblPos val="outEnd"/>
+            <c:showLegendKey val="0"/>
+            <c:showVal val="0"/>
+            <c:showCatName val="0"/>
+            <c:showSerName val="0"/>
+            <c:showPercent val="0"/>
+            <c:showBubbleSize val="0"/>
+          </c:dLbls>
           <c:cat>
             <c:strRef>
               <c:f>Sheet1!$A$2:$A$3</c:f>
@@ -1604,6 +1657,37 @@
               </a:solidFill>
             </c:spPr>
           </c:dPt>
+          <c:dLbls>
+            <c:dLbl>
+              <c:idx val="0"/>
+              <c:tx>
+                <c:rich>
+                  <a:bodyPr/>
+                  <a:lstStyle/>
+                  <a:p>
+                    <a:r>
+                      <a:rPr lang="en-US" sz="800"/>
+                      <a:t>+6.9%</a:t>
+                    </a:r>
+                  </a:p>
+                </c:rich>
+              </c:tx>
+              <c:dLblPos val="outEnd"/>
+              <c:showLegendKey val="0"/>
+              <c:showVal val="0"/>
+              <c:showCatName val="0"/>
+              <c:showSerName val="0"/>
+              <c:showPercent val="0"/>
+              <c:showBubbleSize val="0"/>
+            </c:dLbl>
+            <c:dLblPos val="outEnd"/>
+            <c:showLegendKey val="0"/>
+            <c:showVal val="0"/>
+            <c:showCatName val="0"/>
+            <c:showSerName val="0"/>
+            <c:showPercent val="0"/>
+            <c:showBubbleSize val="0"/>
+          </c:dLbls>
           <c:cat>
             <c:strRef>
               <c:f>Sheet1!$A$2:$A$2</c:f>
@@ -4537,7 +4621,7 @@
         </p:nvSpPr>
         <p:spPr>
           <a:xfrm>
-            <a:off x="685800" y="1828800"/>
+            <a:off x="685800" y="1664208"/>
             <a:ext cx="9966960" cy="274320"/>
           </a:xfrm>
           <a:prstGeom prst="rect">
@@ -4555,7 +4639,7 @@
               <a:spcAft>
                 <a:spcPts val="0"/>
               </a:spcAft>
-              <a:defRPr sz="900" b="1">
+              <a:defRPr sz="850" b="1">
                 <a:solidFill>
                   <a:srgbClr val="C6F432"/>
                 </a:solidFill>
@@ -4579,7 +4663,7 @@
         </p:nvSpPr>
         <p:spPr>
           <a:xfrm>
-            <a:off x="685800" y="2176272"/>
+            <a:off x="685800" y="2011680"/>
             <a:ext cx="9966960" cy="1234440"/>
           </a:xfrm>
           <a:prstGeom prst="rect">
@@ -4597,7 +4681,7 @@
               <a:spcAft>
                 <a:spcPts val="0"/>
               </a:spcAft>
-              <a:defRPr sz="3400" b="1">
+              <a:defRPr sz="3300" b="1">
                 <a:solidFill>
                   <a:srgbClr val="FFFFFF"/>
                 </a:solidFill>
@@ -4608,7 +4692,7 @@
               <a:rPr>
                 <a:latin typeface="Inter"/>
               </a:rPr>
-              <a:t>Northstar Real Assets Portfolio (TEST)</a:t>
+              <a:t>Northstar Real Assets Portfolio</a:t>
             </a:r>
           </a:p>
         </p:txBody>
@@ -4621,8 +4705,8 @@
         </p:nvSpPr>
         <p:spPr>
           <a:xfrm>
-            <a:off x="685800" y="3456432"/>
-            <a:ext cx="9692640" cy="640080"/>
+            <a:off x="685800" y="3273552"/>
+            <a:ext cx="9692640" cy="594360"/>
           </a:xfrm>
           <a:prstGeom prst="rect">
             <a:avLst/>
@@ -4639,7 +4723,7 @@
               <a:spcAft>
                 <a:spcPts val="0"/>
               </a:spcAft>
-              <a:defRPr sz="1500" b="0">
+              <a:defRPr sz="1400" b="0">
                 <a:solidFill>
                   <a:srgbClr val="9AA5B1"/>
                 </a:solidFill>
@@ -4650,7 +4734,7 @@
               <a:rPr>
                 <a:latin typeface="Inter"/>
               </a:rPr>
-              <a:t>Decision pack · prepared for the Investment Committee (TEST)</a:t>
+              <a:t>Portfolio construction review · prepared for the Investment Committee</a:t>
             </a:r>
           </a:p>
         </p:txBody>
@@ -4663,8 +4747,8 @@
         </p:nvSpPr>
         <p:spPr>
           <a:xfrm>
-            <a:off x="685800" y="4251960"/>
-            <a:ext cx="1005840" cy="54864"/>
+            <a:off x="685800" y="4005072"/>
+            <a:ext cx="822960" cy="45720"/>
           </a:xfrm>
           <a:prstGeom prst="rect">
             <a:avLst/>
@@ -4712,8 +4796,8 @@
         </p:nvSpPr>
         <p:spPr>
           <a:xfrm>
-            <a:off x="685800" y="4572000"/>
-            <a:ext cx="3063240" cy="182880"/>
+            <a:off x="685800" y="4315968"/>
+            <a:ext cx="4709160" cy="182880"/>
           </a:xfrm>
           <a:prstGeom prst="rect">
             <a:avLst/>
@@ -4754,8 +4838,8 @@
         </p:nvSpPr>
         <p:spPr>
           <a:xfrm>
-            <a:off x="685800" y="4773168"/>
-            <a:ext cx="3063240" cy="320040"/>
+            <a:off x="685800" y="4507992"/>
+            <a:ext cx="4709160" cy="310896"/>
           </a:xfrm>
           <a:prstGeom prst="rect">
             <a:avLst/>
@@ -4796,8 +4880,8 @@
         </p:nvSpPr>
         <p:spPr>
           <a:xfrm>
-            <a:off x="4160520" y="4572000"/>
-            <a:ext cx="3063240" cy="182880"/>
+            <a:off x="5852160" y="4315968"/>
+            <a:ext cx="4709160" cy="182880"/>
           </a:xfrm>
           <a:prstGeom prst="rect">
             <a:avLst/>
@@ -4825,7 +4909,7 @@
               <a:rPr>
                 <a:latin typeface="Inter"/>
               </a:rPr>
-              <a:t>BASE CURRENCY</a:t>
+              <a:t>TOTAL NAV</a:t>
             </a:r>
           </a:p>
         </p:txBody>
@@ -4838,8 +4922,8 @@
         </p:nvSpPr>
         <p:spPr>
           <a:xfrm>
-            <a:off x="4160520" y="4773168"/>
-            <a:ext cx="3063240" cy="320040"/>
+            <a:off x="5852160" y="4507992"/>
+            <a:ext cx="4709160" cy="310896"/>
           </a:xfrm>
           <a:prstGeom prst="rect">
             <a:avLst/>
@@ -4867,7 +4951,7 @@
               <a:rPr>
                 <a:latin typeface="Inter"/>
               </a:rPr>
-              <a:t>USD</a:t>
+              <a:t>$1,000.0M</a:t>
             </a:r>
           </a:p>
         </p:txBody>
@@ -4880,8 +4964,8 @@
         </p:nvSpPr>
         <p:spPr>
           <a:xfrm>
-            <a:off x="7635240" y="4572000"/>
-            <a:ext cx="3063240" cy="182880"/>
+            <a:off x="685800" y="4937759"/>
+            <a:ext cx="4709160" cy="182880"/>
           </a:xfrm>
           <a:prstGeom prst="rect">
             <a:avLst/>
@@ -4909,7 +4993,7 @@
               <a:rPr>
                 <a:latin typeface="Inter"/>
               </a:rPr>
-              <a:t>TOTAL NAV</a:t>
+              <a:t>REAL-ASSETS WEIGHT</a:t>
             </a:r>
           </a:p>
         </p:txBody>
@@ -4922,8 +5006,8 @@
         </p:nvSpPr>
         <p:spPr>
           <a:xfrm>
-            <a:off x="7635240" y="4773168"/>
-            <a:ext cx="3063240" cy="320040"/>
+            <a:off x="685800" y="5129783"/>
+            <a:ext cx="4709160" cy="310896"/>
           </a:xfrm>
           <a:prstGeom prst="rect">
             <a:avLst/>
@@ -4951,7 +5035,7 @@
               <a:rPr>
                 <a:latin typeface="Inter"/>
               </a:rPr>
-              <a:t>$1,000.0M</a:t>
+              <a:t>15.0%</a:t>
             </a:r>
           </a:p>
         </p:txBody>
@@ -4964,8 +5048,8 @@
         </p:nvSpPr>
         <p:spPr>
           <a:xfrm>
-            <a:off x="685800" y="5230368"/>
-            <a:ext cx="3063240" cy="182880"/>
+            <a:off x="5852160" y="4937759"/>
+            <a:ext cx="4709160" cy="182880"/>
           </a:xfrm>
           <a:prstGeom prst="rect">
             <a:avLst/>
@@ -4993,7 +5077,7 @@
               <a:rPr>
                 <a:latin typeface="Inter"/>
               </a:rPr>
-              <a:t>REAL-ASSETS WEIGHT</a:t>
+              <a:t>UNFUNDED COMMITMENTS</a:t>
             </a:r>
           </a:p>
         </p:txBody>
@@ -5006,8 +5090,8 @@
         </p:nvSpPr>
         <p:spPr>
           <a:xfrm>
-            <a:off x="685800" y="5431536"/>
-            <a:ext cx="3063240" cy="320040"/>
+            <a:off x="5852160" y="5129783"/>
+            <a:ext cx="4709160" cy="310896"/>
           </a:xfrm>
           <a:prstGeom prst="rect">
             <a:avLst/>
@@ -5035,90 +5119,6 @@
               <a:rPr>
                 <a:latin typeface="Inter"/>
               </a:rPr>
-              <a:t>15.0%</a:t>
-            </a:r>
-          </a:p>
-        </p:txBody>
-      </p:sp>
-      <p:sp>
-        <p:nvSpPr>
-          <p:cNvPr id="17" name="TextBox 16"/>
-          <p:cNvSpPr txBox="1"/>
-          <p:nvPr/>
-        </p:nvSpPr>
-        <p:spPr>
-          <a:xfrm>
-            <a:off x="4160520" y="5230368"/>
-            <a:ext cx="3063240" cy="182880"/>
-          </a:xfrm>
-          <a:prstGeom prst="rect">
-            <a:avLst/>
-          </a:prstGeom>
-          <a:noFill/>
-        </p:spPr>
-        <p:txBody>
-          <a:bodyPr wrap="none" lIns="9144" rIns="9144" tIns="9144" bIns="9144" anchor="t">
-            <a:spAutoFit/>
-          </a:bodyPr>
-          <a:lstStyle/>
-          <a:p>
-            <a:pPr algn="l">
-              <a:spcAft>
-                <a:spcPts val="0"/>
-              </a:spcAft>
-              <a:defRPr sz="700" b="1">
-                <a:solidFill>
-                  <a:srgbClr val="8A94A1"/>
-                </a:solidFill>
-                <a:latin typeface="Inter"/>
-              </a:defRPr>
-            </a:pPr>
-            <a:r>
-              <a:rPr>
-                <a:latin typeface="Inter"/>
-              </a:rPr>
-              <a:t>UNFUNDED COMMITMENTS</a:t>
-            </a:r>
-          </a:p>
-        </p:txBody>
-      </p:sp>
-      <p:sp>
-        <p:nvSpPr>
-          <p:cNvPr id="18" name="TextBox 17"/>
-          <p:cNvSpPr txBox="1"/>
-          <p:nvPr/>
-        </p:nvSpPr>
-        <p:spPr>
-          <a:xfrm>
-            <a:off x="4160520" y="5431536"/>
-            <a:ext cx="3063240" cy="320040"/>
-          </a:xfrm>
-          <a:prstGeom prst="rect">
-            <a:avLst/>
-          </a:prstGeom>
-          <a:noFill/>
-        </p:spPr>
-        <p:txBody>
-          <a:bodyPr wrap="none" lIns="9144" rIns="9144" tIns="9144" bIns="9144" anchor="t">
-            <a:spAutoFit/>
-          </a:bodyPr>
-          <a:lstStyle/>
-          <a:p>
-            <a:pPr algn="l">
-              <a:spcAft>
-                <a:spcPts val="0"/>
-              </a:spcAft>
-              <a:defRPr sz="1000" b="1">
-                <a:solidFill>
-                  <a:srgbClr val="FFFFFF"/>
-                </a:solidFill>
-                <a:latin typeface="Inter"/>
-              </a:defRPr>
-            </a:pPr>
-            <a:r>
-              <a:rPr>
-                <a:latin typeface="Inter"/>
-              </a:rPr>
               <a:t>$28.0M</a:t>
             </a:r>
           </a:p>
@@ -5126,98 +5126,14 @@
       </p:sp>
       <p:sp>
         <p:nvSpPr>
-          <p:cNvPr id="19" name="TextBox 18"/>
-          <p:cNvSpPr txBox="1"/>
-          <p:nvPr/>
-        </p:nvSpPr>
-        <p:spPr>
-          <a:xfrm>
-            <a:off x="7635240" y="5230368"/>
-            <a:ext cx="3063240" cy="182880"/>
-          </a:xfrm>
-          <a:prstGeom prst="rect">
-            <a:avLst/>
-          </a:prstGeom>
-          <a:noFill/>
-        </p:spPr>
-        <p:txBody>
-          <a:bodyPr wrap="none" lIns="9144" rIns="9144" tIns="9144" bIns="9144" anchor="t">
-            <a:spAutoFit/>
-          </a:bodyPr>
-          <a:lstStyle/>
-          <a:p>
-            <a:pPr algn="l">
-              <a:spcAft>
-                <a:spcPts val="0"/>
-              </a:spcAft>
-              <a:defRPr sz="700" b="1">
-                <a:solidFill>
-                  <a:srgbClr val="8A94A1"/>
-                </a:solidFill>
-                <a:latin typeface="Inter"/>
-              </a:defRPr>
-            </a:pPr>
-            <a:r>
-              <a:rPr>
-                <a:latin typeface="Inter"/>
-              </a:rPr>
-              <a:t>DATA SCOPE</a:t>
-            </a:r>
-          </a:p>
-        </p:txBody>
-      </p:sp>
-      <p:sp>
-        <p:nvSpPr>
-          <p:cNvPr id="20" name="TextBox 19"/>
-          <p:cNvSpPr txBox="1"/>
-          <p:nvPr/>
-        </p:nvSpPr>
-        <p:spPr>
-          <a:xfrm>
-            <a:off x="7635240" y="5431536"/>
-            <a:ext cx="3063240" cy="320040"/>
-          </a:xfrm>
-          <a:prstGeom prst="rect">
-            <a:avLst/>
-          </a:prstGeom>
-          <a:noFill/>
-        </p:spPr>
-        <p:txBody>
-          <a:bodyPr wrap="none" lIns="9144" rIns="9144" tIns="9144" bIns="9144" anchor="t">
-            <a:spAutoFit/>
-          </a:bodyPr>
-          <a:lstStyle/>
-          <a:p>
-            <a:pPr algn="l">
-              <a:spcAft>
-                <a:spcPts val="0"/>
-              </a:spcAft>
-              <a:defRPr sz="1000" b="1">
-                <a:solidFill>
-                  <a:srgbClr val="FFFFFF"/>
-                </a:solidFill>
-                <a:latin typeface="Inter"/>
-              </a:defRPr>
-            </a:pPr>
-            <a:r>
-              <a:rPr>
-                <a:latin typeface="Inter"/>
-              </a:rPr>
-              <a:t>Fictional TEST data</a:t>
-            </a:r>
-          </a:p>
-        </p:txBody>
-      </p:sp>
-      <p:sp>
-        <p:nvSpPr>
-          <p:cNvPr id="21" name="Rectangle 20"/>
+          <p:cNvPr id="17" name="Rectangle 16"/>
           <p:cNvSpPr/>
           <p:nvPr/>
         </p:nvSpPr>
         <p:spPr>
           <a:xfrm>
-            <a:off x="685800" y="5833872"/>
-            <a:ext cx="3063240" cy="384048"/>
+            <a:off x="685800" y="5687568"/>
+            <a:ext cx="3337560" cy="530352"/>
           </a:xfrm>
           <a:prstGeom prst="rect">
             <a:avLst/>
@@ -5259,14 +5175,14 @@
       </p:sp>
       <p:sp>
         <p:nvSpPr>
-          <p:cNvPr id="22" name="TextBox 21"/>
+          <p:cNvPr id="18" name="TextBox 17"/>
           <p:cNvSpPr txBox="1"/>
           <p:nvPr/>
         </p:nvSpPr>
         <p:spPr>
           <a:xfrm>
-            <a:off x="822960" y="5934456"/>
-            <a:ext cx="2788920" cy="164592"/>
+            <a:off x="822960" y="5760720"/>
+            <a:ext cx="3063240" cy="128016"/>
           </a:xfrm>
           <a:prstGeom prst="rect">
             <a:avLst/>
@@ -5283,7 +5199,7 @@
               <a:spcAft>
                 <a:spcPts val="0"/>
               </a:spcAft>
-              <a:defRPr sz="800" b="1">
+              <a:defRPr sz="620" b="1">
                 <a:solidFill>
                   <a:srgbClr val="0D1117"/>
                 </a:solidFill>
@@ -5294,6 +5210,48 @@
               <a:rPr>
                 <a:latin typeface="Inter"/>
               </a:rPr>
+              <a:t>OVERALL VIEW</a:t>
+            </a:r>
+          </a:p>
+        </p:txBody>
+      </p:sp>
+      <p:sp>
+        <p:nvSpPr>
+          <p:cNvPr id="19" name="TextBox 18"/>
+          <p:cNvSpPr txBox="1"/>
+          <p:nvPr/>
+        </p:nvSpPr>
+        <p:spPr>
+          <a:xfrm>
+            <a:off x="822960" y="5916168"/>
+            <a:ext cx="3063240" cy="182880"/>
+          </a:xfrm>
+          <a:prstGeom prst="rect">
+            <a:avLst/>
+          </a:prstGeom>
+          <a:noFill/>
+        </p:spPr>
+        <p:txBody>
+          <a:bodyPr wrap="none" lIns="9144" rIns="9144" tIns="9144" bIns="9144" anchor="t">
+            <a:spAutoFit/>
+          </a:bodyPr>
+          <a:lstStyle/>
+          <a:p>
+            <a:pPr algn="l">
+              <a:spcAft>
+                <a:spcPts val="0"/>
+              </a:spcAft>
+              <a:defRPr sz="900" b="1">
+                <a:solidFill>
+                  <a:srgbClr val="0D1117"/>
+                </a:solidFill>
+                <a:latin typeface="Inter"/>
+              </a:defRPr>
+            </a:pPr>
+            <a:r>
+              <a:rPr>
+                <a:latin typeface="Inter"/>
+              </a:rPr>
               <a:t>Valuation lag and structure mix on watch</a:t>
             </a:r>
           </a:p>
@@ -5301,13 +5259,13 @@
       </p:sp>
       <p:sp>
         <p:nvSpPr>
-          <p:cNvPr id="23" name="TextBox 22"/>
+          <p:cNvPr id="20" name="TextBox 19"/>
           <p:cNvSpPr txBox="1"/>
           <p:nvPr/>
         </p:nvSpPr>
         <p:spPr>
           <a:xfrm>
-            <a:off x="3977639" y="5824728"/>
+            <a:off x="4297680" y="5733288"/>
             <a:ext cx="3108960" cy="164592"/>
           </a:xfrm>
           <a:prstGeom prst="rect">
@@ -5336,20 +5294,20 @@
               <a:rPr>
                 <a:latin typeface="Inter"/>
               </a:rPr>
-              <a:t>EVIDENCE COMPLETENESS</a:t>
+              <a:t>SCOPE REVIEWED</a:t>
             </a:r>
           </a:p>
         </p:txBody>
       </p:sp>
       <p:sp>
         <p:nvSpPr>
-          <p:cNvPr id="24" name="TextBox 23"/>
+          <p:cNvPr id="21" name="TextBox 20"/>
           <p:cNvSpPr txBox="1"/>
           <p:nvPr/>
         </p:nvSpPr>
         <p:spPr>
           <a:xfrm>
-            <a:off x="3977639" y="5998464"/>
+            <a:off x="4297680" y="5934456"/>
             <a:ext cx="3108960" cy="201168"/>
           </a:xfrm>
           <a:prstGeom prst="rect">
@@ -5385,14 +5343,14 @@
       </p:sp>
       <p:sp>
         <p:nvSpPr>
-          <p:cNvPr id="25" name="TextBox 24"/>
+          <p:cNvPr id="22" name="TextBox 21"/>
           <p:cNvSpPr txBox="1"/>
           <p:nvPr/>
         </p:nvSpPr>
         <p:spPr>
           <a:xfrm>
-            <a:off x="685800" y="6473952"/>
-            <a:ext cx="8046720" cy="182880"/>
+            <a:off x="685800" y="6400800"/>
+            <a:ext cx="8046720" cy="146304"/>
           </a:xfrm>
           <a:prstGeom prst="rect">
             <a:avLst/>
@@ -5420,14 +5378,56 @@
               <a:rPr>
                 <a:latin typeface="Inter"/>
               </a:rPr>
-              <a:t>TEST DATA — fictional portfolio for rendering tests only</a:t>
+              <a:t>Confidential — Investment Committee</a:t>
             </a:r>
           </a:p>
         </p:txBody>
       </p:sp>
       <p:sp>
         <p:nvSpPr>
-          <p:cNvPr id="26" name="TextBox 25"/>
+          <p:cNvPr id="23" name="TextBox 22"/>
+          <p:cNvSpPr txBox="1"/>
+          <p:nvPr/>
+        </p:nvSpPr>
+        <p:spPr>
+          <a:xfrm>
+            <a:off x="685800" y="6556248"/>
+            <a:ext cx="8046720" cy="128016"/>
+          </a:xfrm>
+          <a:prstGeom prst="rect">
+            <a:avLst/>
+          </a:prstGeom>
+          <a:noFill/>
+        </p:spPr>
+        <p:txBody>
+          <a:bodyPr wrap="none" lIns="9144" rIns="9144" tIns="9144" bIns="9144" anchor="t">
+            <a:spAutoFit/>
+          </a:bodyPr>
+          <a:lstStyle/>
+          <a:p>
+            <a:pPr algn="l">
+              <a:spcAft>
+                <a:spcPts val="0"/>
+              </a:spcAft>
+              <a:defRPr sz="650" b="0">
+                <a:solidFill>
+                  <a:srgbClr val="8A94A1"/>
+                </a:solidFill>
+                <a:latin typeface="Inter"/>
+              </a:defRPr>
+            </a:pPr>
+            <a:r>
+              <a:rPr>
+                <a:latin typeface="Inter"/>
+              </a:rPr>
+              <a:t>Illustrative sample · not client data</a:t>
+            </a:r>
+          </a:p>
+        </p:txBody>
+      </p:sp>
+      <p:sp>
+        <p:nvSpPr>
+          <p:cNvPr id="24" name="TextBox 23"/>
           <p:cNvSpPr txBox="1"/>
           <p:nvPr/>
         </p:nvSpPr>
@@ -5543,7 +5543,7 @@
         <p:spPr>
           <a:xfrm>
             <a:off x="640080" y="329184"/>
-            <a:ext cx="9875520" cy="182880"/>
+            <a:ext cx="5303520" cy="182880"/>
           </a:xfrm>
           <a:prstGeom prst="rect">
             <a:avLst/>
@@ -5584,6 +5584,48 @@
         </p:nvSpPr>
         <p:spPr>
           <a:xfrm>
+            <a:off x="5897880" y="310896"/>
+            <a:ext cx="4800600" cy="256032"/>
+          </a:xfrm>
+          <a:prstGeom prst="rect">
+            <a:avLst/>
+          </a:prstGeom>
+          <a:noFill/>
+        </p:spPr>
+        <p:txBody>
+          <a:bodyPr wrap="none" lIns="9144" rIns="9144" tIns="9144" bIns="9144" anchor="t">
+            <a:spAutoFit/>
+          </a:bodyPr>
+          <a:lstStyle/>
+          <a:p>
+            <a:pPr algn="r">
+              <a:spcAft>
+                <a:spcPts val="0"/>
+              </a:spcAft>
+              <a:defRPr sz="680" b="1">
+                <a:solidFill>
+                  <a:srgbClr val="4F6B00"/>
+                </a:solidFill>
+                <a:latin typeface="Inter"/>
+              </a:defRPr>
+            </a:pPr>
+            <a:r>
+              <a:rPr>
+                <a:latin typeface="Inter"/>
+              </a:rPr>
+              <a:t>Illustrative, Gradient Maintained — demo data, not the client's holdings or managers</a:t>
+            </a:r>
+          </a:p>
+        </p:txBody>
+      </p:sp>
+      <p:sp>
+        <p:nvSpPr>
+          <p:cNvPr id="5" name="TextBox 4"/>
+          <p:cNvSpPr txBox="1"/>
+          <p:nvPr/>
+        </p:nvSpPr>
+        <p:spPr>
+          <a:xfrm>
             <a:off x="640080" y="566928"/>
             <a:ext cx="10058400" cy="530352"/>
           </a:xfrm>
@@ -5620,7 +5662,7 @@
       </p:sp>
       <p:sp>
         <p:nvSpPr>
-          <p:cNvPr id="5" name="Rectangle 4"/>
+          <p:cNvPr id="6" name="Rectangle 5"/>
           <p:cNvSpPr/>
           <p:nvPr/>
         </p:nvSpPr>
@@ -5669,7 +5711,7 @@
       </p:sp>
       <p:sp>
         <p:nvSpPr>
-          <p:cNvPr id="6" name="Rectangle 5"/>
+          <p:cNvPr id="7" name="Rectangle 6"/>
           <p:cNvSpPr/>
           <p:nvPr/>
         </p:nvSpPr>
@@ -5718,7 +5760,7 @@
       </p:sp>
       <p:sp>
         <p:nvSpPr>
-          <p:cNvPr id="7" name="TextBox 6"/>
+          <p:cNvPr id="8" name="TextBox 7"/>
           <p:cNvSpPr txBox="1"/>
           <p:nvPr/>
         </p:nvSpPr>
@@ -5760,7 +5802,7 @@
       </p:sp>
       <p:sp>
         <p:nvSpPr>
-          <p:cNvPr id="8" name="TextBox 7"/>
+          <p:cNvPr id="9" name="TextBox 8"/>
           <p:cNvSpPr txBox="1"/>
           <p:nvPr/>
         </p:nvSpPr>
@@ -5802,7 +5844,7 @@
       </p:sp>
       <p:graphicFrame>
         <p:nvGraphicFramePr>
-          <p:cNvPr id="9" name="Chart 8"/>
+          <p:cNvPr id="10" name="Chart 9"/>
           <p:cNvGraphicFramePr>
             <a:graphicFrameLocks noGrp="1"/>
           </p:cNvGraphicFramePr>
@@ -5820,7 +5862,7 @@
       </p:graphicFrame>
       <p:sp>
         <p:nvSpPr>
-          <p:cNvPr id="10" name="Rectangle 9"/>
+          <p:cNvPr id="11" name="Rectangle 10"/>
           <p:cNvSpPr/>
           <p:nvPr/>
         </p:nvSpPr>
@@ -5869,7 +5911,7 @@
       </p:sp>
       <p:sp>
         <p:nvSpPr>
-          <p:cNvPr id="11" name="TextBox 10"/>
+          <p:cNvPr id="12" name="TextBox 11"/>
           <p:cNvSpPr txBox="1"/>
           <p:nvPr/>
         </p:nvSpPr>
@@ -5904,14 +5946,14 @@
               <a:rPr>
                 <a:latin typeface="Inter"/>
               </a:rPr>
-              <a:t>Sources: none cited</a:t>
+              <a:t>Sources: S1</a:t>
             </a:r>
           </a:p>
         </p:txBody>
       </p:sp>
       <p:sp>
         <p:nvSpPr>
-          <p:cNvPr id="12" name="TextBox 11"/>
+          <p:cNvPr id="13" name="TextBox 12"/>
           <p:cNvSpPr txBox="1"/>
           <p:nvPr/>
         </p:nvSpPr>
@@ -5946,14 +5988,14 @@
               <a:rPr>
                 <a:latin typeface="Inter"/>
               </a:rPr>
-              <a:t>TEST DATA — fictional portfolio for rendering tests only · Data as of 2026-06-30</a:t>
+              <a:t>Confidential — Investment Committee · Data as of 2026-06-30</a:t>
             </a:r>
           </a:p>
         </p:txBody>
       </p:sp>
       <p:sp>
         <p:nvSpPr>
-          <p:cNvPr id="13" name="TextBox 12"/>
+          <p:cNvPr id="14" name="TextBox 13"/>
           <p:cNvSpPr txBox="1"/>
           <p:nvPr/>
         </p:nvSpPr>
@@ -6069,7 +6111,7 @@
         <p:spPr>
           <a:xfrm>
             <a:off x="640080" y="329184"/>
-            <a:ext cx="9875520" cy="182880"/>
+            <a:ext cx="5303520" cy="182880"/>
           </a:xfrm>
           <a:prstGeom prst="rect">
             <a:avLst/>
@@ -6110,6 +6152,48 @@
         </p:nvSpPr>
         <p:spPr>
           <a:xfrm>
+            <a:off x="5897880" y="310896"/>
+            <a:ext cx="4800600" cy="256032"/>
+          </a:xfrm>
+          <a:prstGeom prst="rect">
+            <a:avLst/>
+          </a:prstGeom>
+          <a:noFill/>
+        </p:spPr>
+        <p:txBody>
+          <a:bodyPr wrap="none" lIns="9144" rIns="9144" tIns="9144" bIns="9144" anchor="t">
+            <a:spAutoFit/>
+          </a:bodyPr>
+          <a:lstStyle/>
+          <a:p>
+            <a:pPr algn="r">
+              <a:spcAft>
+                <a:spcPts val="0"/>
+              </a:spcAft>
+              <a:defRPr sz="680" b="1">
+                <a:solidFill>
+                  <a:srgbClr val="4F6B00"/>
+                </a:solidFill>
+                <a:latin typeface="Inter"/>
+              </a:defRPr>
+            </a:pPr>
+            <a:r>
+              <a:rPr>
+                <a:latin typeface="Inter"/>
+              </a:rPr>
+              <a:t>Illustrative, Gradient Maintained — demo data, not the client's holdings or managers</a:t>
+            </a:r>
+          </a:p>
+        </p:txBody>
+      </p:sp>
+      <p:sp>
+        <p:nvSpPr>
+          <p:cNvPr id="5" name="TextBox 4"/>
+          <p:cNvSpPr txBox="1"/>
+          <p:nvPr/>
+        </p:nvSpPr>
+        <p:spPr>
+          <a:xfrm>
             <a:off x="640080" y="566928"/>
             <a:ext cx="10058400" cy="530352"/>
           </a:xfrm>
@@ -6146,7 +6230,7 @@
       </p:sp>
       <p:sp>
         <p:nvSpPr>
-          <p:cNvPr id="5" name="Rectangle 4"/>
+          <p:cNvPr id="6" name="Rectangle 5"/>
           <p:cNvSpPr/>
           <p:nvPr/>
         </p:nvSpPr>
@@ -6195,7 +6279,7 @@
       </p:sp>
       <p:sp>
         <p:nvSpPr>
-          <p:cNvPr id="6" name="Rectangle 5"/>
+          <p:cNvPr id="7" name="Rectangle 6"/>
           <p:cNvSpPr/>
           <p:nvPr/>
         </p:nvSpPr>
@@ -6244,7 +6328,7 @@
       </p:sp>
       <p:sp>
         <p:nvSpPr>
-          <p:cNvPr id="7" name="TextBox 6"/>
+          <p:cNvPr id="8" name="TextBox 7"/>
           <p:cNvSpPr txBox="1"/>
           <p:nvPr/>
         </p:nvSpPr>
@@ -6286,7 +6370,7 @@
       </p:sp>
       <p:sp>
         <p:nvSpPr>
-          <p:cNvPr id="8" name="TextBox 7"/>
+          <p:cNvPr id="9" name="TextBox 8"/>
           <p:cNvSpPr txBox="1"/>
           <p:nvPr/>
         </p:nvSpPr>
@@ -6328,7 +6412,7 @@
       </p:sp>
       <p:graphicFrame>
         <p:nvGraphicFramePr>
-          <p:cNvPr id="9" name="Table 8"/>
+          <p:cNvPr id="10" name="Table 9"/>
           <p:cNvGraphicFramePr>
             <a:graphicFrameLocks noGrp="1"/>
           </p:cNvGraphicFramePr>
@@ -7506,7 +7590,7 @@
       </p:graphicFrame>
       <p:sp>
         <p:nvSpPr>
-          <p:cNvPr id="10" name="Rectangle 9"/>
+          <p:cNvPr id="11" name="Rectangle 10"/>
           <p:cNvSpPr/>
           <p:nvPr/>
         </p:nvSpPr>
@@ -7555,7 +7639,7 @@
       </p:sp>
       <p:sp>
         <p:nvSpPr>
-          <p:cNvPr id="11" name="Rectangle 10"/>
+          <p:cNvPr id="12" name="Rectangle 11"/>
           <p:cNvSpPr/>
           <p:nvPr/>
         </p:nvSpPr>
@@ -7604,7 +7688,7 @@
       </p:sp>
       <p:sp>
         <p:nvSpPr>
-          <p:cNvPr id="12" name="TextBox 11"/>
+          <p:cNvPr id="13" name="TextBox 12"/>
           <p:cNvSpPr txBox="1"/>
           <p:nvPr/>
         </p:nvSpPr>
@@ -7646,7 +7730,7 @@
       </p:sp>
       <p:sp>
         <p:nvSpPr>
-          <p:cNvPr id="13" name="TextBox 12"/>
+          <p:cNvPr id="14" name="TextBox 13"/>
           <p:cNvSpPr txBox="1"/>
           <p:nvPr/>
         </p:nvSpPr>
@@ -7688,7 +7772,7 @@
       </p:sp>
       <p:sp>
         <p:nvSpPr>
-          <p:cNvPr id="14" name="TextBox 13"/>
+          <p:cNvPr id="15" name="TextBox 14"/>
           <p:cNvSpPr txBox="1"/>
           <p:nvPr/>
         </p:nvSpPr>
@@ -7730,7 +7814,7 @@
       </p:sp>
       <p:sp>
         <p:nvSpPr>
-          <p:cNvPr id="15" name="Rectangle 14"/>
+          <p:cNvPr id="16" name="Rectangle 15"/>
           <p:cNvSpPr/>
           <p:nvPr/>
         </p:nvSpPr>
@@ -7779,7 +7863,7 @@
       </p:sp>
       <p:sp>
         <p:nvSpPr>
-          <p:cNvPr id="16" name="TextBox 15"/>
+          <p:cNvPr id="17" name="TextBox 16"/>
           <p:cNvSpPr txBox="1"/>
           <p:nvPr/>
         </p:nvSpPr>
@@ -7821,7 +7905,7 @@
       </p:sp>
       <p:sp>
         <p:nvSpPr>
-          <p:cNvPr id="17" name="TextBox 16"/>
+          <p:cNvPr id="18" name="TextBox 17"/>
           <p:cNvSpPr txBox="1"/>
           <p:nvPr/>
         </p:nvSpPr>
@@ -7856,14 +7940,14 @@
               <a:rPr>
                 <a:latin typeface="Inter"/>
               </a:rPr>
-              <a:t>TEST DATA — fictional portfolio for rendering tests only · Data as of 2026-06-30</a:t>
+              <a:t>Confidential — Investment Committee · Data as of 2026-06-30</a:t>
             </a:r>
           </a:p>
         </p:txBody>
       </p:sp>
       <p:sp>
         <p:nvSpPr>
-          <p:cNvPr id="18" name="TextBox 17"/>
+          <p:cNvPr id="19" name="TextBox 18"/>
           <p:cNvSpPr txBox="1"/>
           <p:nvPr/>
         </p:nvSpPr>
@@ -7978,6 +8062,48 @@
         </p:nvSpPr>
         <p:spPr>
           <a:xfrm>
+            <a:off x="5897880" y="310896"/>
+            <a:ext cx="4800600" cy="256032"/>
+          </a:xfrm>
+          <a:prstGeom prst="rect">
+            <a:avLst/>
+          </a:prstGeom>
+          <a:noFill/>
+        </p:spPr>
+        <p:txBody>
+          <a:bodyPr wrap="none" lIns="9144" rIns="9144" tIns="9144" bIns="9144" anchor="t">
+            <a:spAutoFit/>
+          </a:bodyPr>
+          <a:lstStyle/>
+          <a:p>
+            <a:pPr algn="r">
+              <a:spcAft>
+                <a:spcPts val="0"/>
+              </a:spcAft>
+              <a:defRPr sz="680" b="1">
+                <a:solidFill>
+                  <a:srgbClr val="4F6B00"/>
+                </a:solidFill>
+                <a:latin typeface="Inter"/>
+              </a:defRPr>
+            </a:pPr>
+            <a:r>
+              <a:rPr>
+                <a:latin typeface="Inter"/>
+              </a:rPr>
+              <a:t>Illustrative, Gradient Maintained — demo data, not the client's holdings or managers</a:t>
+            </a:r>
+          </a:p>
+        </p:txBody>
+      </p:sp>
+      <p:sp>
+        <p:nvSpPr>
+          <p:cNvPr id="4" name="TextBox 3"/>
+          <p:cNvSpPr txBox="1"/>
+          <p:nvPr/>
+        </p:nvSpPr>
+        <p:spPr>
+          <a:xfrm>
             <a:off x="640080" y="566928"/>
             <a:ext cx="10058400" cy="530352"/>
           </a:xfrm>
@@ -8014,7 +8140,7 @@
       </p:sp>
       <p:sp>
         <p:nvSpPr>
-          <p:cNvPr id="4" name="Rectangle 3"/>
+          <p:cNvPr id="5" name="Rectangle 4"/>
           <p:cNvSpPr/>
           <p:nvPr/>
         </p:nvSpPr>
@@ -8063,7 +8189,7 @@
       </p:sp>
       <p:sp>
         <p:nvSpPr>
-          <p:cNvPr id="5" name="Rectangle 4"/>
+          <p:cNvPr id="6" name="Rectangle 5"/>
           <p:cNvSpPr/>
           <p:nvPr/>
         </p:nvSpPr>
@@ -8112,7 +8238,7 @@
       </p:sp>
       <p:sp>
         <p:nvSpPr>
-          <p:cNvPr id="6" name="TextBox 5"/>
+          <p:cNvPr id="7" name="TextBox 6"/>
           <p:cNvSpPr txBox="1"/>
           <p:nvPr/>
         </p:nvSpPr>
@@ -8154,7 +8280,7 @@
       </p:sp>
       <p:sp>
         <p:nvSpPr>
-          <p:cNvPr id="7" name="TextBox 6"/>
+          <p:cNvPr id="8" name="TextBox 7"/>
           <p:cNvSpPr txBox="1"/>
           <p:nvPr/>
         </p:nvSpPr>
@@ -8196,7 +8322,7 @@
       </p:sp>
       <p:graphicFrame>
         <p:nvGraphicFramePr>
-          <p:cNvPr id="8" name="Chart 7"/>
+          <p:cNvPr id="9" name="Chart 8"/>
           <p:cNvGraphicFramePr>
             <a:graphicFrameLocks noGrp="1"/>
           </p:cNvGraphicFramePr>
@@ -8214,7 +8340,7 @@
       </p:graphicFrame>
       <p:sp>
         <p:nvSpPr>
-          <p:cNvPr id="9" name="Rectangle 8"/>
+          <p:cNvPr id="10" name="Rectangle 9"/>
           <p:cNvSpPr/>
           <p:nvPr/>
         </p:nvSpPr>
@@ -8263,7 +8389,7 @@
       </p:sp>
       <p:sp>
         <p:nvSpPr>
-          <p:cNvPr id="10" name="TextBox 9"/>
+          <p:cNvPr id="11" name="TextBox 10"/>
           <p:cNvSpPr txBox="1"/>
           <p:nvPr/>
         </p:nvSpPr>
@@ -8305,7 +8431,7 @@
       </p:sp>
       <p:sp>
         <p:nvSpPr>
-          <p:cNvPr id="11" name="TextBox 10"/>
+          <p:cNvPr id="12" name="TextBox 11"/>
           <p:cNvSpPr txBox="1"/>
           <p:nvPr/>
         </p:nvSpPr>
@@ -8340,14 +8466,14 @@
               <a:rPr>
                 <a:latin typeface="Inter"/>
               </a:rPr>
-              <a:t>TEST DATA — fictional portfolio for rendering tests only · Data as of 2026-06-30</a:t>
+              <a:t>Confidential — Investment Committee · Data as of 2026-06-30</a:t>
             </a:r>
           </a:p>
         </p:txBody>
       </p:sp>
       <p:sp>
         <p:nvSpPr>
-          <p:cNvPr id="12" name="TextBox 11"/>
+          <p:cNvPr id="13" name="TextBox 12"/>
           <p:cNvSpPr txBox="1"/>
           <p:nvPr/>
         </p:nvSpPr>
@@ -8462,6 +8588,48 @@
         </p:nvSpPr>
         <p:spPr>
           <a:xfrm>
+            <a:off x="5897880" y="310896"/>
+            <a:ext cx="4800600" cy="256032"/>
+          </a:xfrm>
+          <a:prstGeom prst="rect">
+            <a:avLst/>
+          </a:prstGeom>
+          <a:noFill/>
+        </p:spPr>
+        <p:txBody>
+          <a:bodyPr wrap="none" lIns="9144" rIns="9144" tIns="9144" bIns="9144" anchor="t">
+            <a:spAutoFit/>
+          </a:bodyPr>
+          <a:lstStyle/>
+          <a:p>
+            <a:pPr algn="r">
+              <a:spcAft>
+                <a:spcPts val="0"/>
+              </a:spcAft>
+              <a:defRPr sz="680" b="1">
+                <a:solidFill>
+                  <a:srgbClr val="4F6B00"/>
+                </a:solidFill>
+                <a:latin typeface="Inter"/>
+              </a:defRPr>
+            </a:pPr>
+            <a:r>
+              <a:rPr>
+                <a:latin typeface="Inter"/>
+              </a:rPr>
+              <a:t>Illustrative, Gradient Maintained — demo data, not the client's holdings or managers</a:t>
+            </a:r>
+          </a:p>
+        </p:txBody>
+      </p:sp>
+      <p:sp>
+        <p:nvSpPr>
+          <p:cNvPr id="4" name="TextBox 3"/>
+          <p:cNvSpPr txBox="1"/>
+          <p:nvPr/>
+        </p:nvSpPr>
+        <p:spPr>
+          <a:xfrm>
             <a:off x="640080" y="566928"/>
             <a:ext cx="10058400" cy="530352"/>
           </a:xfrm>
@@ -8498,7 +8666,7 @@
       </p:sp>
       <p:sp>
         <p:nvSpPr>
-          <p:cNvPr id="4" name="Rectangle 3"/>
+          <p:cNvPr id="5" name="Rectangle 4"/>
           <p:cNvSpPr/>
           <p:nvPr/>
         </p:nvSpPr>
@@ -8547,7 +8715,7 @@
       </p:sp>
       <p:sp>
         <p:nvSpPr>
-          <p:cNvPr id="5" name="Rectangle 4"/>
+          <p:cNvPr id="6" name="Rectangle 5"/>
           <p:cNvSpPr/>
           <p:nvPr/>
         </p:nvSpPr>
@@ -8596,7 +8764,7 @@
       </p:sp>
       <p:sp>
         <p:nvSpPr>
-          <p:cNvPr id="6" name="TextBox 5"/>
+          <p:cNvPr id="7" name="TextBox 6"/>
           <p:cNvSpPr txBox="1"/>
           <p:nvPr/>
         </p:nvSpPr>
@@ -8638,7 +8806,7 @@
       </p:sp>
       <p:sp>
         <p:nvSpPr>
-          <p:cNvPr id="7" name="TextBox 6"/>
+          <p:cNvPr id="8" name="TextBox 7"/>
           <p:cNvSpPr txBox="1"/>
           <p:nvPr/>
         </p:nvSpPr>
@@ -8680,7 +8848,7 @@
       </p:sp>
       <p:graphicFrame>
         <p:nvGraphicFramePr>
-          <p:cNvPr id="8" name="Table 7"/>
+          <p:cNvPr id="9" name="Table 8"/>
           <p:cNvGraphicFramePr>
             <a:graphicFrameLocks noGrp="1"/>
           </p:cNvGraphicFramePr>
@@ -9120,7 +9288,7 @@
       </p:graphicFrame>
       <p:sp>
         <p:nvSpPr>
-          <p:cNvPr id="9" name="TextBox 8"/>
+          <p:cNvPr id="10" name="TextBox 9"/>
           <p:cNvSpPr txBox="1"/>
           <p:nvPr/>
         </p:nvSpPr>
@@ -9162,7 +9330,7 @@
       </p:sp>
       <p:graphicFrame>
         <p:nvGraphicFramePr>
-          <p:cNvPr id="10" name="Table 9"/>
+          <p:cNvPr id="11" name="Table 10"/>
           <p:cNvGraphicFramePr>
             <a:graphicFrameLocks noGrp="1"/>
           </p:cNvGraphicFramePr>
@@ -9604,7 +9772,7 @@
       </p:graphicFrame>
       <p:sp>
         <p:nvSpPr>
-          <p:cNvPr id="11" name="TextBox 10"/>
+          <p:cNvPr id="12" name="TextBox 11"/>
           <p:cNvSpPr txBox="1"/>
           <p:nvPr/>
         </p:nvSpPr>
@@ -9646,7 +9814,7 @@
       </p:sp>
       <p:sp>
         <p:nvSpPr>
-          <p:cNvPr id="12" name="Rectangle 11"/>
+          <p:cNvPr id="13" name="Rectangle 12"/>
           <p:cNvSpPr/>
           <p:nvPr/>
         </p:nvSpPr>
@@ -9695,7 +9863,7 @@
       </p:sp>
       <p:sp>
         <p:nvSpPr>
-          <p:cNvPr id="13" name="TextBox 12"/>
+          <p:cNvPr id="14" name="TextBox 13"/>
           <p:cNvSpPr txBox="1"/>
           <p:nvPr/>
         </p:nvSpPr>
@@ -9737,7 +9905,7 @@
       </p:sp>
       <p:sp>
         <p:nvSpPr>
-          <p:cNvPr id="14" name="TextBox 13"/>
+          <p:cNvPr id="15" name="TextBox 14"/>
           <p:cNvSpPr txBox="1"/>
           <p:nvPr/>
         </p:nvSpPr>
@@ -9772,14 +9940,14 @@
               <a:rPr>
                 <a:latin typeface="Inter"/>
               </a:rPr>
-              <a:t>TEST DATA — fictional portfolio for rendering tests only · Data as of 2026-06-30</a:t>
+              <a:t>Confidential — Investment Committee · Data as of 2026-06-30</a:t>
             </a:r>
           </a:p>
         </p:txBody>
       </p:sp>
       <p:sp>
         <p:nvSpPr>
-          <p:cNvPr id="15" name="TextBox 14"/>
+          <p:cNvPr id="16" name="TextBox 15"/>
           <p:cNvSpPr txBox="1"/>
           <p:nvPr/>
         </p:nvSpPr>
@@ -9894,6 +10062,48 @@
         </p:nvSpPr>
         <p:spPr>
           <a:xfrm>
+            <a:off x="5897880" y="310896"/>
+            <a:ext cx="4800600" cy="256032"/>
+          </a:xfrm>
+          <a:prstGeom prst="rect">
+            <a:avLst/>
+          </a:prstGeom>
+          <a:noFill/>
+        </p:spPr>
+        <p:txBody>
+          <a:bodyPr wrap="none" lIns="9144" rIns="9144" tIns="9144" bIns="9144" anchor="t">
+            <a:spAutoFit/>
+          </a:bodyPr>
+          <a:lstStyle/>
+          <a:p>
+            <a:pPr algn="r">
+              <a:spcAft>
+                <a:spcPts val="0"/>
+              </a:spcAft>
+              <a:defRPr sz="680" b="1">
+                <a:solidFill>
+                  <a:srgbClr val="4F6B00"/>
+                </a:solidFill>
+                <a:latin typeface="Inter"/>
+              </a:defRPr>
+            </a:pPr>
+            <a:r>
+              <a:rPr>
+                <a:latin typeface="Inter"/>
+              </a:rPr>
+              <a:t>Illustrative, Gradient Maintained — demo data, not the client's holdings or managers</a:t>
+            </a:r>
+          </a:p>
+        </p:txBody>
+      </p:sp>
+      <p:sp>
+        <p:nvSpPr>
+          <p:cNvPr id="4" name="TextBox 3"/>
+          <p:cNvSpPr txBox="1"/>
+          <p:nvPr/>
+        </p:nvSpPr>
+        <p:spPr>
+          <a:xfrm>
             <a:off x="640080" y="566928"/>
             <a:ext cx="10058400" cy="530352"/>
           </a:xfrm>
@@ -9930,7 +10140,7 @@
       </p:sp>
       <p:sp>
         <p:nvSpPr>
-          <p:cNvPr id="4" name="Rectangle 3"/>
+          <p:cNvPr id="5" name="Rectangle 4"/>
           <p:cNvSpPr/>
           <p:nvPr/>
         </p:nvSpPr>
@@ -9979,7 +10189,7 @@
       </p:sp>
       <p:sp>
         <p:nvSpPr>
-          <p:cNvPr id="5" name="Rectangle 4"/>
+          <p:cNvPr id="6" name="Rectangle 5"/>
           <p:cNvSpPr/>
           <p:nvPr/>
         </p:nvSpPr>
@@ -10028,7 +10238,7 @@
       </p:sp>
       <p:sp>
         <p:nvSpPr>
-          <p:cNvPr id="6" name="TextBox 5"/>
+          <p:cNvPr id="7" name="TextBox 6"/>
           <p:cNvSpPr txBox="1"/>
           <p:nvPr/>
         </p:nvSpPr>
@@ -10070,7 +10280,7 @@
       </p:sp>
       <p:graphicFrame>
         <p:nvGraphicFramePr>
-          <p:cNvPr id="7" name="Table 6"/>
+          <p:cNvPr id="8" name="Table 7"/>
           <p:cNvGraphicFramePr>
             <a:graphicFrameLocks noGrp="1"/>
           </p:cNvGraphicFramePr>
@@ -10320,7 +10530,7 @@
       </p:graphicFrame>
       <p:sp>
         <p:nvSpPr>
-          <p:cNvPr id="8" name="Rectangle 7"/>
+          <p:cNvPr id="9" name="Rectangle 8"/>
           <p:cNvSpPr/>
           <p:nvPr/>
         </p:nvSpPr>
@@ -10369,7 +10579,7 @@
       </p:sp>
       <p:sp>
         <p:nvSpPr>
-          <p:cNvPr id="9" name="TextBox 8"/>
+          <p:cNvPr id="10" name="TextBox 9"/>
           <p:cNvSpPr txBox="1"/>
           <p:nvPr/>
         </p:nvSpPr>
@@ -10411,7 +10621,7 @@
       </p:sp>
       <p:sp>
         <p:nvSpPr>
-          <p:cNvPr id="10" name="TextBox 9"/>
+          <p:cNvPr id="11" name="TextBox 10"/>
           <p:cNvSpPr txBox="1"/>
           <p:nvPr/>
         </p:nvSpPr>
@@ -10446,14 +10656,14 @@
               <a:rPr>
                 <a:latin typeface="Inter"/>
               </a:rPr>
-              <a:t>TEST DATA — fictional portfolio for rendering tests only · Data as of 2026-06-30</a:t>
+              <a:t>Confidential — Investment Committee · Data as of 2026-06-30</a:t>
             </a:r>
           </a:p>
         </p:txBody>
       </p:sp>
       <p:sp>
         <p:nvSpPr>
-          <p:cNvPr id="11" name="TextBox 10"/>
+          <p:cNvPr id="12" name="TextBox 11"/>
           <p:cNvSpPr txBox="1"/>
           <p:nvPr/>
         </p:nvSpPr>
@@ -10569,7 +10779,7 @@
         <p:spPr>
           <a:xfrm>
             <a:off x="640080" y="329184"/>
-            <a:ext cx="9875520" cy="182880"/>
+            <a:ext cx="5303520" cy="182880"/>
           </a:xfrm>
           <a:prstGeom prst="rect">
             <a:avLst/>
@@ -10610,6 +10820,48 @@
         </p:nvSpPr>
         <p:spPr>
           <a:xfrm>
+            <a:off x="5897880" y="310896"/>
+            <a:ext cx="4800600" cy="256032"/>
+          </a:xfrm>
+          <a:prstGeom prst="rect">
+            <a:avLst/>
+          </a:prstGeom>
+          <a:noFill/>
+        </p:spPr>
+        <p:txBody>
+          <a:bodyPr wrap="none" lIns="9144" rIns="9144" tIns="9144" bIns="9144" anchor="t">
+            <a:spAutoFit/>
+          </a:bodyPr>
+          <a:lstStyle/>
+          <a:p>
+            <a:pPr algn="r">
+              <a:spcAft>
+                <a:spcPts val="0"/>
+              </a:spcAft>
+              <a:defRPr sz="680" b="1">
+                <a:solidFill>
+                  <a:srgbClr val="4F6B00"/>
+                </a:solidFill>
+                <a:latin typeface="Inter"/>
+              </a:defRPr>
+            </a:pPr>
+            <a:r>
+              <a:rPr>
+                <a:latin typeface="Inter"/>
+              </a:rPr>
+              <a:t>Illustrative, Gradient Maintained — demo data, not the client's holdings or managers</a:t>
+            </a:r>
+          </a:p>
+        </p:txBody>
+      </p:sp>
+      <p:sp>
+        <p:nvSpPr>
+          <p:cNvPr id="5" name="TextBox 4"/>
+          <p:cNvSpPr txBox="1"/>
+          <p:nvPr/>
+        </p:nvSpPr>
+        <p:spPr>
+          <a:xfrm>
             <a:off x="640080" y="566928"/>
             <a:ext cx="10058400" cy="530352"/>
           </a:xfrm>
@@ -10646,7 +10898,7 @@
       </p:sp>
       <p:sp>
         <p:nvSpPr>
-          <p:cNvPr id="5" name="Rectangle 4"/>
+          <p:cNvPr id="6" name="Rectangle 5"/>
           <p:cNvSpPr/>
           <p:nvPr/>
         </p:nvSpPr>
@@ -10695,7 +10947,7 @@
       </p:sp>
       <p:sp>
         <p:nvSpPr>
-          <p:cNvPr id="6" name="Rectangle 5"/>
+          <p:cNvPr id="7" name="Rectangle 6"/>
           <p:cNvSpPr/>
           <p:nvPr/>
         </p:nvSpPr>
@@ -10744,7 +10996,7 @@
       </p:sp>
       <p:sp>
         <p:nvSpPr>
-          <p:cNvPr id="7" name="TextBox 6"/>
+          <p:cNvPr id="8" name="TextBox 7"/>
           <p:cNvSpPr txBox="1"/>
           <p:nvPr/>
         </p:nvSpPr>
@@ -10786,7 +11038,7 @@
       </p:sp>
       <p:sp>
         <p:nvSpPr>
-          <p:cNvPr id="8" name="TextBox 7"/>
+          <p:cNvPr id="9" name="TextBox 8"/>
           <p:cNvSpPr txBox="1"/>
           <p:nvPr/>
         </p:nvSpPr>
@@ -10828,7 +11080,7 @@
       </p:sp>
       <p:sp>
         <p:nvSpPr>
-          <p:cNvPr id="9" name="Rectangle 8"/>
+          <p:cNvPr id="10" name="Rectangle 9"/>
           <p:cNvSpPr/>
           <p:nvPr/>
         </p:nvSpPr>
@@ -10877,7 +11129,7 @@
       </p:sp>
       <p:sp>
         <p:nvSpPr>
-          <p:cNvPr id="10" name="Rectangle 9"/>
+          <p:cNvPr id="11" name="Rectangle 10"/>
           <p:cNvSpPr/>
           <p:nvPr/>
         </p:nvSpPr>
@@ -10926,7 +11178,7 @@
       </p:sp>
       <p:sp>
         <p:nvSpPr>
-          <p:cNvPr id="11" name="TextBox 10"/>
+          <p:cNvPr id="12" name="TextBox 11"/>
           <p:cNvSpPr txBox="1"/>
           <p:nvPr/>
         </p:nvSpPr>
@@ -10968,7 +11220,7 @@
       </p:sp>
       <p:sp>
         <p:nvSpPr>
-          <p:cNvPr id="12" name="TextBox 11"/>
+          <p:cNvPr id="13" name="TextBox 12"/>
           <p:cNvSpPr txBox="1"/>
           <p:nvPr/>
         </p:nvSpPr>
@@ -11010,7 +11262,7 @@
       </p:sp>
       <p:sp>
         <p:nvSpPr>
-          <p:cNvPr id="13" name="TextBox 12"/>
+          <p:cNvPr id="14" name="TextBox 13"/>
           <p:cNvSpPr txBox="1"/>
           <p:nvPr/>
         </p:nvSpPr>
@@ -11052,7 +11304,7 @@
       </p:sp>
       <p:sp>
         <p:nvSpPr>
-          <p:cNvPr id="14" name="Rectangle 13"/>
+          <p:cNvPr id="15" name="Rectangle 14"/>
           <p:cNvSpPr/>
           <p:nvPr/>
         </p:nvSpPr>
@@ -11101,7 +11353,7 @@
       </p:sp>
       <p:sp>
         <p:nvSpPr>
-          <p:cNvPr id="15" name="Rectangle 14"/>
+          <p:cNvPr id="16" name="Rectangle 15"/>
           <p:cNvSpPr/>
           <p:nvPr/>
         </p:nvSpPr>
@@ -11150,7 +11402,7 @@
       </p:sp>
       <p:sp>
         <p:nvSpPr>
-          <p:cNvPr id="16" name="TextBox 15"/>
+          <p:cNvPr id="17" name="TextBox 16"/>
           <p:cNvSpPr txBox="1"/>
           <p:nvPr/>
         </p:nvSpPr>
@@ -11192,7 +11444,7 @@
       </p:sp>
       <p:sp>
         <p:nvSpPr>
-          <p:cNvPr id="17" name="TextBox 16"/>
+          <p:cNvPr id="18" name="TextBox 17"/>
           <p:cNvSpPr txBox="1"/>
           <p:nvPr/>
         </p:nvSpPr>
@@ -11234,7 +11486,7 @@
       </p:sp>
       <p:sp>
         <p:nvSpPr>
-          <p:cNvPr id="18" name="TextBox 17"/>
+          <p:cNvPr id="19" name="TextBox 18"/>
           <p:cNvSpPr txBox="1"/>
           <p:nvPr/>
         </p:nvSpPr>
@@ -11276,7 +11528,7 @@
       </p:sp>
       <p:sp>
         <p:nvSpPr>
-          <p:cNvPr id="19" name="Rectangle 18"/>
+          <p:cNvPr id="20" name="Rectangle 19"/>
           <p:cNvSpPr/>
           <p:nvPr/>
         </p:nvSpPr>
@@ -11325,7 +11577,7 @@
       </p:sp>
       <p:sp>
         <p:nvSpPr>
-          <p:cNvPr id="20" name="Rectangle 19"/>
+          <p:cNvPr id="21" name="Rectangle 20"/>
           <p:cNvSpPr/>
           <p:nvPr/>
         </p:nvSpPr>
@@ -11374,7 +11626,7 @@
       </p:sp>
       <p:sp>
         <p:nvSpPr>
-          <p:cNvPr id="21" name="TextBox 20"/>
+          <p:cNvPr id="22" name="TextBox 21"/>
           <p:cNvSpPr txBox="1"/>
           <p:nvPr/>
         </p:nvSpPr>
@@ -11416,7 +11668,7 @@
       </p:sp>
       <p:sp>
         <p:nvSpPr>
-          <p:cNvPr id="22" name="TextBox 21"/>
+          <p:cNvPr id="23" name="TextBox 22"/>
           <p:cNvSpPr txBox="1"/>
           <p:nvPr/>
         </p:nvSpPr>
@@ -11458,7 +11710,7 @@
       </p:sp>
       <p:sp>
         <p:nvSpPr>
-          <p:cNvPr id="23" name="TextBox 22"/>
+          <p:cNvPr id="24" name="TextBox 23"/>
           <p:cNvSpPr txBox="1"/>
           <p:nvPr/>
         </p:nvSpPr>
@@ -11500,7 +11752,7 @@
       </p:sp>
       <p:sp>
         <p:nvSpPr>
-          <p:cNvPr id="24" name="Rectangle 23"/>
+          <p:cNvPr id="25" name="Rectangle 24"/>
           <p:cNvSpPr/>
           <p:nvPr/>
         </p:nvSpPr>
@@ -11549,7 +11801,7 @@
       </p:sp>
       <p:sp>
         <p:nvSpPr>
-          <p:cNvPr id="25" name="Rectangle 24"/>
+          <p:cNvPr id="26" name="Rectangle 25"/>
           <p:cNvSpPr/>
           <p:nvPr/>
         </p:nvSpPr>
@@ -11598,7 +11850,7 @@
       </p:sp>
       <p:sp>
         <p:nvSpPr>
-          <p:cNvPr id="26" name="TextBox 25"/>
+          <p:cNvPr id="27" name="TextBox 26"/>
           <p:cNvSpPr txBox="1"/>
           <p:nvPr/>
         </p:nvSpPr>
@@ -11640,7 +11892,7 @@
       </p:sp>
       <p:sp>
         <p:nvSpPr>
-          <p:cNvPr id="27" name="TextBox 26"/>
+          <p:cNvPr id="28" name="TextBox 27"/>
           <p:cNvSpPr txBox="1"/>
           <p:nvPr/>
         </p:nvSpPr>
@@ -11682,7 +11934,7 @@
       </p:sp>
       <p:sp>
         <p:nvSpPr>
-          <p:cNvPr id="28" name="TextBox 27"/>
+          <p:cNvPr id="29" name="TextBox 28"/>
           <p:cNvSpPr txBox="1"/>
           <p:nvPr/>
         </p:nvSpPr>
@@ -11724,7 +11976,7 @@
       </p:sp>
       <p:sp>
         <p:nvSpPr>
-          <p:cNvPr id="29" name="Rectangle 28"/>
+          <p:cNvPr id="30" name="Rectangle 29"/>
           <p:cNvSpPr/>
           <p:nvPr/>
         </p:nvSpPr>
@@ -11773,7 +12025,7 @@
       </p:sp>
       <p:sp>
         <p:nvSpPr>
-          <p:cNvPr id="30" name="TextBox 29"/>
+          <p:cNvPr id="31" name="TextBox 30"/>
           <p:cNvSpPr txBox="1"/>
           <p:nvPr/>
         </p:nvSpPr>
@@ -11815,7 +12067,7 @@
       </p:sp>
       <p:sp>
         <p:nvSpPr>
-          <p:cNvPr id="31" name="TextBox 30"/>
+          <p:cNvPr id="32" name="TextBox 31"/>
           <p:cNvSpPr txBox="1"/>
           <p:nvPr/>
         </p:nvSpPr>
@@ -11850,14 +12102,14 @@
               <a:rPr>
                 <a:latin typeface="Inter"/>
               </a:rPr>
-              <a:t>TEST DATA — fictional portfolio for rendering tests only · Data as of 2026-06-30</a:t>
+              <a:t>Confidential — Investment Committee · Data as of 2026-06-30</a:t>
             </a:r>
           </a:p>
         </p:txBody>
       </p:sp>
       <p:sp>
         <p:nvSpPr>
-          <p:cNvPr id="32" name="TextBox 31"/>
+          <p:cNvPr id="33" name="TextBox 32"/>
           <p:cNvSpPr txBox="1"/>
           <p:nvPr/>
         </p:nvSpPr>
@@ -11973,7 +12225,7 @@
         <p:spPr>
           <a:xfrm>
             <a:off x="640080" y="329184"/>
-            <a:ext cx="9875520" cy="182880"/>
+            <a:ext cx="5303520" cy="182880"/>
           </a:xfrm>
           <a:prstGeom prst="rect">
             <a:avLst/>
@@ -12014,6 +12266,48 @@
         </p:nvSpPr>
         <p:spPr>
           <a:xfrm>
+            <a:off x="5897880" y="310896"/>
+            <a:ext cx="4800600" cy="256032"/>
+          </a:xfrm>
+          <a:prstGeom prst="rect">
+            <a:avLst/>
+          </a:prstGeom>
+          <a:noFill/>
+        </p:spPr>
+        <p:txBody>
+          <a:bodyPr wrap="none" lIns="9144" rIns="9144" tIns="9144" bIns="9144" anchor="t">
+            <a:spAutoFit/>
+          </a:bodyPr>
+          <a:lstStyle/>
+          <a:p>
+            <a:pPr algn="r">
+              <a:spcAft>
+                <a:spcPts val="0"/>
+              </a:spcAft>
+              <a:defRPr sz="680" b="1">
+                <a:solidFill>
+                  <a:srgbClr val="4F6B00"/>
+                </a:solidFill>
+                <a:latin typeface="Inter"/>
+              </a:defRPr>
+            </a:pPr>
+            <a:r>
+              <a:rPr>
+                <a:latin typeface="Inter"/>
+              </a:rPr>
+              <a:t>Illustrative, Gradient Maintained — demo data, not the client's holdings or managers</a:t>
+            </a:r>
+          </a:p>
+        </p:txBody>
+      </p:sp>
+      <p:sp>
+        <p:nvSpPr>
+          <p:cNvPr id="5" name="TextBox 4"/>
+          <p:cNvSpPr txBox="1"/>
+          <p:nvPr/>
+        </p:nvSpPr>
+        <p:spPr>
+          <a:xfrm>
             <a:off x="640080" y="566928"/>
             <a:ext cx="10058400" cy="530352"/>
           </a:xfrm>
@@ -12050,7 +12344,7 @@
       </p:sp>
       <p:sp>
         <p:nvSpPr>
-          <p:cNvPr id="5" name="Rectangle 4"/>
+          <p:cNvPr id="6" name="Rectangle 5"/>
           <p:cNvSpPr/>
           <p:nvPr/>
         </p:nvSpPr>
@@ -12099,7 +12393,7 @@
       </p:sp>
       <p:sp>
         <p:nvSpPr>
-          <p:cNvPr id="6" name="Rectangle 5"/>
+          <p:cNvPr id="7" name="Rectangle 6"/>
           <p:cNvSpPr/>
           <p:nvPr/>
         </p:nvSpPr>
@@ -12148,7 +12442,7 @@
       </p:sp>
       <p:sp>
         <p:nvSpPr>
-          <p:cNvPr id="7" name="TextBox 6"/>
+          <p:cNvPr id="8" name="TextBox 7"/>
           <p:cNvSpPr txBox="1"/>
           <p:nvPr/>
         </p:nvSpPr>
@@ -12190,7 +12484,7 @@
       </p:sp>
       <p:sp>
         <p:nvSpPr>
-          <p:cNvPr id="8" name="TextBox 7"/>
+          <p:cNvPr id="9" name="TextBox 8"/>
           <p:cNvSpPr txBox="1"/>
           <p:nvPr/>
         </p:nvSpPr>
@@ -12225,14 +12519,14 @@
               <a:rPr>
                 <a:latin typeface="Inter"/>
               </a:rPr>
-              <a:t>MODEL-IMPLIED REAL-ASSETS FACTORS (TEST)</a:t>
+              <a:t>MODEL-IMPLIED REAL-ASSETS FACTORS</a:t>
             </a:r>
           </a:p>
         </p:txBody>
       </p:sp>
       <p:graphicFrame>
         <p:nvGraphicFramePr>
-          <p:cNvPr id="9" name="Chart 8"/>
+          <p:cNvPr id="10" name="Chart 9"/>
           <p:cNvGraphicFramePr>
             <a:graphicFrameLocks noGrp="1"/>
           </p:cNvGraphicFramePr>
@@ -12250,7 +12544,7 @@
       </p:graphicFrame>
       <p:sp>
         <p:nvSpPr>
-          <p:cNvPr id="10" name="Rectangle 9"/>
+          <p:cNvPr id="11" name="Rectangle 10"/>
           <p:cNvSpPr/>
           <p:nvPr/>
         </p:nvSpPr>
@@ -12299,7 +12593,7 @@
       </p:sp>
       <p:sp>
         <p:nvSpPr>
-          <p:cNvPr id="11" name="TextBox 10"/>
+          <p:cNvPr id="12" name="TextBox 11"/>
           <p:cNvSpPr txBox="1"/>
           <p:nvPr/>
         </p:nvSpPr>
@@ -12334,14 +12628,14 @@
               <a:rPr>
                 <a:latin typeface="Inter"/>
               </a:rPr>
-              <a:t>Sources: none cited</a:t>
+              <a:t>Sources: S1</a:t>
             </a:r>
           </a:p>
         </p:txBody>
       </p:sp>
       <p:sp>
         <p:nvSpPr>
-          <p:cNvPr id="12" name="TextBox 11"/>
+          <p:cNvPr id="13" name="TextBox 12"/>
           <p:cNvSpPr txBox="1"/>
           <p:nvPr/>
         </p:nvSpPr>
@@ -12376,14 +12670,14 @@
               <a:rPr>
                 <a:latin typeface="Inter"/>
               </a:rPr>
-              <a:t>TEST DATA — fictional portfolio for rendering tests only · Data as of 2026-06-30</a:t>
+              <a:t>Confidential — Investment Committee · Data as of 2026-06-30</a:t>
             </a:r>
           </a:p>
         </p:txBody>
       </p:sp>
       <p:sp>
         <p:nvSpPr>
-          <p:cNvPr id="13" name="TextBox 12"/>
+          <p:cNvPr id="14" name="TextBox 13"/>
           <p:cNvSpPr txBox="1"/>
           <p:nvPr/>
         </p:nvSpPr>
@@ -12499,7 +12793,7 @@
         <p:spPr>
           <a:xfrm>
             <a:off x="640080" y="329184"/>
-            <a:ext cx="9875520" cy="182880"/>
+            <a:ext cx="5303520" cy="182880"/>
           </a:xfrm>
           <a:prstGeom prst="rect">
             <a:avLst/>
@@ -12540,6 +12834,48 @@
         </p:nvSpPr>
         <p:spPr>
           <a:xfrm>
+            <a:off x="5897880" y="310896"/>
+            <a:ext cx="4800600" cy="256032"/>
+          </a:xfrm>
+          <a:prstGeom prst="rect">
+            <a:avLst/>
+          </a:prstGeom>
+          <a:noFill/>
+        </p:spPr>
+        <p:txBody>
+          <a:bodyPr wrap="none" lIns="9144" rIns="9144" tIns="9144" bIns="9144" anchor="t">
+            <a:spAutoFit/>
+          </a:bodyPr>
+          <a:lstStyle/>
+          <a:p>
+            <a:pPr algn="r">
+              <a:spcAft>
+                <a:spcPts val="0"/>
+              </a:spcAft>
+              <a:defRPr sz="680" b="1">
+                <a:solidFill>
+                  <a:srgbClr val="4F6B00"/>
+                </a:solidFill>
+                <a:latin typeface="Inter"/>
+              </a:defRPr>
+            </a:pPr>
+            <a:r>
+              <a:rPr>
+                <a:latin typeface="Inter"/>
+              </a:rPr>
+              <a:t>Illustrative, Gradient Maintained — demo data, not the client's holdings or managers</a:t>
+            </a:r>
+          </a:p>
+        </p:txBody>
+      </p:sp>
+      <p:sp>
+        <p:nvSpPr>
+          <p:cNvPr id="5" name="TextBox 4"/>
+          <p:cNvSpPr txBox="1"/>
+          <p:nvPr/>
+        </p:nvSpPr>
+        <p:spPr>
+          <a:xfrm>
             <a:off x="640080" y="566928"/>
             <a:ext cx="10058400" cy="530352"/>
           </a:xfrm>
@@ -12576,7 +12912,7 @@
       </p:sp>
       <p:sp>
         <p:nvSpPr>
-          <p:cNvPr id="5" name="Rectangle 4"/>
+          <p:cNvPr id="6" name="Rectangle 5"/>
           <p:cNvSpPr/>
           <p:nvPr/>
         </p:nvSpPr>
@@ -12625,7 +12961,7 @@
       </p:sp>
       <p:sp>
         <p:nvSpPr>
-          <p:cNvPr id="6" name="Rectangle 5"/>
+          <p:cNvPr id="7" name="Rectangle 6"/>
           <p:cNvSpPr/>
           <p:nvPr/>
         </p:nvSpPr>
@@ -12674,7 +13010,7 @@
       </p:sp>
       <p:sp>
         <p:nvSpPr>
-          <p:cNvPr id="7" name="TextBox 6"/>
+          <p:cNvPr id="8" name="TextBox 7"/>
           <p:cNvSpPr txBox="1"/>
           <p:nvPr/>
         </p:nvSpPr>
@@ -12716,7 +13052,7 @@
       </p:sp>
       <p:sp>
         <p:nvSpPr>
-          <p:cNvPr id="8" name="TextBox 7"/>
+          <p:cNvPr id="9" name="TextBox 8"/>
           <p:cNvSpPr txBox="1"/>
           <p:nvPr/>
         </p:nvSpPr>
@@ -12758,7 +13094,7 @@
       </p:sp>
       <p:graphicFrame>
         <p:nvGraphicFramePr>
-          <p:cNvPr id="9" name="Table 8"/>
+          <p:cNvPr id="10" name="Table 9"/>
           <p:cNvGraphicFramePr>
             <a:graphicFrameLocks noGrp="1"/>
           </p:cNvGraphicFramePr>
@@ -13335,7 +13671,7 @@
       </p:graphicFrame>
       <p:sp>
         <p:nvSpPr>
-          <p:cNvPr id="10" name="Rectangle 9"/>
+          <p:cNvPr id="11" name="Rectangle 10"/>
           <p:cNvSpPr/>
           <p:nvPr/>
         </p:nvSpPr>
@@ -13384,7 +13720,7 @@
       </p:sp>
       <p:sp>
         <p:nvSpPr>
-          <p:cNvPr id="11" name="Rectangle 10"/>
+          <p:cNvPr id="12" name="Rectangle 11"/>
           <p:cNvSpPr/>
           <p:nvPr/>
         </p:nvSpPr>
@@ -13433,7 +13769,7 @@
       </p:sp>
       <p:sp>
         <p:nvSpPr>
-          <p:cNvPr id="12" name="TextBox 11"/>
+          <p:cNvPr id="13" name="TextBox 12"/>
           <p:cNvSpPr txBox="1"/>
           <p:nvPr/>
         </p:nvSpPr>
@@ -13475,7 +13811,7 @@
       </p:sp>
       <p:sp>
         <p:nvSpPr>
-          <p:cNvPr id="13" name="TextBox 12"/>
+          <p:cNvPr id="14" name="TextBox 13"/>
           <p:cNvSpPr txBox="1"/>
           <p:nvPr/>
         </p:nvSpPr>
@@ -13517,7 +13853,7 @@
       </p:sp>
       <p:sp>
         <p:nvSpPr>
-          <p:cNvPr id="14" name="TextBox 13"/>
+          <p:cNvPr id="15" name="TextBox 14"/>
           <p:cNvSpPr txBox="1"/>
           <p:nvPr/>
         </p:nvSpPr>
@@ -13559,7 +13895,7 @@
       </p:sp>
       <p:sp>
         <p:nvSpPr>
-          <p:cNvPr id="15" name="Rectangle 14"/>
+          <p:cNvPr id="16" name="Rectangle 15"/>
           <p:cNvSpPr/>
           <p:nvPr/>
         </p:nvSpPr>
@@ -13608,7 +13944,7 @@
       </p:sp>
       <p:sp>
         <p:nvSpPr>
-          <p:cNvPr id="16" name="TextBox 15"/>
+          <p:cNvPr id="17" name="TextBox 16"/>
           <p:cNvSpPr txBox="1"/>
           <p:nvPr/>
         </p:nvSpPr>
@@ -13650,7 +13986,7 @@
       </p:sp>
       <p:sp>
         <p:nvSpPr>
-          <p:cNvPr id="17" name="TextBox 16"/>
+          <p:cNvPr id="18" name="TextBox 17"/>
           <p:cNvSpPr txBox="1"/>
           <p:nvPr/>
         </p:nvSpPr>
@@ -13685,14 +14021,14 @@
               <a:rPr>
                 <a:latin typeface="Inter"/>
               </a:rPr>
-              <a:t>TEST DATA — fictional portfolio for rendering tests only · Data as of 2026-06-30</a:t>
+              <a:t>Confidential — Investment Committee · Data as of 2026-06-30</a:t>
             </a:r>
           </a:p>
         </p:txBody>
       </p:sp>
       <p:sp>
         <p:nvSpPr>
-          <p:cNvPr id="18" name="TextBox 17"/>
+          <p:cNvPr id="19" name="TextBox 18"/>
           <p:cNvSpPr txBox="1"/>
           <p:nvPr/>
         </p:nvSpPr>
@@ -13808,7 +14144,7 @@
         <p:spPr>
           <a:xfrm>
             <a:off x="640080" y="329184"/>
-            <a:ext cx="9875520" cy="182880"/>
+            <a:ext cx="5303520" cy="182880"/>
           </a:xfrm>
           <a:prstGeom prst="rect">
             <a:avLst/>
@@ -13849,6 +14185,48 @@
         </p:nvSpPr>
         <p:spPr>
           <a:xfrm>
+            <a:off x="5897880" y="310896"/>
+            <a:ext cx="4800600" cy="256032"/>
+          </a:xfrm>
+          <a:prstGeom prst="rect">
+            <a:avLst/>
+          </a:prstGeom>
+          <a:noFill/>
+        </p:spPr>
+        <p:txBody>
+          <a:bodyPr wrap="none" lIns="9144" rIns="9144" tIns="9144" bIns="9144" anchor="t">
+            <a:spAutoFit/>
+          </a:bodyPr>
+          <a:lstStyle/>
+          <a:p>
+            <a:pPr algn="r">
+              <a:spcAft>
+                <a:spcPts val="0"/>
+              </a:spcAft>
+              <a:defRPr sz="680" b="1">
+                <a:solidFill>
+                  <a:srgbClr val="4F6B00"/>
+                </a:solidFill>
+                <a:latin typeface="Inter"/>
+              </a:defRPr>
+            </a:pPr>
+            <a:r>
+              <a:rPr>
+                <a:latin typeface="Inter"/>
+              </a:rPr>
+              <a:t>Illustrative, Gradient Maintained — demo data, not the client's holdings or managers</a:t>
+            </a:r>
+          </a:p>
+        </p:txBody>
+      </p:sp>
+      <p:sp>
+        <p:nvSpPr>
+          <p:cNvPr id="5" name="TextBox 4"/>
+          <p:cNvSpPr txBox="1"/>
+          <p:nvPr/>
+        </p:nvSpPr>
+        <p:spPr>
+          <a:xfrm>
             <a:off x="640080" y="566928"/>
             <a:ext cx="10058400" cy="530352"/>
           </a:xfrm>
@@ -13885,7 +14263,7 @@
       </p:sp>
       <p:sp>
         <p:nvSpPr>
-          <p:cNvPr id="5" name="Rectangle 4"/>
+          <p:cNvPr id="6" name="Rectangle 5"/>
           <p:cNvSpPr/>
           <p:nvPr/>
         </p:nvSpPr>
@@ -13934,7 +14312,7 @@
       </p:sp>
       <p:sp>
         <p:nvSpPr>
-          <p:cNvPr id="6" name="Rectangle 5"/>
+          <p:cNvPr id="7" name="Rectangle 6"/>
           <p:cNvSpPr/>
           <p:nvPr/>
         </p:nvSpPr>
@@ -13983,7 +14361,7 @@
       </p:sp>
       <p:sp>
         <p:nvSpPr>
-          <p:cNvPr id="7" name="TextBox 6"/>
+          <p:cNvPr id="8" name="TextBox 7"/>
           <p:cNvSpPr txBox="1"/>
           <p:nvPr/>
         </p:nvSpPr>
@@ -14025,7 +14403,7 @@
       </p:sp>
       <p:sp>
         <p:nvSpPr>
-          <p:cNvPr id="8" name="TextBox 7"/>
+          <p:cNvPr id="9" name="TextBox 8"/>
           <p:cNvSpPr txBox="1"/>
           <p:nvPr/>
         </p:nvSpPr>
@@ -14067,7 +14445,7 @@
       </p:sp>
       <p:graphicFrame>
         <p:nvGraphicFramePr>
-          <p:cNvPr id="9" name="Chart 8"/>
+          <p:cNvPr id="10" name="Chart 9"/>
           <p:cNvGraphicFramePr>
             <a:graphicFrameLocks noGrp="1"/>
           </p:cNvGraphicFramePr>
@@ -14085,7 +14463,7 @@
       </p:graphicFrame>
       <p:sp>
         <p:nvSpPr>
-          <p:cNvPr id="10" name="Rectangle 9"/>
+          <p:cNvPr id="11" name="Rectangle 10"/>
           <p:cNvSpPr/>
           <p:nvPr/>
         </p:nvSpPr>
@@ -14134,7 +14512,7 @@
       </p:sp>
       <p:sp>
         <p:nvSpPr>
-          <p:cNvPr id="11" name="TextBox 10"/>
+          <p:cNvPr id="12" name="TextBox 11"/>
           <p:cNvSpPr txBox="1"/>
           <p:nvPr/>
         </p:nvSpPr>
@@ -14176,7 +14554,7 @@
       </p:sp>
       <p:sp>
         <p:nvSpPr>
-          <p:cNvPr id="12" name="TextBox 11"/>
+          <p:cNvPr id="13" name="TextBox 12"/>
           <p:cNvSpPr txBox="1"/>
           <p:nvPr/>
         </p:nvSpPr>
@@ -14211,14 +14589,14 @@
               <a:rPr>
                 <a:latin typeface="Inter"/>
               </a:rPr>
-              <a:t>TEST DATA — fictional portfolio for rendering tests only · Data as of 2026-06-30</a:t>
+              <a:t>Confidential — Investment Committee · Data as of 2026-06-30</a:t>
             </a:r>
           </a:p>
         </p:txBody>
       </p:sp>
       <p:sp>
         <p:nvSpPr>
-          <p:cNvPr id="13" name="TextBox 12"/>
+          <p:cNvPr id="14" name="TextBox 13"/>
           <p:cNvSpPr txBox="1"/>
           <p:nvPr/>
         </p:nvSpPr>
@@ -14334,7 +14712,7 @@
         <p:spPr>
           <a:xfrm>
             <a:off x="640080" y="329184"/>
-            <a:ext cx="9875520" cy="182880"/>
+            <a:ext cx="5303520" cy="182880"/>
           </a:xfrm>
           <a:prstGeom prst="rect">
             <a:avLst/>
@@ -14375,6 +14753,48 @@
         </p:nvSpPr>
         <p:spPr>
           <a:xfrm>
+            <a:off x="5897880" y="310896"/>
+            <a:ext cx="4800600" cy="256032"/>
+          </a:xfrm>
+          <a:prstGeom prst="rect">
+            <a:avLst/>
+          </a:prstGeom>
+          <a:noFill/>
+        </p:spPr>
+        <p:txBody>
+          <a:bodyPr wrap="none" lIns="9144" rIns="9144" tIns="9144" bIns="9144" anchor="t">
+            <a:spAutoFit/>
+          </a:bodyPr>
+          <a:lstStyle/>
+          <a:p>
+            <a:pPr algn="r">
+              <a:spcAft>
+                <a:spcPts val="0"/>
+              </a:spcAft>
+              <a:defRPr sz="680" b="1">
+                <a:solidFill>
+                  <a:srgbClr val="4F6B00"/>
+                </a:solidFill>
+                <a:latin typeface="Inter"/>
+              </a:defRPr>
+            </a:pPr>
+            <a:r>
+              <a:rPr>
+                <a:latin typeface="Inter"/>
+              </a:rPr>
+              <a:t>Illustrative, Gradient Maintained — demo data, not the client's holdings or managers</a:t>
+            </a:r>
+          </a:p>
+        </p:txBody>
+      </p:sp>
+      <p:sp>
+        <p:nvSpPr>
+          <p:cNvPr id="5" name="TextBox 4"/>
+          <p:cNvSpPr txBox="1"/>
+          <p:nvPr/>
+        </p:nvSpPr>
+        <p:spPr>
+          <a:xfrm>
             <a:off x="640080" y="566928"/>
             <a:ext cx="10058400" cy="530352"/>
           </a:xfrm>
@@ -14411,7 +14831,7 @@
       </p:sp>
       <p:sp>
         <p:nvSpPr>
-          <p:cNvPr id="5" name="Rectangle 4"/>
+          <p:cNvPr id="6" name="Rectangle 5"/>
           <p:cNvSpPr/>
           <p:nvPr/>
         </p:nvSpPr>
@@ -14460,7 +14880,7 @@
       </p:sp>
       <p:sp>
         <p:nvSpPr>
-          <p:cNvPr id="6" name="Rectangle 5"/>
+          <p:cNvPr id="7" name="Rectangle 6"/>
           <p:cNvSpPr/>
           <p:nvPr/>
         </p:nvSpPr>
@@ -14509,7 +14929,7 @@
       </p:sp>
       <p:sp>
         <p:nvSpPr>
-          <p:cNvPr id="7" name="TextBox 6"/>
+          <p:cNvPr id="8" name="TextBox 7"/>
           <p:cNvSpPr txBox="1"/>
           <p:nvPr/>
         </p:nvSpPr>
@@ -14551,7 +14971,7 @@
       </p:sp>
       <p:graphicFrame>
         <p:nvGraphicFramePr>
-          <p:cNvPr id="8" name="Table 7"/>
+          <p:cNvPr id="9" name="Table 8"/>
           <p:cNvGraphicFramePr>
             <a:graphicFrameLocks noGrp="1"/>
           </p:cNvGraphicFramePr>
@@ -14616,7 +15036,7 @@
                         <a:rPr>
                           <a:latin typeface="Inter"/>
                         </a:rPr>
-                        <a:t>2026 Strategic CMA (TEST) [S6]</a:t>
+                        <a:t>2026 Strategic CMA [S6]</a:t>
                       </a:r>
                     </a:p>
                   </a:txBody>
@@ -14857,7 +15277,7 @@
       </p:graphicFrame>
       <p:sp>
         <p:nvSpPr>
-          <p:cNvPr id="9" name="Rectangle 8"/>
+          <p:cNvPr id="10" name="Rectangle 9"/>
           <p:cNvSpPr/>
           <p:nvPr/>
         </p:nvSpPr>
@@ -14906,7 +15326,7 @@
       </p:sp>
       <p:sp>
         <p:nvSpPr>
-          <p:cNvPr id="10" name="TextBox 9"/>
+          <p:cNvPr id="11" name="TextBox 10"/>
           <p:cNvSpPr txBox="1"/>
           <p:nvPr/>
         </p:nvSpPr>
@@ -14948,7 +15368,7 @@
       </p:sp>
       <p:sp>
         <p:nvSpPr>
-          <p:cNvPr id="11" name="TextBox 10"/>
+          <p:cNvPr id="12" name="TextBox 11"/>
           <p:cNvSpPr txBox="1"/>
           <p:nvPr/>
         </p:nvSpPr>
@@ -14983,14 +15403,14 @@
               <a:rPr>
                 <a:latin typeface="Inter"/>
               </a:rPr>
-              <a:t>TEST DATA — fictional portfolio for rendering tests only · Data as of 2026-06-30</a:t>
+              <a:t>Confidential — Investment Committee · Data as of 2026-06-30</a:t>
             </a:r>
           </a:p>
         </p:txBody>
       </p:sp>
       <p:sp>
         <p:nvSpPr>
-          <p:cNvPr id="12" name="TextBox 11"/>
+          <p:cNvPr id="13" name="TextBox 12"/>
           <p:cNvSpPr txBox="1"/>
           <p:nvPr/>
         </p:nvSpPr>
@@ -15105,6 +15525,48 @@
         </p:nvSpPr>
         <p:spPr>
           <a:xfrm>
+            <a:off x="5897880" y="310896"/>
+            <a:ext cx="4800600" cy="256032"/>
+          </a:xfrm>
+          <a:prstGeom prst="rect">
+            <a:avLst/>
+          </a:prstGeom>
+          <a:noFill/>
+        </p:spPr>
+        <p:txBody>
+          <a:bodyPr wrap="none" lIns="9144" rIns="9144" tIns="9144" bIns="9144" anchor="t">
+            <a:spAutoFit/>
+          </a:bodyPr>
+          <a:lstStyle/>
+          <a:p>
+            <a:pPr algn="r">
+              <a:spcAft>
+                <a:spcPts val="0"/>
+              </a:spcAft>
+              <a:defRPr sz="680" b="1">
+                <a:solidFill>
+                  <a:srgbClr val="4F6B00"/>
+                </a:solidFill>
+                <a:latin typeface="Inter"/>
+              </a:defRPr>
+            </a:pPr>
+            <a:r>
+              <a:rPr>
+                <a:latin typeface="Inter"/>
+              </a:rPr>
+              <a:t>Illustrative, Gradient Maintained — demo data, not the client's holdings or managers</a:t>
+            </a:r>
+          </a:p>
+        </p:txBody>
+      </p:sp>
+      <p:sp>
+        <p:nvSpPr>
+          <p:cNvPr id="4" name="TextBox 3"/>
+          <p:cNvSpPr txBox="1"/>
+          <p:nvPr/>
+        </p:nvSpPr>
+        <p:spPr>
+          <a:xfrm>
             <a:off x="640080" y="566928"/>
             <a:ext cx="10058400" cy="530352"/>
           </a:xfrm>
@@ -15141,7 +15603,7 @@
       </p:sp>
       <p:sp>
         <p:nvSpPr>
-          <p:cNvPr id="4" name="Rectangle 3"/>
+          <p:cNvPr id="5" name="Rectangle 4"/>
           <p:cNvSpPr/>
           <p:nvPr/>
         </p:nvSpPr>
@@ -15190,7 +15652,7 @@
       </p:sp>
       <p:sp>
         <p:nvSpPr>
-          <p:cNvPr id="5" name="Rectangle 4"/>
+          <p:cNvPr id="6" name="Rectangle 5"/>
           <p:cNvSpPr/>
           <p:nvPr/>
         </p:nvSpPr>
@@ -15239,7 +15701,7 @@
       </p:sp>
       <p:sp>
         <p:nvSpPr>
-          <p:cNvPr id="6" name="TextBox 5"/>
+          <p:cNvPr id="7" name="TextBox 6"/>
           <p:cNvSpPr txBox="1"/>
           <p:nvPr/>
         </p:nvSpPr>
@@ -15281,7 +15743,7 @@
       </p:sp>
       <p:sp>
         <p:nvSpPr>
-          <p:cNvPr id="7" name="Rectangle 6"/>
+          <p:cNvPr id="8" name="Rectangle 7"/>
           <p:cNvSpPr/>
           <p:nvPr/>
         </p:nvSpPr>
@@ -15330,7 +15792,7 @@
       </p:sp>
       <p:sp>
         <p:nvSpPr>
-          <p:cNvPr id="8" name="Rectangle 7"/>
+          <p:cNvPr id="9" name="Rectangle 8"/>
           <p:cNvSpPr/>
           <p:nvPr/>
         </p:nvSpPr>
@@ -15379,7 +15841,7 @@
       </p:sp>
       <p:sp>
         <p:nvSpPr>
-          <p:cNvPr id="9" name="TextBox 8"/>
+          <p:cNvPr id="10" name="TextBox 9"/>
           <p:cNvSpPr txBox="1"/>
           <p:nvPr/>
         </p:nvSpPr>
@@ -15421,7 +15883,7 @@
       </p:sp>
       <p:sp>
         <p:nvSpPr>
-          <p:cNvPr id="10" name="TextBox 9"/>
+          <p:cNvPr id="11" name="TextBox 10"/>
           <p:cNvSpPr txBox="1"/>
           <p:nvPr/>
         </p:nvSpPr>
@@ -15463,7 +15925,7 @@
       </p:sp>
       <p:sp>
         <p:nvSpPr>
-          <p:cNvPr id="11" name="Rectangle 10"/>
+          <p:cNvPr id="12" name="Rectangle 11"/>
           <p:cNvSpPr/>
           <p:nvPr/>
         </p:nvSpPr>
@@ -15512,7 +15974,7 @@
       </p:sp>
       <p:sp>
         <p:nvSpPr>
-          <p:cNvPr id="12" name="Rectangle 11"/>
+          <p:cNvPr id="13" name="Rectangle 12"/>
           <p:cNvSpPr/>
           <p:nvPr/>
         </p:nvSpPr>
@@ -15561,7 +16023,7 @@
       </p:sp>
       <p:sp>
         <p:nvSpPr>
-          <p:cNvPr id="13" name="TextBox 12"/>
+          <p:cNvPr id="14" name="TextBox 13"/>
           <p:cNvSpPr txBox="1"/>
           <p:nvPr/>
         </p:nvSpPr>
@@ -15603,7 +16065,7 @@
       </p:sp>
       <p:sp>
         <p:nvSpPr>
-          <p:cNvPr id="14" name="TextBox 13"/>
+          <p:cNvPr id="15" name="TextBox 14"/>
           <p:cNvSpPr txBox="1"/>
           <p:nvPr/>
         </p:nvSpPr>
@@ -15645,7 +16107,7 @@
       </p:sp>
       <p:sp>
         <p:nvSpPr>
-          <p:cNvPr id="15" name="TextBox 14"/>
+          <p:cNvPr id="16" name="TextBox 15"/>
           <p:cNvSpPr txBox="1"/>
           <p:nvPr/>
         </p:nvSpPr>
@@ -15687,7 +16149,7 @@
       </p:sp>
       <p:sp>
         <p:nvSpPr>
-          <p:cNvPr id="16" name="Rectangle 15"/>
+          <p:cNvPr id="17" name="Rectangle 16"/>
           <p:cNvSpPr/>
           <p:nvPr/>
         </p:nvSpPr>
@@ -15736,7 +16198,7 @@
       </p:sp>
       <p:sp>
         <p:nvSpPr>
-          <p:cNvPr id="17" name="Rectangle 16"/>
+          <p:cNvPr id="18" name="Rectangle 17"/>
           <p:cNvSpPr/>
           <p:nvPr/>
         </p:nvSpPr>
@@ -15785,7 +16247,7 @@
       </p:sp>
       <p:sp>
         <p:nvSpPr>
-          <p:cNvPr id="18" name="TextBox 17"/>
+          <p:cNvPr id="19" name="TextBox 18"/>
           <p:cNvSpPr txBox="1"/>
           <p:nvPr/>
         </p:nvSpPr>
@@ -15827,7 +16289,7 @@
       </p:sp>
       <p:sp>
         <p:nvSpPr>
-          <p:cNvPr id="19" name="TextBox 18"/>
+          <p:cNvPr id="20" name="TextBox 19"/>
           <p:cNvSpPr txBox="1"/>
           <p:nvPr/>
         </p:nvSpPr>
@@ -15869,7 +16331,7 @@
       </p:sp>
       <p:sp>
         <p:nvSpPr>
-          <p:cNvPr id="20" name="TextBox 19"/>
+          <p:cNvPr id="21" name="TextBox 20"/>
           <p:cNvSpPr txBox="1"/>
           <p:nvPr/>
         </p:nvSpPr>
@@ -15911,7 +16373,7 @@
       </p:sp>
       <p:sp>
         <p:nvSpPr>
-          <p:cNvPr id="21" name="Rectangle 20"/>
+          <p:cNvPr id="22" name="Rectangle 21"/>
           <p:cNvSpPr/>
           <p:nvPr/>
         </p:nvSpPr>
@@ -15960,7 +16422,7 @@
       </p:sp>
       <p:sp>
         <p:nvSpPr>
-          <p:cNvPr id="22" name="Rectangle 21"/>
+          <p:cNvPr id="23" name="Rectangle 22"/>
           <p:cNvSpPr/>
           <p:nvPr/>
         </p:nvSpPr>
@@ -16009,7 +16471,7 @@
       </p:sp>
       <p:sp>
         <p:nvSpPr>
-          <p:cNvPr id="23" name="TextBox 22"/>
+          <p:cNvPr id="24" name="TextBox 23"/>
           <p:cNvSpPr txBox="1"/>
           <p:nvPr/>
         </p:nvSpPr>
@@ -16051,7 +16513,7 @@
       </p:sp>
       <p:sp>
         <p:nvSpPr>
-          <p:cNvPr id="24" name="TextBox 23"/>
+          <p:cNvPr id="25" name="TextBox 24"/>
           <p:cNvSpPr txBox="1"/>
           <p:nvPr/>
         </p:nvSpPr>
@@ -16093,7 +16555,7 @@
       </p:sp>
       <p:sp>
         <p:nvSpPr>
-          <p:cNvPr id="25" name="TextBox 24"/>
+          <p:cNvPr id="26" name="TextBox 25"/>
           <p:cNvSpPr txBox="1"/>
           <p:nvPr/>
         </p:nvSpPr>
@@ -16135,7 +16597,7 @@
       </p:sp>
       <p:sp>
         <p:nvSpPr>
-          <p:cNvPr id="26" name="Rectangle 25"/>
+          <p:cNvPr id="27" name="Rectangle 26"/>
           <p:cNvSpPr/>
           <p:nvPr/>
         </p:nvSpPr>
@@ -16184,7 +16646,7 @@
       </p:sp>
       <p:sp>
         <p:nvSpPr>
-          <p:cNvPr id="27" name="Rectangle 26"/>
+          <p:cNvPr id="28" name="Rectangle 27"/>
           <p:cNvSpPr/>
           <p:nvPr/>
         </p:nvSpPr>
@@ -16233,7 +16695,7 @@
       </p:sp>
       <p:sp>
         <p:nvSpPr>
-          <p:cNvPr id="28" name="TextBox 27"/>
+          <p:cNvPr id="29" name="TextBox 28"/>
           <p:cNvSpPr txBox="1"/>
           <p:nvPr/>
         </p:nvSpPr>
@@ -16275,7 +16737,7 @@
       </p:sp>
       <p:sp>
         <p:nvSpPr>
-          <p:cNvPr id="29" name="TextBox 28"/>
+          <p:cNvPr id="30" name="TextBox 29"/>
           <p:cNvSpPr txBox="1"/>
           <p:nvPr/>
         </p:nvSpPr>
@@ -16317,7 +16779,7 @@
       </p:sp>
       <p:sp>
         <p:nvSpPr>
-          <p:cNvPr id="30" name="TextBox 29"/>
+          <p:cNvPr id="31" name="TextBox 30"/>
           <p:cNvSpPr txBox="1"/>
           <p:nvPr/>
         </p:nvSpPr>
@@ -16359,7 +16821,7 @@
       </p:sp>
       <p:sp>
         <p:nvSpPr>
-          <p:cNvPr id="31" name="Rectangle 30"/>
+          <p:cNvPr id="32" name="Rectangle 31"/>
           <p:cNvSpPr/>
           <p:nvPr/>
         </p:nvSpPr>
@@ -16408,7 +16870,7 @@
       </p:sp>
       <p:sp>
         <p:nvSpPr>
-          <p:cNvPr id="32" name="TextBox 31"/>
+          <p:cNvPr id="33" name="TextBox 32"/>
           <p:cNvSpPr txBox="1"/>
           <p:nvPr/>
         </p:nvSpPr>
@@ -16450,7 +16912,7 @@
       </p:sp>
       <p:sp>
         <p:nvSpPr>
-          <p:cNvPr id="33" name="TextBox 32"/>
+          <p:cNvPr id="34" name="TextBox 33"/>
           <p:cNvSpPr txBox="1"/>
           <p:nvPr/>
         </p:nvSpPr>
@@ -16485,14 +16947,14 @@
               <a:rPr>
                 <a:latin typeface="Inter"/>
               </a:rPr>
-              <a:t>TEST DATA — fictional portfolio for rendering tests only · Data as of 2026-06-30</a:t>
+              <a:t>Confidential — Investment Committee · Data as of 2026-06-30</a:t>
             </a:r>
           </a:p>
         </p:txBody>
       </p:sp>
       <p:sp>
         <p:nvSpPr>
-          <p:cNvPr id="34" name="TextBox 33"/>
+          <p:cNvPr id="35" name="TextBox 34"/>
           <p:cNvSpPr txBox="1"/>
           <p:nvPr/>
         </p:nvSpPr>
@@ -16608,7 +17070,7 @@
         <p:spPr>
           <a:xfrm>
             <a:off x="640080" y="329184"/>
-            <a:ext cx="9875520" cy="182880"/>
+            <a:ext cx="5303520" cy="182880"/>
           </a:xfrm>
           <a:prstGeom prst="rect">
             <a:avLst/>
@@ -16649,6 +17111,48 @@
         </p:nvSpPr>
         <p:spPr>
           <a:xfrm>
+            <a:off x="5897880" y="310896"/>
+            <a:ext cx="4800600" cy="256032"/>
+          </a:xfrm>
+          <a:prstGeom prst="rect">
+            <a:avLst/>
+          </a:prstGeom>
+          <a:noFill/>
+        </p:spPr>
+        <p:txBody>
+          <a:bodyPr wrap="none" lIns="9144" rIns="9144" tIns="9144" bIns="9144" anchor="t">
+            <a:spAutoFit/>
+          </a:bodyPr>
+          <a:lstStyle/>
+          <a:p>
+            <a:pPr algn="r">
+              <a:spcAft>
+                <a:spcPts val="0"/>
+              </a:spcAft>
+              <a:defRPr sz="680" b="1">
+                <a:solidFill>
+                  <a:srgbClr val="4F6B00"/>
+                </a:solidFill>
+                <a:latin typeface="Inter"/>
+              </a:defRPr>
+            </a:pPr>
+            <a:r>
+              <a:rPr>
+                <a:latin typeface="Inter"/>
+              </a:rPr>
+              <a:t>Illustrative, Gradient Maintained — demo data, not the client's holdings or managers</a:t>
+            </a:r>
+          </a:p>
+        </p:txBody>
+      </p:sp>
+      <p:sp>
+        <p:nvSpPr>
+          <p:cNvPr id="5" name="TextBox 4"/>
+          <p:cNvSpPr txBox="1"/>
+          <p:nvPr/>
+        </p:nvSpPr>
+        <p:spPr>
+          <a:xfrm>
             <a:off x="640080" y="566928"/>
             <a:ext cx="10058400" cy="530352"/>
           </a:xfrm>
@@ -16685,7 +17189,7 @@
       </p:sp>
       <p:sp>
         <p:nvSpPr>
-          <p:cNvPr id="5" name="Rectangle 4"/>
+          <p:cNvPr id="6" name="Rectangle 5"/>
           <p:cNvSpPr/>
           <p:nvPr/>
         </p:nvSpPr>
@@ -16734,7 +17238,7 @@
       </p:sp>
       <p:sp>
         <p:nvSpPr>
-          <p:cNvPr id="6" name="Rectangle 5"/>
+          <p:cNvPr id="7" name="Rectangle 6"/>
           <p:cNvSpPr/>
           <p:nvPr/>
         </p:nvSpPr>
@@ -16783,7 +17287,7 @@
       </p:sp>
       <p:sp>
         <p:nvSpPr>
-          <p:cNvPr id="7" name="TextBox 6"/>
+          <p:cNvPr id="8" name="TextBox 7"/>
           <p:cNvSpPr txBox="1"/>
           <p:nvPr/>
         </p:nvSpPr>
@@ -16825,7 +17329,7 @@
       </p:sp>
       <p:sp>
         <p:nvSpPr>
-          <p:cNvPr id="8" name="TextBox 7"/>
+          <p:cNvPr id="9" name="TextBox 8"/>
           <p:cNvSpPr txBox="1"/>
           <p:nvPr/>
         </p:nvSpPr>
@@ -16860,14 +17364,14 @@
               <a:rPr>
                 <a:latin typeface="Inter"/>
               </a:rPr>
-              <a:t>REAL-ASSETS FORWARD ASSUMPTIONS (TEST)</a:t>
+              <a:t>REAL-ASSETS FORWARD ASSUMPTIONS</a:t>
             </a:r>
           </a:p>
         </p:txBody>
       </p:sp>
       <p:graphicFrame>
         <p:nvGraphicFramePr>
-          <p:cNvPr id="9" name="Table 8"/>
+          <p:cNvPr id="10" name="Table 9"/>
           <p:cNvGraphicFramePr>
             <a:graphicFrameLocks noGrp="1"/>
           </p:cNvGraphicFramePr>
@@ -17226,7 +17730,7 @@
       </p:graphicFrame>
       <p:sp>
         <p:nvSpPr>
-          <p:cNvPr id="10" name="Rectangle 9"/>
+          <p:cNvPr id="11" name="Rectangle 10"/>
           <p:cNvSpPr/>
           <p:nvPr/>
         </p:nvSpPr>
@@ -17275,7 +17779,7 @@
       </p:sp>
       <p:sp>
         <p:nvSpPr>
-          <p:cNvPr id="11" name="TextBox 10"/>
+          <p:cNvPr id="12" name="TextBox 11"/>
           <p:cNvSpPr txBox="1"/>
           <p:nvPr/>
         </p:nvSpPr>
@@ -17310,14 +17814,14 @@
               <a:rPr>
                 <a:latin typeface="Inter"/>
               </a:rPr>
-              <a:t>Sources: none cited</a:t>
+              <a:t>Sources: S1</a:t>
             </a:r>
           </a:p>
         </p:txBody>
       </p:sp>
       <p:sp>
         <p:nvSpPr>
-          <p:cNvPr id="12" name="TextBox 11"/>
+          <p:cNvPr id="13" name="TextBox 12"/>
           <p:cNvSpPr txBox="1"/>
           <p:nvPr/>
         </p:nvSpPr>
@@ -17352,14 +17856,14 @@
               <a:rPr>
                 <a:latin typeface="Inter"/>
               </a:rPr>
-              <a:t>TEST DATA — fictional portfolio for rendering tests only · Data as of 2026-06-30</a:t>
+              <a:t>Confidential — Investment Committee · Data as of 2026-06-30</a:t>
             </a:r>
           </a:p>
         </p:txBody>
       </p:sp>
       <p:sp>
         <p:nvSpPr>
-          <p:cNvPr id="13" name="TextBox 12"/>
+          <p:cNvPr id="14" name="TextBox 13"/>
           <p:cNvSpPr txBox="1"/>
           <p:nvPr/>
         </p:nvSpPr>
@@ -17475,7 +17979,7 @@
         <p:spPr>
           <a:xfrm>
             <a:off x="640080" y="329184"/>
-            <a:ext cx="9875520" cy="182880"/>
+            <a:ext cx="5303520" cy="182880"/>
           </a:xfrm>
           <a:prstGeom prst="rect">
             <a:avLst/>
@@ -17516,6 +18020,48 @@
         </p:nvSpPr>
         <p:spPr>
           <a:xfrm>
+            <a:off x="5897880" y="310896"/>
+            <a:ext cx="4800600" cy="256032"/>
+          </a:xfrm>
+          <a:prstGeom prst="rect">
+            <a:avLst/>
+          </a:prstGeom>
+          <a:noFill/>
+        </p:spPr>
+        <p:txBody>
+          <a:bodyPr wrap="none" lIns="9144" rIns="9144" tIns="9144" bIns="9144" anchor="t">
+            <a:spAutoFit/>
+          </a:bodyPr>
+          <a:lstStyle/>
+          <a:p>
+            <a:pPr algn="r">
+              <a:spcAft>
+                <a:spcPts val="0"/>
+              </a:spcAft>
+              <a:defRPr sz="680" b="1">
+                <a:solidFill>
+                  <a:srgbClr val="4F6B00"/>
+                </a:solidFill>
+                <a:latin typeface="Inter"/>
+              </a:defRPr>
+            </a:pPr>
+            <a:r>
+              <a:rPr>
+                <a:latin typeface="Inter"/>
+              </a:rPr>
+              <a:t>Illustrative, Gradient Maintained — demo data, not the client's holdings or managers</a:t>
+            </a:r>
+          </a:p>
+        </p:txBody>
+      </p:sp>
+      <p:sp>
+        <p:nvSpPr>
+          <p:cNvPr id="5" name="TextBox 4"/>
+          <p:cNvSpPr txBox="1"/>
+          <p:nvPr/>
+        </p:nvSpPr>
+        <p:spPr>
+          <a:xfrm>
             <a:off x="640080" y="566928"/>
             <a:ext cx="10058400" cy="530352"/>
           </a:xfrm>
@@ -17552,7 +18098,7 @@
       </p:sp>
       <p:sp>
         <p:nvSpPr>
-          <p:cNvPr id="5" name="Rectangle 4"/>
+          <p:cNvPr id="6" name="Rectangle 5"/>
           <p:cNvSpPr/>
           <p:nvPr/>
         </p:nvSpPr>
@@ -17601,7 +18147,7 @@
       </p:sp>
       <p:sp>
         <p:nvSpPr>
-          <p:cNvPr id="6" name="Rectangle 5"/>
+          <p:cNvPr id="7" name="Rectangle 6"/>
           <p:cNvSpPr/>
           <p:nvPr/>
         </p:nvSpPr>
@@ -17650,7 +18196,7 @@
       </p:sp>
       <p:sp>
         <p:nvSpPr>
-          <p:cNvPr id="7" name="TextBox 6"/>
+          <p:cNvPr id="8" name="TextBox 7"/>
           <p:cNvSpPr txBox="1"/>
           <p:nvPr/>
         </p:nvSpPr>
@@ -17692,7 +18238,7 @@
       </p:sp>
       <p:sp>
         <p:nvSpPr>
-          <p:cNvPr id="8" name="Rectangle 7"/>
+          <p:cNvPr id="9" name="Rectangle 8"/>
           <p:cNvSpPr/>
           <p:nvPr/>
         </p:nvSpPr>
@@ -17741,7 +18287,7 @@
       </p:sp>
       <p:sp>
         <p:nvSpPr>
-          <p:cNvPr id="9" name="Rectangle 8"/>
+          <p:cNvPr id="10" name="Rectangle 9"/>
           <p:cNvSpPr/>
           <p:nvPr/>
         </p:nvSpPr>
@@ -17790,7 +18336,7 @@
       </p:sp>
       <p:sp>
         <p:nvSpPr>
-          <p:cNvPr id="10" name="TextBox 9"/>
+          <p:cNvPr id="11" name="TextBox 10"/>
           <p:cNvSpPr txBox="1"/>
           <p:nvPr/>
         </p:nvSpPr>
@@ -17832,7 +18378,7 @@
       </p:sp>
       <p:sp>
         <p:nvSpPr>
-          <p:cNvPr id="11" name="TextBox 10"/>
+          <p:cNvPr id="12" name="TextBox 11"/>
           <p:cNvSpPr txBox="1"/>
           <p:nvPr/>
         </p:nvSpPr>
@@ -17874,7 +18420,7 @@
       </p:sp>
       <p:sp>
         <p:nvSpPr>
-          <p:cNvPr id="12" name="TextBox 11"/>
+          <p:cNvPr id="13" name="TextBox 12"/>
           <p:cNvSpPr txBox="1"/>
           <p:nvPr/>
         </p:nvSpPr>
@@ -17916,7 +18462,7 @@
       </p:sp>
       <p:graphicFrame>
         <p:nvGraphicFramePr>
-          <p:cNvPr id="13" name="Table 12"/>
+          <p:cNvPr id="14" name="Table 13"/>
           <p:cNvGraphicFramePr>
             <a:graphicFrameLocks noGrp="1"/>
           </p:cNvGraphicFramePr>
@@ -18767,7 +19313,7 @@
       </p:graphicFrame>
       <p:sp>
         <p:nvSpPr>
-          <p:cNvPr id="14" name="TextBox 13"/>
+          <p:cNvPr id="15" name="TextBox 14"/>
           <p:cNvSpPr txBox="1"/>
           <p:nvPr/>
         </p:nvSpPr>
@@ -18809,7 +19355,7 @@
       </p:sp>
       <p:sp>
         <p:nvSpPr>
-          <p:cNvPr id="15" name="Rectangle 14"/>
+          <p:cNvPr id="16" name="Rectangle 15"/>
           <p:cNvSpPr/>
           <p:nvPr/>
         </p:nvSpPr>
@@ -18858,7 +19404,7 @@
       </p:sp>
       <p:sp>
         <p:nvSpPr>
-          <p:cNvPr id="16" name="TextBox 15"/>
+          <p:cNvPr id="17" name="TextBox 16"/>
           <p:cNvSpPr txBox="1"/>
           <p:nvPr/>
         </p:nvSpPr>
@@ -18900,7 +19446,7 @@
       </p:sp>
       <p:sp>
         <p:nvSpPr>
-          <p:cNvPr id="17" name="TextBox 16"/>
+          <p:cNvPr id="18" name="TextBox 17"/>
           <p:cNvSpPr txBox="1"/>
           <p:nvPr/>
         </p:nvSpPr>
@@ -18935,14 +19481,14 @@
               <a:rPr>
                 <a:latin typeface="Inter"/>
               </a:rPr>
-              <a:t>TEST DATA — fictional portfolio for rendering tests only · Data as of 2026-06-30</a:t>
+              <a:t>Confidential — Investment Committee · Data as of 2026-06-30</a:t>
             </a:r>
           </a:p>
         </p:txBody>
       </p:sp>
       <p:sp>
         <p:nvSpPr>
-          <p:cNvPr id="18" name="TextBox 17"/>
+          <p:cNvPr id="19" name="TextBox 18"/>
           <p:cNvSpPr txBox="1"/>
           <p:nvPr/>
         </p:nvSpPr>
@@ -19057,6 +19603,48 @@
         </p:nvSpPr>
         <p:spPr>
           <a:xfrm>
+            <a:off x="5897880" y="310896"/>
+            <a:ext cx="4800600" cy="256032"/>
+          </a:xfrm>
+          <a:prstGeom prst="rect">
+            <a:avLst/>
+          </a:prstGeom>
+          <a:noFill/>
+        </p:spPr>
+        <p:txBody>
+          <a:bodyPr wrap="none" lIns="9144" rIns="9144" tIns="9144" bIns="9144" anchor="t">
+            <a:spAutoFit/>
+          </a:bodyPr>
+          <a:lstStyle/>
+          <a:p>
+            <a:pPr algn="r">
+              <a:spcAft>
+                <a:spcPts val="0"/>
+              </a:spcAft>
+              <a:defRPr sz="680" b="1">
+                <a:solidFill>
+                  <a:srgbClr val="4F6B00"/>
+                </a:solidFill>
+                <a:latin typeface="Inter"/>
+              </a:defRPr>
+            </a:pPr>
+            <a:r>
+              <a:rPr>
+                <a:latin typeface="Inter"/>
+              </a:rPr>
+              <a:t>Illustrative, Gradient Maintained — demo data, not the client's holdings or managers</a:t>
+            </a:r>
+          </a:p>
+        </p:txBody>
+      </p:sp>
+      <p:sp>
+        <p:nvSpPr>
+          <p:cNvPr id="4" name="TextBox 3"/>
+          <p:cNvSpPr txBox="1"/>
+          <p:nvPr/>
+        </p:nvSpPr>
+        <p:spPr>
+          <a:xfrm>
             <a:off x="640080" y="566928"/>
             <a:ext cx="10058400" cy="530352"/>
           </a:xfrm>
@@ -19093,7 +19681,7 @@
       </p:sp>
       <p:sp>
         <p:nvSpPr>
-          <p:cNvPr id="4" name="Rectangle 3"/>
+          <p:cNvPr id="5" name="Rectangle 4"/>
           <p:cNvSpPr/>
           <p:nvPr/>
         </p:nvSpPr>
@@ -19142,7 +19730,7 @@
       </p:sp>
       <p:sp>
         <p:nvSpPr>
-          <p:cNvPr id="5" name="Rectangle 4"/>
+          <p:cNvPr id="6" name="Rectangle 5"/>
           <p:cNvSpPr/>
           <p:nvPr/>
         </p:nvSpPr>
@@ -19191,7 +19779,7 @@
       </p:sp>
       <p:sp>
         <p:nvSpPr>
-          <p:cNvPr id="6" name="TextBox 5"/>
+          <p:cNvPr id="7" name="TextBox 6"/>
           <p:cNvSpPr txBox="1"/>
           <p:nvPr/>
         </p:nvSpPr>
@@ -19233,7 +19821,7 @@
       </p:sp>
       <p:sp>
         <p:nvSpPr>
-          <p:cNvPr id="7" name="TextBox 6"/>
+          <p:cNvPr id="8" name="TextBox 7"/>
           <p:cNvSpPr txBox="1"/>
           <p:nvPr/>
         </p:nvSpPr>
@@ -19268,14 +19856,14 @@
               <a:rPr>
                 <a:latin typeface="Inter"/>
               </a:rPr>
-              <a:t>DRAWDOWN REAL-ASSETS CALLS AND DISTRIBUTIONS (TEST)</a:t>
+              <a:t>DRAWDOWN REAL-ASSETS CALLS AND DISTRIBUTIONS</a:t>
             </a:r>
           </a:p>
         </p:txBody>
       </p:sp>
       <p:graphicFrame>
         <p:nvGraphicFramePr>
-          <p:cNvPr id="8" name="Table 7"/>
+          <p:cNvPr id="9" name="Table 8"/>
           <p:cNvGraphicFramePr>
             <a:graphicFrameLocks noGrp="1"/>
           </p:cNvGraphicFramePr>
@@ -19634,7 +20222,7 @@
       </p:graphicFrame>
       <p:sp>
         <p:nvSpPr>
-          <p:cNvPr id="9" name="Rectangle 8"/>
+          <p:cNvPr id="10" name="Rectangle 9"/>
           <p:cNvSpPr/>
           <p:nvPr/>
         </p:nvSpPr>
@@ -19683,7 +20271,7 @@
       </p:sp>
       <p:sp>
         <p:nvSpPr>
-          <p:cNvPr id="10" name="TextBox 9"/>
+          <p:cNvPr id="11" name="TextBox 10"/>
           <p:cNvSpPr txBox="1"/>
           <p:nvPr/>
         </p:nvSpPr>
@@ -19718,14 +20306,14 @@
               <a:rPr>
                 <a:latin typeface="Inter"/>
               </a:rPr>
-              <a:t>Sources: none cited</a:t>
+              <a:t>Sources: S1</a:t>
             </a:r>
           </a:p>
         </p:txBody>
       </p:sp>
       <p:sp>
         <p:nvSpPr>
-          <p:cNvPr id="11" name="TextBox 10"/>
+          <p:cNvPr id="12" name="TextBox 11"/>
           <p:cNvSpPr txBox="1"/>
           <p:nvPr/>
         </p:nvSpPr>
@@ -19760,14 +20348,14 @@
               <a:rPr>
                 <a:latin typeface="Inter"/>
               </a:rPr>
-              <a:t>TEST DATA — fictional portfolio for rendering tests only · Data as of 2026-06-30</a:t>
+              <a:t>Confidential — Investment Committee · Data as of 2026-06-30</a:t>
             </a:r>
           </a:p>
         </p:txBody>
       </p:sp>
       <p:sp>
         <p:nvSpPr>
-          <p:cNvPr id="12" name="TextBox 11"/>
+          <p:cNvPr id="13" name="TextBox 12"/>
           <p:cNvSpPr txBox="1"/>
           <p:nvPr/>
         </p:nvSpPr>
@@ -19882,6 +20470,48 @@
         </p:nvSpPr>
         <p:spPr>
           <a:xfrm>
+            <a:off x="5897880" y="310896"/>
+            <a:ext cx="4800600" cy="256032"/>
+          </a:xfrm>
+          <a:prstGeom prst="rect">
+            <a:avLst/>
+          </a:prstGeom>
+          <a:noFill/>
+        </p:spPr>
+        <p:txBody>
+          <a:bodyPr wrap="none" lIns="9144" rIns="9144" tIns="9144" bIns="9144" anchor="t">
+            <a:spAutoFit/>
+          </a:bodyPr>
+          <a:lstStyle/>
+          <a:p>
+            <a:pPr algn="r">
+              <a:spcAft>
+                <a:spcPts val="0"/>
+              </a:spcAft>
+              <a:defRPr sz="680" b="1">
+                <a:solidFill>
+                  <a:srgbClr val="4F6B00"/>
+                </a:solidFill>
+                <a:latin typeface="Inter"/>
+              </a:defRPr>
+            </a:pPr>
+            <a:r>
+              <a:rPr>
+                <a:latin typeface="Inter"/>
+              </a:rPr>
+              <a:t>Illustrative, Gradient Maintained — demo data, not the client's holdings or managers</a:t>
+            </a:r>
+          </a:p>
+        </p:txBody>
+      </p:sp>
+      <p:sp>
+        <p:nvSpPr>
+          <p:cNvPr id="4" name="TextBox 3"/>
+          <p:cNvSpPr txBox="1"/>
+          <p:nvPr/>
+        </p:nvSpPr>
+        <p:spPr>
+          <a:xfrm>
             <a:off x="640080" y="566928"/>
             <a:ext cx="10058400" cy="530352"/>
           </a:xfrm>
@@ -19918,7 +20548,7 @@
       </p:sp>
       <p:sp>
         <p:nvSpPr>
-          <p:cNvPr id="4" name="Rectangle 3"/>
+          <p:cNvPr id="5" name="Rectangle 4"/>
           <p:cNvSpPr/>
           <p:nvPr/>
         </p:nvSpPr>
@@ -19967,7 +20597,7 @@
       </p:sp>
       <p:sp>
         <p:nvSpPr>
-          <p:cNvPr id="5" name="Rectangle 4"/>
+          <p:cNvPr id="6" name="Rectangle 5"/>
           <p:cNvSpPr/>
           <p:nvPr/>
         </p:nvSpPr>
@@ -20016,7 +20646,7 @@
       </p:sp>
       <p:sp>
         <p:nvSpPr>
-          <p:cNvPr id="6" name="TextBox 5"/>
+          <p:cNvPr id="7" name="TextBox 6"/>
           <p:cNvSpPr txBox="1"/>
           <p:nvPr/>
         </p:nvSpPr>
@@ -20058,7 +20688,7 @@
       </p:sp>
       <p:sp>
         <p:nvSpPr>
-          <p:cNvPr id="7" name="TextBox 6"/>
+          <p:cNvPr id="8" name="TextBox 7"/>
           <p:cNvSpPr txBox="1"/>
           <p:nvPr/>
         </p:nvSpPr>
@@ -20100,7 +20730,7 @@
       </p:sp>
       <p:graphicFrame>
         <p:nvGraphicFramePr>
-          <p:cNvPr id="8" name="Table 7"/>
+          <p:cNvPr id="9" name="Table 8"/>
           <p:cNvGraphicFramePr>
             <a:graphicFrameLocks noGrp="1"/>
           </p:cNvGraphicFramePr>
@@ -20951,7 +21581,7 @@
       </p:graphicFrame>
       <p:sp>
         <p:nvSpPr>
-          <p:cNvPr id="9" name="TextBox 8"/>
+          <p:cNvPr id="10" name="TextBox 9"/>
           <p:cNvSpPr txBox="1"/>
           <p:nvPr/>
         </p:nvSpPr>
@@ -20993,7 +21623,7 @@
       </p:sp>
       <p:sp>
         <p:nvSpPr>
-          <p:cNvPr id="10" name="Rectangle 9"/>
+          <p:cNvPr id="11" name="Rectangle 10"/>
           <p:cNvSpPr/>
           <p:nvPr/>
         </p:nvSpPr>
@@ -21042,7 +21672,7 @@
       </p:sp>
       <p:sp>
         <p:nvSpPr>
-          <p:cNvPr id="11" name="TextBox 10"/>
+          <p:cNvPr id="12" name="TextBox 11"/>
           <p:cNvSpPr txBox="1"/>
           <p:nvPr/>
         </p:nvSpPr>
@@ -21084,7 +21714,7 @@
       </p:sp>
       <p:sp>
         <p:nvSpPr>
-          <p:cNvPr id="12" name="TextBox 11"/>
+          <p:cNvPr id="13" name="TextBox 12"/>
           <p:cNvSpPr txBox="1"/>
           <p:nvPr/>
         </p:nvSpPr>
@@ -21119,14 +21749,14 @@
               <a:rPr>
                 <a:latin typeface="Inter"/>
               </a:rPr>
-              <a:t>TEST DATA — fictional portfolio for rendering tests only · Data as of 2026-06-30</a:t>
+              <a:t>Confidential — Investment Committee · Data as of 2026-06-30</a:t>
             </a:r>
           </a:p>
         </p:txBody>
       </p:sp>
       <p:sp>
         <p:nvSpPr>
-          <p:cNvPr id="13" name="TextBox 12"/>
+          <p:cNvPr id="14" name="TextBox 13"/>
           <p:cNvSpPr txBox="1"/>
           <p:nvPr/>
         </p:nvSpPr>
@@ -21241,6 +21871,48 @@
         </p:nvSpPr>
         <p:spPr>
           <a:xfrm>
+            <a:off x="5897880" y="310896"/>
+            <a:ext cx="4800600" cy="256032"/>
+          </a:xfrm>
+          <a:prstGeom prst="rect">
+            <a:avLst/>
+          </a:prstGeom>
+          <a:noFill/>
+        </p:spPr>
+        <p:txBody>
+          <a:bodyPr wrap="none" lIns="9144" rIns="9144" tIns="9144" bIns="9144" anchor="t">
+            <a:spAutoFit/>
+          </a:bodyPr>
+          <a:lstStyle/>
+          <a:p>
+            <a:pPr algn="r">
+              <a:spcAft>
+                <a:spcPts val="0"/>
+              </a:spcAft>
+              <a:defRPr sz="680" b="1">
+                <a:solidFill>
+                  <a:srgbClr val="4F6B00"/>
+                </a:solidFill>
+                <a:latin typeface="Inter"/>
+              </a:defRPr>
+            </a:pPr>
+            <a:r>
+              <a:rPr>
+                <a:latin typeface="Inter"/>
+              </a:rPr>
+              <a:t>Illustrative, Gradient Maintained — demo data, not the client's holdings or managers</a:t>
+            </a:r>
+          </a:p>
+        </p:txBody>
+      </p:sp>
+      <p:sp>
+        <p:nvSpPr>
+          <p:cNvPr id="4" name="TextBox 3"/>
+          <p:cNvSpPr txBox="1"/>
+          <p:nvPr/>
+        </p:nvSpPr>
+        <p:spPr>
+          <a:xfrm>
             <a:off x="640080" y="566928"/>
             <a:ext cx="10058400" cy="530352"/>
           </a:xfrm>
@@ -21277,7 +21949,7 @@
       </p:sp>
       <p:sp>
         <p:nvSpPr>
-          <p:cNvPr id="4" name="Rectangle 3"/>
+          <p:cNvPr id="5" name="Rectangle 4"/>
           <p:cNvSpPr/>
           <p:nvPr/>
         </p:nvSpPr>
@@ -21326,7 +21998,7 @@
       </p:sp>
       <p:sp>
         <p:nvSpPr>
-          <p:cNvPr id="5" name="Rectangle 4"/>
+          <p:cNvPr id="6" name="Rectangle 5"/>
           <p:cNvSpPr/>
           <p:nvPr/>
         </p:nvSpPr>
@@ -21375,7 +22047,7 @@
       </p:sp>
       <p:sp>
         <p:nvSpPr>
-          <p:cNvPr id="6" name="TextBox 5"/>
+          <p:cNvPr id="7" name="TextBox 6"/>
           <p:cNvSpPr txBox="1"/>
           <p:nvPr/>
         </p:nvSpPr>
@@ -21417,7 +22089,7 @@
       </p:sp>
       <p:graphicFrame>
         <p:nvGraphicFramePr>
-          <p:cNvPr id="7" name="Table 6"/>
+          <p:cNvPr id="8" name="Table 7"/>
           <p:cNvGraphicFramePr>
             <a:graphicFrameLocks noGrp="1"/>
           </p:cNvGraphicFramePr>
@@ -21723,7 +22395,7 @@
       </p:graphicFrame>
       <p:sp>
         <p:nvSpPr>
-          <p:cNvPr id="8" name="Rectangle 7"/>
+          <p:cNvPr id="9" name="Rectangle 8"/>
           <p:cNvSpPr/>
           <p:nvPr/>
         </p:nvSpPr>
@@ -21772,7 +22444,7 @@
       </p:sp>
       <p:sp>
         <p:nvSpPr>
-          <p:cNvPr id="9" name="TextBox 8"/>
+          <p:cNvPr id="10" name="TextBox 9"/>
           <p:cNvSpPr txBox="1"/>
           <p:nvPr/>
         </p:nvSpPr>
@@ -21807,14 +22479,14 @@
               <a:rPr>
                 <a:latin typeface="Inter"/>
               </a:rPr>
-              <a:t>Sources: S3 · S4</a:t>
+              <a:t>Sources: S1 · S3 · S4</a:t>
             </a:r>
           </a:p>
         </p:txBody>
       </p:sp>
       <p:sp>
         <p:nvSpPr>
-          <p:cNvPr id="10" name="TextBox 9"/>
+          <p:cNvPr id="11" name="TextBox 10"/>
           <p:cNvSpPr txBox="1"/>
           <p:nvPr/>
         </p:nvSpPr>
@@ -21849,14 +22521,14 @@
               <a:rPr>
                 <a:latin typeface="Inter"/>
               </a:rPr>
-              <a:t>TEST DATA — fictional portfolio for rendering tests only · Data as of 2026-06-30</a:t>
+              <a:t>Confidential — Investment Committee · Data as of 2026-06-30</a:t>
             </a:r>
           </a:p>
         </p:txBody>
       </p:sp>
       <p:sp>
         <p:nvSpPr>
-          <p:cNvPr id="11" name="TextBox 10"/>
+          <p:cNvPr id="12" name="TextBox 11"/>
           <p:cNvSpPr txBox="1"/>
           <p:nvPr/>
         </p:nvSpPr>
@@ -21971,6 +22643,48 @@
         </p:nvSpPr>
         <p:spPr>
           <a:xfrm>
+            <a:off x="5897880" y="310896"/>
+            <a:ext cx="4800600" cy="256032"/>
+          </a:xfrm>
+          <a:prstGeom prst="rect">
+            <a:avLst/>
+          </a:prstGeom>
+          <a:noFill/>
+        </p:spPr>
+        <p:txBody>
+          <a:bodyPr wrap="none" lIns="9144" rIns="9144" tIns="9144" bIns="9144" anchor="t">
+            <a:spAutoFit/>
+          </a:bodyPr>
+          <a:lstStyle/>
+          <a:p>
+            <a:pPr algn="r">
+              <a:spcAft>
+                <a:spcPts val="0"/>
+              </a:spcAft>
+              <a:defRPr sz="680" b="1">
+                <a:solidFill>
+                  <a:srgbClr val="4F6B00"/>
+                </a:solidFill>
+                <a:latin typeface="Inter"/>
+              </a:defRPr>
+            </a:pPr>
+            <a:r>
+              <a:rPr>
+                <a:latin typeface="Inter"/>
+              </a:rPr>
+              <a:t>Illustrative, Gradient Maintained — demo data, not the client's holdings or managers</a:t>
+            </a:r>
+          </a:p>
+        </p:txBody>
+      </p:sp>
+      <p:sp>
+        <p:nvSpPr>
+          <p:cNvPr id="4" name="TextBox 3"/>
+          <p:cNvSpPr txBox="1"/>
+          <p:nvPr/>
+        </p:nvSpPr>
+        <p:spPr>
+          <a:xfrm>
             <a:off x="640080" y="566928"/>
             <a:ext cx="10058400" cy="530352"/>
           </a:xfrm>
@@ -22007,7 +22721,7 @@
       </p:sp>
       <p:sp>
         <p:nvSpPr>
-          <p:cNvPr id="4" name="Rectangle 3"/>
+          <p:cNvPr id="5" name="Rectangle 4"/>
           <p:cNvSpPr/>
           <p:nvPr/>
         </p:nvSpPr>
@@ -22056,7 +22770,7 @@
       </p:sp>
       <p:sp>
         <p:nvSpPr>
-          <p:cNvPr id="5" name="Rectangle 4"/>
+          <p:cNvPr id="6" name="Rectangle 5"/>
           <p:cNvSpPr/>
           <p:nvPr/>
         </p:nvSpPr>
@@ -22105,7 +22819,7 @@
       </p:sp>
       <p:sp>
         <p:nvSpPr>
-          <p:cNvPr id="6" name="TextBox 5"/>
+          <p:cNvPr id="7" name="TextBox 6"/>
           <p:cNvSpPr txBox="1"/>
           <p:nvPr/>
         </p:nvSpPr>
@@ -22147,7 +22861,7 @@
       </p:sp>
       <p:sp>
         <p:nvSpPr>
-          <p:cNvPr id="7" name="TextBox 6"/>
+          <p:cNvPr id="8" name="TextBox 7"/>
           <p:cNvSpPr txBox="1"/>
           <p:nvPr/>
         </p:nvSpPr>
@@ -22189,7 +22903,7 @@
       </p:sp>
       <p:graphicFrame>
         <p:nvGraphicFramePr>
-          <p:cNvPr id="8" name="Table 7"/>
+          <p:cNvPr id="9" name="Table 8"/>
           <p:cNvGraphicFramePr>
             <a:graphicFrameLocks noGrp="1"/>
           </p:cNvGraphicFramePr>
@@ -22395,7 +23109,7 @@
                         <a:rPr>
                           <a:latin typeface="Inter"/>
                         </a:rPr>
-                        <a:t>Example Real Estate Manager (TEST)</a:t>
+                        <a:t>Example Real Estate Manager</a:t>
                       </a:r>
                     </a:p>
                   </a:txBody>
@@ -22559,7 +23273,7 @@
                         <a:rPr>
                           <a:latin typeface="Inter"/>
                         </a:rPr>
-                        <a:t>Example Infrastructure Manager (TEST)</a:t>
+                        <a:t>Example Infrastructure Manager</a:t>
                       </a:r>
                     </a:p>
                   </a:txBody>
@@ -22723,7 +23437,7 @@
                         <a:rPr>
                           <a:latin typeface="Inter"/>
                         </a:rPr>
-                        <a:t>Proposed Natural Resources Manager (TEST)</a:t>
+                        <a:t>Proposed Natural Resources Manager</a:t>
                       </a:r>
                     </a:p>
                   </a:txBody>
@@ -22875,7 +23589,7 @@
       </p:graphicFrame>
       <p:sp>
         <p:nvSpPr>
-          <p:cNvPr id="9" name="Rectangle 8"/>
+          <p:cNvPr id="10" name="Rectangle 9"/>
           <p:cNvSpPr/>
           <p:nvPr/>
         </p:nvSpPr>
@@ -22924,7 +23638,7 @@
       </p:sp>
       <p:sp>
         <p:nvSpPr>
-          <p:cNvPr id="10" name="Rectangle 9"/>
+          <p:cNvPr id="11" name="Rectangle 10"/>
           <p:cNvSpPr/>
           <p:nvPr/>
         </p:nvSpPr>
@@ -22973,7 +23687,7 @@
       </p:sp>
       <p:sp>
         <p:nvSpPr>
-          <p:cNvPr id="11" name="TextBox 10"/>
+          <p:cNvPr id="12" name="TextBox 11"/>
           <p:cNvSpPr txBox="1"/>
           <p:nvPr/>
         </p:nvSpPr>
@@ -23015,7 +23729,7 @@
       </p:sp>
       <p:sp>
         <p:nvSpPr>
-          <p:cNvPr id="12" name="TextBox 11"/>
+          <p:cNvPr id="13" name="TextBox 12"/>
           <p:cNvSpPr txBox="1"/>
           <p:nvPr/>
         </p:nvSpPr>
@@ -23057,7 +23771,7 @@
       </p:sp>
       <p:sp>
         <p:nvSpPr>
-          <p:cNvPr id="13" name="Rectangle 12"/>
+          <p:cNvPr id="14" name="Rectangle 13"/>
           <p:cNvSpPr/>
           <p:nvPr/>
         </p:nvSpPr>
@@ -23106,7 +23820,7 @@
       </p:sp>
       <p:sp>
         <p:nvSpPr>
-          <p:cNvPr id="14" name="TextBox 13"/>
+          <p:cNvPr id="15" name="TextBox 14"/>
           <p:cNvSpPr txBox="1"/>
           <p:nvPr/>
         </p:nvSpPr>
@@ -23148,7 +23862,7 @@
       </p:sp>
       <p:sp>
         <p:nvSpPr>
-          <p:cNvPr id="15" name="TextBox 14"/>
+          <p:cNvPr id="16" name="TextBox 15"/>
           <p:cNvSpPr txBox="1"/>
           <p:nvPr/>
         </p:nvSpPr>
@@ -23183,14 +23897,14 @@
               <a:rPr>
                 <a:latin typeface="Inter"/>
               </a:rPr>
-              <a:t>TEST DATA — fictional portfolio for rendering tests only · Data as of 2026-06-30</a:t>
+              <a:t>Confidential — Investment Committee · Data as of 2026-06-30</a:t>
             </a:r>
           </a:p>
         </p:txBody>
       </p:sp>
       <p:sp>
         <p:nvSpPr>
-          <p:cNvPr id="16" name="TextBox 15"/>
+          <p:cNvPr id="17" name="TextBox 16"/>
           <p:cNvSpPr txBox="1"/>
           <p:nvPr/>
         </p:nvSpPr>
@@ -23305,6 +24019,48 @@
         </p:nvSpPr>
         <p:spPr>
           <a:xfrm>
+            <a:off x="5897880" y="310896"/>
+            <a:ext cx="4800600" cy="256032"/>
+          </a:xfrm>
+          <a:prstGeom prst="rect">
+            <a:avLst/>
+          </a:prstGeom>
+          <a:noFill/>
+        </p:spPr>
+        <p:txBody>
+          <a:bodyPr wrap="none" lIns="9144" rIns="9144" tIns="9144" bIns="9144" anchor="t">
+            <a:spAutoFit/>
+          </a:bodyPr>
+          <a:lstStyle/>
+          <a:p>
+            <a:pPr algn="r">
+              <a:spcAft>
+                <a:spcPts val="0"/>
+              </a:spcAft>
+              <a:defRPr sz="680" b="1">
+                <a:solidFill>
+                  <a:srgbClr val="4F6B00"/>
+                </a:solidFill>
+                <a:latin typeface="Inter"/>
+              </a:defRPr>
+            </a:pPr>
+            <a:r>
+              <a:rPr>
+                <a:latin typeface="Inter"/>
+              </a:rPr>
+              <a:t>Illustrative, Gradient Maintained — demo data, not the client's holdings or managers</a:t>
+            </a:r>
+          </a:p>
+        </p:txBody>
+      </p:sp>
+      <p:sp>
+        <p:nvSpPr>
+          <p:cNvPr id="4" name="TextBox 3"/>
+          <p:cNvSpPr txBox="1"/>
+          <p:nvPr/>
+        </p:nvSpPr>
+        <p:spPr>
+          <a:xfrm>
             <a:off x="640080" y="566928"/>
             <a:ext cx="10058400" cy="530352"/>
           </a:xfrm>
@@ -23341,7 +24097,7 @@
       </p:sp>
       <p:sp>
         <p:nvSpPr>
-          <p:cNvPr id="4" name="Rectangle 3"/>
+          <p:cNvPr id="5" name="Rectangle 4"/>
           <p:cNvSpPr/>
           <p:nvPr/>
         </p:nvSpPr>
@@ -23390,7 +24146,7 @@
       </p:sp>
       <p:sp>
         <p:nvSpPr>
-          <p:cNvPr id="5" name="Rectangle 4"/>
+          <p:cNvPr id="6" name="Rectangle 5"/>
           <p:cNvSpPr/>
           <p:nvPr/>
         </p:nvSpPr>
@@ -23439,7 +24195,7 @@
       </p:sp>
       <p:sp>
         <p:nvSpPr>
-          <p:cNvPr id="6" name="TextBox 5"/>
+          <p:cNvPr id="7" name="TextBox 6"/>
           <p:cNvSpPr txBox="1"/>
           <p:nvPr/>
         </p:nvSpPr>
@@ -23481,7 +24237,7 @@
       </p:sp>
       <p:sp>
         <p:nvSpPr>
-          <p:cNvPr id="7" name="TextBox 6"/>
+          <p:cNvPr id="8" name="TextBox 7"/>
           <p:cNvSpPr txBox="1"/>
           <p:nvPr/>
         </p:nvSpPr>
@@ -23523,7 +24279,7 @@
       </p:sp>
       <p:graphicFrame>
         <p:nvGraphicFramePr>
-          <p:cNvPr id="8" name="Chart 7"/>
+          <p:cNvPr id="9" name="Chart 8"/>
           <p:cNvGraphicFramePr>
             <a:graphicFrameLocks noGrp="1"/>
           </p:cNvGraphicFramePr>
@@ -23541,7 +24297,7 @@
       </p:graphicFrame>
       <p:sp>
         <p:nvSpPr>
-          <p:cNvPr id="9" name="Rectangle 8"/>
+          <p:cNvPr id="10" name="Rectangle 9"/>
           <p:cNvSpPr/>
           <p:nvPr/>
         </p:nvSpPr>
@@ -23590,7 +24346,7 @@
       </p:sp>
       <p:sp>
         <p:nvSpPr>
-          <p:cNvPr id="10" name="TextBox 9"/>
+          <p:cNvPr id="11" name="TextBox 10"/>
           <p:cNvSpPr txBox="1"/>
           <p:nvPr/>
         </p:nvSpPr>
@@ -23632,7 +24388,7 @@
       </p:sp>
       <p:sp>
         <p:nvSpPr>
-          <p:cNvPr id="11" name="TextBox 10"/>
+          <p:cNvPr id="12" name="TextBox 11"/>
           <p:cNvSpPr txBox="1"/>
           <p:nvPr/>
         </p:nvSpPr>
@@ -23667,14 +24423,14 @@
               <a:rPr>
                 <a:latin typeface="Inter"/>
               </a:rPr>
-              <a:t>TEST DATA — fictional portfolio for rendering tests only · Data as of 2026-06-30</a:t>
+              <a:t>Confidential — Investment Committee · Data as of 2026-06-30</a:t>
             </a:r>
           </a:p>
         </p:txBody>
       </p:sp>
       <p:sp>
         <p:nvSpPr>
-          <p:cNvPr id="12" name="TextBox 11"/>
+          <p:cNvPr id="13" name="TextBox 12"/>
           <p:cNvSpPr txBox="1"/>
           <p:nvPr/>
         </p:nvSpPr>
@@ -23789,6 +24545,48 @@
         </p:nvSpPr>
         <p:spPr>
           <a:xfrm>
+            <a:off x="5897880" y="310896"/>
+            <a:ext cx="4800600" cy="256032"/>
+          </a:xfrm>
+          <a:prstGeom prst="rect">
+            <a:avLst/>
+          </a:prstGeom>
+          <a:noFill/>
+        </p:spPr>
+        <p:txBody>
+          <a:bodyPr wrap="none" lIns="9144" rIns="9144" tIns="9144" bIns="9144" anchor="t">
+            <a:spAutoFit/>
+          </a:bodyPr>
+          <a:lstStyle/>
+          <a:p>
+            <a:pPr algn="r">
+              <a:spcAft>
+                <a:spcPts val="0"/>
+              </a:spcAft>
+              <a:defRPr sz="680" b="1">
+                <a:solidFill>
+                  <a:srgbClr val="4F6B00"/>
+                </a:solidFill>
+                <a:latin typeface="Inter"/>
+              </a:defRPr>
+            </a:pPr>
+            <a:r>
+              <a:rPr>
+                <a:latin typeface="Inter"/>
+              </a:rPr>
+              <a:t>Illustrative, Gradient Maintained — demo data, not the client's holdings or managers</a:t>
+            </a:r>
+          </a:p>
+        </p:txBody>
+      </p:sp>
+      <p:sp>
+        <p:nvSpPr>
+          <p:cNvPr id="4" name="TextBox 3"/>
+          <p:cNvSpPr txBox="1"/>
+          <p:nvPr/>
+        </p:nvSpPr>
+        <p:spPr>
+          <a:xfrm>
             <a:off x="640080" y="566928"/>
             <a:ext cx="10058400" cy="530352"/>
           </a:xfrm>
@@ -23825,7 +24623,7 @@
       </p:sp>
       <p:sp>
         <p:nvSpPr>
-          <p:cNvPr id="4" name="Rectangle 3"/>
+          <p:cNvPr id="5" name="Rectangle 4"/>
           <p:cNvSpPr/>
           <p:nvPr/>
         </p:nvSpPr>
@@ -23874,7 +24672,7 @@
       </p:sp>
       <p:sp>
         <p:nvSpPr>
-          <p:cNvPr id="5" name="Rectangle 4"/>
+          <p:cNvPr id="6" name="Rectangle 5"/>
           <p:cNvSpPr/>
           <p:nvPr/>
         </p:nvSpPr>
@@ -23923,7 +24721,7 @@
       </p:sp>
       <p:sp>
         <p:nvSpPr>
-          <p:cNvPr id="6" name="TextBox 5"/>
+          <p:cNvPr id="7" name="TextBox 6"/>
           <p:cNvSpPr txBox="1"/>
           <p:nvPr/>
         </p:nvSpPr>
@@ -23965,7 +24763,7 @@
       </p:sp>
       <p:sp>
         <p:nvSpPr>
-          <p:cNvPr id="7" name="TextBox 6"/>
+          <p:cNvPr id="8" name="TextBox 7"/>
           <p:cNvSpPr txBox="1"/>
           <p:nvPr/>
         </p:nvSpPr>
@@ -24007,7 +24805,7 @@
       </p:sp>
       <p:graphicFrame>
         <p:nvGraphicFramePr>
-          <p:cNvPr id="8" name="Table 7"/>
+          <p:cNvPr id="9" name="Table 8"/>
           <p:cNvGraphicFramePr>
             <a:graphicFrameLocks noGrp="1"/>
           </p:cNvGraphicFramePr>
@@ -24584,7 +25382,7 @@
       </p:graphicFrame>
       <p:sp>
         <p:nvSpPr>
-          <p:cNvPr id="9" name="Rectangle 8"/>
+          <p:cNvPr id="10" name="Rectangle 9"/>
           <p:cNvSpPr/>
           <p:nvPr/>
         </p:nvSpPr>
@@ -24633,7 +25431,7 @@
       </p:sp>
       <p:sp>
         <p:nvSpPr>
-          <p:cNvPr id="10" name="Rectangle 9"/>
+          <p:cNvPr id="11" name="Rectangle 10"/>
           <p:cNvSpPr/>
           <p:nvPr/>
         </p:nvSpPr>
@@ -24682,7 +25480,7 @@
       </p:sp>
       <p:sp>
         <p:nvSpPr>
-          <p:cNvPr id="11" name="TextBox 10"/>
+          <p:cNvPr id="12" name="TextBox 11"/>
           <p:cNvSpPr txBox="1"/>
           <p:nvPr/>
         </p:nvSpPr>
@@ -24724,7 +25522,7 @@
       </p:sp>
       <p:sp>
         <p:nvSpPr>
-          <p:cNvPr id="12" name="TextBox 11"/>
+          <p:cNvPr id="13" name="TextBox 12"/>
           <p:cNvSpPr txBox="1"/>
           <p:nvPr/>
         </p:nvSpPr>
@@ -24766,7 +25564,7 @@
       </p:sp>
       <p:sp>
         <p:nvSpPr>
-          <p:cNvPr id="13" name="Rectangle 12"/>
+          <p:cNvPr id="14" name="Rectangle 13"/>
           <p:cNvSpPr/>
           <p:nvPr/>
         </p:nvSpPr>
@@ -24815,7 +25613,7 @@
       </p:sp>
       <p:sp>
         <p:nvSpPr>
-          <p:cNvPr id="14" name="TextBox 13"/>
+          <p:cNvPr id="15" name="TextBox 14"/>
           <p:cNvSpPr txBox="1"/>
           <p:nvPr/>
         </p:nvSpPr>
@@ -24857,7 +25655,7 @@
       </p:sp>
       <p:sp>
         <p:nvSpPr>
-          <p:cNvPr id="15" name="TextBox 14"/>
+          <p:cNvPr id="16" name="TextBox 15"/>
           <p:cNvSpPr txBox="1"/>
           <p:nvPr/>
         </p:nvSpPr>
@@ -24892,14 +25690,14 @@
               <a:rPr>
                 <a:latin typeface="Inter"/>
               </a:rPr>
-              <a:t>TEST DATA — fictional portfolio for rendering tests only · Data as of 2026-06-30</a:t>
+              <a:t>Confidential — Investment Committee · Data as of 2026-06-30</a:t>
             </a:r>
           </a:p>
         </p:txBody>
       </p:sp>
       <p:sp>
         <p:nvSpPr>
-          <p:cNvPr id="16" name="TextBox 15"/>
+          <p:cNvPr id="17" name="TextBox 16"/>
           <p:cNvSpPr txBox="1"/>
           <p:nvPr/>
         </p:nvSpPr>
@@ -25014,6 +25812,48 @@
         </p:nvSpPr>
         <p:spPr>
           <a:xfrm>
+            <a:off x="5897880" y="310896"/>
+            <a:ext cx="4800600" cy="256032"/>
+          </a:xfrm>
+          <a:prstGeom prst="rect">
+            <a:avLst/>
+          </a:prstGeom>
+          <a:noFill/>
+        </p:spPr>
+        <p:txBody>
+          <a:bodyPr wrap="none" lIns="9144" rIns="9144" tIns="9144" bIns="9144" anchor="t">
+            <a:spAutoFit/>
+          </a:bodyPr>
+          <a:lstStyle/>
+          <a:p>
+            <a:pPr algn="r">
+              <a:spcAft>
+                <a:spcPts val="0"/>
+              </a:spcAft>
+              <a:defRPr sz="680" b="1">
+                <a:solidFill>
+                  <a:srgbClr val="4F6B00"/>
+                </a:solidFill>
+                <a:latin typeface="Inter"/>
+              </a:defRPr>
+            </a:pPr>
+            <a:r>
+              <a:rPr>
+                <a:latin typeface="Inter"/>
+              </a:rPr>
+              <a:t>Illustrative, Gradient Maintained — demo data, not the client's holdings or managers</a:t>
+            </a:r>
+          </a:p>
+        </p:txBody>
+      </p:sp>
+      <p:sp>
+        <p:nvSpPr>
+          <p:cNvPr id="4" name="TextBox 3"/>
+          <p:cNvSpPr txBox="1"/>
+          <p:nvPr/>
+        </p:nvSpPr>
+        <p:spPr>
+          <a:xfrm>
             <a:off x="640080" y="566928"/>
             <a:ext cx="10058400" cy="530352"/>
           </a:xfrm>
@@ -25050,7 +25890,7 @@
       </p:sp>
       <p:sp>
         <p:nvSpPr>
-          <p:cNvPr id="4" name="Rectangle 3"/>
+          <p:cNvPr id="5" name="Rectangle 4"/>
           <p:cNvSpPr/>
           <p:nvPr/>
         </p:nvSpPr>
@@ -25099,7 +25939,7 @@
       </p:sp>
       <p:sp>
         <p:nvSpPr>
-          <p:cNvPr id="5" name="Rectangle 4"/>
+          <p:cNvPr id="6" name="Rectangle 5"/>
           <p:cNvSpPr/>
           <p:nvPr/>
         </p:nvSpPr>
@@ -25148,7 +25988,7 @@
       </p:sp>
       <p:sp>
         <p:nvSpPr>
-          <p:cNvPr id="6" name="TextBox 5"/>
+          <p:cNvPr id="7" name="TextBox 6"/>
           <p:cNvSpPr txBox="1"/>
           <p:nvPr/>
         </p:nvSpPr>
@@ -25190,7 +26030,7 @@
       </p:sp>
       <p:sp>
         <p:nvSpPr>
-          <p:cNvPr id="7" name="TextBox 6"/>
+          <p:cNvPr id="8" name="TextBox 7"/>
           <p:cNvSpPr txBox="1"/>
           <p:nvPr/>
         </p:nvSpPr>
@@ -25232,7 +26072,7 @@
       </p:sp>
       <p:graphicFrame>
         <p:nvGraphicFramePr>
-          <p:cNvPr id="8" name="Table 7"/>
+          <p:cNvPr id="9" name="Table 8"/>
           <p:cNvGraphicFramePr>
             <a:graphicFrameLocks noGrp="1"/>
           </p:cNvGraphicFramePr>
@@ -26082,7 +26922,7 @@
       </p:graphicFrame>
       <p:sp>
         <p:nvSpPr>
-          <p:cNvPr id="9" name="TextBox 8"/>
+          <p:cNvPr id="10" name="TextBox 9"/>
           <p:cNvSpPr txBox="1"/>
           <p:nvPr/>
         </p:nvSpPr>
@@ -26124,7 +26964,7 @@
       </p:sp>
       <p:graphicFrame>
         <p:nvGraphicFramePr>
-          <p:cNvPr id="10" name="Table 9"/>
+          <p:cNvPr id="11" name="Table 10"/>
           <p:cNvGraphicFramePr>
             <a:graphicFrameLocks noGrp="1"/>
           </p:cNvGraphicFramePr>
@@ -26482,7 +27322,7 @@
       </p:graphicFrame>
       <p:sp>
         <p:nvSpPr>
-          <p:cNvPr id="11" name="Rectangle 10"/>
+          <p:cNvPr id="12" name="Rectangle 11"/>
           <p:cNvSpPr/>
           <p:nvPr/>
         </p:nvSpPr>
@@ -26531,7 +27371,7 @@
       </p:sp>
       <p:sp>
         <p:nvSpPr>
-          <p:cNvPr id="12" name="TextBox 11"/>
+          <p:cNvPr id="13" name="TextBox 12"/>
           <p:cNvSpPr txBox="1"/>
           <p:nvPr/>
         </p:nvSpPr>
@@ -26573,7 +27413,7 @@
       </p:sp>
       <p:sp>
         <p:nvSpPr>
-          <p:cNvPr id="13" name="TextBox 12"/>
+          <p:cNvPr id="14" name="TextBox 13"/>
           <p:cNvSpPr txBox="1"/>
           <p:nvPr/>
         </p:nvSpPr>
@@ -26608,14 +27448,14 @@
               <a:rPr>
                 <a:latin typeface="Inter"/>
               </a:rPr>
-              <a:t>TEST DATA — fictional portfolio for rendering tests only · Data as of 2026-06-30</a:t>
+              <a:t>Confidential — Investment Committee · Data as of 2026-06-30</a:t>
             </a:r>
           </a:p>
         </p:txBody>
       </p:sp>
       <p:sp>
         <p:nvSpPr>
-          <p:cNvPr id="14" name="TextBox 13"/>
+          <p:cNvPr id="15" name="TextBox 14"/>
           <p:cNvSpPr txBox="1"/>
           <p:nvPr/>
         </p:nvSpPr>
@@ -26730,6 +27570,48 @@
         </p:nvSpPr>
         <p:spPr>
           <a:xfrm>
+            <a:off x="5897880" y="310896"/>
+            <a:ext cx="4800600" cy="256032"/>
+          </a:xfrm>
+          <a:prstGeom prst="rect">
+            <a:avLst/>
+          </a:prstGeom>
+          <a:noFill/>
+        </p:spPr>
+        <p:txBody>
+          <a:bodyPr wrap="none" lIns="9144" rIns="9144" tIns="9144" bIns="9144" anchor="t">
+            <a:spAutoFit/>
+          </a:bodyPr>
+          <a:lstStyle/>
+          <a:p>
+            <a:pPr algn="r">
+              <a:spcAft>
+                <a:spcPts val="0"/>
+              </a:spcAft>
+              <a:defRPr sz="680" b="1">
+                <a:solidFill>
+                  <a:srgbClr val="4F6B00"/>
+                </a:solidFill>
+                <a:latin typeface="Inter"/>
+              </a:defRPr>
+            </a:pPr>
+            <a:r>
+              <a:rPr>
+                <a:latin typeface="Inter"/>
+              </a:rPr>
+              <a:t>Illustrative, Gradient Maintained — demo data, not the client's holdings or managers</a:t>
+            </a:r>
+          </a:p>
+        </p:txBody>
+      </p:sp>
+      <p:sp>
+        <p:nvSpPr>
+          <p:cNvPr id="4" name="TextBox 3"/>
+          <p:cNvSpPr txBox="1"/>
+          <p:nvPr/>
+        </p:nvSpPr>
+        <p:spPr>
+          <a:xfrm>
             <a:off x="640080" y="566928"/>
             <a:ext cx="10058400" cy="530352"/>
           </a:xfrm>
@@ -26766,7 +27648,7 @@
       </p:sp>
       <p:sp>
         <p:nvSpPr>
-          <p:cNvPr id="4" name="Rectangle 3"/>
+          <p:cNvPr id="5" name="Rectangle 4"/>
           <p:cNvSpPr/>
           <p:nvPr/>
         </p:nvSpPr>
@@ -26815,7 +27697,7 @@
       </p:sp>
       <p:sp>
         <p:nvSpPr>
-          <p:cNvPr id="5" name="Rectangle 4"/>
+          <p:cNvPr id="6" name="Rectangle 5"/>
           <p:cNvSpPr/>
           <p:nvPr/>
         </p:nvSpPr>
@@ -26864,7 +27746,7 @@
       </p:sp>
       <p:sp>
         <p:nvSpPr>
-          <p:cNvPr id="6" name="TextBox 5"/>
+          <p:cNvPr id="7" name="TextBox 6"/>
           <p:cNvSpPr txBox="1"/>
           <p:nvPr/>
         </p:nvSpPr>
@@ -26906,7 +27788,7 @@
       </p:sp>
       <p:sp>
         <p:nvSpPr>
-          <p:cNvPr id="7" name="TextBox 6"/>
+          <p:cNvPr id="8" name="TextBox 7"/>
           <p:cNvSpPr txBox="1"/>
           <p:nvPr/>
         </p:nvSpPr>
@@ -26948,7 +27830,7 @@
       </p:sp>
       <p:graphicFrame>
         <p:nvGraphicFramePr>
-          <p:cNvPr id="8" name="Table 7"/>
+          <p:cNvPr id="9" name="Table 8"/>
           <p:cNvGraphicFramePr>
             <a:graphicFrameLocks noGrp="1"/>
           </p:cNvGraphicFramePr>
@@ -27525,7 +28407,7 @@
       </p:graphicFrame>
       <p:sp>
         <p:nvSpPr>
-          <p:cNvPr id="9" name="TextBox 8"/>
+          <p:cNvPr id="10" name="TextBox 9"/>
           <p:cNvSpPr txBox="1"/>
           <p:nvPr/>
         </p:nvSpPr>
@@ -27567,7 +28449,7 @@
       </p:sp>
       <p:graphicFrame>
         <p:nvGraphicFramePr>
-          <p:cNvPr id="10" name="Table 9"/>
+          <p:cNvPr id="11" name="Table 10"/>
           <p:cNvGraphicFramePr>
             <a:graphicFrameLocks noGrp="1"/>
           </p:cNvGraphicFramePr>
@@ -28281,7 +29163,7 @@
       </p:graphicFrame>
       <p:sp>
         <p:nvSpPr>
-          <p:cNvPr id="11" name="Rectangle 10"/>
+          <p:cNvPr id="12" name="Rectangle 11"/>
           <p:cNvSpPr/>
           <p:nvPr/>
         </p:nvSpPr>
@@ -28330,7 +29212,7 @@
       </p:sp>
       <p:sp>
         <p:nvSpPr>
-          <p:cNvPr id="12" name="TextBox 11"/>
+          <p:cNvPr id="13" name="TextBox 12"/>
           <p:cNvSpPr txBox="1"/>
           <p:nvPr/>
         </p:nvSpPr>
@@ -28372,7 +29254,7 @@
       </p:sp>
       <p:sp>
         <p:nvSpPr>
-          <p:cNvPr id="13" name="TextBox 12"/>
+          <p:cNvPr id="14" name="TextBox 13"/>
           <p:cNvSpPr txBox="1"/>
           <p:nvPr/>
         </p:nvSpPr>
@@ -28407,14 +29289,14 @@
               <a:rPr>
                 <a:latin typeface="Inter"/>
               </a:rPr>
-              <a:t>TEST DATA — fictional portfolio for rendering tests only · Data as of 2026-06-30</a:t>
+              <a:t>Confidential — Investment Committee · Data as of 2026-06-30</a:t>
             </a:r>
           </a:p>
         </p:txBody>
       </p:sp>
       <p:sp>
         <p:nvSpPr>
-          <p:cNvPr id="14" name="TextBox 13"/>
+          <p:cNvPr id="15" name="TextBox 14"/>
           <p:cNvSpPr txBox="1"/>
           <p:nvPr/>
         </p:nvSpPr>
@@ -28529,6 +29411,48 @@
         </p:nvSpPr>
         <p:spPr>
           <a:xfrm>
+            <a:off x="5897880" y="310896"/>
+            <a:ext cx="4800600" cy="256032"/>
+          </a:xfrm>
+          <a:prstGeom prst="rect">
+            <a:avLst/>
+          </a:prstGeom>
+          <a:noFill/>
+        </p:spPr>
+        <p:txBody>
+          <a:bodyPr wrap="none" lIns="9144" rIns="9144" tIns="9144" bIns="9144" anchor="t">
+            <a:spAutoFit/>
+          </a:bodyPr>
+          <a:lstStyle/>
+          <a:p>
+            <a:pPr algn="r">
+              <a:spcAft>
+                <a:spcPts val="0"/>
+              </a:spcAft>
+              <a:defRPr sz="680" b="1">
+                <a:solidFill>
+                  <a:srgbClr val="4F6B00"/>
+                </a:solidFill>
+                <a:latin typeface="Inter"/>
+              </a:defRPr>
+            </a:pPr>
+            <a:r>
+              <a:rPr>
+                <a:latin typeface="Inter"/>
+              </a:rPr>
+              <a:t>Illustrative, Gradient Maintained — demo data, not the client's holdings or managers</a:t>
+            </a:r>
+          </a:p>
+        </p:txBody>
+      </p:sp>
+      <p:sp>
+        <p:nvSpPr>
+          <p:cNvPr id="4" name="TextBox 3"/>
+          <p:cNvSpPr txBox="1"/>
+          <p:nvPr/>
+        </p:nvSpPr>
+        <p:spPr>
+          <a:xfrm>
             <a:off x="640080" y="566928"/>
             <a:ext cx="10058400" cy="530352"/>
           </a:xfrm>
@@ -28565,7 +29489,7 @@
       </p:sp>
       <p:sp>
         <p:nvSpPr>
-          <p:cNvPr id="4" name="Rectangle 3"/>
+          <p:cNvPr id="5" name="Rectangle 4"/>
           <p:cNvSpPr/>
           <p:nvPr/>
         </p:nvSpPr>
@@ -28614,7 +29538,7 @@
       </p:sp>
       <p:sp>
         <p:nvSpPr>
-          <p:cNvPr id="5" name="Rectangle 4"/>
+          <p:cNvPr id="6" name="Rectangle 5"/>
           <p:cNvSpPr/>
           <p:nvPr/>
         </p:nvSpPr>
@@ -28663,7 +29587,7 @@
       </p:sp>
       <p:sp>
         <p:nvSpPr>
-          <p:cNvPr id="6" name="TextBox 5"/>
+          <p:cNvPr id="7" name="TextBox 6"/>
           <p:cNvSpPr txBox="1"/>
           <p:nvPr/>
         </p:nvSpPr>
@@ -28705,14 +29629,14 @@
       </p:sp>
       <p:sp>
         <p:nvSpPr>
-          <p:cNvPr id="7" name="Rectangle 6"/>
+          <p:cNvPr id="8" name="Rectangle 7"/>
           <p:cNvSpPr/>
           <p:nvPr/>
         </p:nvSpPr>
         <p:spPr>
           <a:xfrm>
             <a:off x="640080" y="1325880"/>
-            <a:ext cx="10908792" cy="872168"/>
+            <a:ext cx="10908792" cy="877905"/>
           </a:xfrm>
           <a:prstGeom prst="rect">
             <a:avLst/>
@@ -28754,14 +29678,14 @@
       </p:sp>
       <p:sp>
         <p:nvSpPr>
-          <p:cNvPr id="8" name="Rectangle 7"/>
+          <p:cNvPr id="9" name="Rectangle 8"/>
           <p:cNvSpPr/>
           <p:nvPr/>
         </p:nvSpPr>
         <p:spPr>
           <a:xfrm>
             <a:off x="640080" y="1325880"/>
-            <a:ext cx="54864" cy="872168"/>
+            <a:ext cx="54864" cy="877905"/>
           </a:xfrm>
           <a:prstGeom prst="rect">
             <a:avLst/>
@@ -28803,7 +29727,7 @@
       </p:sp>
       <p:sp>
         <p:nvSpPr>
-          <p:cNvPr id="9" name="TextBox 8"/>
+          <p:cNvPr id="10" name="TextBox 9"/>
           <p:cNvSpPr txBox="1"/>
           <p:nvPr/>
         </p:nvSpPr>
@@ -28845,14 +29769,14 @@
       </p:sp>
       <p:sp>
         <p:nvSpPr>
-          <p:cNvPr id="10" name="TextBox 9"/>
+          <p:cNvPr id="11" name="TextBox 10"/>
           <p:cNvSpPr txBox="1"/>
           <p:nvPr/>
         </p:nvSpPr>
         <p:spPr>
           <a:xfrm>
             <a:off x="804671" y="1719072"/>
-            <a:ext cx="10616184" cy="387536"/>
+            <a:ext cx="10616184" cy="393273"/>
           </a:xfrm>
           <a:prstGeom prst="rect">
             <a:avLst/>
@@ -28887,13 +29811,13 @@
       </p:sp>
       <p:sp>
         <p:nvSpPr>
-          <p:cNvPr id="11" name="TextBox 10"/>
+          <p:cNvPr id="12" name="TextBox 11"/>
           <p:cNvSpPr txBox="1"/>
           <p:nvPr/>
         </p:nvSpPr>
         <p:spPr>
           <a:xfrm>
-            <a:off x="640080" y="2307776"/>
+            <a:off x="640080" y="2313513"/>
             <a:ext cx="10908792" cy="201168"/>
           </a:xfrm>
           <a:prstGeom prst="rect">
@@ -28929,15 +29853,15 @@
       </p:sp>
       <p:graphicFrame>
         <p:nvGraphicFramePr>
-          <p:cNvPr id="12" name="Table 11"/>
+          <p:cNvPr id="13" name="Table 12"/>
           <p:cNvGraphicFramePr>
             <a:graphicFrameLocks noGrp="1"/>
           </p:cNvGraphicFramePr>
           <p:nvPr/>
         </p:nvGraphicFramePr>
         <p:xfrm>
-          <a:off x="640080" y="2582096"/>
-          <a:ext cx="10908792" cy="1247128"/>
+          <a:off x="640080" y="2587833"/>
+          <a:ext cx="10908792" cy="1257136"/>
         </p:xfrm>
         <a:graphic>
           <a:graphicData uri="http://schemas.openxmlformats.org/drawingml/2006/table">
@@ -28951,7 +29875,7 @@
                 <a:gridCol w="2965704"/>
                 <a:gridCol w="2965704"/>
               </a:tblGrid>
-              <a:tr h="311782">
+              <a:tr h="314284">
                 <a:tc>
                   <a:txBody>
                     <a:bodyPr/>
@@ -29061,7 +29985,7 @@
                   </a:tcPr>
                 </a:tc>
               </a:tr>
-              <a:tr h="311782">
+              <a:tr h="314284">
                 <a:tc>
                   <a:txBody>
                     <a:bodyPr/>
@@ -29171,7 +30095,7 @@
                   </a:tcPr>
                 </a:tc>
               </a:tr>
-              <a:tr h="311782">
+              <a:tr h="314284">
                 <a:tc>
                   <a:txBody>
                     <a:bodyPr/>
@@ -29281,7 +30205,7 @@
                   </a:tcPr>
                 </a:tc>
               </a:tr>
-              <a:tr h="311782">
+              <a:tr h="314284">
                 <a:tc>
                   <a:txBody>
                     <a:bodyPr/>
@@ -29397,14 +30321,14 @@
       </p:graphicFrame>
       <p:sp>
         <p:nvSpPr>
-          <p:cNvPr id="13" name="Rectangle 12"/>
+          <p:cNvPr id="14" name="Rectangle 13"/>
           <p:cNvSpPr/>
           <p:nvPr/>
         </p:nvSpPr>
         <p:spPr>
           <a:xfrm>
-            <a:off x="640080" y="3938953"/>
-            <a:ext cx="10908792" cy="775260"/>
+            <a:off x="640080" y="3954698"/>
+            <a:ext cx="10908792" cy="780360"/>
           </a:xfrm>
           <a:prstGeom prst="rect">
             <a:avLst/>
@@ -29446,14 +30370,14 @@
       </p:sp>
       <p:sp>
         <p:nvSpPr>
-          <p:cNvPr id="14" name="Rectangle 13"/>
+          <p:cNvPr id="15" name="Rectangle 14"/>
           <p:cNvSpPr/>
           <p:nvPr/>
         </p:nvSpPr>
         <p:spPr>
           <a:xfrm>
-            <a:off x="640080" y="3938953"/>
-            <a:ext cx="54864" cy="775260"/>
+            <a:off x="640080" y="3954698"/>
+            <a:ext cx="54864" cy="780360"/>
           </a:xfrm>
           <a:prstGeom prst="rect">
             <a:avLst/>
@@ -29495,13 +30419,13 @@
       </p:sp>
       <p:sp>
         <p:nvSpPr>
-          <p:cNvPr id="15" name="TextBox 14"/>
+          <p:cNvPr id="16" name="TextBox 15"/>
           <p:cNvSpPr txBox="1"/>
           <p:nvPr/>
         </p:nvSpPr>
         <p:spPr>
           <a:xfrm>
-            <a:off x="804671" y="4048681"/>
+            <a:off x="804671" y="4064426"/>
             <a:ext cx="10616184" cy="228600"/>
           </a:xfrm>
           <a:prstGeom prst="rect">
@@ -29537,14 +30461,14 @@
       </p:sp>
       <p:sp>
         <p:nvSpPr>
-          <p:cNvPr id="16" name="TextBox 15"/>
+          <p:cNvPr id="17" name="TextBox 16"/>
           <p:cNvSpPr txBox="1"/>
           <p:nvPr/>
         </p:nvSpPr>
         <p:spPr>
           <a:xfrm>
-            <a:off x="804671" y="4332145"/>
-            <a:ext cx="10616184" cy="290628"/>
+            <a:off x="804671" y="4347890"/>
+            <a:ext cx="10616184" cy="295728"/>
           </a:xfrm>
           <a:prstGeom prst="rect">
             <a:avLst/>
@@ -29579,14 +30503,14 @@
       </p:sp>
       <p:sp>
         <p:nvSpPr>
-          <p:cNvPr id="17" name="Rectangle 16"/>
+          <p:cNvPr id="18" name="Rectangle 17"/>
           <p:cNvSpPr/>
           <p:nvPr/>
         </p:nvSpPr>
         <p:spPr>
           <a:xfrm>
-            <a:off x="640080" y="4823941"/>
-            <a:ext cx="10908792" cy="1393978"/>
+            <a:off x="640080" y="4844786"/>
+            <a:ext cx="10908792" cy="1373133"/>
           </a:xfrm>
           <a:prstGeom prst="rect">
             <a:avLst/>
@@ -29628,14 +30552,14 @@
       </p:sp>
       <p:sp>
         <p:nvSpPr>
-          <p:cNvPr id="18" name="Rectangle 17"/>
+          <p:cNvPr id="19" name="Rectangle 18"/>
           <p:cNvSpPr/>
           <p:nvPr/>
         </p:nvSpPr>
         <p:spPr>
           <a:xfrm>
-            <a:off x="640080" y="4823941"/>
-            <a:ext cx="54864" cy="1393978"/>
+            <a:off x="640080" y="4844786"/>
+            <a:ext cx="54864" cy="1373133"/>
           </a:xfrm>
           <a:prstGeom prst="rect">
             <a:avLst/>
@@ -29677,13 +30601,13 @@
       </p:sp>
       <p:sp>
         <p:nvSpPr>
-          <p:cNvPr id="19" name="TextBox 18"/>
+          <p:cNvPr id="20" name="TextBox 19"/>
           <p:cNvSpPr txBox="1"/>
           <p:nvPr/>
         </p:nvSpPr>
         <p:spPr>
           <a:xfrm>
-            <a:off x="804671" y="4933669"/>
+            <a:off x="804671" y="4954514"/>
             <a:ext cx="10616184" cy="228600"/>
           </a:xfrm>
           <a:prstGeom prst="rect">
@@ -29719,14 +30643,14 @@
       </p:sp>
       <p:sp>
         <p:nvSpPr>
-          <p:cNvPr id="20" name="TextBox 19"/>
+          <p:cNvPr id="21" name="TextBox 20"/>
           <p:cNvSpPr txBox="1"/>
           <p:nvPr/>
         </p:nvSpPr>
         <p:spPr>
           <a:xfrm>
-            <a:off x="804671" y="5217133"/>
-            <a:ext cx="10616184" cy="909346"/>
+            <a:off x="804671" y="5237978"/>
+            <a:ext cx="10616184" cy="888501"/>
           </a:xfrm>
           <a:prstGeom prst="rect">
             <a:avLst/>
@@ -29754,14 +30678,14 @@
               <a:rPr>
                 <a:latin typeface="Inter"/>
               </a:rPr>
-              <a:t>Observation: The fictional TEST report carries a valuation-lag signal above the clear threshold [S1]. Why it matters: This signal focuses oversight on the report's most decision-relevant condition. Uncertainty: Evidence coverage may exclude newer or more detailed observations. What would change the view: A governed refresh showing a different signal or breached threshold.</a:t>
+              <a:t>Observation: The sample report carries a valuation-lag signal above the clear threshold [S1]. Why it matters: This signal focuses oversight on the report's most decision-relevant condition. Uncertainty: Evidence coverage may exclude newer or more detailed observations. What would change the view: A governed refresh showing a different signal or breached threshold.</a:t>
             </a:r>
           </a:p>
         </p:txBody>
       </p:sp>
       <p:sp>
         <p:nvSpPr>
-          <p:cNvPr id="21" name="Rectangle 20"/>
+          <p:cNvPr id="22" name="Rectangle 21"/>
           <p:cNvSpPr/>
           <p:nvPr/>
         </p:nvSpPr>
@@ -29810,7 +30734,7 @@
       </p:sp>
       <p:sp>
         <p:nvSpPr>
-          <p:cNvPr id="22" name="TextBox 21"/>
+          <p:cNvPr id="23" name="TextBox 22"/>
           <p:cNvSpPr txBox="1"/>
           <p:nvPr/>
         </p:nvSpPr>
@@ -29852,7 +30776,7 @@
       </p:sp>
       <p:sp>
         <p:nvSpPr>
-          <p:cNvPr id="23" name="TextBox 22"/>
+          <p:cNvPr id="24" name="TextBox 23"/>
           <p:cNvSpPr txBox="1"/>
           <p:nvPr/>
         </p:nvSpPr>
@@ -29887,14 +30811,14 @@
               <a:rPr>
                 <a:latin typeface="Inter"/>
               </a:rPr>
-              <a:t>TEST DATA — fictional portfolio for rendering tests only · Data as of 2026-06-30</a:t>
+              <a:t>Confidential — Investment Committee · Data as of 2026-06-30</a:t>
             </a:r>
           </a:p>
         </p:txBody>
       </p:sp>
       <p:sp>
         <p:nvSpPr>
-          <p:cNvPr id="24" name="TextBox 23"/>
+          <p:cNvPr id="25" name="TextBox 24"/>
           <p:cNvSpPr txBox="1"/>
           <p:nvPr/>
         </p:nvSpPr>
@@ -30009,6 +30933,48 @@
         </p:nvSpPr>
         <p:spPr>
           <a:xfrm>
+            <a:off x="5897880" y="310896"/>
+            <a:ext cx="4800600" cy="256032"/>
+          </a:xfrm>
+          <a:prstGeom prst="rect">
+            <a:avLst/>
+          </a:prstGeom>
+          <a:noFill/>
+        </p:spPr>
+        <p:txBody>
+          <a:bodyPr wrap="none" lIns="9144" rIns="9144" tIns="9144" bIns="9144" anchor="t">
+            <a:spAutoFit/>
+          </a:bodyPr>
+          <a:lstStyle/>
+          <a:p>
+            <a:pPr algn="r">
+              <a:spcAft>
+                <a:spcPts val="0"/>
+              </a:spcAft>
+              <a:defRPr sz="680" b="1">
+                <a:solidFill>
+                  <a:srgbClr val="4F6B00"/>
+                </a:solidFill>
+                <a:latin typeface="Inter"/>
+              </a:defRPr>
+            </a:pPr>
+            <a:r>
+              <a:rPr>
+                <a:latin typeface="Inter"/>
+              </a:rPr>
+              <a:t>Illustrative, Gradient Maintained — demo data, not the client's holdings or managers</a:t>
+            </a:r>
+          </a:p>
+        </p:txBody>
+      </p:sp>
+      <p:sp>
+        <p:nvSpPr>
+          <p:cNvPr id="4" name="TextBox 3"/>
+          <p:cNvSpPr txBox="1"/>
+          <p:nvPr/>
+        </p:nvSpPr>
+        <p:spPr>
+          <a:xfrm>
             <a:off x="640080" y="566928"/>
             <a:ext cx="10058400" cy="530352"/>
           </a:xfrm>
@@ -30045,7 +31011,7 @@
       </p:sp>
       <p:sp>
         <p:nvSpPr>
-          <p:cNvPr id="4" name="Rectangle 3"/>
+          <p:cNvPr id="5" name="Rectangle 4"/>
           <p:cNvSpPr/>
           <p:nvPr/>
         </p:nvSpPr>
@@ -30094,7 +31060,7 @@
       </p:sp>
       <p:sp>
         <p:nvSpPr>
-          <p:cNvPr id="5" name="Rectangle 4"/>
+          <p:cNvPr id="6" name="Rectangle 5"/>
           <p:cNvSpPr/>
           <p:nvPr/>
         </p:nvSpPr>
@@ -30143,7 +31109,7 @@
       </p:sp>
       <p:sp>
         <p:nvSpPr>
-          <p:cNvPr id="6" name="TextBox 5"/>
+          <p:cNvPr id="7" name="TextBox 6"/>
           <p:cNvSpPr txBox="1"/>
           <p:nvPr/>
         </p:nvSpPr>
@@ -30185,7 +31151,7 @@
       </p:sp>
       <p:graphicFrame>
         <p:nvGraphicFramePr>
-          <p:cNvPr id="7" name="Table 6"/>
+          <p:cNvPr id="8" name="Table 7"/>
           <p:cNvGraphicFramePr>
             <a:graphicFrameLocks noGrp="1"/>
           </p:cNvGraphicFramePr>
@@ -30206,7 +31172,7 @@
                 <a:gridCol w="4448556"/>
                 <a:gridCol w="4448556"/>
               </a:tblGrid>
-              <a:tr h="611505">
+              <a:tr h="543560">
                 <a:tc>
                   <a:txBody>
                     <a:bodyPr/>
@@ -30289,7 +31255,7 @@
                   </a:tcPr>
                 </a:tc>
               </a:tr>
-              <a:tr h="611505">
+              <a:tr h="543560">
                 <a:tc>
                   <a:txBody>
                     <a:bodyPr/>
@@ -30361,7 +31327,7 @@
                         <a:rPr>
                           <a:latin typeface="Inter"/>
                         </a:rPr>
-                        <a:t>Fictional TEST data [S2]</a:t>
+                        <a:t>Illustrative sample data [S2]</a:t>
                       </a:r>
                     </a:p>
                   </a:txBody>
@@ -30372,7 +31338,7 @@
                   </a:tcPr>
                 </a:tc>
               </a:tr>
-              <a:tr h="611505">
+              <a:tr h="543560">
                 <a:tc>
                   <a:txBody>
                     <a:bodyPr/>
@@ -30455,7 +31421,7 @@
                   </a:tcPr>
                 </a:tc>
               </a:tr>
-              <a:tr h="611505">
+              <a:tr h="543560">
                 <a:tc>
                   <a:txBody>
                     <a:bodyPr/>
@@ -30538,7 +31504,7 @@
                   </a:tcPr>
                 </a:tc>
               </a:tr>
-              <a:tr h="611505">
+              <a:tr h="543560">
                 <a:tc>
                   <a:txBody>
                     <a:bodyPr/>
@@ -30621,7 +31587,7 @@
                   </a:tcPr>
                 </a:tc>
               </a:tr>
-              <a:tr h="611505">
+              <a:tr h="543560">
                 <a:tc>
                   <a:txBody>
                     <a:bodyPr/>
@@ -30704,7 +31670,7 @@
                   </a:tcPr>
                 </a:tc>
               </a:tr>
-              <a:tr h="611505">
+              <a:tr h="543560">
                 <a:tc>
                   <a:txBody>
                     <a:bodyPr/>
@@ -30787,7 +31753,7 @@
                   </a:tcPr>
                 </a:tc>
               </a:tr>
-              <a:tr h="611505">
+              <a:tr h="543560">
                 <a:tc>
                   <a:txBody>
                     <a:bodyPr/>
@@ -30866,6 +31832,89 @@
                   <a:tcPr marL="54864" marR="54864" marT="27432" marB="27432" anchor="ctr">
                     <a:solidFill>
                       <a:srgbClr val="FFFFFF"/>
+                    </a:solidFill>
+                  </a:tcPr>
+                </a:tc>
+              </a:tr>
+              <a:tr h="543560">
+                <a:tc>
+                  <a:txBody>
+                    <a:bodyPr/>
+                    <a:lstStyle/>
+                    <a:p>
+                      <a:pPr>
+                        <a:defRPr sz="800" b="1">
+                          <a:solidFill>
+                            <a:srgbClr val="0D1117"/>
+                          </a:solidFill>
+                          <a:latin typeface="Inter"/>
+                        </a:defRPr>
+                      </a:pPr>
+                      <a:r>
+                        <a:rPr>
+                          <a:latin typeface="Inter"/>
+                        </a:rPr>
+                        <a:t>Peer allocation intelligence</a:t>
+                      </a:r>
+                    </a:p>
+                  </a:txBody>
+                  <a:tcPr marL="54864" marR="54864" marT="27432" marB="27432" anchor="ctr">
+                    <a:solidFill>
+                      <a:srgbClr val="F5F7F9"/>
+                    </a:solidFill>
+                  </a:tcPr>
+                </a:tc>
+                <a:tc>
+                  <a:txBody>
+                    <a:bodyPr/>
+                    <a:lstStyle/>
+                    <a:p>
+                      <a:pPr>
+                        <a:defRPr sz="800" b="1">
+                          <a:solidFill>
+                            <a:srgbClr val="9AA5B1"/>
+                          </a:solidFill>
+                          <a:latin typeface="Inter"/>
+                        </a:defRPr>
+                      </a:pPr>
+                      <a:r>
+                        <a:rPr>
+                          <a:latin typeface="Inter"/>
+                        </a:rPr>
+                        <a:t>● not licensed</a:t>
+                      </a:r>
+                    </a:p>
+                  </a:txBody>
+                  <a:tcPr marL="54864" marR="54864" marT="27432" marB="27432" anchor="ctr">
+                    <a:solidFill>
+                      <a:srgbClr val="F5F7F9"/>
+                    </a:solidFill>
+                  </a:tcPr>
+                </a:tc>
+                <a:tc>
+                  <a:txBody>
+                    <a:bodyPr/>
+                    <a:lstStyle/>
+                    <a:p>
+                      <a:pPr>
+                        <a:defRPr sz="800" b="0">
+                          <a:solidFill>
+                            <a:srgbClr val="0D1117"/>
+                          </a:solidFill>
+                          <a:latin typeface="Inter"/>
+                        </a:defRPr>
+                      </a:pPr>
+                      <a:r>
+                        <a:rPr>
+                          <a:latin typeface="Inter"/>
+                        </a:rPr>
+                        <a:t>Not licensed ? Peer allocation context was skipped because peerIntelligence is not available for this organization. This construction report uses portfolio evidence only. [S1]</a:t>
+                      </a:r>
+                    </a:p>
+                  </a:txBody>
+                  <a:tcPr marL="54864" marR="54864" marT="27432" marB="27432" anchor="ctr">
+                    <a:solidFill>
+                      <a:srgbClr val="F5F7F9"/>
                     </a:solidFill>
                   </a:tcPr>
                 </a:tc>
@@ -30876,7 +31925,7 @@
       </p:graphicFrame>
       <p:sp>
         <p:nvSpPr>
-          <p:cNvPr id="8" name="Rectangle 7"/>
+          <p:cNvPr id="9" name="Rectangle 8"/>
           <p:cNvSpPr/>
           <p:nvPr/>
         </p:nvSpPr>
@@ -30925,7 +31974,7 @@
       </p:sp>
       <p:sp>
         <p:nvSpPr>
-          <p:cNvPr id="9" name="TextBox 8"/>
+          <p:cNvPr id="10" name="TextBox 9"/>
           <p:cNvSpPr txBox="1"/>
           <p:nvPr/>
         </p:nvSpPr>
@@ -30960,14 +32009,14 @@
               <a:rPr>
                 <a:latin typeface="Inter"/>
               </a:rPr>
-              <a:t>Sources: S2 · S3 · S4 · S5 · S6 · S7 · S8</a:t>
+              <a:t>Sources: S1 · S2 · S3 · S4 · S5 · S6 · S7 · S8</a:t>
             </a:r>
           </a:p>
         </p:txBody>
       </p:sp>
       <p:sp>
         <p:nvSpPr>
-          <p:cNvPr id="10" name="TextBox 9"/>
+          <p:cNvPr id="11" name="TextBox 10"/>
           <p:cNvSpPr txBox="1"/>
           <p:nvPr/>
         </p:nvSpPr>
@@ -31002,14 +32051,14 @@
               <a:rPr>
                 <a:latin typeface="Inter"/>
               </a:rPr>
-              <a:t>TEST DATA — fictional portfolio for rendering tests only · Data as of 2026-06-30</a:t>
+              <a:t>Confidential — Investment Committee · Data as of 2026-06-30</a:t>
             </a:r>
           </a:p>
         </p:txBody>
       </p:sp>
       <p:sp>
         <p:nvSpPr>
-          <p:cNvPr id="11" name="TextBox 10"/>
+          <p:cNvPr id="12" name="TextBox 11"/>
           <p:cNvSpPr txBox="1"/>
           <p:nvPr/>
         </p:nvSpPr>
@@ -31124,6 +32173,48 @@
         </p:nvSpPr>
         <p:spPr>
           <a:xfrm>
+            <a:off x="5897880" y="310896"/>
+            <a:ext cx="4800600" cy="256032"/>
+          </a:xfrm>
+          <a:prstGeom prst="rect">
+            <a:avLst/>
+          </a:prstGeom>
+          <a:noFill/>
+        </p:spPr>
+        <p:txBody>
+          <a:bodyPr wrap="none" lIns="9144" rIns="9144" tIns="9144" bIns="9144" anchor="t">
+            <a:spAutoFit/>
+          </a:bodyPr>
+          <a:lstStyle/>
+          <a:p>
+            <a:pPr algn="r">
+              <a:spcAft>
+                <a:spcPts val="0"/>
+              </a:spcAft>
+              <a:defRPr sz="680" b="1">
+                <a:solidFill>
+                  <a:srgbClr val="4F6B00"/>
+                </a:solidFill>
+                <a:latin typeface="Inter"/>
+              </a:defRPr>
+            </a:pPr>
+            <a:r>
+              <a:rPr>
+                <a:latin typeface="Inter"/>
+              </a:rPr>
+              <a:t>Illustrative, Gradient Maintained — demo data, not the client's holdings or managers</a:t>
+            </a:r>
+          </a:p>
+        </p:txBody>
+      </p:sp>
+      <p:sp>
+        <p:nvSpPr>
+          <p:cNvPr id="4" name="TextBox 3"/>
+          <p:cNvSpPr txBox="1"/>
+          <p:nvPr/>
+        </p:nvSpPr>
+        <p:spPr>
+          <a:xfrm>
             <a:off x="640080" y="566928"/>
             <a:ext cx="10058400" cy="530352"/>
           </a:xfrm>
@@ -31153,14 +32244,14 @@
               <a:rPr>
                 <a:latin typeface="Inter"/>
               </a:rPr>
-              <a:t>Appendix A — Sources</a:t>
+              <a:t>Appendix — Sources and methods</a:t>
             </a:r>
           </a:p>
         </p:txBody>
       </p:sp>
       <p:sp>
         <p:nvSpPr>
-          <p:cNvPr id="4" name="Rectangle 3"/>
+          <p:cNvPr id="5" name="Rectangle 4"/>
           <p:cNvSpPr/>
           <p:nvPr/>
         </p:nvSpPr>
@@ -31209,7 +32300,7 @@
       </p:sp>
       <p:sp>
         <p:nvSpPr>
-          <p:cNvPr id="5" name="Rectangle 4"/>
+          <p:cNvPr id="6" name="Rectangle 5"/>
           <p:cNvSpPr/>
           <p:nvPr/>
         </p:nvSpPr>
@@ -31258,7 +32349,7 @@
       </p:sp>
       <p:sp>
         <p:nvSpPr>
-          <p:cNvPr id="6" name="TextBox 5"/>
+          <p:cNvPr id="7" name="TextBox 6"/>
           <p:cNvSpPr txBox="1"/>
           <p:nvPr/>
         </p:nvSpPr>
@@ -31300,7 +32391,7 @@
       </p:sp>
       <p:graphicFrame>
         <p:nvGraphicFramePr>
-          <p:cNvPr id="7" name="Table 6"/>
+          <p:cNvPr id="8" name="Table 7"/>
           <p:cNvGraphicFramePr>
             <a:graphicFrameLocks noGrp="1"/>
           </p:cNvGraphicFramePr>
@@ -31308,7 +32399,7 @@
         </p:nvGraphicFramePr>
         <p:xfrm>
           <a:off x="640080" y="1325880"/>
-          <a:ext cx="10908792" cy="4892040"/>
+          <a:ext cx="10908792" cy="4690872"/>
         </p:xfrm>
         <a:graphic>
           <a:graphicData uri="http://schemas.openxmlformats.org/drawingml/2006/table">
@@ -31318,15 +32409,16 @@
               </a:tblPr>
               <a:tblGrid>
                 <a:gridCol w="2011680"/>
-                <a:gridCol w="1271016"/>
-                <a:gridCol w="1271016"/>
-                <a:gridCol w="1271016"/>
-                <a:gridCol w="1271016"/>
-                <a:gridCol w="1271016"/>
-                <a:gridCol w="1271016"/>
-                <a:gridCol w="1271016"/>
+                <a:gridCol w="1112139"/>
+                <a:gridCol w="1112139"/>
+                <a:gridCol w="1112139"/>
+                <a:gridCol w="1112139"/>
+                <a:gridCol w="1112139"/>
+                <a:gridCol w="1112139"/>
+                <a:gridCol w="1112139"/>
+                <a:gridCol w="1112139"/>
               </a:tblGrid>
-              <a:tr h="543560">
+              <a:tr h="521208">
                 <a:tc>
                   <a:txBody>
                     <a:bodyPr/>
@@ -31398,6 +32490,33 @@
                         <a:rPr>
                           <a:latin typeface="Inter"/>
                         </a:rPr>
+                        <a:t>Basis</a:t>
+                      </a:r>
+                    </a:p>
+                  </a:txBody>
+                  <a:tcPr marL="54864" marR="54864" marT="27432" marB="27432" anchor="ctr">
+                    <a:solidFill>
+                      <a:srgbClr val="0D1117"/>
+                    </a:solidFill>
+                  </a:tcPr>
+                </a:tc>
+                <a:tc>
+                  <a:txBody>
+                    <a:bodyPr/>
+                    <a:lstStyle/>
+                    <a:p>
+                      <a:pPr>
+                        <a:defRPr sz="750" b="1">
+                          <a:solidFill>
+                            <a:srgbClr val="FFFFFF"/>
+                          </a:solidFill>
+                          <a:latin typeface="Inter"/>
+                        </a:defRPr>
+                      </a:pPr>
+                      <a:r>
+                        <a:rPr>
+                          <a:latin typeface="Inter"/>
+                        </a:rPr>
                         <a:t>Tool / view</a:t>
                       </a:r>
                     </a:p>
@@ -31544,7 +32663,7 @@
                   </a:tcPr>
                 </a:tc>
               </a:tr>
-              <a:tr h="543560">
+              <a:tr h="521208">
                 <a:tc>
                   <a:txBody>
                     <a:bodyPr/>
@@ -31616,6 +32735,33 @@
                         <a:rPr>
                           <a:latin typeface="Inter"/>
                         </a:rPr>
+                        <a:t>gradient_tool</a:t>
+                      </a:r>
+                    </a:p>
+                  </a:txBody>
+                  <a:tcPr marL="54864" marR="54864" marT="27432" marB="27432" anchor="ctr">
+                    <a:solidFill>
+                      <a:srgbClr val="FFFFFF"/>
+                    </a:solidFill>
+                  </a:tcPr>
+                </a:tc>
+                <a:tc>
+                  <a:txBody>
+                    <a:bodyPr/>
+                    <a:lstStyle/>
+                    <a:p>
+                      <a:pPr>
+                        <a:defRPr sz="650" b="0">
+                          <a:solidFill>
+                            <a:srgbClr val="0D1117"/>
+                          </a:solidFill>
+                          <a:latin typeface="Inter"/>
+                        </a:defRPr>
+                      </a:pPr>
+                      <a:r>
+                        <a:rPr>
+                          <a:latin typeface="Inter"/>
+                        </a:rPr>
                         <a:t>list_organizations; get_gradient_capabilities</a:t>
                       </a:r>
                     </a:p>
@@ -31697,7 +32843,7 @@
                         <a:rPr>
                           <a:latin typeface="Inter"/>
                         </a:rPr>
-                        <a:t>Fictional TEST data</a:t>
+                        <a:t>Illustrative sample data</a:t>
                       </a:r>
                     </a:p>
                   </a:txBody>
@@ -31751,7 +32897,7 @@
                         <a:rPr>
                           <a:latin typeface="Inter"/>
                         </a:rPr>
-                        <a:t>ra-s1</a:t>
+                        <a:t>sha256:aaaaaaaaaaaaaaaaaaaaaaaaaaaaaaaaaaaaaaaaaaaaaaaaaaaaaaaaaaaaaaaa</a:t>
                       </a:r>
                     </a:p>
                   </a:txBody>
@@ -31762,7 +32908,7 @@
                   </a:tcPr>
                 </a:tc>
               </a:tr>
-              <a:tr h="543560">
+              <a:tr h="521208">
                 <a:tc>
                   <a:txBody>
                     <a:bodyPr/>
@@ -31834,6 +32980,33 @@
                         <a:rPr>
                           <a:latin typeface="Inter"/>
                         </a:rPr>
+                        <a:t>gradient_tool</a:t>
+                      </a:r>
+                    </a:p>
+                  </a:txBody>
+                  <a:tcPr marL="54864" marR="54864" marT="27432" marB="27432" anchor="ctr">
+                    <a:solidFill>
+                      <a:srgbClr val="F5F7F9"/>
+                    </a:solidFill>
+                  </a:tcPr>
+                </a:tc>
+                <a:tc>
+                  <a:txBody>
+                    <a:bodyPr/>
+                    <a:lstStyle/>
+                    <a:p>
+                      <a:pPr>
+                        <a:defRPr sz="650" b="0">
+                          <a:solidFill>
+                            <a:srgbClr val="0D1117"/>
+                          </a:solidFill>
+                          <a:latin typeface="Inter"/>
+                        </a:defRPr>
+                      </a:pPr>
+                      <a:r>
+                        <a:rPr>
+                          <a:latin typeface="Inter"/>
+                        </a:rPr>
                         <a:t>list_portfolios; get_portfolio_structure</a:t>
                       </a:r>
                     </a:p>
@@ -31915,7 +33088,7 @@
                         <a:rPr>
                           <a:latin typeface="Inter"/>
                         </a:rPr>
-                        <a:t>Fictional TEST data</a:t>
+                        <a:t>Illustrative sample data</a:t>
                       </a:r>
                     </a:p>
                   </a:txBody>
@@ -31969,7 +33142,7 @@
                         <a:rPr>
                           <a:latin typeface="Inter"/>
                         </a:rPr>
-                        <a:t>ra-s2</a:t>
+                        <a:t>sha256:aaaaaaaaaaaaaaaaaaaaaaaaaaaaaaaaaaaaaaaaaaaaaaaaaaaaaaaaaaaaaaaa</a:t>
                       </a:r>
                     </a:p>
                   </a:txBody>
@@ -31980,7 +33153,7 @@
                   </a:tcPr>
                 </a:tc>
               </a:tr>
-              <a:tr h="543560">
+              <a:tr h="521208">
                 <a:tc>
                   <a:txBody>
                     <a:bodyPr/>
@@ -32052,6 +33225,33 @@
                         <a:rPr>
                           <a:latin typeface="Inter"/>
                         </a:rPr>
+                        <a:t>gradient_tool</a:t>
+                      </a:r>
+                    </a:p>
+                  </a:txBody>
+                  <a:tcPr marL="54864" marR="54864" marT="27432" marB="27432" anchor="ctr">
+                    <a:solidFill>
+                      <a:srgbClr val="FFFFFF"/>
+                    </a:solidFill>
+                  </a:tcPr>
+                </a:tc>
+                <a:tc>
+                  <a:txBody>
+                    <a:bodyPr/>
+                    <a:lstStyle/>
+                    <a:p>
+                      <a:pPr>
+                        <a:defRPr sz="650" b="0">
+                          <a:solidFill>
+                            <a:srgbClr val="0D1117"/>
+                          </a:solidFill>
+                          <a:latin typeface="Inter"/>
+                        </a:defRPr>
+                      </a:pPr>
+                      <a:r>
+                        <a:rPr>
+                          <a:latin typeface="Inter"/>
+                        </a:rPr>
                         <a:t>check_portfolio_policy</a:t>
                       </a:r>
                     </a:p>
@@ -32133,7 +33333,7 @@
                         <a:rPr>
                           <a:latin typeface="Inter"/>
                         </a:rPr>
-                        <a:t>Fictional TEST data</a:t>
+                        <a:t>Illustrative sample data</a:t>
                       </a:r>
                     </a:p>
                   </a:txBody>
@@ -32187,7 +33387,7 @@
                         <a:rPr>
                           <a:latin typeface="Inter"/>
                         </a:rPr>
-                        <a:t>ra-s3</a:t>
+                        <a:t>sha256:aaaaaaaaaaaaaaaaaaaaaaaaaaaaaaaaaaaaaaaaaaaaaaaaaaaaaaaaaaaaaaaa</a:t>
                       </a:r>
                     </a:p>
                   </a:txBody>
@@ -32198,7 +33398,7 @@
                   </a:tcPr>
                 </a:tc>
               </a:tr>
-              <a:tr h="543560">
+              <a:tr h="521208">
                 <a:tc>
                   <a:txBody>
                     <a:bodyPr/>
@@ -32270,6 +33470,33 @@
                         <a:rPr>
                           <a:latin typeface="Inter"/>
                         </a:rPr>
+                        <a:t>gradient_tool</a:t>
+                      </a:r>
+                    </a:p>
+                  </a:txBody>
+                  <a:tcPr marL="54864" marR="54864" marT="27432" marB="27432" anchor="ctr">
+                    <a:solidFill>
+                      <a:srgbClr val="F5F7F9"/>
+                    </a:solidFill>
+                  </a:tcPr>
+                </a:tc>
+                <a:tc>
+                  <a:txBody>
+                    <a:bodyPr/>
+                    <a:lstStyle/>
+                    <a:p>
+                      <a:pPr>
+                        <a:defRPr sz="650" b="0">
+                          <a:solidFill>
+                            <a:srgbClr val="0D1117"/>
+                          </a:solidFill>
+                          <a:latin typeface="Inter"/>
+                        </a:defRPr>
+                      </a:pPr>
+                      <a:r>
+                        <a:rPr>
+                          <a:latin typeface="Inter"/>
+                        </a:rPr>
                         <a:t>get_portfolio_exposure</a:t>
                       </a:r>
                     </a:p>
@@ -32351,7 +33578,7 @@
                         <a:rPr>
                           <a:latin typeface="Inter"/>
                         </a:rPr>
-                        <a:t>Fictional TEST data</a:t>
+                        <a:t>Illustrative sample data</a:t>
                       </a:r>
                     </a:p>
                   </a:txBody>
@@ -32405,7 +33632,7 @@
                         <a:rPr>
                           <a:latin typeface="Inter"/>
                         </a:rPr>
-                        <a:t>ra-s4</a:t>
+                        <a:t>sha256:aaaaaaaaaaaaaaaaaaaaaaaaaaaaaaaaaaaaaaaaaaaaaaaaaaaaaaaaaaaaaaaa</a:t>
                       </a:r>
                     </a:p>
                   </a:txBody>
@@ -32416,7 +33643,7 @@
                   </a:tcPr>
                 </a:tc>
               </a:tr>
-              <a:tr h="543560">
+              <a:tr h="521208">
                 <a:tc>
                   <a:txBody>
                     <a:bodyPr/>
@@ -32488,6 +33715,33 @@
                         <a:rPr>
                           <a:latin typeface="Inter"/>
                         </a:rPr>
+                        <a:t>gradient_tool</a:t>
+                      </a:r>
+                    </a:p>
+                  </a:txBody>
+                  <a:tcPr marL="54864" marR="54864" marT="27432" marB="27432" anchor="ctr">
+                    <a:solidFill>
+                      <a:srgbClr val="FFFFFF"/>
+                    </a:solidFill>
+                  </a:tcPr>
+                </a:tc>
+                <a:tc>
+                  <a:txBody>
+                    <a:bodyPr/>
+                    <a:lstStyle/>
+                    <a:p>
+                      <a:pPr>
+                        <a:defRPr sz="650" b="0">
+                          <a:solidFill>
+                            <a:srgbClr val="0D1117"/>
+                          </a:solidFill>
+                          <a:latin typeface="Inter"/>
+                        </a:defRPr>
+                      </a:pPr>
+                      <a:r>
+                        <a:rPr>
+                          <a:latin typeface="Inter"/>
+                        </a:rPr>
                         <a:t>get_portfolio_historical_returns; get_portfolio_attribution</a:t>
                       </a:r>
                     </a:p>
@@ -32569,7 +33823,7 @@
                         <a:rPr>
                           <a:latin typeface="Inter"/>
                         </a:rPr>
-                        <a:t>Fictional TEST data</a:t>
+                        <a:t>Illustrative sample data</a:t>
                       </a:r>
                     </a:p>
                   </a:txBody>
@@ -32623,7 +33877,7 @@
                         <a:rPr>
                           <a:latin typeface="Inter"/>
                         </a:rPr>
-                        <a:t>ra-s5</a:t>
+                        <a:t>sha256:aaaaaaaaaaaaaaaaaaaaaaaaaaaaaaaaaaaaaaaaaaaaaaaaaaaaaaaaaaaaaaaa</a:t>
                       </a:r>
                     </a:p>
                   </a:txBody>
@@ -32634,7 +33888,7 @@
                   </a:tcPr>
                 </a:tc>
               </a:tr>
-              <a:tr h="543560">
+              <a:tr h="521208">
                 <a:tc>
                   <a:txBody>
                     <a:bodyPr/>
@@ -32706,6 +33960,33 @@
                         <a:rPr>
                           <a:latin typeface="Inter"/>
                         </a:rPr>
+                        <a:t>gradient_tool</a:t>
+                      </a:r>
+                    </a:p>
+                  </a:txBody>
+                  <a:tcPr marL="54864" marR="54864" marT="27432" marB="27432" anchor="ctr">
+                    <a:solidFill>
+                      <a:srgbClr val="F5F7F9"/>
+                    </a:solidFill>
+                  </a:tcPr>
+                </a:tc>
+                <a:tc>
+                  <a:txBody>
+                    <a:bodyPr/>
+                    <a:lstStyle/>
+                    <a:p>
+                      <a:pPr>
+                        <a:defRPr sz="650" b="0">
+                          <a:solidFill>
+                            <a:srgbClr val="0D1117"/>
+                          </a:solidFill>
+                          <a:latin typeface="Inter"/>
+                        </a:defRPr>
+                      </a:pPr>
+                      <a:r>
+                        <a:rPr>
+                          <a:latin typeface="Inter"/>
+                        </a:rPr>
                         <a:t>get_chart_data; get_capital_market_assumptions</a:t>
                       </a:r>
                     </a:p>
@@ -32787,7 +34068,7 @@
                         <a:rPr>
                           <a:latin typeface="Inter"/>
                         </a:rPr>
-                        <a:t>Fictional TEST data</a:t>
+                        <a:t>Illustrative sample data</a:t>
                       </a:r>
                     </a:p>
                   </a:txBody>
@@ -32841,7 +34122,7 @@
                         <a:rPr>
                           <a:latin typeface="Inter"/>
                         </a:rPr>
-                        <a:t>ra-s6</a:t>
+                        <a:t>sha256:aaaaaaaaaaaaaaaaaaaaaaaaaaaaaaaaaaaaaaaaaaaaaaaaaaaaaaaaaaaaaaaa</a:t>
                       </a:r>
                     </a:p>
                   </a:txBody>
@@ -32852,7 +34133,7 @@
                   </a:tcPr>
                 </a:tc>
               </a:tr>
-              <a:tr h="543560">
+              <a:tr h="521208">
                 <a:tc>
                   <a:txBody>
                     <a:bodyPr/>
@@ -32924,7 +34205,7 @@
                         <a:rPr>
                           <a:latin typeface="Inter"/>
                         </a:rPr>
-                        <a:t>get_macro_conditions; diligence tools</a:t>
+                        <a:t>gradient_tool</a:t>
                       </a:r>
                     </a:p>
                   </a:txBody>
@@ -32951,7 +34232,7 @@
                         <a:rPr>
                           <a:latin typeface="Inter"/>
                         </a:rPr>
-                        <a:t>fictional</a:t>
+                        <a:t>get_macro_conditions</a:t>
                       </a:r>
                     </a:p>
                   </a:txBody>
@@ -32978,6 +34259,33 @@
                         <a:rPr>
                           <a:latin typeface="Inter"/>
                         </a:rPr>
+                        <a:t>illustrative</a:t>
+                      </a:r>
+                    </a:p>
+                  </a:txBody>
+                  <a:tcPr marL="54864" marR="54864" marT="27432" marB="27432" anchor="ctr">
+                    <a:solidFill>
+                      <a:srgbClr val="FFFFFF"/>
+                    </a:solidFill>
+                  </a:tcPr>
+                </a:tc>
+                <a:tc>
+                  <a:txBody>
+                    <a:bodyPr/>
+                    <a:lstStyle/>
+                    <a:p>
+                      <a:pPr>
+                        <a:defRPr sz="650" b="0">
+                          <a:solidFill>
+                            <a:srgbClr val="0D1117"/>
+                          </a:solidFill>
+                          <a:latin typeface="Inter"/>
+                        </a:defRPr>
+                      </a:pPr>
+                      <a:r>
+                        <a:rPr>
+                          <a:latin typeface="Inter"/>
+                        </a:rPr>
                         <a:t>2026-06-30</a:t>
                       </a:r>
                     </a:p>
@@ -33005,7 +34313,7 @@
                         <a:rPr>
                           <a:latin typeface="Inter"/>
                         </a:rPr>
-                        <a:t>Fictional TEST data</a:t>
+                        <a:t>Illustrative sample data</a:t>
                       </a:r>
                     </a:p>
                   </a:txBody>
@@ -33059,7 +34367,7 @@
                         <a:rPr>
                           <a:latin typeface="Inter"/>
                         </a:rPr>
-                        <a:t>ra-s7</a:t>
+                        <a:t>sha256:aaaaaaaaaaaaaaaaaaaaaaaaaaaaaaaaaaaaaaaaaaaaaaaaaaaaaaaaaaaaaaaa</a:t>
                       </a:r>
                     </a:p>
                   </a:txBody>
@@ -33070,7 +34378,7 @@
                   </a:tcPr>
                 </a:tc>
               </a:tr>
-              <a:tr h="543560">
+              <a:tr h="521208">
                 <a:tc>
                   <a:txBody>
                     <a:bodyPr/>
@@ -33142,7 +34450,7 @@
                         <a:rPr>
                           <a:latin typeface="Inter"/>
                         </a:rPr>
-                        <a:t>User document; coverage record</a:t>
+                        <a:t>gradient_tool</a:t>
                       </a:r>
                     </a:p>
                   </a:txBody>
@@ -33169,7 +34477,7 @@
                         <a:rPr>
                           <a:latin typeface="Inter"/>
                         </a:rPr>
-                        <a:t>fictional</a:t>
+                        <a:t>get_gradient_capabilities</a:t>
                       </a:r>
                     </a:p>
                   </a:txBody>
@@ -33196,6 +34504,33 @@
                         <a:rPr>
                           <a:latin typeface="Inter"/>
                         </a:rPr>
+                        <a:t>illustrative</a:t>
+                      </a:r>
+                    </a:p>
+                  </a:txBody>
+                  <a:tcPr marL="54864" marR="54864" marT="27432" marB="27432" anchor="ctr">
+                    <a:solidFill>
+                      <a:srgbClr val="F5F7F9"/>
+                    </a:solidFill>
+                  </a:tcPr>
+                </a:tc>
+                <a:tc>
+                  <a:txBody>
+                    <a:bodyPr/>
+                    <a:lstStyle/>
+                    <a:p>
+                      <a:pPr>
+                        <a:defRPr sz="650" b="0">
+                          <a:solidFill>
+                            <a:srgbClr val="0D1117"/>
+                          </a:solidFill>
+                          <a:latin typeface="Inter"/>
+                        </a:defRPr>
+                      </a:pPr>
+                      <a:r>
+                        <a:rPr>
+                          <a:latin typeface="Inter"/>
+                        </a:rPr>
                         <a:t>2026-06-30</a:t>
                       </a:r>
                     </a:p>
@@ -33223,7 +34558,7 @@
                         <a:rPr>
                           <a:latin typeface="Inter"/>
                         </a:rPr>
-                        <a:t>Fictional TEST data</a:t>
+                        <a:t>Illustrative sample data</a:t>
                       </a:r>
                     </a:p>
                   </a:txBody>
@@ -33277,7 +34612,7 @@
                         <a:rPr>
                           <a:latin typeface="Inter"/>
                         </a:rPr>
-                        <a:t>ra-s8</a:t>
+                        <a:t>sha256:aaaaaaaaaaaaaaaaaaaaaaaaaaaaaaaaaaaaaaaaaaaaaaaaaaaaaaaaaaaaaaaa</a:t>
                       </a:r>
                     </a:p>
                   </a:txBody>
@@ -33294,7 +34629,49 @@
       </p:graphicFrame>
       <p:sp>
         <p:nvSpPr>
-          <p:cNvPr id="8" name="Rectangle 7"/>
+          <p:cNvPr id="9" name="TextBox 8"/>
+          <p:cNvSpPr txBox="1"/>
+          <p:nvPr/>
+        </p:nvSpPr>
+        <p:spPr>
+          <a:xfrm>
+            <a:off x="640080" y="6035040"/>
+            <a:ext cx="10908792" cy="164592"/>
+          </a:xfrm>
+          <a:prstGeom prst="rect">
+            <a:avLst/>
+          </a:prstGeom>
+          <a:noFill/>
+        </p:spPr>
+        <p:txBody>
+          <a:bodyPr wrap="none" lIns="9144" rIns="9144" tIns="9144" bIns="9144" anchor="t">
+            <a:spAutoFit/>
+          </a:bodyPr>
+          <a:lstStyle/>
+          <a:p>
+            <a:pPr algn="l">
+              <a:spcAft>
+                <a:spcPts val="0"/>
+              </a:spcAft>
+              <a:defRPr sz="680" b="0">
+                <a:solidFill>
+                  <a:srgbClr val="8A94A1"/>
+                </a:solidFill>
+                <a:latin typeface="Inter"/>
+              </a:defRPr>
+            </a:pPr>
+            <a:r>
+              <a:rPr>
+                <a:latin typeface="Inter"/>
+              </a:rPr>
+              <a:t>Illustrative, Gradient Maintained — demo data, not the client's holdings or managers. All organizations, portfolios, managers and results in this public example are illustrative.</a:t>
+            </a:r>
+          </a:p>
+        </p:txBody>
+      </p:sp>
+      <p:sp>
+        <p:nvSpPr>
+          <p:cNvPr id="10" name="Rectangle 9"/>
           <p:cNvSpPr/>
           <p:nvPr/>
         </p:nvSpPr>
@@ -33343,7 +34720,7 @@
       </p:sp>
       <p:sp>
         <p:nvSpPr>
-          <p:cNvPr id="9" name="TextBox 8"/>
+          <p:cNvPr id="11" name="TextBox 10"/>
           <p:cNvSpPr txBox="1"/>
           <p:nvPr/>
         </p:nvSpPr>
@@ -33385,7 +34762,7 @@
       </p:sp>
       <p:sp>
         <p:nvSpPr>
-          <p:cNvPr id="10" name="TextBox 9"/>
+          <p:cNvPr id="12" name="TextBox 11"/>
           <p:cNvSpPr txBox="1"/>
           <p:nvPr/>
         </p:nvSpPr>
@@ -33420,14 +34797,14 @@
               <a:rPr>
                 <a:latin typeface="Inter"/>
               </a:rPr>
-              <a:t>TEST DATA — fictional portfolio for rendering tests only · Data as of 2026-06-30</a:t>
+              <a:t>Confidential — Investment Committee · Data as of 2026-06-30</a:t>
             </a:r>
           </a:p>
         </p:txBody>
       </p:sp>
       <p:sp>
         <p:nvSpPr>
-          <p:cNvPr id="11" name="TextBox 10"/>
+          <p:cNvPr id="13" name="TextBox 12"/>
           <p:cNvSpPr txBox="1"/>
           <p:nvPr/>
         </p:nvSpPr>
@@ -33542,6 +34919,48 @@
         </p:nvSpPr>
         <p:spPr>
           <a:xfrm>
+            <a:off x="5897880" y="310896"/>
+            <a:ext cx="4800600" cy="256032"/>
+          </a:xfrm>
+          <a:prstGeom prst="rect">
+            <a:avLst/>
+          </a:prstGeom>
+          <a:noFill/>
+        </p:spPr>
+        <p:txBody>
+          <a:bodyPr wrap="none" lIns="9144" rIns="9144" tIns="9144" bIns="9144" anchor="t">
+            <a:spAutoFit/>
+          </a:bodyPr>
+          <a:lstStyle/>
+          <a:p>
+            <a:pPr algn="r">
+              <a:spcAft>
+                <a:spcPts val="0"/>
+              </a:spcAft>
+              <a:defRPr sz="680" b="1">
+                <a:solidFill>
+                  <a:srgbClr val="4F6B00"/>
+                </a:solidFill>
+                <a:latin typeface="Inter"/>
+              </a:defRPr>
+            </a:pPr>
+            <a:r>
+              <a:rPr>
+                <a:latin typeface="Inter"/>
+              </a:rPr>
+              <a:t>Illustrative, Gradient Maintained — demo data, not the client's holdings or managers</a:t>
+            </a:r>
+          </a:p>
+        </p:txBody>
+      </p:sp>
+      <p:sp>
+        <p:nvSpPr>
+          <p:cNvPr id="4" name="TextBox 3"/>
+          <p:cNvSpPr txBox="1"/>
+          <p:nvPr/>
+        </p:nvSpPr>
+        <p:spPr>
+          <a:xfrm>
             <a:off x="640080" y="566928"/>
             <a:ext cx="10058400" cy="530352"/>
           </a:xfrm>
@@ -33571,14 +34990,14 @@
               <a:rPr>
                 <a:latin typeface="Inter"/>
               </a:rPr>
-              <a:t>Appendix B — Server Metric Methods and Disclosures</a:t>
+              <a:t>Appendix — Server Metric Methods and Disclosures</a:t>
             </a:r>
           </a:p>
         </p:txBody>
       </p:sp>
       <p:sp>
         <p:nvSpPr>
-          <p:cNvPr id="4" name="Rectangle 3"/>
+          <p:cNvPr id="5" name="Rectangle 4"/>
           <p:cNvSpPr/>
           <p:nvPr/>
         </p:nvSpPr>
@@ -33627,7 +35046,7 @@
       </p:sp>
       <p:sp>
         <p:nvSpPr>
-          <p:cNvPr id="5" name="Rectangle 4"/>
+          <p:cNvPr id="6" name="Rectangle 5"/>
           <p:cNvSpPr/>
           <p:nvPr/>
         </p:nvSpPr>
@@ -33676,7 +35095,7 @@
       </p:sp>
       <p:sp>
         <p:nvSpPr>
-          <p:cNvPr id="6" name="TextBox 5"/>
+          <p:cNvPr id="7" name="TextBox 6"/>
           <p:cNvSpPr txBox="1"/>
           <p:nvPr/>
         </p:nvSpPr>
@@ -33718,7 +35137,7 @@
       </p:sp>
       <p:sp>
         <p:nvSpPr>
-          <p:cNvPr id="7" name="TextBox 6"/>
+          <p:cNvPr id="8" name="TextBox 7"/>
           <p:cNvSpPr txBox="1"/>
           <p:nvPr/>
         </p:nvSpPr>
@@ -33760,7 +35179,7 @@
       </p:sp>
       <p:graphicFrame>
         <p:nvGraphicFramePr>
-          <p:cNvPr id="8" name="Table 7"/>
+          <p:cNvPr id="9" name="Table 8"/>
           <p:cNvGraphicFramePr>
             <a:graphicFrameLocks noGrp="1"/>
           </p:cNvGraphicFramePr>
@@ -34200,7 +35619,7 @@
       </p:graphicFrame>
       <p:sp>
         <p:nvSpPr>
-          <p:cNvPr id="9" name="TextBox 8"/>
+          <p:cNvPr id="10" name="TextBox 9"/>
           <p:cNvSpPr txBox="1"/>
           <p:nvPr/>
         </p:nvSpPr>
@@ -34337,7 +35756,7 @@
       </p:sp>
       <p:sp>
         <p:nvSpPr>
-          <p:cNvPr id="10" name="Rectangle 9"/>
+          <p:cNvPr id="11" name="Rectangle 10"/>
           <p:cNvSpPr/>
           <p:nvPr/>
         </p:nvSpPr>
@@ -34386,7 +35805,7 @@
       </p:sp>
       <p:sp>
         <p:nvSpPr>
-          <p:cNvPr id="11" name="TextBox 10"/>
+          <p:cNvPr id="12" name="TextBox 11"/>
           <p:cNvSpPr txBox="1"/>
           <p:nvPr/>
         </p:nvSpPr>
@@ -34428,7 +35847,7 @@
       </p:sp>
       <p:sp>
         <p:nvSpPr>
-          <p:cNvPr id="12" name="TextBox 11"/>
+          <p:cNvPr id="13" name="TextBox 12"/>
           <p:cNvSpPr txBox="1"/>
           <p:nvPr/>
         </p:nvSpPr>
@@ -34463,14 +35882,14 @@
               <a:rPr>
                 <a:latin typeface="Inter"/>
               </a:rPr>
-              <a:t>TEST DATA — fictional portfolio for rendering tests only · Data as of 2026-06-30</a:t>
+              <a:t>Confidential — Investment Committee · Data as of 2026-06-30</a:t>
             </a:r>
           </a:p>
         </p:txBody>
       </p:sp>
       <p:sp>
         <p:nvSpPr>
-          <p:cNvPr id="13" name="TextBox 12"/>
+          <p:cNvPr id="14" name="TextBox 13"/>
           <p:cNvSpPr txBox="1"/>
           <p:nvPr/>
         </p:nvSpPr>
@@ -34585,6 +36004,48 @@
         </p:nvSpPr>
         <p:spPr>
           <a:xfrm>
+            <a:off x="5897880" y="310896"/>
+            <a:ext cx="4800600" cy="256032"/>
+          </a:xfrm>
+          <a:prstGeom prst="rect">
+            <a:avLst/>
+          </a:prstGeom>
+          <a:noFill/>
+        </p:spPr>
+        <p:txBody>
+          <a:bodyPr wrap="none" lIns="9144" rIns="9144" tIns="9144" bIns="9144" anchor="t">
+            <a:spAutoFit/>
+          </a:bodyPr>
+          <a:lstStyle/>
+          <a:p>
+            <a:pPr algn="r">
+              <a:spcAft>
+                <a:spcPts val="0"/>
+              </a:spcAft>
+              <a:defRPr sz="680" b="1">
+                <a:solidFill>
+                  <a:srgbClr val="4F6B00"/>
+                </a:solidFill>
+                <a:latin typeface="Inter"/>
+              </a:defRPr>
+            </a:pPr>
+            <a:r>
+              <a:rPr>
+                <a:latin typeface="Inter"/>
+              </a:rPr>
+              <a:t>Illustrative, Gradient Maintained — demo data, not the client's holdings or managers</a:t>
+            </a:r>
+          </a:p>
+        </p:txBody>
+      </p:sp>
+      <p:sp>
+        <p:nvSpPr>
+          <p:cNvPr id="4" name="TextBox 3"/>
+          <p:cNvSpPr txBox="1"/>
+          <p:nvPr/>
+        </p:nvSpPr>
+        <p:spPr>
+          <a:xfrm>
             <a:off x="640080" y="566928"/>
             <a:ext cx="10058400" cy="530352"/>
           </a:xfrm>
@@ -34621,7 +36082,7 @@
       </p:sp>
       <p:sp>
         <p:nvSpPr>
-          <p:cNvPr id="4" name="Rectangle 3"/>
+          <p:cNvPr id="5" name="Rectangle 4"/>
           <p:cNvSpPr/>
           <p:nvPr/>
         </p:nvSpPr>
@@ -34670,7 +36131,7 @@
       </p:sp>
       <p:sp>
         <p:nvSpPr>
-          <p:cNvPr id="5" name="Rectangle 4"/>
+          <p:cNvPr id="6" name="Rectangle 5"/>
           <p:cNvSpPr/>
           <p:nvPr/>
         </p:nvSpPr>
@@ -34719,7 +36180,7 @@
       </p:sp>
       <p:sp>
         <p:nvSpPr>
-          <p:cNvPr id="6" name="TextBox 5"/>
+          <p:cNvPr id="7" name="TextBox 6"/>
           <p:cNvSpPr txBox="1"/>
           <p:nvPr/>
         </p:nvSpPr>
@@ -34761,14 +36222,14 @@
       </p:sp>
       <p:sp>
         <p:nvSpPr>
-          <p:cNvPr id="7" name="Rectangle 6"/>
+          <p:cNvPr id="8" name="Rectangle 7"/>
           <p:cNvSpPr/>
           <p:nvPr/>
         </p:nvSpPr>
         <p:spPr>
           <a:xfrm>
             <a:off x="640080" y="1325880"/>
-            <a:ext cx="10908792" cy="2270533"/>
+            <a:ext cx="10908792" cy="2304141"/>
           </a:xfrm>
           <a:prstGeom prst="rect">
             <a:avLst/>
@@ -34810,14 +36271,14 @@
       </p:sp>
       <p:sp>
         <p:nvSpPr>
-          <p:cNvPr id="8" name="Rectangle 7"/>
+          <p:cNvPr id="9" name="Rectangle 8"/>
           <p:cNvSpPr/>
           <p:nvPr/>
         </p:nvSpPr>
         <p:spPr>
           <a:xfrm>
             <a:off x="640080" y="1325880"/>
-            <a:ext cx="54864" cy="2270533"/>
+            <a:ext cx="54864" cy="2304141"/>
           </a:xfrm>
           <a:prstGeom prst="rect">
             <a:avLst/>
@@ -34859,7 +36320,7 @@
       </p:sp>
       <p:sp>
         <p:nvSpPr>
-          <p:cNvPr id="9" name="TextBox 8"/>
+          <p:cNvPr id="10" name="TextBox 9"/>
           <p:cNvSpPr txBox="1"/>
           <p:nvPr/>
         </p:nvSpPr>
@@ -34901,14 +36362,14 @@
       </p:sp>
       <p:sp>
         <p:nvSpPr>
-          <p:cNvPr id="10" name="TextBox 9"/>
+          <p:cNvPr id="11" name="TextBox 10"/>
           <p:cNvSpPr txBox="1"/>
           <p:nvPr/>
         </p:nvSpPr>
         <p:spPr>
           <a:xfrm>
             <a:off x="804671" y="1719072"/>
-            <a:ext cx="10616184" cy="1785901"/>
+            <a:ext cx="10616184" cy="1819509"/>
           </a:xfrm>
           <a:prstGeom prst="rect">
             <a:avLst/>
@@ -34936,21 +36397,21 @@
               <a:rPr>
                 <a:latin typeface="Inter"/>
               </a:rPr>
-              <a:t>Observation: Real-assets weight is 15.0% in the TEST evidence [S2]. Why it matters: This measure establishes the baseline for comparing later governed results. Uncertainty: The source basis may omit newer observations outside this fixture. What would change the view: A refreshed source report showing a change above 1%.</a:t>
+              <a:t>Observation: Real-assets weight is 15.0% in the review evidence [S2]. Why it matters: This measure establishes the baseline for comparing later governed results. Uncertainty: The source basis may omit newer observations outside the reviewed evidence. What would change the view: A refreshed source report showing a change above 1%.</a:t>
             </a:r>
           </a:p>
         </p:txBody>
       </p:sp>
       <p:sp>
         <p:nvSpPr>
-          <p:cNvPr id="11" name="Rectangle 10"/>
+          <p:cNvPr id="12" name="Rectangle 11"/>
           <p:cNvSpPr/>
           <p:nvPr/>
         </p:nvSpPr>
         <p:spPr>
           <a:xfrm>
-            <a:off x="640080" y="3706141"/>
-            <a:ext cx="10908792" cy="2511778"/>
+            <a:off x="640080" y="3739749"/>
+            <a:ext cx="10908792" cy="2478170"/>
           </a:xfrm>
           <a:prstGeom prst="rect">
             <a:avLst/>
@@ -34992,14 +36453,14 @@
       </p:sp>
       <p:sp>
         <p:nvSpPr>
-          <p:cNvPr id="12" name="Rectangle 11"/>
+          <p:cNvPr id="13" name="Rectangle 12"/>
           <p:cNvSpPr/>
           <p:nvPr/>
         </p:nvSpPr>
         <p:spPr>
           <a:xfrm>
-            <a:off x="640080" y="3706141"/>
-            <a:ext cx="54864" cy="2511778"/>
+            <a:off x="640080" y="3739749"/>
+            <a:ext cx="54864" cy="2478170"/>
           </a:xfrm>
           <a:prstGeom prst="rect">
             <a:avLst/>
@@ -35041,13 +36502,13 @@
       </p:sp>
       <p:sp>
         <p:nvSpPr>
-          <p:cNvPr id="13" name="TextBox 12"/>
+          <p:cNvPr id="14" name="TextBox 13"/>
           <p:cNvSpPr txBox="1"/>
           <p:nvPr/>
         </p:nvSpPr>
         <p:spPr>
           <a:xfrm>
-            <a:off x="804671" y="3815869"/>
+            <a:off x="804671" y="3849477"/>
             <a:ext cx="10616184" cy="228600"/>
           </a:xfrm>
           <a:prstGeom prst="rect">
@@ -35083,14 +36544,14 @@
       </p:sp>
       <p:sp>
         <p:nvSpPr>
-          <p:cNvPr id="14" name="TextBox 13"/>
+          <p:cNvPr id="15" name="TextBox 14"/>
           <p:cNvSpPr txBox="1"/>
           <p:nvPr/>
         </p:nvSpPr>
         <p:spPr>
           <a:xfrm>
-            <a:off x="804671" y="4099333"/>
-            <a:ext cx="10616184" cy="2027146"/>
+            <a:off x="804671" y="4132941"/>
+            <a:ext cx="10616184" cy="1993538"/>
           </a:xfrm>
           <a:prstGeom prst="rect">
             <a:avLst/>
@@ -35118,14 +36579,14 @@
               <a:rPr>
                 <a:latin typeface="Inter"/>
               </a:rPr>
-              <a:t>Observation: Policy status is Watch rather than Clear in the TEST evidence [S3]. Why it matters: This result determines which item receives priority in the next monitoring cycle. Uncertainty: Supporting coverage may omit later filings or corroborating detail. What would change the view: A new filing or report that resolves the item or changes it by 1%.</a:t>
+              <a:t>Observation: Policy status is Watch rather than Clear in the review evidence [S3]. Why it matters: This result determines which item receives priority in the next monitoring cycle. Uncertainty: Supporting coverage may omit later filings or corroborating detail. What would change the view: A new filing or report that resolves the item or changes it by 1%.</a:t>
             </a:r>
           </a:p>
         </p:txBody>
       </p:sp>
       <p:sp>
         <p:nvSpPr>
-          <p:cNvPr id="15" name="Rectangle 14"/>
+          <p:cNvPr id="16" name="Rectangle 15"/>
           <p:cNvSpPr/>
           <p:nvPr/>
         </p:nvSpPr>
@@ -35174,7 +36635,7 @@
       </p:sp>
       <p:sp>
         <p:nvSpPr>
-          <p:cNvPr id="16" name="TextBox 15"/>
+          <p:cNvPr id="17" name="TextBox 16"/>
           <p:cNvSpPr txBox="1"/>
           <p:nvPr/>
         </p:nvSpPr>
@@ -35216,7 +36677,7 @@
       </p:sp>
       <p:sp>
         <p:nvSpPr>
-          <p:cNvPr id="17" name="TextBox 16"/>
+          <p:cNvPr id="18" name="TextBox 17"/>
           <p:cNvSpPr txBox="1"/>
           <p:nvPr/>
         </p:nvSpPr>
@@ -35251,14 +36712,14 @@
               <a:rPr>
                 <a:latin typeface="Inter"/>
               </a:rPr>
-              <a:t>TEST DATA — fictional portfolio for rendering tests only · Data as of 2026-06-30</a:t>
+              <a:t>Confidential — Investment Committee · Data as of 2026-06-30</a:t>
             </a:r>
           </a:p>
         </p:txBody>
       </p:sp>
       <p:sp>
         <p:nvSpPr>
-          <p:cNvPr id="18" name="TextBox 17"/>
+          <p:cNvPr id="19" name="TextBox 18"/>
           <p:cNvSpPr txBox="1"/>
           <p:nvPr/>
         </p:nvSpPr>
@@ -35373,6 +36834,48 @@
         </p:nvSpPr>
         <p:spPr>
           <a:xfrm>
+            <a:off x="5897880" y="310896"/>
+            <a:ext cx="4800600" cy="256032"/>
+          </a:xfrm>
+          <a:prstGeom prst="rect">
+            <a:avLst/>
+          </a:prstGeom>
+          <a:noFill/>
+        </p:spPr>
+        <p:txBody>
+          <a:bodyPr wrap="none" lIns="9144" rIns="9144" tIns="9144" bIns="9144" anchor="t">
+            <a:spAutoFit/>
+          </a:bodyPr>
+          <a:lstStyle/>
+          <a:p>
+            <a:pPr algn="r">
+              <a:spcAft>
+                <a:spcPts val="0"/>
+              </a:spcAft>
+              <a:defRPr sz="680" b="1">
+                <a:solidFill>
+                  <a:srgbClr val="4F6B00"/>
+                </a:solidFill>
+                <a:latin typeface="Inter"/>
+              </a:defRPr>
+            </a:pPr>
+            <a:r>
+              <a:rPr>
+                <a:latin typeface="Inter"/>
+              </a:rPr>
+              <a:t>Illustrative, Gradient Maintained — demo data, not the client's holdings or managers</a:t>
+            </a:r>
+          </a:p>
+        </p:txBody>
+      </p:sp>
+      <p:sp>
+        <p:nvSpPr>
+          <p:cNvPr id="4" name="TextBox 3"/>
+          <p:cNvSpPr txBox="1"/>
+          <p:nvPr/>
+        </p:nvSpPr>
+        <p:spPr>
+          <a:xfrm>
             <a:off x="640080" y="566928"/>
             <a:ext cx="10058400" cy="530352"/>
           </a:xfrm>
@@ -35409,7 +36912,7 @@
       </p:sp>
       <p:sp>
         <p:nvSpPr>
-          <p:cNvPr id="4" name="Rectangle 3"/>
+          <p:cNvPr id="5" name="Rectangle 4"/>
           <p:cNvSpPr/>
           <p:nvPr/>
         </p:nvSpPr>
@@ -35458,7 +36961,7 @@
       </p:sp>
       <p:sp>
         <p:nvSpPr>
-          <p:cNvPr id="5" name="Rectangle 4"/>
+          <p:cNvPr id="6" name="Rectangle 5"/>
           <p:cNvSpPr/>
           <p:nvPr/>
         </p:nvSpPr>
@@ -35507,7 +37010,7 @@
       </p:sp>
       <p:sp>
         <p:nvSpPr>
-          <p:cNvPr id="6" name="TextBox 5"/>
+          <p:cNvPr id="7" name="TextBox 6"/>
           <p:cNvSpPr txBox="1"/>
           <p:nvPr/>
         </p:nvSpPr>
@@ -35549,7 +37052,7 @@
       </p:sp>
       <p:graphicFrame>
         <p:nvGraphicFramePr>
-          <p:cNvPr id="7" name="Table 6"/>
+          <p:cNvPr id="8" name="Table 7"/>
           <p:cNvGraphicFramePr>
             <a:graphicFrameLocks noGrp="1"/>
           </p:cNvGraphicFramePr>
@@ -35614,7 +37117,7 @@
                         <a:rPr>
                           <a:latin typeface="Inter"/>
                         </a:rPr>
-                        <a:t>Northstar Total Fund (TEST) [S2]</a:t>
+                        <a:t>Northstar Total Fund [S2]</a:t>
                       </a:r>
                     </a:p>
                   </a:txBody>
@@ -35894,7 +37397,7 @@
                         <a:rPr>
                           <a:latin typeface="Inter"/>
                         </a:rPr>
-                        <a:t>Fictional TEST data [S1] [S1]</a:t>
+                        <a:t>Illustrative sample data [S1] [S1]</a:t>
                       </a:r>
                     </a:p>
                   </a:txBody>
@@ -35911,7 +37414,7 @@
       </p:graphicFrame>
       <p:sp>
         <p:nvSpPr>
-          <p:cNvPr id="8" name="TextBox 7"/>
+          <p:cNvPr id="9" name="TextBox 8"/>
           <p:cNvSpPr txBox="1"/>
           <p:nvPr/>
         </p:nvSpPr>
@@ -35953,7 +37456,7 @@
       </p:sp>
       <p:graphicFrame>
         <p:nvGraphicFramePr>
-          <p:cNvPr id="9" name="Table 8"/>
+          <p:cNvPr id="10" name="Table 9"/>
           <p:cNvGraphicFramePr>
             <a:graphicFrameLocks noGrp="1"/>
           </p:cNvGraphicFramePr>
@@ -36530,7 +38033,7 @@
       </p:graphicFrame>
       <p:sp>
         <p:nvSpPr>
-          <p:cNvPr id="10" name="Rectangle 9"/>
+          <p:cNvPr id="11" name="Rectangle 10"/>
           <p:cNvSpPr/>
           <p:nvPr/>
         </p:nvSpPr>
@@ -36579,7 +38082,7 @@
       </p:sp>
       <p:sp>
         <p:nvSpPr>
-          <p:cNvPr id="11" name="TextBox 10"/>
+          <p:cNvPr id="12" name="TextBox 11"/>
           <p:cNvSpPr txBox="1"/>
           <p:nvPr/>
         </p:nvSpPr>
@@ -36621,7 +38124,7 @@
       </p:sp>
       <p:sp>
         <p:nvSpPr>
-          <p:cNvPr id="12" name="TextBox 11"/>
+          <p:cNvPr id="13" name="TextBox 12"/>
           <p:cNvSpPr txBox="1"/>
           <p:nvPr/>
         </p:nvSpPr>
@@ -36656,14 +38159,14 @@
               <a:rPr>
                 <a:latin typeface="Inter"/>
               </a:rPr>
-              <a:t>TEST DATA — fictional portfolio for rendering tests only · Data as of 2026-06-30</a:t>
+              <a:t>Confidential — Investment Committee · Data as of 2026-06-30</a:t>
             </a:r>
           </a:p>
         </p:txBody>
       </p:sp>
       <p:sp>
         <p:nvSpPr>
-          <p:cNvPr id="13" name="TextBox 12"/>
+          <p:cNvPr id="14" name="TextBox 13"/>
           <p:cNvSpPr txBox="1"/>
           <p:nvPr/>
         </p:nvSpPr>
@@ -36778,6 +38281,48 @@
         </p:nvSpPr>
         <p:spPr>
           <a:xfrm>
+            <a:off x="5897880" y="310896"/>
+            <a:ext cx="4800600" cy="256032"/>
+          </a:xfrm>
+          <a:prstGeom prst="rect">
+            <a:avLst/>
+          </a:prstGeom>
+          <a:noFill/>
+        </p:spPr>
+        <p:txBody>
+          <a:bodyPr wrap="none" lIns="9144" rIns="9144" tIns="9144" bIns="9144" anchor="t">
+            <a:spAutoFit/>
+          </a:bodyPr>
+          <a:lstStyle/>
+          <a:p>
+            <a:pPr algn="r">
+              <a:spcAft>
+                <a:spcPts val="0"/>
+              </a:spcAft>
+              <a:defRPr sz="680" b="1">
+                <a:solidFill>
+                  <a:srgbClr val="4F6B00"/>
+                </a:solidFill>
+                <a:latin typeface="Inter"/>
+              </a:defRPr>
+            </a:pPr>
+            <a:r>
+              <a:rPr>
+                <a:latin typeface="Inter"/>
+              </a:rPr>
+              <a:t>Illustrative, Gradient Maintained — demo data, not the client's holdings or managers</a:t>
+            </a:r>
+          </a:p>
+        </p:txBody>
+      </p:sp>
+      <p:sp>
+        <p:nvSpPr>
+          <p:cNvPr id="4" name="TextBox 3"/>
+          <p:cNvSpPr txBox="1"/>
+          <p:nvPr/>
+        </p:nvSpPr>
+        <p:spPr>
+          <a:xfrm>
             <a:off x="640080" y="566928"/>
             <a:ext cx="10058400" cy="530352"/>
           </a:xfrm>
@@ -36814,7 +38359,7 @@
       </p:sp>
       <p:sp>
         <p:nvSpPr>
-          <p:cNvPr id="4" name="Rectangle 3"/>
+          <p:cNvPr id="5" name="Rectangle 4"/>
           <p:cNvSpPr/>
           <p:nvPr/>
         </p:nvSpPr>
@@ -36863,7 +38408,7 @@
       </p:sp>
       <p:sp>
         <p:nvSpPr>
-          <p:cNvPr id="5" name="Rectangle 4"/>
+          <p:cNvPr id="6" name="Rectangle 5"/>
           <p:cNvSpPr/>
           <p:nvPr/>
         </p:nvSpPr>
@@ -36912,7 +38457,7 @@
       </p:sp>
       <p:sp>
         <p:nvSpPr>
-          <p:cNvPr id="6" name="TextBox 5"/>
+          <p:cNvPr id="7" name="TextBox 6"/>
           <p:cNvSpPr txBox="1"/>
           <p:nvPr/>
         </p:nvSpPr>
@@ -36954,7 +38499,7 @@
       </p:sp>
       <p:sp>
         <p:nvSpPr>
-          <p:cNvPr id="7" name="TextBox 6"/>
+          <p:cNvPr id="8" name="TextBox 7"/>
           <p:cNvSpPr txBox="1"/>
           <p:nvPr/>
         </p:nvSpPr>
@@ -36989,14 +38534,14 @@
               <a:rPr>
                 <a:latin typeface="Inter"/>
               </a:rPr>
-              <a:t>REAL-ASSETS ALLOCATION BY SUB-SEGMENT (TEST)</a:t>
+              <a:t>REAL-ASSETS ALLOCATION BY SUB-SEGMENT</a:t>
             </a:r>
           </a:p>
         </p:txBody>
       </p:sp>
       <p:graphicFrame>
         <p:nvGraphicFramePr>
-          <p:cNvPr id="8" name="Chart 7"/>
+          <p:cNvPr id="9" name="Chart 8"/>
           <p:cNvGraphicFramePr>
             <a:graphicFrameLocks noGrp="1"/>
           </p:cNvGraphicFramePr>
@@ -37014,7 +38559,7 @@
       </p:graphicFrame>
       <p:sp>
         <p:nvSpPr>
-          <p:cNvPr id="9" name="Rectangle 8"/>
+          <p:cNvPr id="10" name="Rectangle 9"/>
           <p:cNvSpPr/>
           <p:nvPr/>
         </p:nvSpPr>
@@ -37063,7 +38608,7 @@
       </p:sp>
       <p:sp>
         <p:nvSpPr>
-          <p:cNvPr id="10" name="TextBox 9"/>
+          <p:cNvPr id="11" name="TextBox 10"/>
           <p:cNvSpPr txBox="1"/>
           <p:nvPr/>
         </p:nvSpPr>
@@ -37098,14 +38643,14 @@
               <a:rPr>
                 <a:latin typeface="Inter"/>
               </a:rPr>
-              <a:t>Sources: none cited</a:t>
+              <a:t>Sources: S1</a:t>
             </a:r>
           </a:p>
         </p:txBody>
       </p:sp>
       <p:sp>
         <p:nvSpPr>
-          <p:cNvPr id="11" name="TextBox 10"/>
+          <p:cNvPr id="12" name="TextBox 11"/>
           <p:cNvSpPr txBox="1"/>
           <p:nvPr/>
         </p:nvSpPr>
@@ -37140,14 +38685,14 @@
               <a:rPr>
                 <a:latin typeface="Inter"/>
               </a:rPr>
-              <a:t>TEST DATA — fictional portfolio for rendering tests only · Data as of 2026-06-30</a:t>
+              <a:t>Confidential — Investment Committee · Data as of 2026-06-30</a:t>
             </a:r>
           </a:p>
         </p:txBody>
       </p:sp>
       <p:sp>
         <p:nvSpPr>
-          <p:cNvPr id="12" name="TextBox 11"/>
+          <p:cNvPr id="13" name="TextBox 12"/>
           <p:cNvSpPr txBox="1"/>
           <p:nvPr/>
         </p:nvSpPr>
@@ -37262,6 +38807,48 @@
         </p:nvSpPr>
         <p:spPr>
           <a:xfrm>
+            <a:off x="5897880" y="310896"/>
+            <a:ext cx="4800600" cy="256032"/>
+          </a:xfrm>
+          <a:prstGeom prst="rect">
+            <a:avLst/>
+          </a:prstGeom>
+          <a:noFill/>
+        </p:spPr>
+        <p:txBody>
+          <a:bodyPr wrap="none" lIns="9144" rIns="9144" tIns="9144" bIns="9144" anchor="t">
+            <a:spAutoFit/>
+          </a:bodyPr>
+          <a:lstStyle/>
+          <a:p>
+            <a:pPr algn="r">
+              <a:spcAft>
+                <a:spcPts val="0"/>
+              </a:spcAft>
+              <a:defRPr sz="680" b="1">
+                <a:solidFill>
+                  <a:srgbClr val="4F6B00"/>
+                </a:solidFill>
+                <a:latin typeface="Inter"/>
+              </a:defRPr>
+            </a:pPr>
+            <a:r>
+              <a:rPr>
+                <a:latin typeface="Inter"/>
+              </a:rPr>
+              <a:t>Illustrative, Gradient Maintained — demo data, not the client's holdings or managers</a:t>
+            </a:r>
+          </a:p>
+        </p:txBody>
+      </p:sp>
+      <p:sp>
+        <p:nvSpPr>
+          <p:cNvPr id="4" name="TextBox 3"/>
+          <p:cNvSpPr txBox="1"/>
+          <p:nvPr/>
+        </p:nvSpPr>
+        <p:spPr>
+          <a:xfrm>
             <a:off x="640080" y="566928"/>
             <a:ext cx="10058400" cy="530352"/>
           </a:xfrm>
@@ -37298,7 +38885,7 @@
       </p:sp>
       <p:sp>
         <p:nvSpPr>
-          <p:cNvPr id="4" name="Rectangle 3"/>
+          <p:cNvPr id="5" name="Rectangle 4"/>
           <p:cNvSpPr/>
           <p:nvPr/>
         </p:nvSpPr>
@@ -37347,7 +38934,7 @@
       </p:sp>
       <p:sp>
         <p:nvSpPr>
-          <p:cNvPr id="5" name="Rectangle 4"/>
+          <p:cNvPr id="6" name="Rectangle 5"/>
           <p:cNvSpPr/>
           <p:nvPr/>
         </p:nvSpPr>
@@ -37396,7 +38983,7 @@
       </p:sp>
       <p:sp>
         <p:nvSpPr>
-          <p:cNvPr id="6" name="TextBox 5"/>
+          <p:cNvPr id="7" name="TextBox 6"/>
           <p:cNvSpPr txBox="1"/>
           <p:nvPr/>
         </p:nvSpPr>
@@ -37438,7 +39025,7 @@
       </p:sp>
       <p:sp>
         <p:nvSpPr>
-          <p:cNvPr id="7" name="TextBox 6"/>
+          <p:cNvPr id="8" name="TextBox 7"/>
           <p:cNvSpPr txBox="1"/>
           <p:nvPr/>
         </p:nvSpPr>
@@ -37480,7 +39067,7 @@
       </p:sp>
       <p:graphicFrame>
         <p:nvGraphicFramePr>
-          <p:cNvPr id="8" name="Table 7"/>
+          <p:cNvPr id="9" name="Table 8"/>
           <p:cNvGraphicFramePr>
             <a:graphicFrameLocks noGrp="1"/>
           </p:cNvGraphicFramePr>
@@ -38658,7 +40245,7 @@
       </p:graphicFrame>
       <p:sp>
         <p:nvSpPr>
-          <p:cNvPr id="9" name="TextBox 8"/>
+          <p:cNvPr id="10" name="TextBox 9"/>
           <p:cNvSpPr txBox="1"/>
           <p:nvPr/>
         </p:nvSpPr>
@@ -38700,7 +40287,7 @@
       </p:sp>
       <p:sp>
         <p:nvSpPr>
-          <p:cNvPr id="10" name="Rectangle 9"/>
+          <p:cNvPr id="11" name="Rectangle 10"/>
           <p:cNvSpPr/>
           <p:nvPr/>
         </p:nvSpPr>
@@ -38749,7 +40336,7 @@
       </p:sp>
       <p:sp>
         <p:nvSpPr>
-          <p:cNvPr id="11" name="TextBox 10"/>
+          <p:cNvPr id="12" name="TextBox 11"/>
           <p:cNvSpPr txBox="1"/>
           <p:nvPr/>
         </p:nvSpPr>
@@ -38791,7 +40378,7 @@
       </p:sp>
       <p:sp>
         <p:nvSpPr>
-          <p:cNvPr id="12" name="TextBox 11"/>
+          <p:cNvPr id="13" name="TextBox 12"/>
           <p:cNvSpPr txBox="1"/>
           <p:nvPr/>
         </p:nvSpPr>
@@ -38826,14 +40413,14 @@
               <a:rPr>
                 <a:latin typeface="Inter"/>
               </a:rPr>
-              <a:t>TEST DATA — fictional portfolio for rendering tests only · Data as of 2026-06-30</a:t>
+              <a:t>Confidential — Investment Committee · Data as of 2026-06-30</a:t>
             </a:r>
           </a:p>
         </p:txBody>
       </p:sp>
       <p:sp>
         <p:nvSpPr>
-          <p:cNvPr id="13" name="TextBox 12"/>
+          <p:cNvPr id="14" name="TextBox 13"/>
           <p:cNvSpPr txBox="1"/>
           <p:nvPr/>
         </p:nvSpPr>
@@ -38949,7 +40536,7 @@
         <p:spPr>
           <a:xfrm>
             <a:off x="640080" y="329184"/>
-            <a:ext cx="9875520" cy="182880"/>
+            <a:ext cx="5303520" cy="182880"/>
           </a:xfrm>
           <a:prstGeom prst="rect">
             <a:avLst/>
@@ -38990,6 +40577,48 @@
         </p:nvSpPr>
         <p:spPr>
           <a:xfrm>
+            <a:off x="5897880" y="310896"/>
+            <a:ext cx="4800600" cy="256032"/>
+          </a:xfrm>
+          <a:prstGeom prst="rect">
+            <a:avLst/>
+          </a:prstGeom>
+          <a:noFill/>
+        </p:spPr>
+        <p:txBody>
+          <a:bodyPr wrap="none" lIns="9144" rIns="9144" tIns="9144" bIns="9144" anchor="t">
+            <a:spAutoFit/>
+          </a:bodyPr>
+          <a:lstStyle/>
+          <a:p>
+            <a:pPr algn="r">
+              <a:spcAft>
+                <a:spcPts val="0"/>
+              </a:spcAft>
+              <a:defRPr sz="680" b="1">
+                <a:solidFill>
+                  <a:srgbClr val="4F6B00"/>
+                </a:solidFill>
+                <a:latin typeface="Inter"/>
+              </a:defRPr>
+            </a:pPr>
+            <a:r>
+              <a:rPr>
+                <a:latin typeface="Inter"/>
+              </a:rPr>
+              <a:t>Illustrative, Gradient Maintained — demo data, not the client's holdings or managers</a:t>
+            </a:r>
+          </a:p>
+        </p:txBody>
+      </p:sp>
+      <p:sp>
+        <p:nvSpPr>
+          <p:cNvPr id="5" name="TextBox 4"/>
+          <p:cNvSpPr txBox="1"/>
+          <p:nvPr/>
+        </p:nvSpPr>
+        <p:spPr>
+          <a:xfrm>
             <a:off x="640080" y="566928"/>
             <a:ext cx="10058400" cy="530352"/>
           </a:xfrm>
@@ -39026,7 +40655,7 @@
       </p:sp>
       <p:sp>
         <p:nvSpPr>
-          <p:cNvPr id="5" name="Rectangle 4"/>
+          <p:cNvPr id="6" name="Rectangle 5"/>
           <p:cNvSpPr/>
           <p:nvPr/>
         </p:nvSpPr>
@@ -39075,7 +40704,7 @@
       </p:sp>
       <p:sp>
         <p:nvSpPr>
-          <p:cNvPr id="6" name="Rectangle 5"/>
+          <p:cNvPr id="7" name="Rectangle 6"/>
           <p:cNvSpPr/>
           <p:nvPr/>
         </p:nvSpPr>
@@ -39124,7 +40753,7 @@
       </p:sp>
       <p:sp>
         <p:nvSpPr>
-          <p:cNvPr id="7" name="TextBox 6"/>
+          <p:cNvPr id="8" name="TextBox 7"/>
           <p:cNvSpPr txBox="1"/>
           <p:nvPr/>
         </p:nvSpPr>
@@ -39166,7 +40795,7 @@
       </p:sp>
       <p:sp>
         <p:nvSpPr>
-          <p:cNvPr id="8" name="TextBox 7"/>
+          <p:cNvPr id="9" name="TextBox 8"/>
           <p:cNvSpPr txBox="1"/>
           <p:nvPr/>
         </p:nvSpPr>
@@ -39208,7 +40837,7 @@
       </p:sp>
       <p:sp>
         <p:nvSpPr>
-          <p:cNvPr id="9" name="TextBox 8"/>
+          <p:cNvPr id="10" name="TextBox 9"/>
           <p:cNvSpPr txBox="1"/>
           <p:nvPr/>
         </p:nvSpPr>
@@ -39250,7 +40879,7 @@
       </p:sp>
       <p:sp>
         <p:nvSpPr>
-          <p:cNvPr id="10" name="Rectangle 9"/>
+          <p:cNvPr id="11" name="Rectangle 10"/>
           <p:cNvSpPr/>
           <p:nvPr/>
         </p:nvSpPr>
@@ -39299,7 +40928,7 @@
       </p:sp>
       <p:sp>
         <p:nvSpPr>
-          <p:cNvPr id="11" name="Oval 10"/>
+          <p:cNvPr id="12" name="Oval 11"/>
           <p:cNvSpPr/>
           <p:nvPr/>
         </p:nvSpPr>
@@ -39348,7 +40977,7 @@
       </p:sp>
       <p:sp>
         <p:nvSpPr>
-          <p:cNvPr id="12" name="Rectangle 11"/>
+          <p:cNvPr id="13" name="Rectangle 12"/>
           <p:cNvSpPr/>
           <p:nvPr/>
         </p:nvSpPr>
@@ -39397,7 +41026,7 @@
       </p:sp>
       <p:sp>
         <p:nvSpPr>
-          <p:cNvPr id="13" name="TextBox 12"/>
+          <p:cNvPr id="14" name="TextBox 13"/>
           <p:cNvSpPr txBox="1"/>
           <p:nvPr/>
         </p:nvSpPr>
@@ -39439,7 +41068,7 @@
       </p:sp>
       <p:sp>
         <p:nvSpPr>
-          <p:cNvPr id="14" name="Rectangle 13"/>
+          <p:cNvPr id="15" name="Rectangle 14"/>
           <p:cNvSpPr/>
           <p:nvPr/>
         </p:nvSpPr>
@@ -39488,7 +41117,7 @@
       </p:sp>
       <p:sp>
         <p:nvSpPr>
-          <p:cNvPr id="15" name="Oval 14"/>
+          <p:cNvPr id="16" name="Oval 15"/>
           <p:cNvSpPr/>
           <p:nvPr/>
         </p:nvSpPr>
@@ -39537,7 +41166,7 @@
       </p:sp>
       <p:sp>
         <p:nvSpPr>
-          <p:cNvPr id="16" name="Rectangle 15"/>
+          <p:cNvPr id="17" name="Rectangle 16"/>
           <p:cNvSpPr/>
           <p:nvPr/>
         </p:nvSpPr>
@@ -39586,7 +41215,7 @@
       </p:sp>
       <p:sp>
         <p:nvSpPr>
-          <p:cNvPr id="17" name="TextBox 16"/>
+          <p:cNvPr id="18" name="TextBox 17"/>
           <p:cNvSpPr txBox="1"/>
           <p:nvPr/>
         </p:nvSpPr>
@@ -39628,7 +41257,7 @@
       </p:sp>
       <p:sp>
         <p:nvSpPr>
-          <p:cNvPr id="18" name="Rectangle 17"/>
+          <p:cNvPr id="19" name="Rectangle 18"/>
           <p:cNvSpPr/>
           <p:nvPr/>
         </p:nvSpPr>
@@ -39677,7 +41306,7 @@
       </p:sp>
       <p:sp>
         <p:nvSpPr>
-          <p:cNvPr id="19" name="Oval 18"/>
+          <p:cNvPr id="20" name="Oval 19"/>
           <p:cNvSpPr/>
           <p:nvPr/>
         </p:nvSpPr>
@@ -39726,7 +41355,7 @@
       </p:sp>
       <p:sp>
         <p:nvSpPr>
-          <p:cNvPr id="20" name="Rectangle 19"/>
+          <p:cNvPr id="21" name="Rectangle 20"/>
           <p:cNvSpPr/>
           <p:nvPr/>
         </p:nvSpPr>
@@ -39775,7 +41404,7 @@
       </p:sp>
       <p:sp>
         <p:nvSpPr>
-          <p:cNvPr id="21" name="TextBox 20"/>
+          <p:cNvPr id="22" name="TextBox 21"/>
           <p:cNvSpPr txBox="1"/>
           <p:nvPr/>
         </p:nvSpPr>
@@ -39817,7 +41446,7 @@
       </p:sp>
       <p:sp>
         <p:nvSpPr>
-          <p:cNvPr id="22" name="Rectangle 21"/>
+          <p:cNvPr id="23" name="Rectangle 22"/>
           <p:cNvSpPr/>
           <p:nvPr/>
         </p:nvSpPr>
@@ -39866,7 +41495,7 @@
       </p:sp>
       <p:sp>
         <p:nvSpPr>
-          <p:cNvPr id="23" name="Oval 22"/>
+          <p:cNvPr id="24" name="Oval 23"/>
           <p:cNvSpPr/>
           <p:nvPr/>
         </p:nvSpPr>
@@ -39915,7 +41544,7 @@
       </p:sp>
       <p:sp>
         <p:nvSpPr>
-          <p:cNvPr id="24" name="Rectangle 23"/>
+          <p:cNvPr id="25" name="Rectangle 24"/>
           <p:cNvSpPr/>
           <p:nvPr/>
         </p:nvSpPr>
@@ -39964,7 +41593,7 @@
       </p:sp>
       <p:sp>
         <p:nvSpPr>
-          <p:cNvPr id="25" name="TextBox 24"/>
+          <p:cNvPr id="26" name="TextBox 25"/>
           <p:cNvSpPr txBox="1"/>
           <p:nvPr/>
         </p:nvSpPr>
@@ -40006,7 +41635,7 @@
       </p:sp>
       <p:sp>
         <p:nvSpPr>
-          <p:cNvPr id="26" name="Rectangle 25"/>
+          <p:cNvPr id="27" name="Rectangle 26"/>
           <p:cNvSpPr/>
           <p:nvPr/>
         </p:nvSpPr>
@@ -40055,7 +41684,7 @@
       </p:sp>
       <p:sp>
         <p:nvSpPr>
-          <p:cNvPr id="27" name="Oval 26"/>
+          <p:cNvPr id="28" name="Oval 27"/>
           <p:cNvSpPr/>
           <p:nvPr/>
         </p:nvSpPr>
@@ -40104,7 +41733,7 @@
       </p:sp>
       <p:sp>
         <p:nvSpPr>
-          <p:cNvPr id="28" name="Rectangle 27"/>
+          <p:cNvPr id="29" name="Rectangle 28"/>
           <p:cNvSpPr/>
           <p:nvPr/>
         </p:nvSpPr>
@@ -40153,7 +41782,7 @@
       </p:sp>
       <p:sp>
         <p:nvSpPr>
-          <p:cNvPr id="29" name="Rectangle 28"/>
+          <p:cNvPr id="30" name="Rectangle 29"/>
           <p:cNvSpPr/>
           <p:nvPr/>
         </p:nvSpPr>
@@ -40202,7 +41831,7 @@
       </p:sp>
       <p:sp>
         <p:nvSpPr>
-          <p:cNvPr id="30" name="TextBox 29"/>
+          <p:cNvPr id="31" name="TextBox 30"/>
           <p:cNvSpPr txBox="1"/>
           <p:nvPr/>
         </p:nvSpPr>
@@ -40237,14 +41866,14 @@
               <a:rPr>
                 <a:latin typeface="Inter"/>
               </a:rPr>
-              <a:t>Sources: none cited</a:t>
+              <a:t>Sources: S1</a:t>
             </a:r>
           </a:p>
         </p:txBody>
       </p:sp>
       <p:sp>
         <p:nvSpPr>
-          <p:cNvPr id="31" name="TextBox 30"/>
+          <p:cNvPr id="32" name="TextBox 31"/>
           <p:cNvSpPr txBox="1"/>
           <p:nvPr/>
         </p:nvSpPr>
@@ -40279,14 +41908,14 @@
               <a:rPr>
                 <a:latin typeface="Inter"/>
               </a:rPr>
-              <a:t>TEST DATA — fictional portfolio for rendering tests only · Data as of 2026-06-30</a:t>
+              <a:t>Confidential — Investment Committee · Data as of 2026-06-30</a:t>
             </a:r>
           </a:p>
         </p:txBody>
       </p:sp>
       <p:sp>
         <p:nvSpPr>
-          <p:cNvPr id="32" name="TextBox 31"/>
+          <p:cNvPr id="33" name="TextBox 32"/>
           <p:cNvSpPr txBox="1"/>
           <p:nvPr/>
         </p:nvSpPr>
@@ -40402,7 +42031,7 @@
         <p:spPr>
           <a:xfrm>
             <a:off x="640080" y="329184"/>
-            <a:ext cx="9875520" cy="182880"/>
+            <a:ext cx="5303520" cy="182880"/>
           </a:xfrm>
           <a:prstGeom prst="rect">
             <a:avLst/>
@@ -40443,6 +42072,48 @@
         </p:nvSpPr>
         <p:spPr>
           <a:xfrm>
+            <a:off x="5897880" y="310896"/>
+            <a:ext cx="4800600" cy="256032"/>
+          </a:xfrm>
+          <a:prstGeom prst="rect">
+            <a:avLst/>
+          </a:prstGeom>
+          <a:noFill/>
+        </p:spPr>
+        <p:txBody>
+          <a:bodyPr wrap="none" lIns="9144" rIns="9144" tIns="9144" bIns="9144" anchor="t">
+            <a:spAutoFit/>
+          </a:bodyPr>
+          <a:lstStyle/>
+          <a:p>
+            <a:pPr algn="r">
+              <a:spcAft>
+                <a:spcPts val="0"/>
+              </a:spcAft>
+              <a:defRPr sz="680" b="1">
+                <a:solidFill>
+                  <a:srgbClr val="4F6B00"/>
+                </a:solidFill>
+                <a:latin typeface="Inter"/>
+              </a:defRPr>
+            </a:pPr>
+            <a:r>
+              <a:rPr>
+                <a:latin typeface="Inter"/>
+              </a:rPr>
+              <a:t>Illustrative, Gradient Maintained — demo data, not the client's holdings or managers</a:t>
+            </a:r>
+          </a:p>
+        </p:txBody>
+      </p:sp>
+      <p:sp>
+        <p:nvSpPr>
+          <p:cNvPr id="5" name="TextBox 4"/>
+          <p:cNvSpPr txBox="1"/>
+          <p:nvPr/>
+        </p:nvSpPr>
+        <p:spPr>
+          <a:xfrm>
             <a:off x="640080" y="566928"/>
             <a:ext cx="10058400" cy="530352"/>
           </a:xfrm>
@@ -40479,7 +42150,7 @@
       </p:sp>
       <p:sp>
         <p:nvSpPr>
-          <p:cNvPr id="5" name="Rectangle 4"/>
+          <p:cNvPr id="6" name="Rectangle 5"/>
           <p:cNvSpPr/>
           <p:nvPr/>
         </p:nvSpPr>
@@ -40528,7 +42199,7 @@
       </p:sp>
       <p:sp>
         <p:nvSpPr>
-          <p:cNvPr id="6" name="Rectangle 5"/>
+          <p:cNvPr id="7" name="Rectangle 6"/>
           <p:cNvSpPr/>
           <p:nvPr/>
         </p:nvSpPr>
@@ -40577,7 +42248,7 @@
       </p:sp>
       <p:sp>
         <p:nvSpPr>
-          <p:cNvPr id="7" name="TextBox 6"/>
+          <p:cNvPr id="8" name="TextBox 7"/>
           <p:cNvSpPr txBox="1"/>
           <p:nvPr/>
         </p:nvSpPr>
@@ -40619,7 +42290,7 @@
       </p:sp>
       <p:sp>
         <p:nvSpPr>
-          <p:cNvPr id="8" name="TextBox 7"/>
+          <p:cNvPr id="9" name="TextBox 8"/>
           <p:cNvSpPr txBox="1"/>
           <p:nvPr/>
         </p:nvSpPr>
@@ -40661,7 +42332,7 @@
       </p:sp>
       <p:graphicFrame>
         <p:nvGraphicFramePr>
-          <p:cNvPr id="9" name="Chart 8"/>
+          <p:cNvPr id="10" name="Chart 9"/>
           <p:cNvGraphicFramePr>
             <a:graphicFrameLocks noGrp="1"/>
           </p:cNvGraphicFramePr>
@@ -40679,7 +42350,7 @@
       </p:graphicFrame>
       <p:sp>
         <p:nvSpPr>
-          <p:cNvPr id="10" name="Rectangle 9"/>
+          <p:cNvPr id="11" name="Rectangle 10"/>
           <p:cNvSpPr/>
           <p:nvPr/>
         </p:nvSpPr>
@@ -40728,7 +42399,7 @@
       </p:sp>
       <p:sp>
         <p:nvSpPr>
-          <p:cNvPr id="11" name="TextBox 10"/>
+          <p:cNvPr id="12" name="TextBox 11"/>
           <p:cNvSpPr txBox="1"/>
           <p:nvPr/>
         </p:nvSpPr>
@@ -40763,14 +42434,14 @@
               <a:rPr>
                 <a:latin typeface="Inter"/>
               </a:rPr>
-              <a:t>Sources: none cited</a:t>
+              <a:t>Sources: S1</a:t>
             </a:r>
           </a:p>
         </p:txBody>
       </p:sp>
       <p:sp>
         <p:nvSpPr>
-          <p:cNvPr id="12" name="TextBox 11"/>
+          <p:cNvPr id="13" name="TextBox 12"/>
           <p:cNvSpPr txBox="1"/>
           <p:nvPr/>
         </p:nvSpPr>
@@ -40805,14 +42476,14 @@
               <a:rPr>
                 <a:latin typeface="Inter"/>
               </a:rPr>
-              <a:t>TEST DATA — fictional portfolio for rendering tests only · Data as of 2026-06-30</a:t>
+              <a:t>Confidential — Investment Committee · Data as of 2026-06-30</a:t>
             </a:r>
           </a:p>
         </p:txBody>
       </p:sp>
       <p:sp>
         <p:nvSpPr>
-          <p:cNvPr id="13" name="TextBox 12"/>
+          <p:cNvPr id="14" name="TextBox 13"/>
           <p:cNvSpPr txBox="1"/>
           <p:nvPr/>
         </p:nvSpPr>

--- a/plugins/gradient-cio/assets/examples/gradient-portfolio-construction-real-assets.pptx
+++ b/plugins/gradient-cio/assets/examples/gradient-portfolio-construction-real-assets.pptx
@@ -37,6 +37,7 @@
     <ns0:sldId id="285" ns1:id="rId36"/>
     <ns0:sldId id="286" ns1:id="rId37"/>
     <ns0:sldId id="287" ns1:id="rId38"/>
+    <ns0:sldId id="288" ns1:id="rId39"/>
   </ns0:sldIdLst>
   <ns0:sldSz cx="12191695" cy="6858000" type="screen16x9"/>
   <ns0:notesSz cx="6858000" cy="9144000"/>
@@ -5126,224 +5127,7 @@
       </p:sp>
       <p:sp>
         <p:nvSpPr>
-          <p:cNvPr id="17" name="Rectangle 16"/>
-          <p:cNvSpPr/>
-          <p:nvPr/>
-        </p:nvSpPr>
-        <p:spPr>
-          <a:xfrm>
-            <a:off x="685800" y="5687568"/>
-            <a:ext cx="3337560" cy="530352"/>
-          </a:xfrm>
-          <a:prstGeom prst="rect">
-            <a:avLst/>
-          </a:prstGeom>
-          <a:solidFill>
-            <a:srgbClr val="F2A93B"/>
-          </a:solidFill>
-          <a:ln>
-            <a:solidFill>
-              <a:srgbClr val="F2A93B"/>
-            </a:solidFill>
-          </a:ln>
-        </p:spPr>
-        <p:style>
-          <a:lnRef idx="1">
-            <a:schemeClr val="accent1"/>
-          </a:lnRef>
-          <a:fillRef idx="3">
-            <a:schemeClr val="accent1"/>
-          </a:fillRef>
-          <a:effectRef idx="2">
-            <a:schemeClr val="accent1"/>
-          </a:effectRef>
-          <a:fontRef idx="minor">
-            <a:schemeClr val="lt1"/>
-          </a:fontRef>
-        </p:style>
-        <p:txBody>
-          <a:bodyPr rtlCol="0" anchor="ctr"/>
-          <a:lstStyle/>
-          <a:p>
-            <a:pPr algn="ctr">
-              <a:defRPr>
-                <a:latin typeface="Inter"/>
-              </a:defRPr>
-            </a:pPr>
-          </a:p>
-        </p:txBody>
-      </p:sp>
-      <p:sp>
-        <p:nvSpPr>
-          <p:cNvPr id="18" name="TextBox 17"/>
-          <p:cNvSpPr txBox="1"/>
-          <p:nvPr/>
-        </p:nvSpPr>
-        <p:spPr>
-          <a:xfrm>
-            <a:off x="822960" y="5760720"/>
-            <a:ext cx="3063240" cy="128016"/>
-          </a:xfrm>
-          <a:prstGeom prst="rect">
-            <a:avLst/>
-          </a:prstGeom>
-          <a:noFill/>
-        </p:spPr>
-        <p:txBody>
-          <a:bodyPr wrap="none" lIns="9144" rIns="9144" tIns="9144" bIns="9144" anchor="t">
-            <a:spAutoFit/>
-          </a:bodyPr>
-          <a:lstStyle/>
-          <a:p>
-            <a:pPr algn="l">
-              <a:spcAft>
-                <a:spcPts val="0"/>
-              </a:spcAft>
-              <a:defRPr sz="620" b="1">
-                <a:solidFill>
-                  <a:srgbClr val="0D1117"/>
-                </a:solidFill>
-                <a:latin typeface="Inter"/>
-              </a:defRPr>
-            </a:pPr>
-            <a:r>
-              <a:rPr>
-                <a:latin typeface="Inter"/>
-              </a:rPr>
-              <a:t>OVERALL VIEW</a:t>
-            </a:r>
-          </a:p>
-        </p:txBody>
-      </p:sp>
-      <p:sp>
-        <p:nvSpPr>
-          <p:cNvPr id="19" name="TextBox 18"/>
-          <p:cNvSpPr txBox="1"/>
-          <p:nvPr/>
-        </p:nvSpPr>
-        <p:spPr>
-          <a:xfrm>
-            <a:off x="822960" y="5916168"/>
-            <a:ext cx="3063240" cy="182880"/>
-          </a:xfrm>
-          <a:prstGeom prst="rect">
-            <a:avLst/>
-          </a:prstGeom>
-          <a:noFill/>
-        </p:spPr>
-        <p:txBody>
-          <a:bodyPr wrap="none" lIns="9144" rIns="9144" tIns="9144" bIns="9144" anchor="t">
-            <a:spAutoFit/>
-          </a:bodyPr>
-          <a:lstStyle/>
-          <a:p>
-            <a:pPr algn="l">
-              <a:spcAft>
-                <a:spcPts val="0"/>
-              </a:spcAft>
-              <a:defRPr sz="900" b="1">
-                <a:solidFill>
-                  <a:srgbClr val="0D1117"/>
-                </a:solidFill>
-                <a:latin typeface="Inter"/>
-              </a:defRPr>
-            </a:pPr>
-            <a:r>
-              <a:rPr>
-                <a:latin typeface="Inter"/>
-              </a:rPr>
-              <a:t>Valuation lag and structure mix on watch</a:t>
-            </a:r>
-          </a:p>
-        </p:txBody>
-      </p:sp>
-      <p:sp>
-        <p:nvSpPr>
-          <p:cNvPr id="20" name="TextBox 19"/>
-          <p:cNvSpPr txBox="1"/>
-          <p:nvPr/>
-        </p:nvSpPr>
-        <p:spPr>
-          <a:xfrm>
-            <a:off x="4297680" y="5733288"/>
-            <a:ext cx="3108960" cy="164592"/>
-          </a:xfrm>
-          <a:prstGeom prst="rect">
-            <a:avLst/>
-          </a:prstGeom>
-          <a:noFill/>
-        </p:spPr>
-        <p:txBody>
-          <a:bodyPr wrap="none" lIns="9144" rIns="9144" tIns="9144" bIns="9144" anchor="t">
-            <a:spAutoFit/>
-          </a:bodyPr>
-          <a:lstStyle/>
-          <a:p>
-            <a:pPr algn="l">
-              <a:spcAft>
-                <a:spcPts val="0"/>
-              </a:spcAft>
-              <a:defRPr sz="650" b="1">
-                <a:solidFill>
-                  <a:srgbClr val="8A94A1"/>
-                </a:solidFill>
-                <a:latin typeface="Inter"/>
-              </a:defRPr>
-            </a:pPr>
-            <a:r>
-              <a:rPr>
-                <a:latin typeface="Inter"/>
-              </a:rPr>
-              <a:t>SCOPE REVIEWED</a:t>
-            </a:r>
-          </a:p>
-        </p:txBody>
-      </p:sp>
-      <p:sp>
-        <p:nvSpPr>
-          <p:cNvPr id="21" name="TextBox 20"/>
-          <p:cNvSpPr txBox="1"/>
-          <p:nvPr/>
-        </p:nvSpPr>
-        <p:spPr>
-          <a:xfrm>
-            <a:off x="4297680" y="5934456"/>
-            <a:ext cx="3108960" cy="201168"/>
-          </a:xfrm>
-          <a:prstGeom prst="rect">
-            <a:avLst/>
-          </a:prstGeom>
-          <a:noFill/>
-        </p:spPr>
-        <p:txBody>
-          <a:bodyPr wrap="none" lIns="9144" rIns="9144" tIns="9144" bIns="9144" anchor="t">
-            <a:spAutoFit/>
-          </a:bodyPr>
-          <a:lstStyle/>
-          <a:p>
-            <a:pPr algn="l">
-              <a:spcAft>
-                <a:spcPts val="0"/>
-              </a:spcAft>
-              <a:defRPr sz="800" b="1">
-                <a:solidFill>
-                  <a:srgbClr val="FFFFFF"/>
-                </a:solidFill>
-                <a:latin typeface="Inter"/>
-              </a:defRPr>
-            </a:pPr>
-            <a:r>
-              <a:rPr>
-                <a:latin typeface="Inter"/>
-              </a:rPr>
-              <a:t>8 of 9 · Partial</a:t>
-            </a:r>
-          </a:p>
-        </p:txBody>
-      </p:sp>
-      <p:sp>
-        <p:nvSpPr>
-          <p:cNvPr id="22" name="TextBox 21"/>
+          <p:cNvPr id="17" name="TextBox 16"/>
           <p:cNvSpPr txBox="1"/>
           <p:nvPr/>
         </p:nvSpPr>
@@ -5385,7 +5169,7 @@
       </p:sp>
       <p:sp>
         <p:nvSpPr>
-          <p:cNvPr id="23" name="TextBox 22"/>
+          <p:cNvPr id="18" name="TextBox 17"/>
           <p:cNvSpPr txBox="1"/>
           <p:nvPr/>
         </p:nvSpPr>
@@ -5427,7 +5211,7 @@
       </p:sp>
       <p:sp>
         <p:nvSpPr>
-          <p:cNvPr id="24" name="TextBox 23"/>
+          <p:cNvPr id="19" name="TextBox 18"/>
           <p:cNvSpPr txBox="1"/>
           <p:nvPr/>
         </p:nvSpPr>
@@ -5543,7 +5327,7 @@
         <p:spPr>
           <a:xfrm>
             <a:off x="640080" y="329184"/>
-            <a:ext cx="5303520" cy="182880"/>
+            <a:ext cx="9875520" cy="182880"/>
           </a:xfrm>
           <a:prstGeom prst="rect">
             <a:avLst/>
@@ -5584,48 +5368,6 @@
         </p:nvSpPr>
         <p:spPr>
           <a:xfrm>
-            <a:off x="5897880" y="310896"/>
-            <a:ext cx="4800600" cy="256032"/>
-          </a:xfrm>
-          <a:prstGeom prst="rect">
-            <a:avLst/>
-          </a:prstGeom>
-          <a:noFill/>
-        </p:spPr>
-        <p:txBody>
-          <a:bodyPr wrap="none" lIns="9144" rIns="9144" tIns="9144" bIns="9144" anchor="t">
-            <a:spAutoFit/>
-          </a:bodyPr>
-          <a:lstStyle/>
-          <a:p>
-            <a:pPr algn="r">
-              <a:spcAft>
-                <a:spcPts val="0"/>
-              </a:spcAft>
-              <a:defRPr sz="680" b="1">
-                <a:solidFill>
-                  <a:srgbClr val="4F6B00"/>
-                </a:solidFill>
-                <a:latin typeface="Inter"/>
-              </a:defRPr>
-            </a:pPr>
-            <a:r>
-              <a:rPr>
-                <a:latin typeface="Inter"/>
-              </a:rPr>
-              <a:t>Illustrative, Gradient Maintained — demo data, not the client's holdings or managers</a:t>
-            </a:r>
-          </a:p>
-        </p:txBody>
-      </p:sp>
-      <p:sp>
-        <p:nvSpPr>
-          <p:cNvPr id="5" name="TextBox 4"/>
-          <p:cNvSpPr txBox="1"/>
-          <p:nvPr/>
-        </p:nvSpPr>
-        <p:spPr>
-          <a:xfrm>
             <a:off x="640080" y="566928"/>
             <a:ext cx="10058400" cy="530352"/>
           </a:xfrm>
@@ -5662,7 +5404,7 @@
       </p:sp>
       <p:sp>
         <p:nvSpPr>
-          <p:cNvPr id="6" name="Rectangle 5"/>
+          <p:cNvPr id="5" name="Rectangle 4"/>
           <p:cNvSpPr/>
           <p:nvPr/>
         </p:nvSpPr>
@@ -5711,7 +5453,7 @@
       </p:sp>
       <p:sp>
         <p:nvSpPr>
-          <p:cNvPr id="7" name="Rectangle 6"/>
+          <p:cNvPr id="6" name="Rectangle 5"/>
           <p:cNvSpPr/>
           <p:nvPr/>
         </p:nvSpPr>
@@ -5760,7 +5502,7 @@
       </p:sp>
       <p:sp>
         <p:nvSpPr>
-          <p:cNvPr id="8" name="TextBox 7"/>
+          <p:cNvPr id="7" name="TextBox 6"/>
           <p:cNvSpPr txBox="1"/>
           <p:nvPr/>
         </p:nvSpPr>
@@ -5802,7 +5544,7 @@
       </p:sp>
       <p:sp>
         <p:nvSpPr>
-          <p:cNvPr id="9" name="TextBox 8"/>
+          <p:cNvPr id="8" name="TextBox 7"/>
           <p:cNvSpPr txBox="1"/>
           <p:nvPr/>
         </p:nvSpPr>
@@ -5844,7 +5586,7 @@
       </p:sp>
       <p:graphicFrame>
         <p:nvGraphicFramePr>
-          <p:cNvPr id="10" name="Chart 9"/>
+          <p:cNvPr id="9" name="Chart 8"/>
           <p:cNvGraphicFramePr>
             <a:graphicFrameLocks noGrp="1"/>
           </p:cNvGraphicFramePr>
@@ -5862,7 +5604,7 @@
       </p:graphicFrame>
       <p:sp>
         <p:nvSpPr>
-          <p:cNvPr id="11" name="Rectangle 10"/>
+          <p:cNvPr id="10" name="Rectangle 9"/>
           <p:cNvSpPr/>
           <p:nvPr/>
         </p:nvSpPr>
@@ -5911,7 +5653,7 @@
       </p:sp>
       <p:sp>
         <p:nvSpPr>
-          <p:cNvPr id="12" name="TextBox 11"/>
+          <p:cNvPr id="11" name="TextBox 10"/>
           <p:cNvSpPr txBox="1"/>
           <p:nvPr/>
         </p:nvSpPr>
@@ -5953,7 +5695,7 @@
       </p:sp>
       <p:sp>
         <p:nvSpPr>
-          <p:cNvPr id="13" name="TextBox 12"/>
+          <p:cNvPr id="12" name="TextBox 11"/>
           <p:cNvSpPr txBox="1"/>
           <p:nvPr/>
         </p:nvSpPr>
@@ -5995,7 +5737,7 @@
       </p:sp>
       <p:sp>
         <p:nvSpPr>
-          <p:cNvPr id="14" name="TextBox 13"/>
+          <p:cNvPr id="13" name="TextBox 12"/>
           <p:cNvSpPr txBox="1"/>
           <p:nvPr/>
         </p:nvSpPr>
@@ -6111,7 +5853,7 @@
         <p:spPr>
           <a:xfrm>
             <a:off x="640080" y="329184"/>
-            <a:ext cx="5303520" cy="182880"/>
+            <a:ext cx="9875520" cy="182880"/>
           </a:xfrm>
           <a:prstGeom prst="rect">
             <a:avLst/>
@@ -6152,48 +5894,6 @@
         </p:nvSpPr>
         <p:spPr>
           <a:xfrm>
-            <a:off x="5897880" y="310896"/>
-            <a:ext cx="4800600" cy="256032"/>
-          </a:xfrm>
-          <a:prstGeom prst="rect">
-            <a:avLst/>
-          </a:prstGeom>
-          <a:noFill/>
-        </p:spPr>
-        <p:txBody>
-          <a:bodyPr wrap="none" lIns="9144" rIns="9144" tIns="9144" bIns="9144" anchor="t">
-            <a:spAutoFit/>
-          </a:bodyPr>
-          <a:lstStyle/>
-          <a:p>
-            <a:pPr algn="r">
-              <a:spcAft>
-                <a:spcPts val="0"/>
-              </a:spcAft>
-              <a:defRPr sz="680" b="1">
-                <a:solidFill>
-                  <a:srgbClr val="4F6B00"/>
-                </a:solidFill>
-                <a:latin typeface="Inter"/>
-              </a:defRPr>
-            </a:pPr>
-            <a:r>
-              <a:rPr>
-                <a:latin typeface="Inter"/>
-              </a:rPr>
-              <a:t>Illustrative, Gradient Maintained — demo data, not the client's holdings or managers</a:t>
-            </a:r>
-          </a:p>
-        </p:txBody>
-      </p:sp>
-      <p:sp>
-        <p:nvSpPr>
-          <p:cNvPr id="5" name="TextBox 4"/>
-          <p:cNvSpPr txBox="1"/>
-          <p:nvPr/>
-        </p:nvSpPr>
-        <p:spPr>
-          <a:xfrm>
             <a:off x="640080" y="566928"/>
             <a:ext cx="10058400" cy="530352"/>
           </a:xfrm>
@@ -6230,7 +5930,7 @@
       </p:sp>
       <p:sp>
         <p:nvSpPr>
-          <p:cNvPr id="6" name="Rectangle 5"/>
+          <p:cNvPr id="5" name="Rectangle 4"/>
           <p:cNvSpPr/>
           <p:nvPr/>
         </p:nvSpPr>
@@ -6279,7 +5979,7 @@
       </p:sp>
       <p:sp>
         <p:nvSpPr>
-          <p:cNvPr id="7" name="Rectangle 6"/>
+          <p:cNvPr id="6" name="Rectangle 5"/>
           <p:cNvSpPr/>
           <p:nvPr/>
         </p:nvSpPr>
@@ -6328,7 +6028,7 @@
       </p:sp>
       <p:sp>
         <p:nvSpPr>
-          <p:cNvPr id="8" name="TextBox 7"/>
+          <p:cNvPr id="7" name="TextBox 6"/>
           <p:cNvSpPr txBox="1"/>
           <p:nvPr/>
         </p:nvSpPr>
@@ -6370,7 +6070,7 @@
       </p:sp>
       <p:sp>
         <p:nvSpPr>
-          <p:cNvPr id="9" name="TextBox 8"/>
+          <p:cNvPr id="8" name="TextBox 7"/>
           <p:cNvSpPr txBox="1"/>
           <p:nvPr/>
         </p:nvSpPr>
@@ -6412,7 +6112,7 @@
       </p:sp>
       <p:graphicFrame>
         <p:nvGraphicFramePr>
-          <p:cNvPr id="10" name="Table 9"/>
+          <p:cNvPr id="9" name="Table 8"/>
           <p:cNvGraphicFramePr>
             <a:graphicFrameLocks noGrp="1"/>
           </p:cNvGraphicFramePr>
@@ -7590,7 +7290,7 @@
       </p:graphicFrame>
       <p:sp>
         <p:nvSpPr>
-          <p:cNvPr id="11" name="Rectangle 10"/>
+          <p:cNvPr id="10" name="Rectangle 9"/>
           <p:cNvSpPr/>
           <p:nvPr/>
         </p:nvSpPr>
@@ -7639,7 +7339,7 @@
       </p:sp>
       <p:sp>
         <p:nvSpPr>
-          <p:cNvPr id="12" name="Rectangle 11"/>
+          <p:cNvPr id="11" name="Rectangle 10"/>
           <p:cNvSpPr/>
           <p:nvPr/>
         </p:nvSpPr>
@@ -7688,7 +7388,7 @@
       </p:sp>
       <p:sp>
         <p:nvSpPr>
-          <p:cNvPr id="13" name="TextBox 12"/>
+          <p:cNvPr id="12" name="TextBox 11"/>
           <p:cNvSpPr txBox="1"/>
           <p:nvPr/>
         </p:nvSpPr>
@@ -7730,7 +7430,7 @@
       </p:sp>
       <p:sp>
         <p:nvSpPr>
-          <p:cNvPr id="14" name="TextBox 13"/>
+          <p:cNvPr id="13" name="TextBox 12"/>
           <p:cNvSpPr txBox="1"/>
           <p:nvPr/>
         </p:nvSpPr>
@@ -7772,7 +7472,7 @@
       </p:sp>
       <p:sp>
         <p:nvSpPr>
-          <p:cNvPr id="15" name="TextBox 14"/>
+          <p:cNvPr id="14" name="TextBox 13"/>
           <p:cNvSpPr txBox="1"/>
           <p:nvPr/>
         </p:nvSpPr>
@@ -7814,7 +7514,7 @@
       </p:sp>
       <p:sp>
         <p:nvSpPr>
-          <p:cNvPr id="16" name="Rectangle 15"/>
+          <p:cNvPr id="15" name="Rectangle 14"/>
           <p:cNvSpPr/>
           <p:nvPr/>
         </p:nvSpPr>
@@ -7863,7 +7563,7 @@
       </p:sp>
       <p:sp>
         <p:nvSpPr>
-          <p:cNvPr id="17" name="TextBox 16"/>
+          <p:cNvPr id="16" name="TextBox 15"/>
           <p:cNvSpPr txBox="1"/>
           <p:nvPr/>
         </p:nvSpPr>
@@ -7905,7 +7605,7 @@
       </p:sp>
       <p:sp>
         <p:nvSpPr>
-          <p:cNvPr id="18" name="TextBox 17"/>
+          <p:cNvPr id="17" name="TextBox 16"/>
           <p:cNvSpPr txBox="1"/>
           <p:nvPr/>
         </p:nvSpPr>
@@ -7947,7 +7647,7 @@
       </p:sp>
       <p:sp>
         <p:nvSpPr>
-          <p:cNvPr id="19" name="TextBox 18"/>
+          <p:cNvPr id="18" name="TextBox 17"/>
           <p:cNvSpPr txBox="1"/>
           <p:nvPr/>
         </p:nvSpPr>
@@ -8062,48 +7762,6 @@
         </p:nvSpPr>
         <p:spPr>
           <a:xfrm>
-            <a:off x="5897880" y="310896"/>
-            <a:ext cx="4800600" cy="256032"/>
-          </a:xfrm>
-          <a:prstGeom prst="rect">
-            <a:avLst/>
-          </a:prstGeom>
-          <a:noFill/>
-        </p:spPr>
-        <p:txBody>
-          <a:bodyPr wrap="none" lIns="9144" rIns="9144" tIns="9144" bIns="9144" anchor="t">
-            <a:spAutoFit/>
-          </a:bodyPr>
-          <a:lstStyle/>
-          <a:p>
-            <a:pPr algn="r">
-              <a:spcAft>
-                <a:spcPts val="0"/>
-              </a:spcAft>
-              <a:defRPr sz="680" b="1">
-                <a:solidFill>
-                  <a:srgbClr val="4F6B00"/>
-                </a:solidFill>
-                <a:latin typeface="Inter"/>
-              </a:defRPr>
-            </a:pPr>
-            <a:r>
-              <a:rPr>
-                <a:latin typeface="Inter"/>
-              </a:rPr>
-              <a:t>Illustrative, Gradient Maintained — demo data, not the client's holdings or managers</a:t>
-            </a:r>
-          </a:p>
-        </p:txBody>
-      </p:sp>
-      <p:sp>
-        <p:nvSpPr>
-          <p:cNvPr id="4" name="TextBox 3"/>
-          <p:cNvSpPr txBox="1"/>
-          <p:nvPr/>
-        </p:nvSpPr>
-        <p:spPr>
-          <a:xfrm>
             <a:off x="640080" y="566928"/>
             <a:ext cx="10058400" cy="530352"/>
           </a:xfrm>
@@ -8140,7 +7798,7 @@
       </p:sp>
       <p:sp>
         <p:nvSpPr>
-          <p:cNvPr id="5" name="Rectangle 4"/>
+          <p:cNvPr id="4" name="Rectangle 3"/>
           <p:cNvSpPr/>
           <p:nvPr/>
         </p:nvSpPr>
@@ -8189,7 +7847,7 @@
       </p:sp>
       <p:sp>
         <p:nvSpPr>
-          <p:cNvPr id="6" name="Rectangle 5"/>
+          <p:cNvPr id="5" name="Rectangle 4"/>
           <p:cNvSpPr/>
           <p:nvPr/>
         </p:nvSpPr>
@@ -8238,7 +7896,7 @@
       </p:sp>
       <p:sp>
         <p:nvSpPr>
-          <p:cNvPr id="7" name="TextBox 6"/>
+          <p:cNvPr id="6" name="TextBox 5"/>
           <p:cNvSpPr txBox="1"/>
           <p:nvPr/>
         </p:nvSpPr>
@@ -8280,7 +7938,7 @@
       </p:sp>
       <p:sp>
         <p:nvSpPr>
-          <p:cNvPr id="8" name="TextBox 7"/>
+          <p:cNvPr id="7" name="TextBox 6"/>
           <p:cNvSpPr txBox="1"/>
           <p:nvPr/>
         </p:nvSpPr>
@@ -8322,7 +7980,7 @@
       </p:sp>
       <p:graphicFrame>
         <p:nvGraphicFramePr>
-          <p:cNvPr id="9" name="Chart 8"/>
+          <p:cNvPr id="8" name="Chart 7"/>
           <p:cNvGraphicFramePr>
             <a:graphicFrameLocks noGrp="1"/>
           </p:cNvGraphicFramePr>
@@ -8340,7 +7998,7 @@
       </p:graphicFrame>
       <p:sp>
         <p:nvSpPr>
-          <p:cNvPr id="10" name="Rectangle 9"/>
+          <p:cNvPr id="9" name="Rectangle 8"/>
           <p:cNvSpPr/>
           <p:nvPr/>
         </p:nvSpPr>
@@ -8389,7 +8047,7 @@
       </p:sp>
       <p:sp>
         <p:nvSpPr>
-          <p:cNvPr id="11" name="TextBox 10"/>
+          <p:cNvPr id="10" name="TextBox 9"/>
           <p:cNvSpPr txBox="1"/>
           <p:nvPr/>
         </p:nvSpPr>
@@ -8431,7 +8089,7 @@
       </p:sp>
       <p:sp>
         <p:nvSpPr>
-          <p:cNvPr id="12" name="TextBox 11"/>
+          <p:cNvPr id="11" name="TextBox 10"/>
           <p:cNvSpPr txBox="1"/>
           <p:nvPr/>
         </p:nvSpPr>
@@ -8473,7 +8131,7 @@
       </p:sp>
       <p:sp>
         <p:nvSpPr>
-          <p:cNvPr id="13" name="TextBox 12"/>
+          <p:cNvPr id="12" name="TextBox 11"/>
           <p:cNvSpPr txBox="1"/>
           <p:nvPr/>
         </p:nvSpPr>
@@ -8588,48 +8246,6 @@
         </p:nvSpPr>
         <p:spPr>
           <a:xfrm>
-            <a:off x="5897880" y="310896"/>
-            <a:ext cx="4800600" cy="256032"/>
-          </a:xfrm>
-          <a:prstGeom prst="rect">
-            <a:avLst/>
-          </a:prstGeom>
-          <a:noFill/>
-        </p:spPr>
-        <p:txBody>
-          <a:bodyPr wrap="none" lIns="9144" rIns="9144" tIns="9144" bIns="9144" anchor="t">
-            <a:spAutoFit/>
-          </a:bodyPr>
-          <a:lstStyle/>
-          <a:p>
-            <a:pPr algn="r">
-              <a:spcAft>
-                <a:spcPts val="0"/>
-              </a:spcAft>
-              <a:defRPr sz="680" b="1">
-                <a:solidFill>
-                  <a:srgbClr val="4F6B00"/>
-                </a:solidFill>
-                <a:latin typeface="Inter"/>
-              </a:defRPr>
-            </a:pPr>
-            <a:r>
-              <a:rPr>
-                <a:latin typeface="Inter"/>
-              </a:rPr>
-              <a:t>Illustrative, Gradient Maintained — demo data, not the client's holdings or managers</a:t>
-            </a:r>
-          </a:p>
-        </p:txBody>
-      </p:sp>
-      <p:sp>
-        <p:nvSpPr>
-          <p:cNvPr id="4" name="TextBox 3"/>
-          <p:cNvSpPr txBox="1"/>
-          <p:nvPr/>
-        </p:nvSpPr>
-        <p:spPr>
-          <a:xfrm>
             <a:off x="640080" y="566928"/>
             <a:ext cx="10058400" cy="530352"/>
           </a:xfrm>
@@ -8666,7 +8282,7 @@
       </p:sp>
       <p:sp>
         <p:nvSpPr>
-          <p:cNvPr id="5" name="Rectangle 4"/>
+          <p:cNvPr id="4" name="Rectangle 3"/>
           <p:cNvSpPr/>
           <p:nvPr/>
         </p:nvSpPr>
@@ -8715,7 +8331,7 @@
       </p:sp>
       <p:sp>
         <p:nvSpPr>
-          <p:cNvPr id="6" name="Rectangle 5"/>
+          <p:cNvPr id="5" name="Rectangle 4"/>
           <p:cNvSpPr/>
           <p:nvPr/>
         </p:nvSpPr>
@@ -8764,7 +8380,7 @@
       </p:sp>
       <p:sp>
         <p:nvSpPr>
-          <p:cNvPr id="7" name="TextBox 6"/>
+          <p:cNvPr id="6" name="TextBox 5"/>
           <p:cNvSpPr txBox="1"/>
           <p:nvPr/>
         </p:nvSpPr>
@@ -8806,7 +8422,7 @@
       </p:sp>
       <p:sp>
         <p:nvSpPr>
-          <p:cNvPr id="8" name="TextBox 7"/>
+          <p:cNvPr id="7" name="TextBox 6"/>
           <p:cNvSpPr txBox="1"/>
           <p:nvPr/>
         </p:nvSpPr>
@@ -8848,7 +8464,7 @@
       </p:sp>
       <p:graphicFrame>
         <p:nvGraphicFramePr>
-          <p:cNvPr id="9" name="Table 8"/>
+          <p:cNvPr id="8" name="Table 7"/>
           <p:cNvGraphicFramePr>
             <a:graphicFrameLocks noGrp="1"/>
           </p:cNvGraphicFramePr>
@@ -9288,7 +8904,7 @@
       </p:graphicFrame>
       <p:sp>
         <p:nvSpPr>
-          <p:cNvPr id="10" name="TextBox 9"/>
+          <p:cNvPr id="9" name="TextBox 8"/>
           <p:cNvSpPr txBox="1"/>
           <p:nvPr/>
         </p:nvSpPr>
@@ -9330,7 +8946,7 @@
       </p:sp>
       <p:graphicFrame>
         <p:nvGraphicFramePr>
-          <p:cNvPr id="11" name="Table 10"/>
+          <p:cNvPr id="10" name="Table 9"/>
           <p:cNvGraphicFramePr>
             <a:graphicFrameLocks noGrp="1"/>
           </p:cNvGraphicFramePr>
@@ -9772,7 +9388,7 @@
       </p:graphicFrame>
       <p:sp>
         <p:nvSpPr>
-          <p:cNvPr id="12" name="TextBox 11"/>
+          <p:cNvPr id="11" name="TextBox 10"/>
           <p:cNvSpPr txBox="1"/>
           <p:nvPr/>
         </p:nvSpPr>
@@ -9814,7 +9430,7 @@
       </p:sp>
       <p:sp>
         <p:nvSpPr>
-          <p:cNvPr id="13" name="Rectangle 12"/>
+          <p:cNvPr id="12" name="Rectangle 11"/>
           <p:cNvSpPr/>
           <p:nvPr/>
         </p:nvSpPr>
@@ -9863,7 +9479,7 @@
       </p:sp>
       <p:sp>
         <p:nvSpPr>
-          <p:cNvPr id="14" name="TextBox 13"/>
+          <p:cNvPr id="13" name="TextBox 12"/>
           <p:cNvSpPr txBox="1"/>
           <p:nvPr/>
         </p:nvSpPr>
@@ -9905,7 +9521,7 @@
       </p:sp>
       <p:sp>
         <p:nvSpPr>
-          <p:cNvPr id="15" name="TextBox 14"/>
+          <p:cNvPr id="14" name="TextBox 13"/>
           <p:cNvSpPr txBox="1"/>
           <p:nvPr/>
         </p:nvSpPr>
@@ -9947,7 +9563,7 @@
       </p:sp>
       <p:sp>
         <p:nvSpPr>
-          <p:cNvPr id="16" name="TextBox 15"/>
+          <p:cNvPr id="15" name="TextBox 14"/>
           <p:cNvSpPr txBox="1"/>
           <p:nvPr/>
         </p:nvSpPr>
@@ -10062,48 +9678,6 @@
         </p:nvSpPr>
         <p:spPr>
           <a:xfrm>
-            <a:off x="5897880" y="310896"/>
-            <a:ext cx="4800600" cy="256032"/>
-          </a:xfrm>
-          <a:prstGeom prst="rect">
-            <a:avLst/>
-          </a:prstGeom>
-          <a:noFill/>
-        </p:spPr>
-        <p:txBody>
-          <a:bodyPr wrap="none" lIns="9144" rIns="9144" tIns="9144" bIns="9144" anchor="t">
-            <a:spAutoFit/>
-          </a:bodyPr>
-          <a:lstStyle/>
-          <a:p>
-            <a:pPr algn="r">
-              <a:spcAft>
-                <a:spcPts val="0"/>
-              </a:spcAft>
-              <a:defRPr sz="680" b="1">
-                <a:solidFill>
-                  <a:srgbClr val="4F6B00"/>
-                </a:solidFill>
-                <a:latin typeface="Inter"/>
-              </a:defRPr>
-            </a:pPr>
-            <a:r>
-              <a:rPr>
-                <a:latin typeface="Inter"/>
-              </a:rPr>
-              <a:t>Illustrative, Gradient Maintained — demo data, not the client's holdings or managers</a:t>
-            </a:r>
-          </a:p>
-        </p:txBody>
-      </p:sp>
-      <p:sp>
-        <p:nvSpPr>
-          <p:cNvPr id="4" name="TextBox 3"/>
-          <p:cNvSpPr txBox="1"/>
-          <p:nvPr/>
-        </p:nvSpPr>
-        <p:spPr>
-          <a:xfrm>
             <a:off x="640080" y="566928"/>
             <a:ext cx="10058400" cy="530352"/>
           </a:xfrm>
@@ -10140,7 +9714,7 @@
       </p:sp>
       <p:sp>
         <p:nvSpPr>
-          <p:cNvPr id="5" name="Rectangle 4"/>
+          <p:cNvPr id="4" name="Rectangle 3"/>
           <p:cNvSpPr/>
           <p:nvPr/>
         </p:nvSpPr>
@@ -10189,7 +9763,7 @@
       </p:sp>
       <p:sp>
         <p:nvSpPr>
-          <p:cNvPr id="6" name="Rectangle 5"/>
+          <p:cNvPr id="5" name="Rectangle 4"/>
           <p:cNvSpPr/>
           <p:nvPr/>
         </p:nvSpPr>
@@ -10238,7 +9812,7 @@
       </p:sp>
       <p:sp>
         <p:nvSpPr>
-          <p:cNvPr id="7" name="TextBox 6"/>
+          <p:cNvPr id="6" name="TextBox 5"/>
           <p:cNvSpPr txBox="1"/>
           <p:nvPr/>
         </p:nvSpPr>
@@ -10280,7 +9854,7 @@
       </p:sp>
       <p:graphicFrame>
         <p:nvGraphicFramePr>
-          <p:cNvPr id="8" name="Table 7"/>
+          <p:cNvPr id="7" name="Table 6"/>
           <p:cNvGraphicFramePr>
             <a:graphicFrameLocks noGrp="1"/>
           </p:cNvGraphicFramePr>
@@ -10530,7 +10104,7 @@
       </p:graphicFrame>
       <p:sp>
         <p:nvSpPr>
-          <p:cNvPr id="9" name="Rectangle 8"/>
+          <p:cNvPr id="8" name="Rectangle 7"/>
           <p:cNvSpPr/>
           <p:nvPr/>
         </p:nvSpPr>
@@ -10579,7 +10153,7 @@
       </p:sp>
       <p:sp>
         <p:nvSpPr>
-          <p:cNvPr id="10" name="TextBox 9"/>
+          <p:cNvPr id="9" name="TextBox 8"/>
           <p:cNvSpPr txBox="1"/>
           <p:nvPr/>
         </p:nvSpPr>
@@ -10621,7 +10195,7 @@
       </p:sp>
       <p:sp>
         <p:nvSpPr>
-          <p:cNvPr id="11" name="TextBox 10"/>
+          <p:cNvPr id="10" name="TextBox 9"/>
           <p:cNvSpPr txBox="1"/>
           <p:nvPr/>
         </p:nvSpPr>
@@ -10663,7 +10237,7 @@
       </p:sp>
       <p:sp>
         <p:nvSpPr>
-          <p:cNvPr id="12" name="TextBox 11"/>
+          <p:cNvPr id="11" name="TextBox 10"/>
           <p:cNvSpPr txBox="1"/>
           <p:nvPr/>
         </p:nvSpPr>
@@ -10779,7 +10353,7 @@
         <p:spPr>
           <a:xfrm>
             <a:off x="640080" y="329184"/>
-            <a:ext cx="5303520" cy="182880"/>
+            <a:ext cx="9875520" cy="182880"/>
           </a:xfrm>
           <a:prstGeom prst="rect">
             <a:avLst/>
@@ -10820,48 +10394,6 @@
         </p:nvSpPr>
         <p:spPr>
           <a:xfrm>
-            <a:off x="5897880" y="310896"/>
-            <a:ext cx="4800600" cy="256032"/>
-          </a:xfrm>
-          <a:prstGeom prst="rect">
-            <a:avLst/>
-          </a:prstGeom>
-          <a:noFill/>
-        </p:spPr>
-        <p:txBody>
-          <a:bodyPr wrap="none" lIns="9144" rIns="9144" tIns="9144" bIns="9144" anchor="t">
-            <a:spAutoFit/>
-          </a:bodyPr>
-          <a:lstStyle/>
-          <a:p>
-            <a:pPr algn="r">
-              <a:spcAft>
-                <a:spcPts val="0"/>
-              </a:spcAft>
-              <a:defRPr sz="680" b="1">
-                <a:solidFill>
-                  <a:srgbClr val="4F6B00"/>
-                </a:solidFill>
-                <a:latin typeface="Inter"/>
-              </a:defRPr>
-            </a:pPr>
-            <a:r>
-              <a:rPr>
-                <a:latin typeface="Inter"/>
-              </a:rPr>
-              <a:t>Illustrative, Gradient Maintained — demo data, not the client's holdings or managers</a:t>
-            </a:r>
-          </a:p>
-        </p:txBody>
-      </p:sp>
-      <p:sp>
-        <p:nvSpPr>
-          <p:cNvPr id="5" name="TextBox 4"/>
-          <p:cNvSpPr txBox="1"/>
-          <p:nvPr/>
-        </p:nvSpPr>
-        <p:spPr>
-          <a:xfrm>
             <a:off x="640080" y="566928"/>
             <a:ext cx="10058400" cy="530352"/>
           </a:xfrm>
@@ -10898,7 +10430,7 @@
       </p:sp>
       <p:sp>
         <p:nvSpPr>
-          <p:cNvPr id="6" name="Rectangle 5"/>
+          <p:cNvPr id="5" name="Rectangle 4"/>
           <p:cNvSpPr/>
           <p:nvPr/>
         </p:nvSpPr>
@@ -10947,7 +10479,7 @@
       </p:sp>
       <p:sp>
         <p:nvSpPr>
-          <p:cNvPr id="7" name="Rectangle 6"/>
+          <p:cNvPr id="6" name="Rectangle 5"/>
           <p:cNvSpPr/>
           <p:nvPr/>
         </p:nvSpPr>
@@ -10996,7 +10528,7 @@
       </p:sp>
       <p:sp>
         <p:nvSpPr>
-          <p:cNvPr id="8" name="TextBox 7"/>
+          <p:cNvPr id="7" name="TextBox 6"/>
           <p:cNvSpPr txBox="1"/>
           <p:nvPr/>
         </p:nvSpPr>
@@ -11038,7 +10570,7 @@
       </p:sp>
       <p:sp>
         <p:nvSpPr>
-          <p:cNvPr id="9" name="TextBox 8"/>
+          <p:cNvPr id="8" name="TextBox 7"/>
           <p:cNvSpPr txBox="1"/>
           <p:nvPr/>
         </p:nvSpPr>
@@ -11080,7 +10612,7 @@
       </p:sp>
       <p:sp>
         <p:nvSpPr>
-          <p:cNvPr id="10" name="Rectangle 9"/>
+          <p:cNvPr id="9" name="Rectangle 8"/>
           <p:cNvSpPr/>
           <p:nvPr/>
         </p:nvSpPr>
@@ -11129,7 +10661,7 @@
       </p:sp>
       <p:sp>
         <p:nvSpPr>
-          <p:cNvPr id="11" name="Rectangle 10"/>
+          <p:cNvPr id="10" name="Rectangle 9"/>
           <p:cNvSpPr/>
           <p:nvPr/>
         </p:nvSpPr>
@@ -11178,7 +10710,7 @@
       </p:sp>
       <p:sp>
         <p:nvSpPr>
-          <p:cNvPr id="12" name="TextBox 11"/>
+          <p:cNvPr id="11" name="TextBox 10"/>
           <p:cNvSpPr txBox="1"/>
           <p:nvPr/>
         </p:nvSpPr>
@@ -11220,7 +10752,7 @@
       </p:sp>
       <p:sp>
         <p:nvSpPr>
-          <p:cNvPr id="13" name="TextBox 12"/>
+          <p:cNvPr id="12" name="TextBox 11"/>
           <p:cNvSpPr txBox="1"/>
           <p:nvPr/>
         </p:nvSpPr>
@@ -11262,7 +10794,7 @@
       </p:sp>
       <p:sp>
         <p:nvSpPr>
-          <p:cNvPr id="14" name="TextBox 13"/>
+          <p:cNvPr id="13" name="TextBox 12"/>
           <p:cNvSpPr txBox="1"/>
           <p:nvPr/>
         </p:nvSpPr>
@@ -11304,7 +10836,7 @@
       </p:sp>
       <p:sp>
         <p:nvSpPr>
-          <p:cNvPr id="15" name="Rectangle 14"/>
+          <p:cNvPr id="14" name="Rectangle 13"/>
           <p:cNvSpPr/>
           <p:nvPr/>
         </p:nvSpPr>
@@ -11353,7 +10885,7 @@
       </p:sp>
       <p:sp>
         <p:nvSpPr>
-          <p:cNvPr id="16" name="Rectangle 15"/>
+          <p:cNvPr id="15" name="Rectangle 14"/>
           <p:cNvSpPr/>
           <p:nvPr/>
         </p:nvSpPr>
@@ -11402,7 +10934,7 @@
       </p:sp>
       <p:sp>
         <p:nvSpPr>
-          <p:cNvPr id="17" name="TextBox 16"/>
+          <p:cNvPr id="16" name="TextBox 15"/>
           <p:cNvSpPr txBox="1"/>
           <p:nvPr/>
         </p:nvSpPr>
@@ -11444,7 +10976,7 @@
       </p:sp>
       <p:sp>
         <p:nvSpPr>
-          <p:cNvPr id="18" name="TextBox 17"/>
+          <p:cNvPr id="17" name="TextBox 16"/>
           <p:cNvSpPr txBox="1"/>
           <p:nvPr/>
         </p:nvSpPr>
@@ -11486,7 +11018,7 @@
       </p:sp>
       <p:sp>
         <p:nvSpPr>
-          <p:cNvPr id="19" name="TextBox 18"/>
+          <p:cNvPr id="18" name="TextBox 17"/>
           <p:cNvSpPr txBox="1"/>
           <p:nvPr/>
         </p:nvSpPr>
@@ -11528,7 +11060,7 @@
       </p:sp>
       <p:sp>
         <p:nvSpPr>
-          <p:cNvPr id="20" name="Rectangle 19"/>
+          <p:cNvPr id="19" name="Rectangle 18"/>
           <p:cNvSpPr/>
           <p:nvPr/>
         </p:nvSpPr>
@@ -11577,7 +11109,7 @@
       </p:sp>
       <p:sp>
         <p:nvSpPr>
-          <p:cNvPr id="21" name="Rectangle 20"/>
+          <p:cNvPr id="20" name="Rectangle 19"/>
           <p:cNvSpPr/>
           <p:nvPr/>
         </p:nvSpPr>
@@ -11626,7 +11158,7 @@
       </p:sp>
       <p:sp>
         <p:nvSpPr>
-          <p:cNvPr id="22" name="TextBox 21"/>
+          <p:cNvPr id="21" name="TextBox 20"/>
           <p:cNvSpPr txBox="1"/>
           <p:nvPr/>
         </p:nvSpPr>
@@ -11668,7 +11200,7 @@
       </p:sp>
       <p:sp>
         <p:nvSpPr>
-          <p:cNvPr id="23" name="TextBox 22"/>
+          <p:cNvPr id="22" name="TextBox 21"/>
           <p:cNvSpPr txBox="1"/>
           <p:nvPr/>
         </p:nvSpPr>
@@ -11710,7 +11242,7 @@
       </p:sp>
       <p:sp>
         <p:nvSpPr>
-          <p:cNvPr id="24" name="TextBox 23"/>
+          <p:cNvPr id="23" name="TextBox 22"/>
           <p:cNvSpPr txBox="1"/>
           <p:nvPr/>
         </p:nvSpPr>
@@ -11752,7 +11284,7 @@
       </p:sp>
       <p:sp>
         <p:nvSpPr>
-          <p:cNvPr id="25" name="Rectangle 24"/>
+          <p:cNvPr id="24" name="Rectangle 23"/>
           <p:cNvSpPr/>
           <p:nvPr/>
         </p:nvSpPr>
@@ -11801,7 +11333,7 @@
       </p:sp>
       <p:sp>
         <p:nvSpPr>
-          <p:cNvPr id="26" name="Rectangle 25"/>
+          <p:cNvPr id="25" name="Rectangle 24"/>
           <p:cNvSpPr/>
           <p:nvPr/>
         </p:nvSpPr>
@@ -11850,7 +11382,7 @@
       </p:sp>
       <p:sp>
         <p:nvSpPr>
-          <p:cNvPr id="27" name="TextBox 26"/>
+          <p:cNvPr id="26" name="TextBox 25"/>
           <p:cNvSpPr txBox="1"/>
           <p:nvPr/>
         </p:nvSpPr>
@@ -11892,7 +11424,7 @@
       </p:sp>
       <p:sp>
         <p:nvSpPr>
-          <p:cNvPr id="28" name="TextBox 27"/>
+          <p:cNvPr id="27" name="TextBox 26"/>
           <p:cNvSpPr txBox="1"/>
           <p:nvPr/>
         </p:nvSpPr>
@@ -11934,7 +11466,7 @@
       </p:sp>
       <p:sp>
         <p:nvSpPr>
-          <p:cNvPr id="29" name="TextBox 28"/>
+          <p:cNvPr id="28" name="TextBox 27"/>
           <p:cNvSpPr txBox="1"/>
           <p:nvPr/>
         </p:nvSpPr>
@@ -11976,7 +11508,7 @@
       </p:sp>
       <p:sp>
         <p:nvSpPr>
-          <p:cNvPr id="30" name="Rectangle 29"/>
+          <p:cNvPr id="29" name="Rectangle 28"/>
           <p:cNvSpPr/>
           <p:nvPr/>
         </p:nvSpPr>
@@ -12025,7 +11557,7 @@
       </p:sp>
       <p:sp>
         <p:nvSpPr>
-          <p:cNvPr id="31" name="TextBox 30"/>
+          <p:cNvPr id="30" name="TextBox 29"/>
           <p:cNvSpPr txBox="1"/>
           <p:nvPr/>
         </p:nvSpPr>
@@ -12067,7 +11599,7 @@
       </p:sp>
       <p:sp>
         <p:nvSpPr>
-          <p:cNvPr id="32" name="TextBox 31"/>
+          <p:cNvPr id="31" name="TextBox 30"/>
           <p:cNvSpPr txBox="1"/>
           <p:nvPr/>
         </p:nvSpPr>
@@ -12109,7 +11641,7 @@
       </p:sp>
       <p:sp>
         <p:nvSpPr>
-          <p:cNvPr id="33" name="TextBox 32"/>
+          <p:cNvPr id="32" name="TextBox 31"/>
           <p:cNvSpPr txBox="1"/>
           <p:nvPr/>
         </p:nvSpPr>
@@ -12225,7 +11757,7 @@
         <p:spPr>
           <a:xfrm>
             <a:off x="640080" y="329184"/>
-            <a:ext cx="5303520" cy="182880"/>
+            <a:ext cx="9875520" cy="182880"/>
           </a:xfrm>
           <a:prstGeom prst="rect">
             <a:avLst/>
@@ -12266,48 +11798,6 @@
         </p:nvSpPr>
         <p:spPr>
           <a:xfrm>
-            <a:off x="5897880" y="310896"/>
-            <a:ext cx="4800600" cy="256032"/>
-          </a:xfrm>
-          <a:prstGeom prst="rect">
-            <a:avLst/>
-          </a:prstGeom>
-          <a:noFill/>
-        </p:spPr>
-        <p:txBody>
-          <a:bodyPr wrap="none" lIns="9144" rIns="9144" tIns="9144" bIns="9144" anchor="t">
-            <a:spAutoFit/>
-          </a:bodyPr>
-          <a:lstStyle/>
-          <a:p>
-            <a:pPr algn="r">
-              <a:spcAft>
-                <a:spcPts val="0"/>
-              </a:spcAft>
-              <a:defRPr sz="680" b="1">
-                <a:solidFill>
-                  <a:srgbClr val="4F6B00"/>
-                </a:solidFill>
-                <a:latin typeface="Inter"/>
-              </a:defRPr>
-            </a:pPr>
-            <a:r>
-              <a:rPr>
-                <a:latin typeface="Inter"/>
-              </a:rPr>
-              <a:t>Illustrative, Gradient Maintained — demo data, not the client's holdings or managers</a:t>
-            </a:r>
-          </a:p>
-        </p:txBody>
-      </p:sp>
-      <p:sp>
-        <p:nvSpPr>
-          <p:cNvPr id="5" name="TextBox 4"/>
-          <p:cNvSpPr txBox="1"/>
-          <p:nvPr/>
-        </p:nvSpPr>
-        <p:spPr>
-          <a:xfrm>
             <a:off x="640080" y="566928"/>
             <a:ext cx="10058400" cy="530352"/>
           </a:xfrm>
@@ -12344,7 +11834,7 @@
       </p:sp>
       <p:sp>
         <p:nvSpPr>
-          <p:cNvPr id="6" name="Rectangle 5"/>
+          <p:cNvPr id="5" name="Rectangle 4"/>
           <p:cNvSpPr/>
           <p:nvPr/>
         </p:nvSpPr>
@@ -12393,7 +11883,7 @@
       </p:sp>
       <p:sp>
         <p:nvSpPr>
-          <p:cNvPr id="7" name="Rectangle 6"/>
+          <p:cNvPr id="6" name="Rectangle 5"/>
           <p:cNvSpPr/>
           <p:nvPr/>
         </p:nvSpPr>
@@ -12442,7 +11932,7 @@
       </p:sp>
       <p:sp>
         <p:nvSpPr>
-          <p:cNvPr id="8" name="TextBox 7"/>
+          <p:cNvPr id="7" name="TextBox 6"/>
           <p:cNvSpPr txBox="1"/>
           <p:nvPr/>
         </p:nvSpPr>
@@ -12484,7 +11974,7 @@
       </p:sp>
       <p:sp>
         <p:nvSpPr>
-          <p:cNvPr id="9" name="TextBox 8"/>
+          <p:cNvPr id="8" name="TextBox 7"/>
           <p:cNvSpPr txBox="1"/>
           <p:nvPr/>
         </p:nvSpPr>
@@ -12526,7 +12016,7 @@
       </p:sp>
       <p:graphicFrame>
         <p:nvGraphicFramePr>
-          <p:cNvPr id="10" name="Chart 9"/>
+          <p:cNvPr id="9" name="Chart 8"/>
           <p:cNvGraphicFramePr>
             <a:graphicFrameLocks noGrp="1"/>
           </p:cNvGraphicFramePr>
@@ -12544,7 +12034,7 @@
       </p:graphicFrame>
       <p:sp>
         <p:nvSpPr>
-          <p:cNvPr id="11" name="Rectangle 10"/>
+          <p:cNvPr id="10" name="Rectangle 9"/>
           <p:cNvSpPr/>
           <p:nvPr/>
         </p:nvSpPr>
@@ -12593,7 +12083,7 @@
       </p:sp>
       <p:sp>
         <p:nvSpPr>
-          <p:cNvPr id="12" name="TextBox 11"/>
+          <p:cNvPr id="11" name="TextBox 10"/>
           <p:cNvSpPr txBox="1"/>
           <p:nvPr/>
         </p:nvSpPr>
@@ -12635,7 +12125,7 @@
       </p:sp>
       <p:sp>
         <p:nvSpPr>
-          <p:cNvPr id="13" name="TextBox 12"/>
+          <p:cNvPr id="12" name="TextBox 11"/>
           <p:cNvSpPr txBox="1"/>
           <p:nvPr/>
         </p:nvSpPr>
@@ -12677,7 +12167,7 @@
       </p:sp>
       <p:sp>
         <p:nvSpPr>
-          <p:cNvPr id="14" name="TextBox 13"/>
+          <p:cNvPr id="13" name="TextBox 12"/>
           <p:cNvSpPr txBox="1"/>
           <p:nvPr/>
         </p:nvSpPr>
@@ -12793,7 +12283,7 @@
         <p:spPr>
           <a:xfrm>
             <a:off x="640080" y="329184"/>
-            <a:ext cx="5303520" cy="182880"/>
+            <a:ext cx="9875520" cy="182880"/>
           </a:xfrm>
           <a:prstGeom prst="rect">
             <a:avLst/>
@@ -12834,48 +12324,6 @@
         </p:nvSpPr>
         <p:spPr>
           <a:xfrm>
-            <a:off x="5897880" y="310896"/>
-            <a:ext cx="4800600" cy="256032"/>
-          </a:xfrm>
-          <a:prstGeom prst="rect">
-            <a:avLst/>
-          </a:prstGeom>
-          <a:noFill/>
-        </p:spPr>
-        <p:txBody>
-          <a:bodyPr wrap="none" lIns="9144" rIns="9144" tIns="9144" bIns="9144" anchor="t">
-            <a:spAutoFit/>
-          </a:bodyPr>
-          <a:lstStyle/>
-          <a:p>
-            <a:pPr algn="r">
-              <a:spcAft>
-                <a:spcPts val="0"/>
-              </a:spcAft>
-              <a:defRPr sz="680" b="1">
-                <a:solidFill>
-                  <a:srgbClr val="4F6B00"/>
-                </a:solidFill>
-                <a:latin typeface="Inter"/>
-              </a:defRPr>
-            </a:pPr>
-            <a:r>
-              <a:rPr>
-                <a:latin typeface="Inter"/>
-              </a:rPr>
-              <a:t>Illustrative, Gradient Maintained — demo data, not the client's holdings or managers</a:t>
-            </a:r>
-          </a:p>
-        </p:txBody>
-      </p:sp>
-      <p:sp>
-        <p:nvSpPr>
-          <p:cNvPr id="5" name="TextBox 4"/>
-          <p:cNvSpPr txBox="1"/>
-          <p:nvPr/>
-        </p:nvSpPr>
-        <p:spPr>
-          <a:xfrm>
             <a:off x="640080" y="566928"/>
             <a:ext cx="10058400" cy="530352"/>
           </a:xfrm>
@@ -12912,7 +12360,7 @@
       </p:sp>
       <p:sp>
         <p:nvSpPr>
-          <p:cNvPr id="6" name="Rectangle 5"/>
+          <p:cNvPr id="5" name="Rectangle 4"/>
           <p:cNvSpPr/>
           <p:nvPr/>
         </p:nvSpPr>
@@ -12961,7 +12409,7 @@
       </p:sp>
       <p:sp>
         <p:nvSpPr>
-          <p:cNvPr id="7" name="Rectangle 6"/>
+          <p:cNvPr id="6" name="Rectangle 5"/>
           <p:cNvSpPr/>
           <p:nvPr/>
         </p:nvSpPr>
@@ -13010,7 +12458,7 @@
       </p:sp>
       <p:sp>
         <p:nvSpPr>
-          <p:cNvPr id="8" name="TextBox 7"/>
+          <p:cNvPr id="7" name="TextBox 6"/>
           <p:cNvSpPr txBox="1"/>
           <p:nvPr/>
         </p:nvSpPr>
@@ -13052,7 +12500,7 @@
       </p:sp>
       <p:sp>
         <p:nvSpPr>
-          <p:cNvPr id="9" name="TextBox 8"/>
+          <p:cNvPr id="8" name="TextBox 7"/>
           <p:cNvSpPr txBox="1"/>
           <p:nvPr/>
         </p:nvSpPr>
@@ -13094,7 +12542,7 @@
       </p:sp>
       <p:graphicFrame>
         <p:nvGraphicFramePr>
-          <p:cNvPr id="10" name="Table 9"/>
+          <p:cNvPr id="9" name="Table 8"/>
           <p:cNvGraphicFramePr>
             <a:graphicFrameLocks noGrp="1"/>
           </p:cNvGraphicFramePr>
@@ -13671,7 +13119,7 @@
       </p:graphicFrame>
       <p:sp>
         <p:nvSpPr>
-          <p:cNvPr id="11" name="Rectangle 10"/>
+          <p:cNvPr id="10" name="Rectangle 9"/>
           <p:cNvSpPr/>
           <p:nvPr/>
         </p:nvSpPr>
@@ -13720,7 +13168,7 @@
       </p:sp>
       <p:sp>
         <p:nvSpPr>
-          <p:cNvPr id="12" name="Rectangle 11"/>
+          <p:cNvPr id="11" name="Rectangle 10"/>
           <p:cNvSpPr/>
           <p:nvPr/>
         </p:nvSpPr>
@@ -13769,7 +13217,7 @@
       </p:sp>
       <p:sp>
         <p:nvSpPr>
-          <p:cNvPr id="13" name="TextBox 12"/>
+          <p:cNvPr id="12" name="TextBox 11"/>
           <p:cNvSpPr txBox="1"/>
           <p:nvPr/>
         </p:nvSpPr>
@@ -13811,7 +13259,7 @@
       </p:sp>
       <p:sp>
         <p:nvSpPr>
-          <p:cNvPr id="14" name="TextBox 13"/>
+          <p:cNvPr id="13" name="TextBox 12"/>
           <p:cNvSpPr txBox="1"/>
           <p:nvPr/>
         </p:nvSpPr>
@@ -13853,7 +13301,7 @@
       </p:sp>
       <p:sp>
         <p:nvSpPr>
-          <p:cNvPr id="15" name="TextBox 14"/>
+          <p:cNvPr id="14" name="TextBox 13"/>
           <p:cNvSpPr txBox="1"/>
           <p:nvPr/>
         </p:nvSpPr>
@@ -13895,7 +13343,7 @@
       </p:sp>
       <p:sp>
         <p:nvSpPr>
-          <p:cNvPr id="16" name="Rectangle 15"/>
+          <p:cNvPr id="15" name="Rectangle 14"/>
           <p:cNvSpPr/>
           <p:nvPr/>
         </p:nvSpPr>
@@ -13944,7 +13392,7 @@
       </p:sp>
       <p:sp>
         <p:nvSpPr>
-          <p:cNvPr id="17" name="TextBox 16"/>
+          <p:cNvPr id="16" name="TextBox 15"/>
           <p:cNvSpPr txBox="1"/>
           <p:nvPr/>
         </p:nvSpPr>
@@ -13986,7 +13434,7 @@
       </p:sp>
       <p:sp>
         <p:nvSpPr>
-          <p:cNvPr id="18" name="TextBox 17"/>
+          <p:cNvPr id="17" name="TextBox 16"/>
           <p:cNvSpPr txBox="1"/>
           <p:nvPr/>
         </p:nvSpPr>
@@ -14028,7 +13476,7 @@
       </p:sp>
       <p:sp>
         <p:nvSpPr>
-          <p:cNvPr id="19" name="TextBox 18"/>
+          <p:cNvPr id="18" name="TextBox 17"/>
           <p:cNvSpPr txBox="1"/>
           <p:nvPr/>
         </p:nvSpPr>
@@ -14144,7 +13592,7 @@
         <p:spPr>
           <a:xfrm>
             <a:off x="640080" y="329184"/>
-            <a:ext cx="5303520" cy="182880"/>
+            <a:ext cx="9875520" cy="182880"/>
           </a:xfrm>
           <a:prstGeom prst="rect">
             <a:avLst/>
@@ -14185,48 +13633,6 @@
         </p:nvSpPr>
         <p:spPr>
           <a:xfrm>
-            <a:off x="5897880" y="310896"/>
-            <a:ext cx="4800600" cy="256032"/>
-          </a:xfrm>
-          <a:prstGeom prst="rect">
-            <a:avLst/>
-          </a:prstGeom>
-          <a:noFill/>
-        </p:spPr>
-        <p:txBody>
-          <a:bodyPr wrap="none" lIns="9144" rIns="9144" tIns="9144" bIns="9144" anchor="t">
-            <a:spAutoFit/>
-          </a:bodyPr>
-          <a:lstStyle/>
-          <a:p>
-            <a:pPr algn="r">
-              <a:spcAft>
-                <a:spcPts val="0"/>
-              </a:spcAft>
-              <a:defRPr sz="680" b="1">
-                <a:solidFill>
-                  <a:srgbClr val="4F6B00"/>
-                </a:solidFill>
-                <a:latin typeface="Inter"/>
-              </a:defRPr>
-            </a:pPr>
-            <a:r>
-              <a:rPr>
-                <a:latin typeface="Inter"/>
-              </a:rPr>
-              <a:t>Illustrative, Gradient Maintained — demo data, not the client's holdings or managers</a:t>
-            </a:r>
-          </a:p>
-        </p:txBody>
-      </p:sp>
-      <p:sp>
-        <p:nvSpPr>
-          <p:cNvPr id="5" name="TextBox 4"/>
-          <p:cNvSpPr txBox="1"/>
-          <p:nvPr/>
-        </p:nvSpPr>
-        <p:spPr>
-          <a:xfrm>
             <a:off x="640080" y="566928"/>
             <a:ext cx="10058400" cy="530352"/>
           </a:xfrm>
@@ -14263,7 +13669,7 @@
       </p:sp>
       <p:sp>
         <p:nvSpPr>
-          <p:cNvPr id="6" name="Rectangle 5"/>
+          <p:cNvPr id="5" name="Rectangle 4"/>
           <p:cNvSpPr/>
           <p:nvPr/>
         </p:nvSpPr>
@@ -14312,7 +13718,7 @@
       </p:sp>
       <p:sp>
         <p:nvSpPr>
-          <p:cNvPr id="7" name="Rectangle 6"/>
+          <p:cNvPr id="6" name="Rectangle 5"/>
           <p:cNvSpPr/>
           <p:nvPr/>
         </p:nvSpPr>
@@ -14361,7 +13767,7 @@
       </p:sp>
       <p:sp>
         <p:nvSpPr>
-          <p:cNvPr id="8" name="TextBox 7"/>
+          <p:cNvPr id="7" name="TextBox 6"/>
           <p:cNvSpPr txBox="1"/>
           <p:nvPr/>
         </p:nvSpPr>
@@ -14403,7 +13809,7 @@
       </p:sp>
       <p:sp>
         <p:nvSpPr>
-          <p:cNvPr id="9" name="TextBox 8"/>
+          <p:cNvPr id="8" name="TextBox 7"/>
           <p:cNvSpPr txBox="1"/>
           <p:nvPr/>
         </p:nvSpPr>
@@ -14445,7 +13851,7 @@
       </p:sp>
       <p:graphicFrame>
         <p:nvGraphicFramePr>
-          <p:cNvPr id="10" name="Chart 9"/>
+          <p:cNvPr id="9" name="Chart 8"/>
           <p:cNvGraphicFramePr>
             <a:graphicFrameLocks noGrp="1"/>
           </p:cNvGraphicFramePr>
@@ -14463,7 +13869,7 @@
       </p:graphicFrame>
       <p:sp>
         <p:nvSpPr>
-          <p:cNvPr id="11" name="Rectangle 10"/>
+          <p:cNvPr id="10" name="Rectangle 9"/>
           <p:cNvSpPr/>
           <p:nvPr/>
         </p:nvSpPr>
@@ -14512,7 +13918,7 @@
       </p:sp>
       <p:sp>
         <p:nvSpPr>
-          <p:cNvPr id="12" name="TextBox 11"/>
+          <p:cNvPr id="11" name="TextBox 10"/>
           <p:cNvSpPr txBox="1"/>
           <p:nvPr/>
         </p:nvSpPr>
@@ -14554,7 +13960,7 @@
       </p:sp>
       <p:sp>
         <p:nvSpPr>
-          <p:cNvPr id="13" name="TextBox 12"/>
+          <p:cNvPr id="12" name="TextBox 11"/>
           <p:cNvSpPr txBox="1"/>
           <p:nvPr/>
         </p:nvSpPr>
@@ -14596,7 +14002,7 @@
       </p:sp>
       <p:sp>
         <p:nvSpPr>
-          <p:cNvPr id="14" name="TextBox 13"/>
+          <p:cNvPr id="13" name="TextBox 12"/>
           <p:cNvSpPr txBox="1"/>
           <p:nvPr/>
         </p:nvSpPr>
@@ -14712,7 +14118,7 @@
         <p:spPr>
           <a:xfrm>
             <a:off x="640080" y="329184"/>
-            <a:ext cx="5303520" cy="182880"/>
+            <a:ext cx="9875520" cy="182880"/>
           </a:xfrm>
           <a:prstGeom prst="rect">
             <a:avLst/>
@@ -14753,48 +14159,6 @@
         </p:nvSpPr>
         <p:spPr>
           <a:xfrm>
-            <a:off x="5897880" y="310896"/>
-            <a:ext cx="4800600" cy="256032"/>
-          </a:xfrm>
-          <a:prstGeom prst="rect">
-            <a:avLst/>
-          </a:prstGeom>
-          <a:noFill/>
-        </p:spPr>
-        <p:txBody>
-          <a:bodyPr wrap="none" lIns="9144" rIns="9144" tIns="9144" bIns="9144" anchor="t">
-            <a:spAutoFit/>
-          </a:bodyPr>
-          <a:lstStyle/>
-          <a:p>
-            <a:pPr algn="r">
-              <a:spcAft>
-                <a:spcPts val="0"/>
-              </a:spcAft>
-              <a:defRPr sz="680" b="1">
-                <a:solidFill>
-                  <a:srgbClr val="4F6B00"/>
-                </a:solidFill>
-                <a:latin typeface="Inter"/>
-              </a:defRPr>
-            </a:pPr>
-            <a:r>
-              <a:rPr>
-                <a:latin typeface="Inter"/>
-              </a:rPr>
-              <a:t>Illustrative, Gradient Maintained — demo data, not the client's holdings or managers</a:t>
-            </a:r>
-          </a:p>
-        </p:txBody>
-      </p:sp>
-      <p:sp>
-        <p:nvSpPr>
-          <p:cNvPr id="5" name="TextBox 4"/>
-          <p:cNvSpPr txBox="1"/>
-          <p:nvPr/>
-        </p:nvSpPr>
-        <p:spPr>
-          <a:xfrm>
             <a:off x="640080" y="566928"/>
             <a:ext cx="10058400" cy="530352"/>
           </a:xfrm>
@@ -14831,7 +14195,7 @@
       </p:sp>
       <p:sp>
         <p:nvSpPr>
-          <p:cNvPr id="6" name="Rectangle 5"/>
+          <p:cNvPr id="5" name="Rectangle 4"/>
           <p:cNvSpPr/>
           <p:nvPr/>
         </p:nvSpPr>
@@ -14880,7 +14244,7 @@
       </p:sp>
       <p:sp>
         <p:nvSpPr>
-          <p:cNvPr id="7" name="Rectangle 6"/>
+          <p:cNvPr id="6" name="Rectangle 5"/>
           <p:cNvSpPr/>
           <p:nvPr/>
         </p:nvSpPr>
@@ -14929,7 +14293,7 @@
       </p:sp>
       <p:sp>
         <p:nvSpPr>
-          <p:cNvPr id="8" name="TextBox 7"/>
+          <p:cNvPr id="7" name="TextBox 6"/>
           <p:cNvSpPr txBox="1"/>
           <p:nvPr/>
         </p:nvSpPr>
@@ -14971,7 +14335,7 @@
       </p:sp>
       <p:graphicFrame>
         <p:nvGraphicFramePr>
-          <p:cNvPr id="9" name="Table 8"/>
+          <p:cNvPr id="8" name="Table 7"/>
           <p:cNvGraphicFramePr>
             <a:graphicFrameLocks noGrp="1"/>
           </p:cNvGraphicFramePr>
@@ -15277,7 +14641,7 @@
       </p:graphicFrame>
       <p:sp>
         <p:nvSpPr>
-          <p:cNvPr id="10" name="Rectangle 9"/>
+          <p:cNvPr id="9" name="Rectangle 8"/>
           <p:cNvSpPr/>
           <p:nvPr/>
         </p:nvSpPr>
@@ -15326,7 +14690,7 @@
       </p:sp>
       <p:sp>
         <p:nvSpPr>
-          <p:cNvPr id="11" name="TextBox 10"/>
+          <p:cNvPr id="10" name="TextBox 9"/>
           <p:cNvSpPr txBox="1"/>
           <p:nvPr/>
         </p:nvSpPr>
@@ -15368,7 +14732,7 @@
       </p:sp>
       <p:sp>
         <p:nvSpPr>
-          <p:cNvPr id="12" name="TextBox 11"/>
+          <p:cNvPr id="11" name="TextBox 10"/>
           <p:cNvSpPr txBox="1"/>
           <p:nvPr/>
         </p:nvSpPr>
@@ -15410,7 +14774,7 @@
       </p:sp>
       <p:sp>
         <p:nvSpPr>
-          <p:cNvPr id="13" name="TextBox 12"/>
+          <p:cNvPr id="12" name="TextBox 11"/>
           <p:cNvSpPr txBox="1"/>
           <p:nvPr/>
         </p:nvSpPr>
@@ -15525,48 +14889,6 @@
         </p:nvSpPr>
         <p:spPr>
           <a:xfrm>
-            <a:off x="5897880" y="310896"/>
-            <a:ext cx="4800600" cy="256032"/>
-          </a:xfrm>
-          <a:prstGeom prst="rect">
-            <a:avLst/>
-          </a:prstGeom>
-          <a:noFill/>
-        </p:spPr>
-        <p:txBody>
-          <a:bodyPr wrap="none" lIns="9144" rIns="9144" tIns="9144" bIns="9144" anchor="t">
-            <a:spAutoFit/>
-          </a:bodyPr>
-          <a:lstStyle/>
-          <a:p>
-            <a:pPr algn="r">
-              <a:spcAft>
-                <a:spcPts val="0"/>
-              </a:spcAft>
-              <a:defRPr sz="680" b="1">
-                <a:solidFill>
-                  <a:srgbClr val="4F6B00"/>
-                </a:solidFill>
-                <a:latin typeface="Inter"/>
-              </a:defRPr>
-            </a:pPr>
-            <a:r>
-              <a:rPr>
-                <a:latin typeface="Inter"/>
-              </a:rPr>
-              <a:t>Illustrative, Gradient Maintained — demo data, not the client's holdings or managers</a:t>
-            </a:r>
-          </a:p>
-        </p:txBody>
-      </p:sp>
-      <p:sp>
-        <p:nvSpPr>
-          <p:cNvPr id="4" name="TextBox 3"/>
-          <p:cNvSpPr txBox="1"/>
-          <p:nvPr/>
-        </p:nvSpPr>
-        <p:spPr>
-          <a:xfrm>
             <a:off x="640080" y="566928"/>
             <a:ext cx="10058400" cy="530352"/>
           </a:xfrm>
@@ -15603,7 +14925,7 @@
       </p:sp>
       <p:sp>
         <p:nvSpPr>
-          <p:cNvPr id="5" name="Rectangle 4"/>
+          <p:cNvPr id="4" name="Rectangle 3"/>
           <p:cNvSpPr/>
           <p:nvPr/>
         </p:nvSpPr>
@@ -15652,7 +14974,7 @@
       </p:sp>
       <p:sp>
         <p:nvSpPr>
-          <p:cNvPr id="6" name="Rectangle 5"/>
+          <p:cNvPr id="5" name="Rectangle 4"/>
           <p:cNvSpPr/>
           <p:nvPr/>
         </p:nvSpPr>
@@ -15701,7 +15023,7 @@
       </p:sp>
       <p:sp>
         <p:nvSpPr>
-          <p:cNvPr id="7" name="TextBox 6"/>
+          <p:cNvPr id="6" name="TextBox 5"/>
           <p:cNvSpPr txBox="1"/>
           <p:nvPr/>
         </p:nvSpPr>
@@ -15743,14 +15065,105 @@
       </p:sp>
       <p:sp>
         <p:nvSpPr>
-          <p:cNvPr id="8" name="Rectangle 7"/>
+          <p:cNvPr id="7" name="Rectangle 6"/>
           <p:cNvSpPr/>
           <p:nvPr/>
         </p:nvSpPr>
         <p:spPr>
           <a:xfrm>
-            <a:off x="640080" y="1325880"/>
-            <a:ext cx="10908792" cy="2549192"/>
+            <a:off x="640080" y="1399032"/>
+            <a:ext cx="73152" cy="928803"/>
+          </a:xfrm>
+          <a:prstGeom prst="rect">
+            <a:avLst/>
+          </a:prstGeom>
+          <a:solidFill>
+            <a:srgbClr val="F2A93B"/>
+          </a:solidFill>
+          <a:ln>
+            <a:solidFill>
+              <a:srgbClr val="F2A93B"/>
+            </a:solidFill>
+          </a:ln>
+        </p:spPr>
+        <p:style>
+          <a:lnRef idx="1">
+            <a:schemeClr val="accent1"/>
+          </a:lnRef>
+          <a:fillRef idx="3">
+            <a:schemeClr val="accent1"/>
+          </a:fillRef>
+          <a:effectRef idx="2">
+            <a:schemeClr val="accent1"/>
+          </a:effectRef>
+          <a:fontRef idx="minor">
+            <a:schemeClr val="lt1"/>
+          </a:fontRef>
+        </p:style>
+        <p:txBody>
+          <a:bodyPr rtlCol="0" anchor="ctr"/>
+          <a:lstStyle/>
+          <a:p>
+            <a:pPr algn="ctr">
+              <a:defRPr>
+                <a:latin typeface="Inter"/>
+              </a:defRPr>
+            </a:pPr>
+          </a:p>
+        </p:txBody>
+      </p:sp>
+      <p:sp>
+        <p:nvSpPr>
+          <p:cNvPr id="8" name="TextBox 7"/>
+          <p:cNvSpPr txBox="1"/>
+          <p:nvPr/>
+        </p:nvSpPr>
+        <p:spPr>
+          <a:xfrm>
+            <a:off x="896112" y="1371600"/>
+            <a:ext cx="10588752" cy="623562"/>
+          </a:xfrm>
+          <a:prstGeom prst="rect">
+            <a:avLst/>
+          </a:prstGeom>
+          <a:noFill/>
+        </p:spPr>
+        <p:txBody>
+          <a:bodyPr wrap="none" lIns="9144" rIns="9144" tIns="9144" bIns="9144" anchor="t">
+            <a:spAutoFit/>
+          </a:bodyPr>
+          <a:lstStyle/>
+          <a:p>
+            <a:pPr algn="l">
+              <a:spcAft>
+                <a:spcPts val="0"/>
+              </a:spcAft>
+              <a:defRPr sz="1800" b="1">
+                <a:solidFill>
+                  <a:srgbClr val="0D1117"/>
+                </a:solidFill>
+                <a:latin typeface="Inter"/>
+              </a:defRPr>
+            </a:pPr>
+            <a:r>
+              <a:rPr>
+                <a:latin typeface="Inter"/>
+              </a:rPr>
+              <a:t>Valuation lag and structure mix need monitoring</a:t>
+            </a:r>
+          </a:p>
+        </p:txBody>
+      </p:sp>
+      <p:sp>
+        <p:nvSpPr>
+          <p:cNvPr id="9" name="Rectangle 8"/>
+          <p:cNvSpPr/>
+          <p:nvPr/>
+        </p:nvSpPr>
+        <p:spPr>
+          <a:xfrm>
+            <a:off x="640080" y="2510715"/>
+            <a:ext cx="10908792" cy="1917620"/>
           </a:xfrm>
           <a:prstGeom prst="rect">
             <a:avLst/>
@@ -15792,14 +15205,14 @@
       </p:sp>
       <p:sp>
         <p:nvSpPr>
-          <p:cNvPr id="9" name="Rectangle 8"/>
+          <p:cNvPr id="10" name="Rectangle 9"/>
           <p:cNvSpPr/>
           <p:nvPr/>
         </p:nvSpPr>
         <p:spPr>
           <a:xfrm>
-            <a:off x="640080" y="1325880"/>
-            <a:ext cx="54864" cy="2549192"/>
+            <a:off x="640080" y="2510715"/>
+            <a:ext cx="54864" cy="1917620"/>
           </a:xfrm>
           <a:prstGeom prst="rect">
             <a:avLst/>
@@ -15841,13 +15254,13 @@
       </p:sp>
       <p:sp>
         <p:nvSpPr>
-          <p:cNvPr id="10" name="TextBox 9"/>
+          <p:cNvPr id="11" name="TextBox 10"/>
           <p:cNvSpPr txBox="1"/>
           <p:nvPr/>
         </p:nvSpPr>
         <p:spPr>
           <a:xfrm>
-            <a:off x="804671" y="1435607"/>
+            <a:off x="804671" y="2620443"/>
             <a:ext cx="10616184" cy="228600"/>
           </a:xfrm>
           <a:prstGeom prst="rect">
@@ -15883,14 +15296,14 @@
       </p:sp>
       <p:sp>
         <p:nvSpPr>
-          <p:cNvPr id="11" name="TextBox 10"/>
+          <p:cNvPr id="12" name="TextBox 11"/>
           <p:cNvSpPr txBox="1"/>
           <p:nvPr/>
         </p:nvSpPr>
         <p:spPr>
           <a:xfrm>
-            <a:off x="804671" y="1719072"/>
-            <a:ext cx="10616184" cy="2064560"/>
+            <a:off x="804671" y="2903907"/>
+            <a:ext cx="10616184" cy="1432988"/>
           </a:xfrm>
           <a:prstGeom prst="rect">
             <a:avLst/>
@@ -15925,14 +15338,14 @@
       </p:sp>
       <p:sp>
         <p:nvSpPr>
-          <p:cNvPr id="12" name="Rectangle 11"/>
+          <p:cNvPr id="13" name="Rectangle 12"/>
           <p:cNvSpPr/>
           <p:nvPr/>
         </p:nvSpPr>
         <p:spPr>
           <a:xfrm>
-            <a:off x="640080" y="3984800"/>
-            <a:ext cx="2644902" cy="2233119"/>
+            <a:off x="640080" y="4538064"/>
+            <a:ext cx="2644902" cy="1679855"/>
           </a:xfrm>
           <a:prstGeom prst="rect">
             <a:avLst/>
@@ -15974,13 +15387,13 @@
       </p:sp>
       <p:sp>
         <p:nvSpPr>
-          <p:cNvPr id="13" name="Rectangle 12"/>
+          <p:cNvPr id="14" name="Rectangle 13"/>
           <p:cNvSpPr/>
           <p:nvPr/>
         </p:nvSpPr>
         <p:spPr>
           <a:xfrm>
-            <a:off x="640080" y="3984800"/>
+            <a:off x="640080" y="4538064"/>
             <a:ext cx="2644902" cy="45720"/>
           </a:xfrm>
           <a:prstGeom prst="rect">
@@ -16023,13 +15436,13 @@
       </p:sp>
       <p:sp>
         <p:nvSpPr>
-          <p:cNvPr id="14" name="TextBox 13"/>
+          <p:cNvPr id="15" name="TextBox 14"/>
           <p:cNvSpPr txBox="1"/>
           <p:nvPr/>
         </p:nvSpPr>
         <p:spPr>
           <a:xfrm>
-            <a:off x="749808" y="4112816"/>
+            <a:off x="749808" y="4666080"/>
             <a:ext cx="2425446" cy="201168"/>
           </a:xfrm>
           <a:prstGeom prst="rect">
@@ -16065,13 +15478,13 @@
       </p:sp>
       <p:sp>
         <p:nvSpPr>
-          <p:cNvPr id="15" name="TextBox 14"/>
+          <p:cNvPr id="16" name="TextBox 15"/>
           <p:cNvSpPr txBox="1"/>
           <p:nvPr/>
         </p:nvSpPr>
         <p:spPr>
           <a:xfrm>
-            <a:off x="749808" y="4368848"/>
+            <a:off x="749808" y="4922112"/>
             <a:ext cx="2425446" cy="475488"/>
           </a:xfrm>
           <a:prstGeom prst="rect">
@@ -16107,7 +15520,7 @@
       </p:sp>
       <p:sp>
         <p:nvSpPr>
-          <p:cNvPr id="16" name="TextBox 15"/>
+          <p:cNvPr id="17" name="TextBox 16"/>
           <p:cNvSpPr txBox="1"/>
           <p:nvPr/>
         </p:nvSpPr>
@@ -16149,14 +15562,14 @@
       </p:sp>
       <p:sp>
         <p:nvSpPr>
-          <p:cNvPr id="17" name="Rectangle 16"/>
+          <p:cNvPr id="18" name="Rectangle 17"/>
           <p:cNvSpPr/>
           <p:nvPr/>
         </p:nvSpPr>
         <p:spPr>
           <a:xfrm>
-            <a:off x="3394710" y="3984800"/>
-            <a:ext cx="2644902" cy="2233119"/>
+            <a:off x="3394710" y="4538064"/>
+            <a:ext cx="2644902" cy="1679855"/>
           </a:xfrm>
           <a:prstGeom prst="rect">
             <a:avLst/>
@@ -16198,13 +15611,13 @@
       </p:sp>
       <p:sp>
         <p:nvSpPr>
-          <p:cNvPr id="18" name="Rectangle 17"/>
+          <p:cNvPr id="19" name="Rectangle 18"/>
           <p:cNvSpPr/>
           <p:nvPr/>
         </p:nvSpPr>
         <p:spPr>
           <a:xfrm>
-            <a:off x="3394710" y="3984800"/>
+            <a:off x="3394710" y="4538064"/>
             <a:ext cx="2644902" cy="45720"/>
           </a:xfrm>
           <a:prstGeom prst="rect">
@@ -16247,13 +15660,13 @@
       </p:sp>
       <p:sp>
         <p:nvSpPr>
-          <p:cNvPr id="19" name="TextBox 18"/>
+          <p:cNvPr id="20" name="TextBox 19"/>
           <p:cNvSpPr txBox="1"/>
           <p:nvPr/>
         </p:nvSpPr>
         <p:spPr>
           <a:xfrm>
-            <a:off x="3504438" y="4112816"/>
+            <a:off x="3504438" y="4666080"/>
             <a:ext cx="2425446" cy="201168"/>
           </a:xfrm>
           <a:prstGeom prst="rect">
@@ -16289,13 +15702,13 @@
       </p:sp>
       <p:sp>
         <p:nvSpPr>
-          <p:cNvPr id="20" name="TextBox 19"/>
+          <p:cNvPr id="21" name="TextBox 20"/>
           <p:cNvSpPr txBox="1"/>
           <p:nvPr/>
         </p:nvSpPr>
         <p:spPr>
           <a:xfrm>
-            <a:off x="3504438" y="4368848"/>
+            <a:off x="3504438" y="4922112"/>
             <a:ext cx="2425446" cy="475488"/>
           </a:xfrm>
           <a:prstGeom prst="rect">
@@ -16331,7 +15744,7 @@
       </p:sp>
       <p:sp>
         <p:nvSpPr>
-          <p:cNvPr id="21" name="TextBox 20"/>
+          <p:cNvPr id="22" name="TextBox 21"/>
           <p:cNvSpPr txBox="1"/>
           <p:nvPr/>
         </p:nvSpPr>
@@ -16373,14 +15786,14 @@
       </p:sp>
       <p:sp>
         <p:nvSpPr>
-          <p:cNvPr id="22" name="Rectangle 21"/>
+          <p:cNvPr id="23" name="Rectangle 22"/>
           <p:cNvSpPr/>
           <p:nvPr/>
         </p:nvSpPr>
         <p:spPr>
           <a:xfrm>
-            <a:off x="6149340" y="3984800"/>
-            <a:ext cx="2644902" cy="2233119"/>
+            <a:off x="6149340" y="4538064"/>
+            <a:ext cx="2644902" cy="1679855"/>
           </a:xfrm>
           <a:prstGeom prst="rect">
             <a:avLst/>
@@ -16422,13 +15835,13 @@
       </p:sp>
       <p:sp>
         <p:nvSpPr>
-          <p:cNvPr id="23" name="Rectangle 22"/>
+          <p:cNvPr id="24" name="Rectangle 23"/>
           <p:cNvSpPr/>
           <p:nvPr/>
         </p:nvSpPr>
         <p:spPr>
           <a:xfrm>
-            <a:off x="6149340" y="3984800"/>
+            <a:off x="6149340" y="4538064"/>
             <a:ext cx="2644902" cy="45720"/>
           </a:xfrm>
           <a:prstGeom prst="rect">
@@ -16471,13 +15884,13 @@
       </p:sp>
       <p:sp>
         <p:nvSpPr>
-          <p:cNvPr id="24" name="TextBox 23"/>
+          <p:cNvPr id="25" name="TextBox 24"/>
           <p:cNvSpPr txBox="1"/>
           <p:nvPr/>
         </p:nvSpPr>
         <p:spPr>
           <a:xfrm>
-            <a:off x="6259068" y="4112816"/>
+            <a:off x="6259068" y="4666080"/>
             <a:ext cx="2425446" cy="201168"/>
           </a:xfrm>
           <a:prstGeom prst="rect">
@@ -16513,13 +15926,13 @@
       </p:sp>
       <p:sp>
         <p:nvSpPr>
-          <p:cNvPr id="25" name="TextBox 24"/>
+          <p:cNvPr id="26" name="TextBox 25"/>
           <p:cNvSpPr txBox="1"/>
           <p:nvPr/>
         </p:nvSpPr>
         <p:spPr>
           <a:xfrm>
-            <a:off x="6259068" y="4368848"/>
+            <a:off x="6259068" y="4922112"/>
             <a:ext cx="2425446" cy="475488"/>
           </a:xfrm>
           <a:prstGeom prst="rect">
@@ -16555,7 +15968,7 @@
       </p:sp>
       <p:sp>
         <p:nvSpPr>
-          <p:cNvPr id="26" name="TextBox 25"/>
+          <p:cNvPr id="27" name="TextBox 26"/>
           <p:cNvSpPr txBox="1"/>
           <p:nvPr/>
         </p:nvSpPr>
@@ -16597,14 +16010,14 @@
       </p:sp>
       <p:sp>
         <p:nvSpPr>
-          <p:cNvPr id="27" name="Rectangle 26"/>
+          <p:cNvPr id="28" name="Rectangle 27"/>
           <p:cNvSpPr/>
           <p:nvPr/>
         </p:nvSpPr>
         <p:spPr>
           <a:xfrm>
-            <a:off x="8903970" y="3984800"/>
-            <a:ext cx="2644902" cy="2233119"/>
+            <a:off x="8903970" y="4538064"/>
+            <a:ext cx="2644902" cy="1679855"/>
           </a:xfrm>
           <a:prstGeom prst="rect">
             <a:avLst/>
@@ -16646,13 +16059,13 @@
       </p:sp>
       <p:sp>
         <p:nvSpPr>
-          <p:cNvPr id="28" name="Rectangle 27"/>
+          <p:cNvPr id="29" name="Rectangle 28"/>
           <p:cNvSpPr/>
           <p:nvPr/>
         </p:nvSpPr>
         <p:spPr>
           <a:xfrm>
-            <a:off x="8903970" y="3984800"/>
+            <a:off x="8903970" y="4538064"/>
             <a:ext cx="2644902" cy="45720"/>
           </a:xfrm>
           <a:prstGeom prst="rect">
@@ -16695,13 +16108,13 @@
       </p:sp>
       <p:sp>
         <p:nvSpPr>
-          <p:cNvPr id="29" name="TextBox 28"/>
+          <p:cNvPr id="30" name="TextBox 29"/>
           <p:cNvSpPr txBox="1"/>
           <p:nvPr/>
         </p:nvSpPr>
         <p:spPr>
           <a:xfrm>
-            <a:off x="9013698" y="4112816"/>
+            <a:off x="9013698" y="4666080"/>
             <a:ext cx="2425446" cy="201168"/>
           </a:xfrm>
           <a:prstGeom prst="rect">
@@ -16737,13 +16150,13 @@
       </p:sp>
       <p:sp>
         <p:nvSpPr>
-          <p:cNvPr id="30" name="TextBox 29"/>
+          <p:cNvPr id="31" name="TextBox 30"/>
           <p:cNvSpPr txBox="1"/>
           <p:nvPr/>
         </p:nvSpPr>
         <p:spPr>
           <a:xfrm>
-            <a:off x="9013698" y="4368848"/>
+            <a:off x="9013698" y="4922112"/>
             <a:ext cx="2425446" cy="475488"/>
           </a:xfrm>
           <a:prstGeom prst="rect">
@@ -16772,14 +16185,14 @@
               <a:rPr>
                 <a:latin typeface="Inter"/>
               </a:rPr>
-              <a:t>Watch</a:t>
+              <a:t>Near limit</a:t>
             </a:r>
           </a:p>
         </p:txBody>
       </p:sp>
       <p:sp>
         <p:nvSpPr>
-          <p:cNvPr id="31" name="TextBox 30"/>
+          <p:cNvPr id="32" name="TextBox 31"/>
           <p:cNvSpPr txBox="1"/>
           <p:nvPr/>
         </p:nvSpPr>
@@ -16821,7 +16234,7 @@
       </p:sp>
       <p:sp>
         <p:nvSpPr>
-          <p:cNvPr id="32" name="Rectangle 31"/>
+          <p:cNvPr id="33" name="Rectangle 32"/>
           <p:cNvSpPr/>
           <p:nvPr/>
         </p:nvSpPr>
@@ -16870,7 +16283,7 @@
       </p:sp>
       <p:sp>
         <p:nvSpPr>
-          <p:cNvPr id="33" name="TextBox 32"/>
+          <p:cNvPr id="34" name="TextBox 33"/>
           <p:cNvSpPr txBox="1"/>
           <p:nvPr/>
         </p:nvSpPr>
@@ -16912,7 +16325,7 @@
       </p:sp>
       <p:sp>
         <p:nvSpPr>
-          <p:cNvPr id="34" name="TextBox 33"/>
+          <p:cNvPr id="35" name="TextBox 34"/>
           <p:cNvSpPr txBox="1"/>
           <p:nvPr/>
         </p:nvSpPr>
@@ -16954,7 +16367,7 @@
       </p:sp>
       <p:sp>
         <p:nvSpPr>
-          <p:cNvPr id="35" name="TextBox 34"/>
+          <p:cNvPr id="36" name="TextBox 35"/>
           <p:cNvSpPr txBox="1"/>
           <p:nvPr/>
         </p:nvSpPr>
@@ -17070,7 +16483,7 @@
         <p:spPr>
           <a:xfrm>
             <a:off x="640080" y="329184"/>
-            <a:ext cx="5303520" cy="182880"/>
+            <a:ext cx="9875520" cy="182880"/>
           </a:xfrm>
           <a:prstGeom prst="rect">
             <a:avLst/>
@@ -17111,48 +16524,6 @@
         </p:nvSpPr>
         <p:spPr>
           <a:xfrm>
-            <a:off x="5897880" y="310896"/>
-            <a:ext cx="4800600" cy="256032"/>
-          </a:xfrm>
-          <a:prstGeom prst="rect">
-            <a:avLst/>
-          </a:prstGeom>
-          <a:noFill/>
-        </p:spPr>
-        <p:txBody>
-          <a:bodyPr wrap="none" lIns="9144" rIns="9144" tIns="9144" bIns="9144" anchor="t">
-            <a:spAutoFit/>
-          </a:bodyPr>
-          <a:lstStyle/>
-          <a:p>
-            <a:pPr algn="r">
-              <a:spcAft>
-                <a:spcPts val="0"/>
-              </a:spcAft>
-              <a:defRPr sz="680" b="1">
-                <a:solidFill>
-                  <a:srgbClr val="4F6B00"/>
-                </a:solidFill>
-                <a:latin typeface="Inter"/>
-              </a:defRPr>
-            </a:pPr>
-            <a:r>
-              <a:rPr>
-                <a:latin typeface="Inter"/>
-              </a:rPr>
-              <a:t>Illustrative, Gradient Maintained — demo data, not the client's holdings or managers</a:t>
-            </a:r>
-          </a:p>
-        </p:txBody>
-      </p:sp>
-      <p:sp>
-        <p:nvSpPr>
-          <p:cNvPr id="5" name="TextBox 4"/>
-          <p:cNvSpPr txBox="1"/>
-          <p:nvPr/>
-        </p:nvSpPr>
-        <p:spPr>
-          <a:xfrm>
             <a:off x="640080" y="566928"/>
             <a:ext cx="10058400" cy="530352"/>
           </a:xfrm>
@@ -17189,7 +16560,7 @@
       </p:sp>
       <p:sp>
         <p:nvSpPr>
-          <p:cNvPr id="6" name="Rectangle 5"/>
+          <p:cNvPr id="5" name="Rectangle 4"/>
           <p:cNvSpPr/>
           <p:nvPr/>
         </p:nvSpPr>
@@ -17238,7 +16609,7 @@
       </p:sp>
       <p:sp>
         <p:nvSpPr>
-          <p:cNvPr id="7" name="Rectangle 6"/>
+          <p:cNvPr id="6" name="Rectangle 5"/>
           <p:cNvSpPr/>
           <p:nvPr/>
         </p:nvSpPr>
@@ -17287,7 +16658,7 @@
       </p:sp>
       <p:sp>
         <p:nvSpPr>
-          <p:cNvPr id="8" name="TextBox 7"/>
+          <p:cNvPr id="7" name="TextBox 6"/>
           <p:cNvSpPr txBox="1"/>
           <p:nvPr/>
         </p:nvSpPr>
@@ -17329,7 +16700,7 @@
       </p:sp>
       <p:sp>
         <p:nvSpPr>
-          <p:cNvPr id="9" name="TextBox 8"/>
+          <p:cNvPr id="8" name="TextBox 7"/>
           <p:cNvSpPr txBox="1"/>
           <p:nvPr/>
         </p:nvSpPr>
@@ -17371,7 +16742,7 @@
       </p:sp>
       <p:graphicFrame>
         <p:nvGraphicFramePr>
-          <p:cNvPr id="10" name="Table 9"/>
+          <p:cNvPr id="9" name="Table 8"/>
           <p:cNvGraphicFramePr>
             <a:graphicFrameLocks noGrp="1"/>
           </p:cNvGraphicFramePr>
@@ -17730,7 +17101,7 @@
       </p:graphicFrame>
       <p:sp>
         <p:nvSpPr>
-          <p:cNvPr id="11" name="Rectangle 10"/>
+          <p:cNvPr id="10" name="Rectangle 9"/>
           <p:cNvSpPr/>
           <p:nvPr/>
         </p:nvSpPr>
@@ -17779,7 +17150,7 @@
       </p:sp>
       <p:sp>
         <p:nvSpPr>
-          <p:cNvPr id="12" name="TextBox 11"/>
+          <p:cNvPr id="11" name="TextBox 10"/>
           <p:cNvSpPr txBox="1"/>
           <p:nvPr/>
         </p:nvSpPr>
@@ -17821,7 +17192,7 @@
       </p:sp>
       <p:sp>
         <p:nvSpPr>
-          <p:cNvPr id="13" name="TextBox 12"/>
+          <p:cNvPr id="12" name="TextBox 11"/>
           <p:cNvSpPr txBox="1"/>
           <p:nvPr/>
         </p:nvSpPr>
@@ -17863,7 +17234,7 @@
       </p:sp>
       <p:sp>
         <p:nvSpPr>
-          <p:cNvPr id="14" name="TextBox 13"/>
+          <p:cNvPr id="13" name="TextBox 12"/>
           <p:cNvSpPr txBox="1"/>
           <p:nvPr/>
         </p:nvSpPr>
@@ -17979,7 +17350,7 @@
         <p:spPr>
           <a:xfrm>
             <a:off x="640080" y="329184"/>
-            <a:ext cx="5303520" cy="182880"/>
+            <a:ext cx="9875520" cy="182880"/>
           </a:xfrm>
           <a:prstGeom prst="rect">
             <a:avLst/>
@@ -18020,48 +17391,6 @@
         </p:nvSpPr>
         <p:spPr>
           <a:xfrm>
-            <a:off x="5897880" y="310896"/>
-            <a:ext cx="4800600" cy="256032"/>
-          </a:xfrm>
-          <a:prstGeom prst="rect">
-            <a:avLst/>
-          </a:prstGeom>
-          <a:noFill/>
-        </p:spPr>
-        <p:txBody>
-          <a:bodyPr wrap="none" lIns="9144" rIns="9144" tIns="9144" bIns="9144" anchor="t">
-            <a:spAutoFit/>
-          </a:bodyPr>
-          <a:lstStyle/>
-          <a:p>
-            <a:pPr algn="r">
-              <a:spcAft>
-                <a:spcPts val="0"/>
-              </a:spcAft>
-              <a:defRPr sz="680" b="1">
-                <a:solidFill>
-                  <a:srgbClr val="4F6B00"/>
-                </a:solidFill>
-                <a:latin typeface="Inter"/>
-              </a:defRPr>
-            </a:pPr>
-            <a:r>
-              <a:rPr>
-                <a:latin typeface="Inter"/>
-              </a:rPr>
-              <a:t>Illustrative, Gradient Maintained — demo data, not the client's holdings or managers</a:t>
-            </a:r>
-          </a:p>
-        </p:txBody>
-      </p:sp>
-      <p:sp>
-        <p:nvSpPr>
-          <p:cNvPr id="5" name="TextBox 4"/>
-          <p:cNvSpPr txBox="1"/>
-          <p:nvPr/>
-        </p:nvSpPr>
-        <p:spPr>
-          <a:xfrm>
             <a:off x="640080" y="566928"/>
             <a:ext cx="10058400" cy="530352"/>
           </a:xfrm>
@@ -18098,7 +17427,7 @@
       </p:sp>
       <p:sp>
         <p:nvSpPr>
-          <p:cNvPr id="6" name="Rectangle 5"/>
+          <p:cNvPr id="5" name="Rectangle 4"/>
           <p:cNvSpPr/>
           <p:nvPr/>
         </p:nvSpPr>
@@ -18147,7 +17476,7 @@
       </p:sp>
       <p:sp>
         <p:nvSpPr>
-          <p:cNvPr id="7" name="Rectangle 6"/>
+          <p:cNvPr id="6" name="Rectangle 5"/>
           <p:cNvSpPr/>
           <p:nvPr/>
         </p:nvSpPr>
@@ -18196,7 +17525,7 @@
       </p:sp>
       <p:sp>
         <p:nvSpPr>
-          <p:cNvPr id="8" name="TextBox 7"/>
+          <p:cNvPr id="7" name="TextBox 6"/>
           <p:cNvSpPr txBox="1"/>
           <p:nvPr/>
         </p:nvSpPr>
@@ -18238,7 +17567,7 @@
       </p:sp>
       <p:sp>
         <p:nvSpPr>
-          <p:cNvPr id="9" name="Rectangle 8"/>
+          <p:cNvPr id="8" name="Rectangle 7"/>
           <p:cNvSpPr/>
           <p:nvPr/>
         </p:nvSpPr>
@@ -18287,7 +17616,7 @@
       </p:sp>
       <p:sp>
         <p:nvSpPr>
-          <p:cNvPr id="10" name="Rectangle 9"/>
+          <p:cNvPr id="9" name="Rectangle 8"/>
           <p:cNvSpPr/>
           <p:nvPr/>
         </p:nvSpPr>
@@ -18336,7 +17665,7 @@
       </p:sp>
       <p:sp>
         <p:nvSpPr>
-          <p:cNvPr id="11" name="TextBox 10"/>
+          <p:cNvPr id="10" name="TextBox 9"/>
           <p:cNvSpPr txBox="1"/>
           <p:nvPr/>
         </p:nvSpPr>
@@ -18378,7 +17707,7 @@
       </p:sp>
       <p:sp>
         <p:nvSpPr>
-          <p:cNvPr id="12" name="TextBox 11"/>
+          <p:cNvPr id="11" name="TextBox 10"/>
           <p:cNvSpPr txBox="1"/>
           <p:nvPr/>
         </p:nvSpPr>
@@ -18420,7 +17749,7 @@
       </p:sp>
       <p:sp>
         <p:nvSpPr>
-          <p:cNvPr id="13" name="TextBox 12"/>
+          <p:cNvPr id="12" name="TextBox 11"/>
           <p:cNvSpPr txBox="1"/>
           <p:nvPr/>
         </p:nvSpPr>
@@ -18462,7 +17791,7 @@
       </p:sp>
       <p:graphicFrame>
         <p:nvGraphicFramePr>
-          <p:cNvPr id="14" name="Table 13"/>
+          <p:cNvPr id="13" name="Table 12"/>
           <p:cNvGraphicFramePr>
             <a:graphicFrameLocks noGrp="1"/>
           </p:cNvGraphicFramePr>
@@ -19313,7 +18642,7 @@
       </p:graphicFrame>
       <p:sp>
         <p:nvSpPr>
-          <p:cNvPr id="15" name="TextBox 14"/>
+          <p:cNvPr id="14" name="TextBox 13"/>
           <p:cNvSpPr txBox="1"/>
           <p:nvPr/>
         </p:nvSpPr>
@@ -19355,7 +18684,7 @@
       </p:sp>
       <p:sp>
         <p:nvSpPr>
-          <p:cNvPr id="16" name="Rectangle 15"/>
+          <p:cNvPr id="15" name="Rectangle 14"/>
           <p:cNvSpPr/>
           <p:nvPr/>
         </p:nvSpPr>
@@ -19404,7 +18733,7 @@
       </p:sp>
       <p:sp>
         <p:nvSpPr>
-          <p:cNvPr id="17" name="TextBox 16"/>
+          <p:cNvPr id="16" name="TextBox 15"/>
           <p:cNvSpPr txBox="1"/>
           <p:nvPr/>
         </p:nvSpPr>
@@ -19446,7 +18775,7 @@
       </p:sp>
       <p:sp>
         <p:nvSpPr>
-          <p:cNvPr id="18" name="TextBox 17"/>
+          <p:cNvPr id="17" name="TextBox 16"/>
           <p:cNvSpPr txBox="1"/>
           <p:nvPr/>
         </p:nvSpPr>
@@ -19488,7 +18817,7 @@
       </p:sp>
       <p:sp>
         <p:nvSpPr>
-          <p:cNvPr id="19" name="TextBox 18"/>
+          <p:cNvPr id="18" name="TextBox 17"/>
           <p:cNvSpPr txBox="1"/>
           <p:nvPr/>
         </p:nvSpPr>
@@ -19603,48 +18932,6 @@
         </p:nvSpPr>
         <p:spPr>
           <a:xfrm>
-            <a:off x="5897880" y="310896"/>
-            <a:ext cx="4800600" cy="256032"/>
-          </a:xfrm>
-          <a:prstGeom prst="rect">
-            <a:avLst/>
-          </a:prstGeom>
-          <a:noFill/>
-        </p:spPr>
-        <p:txBody>
-          <a:bodyPr wrap="none" lIns="9144" rIns="9144" tIns="9144" bIns="9144" anchor="t">
-            <a:spAutoFit/>
-          </a:bodyPr>
-          <a:lstStyle/>
-          <a:p>
-            <a:pPr algn="r">
-              <a:spcAft>
-                <a:spcPts val="0"/>
-              </a:spcAft>
-              <a:defRPr sz="680" b="1">
-                <a:solidFill>
-                  <a:srgbClr val="4F6B00"/>
-                </a:solidFill>
-                <a:latin typeface="Inter"/>
-              </a:defRPr>
-            </a:pPr>
-            <a:r>
-              <a:rPr>
-                <a:latin typeface="Inter"/>
-              </a:rPr>
-              <a:t>Illustrative, Gradient Maintained — demo data, not the client's holdings or managers</a:t>
-            </a:r>
-          </a:p>
-        </p:txBody>
-      </p:sp>
-      <p:sp>
-        <p:nvSpPr>
-          <p:cNvPr id="4" name="TextBox 3"/>
-          <p:cNvSpPr txBox="1"/>
-          <p:nvPr/>
-        </p:nvSpPr>
-        <p:spPr>
-          <a:xfrm>
             <a:off x="640080" y="566928"/>
             <a:ext cx="10058400" cy="530352"/>
           </a:xfrm>
@@ -19681,7 +18968,7 @@
       </p:sp>
       <p:sp>
         <p:nvSpPr>
-          <p:cNvPr id="5" name="Rectangle 4"/>
+          <p:cNvPr id="4" name="Rectangle 3"/>
           <p:cNvSpPr/>
           <p:nvPr/>
         </p:nvSpPr>
@@ -19730,7 +19017,7 @@
       </p:sp>
       <p:sp>
         <p:nvSpPr>
-          <p:cNvPr id="6" name="Rectangle 5"/>
+          <p:cNvPr id="5" name="Rectangle 4"/>
           <p:cNvSpPr/>
           <p:nvPr/>
         </p:nvSpPr>
@@ -19779,7 +19066,7 @@
       </p:sp>
       <p:sp>
         <p:nvSpPr>
-          <p:cNvPr id="7" name="TextBox 6"/>
+          <p:cNvPr id="6" name="TextBox 5"/>
           <p:cNvSpPr txBox="1"/>
           <p:nvPr/>
         </p:nvSpPr>
@@ -19821,7 +19108,7 @@
       </p:sp>
       <p:sp>
         <p:nvSpPr>
-          <p:cNvPr id="8" name="TextBox 7"/>
+          <p:cNvPr id="7" name="TextBox 6"/>
           <p:cNvSpPr txBox="1"/>
           <p:nvPr/>
         </p:nvSpPr>
@@ -19863,7 +19150,7 @@
       </p:sp>
       <p:graphicFrame>
         <p:nvGraphicFramePr>
-          <p:cNvPr id="9" name="Table 8"/>
+          <p:cNvPr id="8" name="Table 7"/>
           <p:cNvGraphicFramePr>
             <a:graphicFrameLocks noGrp="1"/>
           </p:cNvGraphicFramePr>
@@ -20222,7 +19509,7 @@
       </p:graphicFrame>
       <p:sp>
         <p:nvSpPr>
-          <p:cNvPr id="10" name="Rectangle 9"/>
+          <p:cNvPr id="9" name="Rectangle 8"/>
           <p:cNvSpPr/>
           <p:nvPr/>
         </p:nvSpPr>
@@ -20271,7 +19558,7 @@
       </p:sp>
       <p:sp>
         <p:nvSpPr>
-          <p:cNvPr id="11" name="TextBox 10"/>
+          <p:cNvPr id="10" name="TextBox 9"/>
           <p:cNvSpPr txBox="1"/>
           <p:nvPr/>
         </p:nvSpPr>
@@ -20313,7 +19600,7 @@
       </p:sp>
       <p:sp>
         <p:nvSpPr>
-          <p:cNvPr id="12" name="TextBox 11"/>
+          <p:cNvPr id="11" name="TextBox 10"/>
           <p:cNvSpPr txBox="1"/>
           <p:nvPr/>
         </p:nvSpPr>
@@ -20355,7 +19642,7 @@
       </p:sp>
       <p:sp>
         <p:nvSpPr>
-          <p:cNvPr id="13" name="TextBox 12"/>
+          <p:cNvPr id="12" name="TextBox 11"/>
           <p:cNvSpPr txBox="1"/>
           <p:nvPr/>
         </p:nvSpPr>
@@ -20470,48 +19757,6 @@
         </p:nvSpPr>
         <p:spPr>
           <a:xfrm>
-            <a:off x="5897880" y="310896"/>
-            <a:ext cx="4800600" cy="256032"/>
-          </a:xfrm>
-          <a:prstGeom prst="rect">
-            <a:avLst/>
-          </a:prstGeom>
-          <a:noFill/>
-        </p:spPr>
-        <p:txBody>
-          <a:bodyPr wrap="none" lIns="9144" rIns="9144" tIns="9144" bIns="9144" anchor="t">
-            <a:spAutoFit/>
-          </a:bodyPr>
-          <a:lstStyle/>
-          <a:p>
-            <a:pPr algn="r">
-              <a:spcAft>
-                <a:spcPts val="0"/>
-              </a:spcAft>
-              <a:defRPr sz="680" b="1">
-                <a:solidFill>
-                  <a:srgbClr val="4F6B00"/>
-                </a:solidFill>
-                <a:latin typeface="Inter"/>
-              </a:defRPr>
-            </a:pPr>
-            <a:r>
-              <a:rPr>
-                <a:latin typeface="Inter"/>
-              </a:rPr>
-              <a:t>Illustrative, Gradient Maintained — demo data, not the client's holdings or managers</a:t>
-            </a:r>
-          </a:p>
-        </p:txBody>
-      </p:sp>
-      <p:sp>
-        <p:nvSpPr>
-          <p:cNvPr id="4" name="TextBox 3"/>
-          <p:cNvSpPr txBox="1"/>
-          <p:nvPr/>
-        </p:nvSpPr>
-        <p:spPr>
-          <a:xfrm>
             <a:off x="640080" y="566928"/>
             <a:ext cx="10058400" cy="530352"/>
           </a:xfrm>
@@ -20548,7 +19793,7 @@
       </p:sp>
       <p:sp>
         <p:nvSpPr>
-          <p:cNvPr id="5" name="Rectangle 4"/>
+          <p:cNvPr id="4" name="Rectangle 3"/>
           <p:cNvSpPr/>
           <p:nvPr/>
         </p:nvSpPr>
@@ -20597,7 +19842,7 @@
       </p:sp>
       <p:sp>
         <p:nvSpPr>
-          <p:cNvPr id="6" name="Rectangle 5"/>
+          <p:cNvPr id="5" name="Rectangle 4"/>
           <p:cNvSpPr/>
           <p:nvPr/>
         </p:nvSpPr>
@@ -20646,7 +19891,7 @@
       </p:sp>
       <p:sp>
         <p:nvSpPr>
-          <p:cNvPr id="7" name="TextBox 6"/>
+          <p:cNvPr id="6" name="TextBox 5"/>
           <p:cNvSpPr txBox="1"/>
           <p:nvPr/>
         </p:nvSpPr>
@@ -20688,7 +19933,7 @@
       </p:sp>
       <p:sp>
         <p:nvSpPr>
-          <p:cNvPr id="8" name="TextBox 7"/>
+          <p:cNvPr id="7" name="TextBox 6"/>
           <p:cNvSpPr txBox="1"/>
           <p:nvPr/>
         </p:nvSpPr>
@@ -20730,7 +19975,7 @@
       </p:sp>
       <p:graphicFrame>
         <p:nvGraphicFramePr>
-          <p:cNvPr id="9" name="Table 8"/>
+          <p:cNvPr id="8" name="Table 7"/>
           <p:cNvGraphicFramePr>
             <a:graphicFrameLocks noGrp="1"/>
           </p:cNvGraphicFramePr>
@@ -21290,7 +20535,7 @@
                         <a:rPr>
                           <a:latin typeface="Inter"/>
                         </a:rPr>
-                        <a:t>● Watch</a:t>
+                        <a:t>● Near limit</a:t>
                       </a:r>
                     </a:p>
                   </a:txBody>
@@ -21427,7 +20672,7 @@
                         <a:rPr>
                           <a:latin typeface="Inter"/>
                         </a:rPr>
-                        <a:t>● Watch</a:t>
+                        <a:t>● Near limit</a:t>
                       </a:r>
                     </a:p>
                   </a:txBody>
@@ -21564,7 +20809,7 @@
                         <a:rPr>
                           <a:latin typeface="Inter"/>
                         </a:rPr>
-                        <a:t>● Watch</a:t>
+                        <a:t>● Near limit</a:t>
                       </a:r>
                     </a:p>
                   </a:txBody>
@@ -21581,7 +20826,7 @@
       </p:graphicFrame>
       <p:sp>
         <p:nvSpPr>
-          <p:cNvPr id="10" name="TextBox 9"/>
+          <p:cNvPr id="9" name="TextBox 8"/>
           <p:cNvSpPr txBox="1"/>
           <p:nvPr/>
         </p:nvSpPr>
@@ -21623,7 +20868,7 @@
       </p:sp>
       <p:sp>
         <p:nvSpPr>
-          <p:cNvPr id="11" name="Rectangle 10"/>
+          <p:cNvPr id="10" name="Rectangle 9"/>
           <p:cNvSpPr/>
           <p:nvPr/>
         </p:nvSpPr>
@@ -21672,7 +20917,7 @@
       </p:sp>
       <p:sp>
         <p:nvSpPr>
-          <p:cNvPr id="12" name="TextBox 11"/>
+          <p:cNvPr id="11" name="TextBox 10"/>
           <p:cNvSpPr txBox="1"/>
           <p:nvPr/>
         </p:nvSpPr>
@@ -21714,7 +20959,7 @@
       </p:sp>
       <p:sp>
         <p:nvSpPr>
-          <p:cNvPr id="13" name="TextBox 12"/>
+          <p:cNvPr id="12" name="TextBox 11"/>
           <p:cNvSpPr txBox="1"/>
           <p:nvPr/>
         </p:nvSpPr>
@@ -21756,7 +21001,7 @@
       </p:sp>
       <p:sp>
         <p:nvSpPr>
-          <p:cNvPr id="14" name="TextBox 13"/>
+          <p:cNvPr id="13" name="TextBox 12"/>
           <p:cNvSpPr txBox="1"/>
           <p:nvPr/>
         </p:nvSpPr>
@@ -21871,48 +21116,6 @@
         </p:nvSpPr>
         <p:spPr>
           <a:xfrm>
-            <a:off x="5897880" y="310896"/>
-            <a:ext cx="4800600" cy="256032"/>
-          </a:xfrm>
-          <a:prstGeom prst="rect">
-            <a:avLst/>
-          </a:prstGeom>
-          <a:noFill/>
-        </p:spPr>
-        <p:txBody>
-          <a:bodyPr wrap="none" lIns="9144" rIns="9144" tIns="9144" bIns="9144" anchor="t">
-            <a:spAutoFit/>
-          </a:bodyPr>
-          <a:lstStyle/>
-          <a:p>
-            <a:pPr algn="r">
-              <a:spcAft>
-                <a:spcPts val="0"/>
-              </a:spcAft>
-              <a:defRPr sz="680" b="1">
-                <a:solidFill>
-                  <a:srgbClr val="4F6B00"/>
-                </a:solidFill>
-                <a:latin typeface="Inter"/>
-              </a:defRPr>
-            </a:pPr>
-            <a:r>
-              <a:rPr>
-                <a:latin typeface="Inter"/>
-              </a:rPr>
-              <a:t>Illustrative, Gradient Maintained — demo data, not the client's holdings or managers</a:t>
-            </a:r>
-          </a:p>
-        </p:txBody>
-      </p:sp>
-      <p:sp>
-        <p:nvSpPr>
-          <p:cNvPr id="4" name="TextBox 3"/>
-          <p:cNvSpPr txBox="1"/>
-          <p:nvPr/>
-        </p:nvSpPr>
-        <p:spPr>
-          <a:xfrm>
             <a:off x="640080" y="566928"/>
             <a:ext cx="10058400" cy="530352"/>
           </a:xfrm>
@@ -21949,7 +21152,7 @@
       </p:sp>
       <p:sp>
         <p:nvSpPr>
-          <p:cNvPr id="5" name="Rectangle 4"/>
+          <p:cNvPr id="4" name="Rectangle 3"/>
           <p:cNvSpPr/>
           <p:nvPr/>
         </p:nvSpPr>
@@ -21998,7 +21201,7 @@
       </p:sp>
       <p:sp>
         <p:nvSpPr>
-          <p:cNvPr id="6" name="Rectangle 5"/>
+          <p:cNvPr id="5" name="Rectangle 4"/>
           <p:cNvSpPr/>
           <p:nvPr/>
         </p:nvSpPr>
@@ -22047,7 +21250,7 @@
       </p:sp>
       <p:sp>
         <p:nvSpPr>
-          <p:cNvPr id="7" name="TextBox 6"/>
+          <p:cNvPr id="6" name="TextBox 5"/>
           <p:cNvSpPr txBox="1"/>
           <p:nvPr/>
         </p:nvSpPr>
@@ -22089,7 +21292,7 @@
       </p:sp>
       <p:graphicFrame>
         <p:nvGraphicFramePr>
-          <p:cNvPr id="8" name="Table 7"/>
+          <p:cNvPr id="7" name="Table 6"/>
           <p:cNvGraphicFramePr>
             <a:graphicFrameLocks noGrp="1"/>
           </p:cNvGraphicFramePr>
@@ -22395,7 +21598,7 @@
       </p:graphicFrame>
       <p:sp>
         <p:nvSpPr>
-          <p:cNvPr id="9" name="Rectangle 8"/>
+          <p:cNvPr id="8" name="Rectangle 7"/>
           <p:cNvSpPr/>
           <p:nvPr/>
         </p:nvSpPr>
@@ -22444,7 +21647,7 @@
       </p:sp>
       <p:sp>
         <p:nvSpPr>
-          <p:cNvPr id="10" name="TextBox 9"/>
+          <p:cNvPr id="9" name="TextBox 8"/>
           <p:cNvSpPr txBox="1"/>
           <p:nvPr/>
         </p:nvSpPr>
@@ -22486,7 +21689,7 @@
       </p:sp>
       <p:sp>
         <p:nvSpPr>
-          <p:cNvPr id="11" name="TextBox 10"/>
+          <p:cNvPr id="10" name="TextBox 9"/>
           <p:cNvSpPr txBox="1"/>
           <p:nvPr/>
         </p:nvSpPr>
@@ -22528,7 +21731,7 @@
       </p:sp>
       <p:sp>
         <p:nvSpPr>
-          <p:cNvPr id="12" name="TextBox 11"/>
+          <p:cNvPr id="11" name="TextBox 10"/>
           <p:cNvSpPr txBox="1"/>
           <p:nvPr/>
         </p:nvSpPr>
@@ -22643,48 +21846,6 @@
         </p:nvSpPr>
         <p:spPr>
           <a:xfrm>
-            <a:off x="5897880" y="310896"/>
-            <a:ext cx="4800600" cy="256032"/>
-          </a:xfrm>
-          <a:prstGeom prst="rect">
-            <a:avLst/>
-          </a:prstGeom>
-          <a:noFill/>
-        </p:spPr>
-        <p:txBody>
-          <a:bodyPr wrap="none" lIns="9144" rIns="9144" tIns="9144" bIns="9144" anchor="t">
-            <a:spAutoFit/>
-          </a:bodyPr>
-          <a:lstStyle/>
-          <a:p>
-            <a:pPr algn="r">
-              <a:spcAft>
-                <a:spcPts val="0"/>
-              </a:spcAft>
-              <a:defRPr sz="680" b="1">
-                <a:solidFill>
-                  <a:srgbClr val="4F6B00"/>
-                </a:solidFill>
-                <a:latin typeface="Inter"/>
-              </a:defRPr>
-            </a:pPr>
-            <a:r>
-              <a:rPr>
-                <a:latin typeface="Inter"/>
-              </a:rPr>
-              <a:t>Illustrative, Gradient Maintained — demo data, not the client's holdings or managers</a:t>
-            </a:r>
-          </a:p>
-        </p:txBody>
-      </p:sp>
-      <p:sp>
-        <p:nvSpPr>
-          <p:cNvPr id="4" name="TextBox 3"/>
-          <p:cNvSpPr txBox="1"/>
-          <p:nvPr/>
-        </p:nvSpPr>
-        <p:spPr>
-          <a:xfrm>
             <a:off x="640080" y="566928"/>
             <a:ext cx="10058400" cy="530352"/>
           </a:xfrm>
@@ -22721,7 +21882,7 @@
       </p:sp>
       <p:sp>
         <p:nvSpPr>
-          <p:cNvPr id="5" name="Rectangle 4"/>
+          <p:cNvPr id="4" name="Rectangle 3"/>
           <p:cNvSpPr/>
           <p:nvPr/>
         </p:nvSpPr>
@@ -22770,7 +21931,7 @@
       </p:sp>
       <p:sp>
         <p:nvSpPr>
-          <p:cNvPr id="6" name="Rectangle 5"/>
+          <p:cNvPr id="5" name="Rectangle 4"/>
           <p:cNvSpPr/>
           <p:nvPr/>
         </p:nvSpPr>
@@ -22819,7 +21980,7 @@
       </p:sp>
       <p:sp>
         <p:nvSpPr>
-          <p:cNvPr id="7" name="TextBox 6"/>
+          <p:cNvPr id="6" name="TextBox 5"/>
           <p:cNvSpPr txBox="1"/>
           <p:nvPr/>
         </p:nvSpPr>
@@ -22861,7 +22022,7 @@
       </p:sp>
       <p:sp>
         <p:nvSpPr>
-          <p:cNvPr id="8" name="TextBox 7"/>
+          <p:cNvPr id="7" name="TextBox 6"/>
           <p:cNvSpPr txBox="1"/>
           <p:nvPr/>
         </p:nvSpPr>
@@ -22903,7 +22064,7 @@
       </p:sp>
       <p:graphicFrame>
         <p:nvGraphicFramePr>
-          <p:cNvPr id="9" name="Table 8"/>
+          <p:cNvPr id="8" name="Table 7"/>
           <p:cNvGraphicFramePr>
             <a:graphicFrameLocks noGrp="1"/>
           </p:cNvGraphicFramePr>
@@ -23589,7 +22750,7 @@
       </p:graphicFrame>
       <p:sp>
         <p:nvSpPr>
-          <p:cNvPr id="10" name="Rectangle 9"/>
+          <p:cNvPr id="9" name="Rectangle 8"/>
           <p:cNvSpPr/>
           <p:nvPr/>
         </p:nvSpPr>
@@ -23638,7 +22799,7 @@
       </p:sp>
       <p:sp>
         <p:nvSpPr>
-          <p:cNvPr id="11" name="Rectangle 10"/>
+          <p:cNvPr id="10" name="Rectangle 9"/>
           <p:cNvSpPr/>
           <p:nvPr/>
         </p:nvSpPr>
@@ -23687,7 +22848,7 @@
       </p:sp>
       <p:sp>
         <p:nvSpPr>
-          <p:cNvPr id="12" name="TextBox 11"/>
+          <p:cNvPr id="11" name="TextBox 10"/>
           <p:cNvSpPr txBox="1"/>
           <p:nvPr/>
         </p:nvSpPr>
@@ -23729,7 +22890,7 @@
       </p:sp>
       <p:sp>
         <p:nvSpPr>
-          <p:cNvPr id="13" name="TextBox 12"/>
+          <p:cNvPr id="12" name="TextBox 11"/>
           <p:cNvSpPr txBox="1"/>
           <p:nvPr/>
         </p:nvSpPr>
@@ -23771,7 +22932,7 @@
       </p:sp>
       <p:sp>
         <p:nvSpPr>
-          <p:cNvPr id="14" name="Rectangle 13"/>
+          <p:cNvPr id="13" name="Rectangle 12"/>
           <p:cNvSpPr/>
           <p:nvPr/>
         </p:nvSpPr>
@@ -23820,7 +22981,7 @@
       </p:sp>
       <p:sp>
         <p:nvSpPr>
-          <p:cNvPr id="15" name="TextBox 14"/>
+          <p:cNvPr id="14" name="TextBox 13"/>
           <p:cNvSpPr txBox="1"/>
           <p:nvPr/>
         </p:nvSpPr>
@@ -23862,7 +23023,7 @@
       </p:sp>
       <p:sp>
         <p:nvSpPr>
-          <p:cNvPr id="16" name="TextBox 15"/>
+          <p:cNvPr id="15" name="TextBox 14"/>
           <p:cNvSpPr txBox="1"/>
           <p:nvPr/>
         </p:nvSpPr>
@@ -23904,7 +23065,7 @@
       </p:sp>
       <p:sp>
         <p:nvSpPr>
-          <p:cNvPr id="17" name="TextBox 16"/>
+          <p:cNvPr id="16" name="TextBox 15"/>
           <p:cNvSpPr txBox="1"/>
           <p:nvPr/>
         </p:nvSpPr>
@@ -24019,48 +23180,6 @@
         </p:nvSpPr>
         <p:spPr>
           <a:xfrm>
-            <a:off x="5897880" y="310896"/>
-            <a:ext cx="4800600" cy="256032"/>
-          </a:xfrm>
-          <a:prstGeom prst="rect">
-            <a:avLst/>
-          </a:prstGeom>
-          <a:noFill/>
-        </p:spPr>
-        <p:txBody>
-          <a:bodyPr wrap="none" lIns="9144" rIns="9144" tIns="9144" bIns="9144" anchor="t">
-            <a:spAutoFit/>
-          </a:bodyPr>
-          <a:lstStyle/>
-          <a:p>
-            <a:pPr algn="r">
-              <a:spcAft>
-                <a:spcPts val="0"/>
-              </a:spcAft>
-              <a:defRPr sz="680" b="1">
-                <a:solidFill>
-                  <a:srgbClr val="4F6B00"/>
-                </a:solidFill>
-                <a:latin typeface="Inter"/>
-              </a:defRPr>
-            </a:pPr>
-            <a:r>
-              <a:rPr>
-                <a:latin typeface="Inter"/>
-              </a:rPr>
-              <a:t>Illustrative, Gradient Maintained — demo data, not the client's holdings or managers</a:t>
-            </a:r>
-          </a:p>
-        </p:txBody>
-      </p:sp>
-      <p:sp>
-        <p:nvSpPr>
-          <p:cNvPr id="4" name="TextBox 3"/>
-          <p:cNvSpPr txBox="1"/>
-          <p:nvPr/>
-        </p:nvSpPr>
-        <p:spPr>
-          <a:xfrm>
             <a:off x="640080" y="566928"/>
             <a:ext cx="10058400" cy="530352"/>
           </a:xfrm>
@@ -24097,7 +23216,7 @@
       </p:sp>
       <p:sp>
         <p:nvSpPr>
-          <p:cNvPr id="5" name="Rectangle 4"/>
+          <p:cNvPr id="4" name="Rectangle 3"/>
           <p:cNvSpPr/>
           <p:nvPr/>
         </p:nvSpPr>
@@ -24146,7 +23265,7 @@
       </p:sp>
       <p:sp>
         <p:nvSpPr>
-          <p:cNvPr id="6" name="Rectangle 5"/>
+          <p:cNvPr id="5" name="Rectangle 4"/>
           <p:cNvSpPr/>
           <p:nvPr/>
         </p:nvSpPr>
@@ -24195,7 +23314,7 @@
       </p:sp>
       <p:sp>
         <p:nvSpPr>
-          <p:cNvPr id="7" name="TextBox 6"/>
+          <p:cNvPr id="6" name="TextBox 5"/>
           <p:cNvSpPr txBox="1"/>
           <p:nvPr/>
         </p:nvSpPr>
@@ -24237,7 +23356,7 @@
       </p:sp>
       <p:sp>
         <p:nvSpPr>
-          <p:cNvPr id="8" name="TextBox 7"/>
+          <p:cNvPr id="7" name="TextBox 6"/>
           <p:cNvSpPr txBox="1"/>
           <p:nvPr/>
         </p:nvSpPr>
@@ -24279,7 +23398,7 @@
       </p:sp>
       <p:graphicFrame>
         <p:nvGraphicFramePr>
-          <p:cNvPr id="9" name="Chart 8"/>
+          <p:cNvPr id="8" name="Chart 7"/>
           <p:cNvGraphicFramePr>
             <a:graphicFrameLocks noGrp="1"/>
           </p:cNvGraphicFramePr>
@@ -24297,7 +23416,7 @@
       </p:graphicFrame>
       <p:sp>
         <p:nvSpPr>
-          <p:cNvPr id="10" name="Rectangle 9"/>
+          <p:cNvPr id="9" name="Rectangle 8"/>
           <p:cNvSpPr/>
           <p:nvPr/>
         </p:nvSpPr>
@@ -24346,7 +23465,7 @@
       </p:sp>
       <p:sp>
         <p:nvSpPr>
-          <p:cNvPr id="11" name="TextBox 10"/>
+          <p:cNvPr id="10" name="TextBox 9"/>
           <p:cNvSpPr txBox="1"/>
           <p:nvPr/>
         </p:nvSpPr>
@@ -24388,7 +23507,7 @@
       </p:sp>
       <p:sp>
         <p:nvSpPr>
-          <p:cNvPr id="12" name="TextBox 11"/>
+          <p:cNvPr id="11" name="TextBox 10"/>
           <p:cNvSpPr txBox="1"/>
           <p:nvPr/>
         </p:nvSpPr>
@@ -24430,7 +23549,7 @@
       </p:sp>
       <p:sp>
         <p:nvSpPr>
-          <p:cNvPr id="13" name="TextBox 12"/>
+          <p:cNvPr id="12" name="TextBox 11"/>
           <p:cNvSpPr txBox="1"/>
           <p:nvPr/>
         </p:nvSpPr>
@@ -24545,48 +23664,6 @@
         </p:nvSpPr>
         <p:spPr>
           <a:xfrm>
-            <a:off x="5897880" y="310896"/>
-            <a:ext cx="4800600" cy="256032"/>
-          </a:xfrm>
-          <a:prstGeom prst="rect">
-            <a:avLst/>
-          </a:prstGeom>
-          <a:noFill/>
-        </p:spPr>
-        <p:txBody>
-          <a:bodyPr wrap="none" lIns="9144" rIns="9144" tIns="9144" bIns="9144" anchor="t">
-            <a:spAutoFit/>
-          </a:bodyPr>
-          <a:lstStyle/>
-          <a:p>
-            <a:pPr algn="r">
-              <a:spcAft>
-                <a:spcPts val="0"/>
-              </a:spcAft>
-              <a:defRPr sz="680" b="1">
-                <a:solidFill>
-                  <a:srgbClr val="4F6B00"/>
-                </a:solidFill>
-                <a:latin typeface="Inter"/>
-              </a:defRPr>
-            </a:pPr>
-            <a:r>
-              <a:rPr>
-                <a:latin typeface="Inter"/>
-              </a:rPr>
-              <a:t>Illustrative, Gradient Maintained — demo data, not the client's holdings or managers</a:t>
-            </a:r>
-          </a:p>
-        </p:txBody>
-      </p:sp>
-      <p:sp>
-        <p:nvSpPr>
-          <p:cNvPr id="4" name="TextBox 3"/>
-          <p:cNvSpPr txBox="1"/>
-          <p:nvPr/>
-        </p:nvSpPr>
-        <p:spPr>
-          <a:xfrm>
             <a:off x="640080" y="566928"/>
             <a:ext cx="10058400" cy="530352"/>
           </a:xfrm>
@@ -24623,7 +23700,7 @@
       </p:sp>
       <p:sp>
         <p:nvSpPr>
-          <p:cNvPr id="5" name="Rectangle 4"/>
+          <p:cNvPr id="4" name="Rectangle 3"/>
           <p:cNvSpPr/>
           <p:nvPr/>
         </p:nvSpPr>
@@ -24672,7 +23749,7 @@
       </p:sp>
       <p:sp>
         <p:nvSpPr>
-          <p:cNvPr id="6" name="Rectangle 5"/>
+          <p:cNvPr id="5" name="Rectangle 4"/>
           <p:cNvSpPr/>
           <p:nvPr/>
         </p:nvSpPr>
@@ -24721,7 +23798,7 @@
       </p:sp>
       <p:sp>
         <p:nvSpPr>
-          <p:cNvPr id="7" name="TextBox 6"/>
+          <p:cNvPr id="6" name="TextBox 5"/>
           <p:cNvSpPr txBox="1"/>
           <p:nvPr/>
         </p:nvSpPr>
@@ -24763,7 +23840,7 @@
       </p:sp>
       <p:sp>
         <p:nvSpPr>
-          <p:cNvPr id="8" name="TextBox 7"/>
+          <p:cNvPr id="7" name="TextBox 6"/>
           <p:cNvSpPr txBox="1"/>
           <p:nvPr/>
         </p:nvSpPr>
@@ -24805,7 +23882,7 @@
       </p:sp>
       <p:graphicFrame>
         <p:nvGraphicFramePr>
-          <p:cNvPr id="9" name="Table 8"/>
+          <p:cNvPr id="8" name="Table 7"/>
           <p:cNvGraphicFramePr>
             <a:graphicFrameLocks noGrp="1"/>
           </p:cNvGraphicFramePr>
@@ -25382,7 +24459,7 @@
       </p:graphicFrame>
       <p:sp>
         <p:nvSpPr>
-          <p:cNvPr id="10" name="Rectangle 9"/>
+          <p:cNvPr id="9" name="Rectangle 8"/>
           <p:cNvSpPr/>
           <p:nvPr/>
         </p:nvSpPr>
@@ -25431,7 +24508,7 @@
       </p:sp>
       <p:sp>
         <p:nvSpPr>
-          <p:cNvPr id="11" name="Rectangle 10"/>
+          <p:cNvPr id="10" name="Rectangle 9"/>
           <p:cNvSpPr/>
           <p:nvPr/>
         </p:nvSpPr>
@@ -25480,7 +24557,7 @@
       </p:sp>
       <p:sp>
         <p:nvSpPr>
-          <p:cNvPr id="12" name="TextBox 11"/>
+          <p:cNvPr id="11" name="TextBox 10"/>
           <p:cNvSpPr txBox="1"/>
           <p:nvPr/>
         </p:nvSpPr>
@@ -25522,7 +24599,7 @@
       </p:sp>
       <p:sp>
         <p:nvSpPr>
-          <p:cNvPr id="13" name="TextBox 12"/>
+          <p:cNvPr id="12" name="TextBox 11"/>
           <p:cNvSpPr txBox="1"/>
           <p:nvPr/>
         </p:nvSpPr>
@@ -25564,7 +24641,7 @@
       </p:sp>
       <p:sp>
         <p:nvSpPr>
-          <p:cNvPr id="14" name="Rectangle 13"/>
+          <p:cNvPr id="13" name="Rectangle 12"/>
           <p:cNvSpPr/>
           <p:nvPr/>
         </p:nvSpPr>
@@ -25613,7 +24690,7 @@
       </p:sp>
       <p:sp>
         <p:nvSpPr>
-          <p:cNvPr id="15" name="TextBox 14"/>
+          <p:cNvPr id="14" name="TextBox 13"/>
           <p:cNvSpPr txBox="1"/>
           <p:nvPr/>
         </p:nvSpPr>
@@ -25655,7 +24732,7 @@
       </p:sp>
       <p:sp>
         <p:nvSpPr>
-          <p:cNvPr id="16" name="TextBox 15"/>
+          <p:cNvPr id="15" name="TextBox 14"/>
           <p:cNvSpPr txBox="1"/>
           <p:nvPr/>
         </p:nvSpPr>
@@ -25697,7 +24774,7 @@
       </p:sp>
       <p:sp>
         <p:nvSpPr>
-          <p:cNvPr id="17" name="TextBox 16"/>
+          <p:cNvPr id="16" name="TextBox 15"/>
           <p:cNvSpPr txBox="1"/>
           <p:nvPr/>
         </p:nvSpPr>
@@ -25812,48 +24889,6 @@
         </p:nvSpPr>
         <p:spPr>
           <a:xfrm>
-            <a:off x="5897880" y="310896"/>
-            <a:ext cx="4800600" cy="256032"/>
-          </a:xfrm>
-          <a:prstGeom prst="rect">
-            <a:avLst/>
-          </a:prstGeom>
-          <a:noFill/>
-        </p:spPr>
-        <p:txBody>
-          <a:bodyPr wrap="none" lIns="9144" rIns="9144" tIns="9144" bIns="9144" anchor="t">
-            <a:spAutoFit/>
-          </a:bodyPr>
-          <a:lstStyle/>
-          <a:p>
-            <a:pPr algn="r">
-              <a:spcAft>
-                <a:spcPts val="0"/>
-              </a:spcAft>
-              <a:defRPr sz="680" b="1">
-                <a:solidFill>
-                  <a:srgbClr val="4F6B00"/>
-                </a:solidFill>
-                <a:latin typeface="Inter"/>
-              </a:defRPr>
-            </a:pPr>
-            <a:r>
-              <a:rPr>
-                <a:latin typeface="Inter"/>
-              </a:rPr>
-              <a:t>Illustrative, Gradient Maintained — demo data, not the client's holdings or managers</a:t>
-            </a:r>
-          </a:p>
-        </p:txBody>
-      </p:sp>
-      <p:sp>
-        <p:nvSpPr>
-          <p:cNvPr id="4" name="TextBox 3"/>
-          <p:cNvSpPr txBox="1"/>
-          <p:nvPr/>
-        </p:nvSpPr>
-        <p:spPr>
-          <a:xfrm>
             <a:off x="640080" y="566928"/>
             <a:ext cx="10058400" cy="530352"/>
           </a:xfrm>
@@ -25890,7 +24925,7 @@
       </p:sp>
       <p:sp>
         <p:nvSpPr>
-          <p:cNvPr id="5" name="Rectangle 4"/>
+          <p:cNvPr id="4" name="Rectangle 3"/>
           <p:cNvSpPr/>
           <p:nvPr/>
         </p:nvSpPr>
@@ -25939,7 +24974,7 @@
       </p:sp>
       <p:sp>
         <p:nvSpPr>
-          <p:cNvPr id="6" name="Rectangle 5"/>
+          <p:cNvPr id="5" name="Rectangle 4"/>
           <p:cNvSpPr/>
           <p:nvPr/>
         </p:nvSpPr>
@@ -25988,7 +25023,7 @@
       </p:sp>
       <p:sp>
         <p:nvSpPr>
-          <p:cNvPr id="7" name="TextBox 6"/>
+          <p:cNvPr id="6" name="TextBox 5"/>
           <p:cNvSpPr txBox="1"/>
           <p:nvPr/>
         </p:nvSpPr>
@@ -26030,7 +25065,7 @@
       </p:sp>
       <p:sp>
         <p:nvSpPr>
-          <p:cNvPr id="8" name="TextBox 7"/>
+          <p:cNvPr id="7" name="TextBox 6"/>
           <p:cNvSpPr txBox="1"/>
           <p:nvPr/>
         </p:nvSpPr>
@@ -26072,7 +25107,7 @@
       </p:sp>
       <p:graphicFrame>
         <p:nvGraphicFramePr>
-          <p:cNvPr id="9" name="Table 8"/>
+          <p:cNvPr id="8" name="Table 7"/>
           <p:cNvGraphicFramePr>
             <a:graphicFrameLocks noGrp="1"/>
           </p:cNvGraphicFramePr>
@@ -26922,7 +25957,7 @@
       </p:graphicFrame>
       <p:sp>
         <p:nvSpPr>
-          <p:cNvPr id="10" name="TextBox 9"/>
+          <p:cNvPr id="9" name="TextBox 8"/>
           <p:cNvSpPr txBox="1"/>
           <p:nvPr/>
         </p:nvSpPr>
@@ -26964,7 +25999,7 @@
       </p:sp>
       <p:graphicFrame>
         <p:nvGraphicFramePr>
-          <p:cNvPr id="11" name="Table 10"/>
+          <p:cNvPr id="10" name="Table 9"/>
           <p:cNvGraphicFramePr>
             <a:graphicFrameLocks noGrp="1"/>
           </p:cNvGraphicFramePr>
@@ -27322,7 +26357,7 @@
       </p:graphicFrame>
       <p:sp>
         <p:nvSpPr>
-          <p:cNvPr id="12" name="Rectangle 11"/>
+          <p:cNvPr id="11" name="Rectangle 10"/>
           <p:cNvSpPr/>
           <p:nvPr/>
         </p:nvSpPr>
@@ -27371,7 +26406,7 @@
       </p:sp>
       <p:sp>
         <p:nvSpPr>
-          <p:cNvPr id="13" name="TextBox 12"/>
+          <p:cNvPr id="12" name="TextBox 11"/>
           <p:cNvSpPr txBox="1"/>
           <p:nvPr/>
         </p:nvSpPr>
@@ -27413,7 +26448,7 @@
       </p:sp>
       <p:sp>
         <p:nvSpPr>
-          <p:cNvPr id="14" name="TextBox 13"/>
+          <p:cNvPr id="13" name="TextBox 12"/>
           <p:cNvSpPr txBox="1"/>
           <p:nvPr/>
         </p:nvSpPr>
@@ -27455,7 +26490,7 @@
       </p:sp>
       <p:sp>
         <p:nvSpPr>
-          <p:cNvPr id="15" name="TextBox 14"/>
+          <p:cNvPr id="14" name="TextBox 13"/>
           <p:cNvSpPr txBox="1"/>
           <p:nvPr/>
         </p:nvSpPr>
@@ -27570,48 +26605,6 @@
         </p:nvSpPr>
         <p:spPr>
           <a:xfrm>
-            <a:off x="5897880" y="310896"/>
-            <a:ext cx="4800600" cy="256032"/>
-          </a:xfrm>
-          <a:prstGeom prst="rect">
-            <a:avLst/>
-          </a:prstGeom>
-          <a:noFill/>
-        </p:spPr>
-        <p:txBody>
-          <a:bodyPr wrap="none" lIns="9144" rIns="9144" tIns="9144" bIns="9144" anchor="t">
-            <a:spAutoFit/>
-          </a:bodyPr>
-          <a:lstStyle/>
-          <a:p>
-            <a:pPr algn="r">
-              <a:spcAft>
-                <a:spcPts val="0"/>
-              </a:spcAft>
-              <a:defRPr sz="680" b="1">
-                <a:solidFill>
-                  <a:srgbClr val="4F6B00"/>
-                </a:solidFill>
-                <a:latin typeface="Inter"/>
-              </a:defRPr>
-            </a:pPr>
-            <a:r>
-              <a:rPr>
-                <a:latin typeface="Inter"/>
-              </a:rPr>
-              <a:t>Illustrative, Gradient Maintained — demo data, not the client's holdings or managers</a:t>
-            </a:r>
-          </a:p>
-        </p:txBody>
-      </p:sp>
-      <p:sp>
-        <p:nvSpPr>
-          <p:cNvPr id="4" name="TextBox 3"/>
-          <p:cNvSpPr txBox="1"/>
-          <p:nvPr/>
-        </p:nvSpPr>
-        <p:spPr>
-          <a:xfrm>
             <a:off x="640080" y="566928"/>
             <a:ext cx="10058400" cy="530352"/>
           </a:xfrm>
@@ -27648,7 +26641,7 @@
       </p:sp>
       <p:sp>
         <p:nvSpPr>
-          <p:cNvPr id="5" name="Rectangle 4"/>
+          <p:cNvPr id="4" name="Rectangle 3"/>
           <p:cNvSpPr/>
           <p:nvPr/>
         </p:nvSpPr>
@@ -27697,7 +26690,7 @@
       </p:sp>
       <p:sp>
         <p:nvSpPr>
-          <p:cNvPr id="6" name="Rectangle 5"/>
+          <p:cNvPr id="5" name="Rectangle 4"/>
           <p:cNvSpPr/>
           <p:nvPr/>
         </p:nvSpPr>
@@ -27746,7 +26739,7 @@
       </p:sp>
       <p:sp>
         <p:nvSpPr>
-          <p:cNvPr id="7" name="TextBox 6"/>
+          <p:cNvPr id="6" name="TextBox 5"/>
           <p:cNvSpPr txBox="1"/>
           <p:nvPr/>
         </p:nvSpPr>
@@ -27788,7 +26781,7 @@
       </p:sp>
       <p:sp>
         <p:nvSpPr>
-          <p:cNvPr id="8" name="TextBox 7"/>
+          <p:cNvPr id="7" name="TextBox 6"/>
           <p:cNvSpPr txBox="1"/>
           <p:nvPr/>
         </p:nvSpPr>
@@ -27830,7 +26823,7 @@
       </p:sp>
       <p:graphicFrame>
         <p:nvGraphicFramePr>
-          <p:cNvPr id="9" name="Table 8"/>
+          <p:cNvPr id="8" name="Table 7"/>
           <p:cNvGraphicFramePr>
             <a:graphicFrameLocks noGrp="1"/>
           </p:cNvGraphicFramePr>
@@ -28407,7 +27400,7 @@
       </p:graphicFrame>
       <p:sp>
         <p:nvSpPr>
-          <p:cNvPr id="10" name="TextBox 9"/>
+          <p:cNvPr id="9" name="TextBox 8"/>
           <p:cNvSpPr txBox="1"/>
           <p:nvPr/>
         </p:nvSpPr>
@@ -28449,7 +27442,7 @@
       </p:sp>
       <p:graphicFrame>
         <p:nvGraphicFramePr>
-          <p:cNvPr id="11" name="Table 10"/>
+          <p:cNvPr id="10" name="Table 9"/>
           <p:cNvGraphicFramePr>
             <a:graphicFrameLocks noGrp="1"/>
           </p:cNvGraphicFramePr>
@@ -29092,7 +28085,7 @@
                         <a:rPr>
                           <a:latin typeface="Inter"/>
                         </a:rPr>
-                        <a:t>Returned commitments pack</a:t>
+                        <a:t>Returned commitment-pacing include</a:t>
                       </a:r>
                     </a:p>
                   </a:txBody>
@@ -29163,7 +28156,7 @@
       </p:graphicFrame>
       <p:sp>
         <p:nvSpPr>
-          <p:cNvPr id="12" name="Rectangle 11"/>
+          <p:cNvPr id="11" name="Rectangle 10"/>
           <p:cNvSpPr/>
           <p:nvPr/>
         </p:nvSpPr>
@@ -29212,7 +28205,7 @@
       </p:sp>
       <p:sp>
         <p:nvSpPr>
-          <p:cNvPr id="13" name="TextBox 12"/>
+          <p:cNvPr id="12" name="TextBox 11"/>
           <p:cNvSpPr txBox="1"/>
           <p:nvPr/>
         </p:nvSpPr>
@@ -29254,7 +28247,7 @@
       </p:sp>
       <p:sp>
         <p:nvSpPr>
-          <p:cNvPr id="14" name="TextBox 13"/>
+          <p:cNvPr id="13" name="TextBox 12"/>
           <p:cNvSpPr txBox="1"/>
           <p:nvPr/>
         </p:nvSpPr>
@@ -29296,7 +28289,7 @@
       </p:sp>
       <p:sp>
         <p:nvSpPr>
-          <p:cNvPr id="15" name="TextBox 14"/>
+          <p:cNvPr id="14" name="TextBox 13"/>
           <p:cNvSpPr txBox="1"/>
           <p:nvPr/>
         </p:nvSpPr>
@@ -29411,48 +28404,6 @@
         </p:nvSpPr>
         <p:spPr>
           <a:xfrm>
-            <a:off x="5897880" y="310896"/>
-            <a:ext cx="4800600" cy="256032"/>
-          </a:xfrm>
-          <a:prstGeom prst="rect">
-            <a:avLst/>
-          </a:prstGeom>
-          <a:noFill/>
-        </p:spPr>
-        <p:txBody>
-          <a:bodyPr wrap="none" lIns="9144" rIns="9144" tIns="9144" bIns="9144" anchor="t">
-            <a:spAutoFit/>
-          </a:bodyPr>
-          <a:lstStyle/>
-          <a:p>
-            <a:pPr algn="r">
-              <a:spcAft>
-                <a:spcPts val="0"/>
-              </a:spcAft>
-              <a:defRPr sz="680" b="1">
-                <a:solidFill>
-                  <a:srgbClr val="4F6B00"/>
-                </a:solidFill>
-                <a:latin typeface="Inter"/>
-              </a:defRPr>
-            </a:pPr>
-            <a:r>
-              <a:rPr>
-                <a:latin typeface="Inter"/>
-              </a:rPr>
-              <a:t>Illustrative, Gradient Maintained — demo data, not the client's holdings or managers</a:t>
-            </a:r>
-          </a:p>
-        </p:txBody>
-      </p:sp>
-      <p:sp>
-        <p:nvSpPr>
-          <p:cNvPr id="4" name="TextBox 3"/>
-          <p:cNvSpPr txBox="1"/>
-          <p:nvPr/>
-        </p:nvSpPr>
-        <p:spPr>
-          <a:xfrm>
             <a:off x="640080" y="566928"/>
             <a:ext cx="10058400" cy="530352"/>
           </a:xfrm>
@@ -29489,7 +28440,7 @@
       </p:sp>
       <p:sp>
         <p:nvSpPr>
-          <p:cNvPr id="5" name="Rectangle 4"/>
+          <p:cNvPr id="4" name="Rectangle 3"/>
           <p:cNvSpPr/>
           <p:nvPr/>
         </p:nvSpPr>
@@ -29538,7 +28489,7 @@
       </p:sp>
       <p:sp>
         <p:nvSpPr>
-          <p:cNvPr id="6" name="Rectangle 5"/>
+          <p:cNvPr id="5" name="Rectangle 4"/>
           <p:cNvSpPr/>
           <p:nvPr/>
         </p:nvSpPr>
@@ -29587,7 +28538,7 @@
       </p:sp>
       <p:sp>
         <p:nvSpPr>
-          <p:cNvPr id="7" name="TextBox 6"/>
+          <p:cNvPr id="6" name="TextBox 5"/>
           <p:cNvSpPr txBox="1"/>
           <p:nvPr/>
         </p:nvSpPr>
@@ -29629,14 +28580,14 @@
       </p:sp>
       <p:sp>
         <p:nvSpPr>
-          <p:cNvPr id="8" name="Rectangle 7"/>
+          <p:cNvPr id="7" name="Rectangle 6"/>
           <p:cNvSpPr/>
           <p:nvPr/>
         </p:nvSpPr>
         <p:spPr>
           <a:xfrm>
             <a:off x="640080" y="1325880"/>
-            <a:ext cx="10908792" cy="877905"/>
+            <a:ext cx="10908792" cy="906219"/>
           </a:xfrm>
           <a:prstGeom prst="rect">
             <a:avLst/>
@@ -29678,14 +28629,14 @@
       </p:sp>
       <p:sp>
         <p:nvSpPr>
-          <p:cNvPr id="9" name="Rectangle 8"/>
+          <p:cNvPr id="8" name="Rectangle 7"/>
           <p:cNvSpPr/>
           <p:nvPr/>
         </p:nvSpPr>
         <p:spPr>
           <a:xfrm>
             <a:off x="640080" y="1325880"/>
-            <a:ext cx="54864" cy="877905"/>
+            <a:ext cx="54864" cy="906219"/>
           </a:xfrm>
           <a:prstGeom prst="rect">
             <a:avLst/>
@@ -29727,7 +28678,7 @@
       </p:sp>
       <p:sp>
         <p:nvSpPr>
-          <p:cNvPr id="10" name="TextBox 9"/>
+          <p:cNvPr id="9" name="TextBox 8"/>
           <p:cNvSpPr txBox="1"/>
           <p:nvPr/>
         </p:nvSpPr>
@@ -29769,14 +28720,14 @@
       </p:sp>
       <p:sp>
         <p:nvSpPr>
-          <p:cNvPr id="11" name="TextBox 10"/>
+          <p:cNvPr id="10" name="TextBox 9"/>
           <p:cNvSpPr txBox="1"/>
           <p:nvPr/>
         </p:nvSpPr>
         <p:spPr>
           <a:xfrm>
             <a:off x="804671" y="1719072"/>
-            <a:ext cx="10616184" cy="393273"/>
+            <a:ext cx="10616184" cy="421587"/>
           </a:xfrm>
           <a:prstGeom prst="rect">
             <a:avLst/>
@@ -29811,13 +28762,13 @@
       </p:sp>
       <p:sp>
         <p:nvSpPr>
-          <p:cNvPr id="12" name="TextBox 11"/>
+          <p:cNvPr id="11" name="TextBox 10"/>
           <p:cNvSpPr txBox="1"/>
           <p:nvPr/>
         </p:nvSpPr>
         <p:spPr>
           <a:xfrm>
-            <a:off x="640080" y="2313513"/>
+            <a:off x="640080" y="2341827"/>
             <a:ext cx="10908792" cy="201168"/>
           </a:xfrm>
           <a:prstGeom prst="rect">
@@ -29853,15 +28804,15 @@
       </p:sp>
       <p:graphicFrame>
         <p:nvGraphicFramePr>
-          <p:cNvPr id="13" name="Table 12"/>
+          <p:cNvPr id="12" name="Table 11"/>
           <p:cNvGraphicFramePr>
             <a:graphicFrameLocks noGrp="1"/>
           </p:cNvGraphicFramePr>
           <p:nvPr/>
         </p:nvGraphicFramePr>
         <p:xfrm>
-          <a:off x="640080" y="2587833"/>
-          <a:ext cx="10908792" cy="1257136"/>
+          <a:off x="640080" y="2616147"/>
+          <a:ext cx="10908792" cy="1306530"/>
         </p:xfrm>
         <a:graphic>
           <a:graphicData uri="http://schemas.openxmlformats.org/drawingml/2006/table">
@@ -29875,7 +28826,7 @@
                 <a:gridCol w="2965704"/>
                 <a:gridCol w="2965704"/>
               </a:tblGrid>
-              <a:tr h="314284">
+              <a:tr h="326632">
                 <a:tc>
                   <a:txBody>
                     <a:bodyPr/>
@@ -29985,7 +28936,7 @@
                   </a:tcPr>
                 </a:tc>
               </a:tr>
-              <a:tr h="314284">
+              <a:tr h="326632">
                 <a:tc>
                   <a:txBody>
                     <a:bodyPr/>
@@ -30095,7 +29046,7 @@
                   </a:tcPr>
                 </a:tc>
               </a:tr>
-              <a:tr h="314284">
+              <a:tr h="326632">
                 <a:tc>
                   <a:txBody>
                     <a:bodyPr/>
@@ -30205,7 +29156,7 @@
                   </a:tcPr>
                 </a:tc>
               </a:tr>
-              <a:tr h="314284">
+              <a:tr h="326634">
                 <a:tc>
                   <a:txBody>
                     <a:bodyPr/>
@@ -30321,14 +29272,14 @@
       </p:graphicFrame>
       <p:sp>
         <p:nvSpPr>
-          <p:cNvPr id="14" name="Rectangle 13"/>
+          <p:cNvPr id="13" name="Rectangle 12"/>
           <p:cNvSpPr/>
           <p:nvPr/>
         </p:nvSpPr>
         <p:spPr>
           <a:xfrm>
-            <a:off x="640080" y="3954698"/>
-            <a:ext cx="10908792" cy="780360"/>
+            <a:off x="640080" y="4032406"/>
+            <a:ext cx="10908792" cy="805528"/>
           </a:xfrm>
           <a:prstGeom prst="rect">
             <a:avLst/>
@@ -30370,14 +29321,14 @@
       </p:sp>
       <p:sp>
         <p:nvSpPr>
-          <p:cNvPr id="15" name="Rectangle 14"/>
+          <p:cNvPr id="14" name="Rectangle 13"/>
           <p:cNvSpPr/>
           <p:nvPr/>
         </p:nvSpPr>
         <p:spPr>
           <a:xfrm>
-            <a:off x="640080" y="3954698"/>
-            <a:ext cx="54864" cy="780360"/>
+            <a:off x="640080" y="4032406"/>
+            <a:ext cx="54864" cy="805528"/>
           </a:xfrm>
           <a:prstGeom prst="rect">
             <a:avLst/>
@@ -30419,13 +29370,13 @@
       </p:sp>
       <p:sp>
         <p:nvSpPr>
-          <p:cNvPr id="16" name="TextBox 15"/>
+          <p:cNvPr id="15" name="TextBox 14"/>
           <p:cNvSpPr txBox="1"/>
           <p:nvPr/>
         </p:nvSpPr>
         <p:spPr>
           <a:xfrm>
-            <a:off x="804671" y="4064426"/>
+            <a:off x="804671" y="4142134"/>
             <a:ext cx="10616184" cy="228600"/>
           </a:xfrm>
           <a:prstGeom prst="rect">
@@ -30461,14 +29412,14 @@
       </p:sp>
       <p:sp>
         <p:nvSpPr>
-          <p:cNvPr id="17" name="TextBox 16"/>
+          <p:cNvPr id="16" name="TextBox 15"/>
           <p:cNvSpPr txBox="1"/>
           <p:nvPr/>
         </p:nvSpPr>
         <p:spPr>
           <a:xfrm>
-            <a:off x="804671" y="4347890"/>
-            <a:ext cx="10616184" cy="295728"/>
+            <a:off x="804671" y="4425598"/>
+            <a:ext cx="10616184" cy="320896"/>
           </a:xfrm>
           <a:prstGeom prst="rect">
             <a:avLst/>
@@ -30503,14 +29454,14 @@
       </p:sp>
       <p:sp>
         <p:nvSpPr>
-          <p:cNvPr id="18" name="Rectangle 17"/>
+          <p:cNvPr id="17" name="Rectangle 16"/>
           <p:cNvSpPr/>
           <p:nvPr/>
         </p:nvSpPr>
         <p:spPr>
           <a:xfrm>
-            <a:off x="640080" y="4844786"/>
-            <a:ext cx="10908792" cy="1373133"/>
+            <a:off x="640080" y="4947663"/>
+            <a:ext cx="10908792" cy="1270256"/>
           </a:xfrm>
           <a:prstGeom prst="rect">
             <a:avLst/>
@@ -30552,14 +29503,14 @@
       </p:sp>
       <p:sp>
         <p:nvSpPr>
-          <p:cNvPr id="19" name="Rectangle 18"/>
+          <p:cNvPr id="18" name="Rectangle 17"/>
           <p:cNvSpPr/>
           <p:nvPr/>
         </p:nvSpPr>
         <p:spPr>
           <a:xfrm>
-            <a:off x="640080" y="4844786"/>
-            <a:ext cx="54864" cy="1373133"/>
+            <a:off x="640080" y="4947663"/>
+            <a:ext cx="54864" cy="1270256"/>
           </a:xfrm>
           <a:prstGeom prst="rect">
             <a:avLst/>
@@ -30601,13 +29552,13 @@
       </p:sp>
       <p:sp>
         <p:nvSpPr>
-          <p:cNvPr id="20" name="TextBox 19"/>
+          <p:cNvPr id="19" name="TextBox 18"/>
           <p:cNvSpPr txBox="1"/>
           <p:nvPr/>
         </p:nvSpPr>
         <p:spPr>
           <a:xfrm>
-            <a:off x="804671" y="4954514"/>
+            <a:off x="804671" y="5057391"/>
             <a:ext cx="10616184" cy="228600"/>
           </a:xfrm>
           <a:prstGeom prst="rect">
@@ -30636,21 +29587,21 @@
               <a:rPr>
                 <a:latin typeface="Inter"/>
               </a:rPr>
-              <a:t>Key judgment — headline signal</a:t>
+              <a:t>Key judgment — Valuation lag</a:t>
             </a:r>
           </a:p>
         </p:txBody>
       </p:sp>
       <p:sp>
         <p:nvSpPr>
-          <p:cNvPr id="21" name="TextBox 20"/>
+          <p:cNvPr id="20" name="TextBox 19"/>
           <p:cNvSpPr txBox="1"/>
           <p:nvPr/>
         </p:nvSpPr>
         <p:spPr>
           <a:xfrm>
-            <a:off x="804671" y="5237978"/>
-            <a:ext cx="10616184" cy="888501"/>
+            <a:off x="804671" y="5340855"/>
+            <a:ext cx="10616184" cy="785624"/>
           </a:xfrm>
           <a:prstGeom prst="rect">
             <a:avLst/>
@@ -30678,14 +29629,14 @@
               <a:rPr>
                 <a:latin typeface="Inter"/>
               </a:rPr>
-              <a:t>Observation: The sample report carries a valuation-lag signal above the clear threshold [S1]. Why it matters: This signal focuses oversight on the report's most decision-relevant condition. Uncertainty: Evidence coverage may exclude newer or more detailed observations. What would change the view: A governed refresh showing a different signal or breached threshold.</a:t>
+              <a:t>Observation: Valuation lag and the listed-versus-private mix both need monitoring [S1]. Why it matters: The 2.0pp shift to infrastructure and natural resources depends on current private marks. Uncertainty: Private valuations are reported with a lag. What would change the view: Refreshed marks that change the relative weights.</a:t>
             </a:r>
           </a:p>
         </p:txBody>
       </p:sp>
       <p:sp>
         <p:nvSpPr>
-          <p:cNvPr id="22" name="Rectangle 21"/>
+          <p:cNvPr id="21" name="Rectangle 20"/>
           <p:cNvSpPr/>
           <p:nvPr/>
         </p:nvSpPr>
@@ -30734,7 +29685,7 @@
       </p:sp>
       <p:sp>
         <p:nvSpPr>
-          <p:cNvPr id="23" name="TextBox 22"/>
+          <p:cNvPr id="22" name="TextBox 21"/>
           <p:cNvSpPr txBox="1"/>
           <p:nvPr/>
         </p:nvSpPr>
@@ -30776,7 +29727,7 @@
       </p:sp>
       <p:sp>
         <p:nvSpPr>
-          <p:cNvPr id="24" name="TextBox 23"/>
+          <p:cNvPr id="23" name="TextBox 22"/>
           <p:cNvSpPr txBox="1"/>
           <p:nvPr/>
         </p:nvSpPr>
@@ -30818,7 +29769,7 @@
       </p:sp>
       <p:sp>
         <p:nvSpPr>
-          <p:cNvPr id="25" name="TextBox 24"/>
+          <p:cNvPr id="24" name="TextBox 23"/>
           <p:cNvSpPr txBox="1"/>
           <p:nvPr/>
         </p:nvSpPr>
@@ -30933,48 +29884,6 @@
         </p:nvSpPr>
         <p:spPr>
           <a:xfrm>
-            <a:off x="5897880" y="310896"/>
-            <a:ext cx="4800600" cy="256032"/>
-          </a:xfrm>
-          <a:prstGeom prst="rect">
-            <a:avLst/>
-          </a:prstGeom>
-          <a:noFill/>
-        </p:spPr>
-        <p:txBody>
-          <a:bodyPr wrap="none" lIns="9144" rIns="9144" tIns="9144" bIns="9144" anchor="t">
-            <a:spAutoFit/>
-          </a:bodyPr>
-          <a:lstStyle/>
-          <a:p>
-            <a:pPr algn="r">
-              <a:spcAft>
-                <a:spcPts val="0"/>
-              </a:spcAft>
-              <a:defRPr sz="680" b="1">
-                <a:solidFill>
-                  <a:srgbClr val="4F6B00"/>
-                </a:solidFill>
-                <a:latin typeface="Inter"/>
-              </a:defRPr>
-            </a:pPr>
-            <a:r>
-              <a:rPr>
-                <a:latin typeface="Inter"/>
-              </a:rPr>
-              <a:t>Illustrative, Gradient Maintained — demo data, not the client's holdings or managers</a:t>
-            </a:r>
-          </a:p>
-        </p:txBody>
-      </p:sp>
-      <p:sp>
-        <p:nvSpPr>
-          <p:cNvPr id="4" name="TextBox 3"/>
-          <p:cNvSpPr txBox="1"/>
-          <p:nvPr/>
-        </p:nvSpPr>
-        <p:spPr>
-          <a:xfrm>
             <a:off x="640080" y="566928"/>
             <a:ext cx="10058400" cy="530352"/>
           </a:xfrm>
@@ -31011,7 +29920,7 @@
       </p:sp>
       <p:sp>
         <p:nvSpPr>
-          <p:cNvPr id="5" name="Rectangle 4"/>
+          <p:cNvPr id="4" name="Rectangle 3"/>
           <p:cNvSpPr/>
           <p:nvPr/>
         </p:nvSpPr>
@@ -31060,7 +29969,7 @@
       </p:sp>
       <p:sp>
         <p:nvSpPr>
-          <p:cNvPr id="6" name="Rectangle 5"/>
+          <p:cNvPr id="5" name="Rectangle 4"/>
           <p:cNvSpPr/>
           <p:nvPr/>
         </p:nvSpPr>
@@ -31109,7 +30018,7 @@
       </p:sp>
       <p:sp>
         <p:nvSpPr>
-          <p:cNvPr id="7" name="TextBox 6"/>
+          <p:cNvPr id="6" name="TextBox 5"/>
           <p:cNvSpPr txBox="1"/>
           <p:nvPr/>
         </p:nvSpPr>
@@ -31151,7 +30060,7 @@
       </p:sp>
       <p:graphicFrame>
         <p:nvGraphicFramePr>
-          <p:cNvPr id="8" name="Table 7"/>
+          <p:cNvPr id="7" name="Table 6"/>
           <p:cNvGraphicFramePr>
             <a:graphicFrameLocks noGrp="1"/>
           </p:cNvGraphicFramePr>
@@ -31300,7 +30209,7 @@
                         <a:rPr>
                           <a:latin typeface="Inter"/>
                         </a:rPr>
-                        <a:t>● available</a:t>
+                        <a:t>● Available</a:t>
                       </a:r>
                     </a:p>
                   </a:txBody>
@@ -31383,7 +30292,7 @@
                         <a:rPr>
                           <a:latin typeface="Inter"/>
                         </a:rPr>
-                        <a:t>● available</a:t>
+                        <a:t>● Available</a:t>
                       </a:r>
                     </a:p>
                   </a:txBody>
@@ -31466,7 +30375,7 @@
                         <a:rPr>
                           <a:latin typeface="Inter"/>
                         </a:rPr>
-                        <a:t>● available</a:t>
+                        <a:t>● Available</a:t>
                       </a:r>
                     </a:p>
                   </a:txBody>
@@ -31549,7 +30458,7 @@
                         <a:rPr>
                           <a:latin typeface="Inter"/>
                         </a:rPr>
-                        <a:t>● degraded</a:t>
+                        <a:t>● Incomplete</a:t>
                       </a:r>
                     </a:p>
                   </a:txBody>
@@ -31632,7 +30541,7 @@
                         <a:rPr>
                           <a:latin typeface="Inter"/>
                         </a:rPr>
-                        <a:t>● available</a:t>
+                        <a:t>● Available</a:t>
                       </a:r>
                     </a:p>
                   </a:txBody>
@@ -31659,7 +30568,7 @@
                         <a:rPr>
                           <a:latin typeface="Inter"/>
                         </a:rPr>
-                        <a:t>Governed classes and drawdown charts [S6]</a:t>
+                        <a:t>Asset classes and drawdown charts [S6]</a:t>
                       </a:r>
                     </a:p>
                   </a:txBody>
@@ -31715,7 +30624,7 @@
                         <a:rPr>
                           <a:latin typeface="Inter"/>
                         </a:rPr>
-                        <a:t>● degraded</a:t>
+                        <a:t>● Incomplete</a:t>
                       </a:r>
                     </a:p>
                   </a:txBody>
@@ -31798,7 +30707,7 @@
                         <a:rPr>
                           <a:latin typeface="Inter"/>
                         </a:rPr>
-                        <a:t>● unavailable</a:t>
+                        <a:t>● Not available</a:t>
                       </a:r>
                     </a:p>
                   </a:txBody>
@@ -31881,7 +30790,7 @@
                         <a:rPr>
                           <a:latin typeface="Inter"/>
                         </a:rPr>
-                        <a:t>● not licensed</a:t>
+                        <a:t>● Not licensed</a:t>
                       </a:r>
                     </a:p>
                   </a:txBody>
@@ -31908,7 +30817,7 @@
                         <a:rPr>
                           <a:latin typeface="Inter"/>
                         </a:rPr>
-                        <a:t>Not licensed ? Peer allocation context was skipped because peerIntelligence is not available for this organization. This construction report uses portfolio evidence only. [S1]</a:t>
+                        <a:t>Peer allocation context was skipped because peer allocation intelligence is not licensed for this organization. This construction report uses portfolio evidence only. [S1]</a:t>
                       </a:r>
                     </a:p>
                   </a:txBody>
@@ -31925,7 +30834,7 @@
       </p:graphicFrame>
       <p:sp>
         <p:nvSpPr>
-          <p:cNvPr id="9" name="Rectangle 8"/>
+          <p:cNvPr id="8" name="Rectangle 7"/>
           <p:cNvSpPr/>
           <p:nvPr/>
         </p:nvSpPr>
@@ -31974,7 +30883,7 @@
       </p:sp>
       <p:sp>
         <p:nvSpPr>
-          <p:cNvPr id="10" name="TextBox 9"/>
+          <p:cNvPr id="9" name="TextBox 8"/>
           <p:cNvSpPr txBox="1"/>
           <p:nvPr/>
         </p:nvSpPr>
@@ -32016,7 +30925,7 @@
       </p:sp>
       <p:sp>
         <p:nvSpPr>
-          <p:cNvPr id="11" name="TextBox 10"/>
+          <p:cNvPr id="10" name="TextBox 9"/>
           <p:cNvSpPr txBox="1"/>
           <p:nvPr/>
         </p:nvSpPr>
@@ -32058,7 +30967,7 @@
       </p:sp>
       <p:sp>
         <p:nvSpPr>
-          <p:cNvPr id="12" name="TextBox 11"/>
+          <p:cNvPr id="11" name="TextBox 10"/>
           <p:cNvSpPr txBox="1"/>
           <p:nvPr/>
         </p:nvSpPr>
@@ -32173,48 +31082,6 @@
         </p:nvSpPr>
         <p:spPr>
           <a:xfrm>
-            <a:off x="5897880" y="310896"/>
-            <a:ext cx="4800600" cy="256032"/>
-          </a:xfrm>
-          <a:prstGeom prst="rect">
-            <a:avLst/>
-          </a:prstGeom>
-          <a:noFill/>
-        </p:spPr>
-        <p:txBody>
-          <a:bodyPr wrap="none" lIns="9144" rIns="9144" tIns="9144" bIns="9144" anchor="t">
-            <a:spAutoFit/>
-          </a:bodyPr>
-          <a:lstStyle/>
-          <a:p>
-            <a:pPr algn="r">
-              <a:spcAft>
-                <a:spcPts val="0"/>
-              </a:spcAft>
-              <a:defRPr sz="680" b="1">
-                <a:solidFill>
-                  <a:srgbClr val="4F6B00"/>
-                </a:solidFill>
-                <a:latin typeface="Inter"/>
-              </a:defRPr>
-            </a:pPr>
-            <a:r>
-              <a:rPr>
-                <a:latin typeface="Inter"/>
-              </a:rPr>
-              <a:t>Illustrative, Gradient Maintained — demo data, not the client's holdings or managers</a:t>
-            </a:r>
-          </a:p>
-        </p:txBody>
-      </p:sp>
-      <p:sp>
-        <p:nvSpPr>
-          <p:cNvPr id="4" name="TextBox 3"/>
-          <p:cNvSpPr txBox="1"/>
-          <p:nvPr/>
-        </p:nvSpPr>
-        <p:spPr>
-          <a:xfrm>
             <a:off x="640080" y="566928"/>
             <a:ext cx="10058400" cy="530352"/>
           </a:xfrm>
@@ -32251,7 +31118,7 @@
       </p:sp>
       <p:sp>
         <p:nvSpPr>
-          <p:cNvPr id="5" name="Rectangle 4"/>
+          <p:cNvPr id="4" name="Rectangle 3"/>
           <p:cNvSpPr/>
           <p:nvPr/>
         </p:nvSpPr>
@@ -32300,7 +31167,7 @@
       </p:sp>
       <p:sp>
         <p:nvSpPr>
-          <p:cNvPr id="6" name="Rectangle 5"/>
+          <p:cNvPr id="5" name="Rectangle 4"/>
           <p:cNvSpPr/>
           <p:nvPr/>
         </p:nvSpPr>
@@ -32349,7 +31216,7 @@
       </p:sp>
       <p:sp>
         <p:nvSpPr>
-          <p:cNvPr id="7" name="TextBox 6"/>
+          <p:cNvPr id="6" name="TextBox 5"/>
           <p:cNvSpPr txBox="1"/>
           <p:nvPr/>
         </p:nvSpPr>
@@ -32391,7 +31258,7 @@
       </p:sp>
       <p:graphicFrame>
         <p:nvGraphicFramePr>
-          <p:cNvPr id="8" name="Table 7"/>
+          <p:cNvPr id="7" name="Table 6"/>
           <p:cNvGraphicFramePr>
             <a:graphicFrameLocks noGrp="1"/>
           </p:cNvGraphicFramePr>
@@ -32409,14 +31276,10 @@
               </a:tblPr>
               <a:tblGrid>
                 <a:gridCol w="2011680"/>
-                <a:gridCol w="1112139"/>
-                <a:gridCol w="1112139"/>
-                <a:gridCol w="1112139"/>
-                <a:gridCol w="1112139"/>
-                <a:gridCol w="1112139"/>
-                <a:gridCol w="1112139"/>
-                <a:gridCol w="1112139"/>
-                <a:gridCol w="1112139"/>
+                <a:gridCol w="2224278"/>
+                <a:gridCol w="2224278"/>
+                <a:gridCol w="2224278"/>
+                <a:gridCol w="2224278"/>
               </a:tblGrid>
               <a:tr h="521208">
                 <a:tc>
@@ -32490,7 +31353,7 @@
                         <a:rPr>
                           <a:latin typeface="Inter"/>
                         </a:rPr>
-                        <a:t>Basis</a:t>
+                        <a:t>Source</a:t>
                       </a:r>
                     </a:p>
                   </a:txBody>
@@ -32517,7 +31380,7 @@
                         <a:rPr>
                           <a:latin typeface="Inter"/>
                         </a:rPr>
-                        <a:t>Tool / view</a:t>
+                        <a:t>As of</a:t>
                       </a:r>
                     </a:p>
                   </a:txBody>
@@ -32544,115 +31407,7 @@
                         <a:rPr>
                           <a:latin typeface="Inter"/>
                         </a:rPr>
-                        <a:t>Key parameters</a:t>
-                      </a:r>
-                    </a:p>
-                  </a:txBody>
-                  <a:tcPr marL="54864" marR="54864" marT="27432" marB="27432" anchor="ctr">
-                    <a:solidFill>
-                      <a:srgbClr val="0D1117"/>
-                    </a:solidFill>
-                  </a:tcPr>
-                </a:tc>
-                <a:tc>
-                  <a:txBody>
-                    <a:bodyPr/>
-                    <a:lstStyle/>
-                    <a:p>
-                      <a:pPr>
-                        <a:defRPr sz="750" b="1">
-                          <a:solidFill>
-                            <a:srgbClr val="FFFFFF"/>
-                          </a:solidFill>
-                          <a:latin typeface="Inter"/>
-                        </a:defRPr>
-                      </a:pPr>
-                      <a:r>
-                        <a:rPr>
-                          <a:latin typeface="Inter"/>
-                        </a:rPr>
-                        <a:t>As of</a:t>
-                      </a:r>
-                    </a:p>
-                  </a:txBody>
-                  <a:tcPr marL="54864" marR="54864" marT="27432" marB="27432" anchor="ctr">
-                    <a:solidFill>
-                      <a:srgbClr val="0D1117"/>
-                    </a:solidFill>
-                  </a:tcPr>
-                </a:tc>
-                <a:tc>
-                  <a:txBody>
-                    <a:bodyPr/>
-                    <a:lstStyle/>
-                    <a:p>
-                      <a:pPr>
-                        <a:defRPr sz="750" b="1">
-                          <a:solidFill>
-                            <a:srgbClr val="FFFFFF"/>
-                          </a:solidFill>
-                          <a:latin typeface="Inter"/>
-                        </a:defRPr>
-                      </a:pPr>
-                      <a:r>
-                        <a:rPr>
-                          <a:latin typeface="Inter"/>
-                        </a:rPr>
-                        <a:t>Data scope</a:t>
-                      </a:r>
-                    </a:p>
-                  </a:txBody>
-                  <a:tcPr marL="54864" marR="54864" marT="27432" marB="27432" anchor="ctr">
-                    <a:solidFill>
-                      <a:srgbClr val="0D1117"/>
-                    </a:solidFill>
-                  </a:tcPr>
-                </a:tc>
-                <a:tc>
-                  <a:txBody>
-                    <a:bodyPr/>
-                    <a:lstStyle/>
-                    <a:p>
-                      <a:pPr>
-                        <a:defRPr sz="750" b="1">
-                          <a:solidFill>
-                            <a:srgbClr val="FFFFFF"/>
-                          </a:solidFill>
-                          <a:latin typeface="Inter"/>
-                        </a:defRPr>
-                      </a:pPr>
-                      <a:r>
-                        <a:rPr>
-                          <a:latin typeface="Inter"/>
-                        </a:rPr>
-                        <a:t>Validation</a:t>
-                      </a:r>
-                    </a:p>
-                  </a:txBody>
-                  <a:tcPr marL="54864" marR="54864" marT="27432" marB="27432" anchor="ctr">
-                    <a:solidFill>
-                      <a:srgbClr val="0D1117"/>
-                    </a:solidFill>
-                  </a:tcPr>
-                </a:tc>
-                <a:tc>
-                  <a:txBody>
-                    <a:bodyPr/>
-                    <a:lstStyle/>
-                    <a:p>
-                      <a:pPr>
-                        <a:defRPr sz="750" b="1">
-                          <a:solidFill>
-                            <a:srgbClr val="FFFFFF"/>
-                          </a:solidFill>
-                          <a:latin typeface="Inter"/>
-                        </a:defRPr>
-                      </a:pPr>
-                      <a:r>
-                        <a:rPr>
-                          <a:latin typeface="Inter"/>
-                        </a:rPr>
-                        <a:t>Digest</a:t>
+                        <a:t>Check</a:t>
                       </a:r>
                     </a:p>
                   </a:txBody>
@@ -32670,7 +31425,7 @@
                     <a:lstStyle/>
                     <a:p>
                       <a:pPr>
-                        <a:defRPr sz="650" b="1">
+                        <a:defRPr sz="720" b="1">
                           <a:solidFill>
                             <a:srgbClr val="0D1117"/>
                           </a:solidFill>
@@ -32697,7 +31452,7 @@
                     <a:lstStyle/>
                     <a:p>
                       <a:pPr>
-                        <a:defRPr sz="650" b="0">
+                        <a:defRPr sz="720" b="0">
                           <a:solidFill>
                             <a:srgbClr val="0D1117"/>
                           </a:solidFill>
@@ -32724,7 +31479,7 @@
                     <a:lstStyle/>
                     <a:p>
                       <a:pPr>
-                        <a:defRPr sz="650" b="0">
+                        <a:defRPr sz="720" b="0">
                           <a:solidFill>
                             <a:srgbClr val="0D1117"/>
                           </a:solidFill>
@@ -32735,7 +31490,7 @@
                         <a:rPr>
                           <a:latin typeface="Inter"/>
                         </a:rPr>
-                        <a:t>gradient_tool</a:t>
+                        <a:t>list_organizations; get_gradient_capabilities</a:t>
                       </a:r>
                     </a:p>
                   </a:txBody>
@@ -32751,7 +31506,7 @@
                     <a:lstStyle/>
                     <a:p>
                       <a:pPr>
-                        <a:defRPr sz="650" b="0">
+                        <a:defRPr sz="720" b="0">
                           <a:solidFill>
                             <a:srgbClr val="0D1117"/>
                           </a:solidFill>
@@ -32762,7 +31517,7 @@
                         <a:rPr>
                           <a:latin typeface="Inter"/>
                         </a:rPr>
-                        <a:t>list_organizations; get_gradient_capabilities</a:t>
+                        <a:t>2026-06-30</a:t>
                       </a:r>
                     </a:p>
                   </a:txBody>
@@ -32778,132 +31533,24 @@
                     <a:lstStyle/>
                     <a:p>
                       <a:pPr>
-                        <a:defRPr sz="650" b="0">
-                          <a:solidFill>
-                            <a:srgbClr val="0D1117"/>
-                          </a:solidFill>
-                          <a:latin typeface="Inter"/>
-                        </a:defRPr>
-                      </a:pPr>
-                      <a:r>
-                        <a:rPr>
-                          <a:latin typeface="Inter"/>
-                        </a:rPr>
-                        <a:t>organization=test</a:t>
-                      </a:r>
-                    </a:p>
-                  </a:txBody>
-                  <a:tcPr marL="54864" marR="54864" marT="27432" marB="27432" anchor="ctr">
-                    <a:solidFill>
-                      <a:srgbClr val="FFFFFF"/>
-                    </a:solidFill>
-                  </a:tcPr>
-                </a:tc>
-                <a:tc>
-                  <a:txBody>
-                    <a:bodyPr/>
-                    <a:lstStyle/>
-                    <a:p>
-                      <a:pPr>
-                        <a:defRPr sz="650" b="0">
-                          <a:solidFill>
-                            <a:srgbClr val="0D1117"/>
-                          </a:solidFill>
-                          <a:latin typeface="Inter"/>
-                        </a:defRPr>
-                      </a:pPr>
-                      <a:r>
-                        <a:rPr>
-                          <a:latin typeface="Inter"/>
-                        </a:rPr>
-                        <a:t>2026-06-30</a:t>
-                      </a:r>
-                    </a:p>
-                  </a:txBody>
-                  <a:tcPr marL="54864" marR="54864" marT="27432" marB="27432" anchor="ctr">
-                    <a:solidFill>
-                      <a:srgbClr val="FFFFFF"/>
-                    </a:solidFill>
-                  </a:tcPr>
-                </a:tc>
-                <a:tc>
-                  <a:txBody>
-                    <a:bodyPr/>
-                    <a:lstStyle/>
-                    <a:p>
-                      <a:pPr>
-                        <a:defRPr sz="650" b="0">
-                          <a:solidFill>
-                            <a:srgbClr val="0D1117"/>
-                          </a:solidFill>
-                          <a:latin typeface="Inter"/>
-                        </a:defRPr>
-                      </a:pPr>
-                      <a:r>
-                        <a:rPr>
-                          <a:latin typeface="Inter"/>
-                        </a:rPr>
-                        <a:t>Illustrative sample data</a:t>
-                      </a:r>
-                    </a:p>
-                  </a:txBody>
-                  <a:tcPr marL="54864" marR="54864" marT="27432" marB="27432" anchor="ctr">
-                    <a:solidFill>
-                      <a:srgbClr val="FFFFFF"/>
-                    </a:solidFill>
-                  </a:tcPr>
-                </a:tc>
-                <a:tc>
-                  <a:txBody>
-                    <a:bodyPr/>
-                    <a:lstStyle/>
-                    <a:p>
-                      <a:pPr>
-                        <a:defRPr sz="650" b="0">
-                          <a:solidFill>
-                            <a:srgbClr val="0D1117"/>
-                          </a:solidFill>
-                          <a:latin typeface="Inter"/>
-                        </a:defRPr>
-                      </a:pPr>
-                      <a:r>
-                        <a:rPr>
-                          <a:latin typeface="Inter"/>
-                        </a:rPr>
-                        <a:t>passed</a:t>
-                      </a:r>
-                    </a:p>
-                  </a:txBody>
-                  <a:tcPr marL="54864" marR="54864" marT="27432" marB="27432" anchor="ctr">
-                    <a:solidFill>
-                      <a:srgbClr val="FFFFFF"/>
-                    </a:solidFill>
-                  </a:tcPr>
-                </a:tc>
-                <a:tc>
-                  <a:txBody>
-                    <a:bodyPr/>
-                    <a:lstStyle/>
-                    <a:p>
-                      <a:pPr>
-                        <a:defRPr sz="650" b="0">
-                          <a:solidFill>
-                            <a:srgbClr val="0D1117"/>
-                          </a:solidFill>
-                          <a:latin typeface="Inter"/>
-                        </a:defRPr>
-                      </a:pPr>
-                      <a:r>
-                        <a:rPr>
-                          <a:latin typeface="Inter"/>
-                        </a:rPr>
-                        <a:t>sha256:aaaaaaaaaaaaaaaaaaaaaaaaaaaaaaaaaaaaaaaaaaaaaaaaaaaaaaaaaaaaaaaa</a:t>
-                      </a:r>
-                    </a:p>
-                  </a:txBody>
-                  <a:tcPr marL="54864" marR="54864" marT="27432" marB="27432" anchor="ctr">
-                    <a:solidFill>
-                      <a:srgbClr val="FFFFFF"/>
+                        <a:defRPr sz="720" b="1">
+                          <a:solidFill>
+                            <a:srgbClr val="C6F432"/>
+                          </a:solidFill>
+                          <a:latin typeface="Inter"/>
+                        </a:defRPr>
+                      </a:pPr>
+                      <a:r>
+                        <a:rPr>
+                          <a:latin typeface="Inter"/>
+                        </a:rPr>
+                        <a:t>● Passed</a:t>
+                      </a:r>
+                    </a:p>
+                  </a:txBody>
+                  <a:tcPr marL="54864" marR="54864" marT="27432" marB="27432" anchor="ctr">
+                    <a:solidFill>
+                      <a:srgbClr val="F5F7F9"/>
                     </a:solidFill>
                   </a:tcPr>
                 </a:tc>
@@ -32915,7 +31562,7 @@
                     <a:lstStyle/>
                     <a:p>
                       <a:pPr>
-                        <a:defRPr sz="650" b="1">
+                        <a:defRPr sz="720" b="1">
                           <a:solidFill>
                             <a:srgbClr val="0D1117"/>
                           </a:solidFill>
@@ -32942,7 +31589,7 @@
                     <a:lstStyle/>
                     <a:p>
                       <a:pPr>
-                        <a:defRPr sz="650" b="0">
+                        <a:defRPr sz="720" b="0">
                           <a:solidFill>
                             <a:srgbClr val="0D1117"/>
                           </a:solidFill>
@@ -32969,7 +31616,7 @@
                     <a:lstStyle/>
                     <a:p>
                       <a:pPr>
-                        <a:defRPr sz="650" b="0">
+                        <a:defRPr sz="720" b="0">
                           <a:solidFill>
                             <a:srgbClr val="0D1117"/>
                           </a:solidFill>
@@ -32980,7 +31627,7 @@
                         <a:rPr>
                           <a:latin typeface="Inter"/>
                         </a:rPr>
-                        <a:t>gradient_tool</a:t>
+                        <a:t>list_portfolios; get_portfolio_structure</a:t>
                       </a:r>
                     </a:p>
                   </a:txBody>
@@ -32996,7 +31643,7 @@
                     <a:lstStyle/>
                     <a:p>
                       <a:pPr>
-                        <a:defRPr sz="650" b="0">
+                        <a:defRPr sz="720" b="0">
                           <a:solidFill>
                             <a:srgbClr val="0D1117"/>
                           </a:solidFill>
@@ -33007,7 +31654,7 @@
                         <a:rPr>
                           <a:latin typeface="Inter"/>
                         </a:rPr>
-                        <a:t>list_portfolios; get_portfolio_structure</a:t>
+                        <a:t>2026-06-30</a:t>
                       </a:r>
                     </a:p>
                   </a:txBody>
@@ -33023,126 +31670,18 @@
                     <a:lstStyle/>
                     <a:p>
                       <a:pPr>
-                        <a:defRPr sz="650" b="0">
-                          <a:solidFill>
-                            <a:srgbClr val="0D1117"/>
-                          </a:solidFill>
-                          <a:latin typeface="Inter"/>
-                        </a:defRPr>
-                      </a:pPr>
-                      <a:r>
-                        <a:rPr>
-                          <a:latin typeface="Inter"/>
-                        </a:rPr>
-                        <a:t>allocation_tree</a:t>
-                      </a:r>
-                    </a:p>
-                  </a:txBody>
-                  <a:tcPr marL="54864" marR="54864" marT="27432" marB="27432" anchor="ctr">
-                    <a:solidFill>
-                      <a:srgbClr val="F5F7F9"/>
-                    </a:solidFill>
-                  </a:tcPr>
-                </a:tc>
-                <a:tc>
-                  <a:txBody>
-                    <a:bodyPr/>
-                    <a:lstStyle/>
-                    <a:p>
-                      <a:pPr>
-                        <a:defRPr sz="650" b="0">
-                          <a:solidFill>
-                            <a:srgbClr val="0D1117"/>
-                          </a:solidFill>
-                          <a:latin typeface="Inter"/>
-                        </a:defRPr>
-                      </a:pPr>
-                      <a:r>
-                        <a:rPr>
-                          <a:latin typeface="Inter"/>
-                        </a:rPr>
-                        <a:t>2026-06-30</a:t>
-                      </a:r>
-                    </a:p>
-                  </a:txBody>
-                  <a:tcPr marL="54864" marR="54864" marT="27432" marB="27432" anchor="ctr">
-                    <a:solidFill>
-                      <a:srgbClr val="F5F7F9"/>
-                    </a:solidFill>
-                  </a:tcPr>
-                </a:tc>
-                <a:tc>
-                  <a:txBody>
-                    <a:bodyPr/>
-                    <a:lstStyle/>
-                    <a:p>
-                      <a:pPr>
-                        <a:defRPr sz="650" b="0">
-                          <a:solidFill>
-                            <a:srgbClr val="0D1117"/>
-                          </a:solidFill>
-                          <a:latin typeface="Inter"/>
-                        </a:defRPr>
-                      </a:pPr>
-                      <a:r>
-                        <a:rPr>
-                          <a:latin typeface="Inter"/>
-                        </a:rPr>
-                        <a:t>Illustrative sample data</a:t>
-                      </a:r>
-                    </a:p>
-                  </a:txBody>
-                  <a:tcPr marL="54864" marR="54864" marT="27432" marB="27432" anchor="ctr">
-                    <a:solidFill>
-                      <a:srgbClr val="F5F7F9"/>
-                    </a:solidFill>
-                  </a:tcPr>
-                </a:tc>
-                <a:tc>
-                  <a:txBody>
-                    <a:bodyPr/>
-                    <a:lstStyle/>
-                    <a:p>
-                      <a:pPr>
-                        <a:defRPr sz="650" b="0">
-                          <a:solidFill>
-                            <a:srgbClr val="0D1117"/>
-                          </a:solidFill>
-                          <a:latin typeface="Inter"/>
-                        </a:defRPr>
-                      </a:pPr>
-                      <a:r>
-                        <a:rPr>
-                          <a:latin typeface="Inter"/>
-                        </a:rPr>
-                        <a:t>passed</a:t>
-                      </a:r>
-                    </a:p>
-                  </a:txBody>
-                  <a:tcPr marL="54864" marR="54864" marT="27432" marB="27432" anchor="ctr">
-                    <a:solidFill>
-                      <a:srgbClr val="F5F7F9"/>
-                    </a:solidFill>
-                  </a:tcPr>
-                </a:tc>
-                <a:tc>
-                  <a:txBody>
-                    <a:bodyPr/>
-                    <a:lstStyle/>
-                    <a:p>
-                      <a:pPr>
-                        <a:defRPr sz="650" b="0">
-                          <a:solidFill>
-                            <a:srgbClr val="0D1117"/>
-                          </a:solidFill>
-                          <a:latin typeface="Inter"/>
-                        </a:defRPr>
-                      </a:pPr>
-                      <a:r>
-                        <a:rPr>
-                          <a:latin typeface="Inter"/>
-                        </a:rPr>
-                        <a:t>sha256:aaaaaaaaaaaaaaaaaaaaaaaaaaaaaaaaaaaaaaaaaaaaaaaaaaaaaaaaaaaaaaaa</a:t>
+                        <a:defRPr sz="720" b="1">
+                          <a:solidFill>
+                            <a:srgbClr val="C6F432"/>
+                          </a:solidFill>
+                          <a:latin typeface="Inter"/>
+                        </a:defRPr>
+                      </a:pPr>
+                      <a:r>
+                        <a:rPr>
+                          <a:latin typeface="Inter"/>
+                        </a:rPr>
+                        <a:t>● Passed</a:t>
                       </a:r>
                     </a:p>
                   </a:txBody>
@@ -33160,7 +31699,7 @@
                     <a:lstStyle/>
                     <a:p>
                       <a:pPr>
-                        <a:defRPr sz="650" b="1">
+                        <a:defRPr sz="720" b="1">
                           <a:solidFill>
                             <a:srgbClr val="0D1117"/>
                           </a:solidFill>
@@ -33187,7 +31726,7 @@
                     <a:lstStyle/>
                     <a:p>
                       <a:pPr>
-                        <a:defRPr sz="650" b="0">
+                        <a:defRPr sz="720" b="0">
                           <a:solidFill>
                             <a:srgbClr val="0D1117"/>
                           </a:solidFill>
@@ -33214,7 +31753,7 @@
                     <a:lstStyle/>
                     <a:p>
                       <a:pPr>
-                        <a:defRPr sz="650" b="0">
+                        <a:defRPr sz="720" b="0">
                           <a:solidFill>
                             <a:srgbClr val="0D1117"/>
                           </a:solidFill>
@@ -33225,7 +31764,7 @@
                         <a:rPr>
                           <a:latin typeface="Inter"/>
                         </a:rPr>
-                        <a:t>gradient_tool</a:t>
+                        <a:t>check_portfolio_policy</a:t>
                       </a:r>
                     </a:p>
                   </a:txBody>
@@ -33241,7 +31780,7 @@
                     <a:lstStyle/>
                     <a:p>
                       <a:pPr>
-                        <a:defRPr sz="650" b="0">
+                        <a:defRPr sz="720" b="0">
                           <a:solidFill>
                             <a:srgbClr val="0D1117"/>
                           </a:solidFill>
@@ -33252,7 +31791,7 @@
                         <a:rPr>
                           <a:latin typeface="Inter"/>
                         </a:rPr>
-                        <a:t>check_portfolio_policy</a:t>
+                        <a:t>2026-06-30</a:t>
                       </a:r>
                     </a:p>
                   </a:txBody>
@@ -33268,132 +31807,24 @@
                     <a:lstStyle/>
                     <a:p>
                       <a:pPr>
-                        <a:defRPr sz="650" b="0">
-                          <a:solidFill>
-                            <a:srgbClr val="0D1117"/>
-                          </a:solidFill>
-                          <a:latin typeface="Inter"/>
-                        </a:defRPr>
-                      </a:pPr>
-                      <a:r>
-                        <a:rPr>
-                          <a:latin typeface="Inter"/>
-                        </a:rPr>
-                        <a:t>portfolio=test</a:t>
-                      </a:r>
-                    </a:p>
-                  </a:txBody>
-                  <a:tcPr marL="54864" marR="54864" marT="27432" marB="27432" anchor="ctr">
-                    <a:solidFill>
-                      <a:srgbClr val="FFFFFF"/>
-                    </a:solidFill>
-                  </a:tcPr>
-                </a:tc>
-                <a:tc>
-                  <a:txBody>
-                    <a:bodyPr/>
-                    <a:lstStyle/>
-                    <a:p>
-                      <a:pPr>
-                        <a:defRPr sz="650" b="0">
-                          <a:solidFill>
-                            <a:srgbClr val="0D1117"/>
-                          </a:solidFill>
-                          <a:latin typeface="Inter"/>
-                        </a:defRPr>
-                      </a:pPr>
-                      <a:r>
-                        <a:rPr>
-                          <a:latin typeface="Inter"/>
-                        </a:rPr>
-                        <a:t>2026-06-30</a:t>
-                      </a:r>
-                    </a:p>
-                  </a:txBody>
-                  <a:tcPr marL="54864" marR="54864" marT="27432" marB="27432" anchor="ctr">
-                    <a:solidFill>
-                      <a:srgbClr val="FFFFFF"/>
-                    </a:solidFill>
-                  </a:tcPr>
-                </a:tc>
-                <a:tc>
-                  <a:txBody>
-                    <a:bodyPr/>
-                    <a:lstStyle/>
-                    <a:p>
-                      <a:pPr>
-                        <a:defRPr sz="650" b="0">
-                          <a:solidFill>
-                            <a:srgbClr val="0D1117"/>
-                          </a:solidFill>
-                          <a:latin typeface="Inter"/>
-                        </a:defRPr>
-                      </a:pPr>
-                      <a:r>
-                        <a:rPr>
-                          <a:latin typeface="Inter"/>
-                        </a:rPr>
-                        <a:t>Illustrative sample data</a:t>
-                      </a:r>
-                    </a:p>
-                  </a:txBody>
-                  <a:tcPr marL="54864" marR="54864" marT="27432" marB="27432" anchor="ctr">
-                    <a:solidFill>
-                      <a:srgbClr val="FFFFFF"/>
-                    </a:solidFill>
-                  </a:tcPr>
-                </a:tc>
-                <a:tc>
-                  <a:txBody>
-                    <a:bodyPr/>
-                    <a:lstStyle/>
-                    <a:p>
-                      <a:pPr>
-                        <a:defRPr sz="650" b="0">
-                          <a:solidFill>
-                            <a:srgbClr val="0D1117"/>
-                          </a:solidFill>
-                          <a:latin typeface="Inter"/>
-                        </a:defRPr>
-                      </a:pPr>
-                      <a:r>
-                        <a:rPr>
-                          <a:latin typeface="Inter"/>
-                        </a:rPr>
-                        <a:t>passed</a:t>
-                      </a:r>
-                    </a:p>
-                  </a:txBody>
-                  <a:tcPr marL="54864" marR="54864" marT="27432" marB="27432" anchor="ctr">
-                    <a:solidFill>
-                      <a:srgbClr val="FFFFFF"/>
-                    </a:solidFill>
-                  </a:tcPr>
-                </a:tc>
-                <a:tc>
-                  <a:txBody>
-                    <a:bodyPr/>
-                    <a:lstStyle/>
-                    <a:p>
-                      <a:pPr>
-                        <a:defRPr sz="650" b="0">
-                          <a:solidFill>
-                            <a:srgbClr val="0D1117"/>
-                          </a:solidFill>
-                          <a:latin typeface="Inter"/>
-                        </a:defRPr>
-                      </a:pPr>
-                      <a:r>
-                        <a:rPr>
-                          <a:latin typeface="Inter"/>
-                        </a:rPr>
-                        <a:t>sha256:aaaaaaaaaaaaaaaaaaaaaaaaaaaaaaaaaaaaaaaaaaaaaaaaaaaaaaaaaaaaaaaa</a:t>
-                      </a:r>
-                    </a:p>
-                  </a:txBody>
-                  <a:tcPr marL="54864" marR="54864" marT="27432" marB="27432" anchor="ctr">
-                    <a:solidFill>
-                      <a:srgbClr val="FFFFFF"/>
+                        <a:defRPr sz="720" b="1">
+                          <a:solidFill>
+                            <a:srgbClr val="C6F432"/>
+                          </a:solidFill>
+                          <a:latin typeface="Inter"/>
+                        </a:defRPr>
+                      </a:pPr>
+                      <a:r>
+                        <a:rPr>
+                          <a:latin typeface="Inter"/>
+                        </a:rPr>
+                        <a:t>● Passed</a:t>
+                      </a:r>
+                    </a:p>
+                  </a:txBody>
+                  <a:tcPr marL="54864" marR="54864" marT="27432" marB="27432" anchor="ctr">
+                    <a:solidFill>
+                      <a:srgbClr val="F5F7F9"/>
                     </a:solidFill>
                   </a:tcPr>
                 </a:tc>
@@ -33405,7 +31836,7 @@
                     <a:lstStyle/>
                     <a:p>
                       <a:pPr>
-                        <a:defRPr sz="650" b="1">
+                        <a:defRPr sz="720" b="1">
                           <a:solidFill>
                             <a:srgbClr val="0D1117"/>
                           </a:solidFill>
@@ -33432,7 +31863,7 @@
                     <a:lstStyle/>
                     <a:p>
                       <a:pPr>
-                        <a:defRPr sz="650" b="0">
+                        <a:defRPr sz="720" b="0">
                           <a:solidFill>
                             <a:srgbClr val="0D1117"/>
                           </a:solidFill>
@@ -33459,7 +31890,7 @@
                     <a:lstStyle/>
                     <a:p>
                       <a:pPr>
-                        <a:defRPr sz="650" b="0">
+                        <a:defRPr sz="720" b="0">
                           <a:solidFill>
                             <a:srgbClr val="0D1117"/>
                           </a:solidFill>
@@ -33470,7 +31901,7 @@
                         <a:rPr>
                           <a:latin typeface="Inter"/>
                         </a:rPr>
-                        <a:t>gradient_tool</a:t>
+                        <a:t>get_portfolio_exposure</a:t>
                       </a:r>
                     </a:p>
                   </a:txBody>
@@ -33486,7 +31917,7 @@
                     <a:lstStyle/>
                     <a:p>
                       <a:pPr>
-                        <a:defRPr sz="650" b="0">
+                        <a:defRPr sz="720" b="0">
                           <a:solidFill>
                             <a:srgbClr val="0D1117"/>
                           </a:solidFill>
@@ -33497,7 +31928,7 @@
                         <a:rPr>
                           <a:latin typeface="Inter"/>
                         </a:rPr>
-                        <a:t>get_portfolio_exposure</a:t>
+                        <a:t>2026-06-30</a:t>
                       </a:r>
                     </a:p>
                   </a:txBody>
@@ -33513,126 +31944,18 @@
                     <a:lstStyle/>
                     <a:p>
                       <a:pPr>
-                        <a:defRPr sz="650" b="0">
-                          <a:solidFill>
-                            <a:srgbClr val="0D1117"/>
-                          </a:solidFill>
-                          <a:latin typeface="Inter"/>
-                        </a:defRPr>
-                      </a:pPr>
-                      <a:r>
-                        <a:rPr>
-                          <a:latin typeface="Inter"/>
-                        </a:rPr>
-                        <a:t>all pages</a:t>
-                      </a:r>
-                    </a:p>
-                  </a:txBody>
-                  <a:tcPr marL="54864" marR="54864" marT="27432" marB="27432" anchor="ctr">
-                    <a:solidFill>
-                      <a:srgbClr val="F5F7F9"/>
-                    </a:solidFill>
-                  </a:tcPr>
-                </a:tc>
-                <a:tc>
-                  <a:txBody>
-                    <a:bodyPr/>
-                    <a:lstStyle/>
-                    <a:p>
-                      <a:pPr>
-                        <a:defRPr sz="650" b="0">
-                          <a:solidFill>
-                            <a:srgbClr val="0D1117"/>
-                          </a:solidFill>
-                          <a:latin typeface="Inter"/>
-                        </a:defRPr>
-                      </a:pPr>
-                      <a:r>
-                        <a:rPr>
-                          <a:latin typeface="Inter"/>
-                        </a:rPr>
-                        <a:t>2026-06-30</a:t>
-                      </a:r>
-                    </a:p>
-                  </a:txBody>
-                  <a:tcPr marL="54864" marR="54864" marT="27432" marB="27432" anchor="ctr">
-                    <a:solidFill>
-                      <a:srgbClr val="F5F7F9"/>
-                    </a:solidFill>
-                  </a:tcPr>
-                </a:tc>
-                <a:tc>
-                  <a:txBody>
-                    <a:bodyPr/>
-                    <a:lstStyle/>
-                    <a:p>
-                      <a:pPr>
-                        <a:defRPr sz="650" b="0">
-                          <a:solidFill>
-                            <a:srgbClr val="0D1117"/>
-                          </a:solidFill>
-                          <a:latin typeface="Inter"/>
-                        </a:defRPr>
-                      </a:pPr>
-                      <a:r>
-                        <a:rPr>
-                          <a:latin typeface="Inter"/>
-                        </a:rPr>
-                        <a:t>Illustrative sample data</a:t>
-                      </a:r>
-                    </a:p>
-                  </a:txBody>
-                  <a:tcPr marL="54864" marR="54864" marT="27432" marB="27432" anchor="ctr">
-                    <a:solidFill>
-                      <a:srgbClr val="F5F7F9"/>
-                    </a:solidFill>
-                  </a:tcPr>
-                </a:tc>
-                <a:tc>
-                  <a:txBody>
-                    <a:bodyPr/>
-                    <a:lstStyle/>
-                    <a:p>
-                      <a:pPr>
-                        <a:defRPr sz="650" b="0">
-                          <a:solidFill>
-                            <a:srgbClr val="0D1117"/>
-                          </a:solidFill>
-                          <a:latin typeface="Inter"/>
-                        </a:defRPr>
-                      </a:pPr>
-                      <a:r>
-                        <a:rPr>
-                          <a:latin typeface="Inter"/>
-                        </a:rPr>
-                        <a:t>passed</a:t>
-                      </a:r>
-                    </a:p>
-                  </a:txBody>
-                  <a:tcPr marL="54864" marR="54864" marT="27432" marB="27432" anchor="ctr">
-                    <a:solidFill>
-                      <a:srgbClr val="F5F7F9"/>
-                    </a:solidFill>
-                  </a:tcPr>
-                </a:tc>
-                <a:tc>
-                  <a:txBody>
-                    <a:bodyPr/>
-                    <a:lstStyle/>
-                    <a:p>
-                      <a:pPr>
-                        <a:defRPr sz="650" b="0">
-                          <a:solidFill>
-                            <a:srgbClr val="0D1117"/>
-                          </a:solidFill>
-                          <a:latin typeface="Inter"/>
-                        </a:defRPr>
-                      </a:pPr>
-                      <a:r>
-                        <a:rPr>
-                          <a:latin typeface="Inter"/>
-                        </a:rPr>
-                        <a:t>sha256:aaaaaaaaaaaaaaaaaaaaaaaaaaaaaaaaaaaaaaaaaaaaaaaaaaaaaaaaaaaaaaaa</a:t>
+                        <a:defRPr sz="720" b="1">
+                          <a:solidFill>
+                            <a:srgbClr val="C6F432"/>
+                          </a:solidFill>
+                          <a:latin typeface="Inter"/>
+                        </a:defRPr>
+                      </a:pPr>
+                      <a:r>
+                        <a:rPr>
+                          <a:latin typeface="Inter"/>
+                        </a:rPr>
+                        <a:t>● Passed</a:t>
                       </a:r>
                     </a:p>
                   </a:txBody>
@@ -33650,7 +31973,7 @@
                     <a:lstStyle/>
                     <a:p>
                       <a:pPr>
-                        <a:defRPr sz="650" b="1">
+                        <a:defRPr sz="720" b="1">
                           <a:solidFill>
                             <a:srgbClr val="0D1117"/>
                           </a:solidFill>
@@ -33677,7 +32000,7 @@
                     <a:lstStyle/>
                     <a:p>
                       <a:pPr>
-                        <a:defRPr sz="650" b="0">
+                        <a:defRPr sz="720" b="0">
                           <a:solidFill>
                             <a:srgbClr val="0D1117"/>
                           </a:solidFill>
@@ -33704,7 +32027,7 @@
                     <a:lstStyle/>
                     <a:p>
                       <a:pPr>
-                        <a:defRPr sz="650" b="0">
+                        <a:defRPr sz="720" b="0">
                           <a:solidFill>
                             <a:srgbClr val="0D1117"/>
                           </a:solidFill>
@@ -33715,7 +32038,7 @@
                         <a:rPr>
                           <a:latin typeface="Inter"/>
                         </a:rPr>
-                        <a:t>gradient_tool</a:t>
+                        <a:t>get_portfolio_historical_returns; get_portfolio_attribution</a:t>
                       </a:r>
                     </a:p>
                   </a:txBody>
@@ -33731,7 +32054,7 @@
                     <a:lstStyle/>
                     <a:p>
                       <a:pPr>
-                        <a:defRPr sz="650" b="0">
+                        <a:defRPr sz="720" b="0">
                           <a:solidFill>
                             <a:srgbClr val="0D1117"/>
                           </a:solidFill>
@@ -33742,7 +32065,7 @@
                         <a:rPr>
                           <a:latin typeface="Inter"/>
                         </a:rPr>
-                        <a:t>get_portfolio_historical_returns; get_portfolio_attribution</a:t>
+                        <a:t>2026-06-30</a:t>
                       </a:r>
                     </a:p>
                   </a:txBody>
@@ -33758,132 +32081,24 @@
                     <a:lstStyle/>
                     <a:p>
                       <a:pPr>
-                        <a:defRPr sz="650" b="0">
-                          <a:solidFill>
-                            <a:srgbClr val="0D1117"/>
-                          </a:solidFill>
-                          <a:latin typeface="Inter"/>
-                        </a:defRPr>
-                      </a:pPr>
-                      <a:r>
-                        <a:rPr>
-                          <a:latin typeface="Inter"/>
-                        </a:rPr>
-                        <a:t>all sections</a:t>
-                      </a:r>
-                    </a:p>
-                  </a:txBody>
-                  <a:tcPr marL="54864" marR="54864" marT="27432" marB="27432" anchor="ctr">
-                    <a:solidFill>
-                      <a:srgbClr val="FFFFFF"/>
-                    </a:solidFill>
-                  </a:tcPr>
-                </a:tc>
-                <a:tc>
-                  <a:txBody>
-                    <a:bodyPr/>
-                    <a:lstStyle/>
-                    <a:p>
-                      <a:pPr>
-                        <a:defRPr sz="650" b="0">
-                          <a:solidFill>
-                            <a:srgbClr val="0D1117"/>
-                          </a:solidFill>
-                          <a:latin typeface="Inter"/>
-                        </a:defRPr>
-                      </a:pPr>
-                      <a:r>
-                        <a:rPr>
-                          <a:latin typeface="Inter"/>
-                        </a:rPr>
-                        <a:t>2026-06-30</a:t>
-                      </a:r>
-                    </a:p>
-                  </a:txBody>
-                  <a:tcPr marL="54864" marR="54864" marT="27432" marB="27432" anchor="ctr">
-                    <a:solidFill>
-                      <a:srgbClr val="FFFFFF"/>
-                    </a:solidFill>
-                  </a:tcPr>
-                </a:tc>
-                <a:tc>
-                  <a:txBody>
-                    <a:bodyPr/>
-                    <a:lstStyle/>
-                    <a:p>
-                      <a:pPr>
-                        <a:defRPr sz="650" b="0">
-                          <a:solidFill>
-                            <a:srgbClr val="0D1117"/>
-                          </a:solidFill>
-                          <a:latin typeface="Inter"/>
-                        </a:defRPr>
-                      </a:pPr>
-                      <a:r>
-                        <a:rPr>
-                          <a:latin typeface="Inter"/>
-                        </a:rPr>
-                        <a:t>Illustrative sample data</a:t>
-                      </a:r>
-                    </a:p>
-                  </a:txBody>
-                  <a:tcPr marL="54864" marR="54864" marT="27432" marB="27432" anchor="ctr">
-                    <a:solidFill>
-                      <a:srgbClr val="FFFFFF"/>
-                    </a:solidFill>
-                  </a:tcPr>
-                </a:tc>
-                <a:tc>
-                  <a:txBody>
-                    <a:bodyPr/>
-                    <a:lstStyle/>
-                    <a:p>
-                      <a:pPr>
-                        <a:defRPr sz="650" b="0">
-                          <a:solidFill>
-                            <a:srgbClr val="0D1117"/>
-                          </a:solidFill>
-                          <a:latin typeface="Inter"/>
-                        </a:defRPr>
-                      </a:pPr>
-                      <a:r>
-                        <a:rPr>
-                          <a:latin typeface="Inter"/>
-                        </a:rPr>
-                        <a:t>degraded</a:t>
-                      </a:r>
-                    </a:p>
-                  </a:txBody>
-                  <a:tcPr marL="54864" marR="54864" marT="27432" marB="27432" anchor="ctr">
-                    <a:solidFill>
-                      <a:srgbClr val="FFFFFF"/>
-                    </a:solidFill>
-                  </a:tcPr>
-                </a:tc>
-                <a:tc>
-                  <a:txBody>
-                    <a:bodyPr/>
-                    <a:lstStyle/>
-                    <a:p>
-                      <a:pPr>
-                        <a:defRPr sz="650" b="0">
-                          <a:solidFill>
-                            <a:srgbClr val="0D1117"/>
-                          </a:solidFill>
-                          <a:latin typeface="Inter"/>
-                        </a:defRPr>
-                      </a:pPr>
-                      <a:r>
-                        <a:rPr>
-                          <a:latin typeface="Inter"/>
-                        </a:rPr>
-                        <a:t>sha256:aaaaaaaaaaaaaaaaaaaaaaaaaaaaaaaaaaaaaaaaaaaaaaaaaaaaaaaaaaaaaaaa</a:t>
-                      </a:r>
-                    </a:p>
-                  </a:txBody>
-                  <a:tcPr marL="54864" marR="54864" marT="27432" marB="27432" anchor="ctr">
-                    <a:solidFill>
-                      <a:srgbClr val="FFFFFF"/>
+                        <a:defRPr sz="720" b="1">
+                          <a:solidFill>
+                            <a:srgbClr val="F2A93B"/>
+                          </a:solidFill>
+                          <a:latin typeface="Inter"/>
+                        </a:defRPr>
+                      </a:pPr>
+                      <a:r>
+                        <a:rPr>
+                          <a:latin typeface="Inter"/>
+                        </a:rPr>
+                        <a:t>● Incomplete</a:t>
+                      </a:r>
+                    </a:p>
+                  </a:txBody>
+                  <a:tcPr marL="54864" marR="54864" marT="27432" marB="27432" anchor="ctr">
+                    <a:solidFill>
+                      <a:srgbClr val="F5F7F9"/>
                     </a:solidFill>
                   </a:tcPr>
                 </a:tc>
@@ -33895,7 +32110,7 @@
                     <a:lstStyle/>
                     <a:p>
                       <a:pPr>
-                        <a:defRPr sz="650" b="1">
+                        <a:defRPr sz="720" b="1">
                           <a:solidFill>
                             <a:srgbClr val="0D1117"/>
                           </a:solidFill>
@@ -33922,7 +32137,7 @@
                     <a:lstStyle/>
                     <a:p>
                       <a:pPr>
-                        <a:defRPr sz="650" b="0">
+                        <a:defRPr sz="720" b="0">
                           <a:solidFill>
                             <a:srgbClr val="0D1117"/>
                           </a:solidFill>
@@ -33949,7 +32164,7 @@
                     <a:lstStyle/>
                     <a:p>
                       <a:pPr>
-                        <a:defRPr sz="650" b="0">
+                        <a:defRPr sz="720" b="0">
                           <a:solidFill>
                             <a:srgbClr val="0D1117"/>
                           </a:solidFill>
@@ -33960,7 +32175,7 @@
                         <a:rPr>
                           <a:latin typeface="Inter"/>
                         </a:rPr>
-                        <a:t>gradient_tool</a:t>
+                        <a:t>get_portfolio_exposure; get_capital_market_assumptions</a:t>
                       </a:r>
                     </a:p>
                   </a:txBody>
@@ -33976,7 +32191,7 @@
                     <a:lstStyle/>
                     <a:p>
                       <a:pPr>
-                        <a:defRPr sz="650" b="0">
+                        <a:defRPr sz="720" b="0">
                           <a:solidFill>
                             <a:srgbClr val="0D1117"/>
                           </a:solidFill>
@@ -33987,7 +32202,7 @@
                         <a:rPr>
                           <a:latin typeface="Inter"/>
                         </a:rPr>
-                        <a:t>get_chart_data; get_capital_market_assumptions</a:t>
+                        <a:t>2026-06-15</a:t>
                       </a:r>
                     </a:p>
                   </a:txBody>
@@ -34003,126 +32218,18 @@
                     <a:lstStyle/>
                     <a:p>
                       <a:pPr>
-                        <a:defRPr sz="650" b="0">
-                          <a:solidFill>
-                            <a:srgbClr val="0D1117"/>
-                          </a:solidFill>
-                          <a:latin typeface="Inter"/>
-                        </a:defRPr>
-                      </a:pPr>
-                      <a:r>
-                        <a:rPr>
-                          <a:latin typeface="Inter"/>
-                        </a:rPr>
-                        <a:t>commitments; baseline</a:t>
-                      </a:r>
-                    </a:p>
-                  </a:txBody>
-                  <a:tcPr marL="54864" marR="54864" marT="27432" marB="27432" anchor="ctr">
-                    <a:solidFill>
-                      <a:srgbClr val="F5F7F9"/>
-                    </a:solidFill>
-                  </a:tcPr>
-                </a:tc>
-                <a:tc>
-                  <a:txBody>
-                    <a:bodyPr/>
-                    <a:lstStyle/>
-                    <a:p>
-                      <a:pPr>
-                        <a:defRPr sz="650" b="0">
-                          <a:solidFill>
-                            <a:srgbClr val="0D1117"/>
-                          </a:solidFill>
-                          <a:latin typeface="Inter"/>
-                        </a:defRPr>
-                      </a:pPr>
-                      <a:r>
-                        <a:rPr>
-                          <a:latin typeface="Inter"/>
-                        </a:rPr>
-                        <a:t>2026-06-15</a:t>
-                      </a:r>
-                    </a:p>
-                  </a:txBody>
-                  <a:tcPr marL="54864" marR="54864" marT="27432" marB="27432" anchor="ctr">
-                    <a:solidFill>
-                      <a:srgbClr val="F5F7F9"/>
-                    </a:solidFill>
-                  </a:tcPr>
-                </a:tc>
-                <a:tc>
-                  <a:txBody>
-                    <a:bodyPr/>
-                    <a:lstStyle/>
-                    <a:p>
-                      <a:pPr>
-                        <a:defRPr sz="650" b="0">
-                          <a:solidFill>
-                            <a:srgbClr val="0D1117"/>
-                          </a:solidFill>
-                          <a:latin typeface="Inter"/>
-                        </a:defRPr>
-                      </a:pPr>
-                      <a:r>
-                        <a:rPr>
-                          <a:latin typeface="Inter"/>
-                        </a:rPr>
-                        <a:t>Illustrative sample data</a:t>
-                      </a:r>
-                    </a:p>
-                  </a:txBody>
-                  <a:tcPr marL="54864" marR="54864" marT="27432" marB="27432" anchor="ctr">
-                    <a:solidFill>
-                      <a:srgbClr val="F5F7F9"/>
-                    </a:solidFill>
-                  </a:tcPr>
-                </a:tc>
-                <a:tc>
-                  <a:txBody>
-                    <a:bodyPr/>
-                    <a:lstStyle/>
-                    <a:p>
-                      <a:pPr>
-                        <a:defRPr sz="650" b="0">
-                          <a:solidFill>
-                            <a:srgbClr val="0D1117"/>
-                          </a:solidFill>
-                          <a:latin typeface="Inter"/>
-                        </a:defRPr>
-                      </a:pPr>
-                      <a:r>
-                        <a:rPr>
-                          <a:latin typeface="Inter"/>
-                        </a:rPr>
-                        <a:t>passed</a:t>
-                      </a:r>
-                    </a:p>
-                  </a:txBody>
-                  <a:tcPr marL="54864" marR="54864" marT="27432" marB="27432" anchor="ctr">
-                    <a:solidFill>
-                      <a:srgbClr val="F5F7F9"/>
-                    </a:solidFill>
-                  </a:tcPr>
-                </a:tc>
-                <a:tc>
-                  <a:txBody>
-                    <a:bodyPr/>
-                    <a:lstStyle/>
-                    <a:p>
-                      <a:pPr>
-                        <a:defRPr sz="650" b="0">
-                          <a:solidFill>
-                            <a:srgbClr val="0D1117"/>
-                          </a:solidFill>
-                          <a:latin typeface="Inter"/>
-                        </a:defRPr>
-                      </a:pPr>
-                      <a:r>
-                        <a:rPr>
-                          <a:latin typeface="Inter"/>
-                        </a:rPr>
-                        <a:t>sha256:aaaaaaaaaaaaaaaaaaaaaaaaaaaaaaaaaaaaaaaaaaaaaaaaaaaaaaaaaaaaaaaa</a:t>
+                        <a:defRPr sz="720" b="1">
+                          <a:solidFill>
+                            <a:srgbClr val="C6F432"/>
+                          </a:solidFill>
+                          <a:latin typeface="Inter"/>
+                        </a:defRPr>
+                      </a:pPr>
+                      <a:r>
+                        <a:rPr>
+                          <a:latin typeface="Inter"/>
+                        </a:rPr>
+                        <a:t>● Passed</a:t>
                       </a:r>
                     </a:p>
                   </a:txBody>
@@ -34140,7 +32247,7 @@
                     <a:lstStyle/>
                     <a:p>
                       <a:pPr>
-                        <a:defRPr sz="650" b="1">
+                        <a:defRPr sz="720" b="1">
                           <a:solidFill>
                             <a:srgbClr val="0D1117"/>
                           </a:solidFill>
@@ -34167,7 +32274,7 @@
                     <a:lstStyle/>
                     <a:p>
                       <a:pPr>
-                        <a:defRPr sz="650" b="0">
+                        <a:defRPr sz="720" b="0">
                           <a:solidFill>
                             <a:srgbClr val="0D1117"/>
                           </a:solidFill>
@@ -34194,7 +32301,7 @@
                     <a:lstStyle/>
                     <a:p>
                       <a:pPr>
-                        <a:defRPr sz="650" b="0">
+                        <a:defRPr sz="720" b="0">
                           <a:solidFill>
                             <a:srgbClr val="0D1117"/>
                           </a:solidFill>
@@ -34205,7 +32312,7 @@
                         <a:rPr>
                           <a:latin typeface="Inter"/>
                         </a:rPr>
-                        <a:t>gradient_tool</a:t>
+                        <a:t>get_macro_conditions</a:t>
                       </a:r>
                     </a:p>
                   </a:txBody>
@@ -34221,7 +32328,7 @@
                     <a:lstStyle/>
                     <a:p>
                       <a:pPr>
-                        <a:defRPr sz="650" b="0">
+                        <a:defRPr sz="720" b="0">
                           <a:solidFill>
                             <a:srgbClr val="0D1117"/>
                           </a:solidFill>
@@ -34232,7 +32339,7 @@
                         <a:rPr>
                           <a:latin typeface="Inter"/>
                         </a:rPr>
-                        <a:t>get_macro_conditions</a:t>
+                        <a:t>2026-06-30</a:t>
                       </a:r>
                     </a:p>
                   </a:txBody>
@@ -34248,132 +32355,24 @@
                     <a:lstStyle/>
                     <a:p>
                       <a:pPr>
-                        <a:defRPr sz="650" b="0">
-                          <a:solidFill>
-                            <a:srgbClr val="0D1117"/>
-                          </a:solidFill>
-                          <a:latin typeface="Inter"/>
-                        </a:defRPr>
-                      </a:pPr>
-                      <a:r>
-                        <a:rPr>
-                          <a:latin typeface="Inter"/>
-                        </a:rPr>
-                        <a:t>illustrative</a:t>
-                      </a:r>
-                    </a:p>
-                  </a:txBody>
-                  <a:tcPr marL="54864" marR="54864" marT="27432" marB="27432" anchor="ctr">
-                    <a:solidFill>
-                      <a:srgbClr val="FFFFFF"/>
-                    </a:solidFill>
-                  </a:tcPr>
-                </a:tc>
-                <a:tc>
-                  <a:txBody>
-                    <a:bodyPr/>
-                    <a:lstStyle/>
-                    <a:p>
-                      <a:pPr>
-                        <a:defRPr sz="650" b="0">
-                          <a:solidFill>
-                            <a:srgbClr val="0D1117"/>
-                          </a:solidFill>
-                          <a:latin typeface="Inter"/>
-                        </a:defRPr>
-                      </a:pPr>
-                      <a:r>
-                        <a:rPr>
-                          <a:latin typeface="Inter"/>
-                        </a:rPr>
-                        <a:t>2026-06-30</a:t>
-                      </a:r>
-                    </a:p>
-                  </a:txBody>
-                  <a:tcPr marL="54864" marR="54864" marT="27432" marB="27432" anchor="ctr">
-                    <a:solidFill>
-                      <a:srgbClr val="FFFFFF"/>
-                    </a:solidFill>
-                  </a:tcPr>
-                </a:tc>
-                <a:tc>
-                  <a:txBody>
-                    <a:bodyPr/>
-                    <a:lstStyle/>
-                    <a:p>
-                      <a:pPr>
-                        <a:defRPr sz="650" b="0">
-                          <a:solidFill>
-                            <a:srgbClr val="0D1117"/>
-                          </a:solidFill>
-                          <a:latin typeface="Inter"/>
-                        </a:defRPr>
-                      </a:pPr>
-                      <a:r>
-                        <a:rPr>
-                          <a:latin typeface="Inter"/>
-                        </a:rPr>
-                        <a:t>Illustrative sample data</a:t>
-                      </a:r>
-                    </a:p>
-                  </a:txBody>
-                  <a:tcPr marL="54864" marR="54864" marT="27432" marB="27432" anchor="ctr">
-                    <a:solidFill>
-                      <a:srgbClr val="FFFFFF"/>
-                    </a:solidFill>
-                  </a:tcPr>
-                </a:tc>
-                <a:tc>
-                  <a:txBody>
-                    <a:bodyPr/>
-                    <a:lstStyle/>
-                    <a:p>
-                      <a:pPr>
-                        <a:defRPr sz="650" b="0">
-                          <a:solidFill>
-                            <a:srgbClr val="0D1117"/>
-                          </a:solidFill>
-                          <a:latin typeface="Inter"/>
-                        </a:defRPr>
-                      </a:pPr>
-                      <a:r>
-                        <a:rPr>
-                          <a:latin typeface="Inter"/>
-                        </a:rPr>
-                        <a:t>degraded</a:t>
-                      </a:r>
-                    </a:p>
-                  </a:txBody>
-                  <a:tcPr marL="54864" marR="54864" marT="27432" marB="27432" anchor="ctr">
-                    <a:solidFill>
-                      <a:srgbClr val="FFFFFF"/>
-                    </a:solidFill>
-                  </a:tcPr>
-                </a:tc>
-                <a:tc>
-                  <a:txBody>
-                    <a:bodyPr/>
-                    <a:lstStyle/>
-                    <a:p>
-                      <a:pPr>
-                        <a:defRPr sz="650" b="0">
-                          <a:solidFill>
-                            <a:srgbClr val="0D1117"/>
-                          </a:solidFill>
-                          <a:latin typeface="Inter"/>
-                        </a:defRPr>
-                      </a:pPr>
-                      <a:r>
-                        <a:rPr>
-                          <a:latin typeface="Inter"/>
-                        </a:rPr>
-                        <a:t>sha256:aaaaaaaaaaaaaaaaaaaaaaaaaaaaaaaaaaaaaaaaaaaaaaaaaaaaaaaaaaaaaaaa</a:t>
-                      </a:r>
-                    </a:p>
-                  </a:txBody>
-                  <a:tcPr marL="54864" marR="54864" marT="27432" marB="27432" anchor="ctr">
-                    <a:solidFill>
-                      <a:srgbClr val="FFFFFF"/>
+                        <a:defRPr sz="720" b="1">
+                          <a:solidFill>
+                            <a:srgbClr val="F2A93B"/>
+                          </a:solidFill>
+                          <a:latin typeface="Inter"/>
+                        </a:defRPr>
+                      </a:pPr>
+                      <a:r>
+                        <a:rPr>
+                          <a:latin typeface="Inter"/>
+                        </a:rPr>
+                        <a:t>● Incomplete</a:t>
+                      </a:r>
+                    </a:p>
+                  </a:txBody>
+                  <a:tcPr marL="54864" marR="54864" marT="27432" marB="27432" anchor="ctr">
+                    <a:solidFill>
+                      <a:srgbClr val="F5F7F9"/>
                     </a:solidFill>
                   </a:tcPr>
                 </a:tc>
@@ -34385,7 +32384,7 @@
                     <a:lstStyle/>
                     <a:p>
                       <a:pPr>
-                        <a:defRPr sz="650" b="1">
+                        <a:defRPr sz="720" b="1">
                           <a:solidFill>
                             <a:srgbClr val="0D1117"/>
                           </a:solidFill>
@@ -34412,7 +32411,7 @@
                     <a:lstStyle/>
                     <a:p>
                       <a:pPr>
-                        <a:defRPr sz="650" b="0">
+                        <a:defRPr sz="720" b="0">
                           <a:solidFill>
                             <a:srgbClr val="0D1117"/>
                           </a:solidFill>
@@ -34439,7 +32438,7 @@
                     <a:lstStyle/>
                     <a:p>
                       <a:pPr>
-                        <a:defRPr sz="650" b="0">
+                        <a:defRPr sz="720" b="0">
                           <a:solidFill>
                             <a:srgbClr val="0D1117"/>
                           </a:solidFill>
@@ -34450,7 +32449,7 @@
                         <a:rPr>
                           <a:latin typeface="Inter"/>
                         </a:rPr>
-                        <a:t>gradient_tool</a:t>
+                        <a:t>get_gradient_capabilities</a:t>
                       </a:r>
                     </a:p>
                   </a:txBody>
@@ -34466,7 +32465,7 @@
                     <a:lstStyle/>
                     <a:p>
                       <a:pPr>
-                        <a:defRPr sz="650" b="0">
+                        <a:defRPr sz="720" b="0">
                           <a:solidFill>
                             <a:srgbClr val="0D1117"/>
                           </a:solidFill>
@@ -34477,7 +32476,7 @@
                         <a:rPr>
                           <a:latin typeface="Inter"/>
                         </a:rPr>
-                        <a:t>get_gradient_capabilities</a:t>
+                        <a:t>2026-06-30</a:t>
                       </a:r>
                     </a:p>
                   </a:txBody>
@@ -34493,126 +32492,18 @@
                     <a:lstStyle/>
                     <a:p>
                       <a:pPr>
-                        <a:defRPr sz="650" b="0">
-                          <a:solidFill>
-                            <a:srgbClr val="0D1117"/>
-                          </a:solidFill>
-                          <a:latin typeface="Inter"/>
-                        </a:defRPr>
-                      </a:pPr>
-                      <a:r>
-                        <a:rPr>
-                          <a:latin typeface="Inter"/>
-                        </a:rPr>
-                        <a:t>illustrative</a:t>
-                      </a:r>
-                    </a:p>
-                  </a:txBody>
-                  <a:tcPr marL="54864" marR="54864" marT="27432" marB="27432" anchor="ctr">
-                    <a:solidFill>
-                      <a:srgbClr val="F5F7F9"/>
-                    </a:solidFill>
-                  </a:tcPr>
-                </a:tc>
-                <a:tc>
-                  <a:txBody>
-                    <a:bodyPr/>
-                    <a:lstStyle/>
-                    <a:p>
-                      <a:pPr>
-                        <a:defRPr sz="650" b="0">
-                          <a:solidFill>
-                            <a:srgbClr val="0D1117"/>
-                          </a:solidFill>
-                          <a:latin typeface="Inter"/>
-                        </a:defRPr>
-                      </a:pPr>
-                      <a:r>
-                        <a:rPr>
-                          <a:latin typeface="Inter"/>
-                        </a:rPr>
-                        <a:t>2026-06-30</a:t>
-                      </a:r>
-                    </a:p>
-                  </a:txBody>
-                  <a:tcPr marL="54864" marR="54864" marT="27432" marB="27432" anchor="ctr">
-                    <a:solidFill>
-                      <a:srgbClr val="F5F7F9"/>
-                    </a:solidFill>
-                  </a:tcPr>
-                </a:tc>
-                <a:tc>
-                  <a:txBody>
-                    <a:bodyPr/>
-                    <a:lstStyle/>
-                    <a:p>
-                      <a:pPr>
-                        <a:defRPr sz="650" b="0">
-                          <a:solidFill>
-                            <a:srgbClr val="0D1117"/>
-                          </a:solidFill>
-                          <a:latin typeface="Inter"/>
-                        </a:defRPr>
-                      </a:pPr>
-                      <a:r>
-                        <a:rPr>
-                          <a:latin typeface="Inter"/>
-                        </a:rPr>
-                        <a:t>Illustrative sample data</a:t>
-                      </a:r>
-                    </a:p>
-                  </a:txBody>
-                  <a:tcPr marL="54864" marR="54864" marT="27432" marB="27432" anchor="ctr">
-                    <a:solidFill>
-                      <a:srgbClr val="F5F7F9"/>
-                    </a:solidFill>
-                  </a:tcPr>
-                </a:tc>
-                <a:tc>
-                  <a:txBody>
-                    <a:bodyPr/>
-                    <a:lstStyle/>
-                    <a:p>
-                      <a:pPr>
-                        <a:defRPr sz="650" b="0">
-                          <a:solidFill>
-                            <a:srgbClr val="0D1117"/>
-                          </a:solidFill>
-                          <a:latin typeface="Inter"/>
-                        </a:defRPr>
-                      </a:pPr>
-                      <a:r>
-                        <a:rPr>
-                          <a:latin typeface="Inter"/>
-                        </a:rPr>
-                        <a:t>advisory</a:t>
-                      </a:r>
-                    </a:p>
-                  </a:txBody>
-                  <a:tcPr marL="54864" marR="54864" marT="27432" marB="27432" anchor="ctr">
-                    <a:solidFill>
-                      <a:srgbClr val="F5F7F9"/>
-                    </a:solidFill>
-                  </a:tcPr>
-                </a:tc>
-                <a:tc>
-                  <a:txBody>
-                    <a:bodyPr/>
-                    <a:lstStyle/>
-                    <a:p>
-                      <a:pPr>
-                        <a:defRPr sz="650" b="0">
-                          <a:solidFill>
-                            <a:srgbClr val="0D1117"/>
-                          </a:solidFill>
-                          <a:latin typeface="Inter"/>
-                        </a:defRPr>
-                      </a:pPr>
-                      <a:r>
-                        <a:rPr>
-                          <a:latin typeface="Inter"/>
-                        </a:rPr>
-                        <a:t>sha256:aaaaaaaaaaaaaaaaaaaaaaaaaaaaaaaaaaaaaaaaaaaaaaaaaaaaaaaaaaaaaaaa</a:t>
+                        <a:defRPr sz="720" b="1">
+                          <a:solidFill>
+                            <a:srgbClr val="F2A93B"/>
+                          </a:solidFill>
+                          <a:latin typeface="Inter"/>
+                        </a:defRPr>
+                      </a:pPr>
+                      <a:r>
+                        <a:rPr>
+                          <a:latin typeface="Inter"/>
+                        </a:rPr>
+                        <a:t>● Advisory</a:t>
                       </a:r>
                     </a:p>
                   </a:txBody>
@@ -34629,7 +32520,7 @@
       </p:graphicFrame>
       <p:sp>
         <p:nvSpPr>
-          <p:cNvPr id="9" name="TextBox 8"/>
+          <p:cNvPr id="8" name="TextBox 7"/>
           <p:cNvSpPr txBox="1"/>
           <p:nvPr/>
         </p:nvSpPr>
@@ -34671,7 +32562,7 @@
       </p:sp>
       <p:sp>
         <p:nvSpPr>
-          <p:cNvPr id="10" name="Rectangle 9"/>
+          <p:cNvPr id="9" name="Rectangle 8"/>
           <p:cNvSpPr/>
           <p:nvPr/>
         </p:nvSpPr>
@@ -34720,7 +32611,7 @@
       </p:sp>
       <p:sp>
         <p:nvSpPr>
-          <p:cNvPr id="11" name="TextBox 10"/>
+          <p:cNvPr id="10" name="TextBox 9"/>
           <p:cNvSpPr txBox="1"/>
           <p:nvPr/>
         </p:nvSpPr>
@@ -34762,7 +32653,7 @@
       </p:sp>
       <p:sp>
         <p:nvSpPr>
-          <p:cNvPr id="12" name="TextBox 11"/>
+          <p:cNvPr id="11" name="TextBox 10"/>
           <p:cNvSpPr txBox="1"/>
           <p:nvPr/>
         </p:nvSpPr>
@@ -34804,7 +32695,7 @@
       </p:sp>
       <p:sp>
         <p:nvSpPr>
-          <p:cNvPr id="13" name="TextBox 12"/>
+          <p:cNvPr id="12" name="TextBox 11"/>
           <p:cNvSpPr txBox="1"/>
           <p:nvPr/>
         </p:nvSpPr>
@@ -34919,48 +32810,6 @@
         </p:nvSpPr>
         <p:spPr>
           <a:xfrm>
-            <a:off x="5897880" y="310896"/>
-            <a:ext cx="4800600" cy="256032"/>
-          </a:xfrm>
-          <a:prstGeom prst="rect">
-            <a:avLst/>
-          </a:prstGeom>
-          <a:noFill/>
-        </p:spPr>
-        <p:txBody>
-          <a:bodyPr wrap="none" lIns="9144" rIns="9144" tIns="9144" bIns="9144" anchor="t">
-            <a:spAutoFit/>
-          </a:bodyPr>
-          <a:lstStyle/>
-          <a:p>
-            <a:pPr algn="r">
-              <a:spcAft>
-                <a:spcPts val="0"/>
-              </a:spcAft>
-              <a:defRPr sz="680" b="1">
-                <a:solidFill>
-                  <a:srgbClr val="4F6B00"/>
-                </a:solidFill>
-                <a:latin typeface="Inter"/>
-              </a:defRPr>
-            </a:pPr>
-            <a:r>
-              <a:rPr>
-                <a:latin typeface="Inter"/>
-              </a:rPr>
-              <a:t>Illustrative, Gradient Maintained — demo data, not the client's holdings or managers</a:t>
-            </a:r>
-          </a:p>
-        </p:txBody>
-      </p:sp>
-      <p:sp>
-        <p:nvSpPr>
-          <p:cNvPr id="4" name="TextBox 3"/>
-          <p:cNvSpPr txBox="1"/>
-          <p:nvPr/>
-        </p:nvSpPr>
-        <p:spPr>
-          <a:xfrm>
             <a:off x="640080" y="566928"/>
             <a:ext cx="10058400" cy="530352"/>
           </a:xfrm>
@@ -34990,14 +32839,14 @@
               <a:rPr>
                 <a:latin typeface="Inter"/>
               </a:rPr>
-              <a:t>Appendix — Server Metric Methods and Disclosures</a:t>
+              <a:t>Appendix — Sources and methods — continued</a:t>
             </a:r>
           </a:p>
         </p:txBody>
       </p:sp>
       <p:sp>
         <p:nvSpPr>
-          <p:cNvPr id="5" name="Rectangle 4"/>
+          <p:cNvPr id="4" name="Rectangle 3"/>
           <p:cNvSpPr/>
           <p:nvPr/>
         </p:nvSpPr>
@@ -35046,7 +32895,7 @@
       </p:sp>
       <p:sp>
         <p:nvSpPr>
-          <p:cNvPr id="6" name="Rectangle 5"/>
+          <p:cNvPr id="5" name="Rectangle 4"/>
           <p:cNvSpPr/>
           <p:nvPr/>
         </p:nvSpPr>
@@ -35095,7 +32944,7 @@
       </p:sp>
       <p:sp>
         <p:nvSpPr>
-          <p:cNvPr id="7" name="TextBox 6"/>
+          <p:cNvPr id="6" name="TextBox 5"/>
           <p:cNvSpPr txBox="1"/>
           <p:nvPr/>
         </p:nvSpPr>
@@ -35130,14 +32979,14 @@
               <a:rPr>
                 <a:latin typeface="Inter"/>
               </a:rPr>
-              <a:t>B</a:t>
+              <a:t>A</a:t>
             </a:r>
           </a:p>
         </p:txBody>
       </p:sp>
       <p:sp>
         <p:nvSpPr>
-          <p:cNvPr id="8" name="TextBox 7"/>
+          <p:cNvPr id="7" name="TextBox 6"/>
           <p:cNvSpPr txBox="1"/>
           <p:nvPr/>
         </p:nvSpPr>
@@ -35172,14 +33021,14 @@
               <a:rPr>
                 <a:latin typeface="Inter"/>
               </a:rPr>
-              <a:t>SERVER METRIC METHODS</a:t>
+              <a:t>SOURCE AUDIT TRAIL</a:t>
             </a:r>
           </a:p>
         </p:txBody>
       </p:sp>
       <p:graphicFrame>
         <p:nvGraphicFramePr>
-          <p:cNvPr id="9" name="Table 8"/>
+          <p:cNvPr id="8" name="Table 7"/>
           <p:cNvGraphicFramePr>
             <a:graphicFrameLocks noGrp="1"/>
           </p:cNvGraphicFramePr>
@@ -35187,7 +33036,1289 @@
         </p:nvGraphicFramePr>
         <p:xfrm>
           <a:off x="640080" y="1600200"/>
-          <a:ext cx="10908792" cy="1119576"/>
+          <a:ext cx="10908792" cy="4416552"/>
+        </p:xfrm>
+        <a:graphic>
+          <a:graphicData uri="http://schemas.openxmlformats.org/drawingml/2006/table">
+            <a:tbl>
+              <a:tblPr firstRow="1" bandRow="1">
+                <a:tableStyleId>{5C22544A-7EE6-4342-B048-85BDC9FD1C3A}</a:tableStyleId>
+              </a:tblPr>
+              <a:tblGrid>
+                <a:gridCol w="2011680"/>
+                <a:gridCol w="4448556"/>
+                <a:gridCol w="4448556"/>
+              </a:tblGrid>
+              <a:tr h="490728">
+                <a:tc>
+                  <a:txBody>
+                    <a:bodyPr/>
+                    <a:lstStyle/>
+                    <a:p>
+                      <a:pPr>
+                        <a:defRPr sz="750" b="1">
+                          <a:solidFill>
+                            <a:srgbClr val="FFFFFF"/>
+                          </a:solidFill>
+                          <a:latin typeface="Inter"/>
+                        </a:defRPr>
+                      </a:pPr>
+                      <a:r>
+                        <a:rPr>
+                          <a:latin typeface="Inter"/>
+                        </a:rPr>
+                        <a:t>Tag</a:t>
+                      </a:r>
+                    </a:p>
+                  </a:txBody>
+                  <a:tcPr marL="54864" marR="54864" marT="27432" marB="27432" anchor="ctr">
+                    <a:solidFill>
+                      <a:srgbClr val="0D1117"/>
+                    </a:solidFill>
+                  </a:tcPr>
+                </a:tc>
+                <a:tc>
+                  <a:txBody>
+                    <a:bodyPr/>
+                    <a:lstStyle/>
+                    <a:p>
+                      <a:pPr>
+                        <a:defRPr sz="750" b="1">
+                          <a:solidFill>
+                            <a:srgbClr val="FFFFFF"/>
+                          </a:solidFill>
+                          <a:latin typeface="Inter"/>
+                        </a:defRPr>
+                      </a:pPr>
+                      <a:r>
+                        <a:rPr>
+                          <a:latin typeface="Inter"/>
+                        </a:rPr>
+                        <a:t>Key parameters</a:t>
+                      </a:r>
+                    </a:p>
+                  </a:txBody>
+                  <a:tcPr marL="54864" marR="54864" marT="27432" marB="27432" anchor="ctr">
+                    <a:solidFill>
+                      <a:srgbClr val="0D1117"/>
+                    </a:solidFill>
+                  </a:tcPr>
+                </a:tc>
+                <a:tc>
+                  <a:txBody>
+                    <a:bodyPr/>
+                    <a:lstStyle/>
+                    <a:p>
+                      <a:pPr>
+                        <a:defRPr sz="750" b="1">
+                          <a:solidFill>
+                            <a:srgbClr val="FFFFFF"/>
+                          </a:solidFill>
+                          <a:latin typeface="Inter"/>
+                        </a:defRPr>
+                      </a:pPr>
+                      <a:r>
+                        <a:rPr>
+                          <a:latin typeface="Inter"/>
+                        </a:rPr>
+                        <a:t>Digest</a:t>
+                      </a:r>
+                    </a:p>
+                  </a:txBody>
+                  <a:tcPr marL="54864" marR="54864" marT="27432" marB="27432" anchor="ctr">
+                    <a:solidFill>
+                      <a:srgbClr val="0D1117"/>
+                    </a:solidFill>
+                  </a:tcPr>
+                </a:tc>
+              </a:tr>
+              <a:tr h="490728">
+                <a:tc>
+                  <a:txBody>
+                    <a:bodyPr/>
+                    <a:lstStyle/>
+                    <a:p>
+                      <a:pPr>
+                        <a:defRPr sz="800" b="1">
+                          <a:solidFill>
+                            <a:srgbClr val="0D1117"/>
+                          </a:solidFill>
+                          <a:latin typeface="Inter"/>
+                        </a:defRPr>
+                      </a:pPr>
+                      <a:r>
+                        <a:rPr>
+                          <a:latin typeface="Inter"/>
+                        </a:rPr>
+                        <a:t>S1</a:t>
+                      </a:r>
+                    </a:p>
+                  </a:txBody>
+                  <a:tcPr marL="54864" marR="54864" marT="27432" marB="27432" anchor="ctr">
+                    <a:solidFill>
+                      <a:srgbClr val="FFFFFF"/>
+                    </a:solidFill>
+                  </a:tcPr>
+                </a:tc>
+                <a:tc>
+                  <a:txBody>
+                    <a:bodyPr/>
+                    <a:lstStyle/>
+                    <a:p>
+                      <a:pPr>
+                        <a:defRPr sz="800" b="0">
+                          <a:solidFill>
+                            <a:srgbClr val="0D1117"/>
+                          </a:solidFill>
+                          <a:latin typeface="Inter"/>
+                        </a:defRPr>
+                      </a:pPr>
+                      <a:r>
+                        <a:rPr>
+                          <a:latin typeface="Inter"/>
+                        </a:rPr>
+                        <a:t>organization=test</a:t>
+                      </a:r>
+                    </a:p>
+                  </a:txBody>
+                  <a:tcPr marL="54864" marR="54864" marT="27432" marB="27432" anchor="ctr">
+                    <a:solidFill>
+                      <a:srgbClr val="FFFFFF"/>
+                    </a:solidFill>
+                  </a:tcPr>
+                </a:tc>
+                <a:tc>
+                  <a:txBody>
+                    <a:bodyPr/>
+                    <a:lstStyle/>
+                    <a:p>
+                      <a:pPr>
+                        <a:defRPr sz="800" b="0">
+                          <a:solidFill>
+                            <a:srgbClr val="0D1117"/>
+                          </a:solidFill>
+                          <a:latin typeface="Inter"/>
+                        </a:defRPr>
+                      </a:pPr>
+                      <a:r>
+                        <a:rPr>
+                          <a:latin typeface="Inter"/>
+                        </a:rPr>
+                        <a:t>sha256:aaaaaaaaaaaaaaaaaaaaaaaaaaaaaaaaaaaaaaaaaaaaaaaaaaaaaaaaaaaaaaaa</a:t>
+                      </a:r>
+                    </a:p>
+                  </a:txBody>
+                  <a:tcPr marL="54864" marR="54864" marT="27432" marB="27432" anchor="ctr">
+                    <a:solidFill>
+                      <a:srgbClr val="FFFFFF"/>
+                    </a:solidFill>
+                  </a:tcPr>
+                </a:tc>
+              </a:tr>
+              <a:tr h="490728">
+                <a:tc>
+                  <a:txBody>
+                    <a:bodyPr/>
+                    <a:lstStyle/>
+                    <a:p>
+                      <a:pPr>
+                        <a:defRPr sz="800" b="1">
+                          <a:solidFill>
+                            <a:srgbClr val="0D1117"/>
+                          </a:solidFill>
+                          <a:latin typeface="Inter"/>
+                        </a:defRPr>
+                      </a:pPr>
+                      <a:r>
+                        <a:rPr>
+                          <a:latin typeface="Inter"/>
+                        </a:rPr>
+                        <a:t>S2</a:t>
+                      </a:r>
+                    </a:p>
+                  </a:txBody>
+                  <a:tcPr marL="54864" marR="54864" marT="27432" marB="27432" anchor="ctr">
+                    <a:solidFill>
+                      <a:srgbClr val="F5F7F9"/>
+                    </a:solidFill>
+                  </a:tcPr>
+                </a:tc>
+                <a:tc>
+                  <a:txBody>
+                    <a:bodyPr/>
+                    <a:lstStyle/>
+                    <a:p>
+                      <a:pPr>
+                        <a:defRPr sz="800" b="0">
+                          <a:solidFill>
+                            <a:srgbClr val="0D1117"/>
+                          </a:solidFill>
+                          <a:latin typeface="Inter"/>
+                        </a:defRPr>
+                      </a:pPr>
+                      <a:r>
+                        <a:rPr>
+                          <a:latin typeface="Inter"/>
+                        </a:rPr>
+                        <a:t>allocation_tree</a:t>
+                      </a:r>
+                    </a:p>
+                  </a:txBody>
+                  <a:tcPr marL="54864" marR="54864" marT="27432" marB="27432" anchor="ctr">
+                    <a:solidFill>
+                      <a:srgbClr val="F5F7F9"/>
+                    </a:solidFill>
+                  </a:tcPr>
+                </a:tc>
+                <a:tc>
+                  <a:txBody>
+                    <a:bodyPr/>
+                    <a:lstStyle/>
+                    <a:p>
+                      <a:pPr>
+                        <a:defRPr sz="800" b="0">
+                          <a:solidFill>
+                            <a:srgbClr val="0D1117"/>
+                          </a:solidFill>
+                          <a:latin typeface="Inter"/>
+                        </a:defRPr>
+                      </a:pPr>
+                      <a:r>
+                        <a:rPr>
+                          <a:latin typeface="Inter"/>
+                        </a:rPr>
+                        <a:t>sha256:aaaaaaaaaaaaaaaaaaaaaaaaaaaaaaaaaaaaaaaaaaaaaaaaaaaaaaaaaaaaaaaa</a:t>
+                      </a:r>
+                    </a:p>
+                  </a:txBody>
+                  <a:tcPr marL="54864" marR="54864" marT="27432" marB="27432" anchor="ctr">
+                    <a:solidFill>
+                      <a:srgbClr val="F5F7F9"/>
+                    </a:solidFill>
+                  </a:tcPr>
+                </a:tc>
+              </a:tr>
+              <a:tr h="490728">
+                <a:tc>
+                  <a:txBody>
+                    <a:bodyPr/>
+                    <a:lstStyle/>
+                    <a:p>
+                      <a:pPr>
+                        <a:defRPr sz="800" b="1">
+                          <a:solidFill>
+                            <a:srgbClr val="0D1117"/>
+                          </a:solidFill>
+                          <a:latin typeface="Inter"/>
+                        </a:defRPr>
+                      </a:pPr>
+                      <a:r>
+                        <a:rPr>
+                          <a:latin typeface="Inter"/>
+                        </a:rPr>
+                        <a:t>S3</a:t>
+                      </a:r>
+                    </a:p>
+                  </a:txBody>
+                  <a:tcPr marL="54864" marR="54864" marT="27432" marB="27432" anchor="ctr">
+                    <a:solidFill>
+                      <a:srgbClr val="FFFFFF"/>
+                    </a:solidFill>
+                  </a:tcPr>
+                </a:tc>
+                <a:tc>
+                  <a:txBody>
+                    <a:bodyPr/>
+                    <a:lstStyle/>
+                    <a:p>
+                      <a:pPr>
+                        <a:defRPr sz="800" b="0">
+                          <a:solidFill>
+                            <a:srgbClr val="0D1117"/>
+                          </a:solidFill>
+                          <a:latin typeface="Inter"/>
+                        </a:defRPr>
+                      </a:pPr>
+                      <a:r>
+                        <a:rPr>
+                          <a:latin typeface="Inter"/>
+                        </a:rPr>
+                        <a:t>portfolio=test</a:t>
+                      </a:r>
+                    </a:p>
+                  </a:txBody>
+                  <a:tcPr marL="54864" marR="54864" marT="27432" marB="27432" anchor="ctr">
+                    <a:solidFill>
+                      <a:srgbClr val="FFFFFF"/>
+                    </a:solidFill>
+                  </a:tcPr>
+                </a:tc>
+                <a:tc>
+                  <a:txBody>
+                    <a:bodyPr/>
+                    <a:lstStyle/>
+                    <a:p>
+                      <a:pPr>
+                        <a:defRPr sz="800" b="0">
+                          <a:solidFill>
+                            <a:srgbClr val="0D1117"/>
+                          </a:solidFill>
+                          <a:latin typeface="Inter"/>
+                        </a:defRPr>
+                      </a:pPr>
+                      <a:r>
+                        <a:rPr>
+                          <a:latin typeface="Inter"/>
+                        </a:rPr>
+                        <a:t>sha256:aaaaaaaaaaaaaaaaaaaaaaaaaaaaaaaaaaaaaaaaaaaaaaaaaaaaaaaaaaaaaaaa</a:t>
+                      </a:r>
+                    </a:p>
+                  </a:txBody>
+                  <a:tcPr marL="54864" marR="54864" marT="27432" marB="27432" anchor="ctr">
+                    <a:solidFill>
+                      <a:srgbClr val="FFFFFF"/>
+                    </a:solidFill>
+                  </a:tcPr>
+                </a:tc>
+              </a:tr>
+              <a:tr h="490728">
+                <a:tc>
+                  <a:txBody>
+                    <a:bodyPr/>
+                    <a:lstStyle/>
+                    <a:p>
+                      <a:pPr>
+                        <a:defRPr sz="800" b="1">
+                          <a:solidFill>
+                            <a:srgbClr val="0D1117"/>
+                          </a:solidFill>
+                          <a:latin typeface="Inter"/>
+                        </a:defRPr>
+                      </a:pPr>
+                      <a:r>
+                        <a:rPr>
+                          <a:latin typeface="Inter"/>
+                        </a:rPr>
+                        <a:t>S4</a:t>
+                      </a:r>
+                    </a:p>
+                  </a:txBody>
+                  <a:tcPr marL="54864" marR="54864" marT="27432" marB="27432" anchor="ctr">
+                    <a:solidFill>
+                      <a:srgbClr val="F5F7F9"/>
+                    </a:solidFill>
+                  </a:tcPr>
+                </a:tc>
+                <a:tc>
+                  <a:txBody>
+                    <a:bodyPr/>
+                    <a:lstStyle/>
+                    <a:p>
+                      <a:pPr>
+                        <a:defRPr sz="800" b="0">
+                          <a:solidFill>
+                            <a:srgbClr val="0D1117"/>
+                          </a:solidFill>
+                          <a:latin typeface="Inter"/>
+                        </a:defRPr>
+                      </a:pPr>
+                      <a:r>
+                        <a:rPr>
+                          <a:latin typeface="Inter"/>
+                        </a:rPr>
+                        <a:t>all pages</a:t>
+                      </a:r>
+                    </a:p>
+                  </a:txBody>
+                  <a:tcPr marL="54864" marR="54864" marT="27432" marB="27432" anchor="ctr">
+                    <a:solidFill>
+                      <a:srgbClr val="F5F7F9"/>
+                    </a:solidFill>
+                  </a:tcPr>
+                </a:tc>
+                <a:tc>
+                  <a:txBody>
+                    <a:bodyPr/>
+                    <a:lstStyle/>
+                    <a:p>
+                      <a:pPr>
+                        <a:defRPr sz="800" b="0">
+                          <a:solidFill>
+                            <a:srgbClr val="0D1117"/>
+                          </a:solidFill>
+                          <a:latin typeface="Inter"/>
+                        </a:defRPr>
+                      </a:pPr>
+                      <a:r>
+                        <a:rPr>
+                          <a:latin typeface="Inter"/>
+                        </a:rPr>
+                        <a:t>sha256:aaaaaaaaaaaaaaaaaaaaaaaaaaaaaaaaaaaaaaaaaaaaaaaaaaaaaaaaaaaaaaaa</a:t>
+                      </a:r>
+                    </a:p>
+                  </a:txBody>
+                  <a:tcPr marL="54864" marR="54864" marT="27432" marB="27432" anchor="ctr">
+                    <a:solidFill>
+                      <a:srgbClr val="F5F7F9"/>
+                    </a:solidFill>
+                  </a:tcPr>
+                </a:tc>
+              </a:tr>
+              <a:tr h="490728">
+                <a:tc>
+                  <a:txBody>
+                    <a:bodyPr/>
+                    <a:lstStyle/>
+                    <a:p>
+                      <a:pPr>
+                        <a:defRPr sz="800" b="1">
+                          <a:solidFill>
+                            <a:srgbClr val="0D1117"/>
+                          </a:solidFill>
+                          <a:latin typeface="Inter"/>
+                        </a:defRPr>
+                      </a:pPr>
+                      <a:r>
+                        <a:rPr>
+                          <a:latin typeface="Inter"/>
+                        </a:rPr>
+                        <a:t>S5</a:t>
+                      </a:r>
+                    </a:p>
+                  </a:txBody>
+                  <a:tcPr marL="54864" marR="54864" marT="27432" marB="27432" anchor="ctr">
+                    <a:solidFill>
+                      <a:srgbClr val="FFFFFF"/>
+                    </a:solidFill>
+                  </a:tcPr>
+                </a:tc>
+                <a:tc>
+                  <a:txBody>
+                    <a:bodyPr/>
+                    <a:lstStyle/>
+                    <a:p>
+                      <a:pPr>
+                        <a:defRPr sz="800" b="0">
+                          <a:solidFill>
+                            <a:srgbClr val="0D1117"/>
+                          </a:solidFill>
+                          <a:latin typeface="Inter"/>
+                        </a:defRPr>
+                      </a:pPr>
+                      <a:r>
+                        <a:rPr>
+                          <a:latin typeface="Inter"/>
+                        </a:rPr>
+                        <a:t>all sections</a:t>
+                      </a:r>
+                    </a:p>
+                  </a:txBody>
+                  <a:tcPr marL="54864" marR="54864" marT="27432" marB="27432" anchor="ctr">
+                    <a:solidFill>
+                      <a:srgbClr val="FFFFFF"/>
+                    </a:solidFill>
+                  </a:tcPr>
+                </a:tc>
+                <a:tc>
+                  <a:txBody>
+                    <a:bodyPr/>
+                    <a:lstStyle/>
+                    <a:p>
+                      <a:pPr>
+                        <a:defRPr sz="800" b="0">
+                          <a:solidFill>
+                            <a:srgbClr val="0D1117"/>
+                          </a:solidFill>
+                          <a:latin typeface="Inter"/>
+                        </a:defRPr>
+                      </a:pPr>
+                      <a:r>
+                        <a:rPr>
+                          <a:latin typeface="Inter"/>
+                        </a:rPr>
+                        <a:t>sha256:aaaaaaaaaaaaaaaaaaaaaaaaaaaaaaaaaaaaaaaaaaaaaaaaaaaaaaaaaaaaaaaa</a:t>
+                      </a:r>
+                    </a:p>
+                  </a:txBody>
+                  <a:tcPr marL="54864" marR="54864" marT="27432" marB="27432" anchor="ctr">
+                    <a:solidFill>
+                      <a:srgbClr val="FFFFFF"/>
+                    </a:solidFill>
+                  </a:tcPr>
+                </a:tc>
+              </a:tr>
+              <a:tr h="490728">
+                <a:tc>
+                  <a:txBody>
+                    <a:bodyPr/>
+                    <a:lstStyle/>
+                    <a:p>
+                      <a:pPr>
+                        <a:defRPr sz="800" b="1">
+                          <a:solidFill>
+                            <a:srgbClr val="0D1117"/>
+                          </a:solidFill>
+                          <a:latin typeface="Inter"/>
+                        </a:defRPr>
+                      </a:pPr>
+                      <a:r>
+                        <a:rPr>
+                          <a:latin typeface="Inter"/>
+                        </a:rPr>
+                        <a:t>S6</a:t>
+                      </a:r>
+                    </a:p>
+                  </a:txBody>
+                  <a:tcPr marL="54864" marR="54864" marT="27432" marB="27432" anchor="ctr">
+                    <a:solidFill>
+                      <a:srgbClr val="F5F7F9"/>
+                    </a:solidFill>
+                  </a:tcPr>
+                </a:tc>
+                <a:tc>
+                  <a:txBody>
+                    <a:bodyPr/>
+                    <a:lstStyle/>
+                    <a:p>
+                      <a:pPr>
+                        <a:defRPr sz="800" b="0">
+                          <a:solidFill>
+                            <a:srgbClr val="0D1117"/>
+                          </a:solidFill>
+                          <a:latin typeface="Inter"/>
+                        </a:defRPr>
+                      </a:pPr>
+                      <a:r>
+                        <a:rPr>
+                          <a:latin typeface="Inter"/>
+                        </a:rPr>
+                        <a:t>commitments; baseline</a:t>
+                      </a:r>
+                    </a:p>
+                  </a:txBody>
+                  <a:tcPr marL="54864" marR="54864" marT="27432" marB="27432" anchor="ctr">
+                    <a:solidFill>
+                      <a:srgbClr val="F5F7F9"/>
+                    </a:solidFill>
+                  </a:tcPr>
+                </a:tc>
+                <a:tc>
+                  <a:txBody>
+                    <a:bodyPr/>
+                    <a:lstStyle/>
+                    <a:p>
+                      <a:pPr>
+                        <a:defRPr sz="800" b="0">
+                          <a:solidFill>
+                            <a:srgbClr val="0D1117"/>
+                          </a:solidFill>
+                          <a:latin typeface="Inter"/>
+                        </a:defRPr>
+                      </a:pPr>
+                      <a:r>
+                        <a:rPr>
+                          <a:latin typeface="Inter"/>
+                        </a:rPr>
+                        <a:t>sha256:aaaaaaaaaaaaaaaaaaaaaaaaaaaaaaaaaaaaaaaaaaaaaaaaaaaaaaaaaaaaaaaa</a:t>
+                      </a:r>
+                    </a:p>
+                  </a:txBody>
+                  <a:tcPr marL="54864" marR="54864" marT="27432" marB="27432" anchor="ctr">
+                    <a:solidFill>
+                      <a:srgbClr val="F5F7F9"/>
+                    </a:solidFill>
+                  </a:tcPr>
+                </a:tc>
+              </a:tr>
+              <a:tr h="490728">
+                <a:tc>
+                  <a:txBody>
+                    <a:bodyPr/>
+                    <a:lstStyle/>
+                    <a:p>
+                      <a:pPr>
+                        <a:defRPr sz="800" b="1">
+                          <a:solidFill>
+                            <a:srgbClr val="0D1117"/>
+                          </a:solidFill>
+                          <a:latin typeface="Inter"/>
+                        </a:defRPr>
+                      </a:pPr>
+                      <a:r>
+                        <a:rPr>
+                          <a:latin typeface="Inter"/>
+                        </a:rPr>
+                        <a:t>S7</a:t>
+                      </a:r>
+                    </a:p>
+                  </a:txBody>
+                  <a:tcPr marL="54864" marR="54864" marT="27432" marB="27432" anchor="ctr">
+                    <a:solidFill>
+                      <a:srgbClr val="FFFFFF"/>
+                    </a:solidFill>
+                  </a:tcPr>
+                </a:tc>
+                <a:tc>
+                  <a:txBody>
+                    <a:bodyPr/>
+                    <a:lstStyle/>
+                    <a:p>
+                      <a:pPr>
+                        <a:defRPr sz="800" b="0">
+                          <a:solidFill>
+                            <a:srgbClr val="0D1117"/>
+                          </a:solidFill>
+                          <a:latin typeface="Inter"/>
+                        </a:defRPr>
+                      </a:pPr>
+                      <a:r>
+                        <a:rPr>
+                          <a:latin typeface="Inter"/>
+                        </a:rPr>
+                        <a:t>illustrative</a:t>
+                      </a:r>
+                    </a:p>
+                  </a:txBody>
+                  <a:tcPr marL="54864" marR="54864" marT="27432" marB="27432" anchor="ctr">
+                    <a:solidFill>
+                      <a:srgbClr val="FFFFFF"/>
+                    </a:solidFill>
+                  </a:tcPr>
+                </a:tc>
+                <a:tc>
+                  <a:txBody>
+                    <a:bodyPr/>
+                    <a:lstStyle/>
+                    <a:p>
+                      <a:pPr>
+                        <a:defRPr sz="800" b="0">
+                          <a:solidFill>
+                            <a:srgbClr val="0D1117"/>
+                          </a:solidFill>
+                          <a:latin typeface="Inter"/>
+                        </a:defRPr>
+                      </a:pPr>
+                      <a:r>
+                        <a:rPr>
+                          <a:latin typeface="Inter"/>
+                        </a:rPr>
+                        <a:t>sha256:aaaaaaaaaaaaaaaaaaaaaaaaaaaaaaaaaaaaaaaaaaaaaaaaaaaaaaaaaaaaaaaa</a:t>
+                      </a:r>
+                    </a:p>
+                  </a:txBody>
+                  <a:tcPr marL="54864" marR="54864" marT="27432" marB="27432" anchor="ctr">
+                    <a:solidFill>
+                      <a:srgbClr val="FFFFFF"/>
+                    </a:solidFill>
+                  </a:tcPr>
+                </a:tc>
+              </a:tr>
+              <a:tr h="490728">
+                <a:tc>
+                  <a:txBody>
+                    <a:bodyPr/>
+                    <a:lstStyle/>
+                    <a:p>
+                      <a:pPr>
+                        <a:defRPr sz="800" b="1">
+                          <a:solidFill>
+                            <a:srgbClr val="0D1117"/>
+                          </a:solidFill>
+                          <a:latin typeface="Inter"/>
+                        </a:defRPr>
+                      </a:pPr>
+                      <a:r>
+                        <a:rPr>
+                          <a:latin typeface="Inter"/>
+                        </a:rPr>
+                        <a:t>S8</a:t>
+                      </a:r>
+                    </a:p>
+                  </a:txBody>
+                  <a:tcPr marL="54864" marR="54864" marT="27432" marB="27432" anchor="ctr">
+                    <a:solidFill>
+                      <a:srgbClr val="F5F7F9"/>
+                    </a:solidFill>
+                  </a:tcPr>
+                </a:tc>
+                <a:tc>
+                  <a:txBody>
+                    <a:bodyPr/>
+                    <a:lstStyle/>
+                    <a:p>
+                      <a:pPr>
+                        <a:defRPr sz="800" b="0">
+                          <a:solidFill>
+                            <a:srgbClr val="0D1117"/>
+                          </a:solidFill>
+                          <a:latin typeface="Inter"/>
+                        </a:defRPr>
+                      </a:pPr>
+                      <a:r>
+                        <a:rPr>
+                          <a:latin typeface="Inter"/>
+                        </a:rPr>
+                        <a:t>illustrative</a:t>
+                      </a:r>
+                    </a:p>
+                  </a:txBody>
+                  <a:tcPr marL="54864" marR="54864" marT="27432" marB="27432" anchor="ctr">
+                    <a:solidFill>
+                      <a:srgbClr val="F5F7F9"/>
+                    </a:solidFill>
+                  </a:tcPr>
+                </a:tc>
+                <a:tc>
+                  <a:txBody>
+                    <a:bodyPr/>
+                    <a:lstStyle/>
+                    <a:p>
+                      <a:pPr>
+                        <a:defRPr sz="800" b="0">
+                          <a:solidFill>
+                            <a:srgbClr val="0D1117"/>
+                          </a:solidFill>
+                          <a:latin typeface="Inter"/>
+                        </a:defRPr>
+                      </a:pPr>
+                      <a:r>
+                        <a:rPr>
+                          <a:latin typeface="Inter"/>
+                        </a:rPr>
+                        <a:t>sha256:aaaaaaaaaaaaaaaaaaaaaaaaaaaaaaaaaaaaaaaaaaaaaaaaaaaaaaaaaaaaaaaa</a:t>
+                      </a:r>
+                    </a:p>
+                  </a:txBody>
+                  <a:tcPr marL="54864" marR="54864" marT="27432" marB="27432" anchor="ctr">
+                    <a:solidFill>
+                      <a:srgbClr val="F5F7F9"/>
+                    </a:solidFill>
+                  </a:tcPr>
+                </a:tc>
+              </a:tr>
+            </a:tbl>
+          </a:graphicData>
+        </a:graphic>
+      </p:graphicFrame>
+      <p:sp>
+        <p:nvSpPr>
+          <p:cNvPr id="9" name="TextBox 8"/>
+          <p:cNvSpPr txBox="1"/>
+          <p:nvPr/>
+        </p:nvSpPr>
+        <p:spPr>
+          <a:xfrm>
+            <a:off x="640080" y="6035040"/>
+            <a:ext cx="10908792" cy="164592"/>
+          </a:xfrm>
+          <a:prstGeom prst="rect">
+            <a:avLst/>
+          </a:prstGeom>
+          <a:noFill/>
+        </p:spPr>
+        <p:txBody>
+          <a:bodyPr wrap="none" lIns="9144" rIns="9144" tIns="9144" bIns="9144" anchor="t">
+            <a:spAutoFit/>
+          </a:bodyPr>
+          <a:lstStyle/>
+          <a:p>
+            <a:pPr algn="l">
+              <a:spcAft>
+                <a:spcPts val="0"/>
+              </a:spcAft>
+              <a:defRPr sz="680" b="0">
+                <a:solidFill>
+                  <a:srgbClr val="8A94A1"/>
+                </a:solidFill>
+                <a:latin typeface="Inter"/>
+              </a:defRPr>
+            </a:pPr>
+            <a:r>
+              <a:rPr>
+                <a:latin typeface="Inter"/>
+              </a:rPr>
+              <a:t>Data scope for every source: Illustrative sample data. Each digest is the SHA-256 fingerprint of the exact data the report used.</a:t>
+            </a:r>
+          </a:p>
+        </p:txBody>
+      </p:sp>
+      <p:sp>
+        <p:nvSpPr>
+          <p:cNvPr id="10" name="Rectangle 9"/>
+          <p:cNvSpPr/>
+          <p:nvPr/>
+        </p:nvSpPr>
+        <p:spPr>
+          <a:xfrm>
+            <a:off x="640080" y="6446520"/>
+            <a:ext cx="10908792" cy="9144"/>
+          </a:xfrm>
+          <a:prstGeom prst="rect">
+            <a:avLst/>
+          </a:prstGeom>
+          <a:solidFill>
+            <a:srgbClr val="E3E7EC"/>
+          </a:solidFill>
+          <a:ln>
+            <a:solidFill>
+              <a:srgbClr val="E3E7EC"/>
+            </a:solidFill>
+          </a:ln>
+        </p:spPr>
+        <p:style>
+          <a:lnRef idx="1">
+            <a:schemeClr val="accent1"/>
+          </a:lnRef>
+          <a:fillRef idx="3">
+            <a:schemeClr val="accent1"/>
+          </a:fillRef>
+          <a:effectRef idx="2">
+            <a:schemeClr val="accent1"/>
+          </a:effectRef>
+          <a:fontRef idx="minor">
+            <a:schemeClr val="lt1"/>
+          </a:fontRef>
+        </p:style>
+        <p:txBody>
+          <a:bodyPr rtlCol="0" anchor="ctr"/>
+          <a:lstStyle/>
+          <a:p>
+            <a:pPr algn="ctr">
+              <a:defRPr>
+                <a:latin typeface="Inter"/>
+              </a:defRPr>
+            </a:pPr>
+          </a:p>
+        </p:txBody>
+      </p:sp>
+      <p:sp>
+        <p:nvSpPr>
+          <p:cNvPr id="11" name="TextBox 10"/>
+          <p:cNvSpPr txBox="1"/>
+          <p:nvPr/>
+        </p:nvSpPr>
+        <p:spPr>
+          <a:xfrm>
+            <a:off x="640080" y="6501384"/>
+            <a:ext cx="4297680" cy="146304"/>
+          </a:xfrm>
+          <a:prstGeom prst="rect">
+            <a:avLst/>
+          </a:prstGeom>
+          <a:noFill/>
+        </p:spPr>
+        <p:txBody>
+          <a:bodyPr wrap="none" lIns="9144" rIns="9144" tIns="9144" bIns="9144" anchor="t">
+            <a:spAutoFit/>
+          </a:bodyPr>
+          <a:lstStyle/>
+          <a:p>
+            <a:pPr algn="l">
+              <a:spcAft>
+                <a:spcPts val="0"/>
+              </a:spcAft>
+              <a:defRPr sz="650" b="0">
+                <a:solidFill>
+                  <a:srgbClr val="8A94A1"/>
+                </a:solidFill>
+                <a:latin typeface="Inter"/>
+              </a:defRPr>
+            </a:pPr>
+            <a:r>
+              <a:rPr>
+                <a:latin typeface="Inter"/>
+              </a:rPr>
+              <a:t>Sources: S1 · S2 · S3 · S4 · S5 · S6 · S7 · S8</a:t>
+            </a:r>
+          </a:p>
+        </p:txBody>
+      </p:sp>
+      <p:sp>
+        <p:nvSpPr>
+          <p:cNvPr id="12" name="TextBox 11"/>
+          <p:cNvSpPr txBox="1"/>
+          <p:nvPr/>
+        </p:nvSpPr>
+        <p:spPr>
+          <a:xfrm>
+            <a:off x="4480560" y="6501384"/>
+            <a:ext cx="5303520" cy="146304"/>
+          </a:xfrm>
+          <a:prstGeom prst="rect">
+            <a:avLst/>
+          </a:prstGeom>
+          <a:noFill/>
+        </p:spPr>
+        <p:txBody>
+          <a:bodyPr wrap="none" lIns="9144" rIns="9144" tIns="9144" bIns="9144" anchor="t">
+            <a:spAutoFit/>
+          </a:bodyPr>
+          <a:lstStyle/>
+          <a:p>
+            <a:pPr algn="ctr">
+              <a:spcAft>
+                <a:spcPts val="0"/>
+              </a:spcAft>
+              <a:defRPr sz="650" b="0">
+                <a:solidFill>
+                  <a:srgbClr val="8A94A1"/>
+                </a:solidFill>
+                <a:latin typeface="Inter"/>
+              </a:defRPr>
+            </a:pPr>
+            <a:r>
+              <a:rPr>
+                <a:latin typeface="Inter"/>
+              </a:rPr>
+              <a:t>Confidential — Investment Committee · Data as of 2026-06-30</a:t>
+            </a:r>
+          </a:p>
+        </p:txBody>
+      </p:sp>
+      <p:sp>
+        <p:nvSpPr>
+          <p:cNvPr id="13" name="TextBox 12"/>
+          <p:cNvSpPr txBox="1"/>
+          <p:nvPr/>
+        </p:nvSpPr>
+        <p:spPr>
+          <a:xfrm>
+            <a:off x="10287000" y="6501384"/>
+            <a:ext cx="1261872" cy="146304"/>
+          </a:xfrm>
+          <a:prstGeom prst="rect">
+            <a:avLst/>
+          </a:prstGeom>
+          <a:noFill/>
+        </p:spPr>
+        <p:txBody>
+          <a:bodyPr wrap="none" lIns="9144" rIns="9144" tIns="9144" bIns="9144" anchor="t">
+            <a:spAutoFit/>
+          </a:bodyPr>
+          <a:lstStyle/>
+          <a:p>
+            <a:pPr algn="r">
+              <a:spcAft>
+                <a:spcPts val="0"/>
+              </a:spcAft>
+              <a:defRPr sz="650" b="0">
+                <a:solidFill>
+                  <a:srgbClr val="8A94A1"/>
+                </a:solidFill>
+                <a:latin typeface="Inter"/>
+              </a:defRPr>
+            </a:pPr>
+            <a:r>
+              <a:rPr>
+                <a:latin typeface="Inter"/>
+              </a:rPr>
+              <a:t>32</a:t>
+            </a:r>
+          </a:p>
+        </p:txBody>
+      </p:sp>
+    </p:spTree>
+  </p:cSld>
+  <p:clrMapOvr>
+    <a:masterClrMapping/>
+  </p:clrMapOvr>
+</p:sld>
+</file>
+
+<file path=ppt/slides/slide33.xml><?xml version="1.0" encoding="utf-8"?>
+<p:sld xmlns:a="http://schemas.openxmlformats.org/drawingml/2006/main" xmlns:p="http://schemas.openxmlformats.org/presentationml/2006/main" xmlns:r="http://schemas.openxmlformats.org/officeDocument/2006/relationships">
+  <p:cSld>
+    <p:spTree>
+      <p:nvGrpSpPr>
+        <p:cNvPr id="1" name=""/>
+        <p:cNvGrpSpPr/>
+        <p:nvPr/>
+      </p:nvGrpSpPr>
+      <p:grpSpPr/>
+      <p:sp>
+        <p:nvSpPr>
+          <p:cNvPr id="2" name="Rectangle 1"/>
+          <p:cNvSpPr/>
+          <p:nvPr/>
+        </p:nvSpPr>
+        <p:spPr>
+          <a:xfrm>
+            <a:off x="0" y="0"/>
+            <a:ext cx="12191695" cy="6858000"/>
+          </a:xfrm>
+          <a:prstGeom prst="rect">
+            <a:avLst/>
+          </a:prstGeom>
+          <a:solidFill>
+            <a:srgbClr val="FFFFFF"/>
+          </a:solidFill>
+          <a:ln>
+            <a:solidFill>
+              <a:srgbClr val="FFFFFF"/>
+            </a:solidFill>
+          </a:ln>
+        </p:spPr>
+        <p:style>
+          <a:lnRef idx="1">
+            <a:schemeClr val="accent1"/>
+          </a:lnRef>
+          <a:fillRef idx="3">
+            <a:schemeClr val="accent1"/>
+          </a:fillRef>
+          <a:effectRef idx="2">
+            <a:schemeClr val="accent1"/>
+          </a:effectRef>
+          <a:fontRef idx="minor">
+            <a:schemeClr val="lt1"/>
+          </a:fontRef>
+        </p:style>
+        <p:txBody>
+          <a:bodyPr rtlCol="0" anchor="ctr"/>
+          <a:lstStyle/>
+          <a:p>
+            <a:pPr algn="ctr">
+              <a:defRPr>
+                <a:latin typeface="Inter"/>
+              </a:defRPr>
+            </a:pPr>
+          </a:p>
+        </p:txBody>
+      </p:sp>
+      <p:sp>
+        <p:nvSpPr>
+          <p:cNvPr id="3" name="TextBox 2"/>
+          <p:cNvSpPr txBox="1"/>
+          <p:nvPr/>
+        </p:nvSpPr>
+        <p:spPr>
+          <a:xfrm>
+            <a:off x="640080" y="566928"/>
+            <a:ext cx="10058400" cy="530352"/>
+          </a:xfrm>
+          <a:prstGeom prst="rect">
+            <a:avLst/>
+          </a:prstGeom>
+          <a:noFill/>
+        </p:spPr>
+        <p:txBody>
+          <a:bodyPr wrap="none" lIns="9144" rIns="9144" tIns="9144" bIns="9144" anchor="t">
+            <a:spAutoFit/>
+          </a:bodyPr>
+          <a:lstStyle/>
+          <a:p>
+            <a:pPr algn="l">
+              <a:spcAft>
+                <a:spcPts val="0"/>
+              </a:spcAft>
+              <a:defRPr sz="2300" b="1">
+                <a:solidFill>
+                  <a:srgbClr val="0D1117"/>
+                </a:solidFill>
+                <a:latin typeface="Inter"/>
+              </a:defRPr>
+            </a:pPr>
+            <a:r>
+              <a:rPr>
+                <a:latin typeface="Inter"/>
+              </a:rPr>
+              <a:t>Appendix — Server Metric Methods and Disclosures</a:t>
+            </a:r>
+          </a:p>
+        </p:txBody>
+      </p:sp>
+      <p:sp>
+        <p:nvSpPr>
+          <p:cNvPr id="4" name="Rectangle 3"/>
+          <p:cNvSpPr/>
+          <p:nvPr/>
+        </p:nvSpPr>
+        <p:spPr>
+          <a:xfrm>
+            <a:off x="640080" y="1115568"/>
+            <a:ext cx="10908792" cy="18288"/>
+          </a:xfrm>
+          <a:prstGeom prst="rect">
+            <a:avLst/>
+          </a:prstGeom>
+          <a:solidFill>
+            <a:srgbClr val="0D1117"/>
+          </a:solidFill>
+          <a:ln>
+            <a:solidFill>
+              <a:srgbClr val="0D1117"/>
+            </a:solidFill>
+          </a:ln>
+        </p:spPr>
+        <p:style>
+          <a:lnRef idx="1">
+            <a:schemeClr val="accent1"/>
+          </a:lnRef>
+          <a:fillRef idx="3">
+            <a:schemeClr val="accent1"/>
+          </a:fillRef>
+          <a:effectRef idx="2">
+            <a:schemeClr val="accent1"/>
+          </a:effectRef>
+          <a:fontRef idx="minor">
+            <a:schemeClr val="lt1"/>
+          </a:fontRef>
+        </p:style>
+        <p:txBody>
+          <a:bodyPr rtlCol="0" anchor="ctr"/>
+          <a:lstStyle/>
+          <a:p>
+            <a:pPr algn="ctr">
+              <a:defRPr>
+                <a:latin typeface="Inter"/>
+              </a:defRPr>
+            </a:pPr>
+          </a:p>
+        </p:txBody>
+      </p:sp>
+      <p:sp>
+        <p:nvSpPr>
+          <p:cNvPr id="5" name="Rectangle 4"/>
+          <p:cNvSpPr/>
+          <p:nvPr/>
+        </p:nvSpPr>
+        <p:spPr>
+          <a:xfrm>
+            <a:off x="11018520" y="502920"/>
+            <a:ext cx="530352" cy="393192"/>
+          </a:xfrm>
+          <a:prstGeom prst="rect">
+            <a:avLst/>
+          </a:prstGeom>
+          <a:solidFill>
+            <a:srgbClr val="9AA5B1"/>
+          </a:solidFill>
+          <a:ln>
+            <a:solidFill>
+              <a:srgbClr val="9AA5B1"/>
+            </a:solidFill>
+          </a:ln>
+        </p:spPr>
+        <p:style>
+          <a:lnRef idx="1">
+            <a:schemeClr val="accent1"/>
+          </a:lnRef>
+          <a:fillRef idx="3">
+            <a:schemeClr val="accent1"/>
+          </a:fillRef>
+          <a:effectRef idx="2">
+            <a:schemeClr val="accent1"/>
+          </a:effectRef>
+          <a:fontRef idx="minor">
+            <a:schemeClr val="lt1"/>
+          </a:fontRef>
+        </p:style>
+        <p:txBody>
+          <a:bodyPr rtlCol="0" anchor="ctr"/>
+          <a:lstStyle/>
+          <a:p>
+            <a:pPr algn="ctr">
+              <a:defRPr>
+                <a:latin typeface="Inter"/>
+              </a:defRPr>
+            </a:pPr>
+          </a:p>
+        </p:txBody>
+      </p:sp>
+      <p:sp>
+        <p:nvSpPr>
+          <p:cNvPr id="6" name="TextBox 5"/>
+          <p:cNvSpPr txBox="1"/>
+          <p:nvPr/>
+        </p:nvSpPr>
+        <p:spPr>
+          <a:xfrm>
+            <a:off x="11045952" y="557784"/>
+            <a:ext cx="475488" cy="182880"/>
+          </a:xfrm>
+          <a:prstGeom prst="rect">
+            <a:avLst/>
+          </a:prstGeom>
+          <a:noFill/>
+        </p:spPr>
+        <p:txBody>
+          <a:bodyPr wrap="none" lIns="9144" rIns="9144" tIns="9144" bIns="9144" anchor="t">
+            <a:spAutoFit/>
+          </a:bodyPr>
+          <a:lstStyle/>
+          <a:p>
+            <a:pPr algn="ctr">
+              <a:spcAft>
+                <a:spcPts val="0"/>
+              </a:spcAft>
+              <a:defRPr sz="1000" b="1">
+                <a:solidFill>
+                  <a:srgbClr val="0D1117"/>
+                </a:solidFill>
+                <a:latin typeface="Inter"/>
+              </a:defRPr>
+            </a:pPr>
+            <a:r>
+              <a:rPr>
+                <a:latin typeface="Inter"/>
+              </a:rPr>
+              <a:t>B</a:t>
+            </a:r>
+          </a:p>
+        </p:txBody>
+      </p:sp>
+      <p:sp>
+        <p:nvSpPr>
+          <p:cNvPr id="7" name="TextBox 6"/>
+          <p:cNvSpPr txBox="1"/>
+          <p:nvPr/>
+        </p:nvSpPr>
+        <p:spPr>
+          <a:xfrm>
+            <a:off x="640080" y="1325880"/>
+            <a:ext cx="10908792" cy="201168"/>
+          </a:xfrm>
+          <a:prstGeom prst="rect">
+            <a:avLst/>
+          </a:prstGeom>
+          <a:noFill/>
+        </p:spPr>
+        <p:txBody>
+          <a:bodyPr wrap="none" lIns="9144" rIns="9144" tIns="9144" bIns="9144" anchor="t">
+            <a:spAutoFit/>
+          </a:bodyPr>
+          <a:lstStyle/>
+          <a:p>
+            <a:pPr algn="l">
+              <a:spcAft>
+                <a:spcPts val="0"/>
+              </a:spcAft>
+              <a:defRPr sz="720" b="1">
+                <a:solidFill>
+                  <a:srgbClr val="4A5563"/>
+                </a:solidFill>
+                <a:latin typeface="Inter"/>
+              </a:defRPr>
+            </a:pPr>
+            <a:r>
+              <a:rPr>
+                <a:latin typeface="Inter"/>
+              </a:rPr>
+              <a:t>SERVER METRIC METHODS</a:t>
+            </a:r>
+          </a:p>
+        </p:txBody>
+      </p:sp>
+      <p:graphicFrame>
+        <p:nvGraphicFramePr>
+          <p:cNvPr id="8" name="Table 7"/>
+          <p:cNvGraphicFramePr>
+            <a:graphicFrameLocks noGrp="1"/>
+          </p:cNvGraphicFramePr>
+          <p:nvPr/>
+        </p:nvGraphicFramePr>
+        <p:xfrm>
+          <a:off x="640080" y="1600200"/>
+          <a:ext cx="10908792" cy="1754039"/>
         </p:xfrm>
         <a:graphic>
           <a:graphicData uri="http://schemas.openxmlformats.org/drawingml/2006/table">
@@ -35202,7 +34333,7 @@
                 <a:gridCol w="2224278"/>
                 <a:gridCol w="2224278"/>
               </a:tblGrid>
-              <a:tr h="373192">
+              <a:tr h="584679">
                 <a:tc>
                   <a:txBody>
                     <a:bodyPr/>
@@ -35339,7 +34470,7 @@
                   </a:tcPr>
                 </a:tc>
               </a:tr>
-              <a:tr h="373192">
+              <a:tr h="584679">
                 <a:tc>
                   <a:txBody>
                     <a:bodyPr/>
@@ -35476,7 +34607,7 @@
                   </a:tcPr>
                 </a:tc>
               </a:tr>
-              <a:tr h="373192">
+              <a:tr h="584681">
                 <a:tc>
                   <a:txBody>
                     <a:bodyPr/>
@@ -35619,14 +34750,14 @@
       </p:graphicFrame>
       <p:sp>
         <p:nvSpPr>
-          <p:cNvPr id="10" name="TextBox 9"/>
+          <p:cNvPr id="9" name="TextBox 8"/>
           <p:cNvSpPr txBox="1"/>
           <p:nvPr/>
         </p:nvSpPr>
         <p:spPr>
           <a:xfrm>
-            <a:off x="640080" y="2829504"/>
-            <a:ext cx="10908792" cy="3388415"/>
+            <a:off x="640080" y="3463967"/>
+            <a:ext cx="10908792" cy="2753952"/>
           </a:xfrm>
           <a:prstGeom prst="rect">
             <a:avLst/>
@@ -35654,7 +34785,7 @@
               <a:rPr>
                 <a:latin typeface="Inter"/>
               </a:rPr>
-              <a:t>•  Private real-assets valuations may lag the report date [S4].</a:t>
+              <a:t>•  Private valuations may lag the report date [S4]; forward values are assumptions, not forecasts [S6].</a:t>
             </a:r>
           </a:p>
           <a:p>
@@ -35673,7 +34804,7 @@
               <a:rPr>
                 <a:latin typeface="Inter"/>
               </a:rPr>
-              <a:t>•  Forward values are assumptions, not forecasts or guarantees [S6].</a:t>
+              <a:t>•  Drawdown charts cover closed-end sleeves only [S6]; commodity and linker mappings were not provided [S8].</a:t>
             </a:r>
           </a:p>
           <a:p>
@@ -35692,71 +34823,14 @@
               <a:rPr>
                 <a:latin typeface="Inter"/>
               </a:rPr>
-              <a:t>•  Commodity and inflation-linked CMA mappings are not provided [S8].</a:t>
+              <a:t>•  Strategy Lab results are calculated separately. AI-assisted; not investment, legal or compliance advice.</a:t>
             </a:r>
           </a:p>
-          <a:p>
-            <a:pPr algn="l">
-              <a:spcAft>
-                <a:spcPts val="500"/>
-              </a:spcAft>
-              <a:defRPr sz="1050" b="0">
-                <a:solidFill>
-                  <a:srgbClr val="0D1117"/>
-                </a:solidFill>
-                <a:latin typeface="Inter"/>
-              </a:defRPr>
-            </a:pPr>
-            <a:r>
-              <a:rPr>
-                <a:latin typeface="Inter"/>
-              </a:rPr>
-              <a:t>•  Drawdown charts apply only to closed-end sleeves [S6].</a:t>
-            </a:r>
-          </a:p>
-          <a:p>
-            <a:pPr algn="l">
-              <a:spcAft>
-                <a:spcPts val="500"/>
-              </a:spcAft>
-              <a:defRPr sz="1050" b="0">
-                <a:solidFill>
-                  <a:srgbClr val="0D1117"/>
-                </a:solidFill>
-                <a:latin typeface="Inter"/>
-              </a:defRPr>
-            </a:pPr>
-            <a:r>
-              <a:rPr>
-                <a:latin typeface="Inter"/>
-              </a:rPr>
-              <a:t>•  Portfolio Analytics and Strategy Lab are separate analytical scopes.</a:t>
-            </a:r>
-          </a:p>
-          <a:p>
-            <a:pPr algn="l">
-              <a:spcAft>
-                <a:spcPts val="500"/>
-              </a:spcAft>
-              <a:defRPr sz="1050" b="0">
-                <a:solidFill>
-                  <a:srgbClr val="0D1117"/>
-                </a:solidFill>
-                <a:latin typeface="Inter"/>
-              </a:defRPr>
-            </a:pPr>
-            <a:r>
-              <a:rPr>
-                <a:latin typeface="Inter"/>
-              </a:rPr>
-              <a:t>•  This AI-assisted construction analysis is not investment, legal or compliance advice.</a:t>
-            </a:r>
-          </a:p>
-        </p:txBody>
-      </p:sp>
-      <p:sp>
-        <p:nvSpPr>
-          <p:cNvPr id="11" name="Rectangle 10"/>
+        </p:txBody>
+      </p:sp>
+      <p:sp>
+        <p:nvSpPr>
+          <p:cNvPr id="10" name="Rectangle 9"/>
           <p:cNvSpPr/>
           <p:nvPr/>
         </p:nvSpPr>
@@ -35805,7 +34879,7 @@
       </p:sp>
       <p:sp>
         <p:nvSpPr>
-          <p:cNvPr id="12" name="TextBox 11"/>
+          <p:cNvPr id="11" name="TextBox 10"/>
           <p:cNvSpPr txBox="1"/>
           <p:nvPr/>
         </p:nvSpPr>
@@ -35847,7 +34921,7 @@
       </p:sp>
       <p:sp>
         <p:nvSpPr>
-          <p:cNvPr id="13" name="TextBox 12"/>
+          <p:cNvPr id="12" name="TextBox 11"/>
           <p:cNvSpPr txBox="1"/>
           <p:nvPr/>
         </p:nvSpPr>
@@ -35889,7 +34963,7 @@
       </p:sp>
       <p:sp>
         <p:nvSpPr>
-          <p:cNvPr id="14" name="TextBox 13"/>
+          <p:cNvPr id="13" name="TextBox 12"/>
           <p:cNvSpPr txBox="1"/>
           <p:nvPr/>
         </p:nvSpPr>
@@ -35924,7 +34998,7 @@
               <a:rPr>
                 <a:latin typeface="Inter"/>
               </a:rPr>
-              <a:t>32</a:t>
+              <a:t>33</a:t>
             </a:r>
           </a:p>
         </p:txBody>
@@ -36004,48 +35078,6 @@
         </p:nvSpPr>
         <p:spPr>
           <a:xfrm>
-            <a:off x="5897880" y="310896"/>
-            <a:ext cx="4800600" cy="256032"/>
-          </a:xfrm>
-          <a:prstGeom prst="rect">
-            <a:avLst/>
-          </a:prstGeom>
-          <a:noFill/>
-        </p:spPr>
-        <p:txBody>
-          <a:bodyPr wrap="none" lIns="9144" rIns="9144" tIns="9144" bIns="9144" anchor="t">
-            <a:spAutoFit/>
-          </a:bodyPr>
-          <a:lstStyle/>
-          <a:p>
-            <a:pPr algn="r">
-              <a:spcAft>
-                <a:spcPts val="0"/>
-              </a:spcAft>
-              <a:defRPr sz="680" b="1">
-                <a:solidFill>
-                  <a:srgbClr val="4F6B00"/>
-                </a:solidFill>
-                <a:latin typeface="Inter"/>
-              </a:defRPr>
-            </a:pPr>
-            <a:r>
-              <a:rPr>
-                <a:latin typeface="Inter"/>
-              </a:rPr>
-              <a:t>Illustrative, Gradient Maintained — demo data, not the client's holdings or managers</a:t>
-            </a:r>
-          </a:p>
-        </p:txBody>
-      </p:sp>
-      <p:sp>
-        <p:nvSpPr>
-          <p:cNvPr id="4" name="TextBox 3"/>
-          <p:cNvSpPr txBox="1"/>
-          <p:nvPr/>
-        </p:nvSpPr>
-        <p:spPr>
-          <a:xfrm>
             <a:off x="640080" y="566928"/>
             <a:ext cx="10058400" cy="530352"/>
           </a:xfrm>
@@ -36082,7 +35114,7 @@
       </p:sp>
       <p:sp>
         <p:nvSpPr>
-          <p:cNvPr id="5" name="Rectangle 4"/>
+          <p:cNvPr id="4" name="Rectangle 3"/>
           <p:cNvSpPr/>
           <p:nvPr/>
         </p:nvSpPr>
@@ -36131,7 +35163,7 @@
       </p:sp>
       <p:sp>
         <p:nvSpPr>
-          <p:cNvPr id="6" name="Rectangle 5"/>
+          <p:cNvPr id="5" name="Rectangle 4"/>
           <p:cNvSpPr/>
           <p:nvPr/>
         </p:nvSpPr>
@@ -36180,7 +35212,7 @@
       </p:sp>
       <p:sp>
         <p:nvSpPr>
-          <p:cNvPr id="7" name="TextBox 6"/>
+          <p:cNvPr id="6" name="TextBox 5"/>
           <p:cNvSpPr txBox="1"/>
           <p:nvPr/>
         </p:nvSpPr>
@@ -36222,14 +35254,14 @@
       </p:sp>
       <p:sp>
         <p:nvSpPr>
-          <p:cNvPr id="8" name="Rectangle 7"/>
+          <p:cNvPr id="7" name="Rectangle 6"/>
           <p:cNvSpPr/>
           <p:nvPr/>
         </p:nvSpPr>
         <p:spPr>
           <a:xfrm>
             <a:off x="640080" y="1325880"/>
-            <a:ext cx="10908792" cy="2304141"/>
+            <a:ext cx="10908792" cy="2232886"/>
           </a:xfrm>
           <a:prstGeom prst="rect">
             <a:avLst/>
@@ -36271,14 +35303,14 @@
       </p:sp>
       <p:sp>
         <p:nvSpPr>
-          <p:cNvPr id="9" name="Rectangle 8"/>
+          <p:cNvPr id="8" name="Rectangle 7"/>
           <p:cNvSpPr/>
           <p:nvPr/>
         </p:nvSpPr>
         <p:spPr>
           <a:xfrm>
             <a:off x="640080" y="1325880"/>
-            <a:ext cx="54864" cy="2304141"/>
+            <a:ext cx="54864" cy="2232886"/>
           </a:xfrm>
           <a:prstGeom prst="rect">
             <a:avLst/>
@@ -36320,7 +35352,7 @@
       </p:sp>
       <p:sp>
         <p:nvSpPr>
-          <p:cNvPr id="10" name="TextBox 9"/>
+          <p:cNvPr id="9" name="TextBox 8"/>
           <p:cNvSpPr txBox="1"/>
           <p:nvPr/>
         </p:nvSpPr>
@@ -36355,21 +35387,21 @@
               <a:rPr>
                 <a:latin typeface="Inter"/>
               </a:rPr>
-              <a:t>Key judgment — primary measure</a:t>
+              <a:t>Key judgment — Sleeve size</a:t>
             </a:r>
           </a:p>
         </p:txBody>
       </p:sp>
       <p:sp>
         <p:nvSpPr>
-          <p:cNvPr id="11" name="TextBox 10"/>
+          <p:cNvPr id="10" name="TextBox 9"/>
           <p:cNvSpPr txBox="1"/>
           <p:nvPr/>
         </p:nvSpPr>
         <p:spPr>
           <a:xfrm>
             <a:off x="804671" y="1719072"/>
-            <a:ext cx="10616184" cy="1819509"/>
+            <a:ext cx="10616184" cy="1748254"/>
           </a:xfrm>
           <a:prstGeom prst="rect">
             <a:avLst/>
@@ -36397,21 +35429,21 @@
               <a:rPr>
                 <a:latin typeface="Inter"/>
               </a:rPr>
-              <a:t>Observation: Real-assets weight is 15.0% in the review evidence [S2]. Why it matters: This measure establishes the baseline for comparing later governed results. Uncertainty: The source basis may omit newer observations outside the reviewed evidence. What would change the view: A refreshed source report showing a change above 1%.</a:t>
+              <a:t>Observation: Real assets are 15.0% of total NAV [S2]. Why it matters: The proposal reshapes the sleeve without changing its total. Uncertainty: The weight moves with listed real estate prices. What would change the view: A drift of more than 1pp before funding.</a:t>
             </a:r>
           </a:p>
         </p:txBody>
       </p:sp>
       <p:sp>
         <p:nvSpPr>
-          <p:cNvPr id="12" name="Rectangle 11"/>
+          <p:cNvPr id="11" name="Rectangle 10"/>
           <p:cNvSpPr/>
           <p:nvPr/>
         </p:nvSpPr>
         <p:spPr>
           <a:xfrm>
-            <a:off x="640080" y="3739749"/>
-            <a:ext cx="10908792" cy="2478170"/>
+            <a:off x="640080" y="3668494"/>
+            <a:ext cx="10908792" cy="2549425"/>
           </a:xfrm>
           <a:prstGeom prst="rect">
             <a:avLst/>
@@ -36453,14 +35485,14 @@
       </p:sp>
       <p:sp>
         <p:nvSpPr>
-          <p:cNvPr id="13" name="Rectangle 12"/>
+          <p:cNvPr id="12" name="Rectangle 11"/>
           <p:cNvSpPr/>
           <p:nvPr/>
         </p:nvSpPr>
         <p:spPr>
           <a:xfrm>
-            <a:off x="640080" y="3739749"/>
-            <a:ext cx="54864" cy="2478170"/>
+            <a:off x="640080" y="3668494"/>
+            <a:ext cx="54864" cy="2549425"/>
           </a:xfrm>
           <a:prstGeom prst="rect">
             <a:avLst/>
@@ -36502,13 +35534,13 @@
       </p:sp>
       <p:sp>
         <p:nvSpPr>
-          <p:cNvPr id="14" name="TextBox 13"/>
+          <p:cNvPr id="13" name="TextBox 12"/>
           <p:cNvSpPr txBox="1"/>
           <p:nvPr/>
         </p:nvSpPr>
         <p:spPr>
           <a:xfrm>
-            <a:off x="804671" y="3849477"/>
+            <a:off x="804671" y="3778222"/>
             <a:ext cx="10616184" cy="228600"/>
           </a:xfrm>
           <a:prstGeom prst="rect">
@@ -36537,21 +35569,21 @@
               <a:rPr>
                 <a:latin typeface="Inter"/>
               </a:rPr>
-              <a:t>Key judgment — monitoring priority</a:t>
+              <a:t>Key judgment — Policy limit</a:t>
             </a:r>
           </a:p>
         </p:txBody>
       </p:sp>
       <p:sp>
         <p:nvSpPr>
-          <p:cNvPr id="15" name="TextBox 14"/>
+          <p:cNvPr id="14" name="TextBox 13"/>
           <p:cNvSpPr txBox="1"/>
           <p:nvPr/>
         </p:nvSpPr>
         <p:spPr>
           <a:xfrm>
-            <a:off x="804671" y="4132941"/>
-            <a:ext cx="10616184" cy="1993538"/>
+            <a:off x="804671" y="4061686"/>
+            <a:ext cx="10616184" cy="2064793"/>
           </a:xfrm>
           <a:prstGeom prst="rect">
             <a:avLst/>
@@ -36579,14 +35611,14 @@
               <a:rPr>
                 <a:latin typeface="Inter"/>
               </a:rPr>
-              <a:t>Observation: Policy status is Watch rather than Clear in the review evidence [S3]. Why it matters: This result determines which item receives priority in the next monitoring cycle. Uncertainty: Supporting coverage may omit later filings or corroborating detail. What would change the view: A new filing or report that resolves the item or changes it by 1%.</a:t>
+              <a:t>Observation: The real-assets allocation is near its policy limit [S3]. Why it matters: Funding must be staged so the sleeve stays inside its range. Uncertainty: The limit test uses lagged private valuations. What would change the view: A valuation refresh that moves the sleeve away from the limit.</a:t>
             </a:r>
           </a:p>
         </p:txBody>
       </p:sp>
       <p:sp>
         <p:nvSpPr>
-          <p:cNvPr id="16" name="Rectangle 15"/>
+          <p:cNvPr id="15" name="Rectangle 14"/>
           <p:cNvSpPr/>
           <p:nvPr/>
         </p:nvSpPr>
@@ -36635,7 +35667,7 @@
       </p:sp>
       <p:sp>
         <p:nvSpPr>
-          <p:cNvPr id="17" name="TextBox 16"/>
+          <p:cNvPr id="16" name="TextBox 15"/>
           <p:cNvSpPr txBox="1"/>
           <p:nvPr/>
         </p:nvSpPr>
@@ -36677,7 +35709,7 @@
       </p:sp>
       <p:sp>
         <p:nvSpPr>
-          <p:cNvPr id="18" name="TextBox 17"/>
+          <p:cNvPr id="17" name="TextBox 16"/>
           <p:cNvSpPr txBox="1"/>
           <p:nvPr/>
         </p:nvSpPr>
@@ -36719,7 +35751,7 @@
       </p:sp>
       <p:sp>
         <p:nvSpPr>
-          <p:cNvPr id="19" name="TextBox 18"/>
+          <p:cNvPr id="18" name="TextBox 17"/>
           <p:cNvSpPr txBox="1"/>
           <p:nvPr/>
         </p:nvSpPr>
@@ -36834,48 +35866,6 @@
         </p:nvSpPr>
         <p:spPr>
           <a:xfrm>
-            <a:off x="5897880" y="310896"/>
-            <a:ext cx="4800600" cy="256032"/>
-          </a:xfrm>
-          <a:prstGeom prst="rect">
-            <a:avLst/>
-          </a:prstGeom>
-          <a:noFill/>
-        </p:spPr>
-        <p:txBody>
-          <a:bodyPr wrap="none" lIns="9144" rIns="9144" tIns="9144" bIns="9144" anchor="t">
-            <a:spAutoFit/>
-          </a:bodyPr>
-          <a:lstStyle/>
-          <a:p>
-            <a:pPr algn="r">
-              <a:spcAft>
-                <a:spcPts val="0"/>
-              </a:spcAft>
-              <a:defRPr sz="680" b="1">
-                <a:solidFill>
-                  <a:srgbClr val="4F6B00"/>
-                </a:solidFill>
-                <a:latin typeface="Inter"/>
-              </a:defRPr>
-            </a:pPr>
-            <a:r>
-              <a:rPr>
-                <a:latin typeface="Inter"/>
-              </a:rPr>
-              <a:t>Illustrative, Gradient Maintained — demo data, not the client's holdings or managers</a:t>
-            </a:r>
-          </a:p>
-        </p:txBody>
-      </p:sp>
-      <p:sp>
-        <p:nvSpPr>
-          <p:cNvPr id="4" name="TextBox 3"/>
-          <p:cNvSpPr txBox="1"/>
-          <p:nvPr/>
-        </p:nvSpPr>
-        <p:spPr>
-          <a:xfrm>
             <a:off x="640080" y="566928"/>
             <a:ext cx="10058400" cy="530352"/>
           </a:xfrm>
@@ -36912,7 +35902,7 @@
       </p:sp>
       <p:sp>
         <p:nvSpPr>
-          <p:cNvPr id="5" name="Rectangle 4"/>
+          <p:cNvPr id="4" name="Rectangle 3"/>
           <p:cNvSpPr/>
           <p:nvPr/>
         </p:nvSpPr>
@@ -36961,7 +35951,7 @@
       </p:sp>
       <p:sp>
         <p:nvSpPr>
-          <p:cNvPr id="6" name="Rectangle 5"/>
+          <p:cNvPr id="5" name="Rectangle 4"/>
           <p:cNvSpPr/>
           <p:nvPr/>
         </p:nvSpPr>
@@ -37010,7 +36000,7 @@
       </p:sp>
       <p:sp>
         <p:nvSpPr>
-          <p:cNvPr id="7" name="TextBox 6"/>
+          <p:cNvPr id="6" name="TextBox 5"/>
           <p:cNvSpPr txBox="1"/>
           <p:nvPr/>
         </p:nvSpPr>
@@ -37052,7 +36042,7 @@
       </p:sp>
       <p:graphicFrame>
         <p:nvGraphicFramePr>
-          <p:cNvPr id="8" name="Table 7"/>
+          <p:cNvPr id="7" name="Table 6"/>
           <p:cNvGraphicFramePr>
             <a:graphicFrameLocks noGrp="1"/>
           </p:cNvGraphicFramePr>
@@ -37414,7 +36404,7 @@
       </p:graphicFrame>
       <p:sp>
         <p:nvSpPr>
-          <p:cNvPr id="9" name="TextBox 8"/>
+          <p:cNvPr id="8" name="TextBox 7"/>
           <p:cNvSpPr txBox="1"/>
           <p:nvPr/>
         </p:nvSpPr>
@@ -37456,7 +36446,7 @@
       </p:sp>
       <p:graphicFrame>
         <p:nvGraphicFramePr>
-          <p:cNvPr id="10" name="Table 9"/>
+          <p:cNvPr id="9" name="Table 8"/>
           <p:cNvGraphicFramePr>
             <a:graphicFrameLocks noGrp="1"/>
           </p:cNvGraphicFramePr>
@@ -37989,7 +36979,7 @@
                         <a:rPr>
                           <a:latin typeface="Inter"/>
                         </a:rPr>
-                        <a:t>● Watch</a:t>
+                        <a:t>● Near limit</a:t>
                       </a:r>
                     </a:p>
                   </a:txBody>
@@ -38033,7 +37023,7 @@
       </p:graphicFrame>
       <p:sp>
         <p:nvSpPr>
-          <p:cNvPr id="11" name="Rectangle 10"/>
+          <p:cNvPr id="10" name="Rectangle 9"/>
           <p:cNvSpPr/>
           <p:nvPr/>
         </p:nvSpPr>
@@ -38082,7 +37072,7 @@
       </p:sp>
       <p:sp>
         <p:nvSpPr>
-          <p:cNvPr id="12" name="TextBox 11"/>
+          <p:cNvPr id="11" name="TextBox 10"/>
           <p:cNvSpPr txBox="1"/>
           <p:nvPr/>
         </p:nvSpPr>
@@ -38124,7 +37114,7 @@
       </p:sp>
       <p:sp>
         <p:nvSpPr>
-          <p:cNvPr id="13" name="TextBox 12"/>
+          <p:cNvPr id="12" name="TextBox 11"/>
           <p:cNvSpPr txBox="1"/>
           <p:nvPr/>
         </p:nvSpPr>
@@ -38166,7 +37156,7 @@
       </p:sp>
       <p:sp>
         <p:nvSpPr>
-          <p:cNvPr id="14" name="TextBox 13"/>
+          <p:cNvPr id="13" name="TextBox 12"/>
           <p:cNvSpPr txBox="1"/>
           <p:nvPr/>
         </p:nvSpPr>
@@ -38281,48 +37271,6 @@
         </p:nvSpPr>
         <p:spPr>
           <a:xfrm>
-            <a:off x="5897880" y="310896"/>
-            <a:ext cx="4800600" cy="256032"/>
-          </a:xfrm>
-          <a:prstGeom prst="rect">
-            <a:avLst/>
-          </a:prstGeom>
-          <a:noFill/>
-        </p:spPr>
-        <p:txBody>
-          <a:bodyPr wrap="none" lIns="9144" rIns="9144" tIns="9144" bIns="9144" anchor="t">
-            <a:spAutoFit/>
-          </a:bodyPr>
-          <a:lstStyle/>
-          <a:p>
-            <a:pPr algn="r">
-              <a:spcAft>
-                <a:spcPts val="0"/>
-              </a:spcAft>
-              <a:defRPr sz="680" b="1">
-                <a:solidFill>
-                  <a:srgbClr val="4F6B00"/>
-                </a:solidFill>
-                <a:latin typeface="Inter"/>
-              </a:defRPr>
-            </a:pPr>
-            <a:r>
-              <a:rPr>
-                <a:latin typeface="Inter"/>
-              </a:rPr>
-              <a:t>Illustrative, Gradient Maintained — demo data, not the client's holdings or managers</a:t>
-            </a:r>
-          </a:p>
-        </p:txBody>
-      </p:sp>
-      <p:sp>
-        <p:nvSpPr>
-          <p:cNvPr id="4" name="TextBox 3"/>
-          <p:cNvSpPr txBox="1"/>
-          <p:nvPr/>
-        </p:nvSpPr>
-        <p:spPr>
-          <a:xfrm>
             <a:off x="640080" y="566928"/>
             <a:ext cx="10058400" cy="530352"/>
           </a:xfrm>
@@ -38359,7 +37307,7 @@
       </p:sp>
       <p:sp>
         <p:nvSpPr>
-          <p:cNvPr id="5" name="Rectangle 4"/>
+          <p:cNvPr id="4" name="Rectangle 3"/>
           <p:cNvSpPr/>
           <p:nvPr/>
         </p:nvSpPr>
@@ -38408,7 +37356,7 @@
       </p:sp>
       <p:sp>
         <p:nvSpPr>
-          <p:cNvPr id="6" name="Rectangle 5"/>
+          <p:cNvPr id="5" name="Rectangle 4"/>
           <p:cNvSpPr/>
           <p:nvPr/>
         </p:nvSpPr>
@@ -38457,7 +37405,7 @@
       </p:sp>
       <p:sp>
         <p:nvSpPr>
-          <p:cNvPr id="7" name="TextBox 6"/>
+          <p:cNvPr id="6" name="TextBox 5"/>
           <p:cNvSpPr txBox="1"/>
           <p:nvPr/>
         </p:nvSpPr>
@@ -38499,7 +37447,7 @@
       </p:sp>
       <p:sp>
         <p:nvSpPr>
-          <p:cNvPr id="8" name="TextBox 7"/>
+          <p:cNvPr id="7" name="TextBox 6"/>
           <p:cNvSpPr txBox="1"/>
           <p:nvPr/>
         </p:nvSpPr>
@@ -38541,7 +37489,7 @@
       </p:sp>
       <p:graphicFrame>
         <p:nvGraphicFramePr>
-          <p:cNvPr id="9" name="Chart 8"/>
+          <p:cNvPr id="8" name="Chart 7"/>
           <p:cNvGraphicFramePr>
             <a:graphicFrameLocks noGrp="1"/>
           </p:cNvGraphicFramePr>
@@ -38559,7 +37507,7 @@
       </p:graphicFrame>
       <p:sp>
         <p:nvSpPr>
-          <p:cNvPr id="10" name="Rectangle 9"/>
+          <p:cNvPr id="9" name="Rectangle 8"/>
           <p:cNvSpPr/>
           <p:nvPr/>
         </p:nvSpPr>
@@ -38608,7 +37556,7 @@
       </p:sp>
       <p:sp>
         <p:nvSpPr>
-          <p:cNvPr id="11" name="TextBox 10"/>
+          <p:cNvPr id="10" name="TextBox 9"/>
           <p:cNvSpPr txBox="1"/>
           <p:nvPr/>
         </p:nvSpPr>
@@ -38650,7 +37598,7 @@
       </p:sp>
       <p:sp>
         <p:nvSpPr>
-          <p:cNvPr id="12" name="TextBox 11"/>
+          <p:cNvPr id="11" name="TextBox 10"/>
           <p:cNvSpPr txBox="1"/>
           <p:nvPr/>
         </p:nvSpPr>
@@ -38692,7 +37640,7 @@
       </p:sp>
       <p:sp>
         <p:nvSpPr>
-          <p:cNvPr id="13" name="TextBox 12"/>
+          <p:cNvPr id="12" name="TextBox 11"/>
           <p:cNvSpPr txBox="1"/>
           <p:nvPr/>
         </p:nvSpPr>
@@ -38807,48 +37755,6 @@
         </p:nvSpPr>
         <p:spPr>
           <a:xfrm>
-            <a:off x="5897880" y="310896"/>
-            <a:ext cx="4800600" cy="256032"/>
-          </a:xfrm>
-          <a:prstGeom prst="rect">
-            <a:avLst/>
-          </a:prstGeom>
-          <a:noFill/>
-        </p:spPr>
-        <p:txBody>
-          <a:bodyPr wrap="none" lIns="9144" rIns="9144" tIns="9144" bIns="9144" anchor="t">
-            <a:spAutoFit/>
-          </a:bodyPr>
-          <a:lstStyle/>
-          <a:p>
-            <a:pPr algn="r">
-              <a:spcAft>
-                <a:spcPts val="0"/>
-              </a:spcAft>
-              <a:defRPr sz="680" b="1">
-                <a:solidFill>
-                  <a:srgbClr val="4F6B00"/>
-                </a:solidFill>
-                <a:latin typeface="Inter"/>
-              </a:defRPr>
-            </a:pPr>
-            <a:r>
-              <a:rPr>
-                <a:latin typeface="Inter"/>
-              </a:rPr>
-              <a:t>Illustrative, Gradient Maintained — demo data, not the client's holdings or managers</a:t>
-            </a:r>
-          </a:p>
-        </p:txBody>
-      </p:sp>
-      <p:sp>
-        <p:nvSpPr>
-          <p:cNvPr id="4" name="TextBox 3"/>
-          <p:cNvSpPr txBox="1"/>
-          <p:nvPr/>
-        </p:nvSpPr>
-        <p:spPr>
-          <a:xfrm>
             <a:off x="640080" y="566928"/>
             <a:ext cx="10058400" cy="530352"/>
           </a:xfrm>
@@ -38885,7 +37791,7 @@
       </p:sp>
       <p:sp>
         <p:nvSpPr>
-          <p:cNvPr id="5" name="Rectangle 4"/>
+          <p:cNvPr id="4" name="Rectangle 3"/>
           <p:cNvSpPr/>
           <p:nvPr/>
         </p:nvSpPr>
@@ -38934,7 +37840,7 @@
       </p:sp>
       <p:sp>
         <p:nvSpPr>
-          <p:cNvPr id="6" name="Rectangle 5"/>
+          <p:cNvPr id="5" name="Rectangle 4"/>
           <p:cNvSpPr/>
           <p:nvPr/>
         </p:nvSpPr>
@@ -38983,7 +37889,7 @@
       </p:sp>
       <p:sp>
         <p:nvSpPr>
-          <p:cNvPr id="7" name="TextBox 6"/>
+          <p:cNvPr id="6" name="TextBox 5"/>
           <p:cNvSpPr txBox="1"/>
           <p:nvPr/>
         </p:nvSpPr>
@@ -39025,7 +37931,7 @@
       </p:sp>
       <p:sp>
         <p:nvSpPr>
-          <p:cNvPr id="8" name="TextBox 7"/>
+          <p:cNvPr id="7" name="TextBox 6"/>
           <p:cNvSpPr txBox="1"/>
           <p:nvPr/>
         </p:nvSpPr>
@@ -39067,7 +37973,7 @@
       </p:sp>
       <p:graphicFrame>
         <p:nvGraphicFramePr>
-          <p:cNvPr id="9" name="Table 8"/>
+          <p:cNvPr id="8" name="Table 7"/>
           <p:cNvGraphicFramePr>
             <a:graphicFrameLocks noGrp="1"/>
           </p:cNvGraphicFramePr>
@@ -40245,7 +39151,7 @@
       </p:graphicFrame>
       <p:sp>
         <p:nvSpPr>
-          <p:cNvPr id="10" name="TextBox 9"/>
+          <p:cNvPr id="9" name="TextBox 8"/>
           <p:cNvSpPr txBox="1"/>
           <p:nvPr/>
         </p:nvSpPr>
@@ -40287,7 +39193,7 @@
       </p:sp>
       <p:sp>
         <p:nvSpPr>
-          <p:cNvPr id="11" name="Rectangle 10"/>
+          <p:cNvPr id="10" name="Rectangle 9"/>
           <p:cNvSpPr/>
           <p:nvPr/>
         </p:nvSpPr>
@@ -40336,7 +39242,7 @@
       </p:sp>
       <p:sp>
         <p:nvSpPr>
-          <p:cNvPr id="12" name="TextBox 11"/>
+          <p:cNvPr id="11" name="TextBox 10"/>
           <p:cNvSpPr txBox="1"/>
           <p:nvPr/>
         </p:nvSpPr>
@@ -40378,7 +39284,7 @@
       </p:sp>
       <p:sp>
         <p:nvSpPr>
-          <p:cNvPr id="13" name="TextBox 12"/>
+          <p:cNvPr id="12" name="TextBox 11"/>
           <p:cNvSpPr txBox="1"/>
           <p:nvPr/>
         </p:nvSpPr>
@@ -40420,7 +39326,7 @@
       </p:sp>
       <p:sp>
         <p:nvSpPr>
-          <p:cNvPr id="14" name="TextBox 13"/>
+          <p:cNvPr id="13" name="TextBox 12"/>
           <p:cNvSpPr txBox="1"/>
           <p:nvPr/>
         </p:nvSpPr>
@@ -40536,7 +39442,7 @@
         <p:spPr>
           <a:xfrm>
             <a:off x="640080" y="329184"/>
-            <a:ext cx="5303520" cy="182880"/>
+            <a:ext cx="9875520" cy="182880"/>
           </a:xfrm>
           <a:prstGeom prst="rect">
             <a:avLst/>
@@ -40577,48 +39483,6 @@
         </p:nvSpPr>
         <p:spPr>
           <a:xfrm>
-            <a:off x="5897880" y="310896"/>
-            <a:ext cx="4800600" cy="256032"/>
-          </a:xfrm>
-          <a:prstGeom prst="rect">
-            <a:avLst/>
-          </a:prstGeom>
-          <a:noFill/>
-        </p:spPr>
-        <p:txBody>
-          <a:bodyPr wrap="none" lIns="9144" rIns="9144" tIns="9144" bIns="9144" anchor="t">
-            <a:spAutoFit/>
-          </a:bodyPr>
-          <a:lstStyle/>
-          <a:p>
-            <a:pPr algn="r">
-              <a:spcAft>
-                <a:spcPts val="0"/>
-              </a:spcAft>
-              <a:defRPr sz="680" b="1">
-                <a:solidFill>
-                  <a:srgbClr val="4F6B00"/>
-                </a:solidFill>
-                <a:latin typeface="Inter"/>
-              </a:defRPr>
-            </a:pPr>
-            <a:r>
-              <a:rPr>
-                <a:latin typeface="Inter"/>
-              </a:rPr>
-              <a:t>Illustrative, Gradient Maintained — demo data, not the client's holdings or managers</a:t>
-            </a:r>
-          </a:p>
-        </p:txBody>
-      </p:sp>
-      <p:sp>
-        <p:nvSpPr>
-          <p:cNvPr id="5" name="TextBox 4"/>
-          <p:cNvSpPr txBox="1"/>
-          <p:nvPr/>
-        </p:nvSpPr>
-        <p:spPr>
-          <a:xfrm>
             <a:off x="640080" y="566928"/>
             <a:ext cx="10058400" cy="530352"/>
           </a:xfrm>
@@ -40655,7 +39519,7 @@
       </p:sp>
       <p:sp>
         <p:nvSpPr>
-          <p:cNvPr id="6" name="Rectangle 5"/>
+          <p:cNvPr id="5" name="Rectangle 4"/>
           <p:cNvSpPr/>
           <p:nvPr/>
         </p:nvSpPr>
@@ -40704,7 +39568,7 @@
       </p:sp>
       <p:sp>
         <p:nvSpPr>
-          <p:cNvPr id="7" name="Rectangle 6"/>
+          <p:cNvPr id="6" name="Rectangle 5"/>
           <p:cNvSpPr/>
           <p:nvPr/>
         </p:nvSpPr>
@@ -40753,7 +39617,7 @@
       </p:sp>
       <p:sp>
         <p:nvSpPr>
-          <p:cNvPr id="8" name="TextBox 7"/>
+          <p:cNvPr id="7" name="TextBox 6"/>
           <p:cNvSpPr txBox="1"/>
           <p:nvPr/>
         </p:nvSpPr>
@@ -40795,7 +39659,7 @@
       </p:sp>
       <p:sp>
         <p:nvSpPr>
-          <p:cNvPr id="9" name="TextBox 8"/>
+          <p:cNvPr id="8" name="TextBox 7"/>
           <p:cNvSpPr txBox="1"/>
           <p:nvPr/>
         </p:nvSpPr>
@@ -40837,7 +39701,7 @@
       </p:sp>
       <p:sp>
         <p:nvSpPr>
-          <p:cNvPr id="10" name="TextBox 9"/>
+          <p:cNvPr id="9" name="TextBox 8"/>
           <p:cNvSpPr txBox="1"/>
           <p:nvPr/>
         </p:nvSpPr>
@@ -40879,7 +39743,7 @@
       </p:sp>
       <p:sp>
         <p:nvSpPr>
-          <p:cNvPr id="11" name="Rectangle 10"/>
+          <p:cNvPr id="10" name="Rectangle 9"/>
           <p:cNvSpPr/>
           <p:nvPr/>
         </p:nvSpPr>
@@ -40928,7 +39792,7 @@
       </p:sp>
       <p:sp>
         <p:nvSpPr>
-          <p:cNvPr id="12" name="Oval 11"/>
+          <p:cNvPr id="11" name="Oval 10"/>
           <p:cNvSpPr/>
           <p:nvPr/>
         </p:nvSpPr>
@@ -40977,7 +39841,7 @@
       </p:sp>
       <p:sp>
         <p:nvSpPr>
-          <p:cNvPr id="13" name="Rectangle 12"/>
+          <p:cNvPr id="12" name="Rectangle 11"/>
           <p:cNvSpPr/>
           <p:nvPr/>
         </p:nvSpPr>
@@ -41026,7 +39890,7 @@
       </p:sp>
       <p:sp>
         <p:nvSpPr>
-          <p:cNvPr id="14" name="TextBox 13"/>
+          <p:cNvPr id="13" name="TextBox 12"/>
           <p:cNvSpPr txBox="1"/>
           <p:nvPr/>
         </p:nvSpPr>
@@ -41068,7 +39932,7 @@
       </p:sp>
       <p:sp>
         <p:nvSpPr>
-          <p:cNvPr id="15" name="Rectangle 14"/>
+          <p:cNvPr id="14" name="Rectangle 13"/>
           <p:cNvSpPr/>
           <p:nvPr/>
         </p:nvSpPr>
@@ -41117,7 +39981,7 @@
       </p:sp>
       <p:sp>
         <p:nvSpPr>
-          <p:cNvPr id="16" name="Oval 15"/>
+          <p:cNvPr id="15" name="Oval 14"/>
           <p:cNvSpPr/>
           <p:nvPr/>
         </p:nvSpPr>
@@ -41166,7 +40030,7 @@
       </p:sp>
       <p:sp>
         <p:nvSpPr>
-          <p:cNvPr id="17" name="Rectangle 16"/>
+          <p:cNvPr id="16" name="Rectangle 15"/>
           <p:cNvSpPr/>
           <p:nvPr/>
         </p:nvSpPr>
@@ -41215,7 +40079,7 @@
       </p:sp>
       <p:sp>
         <p:nvSpPr>
-          <p:cNvPr id="18" name="TextBox 17"/>
+          <p:cNvPr id="17" name="TextBox 16"/>
           <p:cNvSpPr txBox="1"/>
           <p:nvPr/>
         </p:nvSpPr>
@@ -41257,7 +40121,7 @@
       </p:sp>
       <p:sp>
         <p:nvSpPr>
-          <p:cNvPr id="19" name="Rectangle 18"/>
+          <p:cNvPr id="18" name="Rectangle 17"/>
           <p:cNvSpPr/>
           <p:nvPr/>
         </p:nvSpPr>
@@ -41306,7 +40170,7 @@
       </p:sp>
       <p:sp>
         <p:nvSpPr>
-          <p:cNvPr id="20" name="Oval 19"/>
+          <p:cNvPr id="19" name="Oval 18"/>
           <p:cNvSpPr/>
           <p:nvPr/>
         </p:nvSpPr>
@@ -41355,7 +40219,7 @@
       </p:sp>
       <p:sp>
         <p:nvSpPr>
-          <p:cNvPr id="21" name="Rectangle 20"/>
+          <p:cNvPr id="20" name="Rectangle 19"/>
           <p:cNvSpPr/>
           <p:nvPr/>
         </p:nvSpPr>
@@ -41404,7 +40268,7 @@
       </p:sp>
       <p:sp>
         <p:nvSpPr>
-          <p:cNvPr id="22" name="TextBox 21"/>
+          <p:cNvPr id="21" name="TextBox 20"/>
           <p:cNvSpPr txBox="1"/>
           <p:nvPr/>
         </p:nvSpPr>
@@ -41446,7 +40310,7 @@
       </p:sp>
       <p:sp>
         <p:nvSpPr>
-          <p:cNvPr id="23" name="Rectangle 22"/>
+          <p:cNvPr id="22" name="Rectangle 21"/>
           <p:cNvSpPr/>
           <p:nvPr/>
         </p:nvSpPr>
@@ -41495,7 +40359,7 @@
       </p:sp>
       <p:sp>
         <p:nvSpPr>
-          <p:cNvPr id="24" name="Oval 23"/>
+          <p:cNvPr id="23" name="Oval 22"/>
           <p:cNvSpPr/>
           <p:nvPr/>
         </p:nvSpPr>
@@ -41544,7 +40408,7 @@
       </p:sp>
       <p:sp>
         <p:nvSpPr>
-          <p:cNvPr id="25" name="Rectangle 24"/>
+          <p:cNvPr id="24" name="Rectangle 23"/>
           <p:cNvSpPr/>
           <p:nvPr/>
         </p:nvSpPr>
@@ -41593,7 +40457,7 @@
       </p:sp>
       <p:sp>
         <p:nvSpPr>
-          <p:cNvPr id="26" name="TextBox 25"/>
+          <p:cNvPr id="25" name="TextBox 24"/>
           <p:cNvSpPr txBox="1"/>
           <p:nvPr/>
         </p:nvSpPr>
@@ -41635,7 +40499,7 @@
       </p:sp>
       <p:sp>
         <p:nvSpPr>
-          <p:cNvPr id="27" name="Rectangle 26"/>
+          <p:cNvPr id="26" name="Rectangle 25"/>
           <p:cNvSpPr/>
           <p:nvPr/>
         </p:nvSpPr>
@@ -41684,7 +40548,7 @@
       </p:sp>
       <p:sp>
         <p:nvSpPr>
-          <p:cNvPr id="28" name="Oval 27"/>
+          <p:cNvPr id="27" name="Oval 26"/>
           <p:cNvSpPr/>
           <p:nvPr/>
         </p:nvSpPr>
@@ -41733,7 +40597,7 @@
       </p:sp>
       <p:sp>
         <p:nvSpPr>
-          <p:cNvPr id="29" name="Rectangle 28"/>
+          <p:cNvPr id="28" name="Rectangle 27"/>
           <p:cNvSpPr/>
           <p:nvPr/>
         </p:nvSpPr>
@@ -41782,7 +40646,7 @@
       </p:sp>
       <p:sp>
         <p:nvSpPr>
-          <p:cNvPr id="30" name="Rectangle 29"/>
+          <p:cNvPr id="29" name="Rectangle 28"/>
           <p:cNvSpPr/>
           <p:nvPr/>
         </p:nvSpPr>
@@ -41831,7 +40695,7 @@
       </p:sp>
       <p:sp>
         <p:nvSpPr>
-          <p:cNvPr id="31" name="TextBox 30"/>
+          <p:cNvPr id="30" name="TextBox 29"/>
           <p:cNvSpPr txBox="1"/>
           <p:nvPr/>
         </p:nvSpPr>
@@ -41873,7 +40737,7 @@
       </p:sp>
       <p:sp>
         <p:nvSpPr>
-          <p:cNvPr id="32" name="TextBox 31"/>
+          <p:cNvPr id="31" name="TextBox 30"/>
           <p:cNvSpPr txBox="1"/>
           <p:nvPr/>
         </p:nvSpPr>
@@ -41915,7 +40779,7 @@
       </p:sp>
       <p:sp>
         <p:nvSpPr>
-          <p:cNvPr id="33" name="TextBox 32"/>
+          <p:cNvPr id="32" name="TextBox 31"/>
           <p:cNvSpPr txBox="1"/>
           <p:nvPr/>
         </p:nvSpPr>
@@ -42031,7 +40895,7 @@
         <p:spPr>
           <a:xfrm>
             <a:off x="640080" y="329184"/>
-            <a:ext cx="5303520" cy="182880"/>
+            <a:ext cx="9875520" cy="182880"/>
           </a:xfrm>
           <a:prstGeom prst="rect">
             <a:avLst/>
@@ -42072,48 +40936,6 @@
         </p:nvSpPr>
         <p:spPr>
           <a:xfrm>
-            <a:off x="5897880" y="310896"/>
-            <a:ext cx="4800600" cy="256032"/>
-          </a:xfrm>
-          <a:prstGeom prst="rect">
-            <a:avLst/>
-          </a:prstGeom>
-          <a:noFill/>
-        </p:spPr>
-        <p:txBody>
-          <a:bodyPr wrap="none" lIns="9144" rIns="9144" tIns="9144" bIns="9144" anchor="t">
-            <a:spAutoFit/>
-          </a:bodyPr>
-          <a:lstStyle/>
-          <a:p>
-            <a:pPr algn="r">
-              <a:spcAft>
-                <a:spcPts val="0"/>
-              </a:spcAft>
-              <a:defRPr sz="680" b="1">
-                <a:solidFill>
-                  <a:srgbClr val="4F6B00"/>
-                </a:solidFill>
-                <a:latin typeface="Inter"/>
-              </a:defRPr>
-            </a:pPr>
-            <a:r>
-              <a:rPr>
-                <a:latin typeface="Inter"/>
-              </a:rPr>
-              <a:t>Illustrative, Gradient Maintained — demo data, not the client's holdings or managers</a:t>
-            </a:r>
-          </a:p>
-        </p:txBody>
-      </p:sp>
-      <p:sp>
-        <p:nvSpPr>
-          <p:cNvPr id="5" name="TextBox 4"/>
-          <p:cNvSpPr txBox="1"/>
-          <p:nvPr/>
-        </p:nvSpPr>
-        <p:spPr>
-          <a:xfrm>
             <a:off x="640080" y="566928"/>
             <a:ext cx="10058400" cy="530352"/>
           </a:xfrm>
@@ -42150,7 +40972,7 @@
       </p:sp>
       <p:sp>
         <p:nvSpPr>
-          <p:cNvPr id="6" name="Rectangle 5"/>
+          <p:cNvPr id="5" name="Rectangle 4"/>
           <p:cNvSpPr/>
           <p:nvPr/>
         </p:nvSpPr>
@@ -42199,7 +41021,7 @@
       </p:sp>
       <p:sp>
         <p:nvSpPr>
-          <p:cNvPr id="7" name="Rectangle 6"/>
+          <p:cNvPr id="6" name="Rectangle 5"/>
           <p:cNvSpPr/>
           <p:nvPr/>
         </p:nvSpPr>
@@ -42248,7 +41070,7 @@
       </p:sp>
       <p:sp>
         <p:nvSpPr>
-          <p:cNvPr id="8" name="TextBox 7"/>
+          <p:cNvPr id="7" name="TextBox 6"/>
           <p:cNvSpPr txBox="1"/>
           <p:nvPr/>
         </p:nvSpPr>
@@ -42290,7 +41112,7 @@
       </p:sp>
       <p:sp>
         <p:nvSpPr>
-          <p:cNvPr id="9" name="TextBox 8"/>
+          <p:cNvPr id="8" name="TextBox 7"/>
           <p:cNvSpPr txBox="1"/>
           <p:nvPr/>
         </p:nvSpPr>
@@ -42332,7 +41154,7 @@
       </p:sp>
       <p:graphicFrame>
         <p:nvGraphicFramePr>
-          <p:cNvPr id="10" name="Chart 9"/>
+          <p:cNvPr id="9" name="Chart 8"/>
           <p:cNvGraphicFramePr>
             <a:graphicFrameLocks noGrp="1"/>
           </p:cNvGraphicFramePr>
@@ -42350,7 +41172,7 @@
       </p:graphicFrame>
       <p:sp>
         <p:nvSpPr>
-          <p:cNvPr id="11" name="Rectangle 10"/>
+          <p:cNvPr id="10" name="Rectangle 9"/>
           <p:cNvSpPr/>
           <p:nvPr/>
         </p:nvSpPr>
@@ -42399,7 +41221,7 @@
       </p:sp>
       <p:sp>
         <p:nvSpPr>
-          <p:cNvPr id="12" name="TextBox 11"/>
+          <p:cNvPr id="11" name="TextBox 10"/>
           <p:cNvSpPr txBox="1"/>
           <p:nvPr/>
         </p:nvSpPr>
@@ -42441,7 +41263,7 @@
       </p:sp>
       <p:sp>
         <p:nvSpPr>
-          <p:cNvPr id="13" name="TextBox 12"/>
+          <p:cNvPr id="12" name="TextBox 11"/>
           <p:cNvSpPr txBox="1"/>
           <p:nvPr/>
         </p:nvSpPr>
@@ -42483,7 +41305,7 @@
       </p:sp>
       <p:sp>
         <p:nvSpPr>
-          <p:cNvPr id="14" name="TextBox 13"/>
+          <p:cNvPr id="13" name="TextBox 12"/>
           <p:cNvSpPr txBox="1"/>
           <p:nvPr/>
         </p:nvSpPr>

--- a/plugins/gradient-cio/assets/examples/gradient-portfolio-construction-real-assets.pptx
+++ b/plugins/gradient-cio/assets/examples/gradient-portfolio-construction-real-assets.pptx
@@ -29092,7 +29092,7 @@
                         <a:rPr>
                           <a:latin typeface="Inter"/>
                         </a:rPr>
-                        <a:t>Returned commitments pack</a:t>
+                        <a:t>Returned commitment-pacing include</a:t>
                       </a:r>
                     </a:p>
                   </a:txBody>
@@ -33987,7 +33987,7 @@
                         <a:rPr>
                           <a:latin typeface="Inter"/>
                         </a:rPr>
-                        <a:t>get_chart_data; get_capital_market_assumptions</a:t>
+                        <a:t>get_portfolio_exposure; get_capital_market_assumptions</a:t>
                       </a:r>
                     </a:p>
                   </a:txBody>

--- a/plugins/gradient-cio/assets/examples/gradient-portfolio-construction-real-assets.pptx
+++ b/plugins/gradient-cio/assets/examples/gradient-portfolio-construction-real-assets.pptx
@@ -35,6 +35,7 @@
     <ns0:sldId id="283" ns1:id="rId34"/>
     <ns0:sldId id="284" ns1:id="rId35"/>
     <ns0:sldId id="285" ns1:id="rId36"/>
+    <ns0:sldId id="286" ns1:id="rId37"/>
   </ns0:sldIdLst>
   <ns0:sldSz cx="12191695" cy="6858000" type="screen16x9"/>
   <ns0:notesSz cx="6858000" cy="9144000"/>
@@ -5124,224 +5125,7 @@
       </p:sp>
       <p:sp>
         <p:nvSpPr>
-          <p:cNvPr id="17" name="Rectangle 16"/>
-          <p:cNvSpPr/>
-          <p:nvPr/>
-        </p:nvSpPr>
-        <p:spPr>
-          <a:xfrm>
-            <a:off x="685800" y="5687568"/>
-            <a:ext cx="3337560" cy="530352"/>
-          </a:xfrm>
-          <a:prstGeom prst="rect">
-            <a:avLst/>
-          </a:prstGeom>
-          <a:solidFill>
-            <a:srgbClr val="F2A93B"/>
-          </a:solidFill>
-          <a:ln>
-            <a:solidFill>
-              <a:srgbClr val="F2A93B"/>
-            </a:solidFill>
-          </a:ln>
-        </p:spPr>
-        <p:style>
-          <a:lnRef idx="1">
-            <a:schemeClr val="accent1"/>
-          </a:lnRef>
-          <a:fillRef idx="3">
-            <a:schemeClr val="accent1"/>
-          </a:fillRef>
-          <a:effectRef idx="2">
-            <a:schemeClr val="accent1"/>
-          </a:effectRef>
-          <a:fontRef idx="minor">
-            <a:schemeClr val="lt1"/>
-          </a:fontRef>
-        </p:style>
-        <p:txBody>
-          <a:bodyPr rtlCol="0" anchor="ctr"/>
-          <a:lstStyle/>
-          <a:p>
-            <a:pPr algn="ctr">
-              <a:defRPr>
-                <a:latin typeface="Inter"/>
-              </a:defRPr>
-            </a:pPr>
-          </a:p>
-        </p:txBody>
-      </p:sp>
-      <p:sp>
-        <p:nvSpPr>
-          <p:cNvPr id="18" name="TextBox 17"/>
-          <p:cNvSpPr txBox="1"/>
-          <p:nvPr/>
-        </p:nvSpPr>
-        <p:spPr>
-          <a:xfrm>
-            <a:off x="822960" y="5760720"/>
-            <a:ext cx="3063240" cy="128016"/>
-          </a:xfrm>
-          <a:prstGeom prst="rect">
-            <a:avLst/>
-          </a:prstGeom>
-          <a:noFill/>
-        </p:spPr>
-        <p:txBody>
-          <a:bodyPr wrap="none" lIns="9144" rIns="9144" tIns="9144" bIns="9144" anchor="t">
-            <a:spAutoFit/>
-          </a:bodyPr>
-          <a:lstStyle/>
-          <a:p>
-            <a:pPr algn="l">
-              <a:spcAft>
-                <a:spcPts val="0"/>
-              </a:spcAft>
-              <a:defRPr sz="620" b="1">
-                <a:solidFill>
-                  <a:srgbClr val="0D1117"/>
-                </a:solidFill>
-                <a:latin typeface="Inter"/>
-              </a:defRPr>
-            </a:pPr>
-            <a:r>
-              <a:rPr>
-                <a:latin typeface="Inter"/>
-              </a:rPr>
-              <a:t>OVERALL VIEW</a:t>
-            </a:r>
-          </a:p>
-        </p:txBody>
-      </p:sp>
-      <p:sp>
-        <p:nvSpPr>
-          <p:cNvPr id="19" name="TextBox 18"/>
-          <p:cNvSpPr txBox="1"/>
-          <p:nvPr/>
-        </p:nvSpPr>
-        <p:spPr>
-          <a:xfrm>
-            <a:off x="822960" y="5916168"/>
-            <a:ext cx="3063240" cy="182880"/>
-          </a:xfrm>
-          <a:prstGeom prst="rect">
-            <a:avLst/>
-          </a:prstGeom>
-          <a:noFill/>
-        </p:spPr>
-        <p:txBody>
-          <a:bodyPr wrap="none" lIns="9144" rIns="9144" tIns="9144" bIns="9144" anchor="t">
-            <a:spAutoFit/>
-          </a:bodyPr>
-          <a:lstStyle/>
-          <a:p>
-            <a:pPr algn="l">
-              <a:spcAft>
-                <a:spcPts val="0"/>
-              </a:spcAft>
-              <a:defRPr sz="900" b="1">
-                <a:solidFill>
-                  <a:srgbClr val="0D1117"/>
-                </a:solidFill>
-                <a:latin typeface="Inter"/>
-              </a:defRPr>
-            </a:pPr>
-            <a:r>
-              <a:rPr>
-                <a:latin typeface="Inter"/>
-              </a:rPr>
-              <a:t>Valuation lag and structure mix on watch</a:t>
-            </a:r>
-          </a:p>
-        </p:txBody>
-      </p:sp>
-      <p:sp>
-        <p:nvSpPr>
-          <p:cNvPr id="20" name="TextBox 19"/>
-          <p:cNvSpPr txBox="1"/>
-          <p:nvPr/>
-        </p:nvSpPr>
-        <p:spPr>
-          <a:xfrm>
-            <a:off x="4297680" y="5733288"/>
-            <a:ext cx="3108960" cy="164592"/>
-          </a:xfrm>
-          <a:prstGeom prst="rect">
-            <a:avLst/>
-          </a:prstGeom>
-          <a:noFill/>
-        </p:spPr>
-        <p:txBody>
-          <a:bodyPr wrap="none" lIns="9144" rIns="9144" tIns="9144" bIns="9144" anchor="t">
-            <a:spAutoFit/>
-          </a:bodyPr>
-          <a:lstStyle/>
-          <a:p>
-            <a:pPr algn="l">
-              <a:spcAft>
-                <a:spcPts val="0"/>
-              </a:spcAft>
-              <a:defRPr sz="650" b="1">
-                <a:solidFill>
-                  <a:srgbClr val="8A94A1"/>
-                </a:solidFill>
-                <a:latin typeface="Inter"/>
-              </a:defRPr>
-            </a:pPr>
-            <a:r>
-              <a:rPr>
-                <a:latin typeface="Inter"/>
-              </a:rPr>
-              <a:t>SCOPE REVIEWED</a:t>
-            </a:r>
-          </a:p>
-        </p:txBody>
-      </p:sp>
-      <p:sp>
-        <p:nvSpPr>
-          <p:cNvPr id="21" name="TextBox 20"/>
-          <p:cNvSpPr txBox="1"/>
-          <p:nvPr/>
-        </p:nvSpPr>
-        <p:spPr>
-          <a:xfrm>
-            <a:off x="4297680" y="5934456"/>
-            <a:ext cx="3108960" cy="201168"/>
-          </a:xfrm>
-          <a:prstGeom prst="rect">
-            <a:avLst/>
-          </a:prstGeom>
-          <a:noFill/>
-        </p:spPr>
-        <p:txBody>
-          <a:bodyPr wrap="none" lIns="9144" rIns="9144" tIns="9144" bIns="9144" anchor="t">
-            <a:spAutoFit/>
-          </a:bodyPr>
-          <a:lstStyle/>
-          <a:p>
-            <a:pPr algn="l">
-              <a:spcAft>
-                <a:spcPts val="0"/>
-              </a:spcAft>
-              <a:defRPr sz="800" b="1">
-                <a:solidFill>
-                  <a:srgbClr val="FFFFFF"/>
-                </a:solidFill>
-                <a:latin typeface="Inter"/>
-              </a:defRPr>
-            </a:pPr>
-            <a:r>
-              <a:rPr>
-                <a:latin typeface="Inter"/>
-              </a:rPr>
-              <a:t>8 of 9 · Partial</a:t>
-            </a:r>
-          </a:p>
-        </p:txBody>
-      </p:sp>
-      <p:sp>
-        <p:nvSpPr>
-          <p:cNvPr id="22" name="TextBox 21"/>
+          <p:cNvPr id="17" name="TextBox 16"/>
           <p:cNvSpPr txBox="1"/>
           <p:nvPr/>
         </p:nvSpPr>
@@ -5383,7 +5167,7 @@
       </p:sp>
       <p:sp>
         <p:nvSpPr>
-          <p:cNvPr id="23" name="TextBox 22"/>
+          <p:cNvPr id="18" name="TextBox 17"/>
           <p:cNvSpPr txBox="1"/>
           <p:nvPr/>
         </p:nvSpPr>
@@ -5425,7 +5209,7 @@
       </p:sp>
       <p:sp>
         <p:nvSpPr>
-          <p:cNvPr id="24" name="TextBox 23"/>
+          <p:cNvPr id="19" name="TextBox 18"/>
           <p:cNvSpPr txBox="1"/>
           <p:nvPr/>
         </p:nvSpPr>
@@ -5541,7 +5325,7 @@
         <p:spPr>
           <a:xfrm>
             <a:off x="640080" y="329184"/>
-            <a:ext cx="5303520" cy="182880"/>
+            <a:ext cx="9875520" cy="182880"/>
           </a:xfrm>
           <a:prstGeom prst="rect">
             <a:avLst/>
@@ -5582,48 +5366,6 @@
         </p:nvSpPr>
         <p:spPr>
           <a:xfrm>
-            <a:off x="5897880" y="310896"/>
-            <a:ext cx="4800600" cy="256032"/>
-          </a:xfrm>
-          <a:prstGeom prst="rect">
-            <a:avLst/>
-          </a:prstGeom>
-          <a:noFill/>
-        </p:spPr>
-        <p:txBody>
-          <a:bodyPr wrap="none" lIns="9144" rIns="9144" tIns="9144" bIns="9144" anchor="t">
-            <a:spAutoFit/>
-          </a:bodyPr>
-          <a:lstStyle/>
-          <a:p>
-            <a:pPr algn="r">
-              <a:spcAft>
-                <a:spcPts val="0"/>
-              </a:spcAft>
-              <a:defRPr sz="680" b="1">
-                <a:solidFill>
-                  <a:srgbClr val="4F6B00"/>
-                </a:solidFill>
-                <a:latin typeface="Inter"/>
-              </a:defRPr>
-            </a:pPr>
-            <a:r>
-              <a:rPr>
-                <a:latin typeface="Inter"/>
-              </a:rPr>
-              <a:t>Illustrative, Gradient Maintained — demo data, not the client's holdings or managers</a:t>
-            </a:r>
-          </a:p>
-        </p:txBody>
-      </p:sp>
-      <p:sp>
-        <p:nvSpPr>
-          <p:cNvPr id="5" name="TextBox 4"/>
-          <p:cNvSpPr txBox="1"/>
-          <p:nvPr/>
-        </p:nvSpPr>
-        <p:spPr>
-          <a:xfrm>
             <a:off x="640080" y="566928"/>
             <a:ext cx="10058400" cy="530352"/>
           </a:xfrm>
@@ -5660,7 +5402,7 @@
       </p:sp>
       <p:sp>
         <p:nvSpPr>
-          <p:cNvPr id="6" name="Rectangle 5"/>
+          <p:cNvPr id="5" name="Rectangle 4"/>
           <p:cNvSpPr/>
           <p:nvPr/>
         </p:nvSpPr>
@@ -5709,7 +5451,7 @@
       </p:sp>
       <p:sp>
         <p:nvSpPr>
-          <p:cNvPr id="7" name="Rectangle 6"/>
+          <p:cNvPr id="6" name="Rectangle 5"/>
           <p:cNvSpPr/>
           <p:nvPr/>
         </p:nvSpPr>
@@ -5758,7 +5500,7 @@
       </p:sp>
       <p:sp>
         <p:nvSpPr>
-          <p:cNvPr id="8" name="TextBox 7"/>
+          <p:cNvPr id="7" name="TextBox 6"/>
           <p:cNvSpPr txBox="1"/>
           <p:nvPr/>
         </p:nvSpPr>
@@ -5800,7 +5542,7 @@
       </p:sp>
       <p:sp>
         <p:nvSpPr>
-          <p:cNvPr id="9" name="TextBox 8"/>
+          <p:cNvPr id="8" name="TextBox 7"/>
           <p:cNvSpPr txBox="1"/>
           <p:nvPr/>
         </p:nvSpPr>
@@ -5842,7 +5584,7 @@
       </p:sp>
       <p:graphicFrame>
         <p:nvGraphicFramePr>
-          <p:cNvPr id="10" name="Table 9"/>
+          <p:cNvPr id="9" name="Table 8"/>
           <p:cNvGraphicFramePr>
             <a:graphicFrameLocks noGrp="1"/>
           </p:cNvGraphicFramePr>
@@ -7020,7 +6762,7 @@
       </p:graphicFrame>
       <p:sp>
         <p:nvSpPr>
-          <p:cNvPr id="11" name="Rectangle 10"/>
+          <p:cNvPr id="10" name="Rectangle 9"/>
           <p:cNvSpPr/>
           <p:nvPr/>
         </p:nvSpPr>
@@ -7069,7 +6811,7 @@
       </p:sp>
       <p:sp>
         <p:nvSpPr>
-          <p:cNvPr id="12" name="Rectangle 11"/>
+          <p:cNvPr id="11" name="Rectangle 10"/>
           <p:cNvSpPr/>
           <p:nvPr/>
         </p:nvSpPr>
@@ -7118,7 +6860,7 @@
       </p:sp>
       <p:sp>
         <p:nvSpPr>
-          <p:cNvPr id="13" name="TextBox 12"/>
+          <p:cNvPr id="12" name="TextBox 11"/>
           <p:cNvSpPr txBox="1"/>
           <p:nvPr/>
         </p:nvSpPr>
@@ -7160,7 +6902,7 @@
       </p:sp>
       <p:sp>
         <p:nvSpPr>
-          <p:cNvPr id="14" name="TextBox 13"/>
+          <p:cNvPr id="13" name="TextBox 12"/>
           <p:cNvSpPr txBox="1"/>
           <p:nvPr/>
         </p:nvSpPr>
@@ -7202,7 +6944,7 @@
       </p:sp>
       <p:sp>
         <p:nvSpPr>
-          <p:cNvPr id="15" name="TextBox 14"/>
+          <p:cNvPr id="14" name="TextBox 13"/>
           <p:cNvSpPr txBox="1"/>
           <p:nvPr/>
         </p:nvSpPr>
@@ -7244,7 +6986,7 @@
       </p:sp>
       <p:sp>
         <p:nvSpPr>
-          <p:cNvPr id="16" name="Rectangle 15"/>
+          <p:cNvPr id="15" name="Rectangle 14"/>
           <p:cNvSpPr/>
           <p:nvPr/>
         </p:nvSpPr>
@@ -7293,7 +7035,7 @@
       </p:sp>
       <p:sp>
         <p:nvSpPr>
-          <p:cNvPr id="17" name="TextBox 16"/>
+          <p:cNvPr id="16" name="TextBox 15"/>
           <p:cNvSpPr txBox="1"/>
           <p:nvPr/>
         </p:nvSpPr>
@@ -7335,7 +7077,7 @@
       </p:sp>
       <p:sp>
         <p:nvSpPr>
-          <p:cNvPr id="18" name="TextBox 17"/>
+          <p:cNvPr id="17" name="TextBox 16"/>
           <p:cNvSpPr txBox="1"/>
           <p:nvPr/>
         </p:nvSpPr>
@@ -7377,7 +7119,7 @@
       </p:sp>
       <p:sp>
         <p:nvSpPr>
-          <p:cNvPr id="19" name="TextBox 18"/>
+          <p:cNvPr id="18" name="TextBox 17"/>
           <p:cNvSpPr txBox="1"/>
           <p:nvPr/>
         </p:nvSpPr>
@@ -7492,48 +7234,6 @@
         </p:nvSpPr>
         <p:spPr>
           <a:xfrm>
-            <a:off x="5897880" y="310896"/>
-            <a:ext cx="4800600" cy="256032"/>
-          </a:xfrm>
-          <a:prstGeom prst="rect">
-            <a:avLst/>
-          </a:prstGeom>
-          <a:noFill/>
-        </p:spPr>
-        <p:txBody>
-          <a:bodyPr wrap="none" lIns="9144" rIns="9144" tIns="9144" bIns="9144" anchor="t">
-            <a:spAutoFit/>
-          </a:bodyPr>
-          <a:lstStyle/>
-          <a:p>
-            <a:pPr algn="r">
-              <a:spcAft>
-                <a:spcPts val="0"/>
-              </a:spcAft>
-              <a:defRPr sz="680" b="1">
-                <a:solidFill>
-                  <a:srgbClr val="4F6B00"/>
-                </a:solidFill>
-                <a:latin typeface="Inter"/>
-              </a:defRPr>
-            </a:pPr>
-            <a:r>
-              <a:rPr>
-                <a:latin typeface="Inter"/>
-              </a:rPr>
-              <a:t>Illustrative, Gradient Maintained — demo data, not the client's holdings or managers</a:t>
-            </a:r>
-          </a:p>
-        </p:txBody>
-      </p:sp>
-      <p:sp>
-        <p:nvSpPr>
-          <p:cNvPr id="4" name="TextBox 3"/>
-          <p:cNvSpPr txBox="1"/>
-          <p:nvPr/>
-        </p:nvSpPr>
-        <p:spPr>
-          <a:xfrm>
             <a:off x="640080" y="566928"/>
             <a:ext cx="10058400" cy="530352"/>
           </a:xfrm>
@@ -7570,7 +7270,7 @@
       </p:sp>
       <p:sp>
         <p:nvSpPr>
-          <p:cNvPr id="5" name="Rectangle 4"/>
+          <p:cNvPr id="4" name="Rectangle 3"/>
           <p:cNvSpPr/>
           <p:nvPr/>
         </p:nvSpPr>
@@ -7619,7 +7319,7 @@
       </p:sp>
       <p:sp>
         <p:nvSpPr>
-          <p:cNvPr id="6" name="Rectangle 5"/>
+          <p:cNvPr id="5" name="Rectangle 4"/>
           <p:cNvSpPr/>
           <p:nvPr/>
         </p:nvSpPr>
@@ -7668,7 +7368,7 @@
       </p:sp>
       <p:sp>
         <p:nvSpPr>
-          <p:cNvPr id="7" name="TextBox 6"/>
+          <p:cNvPr id="6" name="TextBox 5"/>
           <p:cNvSpPr txBox="1"/>
           <p:nvPr/>
         </p:nvSpPr>
@@ -7710,7 +7410,7 @@
       </p:sp>
       <p:sp>
         <p:nvSpPr>
-          <p:cNvPr id="8" name="TextBox 7"/>
+          <p:cNvPr id="7" name="TextBox 6"/>
           <p:cNvSpPr txBox="1"/>
           <p:nvPr/>
         </p:nvSpPr>
@@ -7752,7 +7452,7 @@
       </p:sp>
       <p:graphicFrame>
         <p:nvGraphicFramePr>
-          <p:cNvPr id="9" name="Chart 8"/>
+          <p:cNvPr id="8" name="Chart 7"/>
           <p:cNvGraphicFramePr>
             <a:graphicFrameLocks noGrp="1"/>
           </p:cNvGraphicFramePr>
@@ -7770,7 +7470,7 @@
       </p:graphicFrame>
       <p:sp>
         <p:nvSpPr>
-          <p:cNvPr id="10" name="Rectangle 9"/>
+          <p:cNvPr id="9" name="Rectangle 8"/>
           <p:cNvSpPr/>
           <p:nvPr/>
         </p:nvSpPr>
@@ -7819,7 +7519,7 @@
       </p:sp>
       <p:sp>
         <p:nvSpPr>
-          <p:cNvPr id="11" name="TextBox 10"/>
+          <p:cNvPr id="10" name="TextBox 9"/>
           <p:cNvSpPr txBox="1"/>
           <p:nvPr/>
         </p:nvSpPr>
@@ -7861,7 +7561,7 @@
       </p:sp>
       <p:sp>
         <p:nvSpPr>
-          <p:cNvPr id="12" name="TextBox 11"/>
+          <p:cNvPr id="11" name="TextBox 10"/>
           <p:cNvSpPr txBox="1"/>
           <p:nvPr/>
         </p:nvSpPr>
@@ -7903,7 +7603,7 @@
       </p:sp>
       <p:sp>
         <p:nvSpPr>
-          <p:cNvPr id="13" name="TextBox 12"/>
+          <p:cNvPr id="12" name="TextBox 11"/>
           <p:cNvSpPr txBox="1"/>
           <p:nvPr/>
         </p:nvSpPr>
@@ -8018,48 +7718,6 @@
         </p:nvSpPr>
         <p:spPr>
           <a:xfrm>
-            <a:off x="5897880" y="310896"/>
-            <a:ext cx="4800600" cy="256032"/>
-          </a:xfrm>
-          <a:prstGeom prst="rect">
-            <a:avLst/>
-          </a:prstGeom>
-          <a:noFill/>
-        </p:spPr>
-        <p:txBody>
-          <a:bodyPr wrap="none" lIns="9144" rIns="9144" tIns="9144" bIns="9144" anchor="t">
-            <a:spAutoFit/>
-          </a:bodyPr>
-          <a:lstStyle/>
-          <a:p>
-            <a:pPr algn="r">
-              <a:spcAft>
-                <a:spcPts val="0"/>
-              </a:spcAft>
-              <a:defRPr sz="680" b="1">
-                <a:solidFill>
-                  <a:srgbClr val="4F6B00"/>
-                </a:solidFill>
-                <a:latin typeface="Inter"/>
-              </a:defRPr>
-            </a:pPr>
-            <a:r>
-              <a:rPr>
-                <a:latin typeface="Inter"/>
-              </a:rPr>
-              <a:t>Illustrative, Gradient Maintained — demo data, not the client's holdings or managers</a:t>
-            </a:r>
-          </a:p>
-        </p:txBody>
-      </p:sp>
-      <p:sp>
-        <p:nvSpPr>
-          <p:cNvPr id="4" name="TextBox 3"/>
-          <p:cNvSpPr txBox="1"/>
-          <p:nvPr/>
-        </p:nvSpPr>
-        <p:spPr>
-          <a:xfrm>
             <a:off x="640080" y="566928"/>
             <a:ext cx="10058400" cy="530352"/>
           </a:xfrm>
@@ -8096,7 +7754,7 @@
       </p:sp>
       <p:sp>
         <p:nvSpPr>
-          <p:cNvPr id="5" name="Rectangle 4"/>
+          <p:cNvPr id="4" name="Rectangle 3"/>
           <p:cNvSpPr/>
           <p:nvPr/>
         </p:nvSpPr>
@@ -8145,7 +7803,7 @@
       </p:sp>
       <p:sp>
         <p:nvSpPr>
-          <p:cNvPr id="6" name="Rectangle 5"/>
+          <p:cNvPr id="5" name="Rectangle 4"/>
           <p:cNvSpPr/>
           <p:nvPr/>
         </p:nvSpPr>
@@ -8194,7 +7852,7 @@
       </p:sp>
       <p:sp>
         <p:nvSpPr>
-          <p:cNvPr id="7" name="TextBox 6"/>
+          <p:cNvPr id="6" name="TextBox 5"/>
           <p:cNvSpPr txBox="1"/>
           <p:nvPr/>
         </p:nvSpPr>
@@ -8236,7 +7894,7 @@
       </p:sp>
       <p:sp>
         <p:nvSpPr>
-          <p:cNvPr id="8" name="TextBox 7"/>
+          <p:cNvPr id="7" name="TextBox 6"/>
           <p:cNvSpPr txBox="1"/>
           <p:nvPr/>
         </p:nvSpPr>
@@ -8278,7 +7936,7 @@
       </p:sp>
       <p:graphicFrame>
         <p:nvGraphicFramePr>
-          <p:cNvPr id="9" name="Table 8"/>
+          <p:cNvPr id="8" name="Table 7"/>
           <p:cNvGraphicFramePr>
             <a:graphicFrameLocks noGrp="1"/>
           </p:cNvGraphicFramePr>
@@ -8718,7 +8376,7 @@
       </p:graphicFrame>
       <p:sp>
         <p:nvSpPr>
-          <p:cNvPr id="10" name="TextBox 9"/>
+          <p:cNvPr id="9" name="TextBox 8"/>
           <p:cNvSpPr txBox="1"/>
           <p:nvPr/>
         </p:nvSpPr>
@@ -8760,7 +8418,7 @@
       </p:sp>
       <p:graphicFrame>
         <p:nvGraphicFramePr>
-          <p:cNvPr id="11" name="Table 10"/>
+          <p:cNvPr id="10" name="Table 9"/>
           <p:cNvGraphicFramePr>
             <a:graphicFrameLocks noGrp="1"/>
           </p:cNvGraphicFramePr>
@@ -9202,7 +8860,7 @@
       </p:graphicFrame>
       <p:sp>
         <p:nvSpPr>
-          <p:cNvPr id="12" name="TextBox 11"/>
+          <p:cNvPr id="11" name="TextBox 10"/>
           <p:cNvSpPr txBox="1"/>
           <p:nvPr/>
         </p:nvSpPr>
@@ -9244,7 +8902,7 @@
       </p:sp>
       <p:sp>
         <p:nvSpPr>
-          <p:cNvPr id="13" name="Rectangle 12"/>
+          <p:cNvPr id="12" name="Rectangle 11"/>
           <p:cNvSpPr/>
           <p:nvPr/>
         </p:nvSpPr>
@@ -9293,7 +8951,7 @@
       </p:sp>
       <p:sp>
         <p:nvSpPr>
-          <p:cNvPr id="14" name="TextBox 13"/>
+          <p:cNvPr id="13" name="TextBox 12"/>
           <p:cNvSpPr txBox="1"/>
           <p:nvPr/>
         </p:nvSpPr>
@@ -9335,7 +8993,7 @@
       </p:sp>
       <p:sp>
         <p:nvSpPr>
-          <p:cNvPr id="15" name="TextBox 14"/>
+          <p:cNvPr id="14" name="TextBox 13"/>
           <p:cNvSpPr txBox="1"/>
           <p:nvPr/>
         </p:nvSpPr>
@@ -9377,7 +9035,7 @@
       </p:sp>
       <p:sp>
         <p:nvSpPr>
-          <p:cNvPr id="16" name="TextBox 15"/>
+          <p:cNvPr id="15" name="TextBox 14"/>
           <p:cNvSpPr txBox="1"/>
           <p:nvPr/>
         </p:nvSpPr>
@@ -9492,48 +9150,6 @@
         </p:nvSpPr>
         <p:spPr>
           <a:xfrm>
-            <a:off x="5897880" y="310896"/>
-            <a:ext cx="4800600" cy="256032"/>
-          </a:xfrm>
-          <a:prstGeom prst="rect">
-            <a:avLst/>
-          </a:prstGeom>
-          <a:noFill/>
-        </p:spPr>
-        <p:txBody>
-          <a:bodyPr wrap="none" lIns="9144" rIns="9144" tIns="9144" bIns="9144" anchor="t">
-            <a:spAutoFit/>
-          </a:bodyPr>
-          <a:lstStyle/>
-          <a:p>
-            <a:pPr algn="r">
-              <a:spcAft>
-                <a:spcPts val="0"/>
-              </a:spcAft>
-              <a:defRPr sz="680" b="1">
-                <a:solidFill>
-                  <a:srgbClr val="4F6B00"/>
-                </a:solidFill>
-                <a:latin typeface="Inter"/>
-              </a:defRPr>
-            </a:pPr>
-            <a:r>
-              <a:rPr>
-                <a:latin typeface="Inter"/>
-              </a:rPr>
-              <a:t>Illustrative, Gradient Maintained — demo data, not the client's holdings or managers</a:t>
-            </a:r>
-          </a:p>
-        </p:txBody>
-      </p:sp>
-      <p:sp>
-        <p:nvSpPr>
-          <p:cNvPr id="4" name="TextBox 3"/>
-          <p:cNvSpPr txBox="1"/>
-          <p:nvPr/>
-        </p:nvSpPr>
-        <p:spPr>
-          <a:xfrm>
             <a:off x="640080" y="566928"/>
             <a:ext cx="10058400" cy="530352"/>
           </a:xfrm>
@@ -9570,7 +9186,7 @@
       </p:sp>
       <p:sp>
         <p:nvSpPr>
-          <p:cNvPr id="5" name="Rectangle 4"/>
+          <p:cNvPr id="4" name="Rectangle 3"/>
           <p:cNvSpPr/>
           <p:nvPr/>
         </p:nvSpPr>
@@ -9619,7 +9235,7 @@
       </p:sp>
       <p:sp>
         <p:nvSpPr>
-          <p:cNvPr id="6" name="Rectangle 5"/>
+          <p:cNvPr id="5" name="Rectangle 4"/>
           <p:cNvSpPr/>
           <p:nvPr/>
         </p:nvSpPr>
@@ -9668,7 +9284,7 @@
       </p:sp>
       <p:sp>
         <p:nvSpPr>
-          <p:cNvPr id="7" name="TextBox 6"/>
+          <p:cNvPr id="6" name="TextBox 5"/>
           <p:cNvSpPr txBox="1"/>
           <p:nvPr/>
         </p:nvSpPr>
@@ -9710,7 +9326,7 @@
       </p:sp>
       <p:graphicFrame>
         <p:nvGraphicFramePr>
-          <p:cNvPr id="8" name="Table 7"/>
+          <p:cNvPr id="7" name="Table 6"/>
           <p:cNvGraphicFramePr>
             <a:graphicFrameLocks noGrp="1"/>
           </p:cNvGraphicFramePr>
@@ -9960,7 +9576,7 @@
       </p:graphicFrame>
       <p:sp>
         <p:nvSpPr>
-          <p:cNvPr id="9" name="Rectangle 8"/>
+          <p:cNvPr id="8" name="Rectangle 7"/>
           <p:cNvSpPr/>
           <p:nvPr/>
         </p:nvSpPr>
@@ -10009,7 +9625,7 @@
       </p:sp>
       <p:sp>
         <p:nvSpPr>
-          <p:cNvPr id="10" name="TextBox 9"/>
+          <p:cNvPr id="9" name="TextBox 8"/>
           <p:cNvSpPr txBox="1"/>
           <p:nvPr/>
         </p:nvSpPr>
@@ -10051,7 +9667,7 @@
       </p:sp>
       <p:sp>
         <p:nvSpPr>
-          <p:cNvPr id="11" name="TextBox 10"/>
+          <p:cNvPr id="10" name="TextBox 9"/>
           <p:cNvSpPr txBox="1"/>
           <p:nvPr/>
         </p:nvSpPr>
@@ -10093,7 +9709,7 @@
       </p:sp>
       <p:sp>
         <p:nvSpPr>
-          <p:cNvPr id="12" name="TextBox 11"/>
+          <p:cNvPr id="11" name="TextBox 10"/>
           <p:cNvSpPr txBox="1"/>
           <p:nvPr/>
         </p:nvSpPr>
@@ -10209,7 +9825,7 @@
         <p:spPr>
           <a:xfrm>
             <a:off x="640080" y="329184"/>
-            <a:ext cx="5303520" cy="182880"/>
+            <a:ext cx="9875520" cy="182880"/>
           </a:xfrm>
           <a:prstGeom prst="rect">
             <a:avLst/>
@@ -10250,48 +9866,6 @@
         </p:nvSpPr>
         <p:spPr>
           <a:xfrm>
-            <a:off x="5897880" y="310896"/>
-            <a:ext cx="4800600" cy="256032"/>
-          </a:xfrm>
-          <a:prstGeom prst="rect">
-            <a:avLst/>
-          </a:prstGeom>
-          <a:noFill/>
-        </p:spPr>
-        <p:txBody>
-          <a:bodyPr wrap="none" lIns="9144" rIns="9144" tIns="9144" bIns="9144" anchor="t">
-            <a:spAutoFit/>
-          </a:bodyPr>
-          <a:lstStyle/>
-          <a:p>
-            <a:pPr algn="r">
-              <a:spcAft>
-                <a:spcPts val="0"/>
-              </a:spcAft>
-              <a:defRPr sz="680" b="1">
-                <a:solidFill>
-                  <a:srgbClr val="4F6B00"/>
-                </a:solidFill>
-                <a:latin typeface="Inter"/>
-              </a:defRPr>
-            </a:pPr>
-            <a:r>
-              <a:rPr>
-                <a:latin typeface="Inter"/>
-              </a:rPr>
-              <a:t>Illustrative, Gradient Maintained — demo data, not the client's holdings or managers</a:t>
-            </a:r>
-          </a:p>
-        </p:txBody>
-      </p:sp>
-      <p:sp>
-        <p:nvSpPr>
-          <p:cNvPr id="5" name="TextBox 4"/>
-          <p:cNvSpPr txBox="1"/>
-          <p:nvPr/>
-        </p:nvSpPr>
-        <p:spPr>
-          <a:xfrm>
             <a:off x="640080" y="566928"/>
             <a:ext cx="10058400" cy="530352"/>
           </a:xfrm>
@@ -10328,7 +9902,7 @@
       </p:sp>
       <p:sp>
         <p:nvSpPr>
-          <p:cNvPr id="6" name="Rectangle 5"/>
+          <p:cNvPr id="5" name="Rectangle 4"/>
           <p:cNvSpPr/>
           <p:nvPr/>
         </p:nvSpPr>
@@ -10377,7 +9951,7 @@
       </p:sp>
       <p:sp>
         <p:nvSpPr>
-          <p:cNvPr id="7" name="Rectangle 6"/>
+          <p:cNvPr id="6" name="Rectangle 5"/>
           <p:cNvSpPr/>
           <p:nvPr/>
         </p:nvSpPr>
@@ -10426,7 +10000,7 @@
       </p:sp>
       <p:sp>
         <p:nvSpPr>
-          <p:cNvPr id="8" name="TextBox 7"/>
+          <p:cNvPr id="7" name="TextBox 6"/>
           <p:cNvSpPr txBox="1"/>
           <p:nvPr/>
         </p:nvSpPr>
@@ -10468,7 +10042,7 @@
       </p:sp>
       <p:sp>
         <p:nvSpPr>
-          <p:cNvPr id="9" name="TextBox 8"/>
+          <p:cNvPr id="8" name="TextBox 7"/>
           <p:cNvSpPr txBox="1"/>
           <p:nvPr/>
         </p:nvSpPr>
@@ -10510,7 +10084,7 @@
       </p:sp>
       <p:sp>
         <p:nvSpPr>
-          <p:cNvPr id="10" name="Rectangle 9"/>
+          <p:cNvPr id="9" name="Rectangle 8"/>
           <p:cNvSpPr/>
           <p:nvPr/>
         </p:nvSpPr>
@@ -10559,7 +10133,7 @@
       </p:sp>
       <p:sp>
         <p:nvSpPr>
-          <p:cNvPr id="11" name="Rectangle 10"/>
+          <p:cNvPr id="10" name="Rectangle 9"/>
           <p:cNvSpPr/>
           <p:nvPr/>
         </p:nvSpPr>
@@ -10608,7 +10182,7 @@
       </p:sp>
       <p:sp>
         <p:nvSpPr>
-          <p:cNvPr id="12" name="TextBox 11"/>
+          <p:cNvPr id="11" name="TextBox 10"/>
           <p:cNvSpPr txBox="1"/>
           <p:nvPr/>
         </p:nvSpPr>
@@ -10650,7 +10224,7 @@
       </p:sp>
       <p:sp>
         <p:nvSpPr>
-          <p:cNvPr id="13" name="TextBox 12"/>
+          <p:cNvPr id="12" name="TextBox 11"/>
           <p:cNvSpPr txBox="1"/>
           <p:nvPr/>
         </p:nvSpPr>
@@ -10692,7 +10266,7 @@
       </p:sp>
       <p:sp>
         <p:nvSpPr>
-          <p:cNvPr id="14" name="TextBox 13"/>
+          <p:cNvPr id="13" name="TextBox 12"/>
           <p:cNvSpPr txBox="1"/>
           <p:nvPr/>
         </p:nvSpPr>
@@ -10734,7 +10308,7 @@
       </p:sp>
       <p:sp>
         <p:nvSpPr>
-          <p:cNvPr id="15" name="Rectangle 14"/>
+          <p:cNvPr id="14" name="Rectangle 13"/>
           <p:cNvSpPr/>
           <p:nvPr/>
         </p:nvSpPr>
@@ -10783,7 +10357,7 @@
       </p:sp>
       <p:sp>
         <p:nvSpPr>
-          <p:cNvPr id="16" name="Rectangle 15"/>
+          <p:cNvPr id="15" name="Rectangle 14"/>
           <p:cNvSpPr/>
           <p:nvPr/>
         </p:nvSpPr>
@@ -10832,7 +10406,7 @@
       </p:sp>
       <p:sp>
         <p:nvSpPr>
-          <p:cNvPr id="17" name="TextBox 16"/>
+          <p:cNvPr id="16" name="TextBox 15"/>
           <p:cNvSpPr txBox="1"/>
           <p:nvPr/>
         </p:nvSpPr>
@@ -10874,7 +10448,7 @@
       </p:sp>
       <p:sp>
         <p:nvSpPr>
-          <p:cNvPr id="18" name="TextBox 17"/>
+          <p:cNvPr id="17" name="TextBox 16"/>
           <p:cNvSpPr txBox="1"/>
           <p:nvPr/>
         </p:nvSpPr>
@@ -10916,7 +10490,7 @@
       </p:sp>
       <p:sp>
         <p:nvSpPr>
-          <p:cNvPr id="19" name="TextBox 18"/>
+          <p:cNvPr id="18" name="TextBox 17"/>
           <p:cNvSpPr txBox="1"/>
           <p:nvPr/>
         </p:nvSpPr>
@@ -10958,7 +10532,7 @@
       </p:sp>
       <p:sp>
         <p:nvSpPr>
-          <p:cNvPr id="20" name="Rectangle 19"/>
+          <p:cNvPr id="19" name="Rectangle 18"/>
           <p:cNvSpPr/>
           <p:nvPr/>
         </p:nvSpPr>
@@ -11007,7 +10581,7 @@
       </p:sp>
       <p:sp>
         <p:nvSpPr>
-          <p:cNvPr id="21" name="Rectangle 20"/>
+          <p:cNvPr id="20" name="Rectangle 19"/>
           <p:cNvSpPr/>
           <p:nvPr/>
         </p:nvSpPr>
@@ -11056,7 +10630,7 @@
       </p:sp>
       <p:sp>
         <p:nvSpPr>
-          <p:cNvPr id="22" name="TextBox 21"/>
+          <p:cNvPr id="21" name="TextBox 20"/>
           <p:cNvSpPr txBox="1"/>
           <p:nvPr/>
         </p:nvSpPr>
@@ -11098,7 +10672,7 @@
       </p:sp>
       <p:sp>
         <p:nvSpPr>
-          <p:cNvPr id="23" name="TextBox 22"/>
+          <p:cNvPr id="22" name="TextBox 21"/>
           <p:cNvSpPr txBox="1"/>
           <p:nvPr/>
         </p:nvSpPr>
@@ -11140,7 +10714,7 @@
       </p:sp>
       <p:sp>
         <p:nvSpPr>
-          <p:cNvPr id="24" name="TextBox 23"/>
+          <p:cNvPr id="23" name="TextBox 22"/>
           <p:cNvSpPr txBox="1"/>
           <p:nvPr/>
         </p:nvSpPr>
@@ -11182,7 +10756,7 @@
       </p:sp>
       <p:sp>
         <p:nvSpPr>
-          <p:cNvPr id="25" name="Rectangle 24"/>
+          <p:cNvPr id="24" name="Rectangle 23"/>
           <p:cNvSpPr/>
           <p:nvPr/>
         </p:nvSpPr>
@@ -11231,7 +10805,7 @@
       </p:sp>
       <p:sp>
         <p:nvSpPr>
-          <p:cNvPr id="26" name="Rectangle 25"/>
+          <p:cNvPr id="25" name="Rectangle 24"/>
           <p:cNvSpPr/>
           <p:nvPr/>
         </p:nvSpPr>
@@ -11280,7 +10854,7 @@
       </p:sp>
       <p:sp>
         <p:nvSpPr>
-          <p:cNvPr id="27" name="TextBox 26"/>
+          <p:cNvPr id="26" name="TextBox 25"/>
           <p:cNvSpPr txBox="1"/>
           <p:nvPr/>
         </p:nvSpPr>
@@ -11322,7 +10896,7 @@
       </p:sp>
       <p:sp>
         <p:nvSpPr>
-          <p:cNvPr id="28" name="TextBox 27"/>
+          <p:cNvPr id="27" name="TextBox 26"/>
           <p:cNvSpPr txBox="1"/>
           <p:nvPr/>
         </p:nvSpPr>
@@ -11364,7 +10938,7 @@
       </p:sp>
       <p:sp>
         <p:nvSpPr>
-          <p:cNvPr id="29" name="TextBox 28"/>
+          <p:cNvPr id="28" name="TextBox 27"/>
           <p:cNvSpPr txBox="1"/>
           <p:nvPr/>
         </p:nvSpPr>
@@ -11406,7 +10980,7 @@
       </p:sp>
       <p:sp>
         <p:nvSpPr>
-          <p:cNvPr id="30" name="Rectangle 29"/>
+          <p:cNvPr id="29" name="Rectangle 28"/>
           <p:cNvSpPr/>
           <p:nvPr/>
         </p:nvSpPr>
@@ -11455,7 +11029,7 @@
       </p:sp>
       <p:sp>
         <p:nvSpPr>
-          <p:cNvPr id="31" name="TextBox 30"/>
+          <p:cNvPr id="30" name="TextBox 29"/>
           <p:cNvSpPr txBox="1"/>
           <p:nvPr/>
         </p:nvSpPr>
@@ -11497,7 +11071,7 @@
       </p:sp>
       <p:sp>
         <p:nvSpPr>
-          <p:cNvPr id="32" name="TextBox 31"/>
+          <p:cNvPr id="31" name="TextBox 30"/>
           <p:cNvSpPr txBox="1"/>
           <p:nvPr/>
         </p:nvSpPr>
@@ -11539,7 +11113,7 @@
       </p:sp>
       <p:sp>
         <p:nvSpPr>
-          <p:cNvPr id="33" name="TextBox 32"/>
+          <p:cNvPr id="32" name="TextBox 31"/>
           <p:cNvSpPr txBox="1"/>
           <p:nvPr/>
         </p:nvSpPr>
@@ -11655,7 +11229,7 @@
         <p:spPr>
           <a:xfrm>
             <a:off x="640080" y="329184"/>
-            <a:ext cx="5303520" cy="182880"/>
+            <a:ext cx="9875520" cy="182880"/>
           </a:xfrm>
           <a:prstGeom prst="rect">
             <a:avLst/>
@@ -11696,48 +11270,6 @@
         </p:nvSpPr>
         <p:spPr>
           <a:xfrm>
-            <a:off x="5897880" y="310896"/>
-            <a:ext cx="4800600" cy="256032"/>
-          </a:xfrm>
-          <a:prstGeom prst="rect">
-            <a:avLst/>
-          </a:prstGeom>
-          <a:noFill/>
-        </p:spPr>
-        <p:txBody>
-          <a:bodyPr wrap="none" lIns="9144" rIns="9144" tIns="9144" bIns="9144" anchor="t">
-            <a:spAutoFit/>
-          </a:bodyPr>
-          <a:lstStyle/>
-          <a:p>
-            <a:pPr algn="r">
-              <a:spcAft>
-                <a:spcPts val="0"/>
-              </a:spcAft>
-              <a:defRPr sz="680" b="1">
-                <a:solidFill>
-                  <a:srgbClr val="4F6B00"/>
-                </a:solidFill>
-                <a:latin typeface="Inter"/>
-              </a:defRPr>
-            </a:pPr>
-            <a:r>
-              <a:rPr>
-                <a:latin typeface="Inter"/>
-              </a:rPr>
-              <a:t>Illustrative, Gradient Maintained — demo data, not the client's holdings or managers</a:t>
-            </a:r>
-          </a:p>
-        </p:txBody>
-      </p:sp>
-      <p:sp>
-        <p:nvSpPr>
-          <p:cNvPr id="5" name="TextBox 4"/>
-          <p:cNvSpPr txBox="1"/>
-          <p:nvPr/>
-        </p:nvSpPr>
-        <p:spPr>
-          <a:xfrm>
             <a:off x="640080" y="566928"/>
             <a:ext cx="10058400" cy="530352"/>
           </a:xfrm>
@@ -11774,7 +11306,7 @@
       </p:sp>
       <p:sp>
         <p:nvSpPr>
-          <p:cNvPr id="6" name="Rectangle 5"/>
+          <p:cNvPr id="5" name="Rectangle 4"/>
           <p:cNvSpPr/>
           <p:nvPr/>
         </p:nvSpPr>
@@ -11823,7 +11355,7 @@
       </p:sp>
       <p:sp>
         <p:nvSpPr>
-          <p:cNvPr id="7" name="Rectangle 6"/>
+          <p:cNvPr id="6" name="Rectangle 5"/>
           <p:cNvSpPr/>
           <p:nvPr/>
         </p:nvSpPr>
@@ -11872,7 +11404,7 @@
       </p:sp>
       <p:sp>
         <p:nvSpPr>
-          <p:cNvPr id="8" name="TextBox 7"/>
+          <p:cNvPr id="7" name="TextBox 6"/>
           <p:cNvSpPr txBox="1"/>
           <p:nvPr/>
         </p:nvSpPr>
@@ -11914,7 +11446,7 @@
       </p:sp>
       <p:sp>
         <p:nvSpPr>
-          <p:cNvPr id="9" name="TextBox 8"/>
+          <p:cNvPr id="8" name="TextBox 7"/>
           <p:cNvSpPr txBox="1"/>
           <p:nvPr/>
         </p:nvSpPr>
@@ -11956,7 +11488,7 @@
       </p:sp>
       <p:graphicFrame>
         <p:nvGraphicFramePr>
-          <p:cNvPr id="10" name="Chart 9"/>
+          <p:cNvPr id="9" name="Chart 8"/>
           <p:cNvGraphicFramePr>
             <a:graphicFrameLocks noGrp="1"/>
           </p:cNvGraphicFramePr>
@@ -11974,7 +11506,7 @@
       </p:graphicFrame>
       <p:sp>
         <p:nvSpPr>
-          <p:cNvPr id="11" name="Rectangle 10"/>
+          <p:cNvPr id="10" name="Rectangle 9"/>
           <p:cNvSpPr/>
           <p:nvPr/>
         </p:nvSpPr>
@@ -12023,7 +11555,7 @@
       </p:sp>
       <p:sp>
         <p:nvSpPr>
-          <p:cNvPr id="12" name="TextBox 11"/>
+          <p:cNvPr id="11" name="TextBox 10"/>
           <p:cNvSpPr txBox="1"/>
           <p:nvPr/>
         </p:nvSpPr>
@@ -12065,7 +11597,7 @@
       </p:sp>
       <p:sp>
         <p:nvSpPr>
-          <p:cNvPr id="13" name="TextBox 12"/>
+          <p:cNvPr id="12" name="TextBox 11"/>
           <p:cNvSpPr txBox="1"/>
           <p:nvPr/>
         </p:nvSpPr>
@@ -12107,7 +11639,7 @@
       </p:sp>
       <p:sp>
         <p:nvSpPr>
-          <p:cNvPr id="14" name="TextBox 13"/>
+          <p:cNvPr id="13" name="TextBox 12"/>
           <p:cNvSpPr txBox="1"/>
           <p:nvPr/>
         </p:nvSpPr>
@@ -12223,7 +11755,7 @@
         <p:spPr>
           <a:xfrm>
             <a:off x="640080" y="329184"/>
-            <a:ext cx="5303520" cy="182880"/>
+            <a:ext cx="9875520" cy="182880"/>
           </a:xfrm>
           <a:prstGeom prst="rect">
             <a:avLst/>
@@ -12264,48 +11796,6 @@
         </p:nvSpPr>
         <p:spPr>
           <a:xfrm>
-            <a:off x="5897880" y="310896"/>
-            <a:ext cx="4800600" cy="256032"/>
-          </a:xfrm>
-          <a:prstGeom prst="rect">
-            <a:avLst/>
-          </a:prstGeom>
-          <a:noFill/>
-        </p:spPr>
-        <p:txBody>
-          <a:bodyPr wrap="none" lIns="9144" rIns="9144" tIns="9144" bIns="9144" anchor="t">
-            <a:spAutoFit/>
-          </a:bodyPr>
-          <a:lstStyle/>
-          <a:p>
-            <a:pPr algn="r">
-              <a:spcAft>
-                <a:spcPts val="0"/>
-              </a:spcAft>
-              <a:defRPr sz="680" b="1">
-                <a:solidFill>
-                  <a:srgbClr val="4F6B00"/>
-                </a:solidFill>
-                <a:latin typeface="Inter"/>
-              </a:defRPr>
-            </a:pPr>
-            <a:r>
-              <a:rPr>
-                <a:latin typeface="Inter"/>
-              </a:rPr>
-              <a:t>Illustrative, Gradient Maintained — demo data, not the client's holdings or managers</a:t>
-            </a:r>
-          </a:p>
-        </p:txBody>
-      </p:sp>
-      <p:sp>
-        <p:nvSpPr>
-          <p:cNvPr id="5" name="TextBox 4"/>
-          <p:cNvSpPr txBox="1"/>
-          <p:nvPr/>
-        </p:nvSpPr>
-        <p:spPr>
-          <a:xfrm>
             <a:off x="640080" y="566928"/>
             <a:ext cx="10058400" cy="530352"/>
           </a:xfrm>
@@ -12342,7 +11832,7 @@
       </p:sp>
       <p:sp>
         <p:nvSpPr>
-          <p:cNvPr id="6" name="Rectangle 5"/>
+          <p:cNvPr id="5" name="Rectangle 4"/>
           <p:cNvSpPr/>
           <p:nvPr/>
         </p:nvSpPr>
@@ -12391,7 +11881,7 @@
       </p:sp>
       <p:sp>
         <p:nvSpPr>
-          <p:cNvPr id="7" name="Rectangle 6"/>
+          <p:cNvPr id="6" name="Rectangle 5"/>
           <p:cNvSpPr/>
           <p:nvPr/>
         </p:nvSpPr>
@@ -12440,7 +11930,7 @@
       </p:sp>
       <p:sp>
         <p:nvSpPr>
-          <p:cNvPr id="8" name="TextBox 7"/>
+          <p:cNvPr id="7" name="TextBox 6"/>
           <p:cNvSpPr txBox="1"/>
           <p:nvPr/>
         </p:nvSpPr>
@@ -12482,7 +11972,7 @@
       </p:sp>
       <p:sp>
         <p:nvSpPr>
-          <p:cNvPr id="9" name="TextBox 8"/>
+          <p:cNvPr id="8" name="TextBox 7"/>
           <p:cNvSpPr txBox="1"/>
           <p:nvPr/>
         </p:nvSpPr>
@@ -12524,7 +12014,7 @@
       </p:sp>
       <p:graphicFrame>
         <p:nvGraphicFramePr>
-          <p:cNvPr id="10" name="Table 9"/>
+          <p:cNvPr id="9" name="Table 8"/>
           <p:cNvGraphicFramePr>
             <a:graphicFrameLocks noGrp="1"/>
           </p:cNvGraphicFramePr>
@@ -13101,7 +12591,7 @@
       </p:graphicFrame>
       <p:sp>
         <p:nvSpPr>
-          <p:cNvPr id="11" name="Rectangle 10"/>
+          <p:cNvPr id="10" name="Rectangle 9"/>
           <p:cNvSpPr/>
           <p:nvPr/>
         </p:nvSpPr>
@@ -13150,7 +12640,7 @@
       </p:sp>
       <p:sp>
         <p:nvSpPr>
-          <p:cNvPr id="12" name="Rectangle 11"/>
+          <p:cNvPr id="11" name="Rectangle 10"/>
           <p:cNvSpPr/>
           <p:nvPr/>
         </p:nvSpPr>
@@ -13199,7 +12689,7 @@
       </p:sp>
       <p:sp>
         <p:nvSpPr>
-          <p:cNvPr id="13" name="TextBox 12"/>
+          <p:cNvPr id="12" name="TextBox 11"/>
           <p:cNvSpPr txBox="1"/>
           <p:nvPr/>
         </p:nvSpPr>
@@ -13241,7 +12731,7 @@
       </p:sp>
       <p:sp>
         <p:nvSpPr>
-          <p:cNvPr id="14" name="TextBox 13"/>
+          <p:cNvPr id="13" name="TextBox 12"/>
           <p:cNvSpPr txBox="1"/>
           <p:nvPr/>
         </p:nvSpPr>
@@ -13283,7 +12773,7 @@
       </p:sp>
       <p:sp>
         <p:nvSpPr>
-          <p:cNvPr id="15" name="TextBox 14"/>
+          <p:cNvPr id="14" name="TextBox 13"/>
           <p:cNvSpPr txBox="1"/>
           <p:nvPr/>
         </p:nvSpPr>
@@ -13325,7 +12815,7 @@
       </p:sp>
       <p:sp>
         <p:nvSpPr>
-          <p:cNvPr id="16" name="Rectangle 15"/>
+          <p:cNvPr id="15" name="Rectangle 14"/>
           <p:cNvSpPr/>
           <p:nvPr/>
         </p:nvSpPr>
@@ -13374,7 +12864,7 @@
       </p:sp>
       <p:sp>
         <p:nvSpPr>
-          <p:cNvPr id="17" name="TextBox 16"/>
+          <p:cNvPr id="16" name="TextBox 15"/>
           <p:cNvSpPr txBox="1"/>
           <p:nvPr/>
         </p:nvSpPr>
@@ -13416,7 +12906,7 @@
       </p:sp>
       <p:sp>
         <p:nvSpPr>
-          <p:cNvPr id="18" name="TextBox 17"/>
+          <p:cNvPr id="17" name="TextBox 16"/>
           <p:cNvSpPr txBox="1"/>
           <p:nvPr/>
         </p:nvSpPr>
@@ -13458,7 +12948,7 @@
       </p:sp>
       <p:sp>
         <p:nvSpPr>
-          <p:cNvPr id="19" name="TextBox 18"/>
+          <p:cNvPr id="18" name="TextBox 17"/>
           <p:cNvSpPr txBox="1"/>
           <p:nvPr/>
         </p:nvSpPr>
@@ -13574,7 +13064,7 @@
         <p:spPr>
           <a:xfrm>
             <a:off x="640080" y="329184"/>
-            <a:ext cx="5303520" cy="182880"/>
+            <a:ext cx="9875520" cy="182880"/>
           </a:xfrm>
           <a:prstGeom prst="rect">
             <a:avLst/>
@@ -13615,48 +13105,6 @@
         </p:nvSpPr>
         <p:spPr>
           <a:xfrm>
-            <a:off x="5897880" y="310896"/>
-            <a:ext cx="4800600" cy="256032"/>
-          </a:xfrm>
-          <a:prstGeom prst="rect">
-            <a:avLst/>
-          </a:prstGeom>
-          <a:noFill/>
-        </p:spPr>
-        <p:txBody>
-          <a:bodyPr wrap="none" lIns="9144" rIns="9144" tIns="9144" bIns="9144" anchor="t">
-            <a:spAutoFit/>
-          </a:bodyPr>
-          <a:lstStyle/>
-          <a:p>
-            <a:pPr algn="r">
-              <a:spcAft>
-                <a:spcPts val="0"/>
-              </a:spcAft>
-              <a:defRPr sz="680" b="1">
-                <a:solidFill>
-                  <a:srgbClr val="4F6B00"/>
-                </a:solidFill>
-                <a:latin typeface="Inter"/>
-              </a:defRPr>
-            </a:pPr>
-            <a:r>
-              <a:rPr>
-                <a:latin typeface="Inter"/>
-              </a:rPr>
-              <a:t>Illustrative, Gradient Maintained — demo data, not the client's holdings or managers</a:t>
-            </a:r>
-          </a:p>
-        </p:txBody>
-      </p:sp>
-      <p:sp>
-        <p:nvSpPr>
-          <p:cNvPr id="5" name="TextBox 4"/>
-          <p:cNvSpPr txBox="1"/>
-          <p:nvPr/>
-        </p:nvSpPr>
-        <p:spPr>
-          <a:xfrm>
             <a:off x="640080" y="566928"/>
             <a:ext cx="10058400" cy="530352"/>
           </a:xfrm>
@@ -13693,7 +13141,7 @@
       </p:sp>
       <p:sp>
         <p:nvSpPr>
-          <p:cNvPr id="6" name="Rectangle 5"/>
+          <p:cNvPr id="5" name="Rectangle 4"/>
           <p:cNvSpPr/>
           <p:nvPr/>
         </p:nvSpPr>
@@ -13742,7 +13190,7 @@
       </p:sp>
       <p:sp>
         <p:nvSpPr>
-          <p:cNvPr id="7" name="Rectangle 6"/>
+          <p:cNvPr id="6" name="Rectangle 5"/>
           <p:cNvSpPr/>
           <p:nvPr/>
         </p:nvSpPr>
@@ -13791,7 +13239,7 @@
       </p:sp>
       <p:sp>
         <p:nvSpPr>
-          <p:cNvPr id="8" name="TextBox 7"/>
+          <p:cNvPr id="7" name="TextBox 6"/>
           <p:cNvSpPr txBox="1"/>
           <p:nvPr/>
         </p:nvSpPr>
@@ -13833,7 +13281,7 @@
       </p:sp>
       <p:sp>
         <p:nvSpPr>
-          <p:cNvPr id="9" name="TextBox 8"/>
+          <p:cNvPr id="8" name="TextBox 7"/>
           <p:cNvSpPr txBox="1"/>
           <p:nvPr/>
         </p:nvSpPr>
@@ -13875,7 +13323,7 @@
       </p:sp>
       <p:graphicFrame>
         <p:nvGraphicFramePr>
-          <p:cNvPr id="10" name="Chart 9"/>
+          <p:cNvPr id="9" name="Chart 8"/>
           <p:cNvGraphicFramePr>
             <a:graphicFrameLocks noGrp="1"/>
           </p:cNvGraphicFramePr>
@@ -13893,7 +13341,7 @@
       </p:graphicFrame>
       <p:sp>
         <p:nvSpPr>
-          <p:cNvPr id="11" name="Rectangle 10"/>
+          <p:cNvPr id="10" name="Rectangle 9"/>
           <p:cNvSpPr/>
           <p:nvPr/>
         </p:nvSpPr>
@@ -13942,7 +13390,7 @@
       </p:sp>
       <p:sp>
         <p:nvSpPr>
-          <p:cNvPr id="12" name="TextBox 11"/>
+          <p:cNvPr id="11" name="TextBox 10"/>
           <p:cNvSpPr txBox="1"/>
           <p:nvPr/>
         </p:nvSpPr>
@@ -13984,7 +13432,7 @@
       </p:sp>
       <p:sp>
         <p:nvSpPr>
-          <p:cNvPr id="13" name="TextBox 12"/>
+          <p:cNvPr id="12" name="TextBox 11"/>
           <p:cNvSpPr txBox="1"/>
           <p:nvPr/>
         </p:nvSpPr>
@@ -14026,7 +13474,7 @@
       </p:sp>
       <p:sp>
         <p:nvSpPr>
-          <p:cNvPr id="14" name="TextBox 13"/>
+          <p:cNvPr id="13" name="TextBox 12"/>
           <p:cNvSpPr txBox="1"/>
           <p:nvPr/>
         </p:nvSpPr>
@@ -14142,7 +13590,7 @@
         <p:spPr>
           <a:xfrm>
             <a:off x="640080" y="329184"/>
-            <a:ext cx="5303520" cy="182880"/>
+            <a:ext cx="9875520" cy="182880"/>
           </a:xfrm>
           <a:prstGeom prst="rect">
             <a:avLst/>
@@ -14183,48 +13631,6 @@
         </p:nvSpPr>
         <p:spPr>
           <a:xfrm>
-            <a:off x="5897880" y="310896"/>
-            <a:ext cx="4800600" cy="256032"/>
-          </a:xfrm>
-          <a:prstGeom prst="rect">
-            <a:avLst/>
-          </a:prstGeom>
-          <a:noFill/>
-        </p:spPr>
-        <p:txBody>
-          <a:bodyPr wrap="none" lIns="9144" rIns="9144" tIns="9144" bIns="9144" anchor="t">
-            <a:spAutoFit/>
-          </a:bodyPr>
-          <a:lstStyle/>
-          <a:p>
-            <a:pPr algn="r">
-              <a:spcAft>
-                <a:spcPts val="0"/>
-              </a:spcAft>
-              <a:defRPr sz="680" b="1">
-                <a:solidFill>
-                  <a:srgbClr val="4F6B00"/>
-                </a:solidFill>
-                <a:latin typeface="Inter"/>
-              </a:defRPr>
-            </a:pPr>
-            <a:r>
-              <a:rPr>
-                <a:latin typeface="Inter"/>
-              </a:rPr>
-              <a:t>Illustrative, Gradient Maintained — demo data, not the client's holdings or managers</a:t>
-            </a:r>
-          </a:p>
-        </p:txBody>
-      </p:sp>
-      <p:sp>
-        <p:nvSpPr>
-          <p:cNvPr id="5" name="TextBox 4"/>
-          <p:cNvSpPr txBox="1"/>
-          <p:nvPr/>
-        </p:nvSpPr>
-        <p:spPr>
-          <a:xfrm>
             <a:off x="640080" y="566928"/>
             <a:ext cx="10058400" cy="530352"/>
           </a:xfrm>
@@ -14261,7 +13667,7 @@
       </p:sp>
       <p:sp>
         <p:nvSpPr>
-          <p:cNvPr id="6" name="Rectangle 5"/>
+          <p:cNvPr id="5" name="Rectangle 4"/>
           <p:cNvSpPr/>
           <p:nvPr/>
         </p:nvSpPr>
@@ -14310,7 +13716,7 @@
       </p:sp>
       <p:sp>
         <p:nvSpPr>
-          <p:cNvPr id="7" name="Rectangle 6"/>
+          <p:cNvPr id="6" name="Rectangle 5"/>
           <p:cNvSpPr/>
           <p:nvPr/>
         </p:nvSpPr>
@@ -14359,7 +13765,7 @@
       </p:sp>
       <p:sp>
         <p:nvSpPr>
-          <p:cNvPr id="8" name="TextBox 7"/>
+          <p:cNvPr id="7" name="TextBox 6"/>
           <p:cNvSpPr txBox="1"/>
           <p:nvPr/>
         </p:nvSpPr>
@@ -14401,7 +13807,7 @@
       </p:sp>
       <p:graphicFrame>
         <p:nvGraphicFramePr>
-          <p:cNvPr id="9" name="Table 8"/>
+          <p:cNvPr id="8" name="Table 7"/>
           <p:cNvGraphicFramePr>
             <a:graphicFrameLocks noGrp="1"/>
           </p:cNvGraphicFramePr>
@@ -14707,7 +14113,7 @@
       </p:graphicFrame>
       <p:sp>
         <p:nvSpPr>
-          <p:cNvPr id="10" name="Rectangle 9"/>
+          <p:cNvPr id="9" name="Rectangle 8"/>
           <p:cNvSpPr/>
           <p:nvPr/>
         </p:nvSpPr>
@@ -14756,7 +14162,7 @@
       </p:sp>
       <p:sp>
         <p:nvSpPr>
-          <p:cNvPr id="11" name="TextBox 10"/>
+          <p:cNvPr id="10" name="TextBox 9"/>
           <p:cNvSpPr txBox="1"/>
           <p:nvPr/>
         </p:nvSpPr>
@@ -14798,7 +14204,7 @@
       </p:sp>
       <p:sp>
         <p:nvSpPr>
-          <p:cNvPr id="12" name="TextBox 11"/>
+          <p:cNvPr id="11" name="TextBox 10"/>
           <p:cNvSpPr txBox="1"/>
           <p:nvPr/>
         </p:nvSpPr>
@@ -14840,7 +14246,7 @@
       </p:sp>
       <p:sp>
         <p:nvSpPr>
-          <p:cNvPr id="13" name="TextBox 12"/>
+          <p:cNvPr id="12" name="TextBox 11"/>
           <p:cNvSpPr txBox="1"/>
           <p:nvPr/>
         </p:nvSpPr>
@@ -14956,7 +14362,7 @@
         <p:spPr>
           <a:xfrm>
             <a:off x="640080" y="329184"/>
-            <a:ext cx="5303520" cy="182880"/>
+            <a:ext cx="9875520" cy="182880"/>
           </a:xfrm>
           <a:prstGeom prst="rect">
             <a:avLst/>
@@ -14997,48 +14403,6 @@
         </p:nvSpPr>
         <p:spPr>
           <a:xfrm>
-            <a:off x="5897880" y="310896"/>
-            <a:ext cx="4800600" cy="256032"/>
-          </a:xfrm>
-          <a:prstGeom prst="rect">
-            <a:avLst/>
-          </a:prstGeom>
-          <a:noFill/>
-        </p:spPr>
-        <p:txBody>
-          <a:bodyPr wrap="none" lIns="9144" rIns="9144" tIns="9144" bIns="9144" anchor="t">
-            <a:spAutoFit/>
-          </a:bodyPr>
-          <a:lstStyle/>
-          <a:p>
-            <a:pPr algn="r">
-              <a:spcAft>
-                <a:spcPts val="0"/>
-              </a:spcAft>
-              <a:defRPr sz="680" b="1">
-                <a:solidFill>
-                  <a:srgbClr val="4F6B00"/>
-                </a:solidFill>
-                <a:latin typeface="Inter"/>
-              </a:defRPr>
-            </a:pPr>
-            <a:r>
-              <a:rPr>
-                <a:latin typeface="Inter"/>
-              </a:rPr>
-              <a:t>Illustrative, Gradient Maintained — demo data, not the client's holdings or managers</a:t>
-            </a:r>
-          </a:p>
-        </p:txBody>
-      </p:sp>
-      <p:sp>
-        <p:nvSpPr>
-          <p:cNvPr id="5" name="TextBox 4"/>
-          <p:cNvSpPr txBox="1"/>
-          <p:nvPr/>
-        </p:nvSpPr>
-        <p:spPr>
-          <a:xfrm>
             <a:off x="640080" y="566928"/>
             <a:ext cx="10058400" cy="530352"/>
           </a:xfrm>
@@ -15075,7 +14439,7 @@
       </p:sp>
       <p:sp>
         <p:nvSpPr>
-          <p:cNvPr id="6" name="Rectangle 5"/>
+          <p:cNvPr id="5" name="Rectangle 4"/>
           <p:cNvSpPr/>
           <p:nvPr/>
         </p:nvSpPr>
@@ -15124,7 +14488,7 @@
       </p:sp>
       <p:sp>
         <p:nvSpPr>
-          <p:cNvPr id="7" name="Rectangle 6"/>
+          <p:cNvPr id="6" name="Rectangle 5"/>
           <p:cNvSpPr/>
           <p:nvPr/>
         </p:nvSpPr>
@@ -15173,7 +14537,7 @@
       </p:sp>
       <p:sp>
         <p:nvSpPr>
-          <p:cNvPr id="8" name="TextBox 7"/>
+          <p:cNvPr id="7" name="TextBox 6"/>
           <p:cNvSpPr txBox="1"/>
           <p:nvPr/>
         </p:nvSpPr>
@@ -15215,7 +14579,7 @@
       </p:sp>
       <p:sp>
         <p:nvSpPr>
-          <p:cNvPr id="9" name="TextBox 8"/>
+          <p:cNvPr id="8" name="TextBox 7"/>
           <p:cNvSpPr txBox="1"/>
           <p:nvPr/>
         </p:nvSpPr>
@@ -15257,7 +14621,7 @@
       </p:sp>
       <p:graphicFrame>
         <p:nvGraphicFramePr>
-          <p:cNvPr id="10" name="Table 9"/>
+          <p:cNvPr id="9" name="Table 8"/>
           <p:cNvGraphicFramePr>
             <a:graphicFrameLocks noGrp="1"/>
           </p:cNvGraphicFramePr>
@@ -15616,7 +14980,7 @@
       </p:graphicFrame>
       <p:sp>
         <p:nvSpPr>
-          <p:cNvPr id="11" name="Rectangle 10"/>
+          <p:cNvPr id="10" name="Rectangle 9"/>
           <p:cNvSpPr/>
           <p:nvPr/>
         </p:nvSpPr>
@@ -15665,7 +15029,7 @@
       </p:sp>
       <p:sp>
         <p:nvSpPr>
-          <p:cNvPr id="12" name="Rectangle 11"/>
+          <p:cNvPr id="11" name="Rectangle 10"/>
           <p:cNvSpPr/>
           <p:nvPr/>
         </p:nvSpPr>
@@ -15714,7 +15078,7 @@
       </p:sp>
       <p:sp>
         <p:nvSpPr>
-          <p:cNvPr id="13" name="TextBox 12"/>
+          <p:cNvPr id="12" name="TextBox 11"/>
           <p:cNvSpPr txBox="1"/>
           <p:nvPr/>
         </p:nvSpPr>
@@ -15756,7 +15120,7 @@
       </p:sp>
       <p:sp>
         <p:nvSpPr>
-          <p:cNvPr id="14" name="TextBox 13"/>
+          <p:cNvPr id="13" name="TextBox 12"/>
           <p:cNvSpPr txBox="1"/>
           <p:nvPr/>
         </p:nvSpPr>
@@ -15798,7 +15162,7 @@
       </p:sp>
       <p:sp>
         <p:nvSpPr>
-          <p:cNvPr id="15" name="Rectangle 14"/>
+          <p:cNvPr id="14" name="Rectangle 13"/>
           <p:cNvSpPr/>
           <p:nvPr/>
         </p:nvSpPr>
@@ -15847,7 +15211,7 @@
       </p:sp>
       <p:sp>
         <p:nvSpPr>
-          <p:cNvPr id="16" name="TextBox 15"/>
+          <p:cNvPr id="15" name="TextBox 14"/>
           <p:cNvSpPr txBox="1"/>
           <p:nvPr/>
         </p:nvSpPr>
@@ -15889,7 +15253,7 @@
       </p:sp>
       <p:sp>
         <p:nvSpPr>
-          <p:cNvPr id="17" name="TextBox 16"/>
+          <p:cNvPr id="16" name="TextBox 15"/>
           <p:cNvSpPr txBox="1"/>
           <p:nvPr/>
         </p:nvSpPr>
@@ -15931,7 +15295,7 @@
       </p:sp>
       <p:sp>
         <p:nvSpPr>
-          <p:cNvPr id="18" name="TextBox 17"/>
+          <p:cNvPr id="17" name="TextBox 16"/>
           <p:cNvSpPr txBox="1"/>
           <p:nvPr/>
         </p:nvSpPr>
@@ -16046,48 +15410,6 @@
         </p:nvSpPr>
         <p:spPr>
           <a:xfrm>
-            <a:off x="5897880" y="310896"/>
-            <a:ext cx="4800600" cy="256032"/>
-          </a:xfrm>
-          <a:prstGeom prst="rect">
-            <a:avLst/>
-          </a:prstGeom>
-          <a:noFill/>
-        </p:spPr>
-        <p:txBody>
-          <a:bodyPr wrap="none" lIns="9144" rIns="9144" tIns="9144" bIns="9144" anchor="t">
-            <a:spAutoFit/>
-          </a:bodyPr>
-          <a:lstStyle/>
-          <a:p>
-            <a:pPr algn="r">
-              <a:spcAft>
-                <a:spcPts val="0"/>
-              </a:spcAft>
-              <a:defRPr sz="680" b="1">
-                <a:solidFill>
-                  <a:srgbClr val="4F6B00"/>
-                </a:solidFill>
-                <a:latin typeface="Inter"/>
-              </a:defRPr>
-            </a:pPr>
-            <a:r>
-              <a:rPr>
-                <a:latin typeface="Inter"/>
-              </a:rPr>
-              <a:t>Illustrative, Gradient Maintained — demo data, not the client's holdings or managers</a:t>
-            </a:r>
-          </a:p>
-        </p:txBody>
-      </p:sp>
-      <p:sp>
-        <p:nvSpPr>
-          <p:cNvPr id="4" name="TextBox 3"/>
-          <p:cNvSpPr txBox="1"/>
-          <p:nvPr/>
-        </p:nvSpPr>
-        <p:spPr>
-          <a:xfrm>
             <a:off x="640080" y="566928"/>
             <a:ext cx="10058400" cy="530352"/>
           </a:xfrm>
@@ -16124,7 +15446,7 @@
       </p:sp>
       <p:sp>
         <p:nvSpPr>
-          <p:cNvPr id="5" name="Rectangle 4"/>
+          <p:cNvPr id="4" name="Rectangle 3"/>
           <p:cNvSpPr/>
           <p:nvPr/>
         </p:nvSpPr>
@@ -16173,7 +15495,7 @@
       </p:sp>
       <p:sp>
         <p:nvSpPr>
-          <p:cNvPr id="6" name="Rectangle 5"/>
+          <p:cNvPr id="5" name="Rectangle 4"/>
           <p:cNvSpPr/>
           <p:nvPr/>
         </p:nvSpPr>
@@ -16222,7 +15544,7 @@
       </p:sp>
       <p:sp>
         <p:nvSpPr>
-          <p:cNvPr id="7" name="TextBox 6"/>
+          <p:cNvPr id="6" name="TextBox 5"/>
           <p:cNvSpPr txBox="1"/>
           <p:nvPr/>
         </p:nvSpPr>
@@ -16264,14 +15586,105 @@
       </p:sp>
       <p:sp>
         <p:nvSpPr>
-          <p:cNvPr id="8" name="Rectangle 7"/>
+          <p:cNvPr id="7" name="Rectangle 6"/>
           <p:cNvSpPr/>
           <p:nvPr/>
         </p:nvSpPr>
         <p:spPr>
           <a:xfrm>
-            <a:off x="640080" y="1325880"/>
-            <a:ext cx="10908792" cy="2263980"/>
+            <a:off x="640080" y="1399032"/>
+            <a:ext cx="73152" cy="1031503"/>
+          </a:xfrm>
+          <a:prstGeom prst="rect">
+            <a:avLst/>
+          </a:prstGeom>
+          <a:solidFill>
+            <a:srgbClr val="F2A93B"/>
+          </a:solidFill>
+          <a:ln>
+            <a:solidFill>
+              <a:srgbClr val="F2A93B"/>
+            </a:solidFill>
+          </a:ln>
+        </p:spPr>
+        <p:style>
+          <a:lnRef idx="1">
+            <a:schemeClr val="accent1"/>
+          </a:lnRef>
+          <a:fillRef idx="3">
+            <a:schemeClr val="accent1"/>
+          </a:fillRef>
+          <a:effectRef idx="2">
+            <a:schemeClr val="accent1"/>
+          </a:effectRef>
+          <a:fontRef idx="minor">
+            <a:schemeClr val="lt1"/>
+          </a:fontRef>
+        </p:style>
+        <p:txBody>
+          <a:bodyPr rtlCol="0" anchor="ctr"/>
+          <a:lstStyle/>
+          <a:p>
+            <a:pPr algn="ctr">
+              <a:defRPr>
+                <a:latin typeface="Inter"/>
+              </a:defRPr>
+            </a:pPr>
+          </a:p>
+        </p:txBody>
+      </p:sp>
+      <p:sp>
+        <p:nvSpPr>
+          <p:cNvPr id="8" name="TextBox 7"/>
+          <p:cNvSpPr txBox="1"/>
+          <p:nvPr/>
+        </p:nvSpPr>
+        <p:spPr>
+          <a:xfrm>
+            <a:off x="896112" y="1371600"/>
+            <a:ext cx="10588752" cy="683128"/>
+          </a:xfrm>
+          <a:prstGeom prst="rect">
+            <a:avLst/>
+          </a:prstGeom>
+          <a:noFill/>
+        </p:spPr>
+        <p:txBody>
+          <a:bodyPr wrap="none" lIns="9144" rIns="9144" tIns="9144" bIns="9144" anchor="t">
+            <a:spAutoFit/>
+          </a:bodyPr>
+          <a:lstStyle/>
+          <a:p>
+            <a:pPr algn="l">
+              <a:spcAft>
+                <a:spcPts val="0"/>
+              </a:spcAft>
+              <a:defRPr sz="1800" b="1">
+                <a:solidFill>
+                  <a:srgbClr val="0D1117"/>
+                </a:solidFill>
+                <a:latin typeface="Inter"/>
+              </a:defRPr>
+            </a:pPr>
+            <a:r>
+              <a:rPr>
+                <a:latin typeface="Inter"/>
+              </a:rPr>
+              <a:t>Valuation lag and structure mix need monitoring</a:t>
+            </a:r>
+          </a:p>
+        </p:txBody>
+      </p:sp>
+      <p:sp>
+        <p:nvSpPr>
+          <p:cNvPr id="9" name="Rectangle 8"/>
+          <p:cNvSpPr/>
+          <p:nvPr/>
+        </p:nvSpPr>
+        <p:spPr>
+          <a:xfrm>
+            <a:off x="640080" y="2613415"/>
+            <a:ext cx="10908792" cy="1654451"/>
           </a:xfrm>
           <a:prstGeom prst="rect">
             <a:avLst/>
@@ -16313,14 +15726,14 @@
       </p:sp>
       <p:sp>
         <p:nvSpPr>
-          <p:cNvPr id="9" name="Rectangle 8"/>
+          <p:cNvPr id="10" name="Rectangle 9"/>
           <p:cNvSpPr/>
           <p:nvPr/>
         </p:nvSpPr>
         <p:spPr>
           <a:xfrm>
-            <a:off x="640080" y="1325880"/>
-            <a:ext cx="54864" cy="2263980"/>
+            <a:off x="640080" y="2613415"/>
+            <a:ext cx="54864" cy="1654451"/>
           </a:xfrm>
           <a:prstGeom prst="rect">
             <a:avLst/>
@@ -16362,13 +15775,13 @@
       </p:sp>
       <p:sp>
         <p:nvSpPr>
-          <p:cNvPr id="10" name="TextBox 9"/>
+          <p:cNvPr id="11" name="TextBox 10"/>
           <p:cNvSpPr txBox="1"/>
           <p:nvPr/>
         </p:nvSpPr>
         <p:spPr>
           <a:xfrm>
-            <a:off x="804671" y="1435607"/>
+            <a:off x="804671" y="2723143"/>
             <a:ext cx="10616184" cy="228600"/>
           </a:xfrm>
           <a:prstGeom prst="rect">
@@ -16404,14 +15817,14 @@
       </p:sp>
       <p:sp>
         <p:nvSpPr>
-          <p:cNvPr id="11" name="TextBox 10"/>
+          <p:cNvPr id="12" name="TextBox 11"/>
           <p:cNvSpPr txBox="1"/>
           <p:nvPr/>
         </p:nvSpPr>
         <p:spPr>
           <a:xfrm>
-            <a:off x="804671" y="1719072"/>
-            <a:ext cx="10616184" cy="1779348"/>
+            <a:off x="804671" y="3006607"/>
+            <a:ext cx="10616184" cy="1169819"/>
           </a:xfrm>
           <a:prstGeom prst="rect">
             <a:avLst/>
@@ -16446,14 +15859,14 @@
       </p:sp>
       <p:sp>
         <p:nvSpPr>
-          <p:cNvPr id="12" name="Rectangle 11"/>
+          <p:cNvPr id="13" name="Rectangle 12"/>
           <p:cNvSpPr/>
           <p:nvPr/>
         </p:nvSpPr>
         <p:spPr>
           <a:xfrm>
-            <a:off x="640080" y="3699588"/>
-            <a:ext cx="2644902" cy="2518331"/>
+            <a:off x="640080" y="4377595"/>
+            <a:ext cx="2644902" cy="1840324"/>
           </a:xfrm>
           <a:prstGeom prst="rect">
             <a:avLst/>
@@ -16495,13 +15908,13 @@
       </p:sp>
       <p:sp>
         <p:nvSpPr>
-          <p:cNvPr id="13" name="Rectangle 12"/>
+          <p:cNvPr id="14" name="Rectangle 13"/>
           <p:cNvSpPr/>
           <p:nvPr/>
         </p:nvSpPr>
         <p:spPr>
           <a:xfrm>
-            <a:off x="640080" y="3699588"/>
+            <a:off x="640080" y="4377595"/>
             <a:ext cx="2644902" cy="45720"/>
           </a:xfrm>
           <a:prstGeom prst="rect">
@@ -16544,13 +15957,13 @@
       </p:sp>
       <p:sp>
         <p:nvSpPr>
-          <p:cNvPr id="14" name="TextBox 13"/>
+          <p:cNvPr id="15" name="TextBox 14"/>
           <p:cNvSpPr txBox="1"/>
           <p:nvPr/>
         </p:nvSpPr>
         <p:spPr>
           <a:xfrm>
-            <a:off x="749808" y="3827604"/>
+            <a:off x="749808" y="4505611"/>
             <a:ext cx="2425446" cy="201168"/>
           </a:xfrm>
           <a:prstGeom prst="rect">
@@ -16586,13 +15999,13 @@
       </p:sp>
       <p:sp>
         <p:nvSpPr>
-          <p:cNvPr id="15" name="TextBox 14"/>
+          <p:cNvPr id="16" name="TextBox 15"/>
           <p:cNvSpPr txBox="1"/>
           <p:nvPr/>
         </p:nvSpPr>
         <p:spPr>
           <a:xfrm>
-            <a:off x="749808" y="4083636"/>
+            <a:off x="749808" y="4761643"/>
             <a:ext cx="2425446" cy="475488"/>
           </a:xfrm>
           <a:prstGeom prst="rect">
@@ -16628,13 +16041,13 @@
       </p:sp>
       <p:sp>
         <p:nvSpPr>
-          <p:cNvPr id="16" name="TextBox 15"/>
+          <p:cNvPr id="17" name="TextBox 16"/>
           <p:cNvSpPr txBox="1"/>
           <p:nvPr/>
         </p:nvSpPr>
         <p:spPr>
           <a:xfrm>
-            <a:off x="749808" y="5888736"/>
+            <a:off x="749808" y="5888735"/>
             <a:ext cx="2425446" cy="228600"/>
           </a:xfrm>
           <a:prstGeom prst="rect">
@@ -16670,14 +16083,14 @@
       </p:sp>
       <p:sp>
         <p:nvSpPr>
-          <p:cNvPr id="17" name="Rectangle 16"/>
+          <p:cNvPr id="18" name="Rectangle 17"/>
           <p:cNvSpPr/>
           <p:nvPr/>
         </p:nvSpPr>
         <p:spPr>
           <a:xfrm>
-            <a:off x="3394710" y="3699588"/>
-            <a:ext cx="2644902" cy="2518331"/>
+            <a:off x="3394710" y="4377595"/>
+            <a:ext cx="2644902" cy="1840324"/>
           </a:xfrm>
           <a:prstGeom prst="rect">
             <a:avLst/>
@@ -16719,13 +16132,13 @@
       </p:sp>
       <p:sp>
         <p:nvSpPr>
-          <p:cNvPr id="18" name="Rectangle 17"/>
+          <p:cNvPr id="19" name="Rectangle 18"/>
           <p:cNvSpPr/>
           <p:nvPr/>
         </p:nvSpPr>
         <p:spPr>
           <a:xfrm>
-            <a:off x="3394710" y="3699588"/>
+            <a:off x="3394710" y="4377595"/>
             <a:ext cx="2644902" cy="45720"/>
           </a:xfrm>
           <a:prstGeom prst="rect">
@@ -16768,13 +16181,13 @@
       </p:sp>
       <p:sp>
         <p:nvSpPr>
-          <p:cNvPr id="19" name="TextBox 18"/>
+          <p:cNvPr id="20" name="TextBox 19"/>
           <p:cNvSpPr txBox="1"/>
           <p:nvPr/>
         </p:nvSpPr>
         <p:spPr>
           <a:xfrm>
-            <a:off x="3504438" y="3827604"/>
+            <a:off x="3504438" y="4505611"/>
             <a:ext cx="2425446" cy="201168"/>
           </a:xfrm>
           <a:prstGeom prst="rect">
@@ -16810,13 +16223,13 @@
       </p:sp>
       <p:sp>
         <p:nvSpPr>
-          <p:cNvPr id="20" name="TextBox 19"/>
+          <p:cNvPr id="21" name="TextBox 20"/>
           <p:cNvSpPr txBox="1"/>
           <p:nvPr/>
         </p:nvSpPr>
         <p:spPr>
           <a:xfrm>
-            <a:off x="3504438" y="4083636"/>
+            <a:off x="3504438" y="4761643"/>
             <a:ext cx="2425446" cy="475488"/>
           </a:xfrm>
           <a:prstGeom prst="rect">
@@ -16852,13 +16265,13 @@
       </p:sp>
       <p:sp>
         <p:nvSpPr>
-          <p:cNvPr id="21" name="TextBox 20"/>
+          <p:cNvPr id="22" name="TextBox 21"/>
           <p:cNvSpPr txBox="1"/>
           <p:nvPr/>
         </p:nvSpPr>
         <p:spPr>
           <a:xfrm>
-            <a:off x="3504438" y="5888736"/>
+            <a:off x="3504438" y="5888735"/>
             <a:ext cx="2425446" cy="228600"/>
           </a:xfrm>
           <a:prstGeom prst="rect">
@@ -16894,14 +16307,14 @@
       </p:sp>
       <p:sp>
         <p:nvSpPr>
-          <p:cNvPr id="22" name="Rectangle 21"/>
+          <p:cNvPr id="23" name="Rectangle 22"/>
           <p:cNvSpPr/>
           <p:nvPr/>
         </p:nvSpPr>
         <p:spPr>
           <a:xfrm>
-            <a:off x="6149340" y="3699588"/>
-            <a:ext cx="2644902" cy="2518331"/>
+            <a:off x="6149340" y="4377595"/>
+            <a:ext cx="2644902" cy="1840324"/>
           </a:xfrm>
           <a:prstGeom prst="rect">
             <a:avLst/>
@@ -16943,13 +16356,13 @@
       </p:sp>
       <p:sp>
         <p:nvSpPr>
-          <p:cNvPr id="23" name="Rectangle 22"/>
+          <p:cNvPr id="24" name="Rectangle 23"/>
           <p:cNvSpPr/>
           <p:nvPr/>
         </p:nvSpPr>
         <p:spPr>
           <a:xfrm>
-            <a:off x="6149340" y="3699588"/>
+            <a:off x="6149340" y="4377595"/>
             <a:ext cx="2644902" cy="45720"/>
           </a:xfrm>
           <a:prstGeom prst="rect">
@@ -16992,13 +16405,13 @@
       </p:sp>
       <p:sp>
         <p:nvSpPr>
-          <p:cNvPr id="24" name="TextBox 23"/>
+          <p:cNvPr id="25" name="TextBox 24"/>
           <p:cNvSpPr txBox="1"/>
           <p:nvPr/>
         </p:nvSpPr>
         <p:spPr>
           <a:xfrm>
-            <a:off x="6259068" y="3827604"/>
+            <a:off x="6259068" y="4505611"/>
             <a:ext cx="2425446" cy="201168"/>
           </a:xfrm>
           <a:prstGeom prst="rect">
@@ -17034,13 +16447,13 @@
       </p:sp>
       <p:sp>
         <p:nvSpPr>
-          <p:cNvPr id="25" name="TextBox 24"/>
+          <p:cNvPr id="26" name="TextBox 25"/>
           <p:cNvSpPr txBox="1"/>
           <p:nvPr/>
         </p:nvSpPr>
         <p:spPr>
           <a:xfrm>
-            <a:off x="6259068" y="4083636"/>
+            <a:off x="6259068" y="4761643"/>
             <a:ext cx="2425446" cy="475488"/>
           </a:xfrm>
           <a:prstGeom prst="rect">
@@ -17076,13 +16489,13 @@
       </p:sp>
       <p:sp>
         <p:nvSpPr>
-          <p:cNvPr id="26" name="TextBox 25"/>
+          <p:cNvPr id="27" name="TextBox 26"/>
           <p:cNvSpPr txBox="1"/>
           <p:nvPr/>
         </p:nvSpPr>
         <p:spPr>
           <a:xfrm>
-            <a:off x="6259068" y="5888736"/>
+            <a:off x="6259068" y="5888735"/>
             <a:ext cx="2425446" cy="228600"/>
           </a:xfrm>
           <a:prstGeom prst="rect">
@@ -17118,14 +16531,14 @@
       </p:sp>
       <p:sp>
         <p:nvSpPr>
-          <p:cNvPr id="27" name="Rectangle 26"/>
+          <p:cNvPr id="28" name="Rectangle 27"/>
           <p:cNvSpPr/>
           <p:nvPr/>
         </p:nvSpPr>
         <p:spPr>
           <a:xfrm>
-            <a:off x="8903970" y="3699588"/>
-            <a:ext cx="2644902" cy="2518331"/>
+            <a:off x="8903970" y="4377595"/>
+            <a:ext cx="2644902" cy="1840324"/>
           </a:xfrm>
           <a:prstGeom prst="rect">
             <a:avLst/>
@@ -17167,13 +16580,13 @@
       </p:sp>
       <p:sp>
         <p:nvSpPr>
-          <p:cNvPr id="28" name="Rectangle 27"/>
+          <p:cNvPr id="29" name="Rectangle 28"/>
           <p:cNvSpPr/>
           <p:nvPr/>
         </p:nvSpPr>
         <p:spPr>
           <a:xfrm>
-            <a:off x="8903970" y="3699588"/>
+            <a:off x="8903970" y="4377595"/>
             <a:ext cx="2644902" cy="45720"/>
           </a:xfrm>
           <a:prstGeom prst="rect">
@@ -17216,13 +16629,13 @@
       </p:sp>
       <p:sp>
         <p:nvSpPr>
-          <p:cNvPr id="29" name="TextBox 28"/>
+          <p:cNvPr id="30" name="TextBox 29"/>
           <p:cNvSpPr txBox="1"/>
           <p:nvPr/>
         </p:nvSpPr>
         <p:spPr>
           <a:xfrm>
-            <a:off x="9013698" y="3827604"/>
+            <a:off x="9013698" y="4505611"/>
             <a:ext cx="2425446" cy="201168"/>
           </a:xfrm>
           <a:prstGeom prst="rect">
@@ -17258,13 +16671,13 @@
       </p:sp>
       <p:sp>
         <p:nvSpPr>
-          <p:cNvPr id="30" name="TextBox 29"/>
+          <p:cNvPr id="31" name="TextBox 30"/>
           <p:cNvSpPr txBox="1"/>
           <p:nvPr/>
         </p:nvSpPr>
         <p:spPr>
           <a:xfrm>
-            <a:off x="9013698" y="4083636"/>
+            <a:off x="9013698" y="4761643"/>
             <a:ext cx="2425446" cy="475488"/>
           </a:xfrm>
           <a:prstGeom prst="rect">
@@ -17293,20 +16706,20 @@
               <a:rPr>
                 <a:latin typeface="Inter"/>
               </a:rPr>
-              <a:t>Watch</a:t>
+              <a:t>Near limit</a:t>
             </a:r>
           </a:p>
         </p:txBody>
       </p:sp>
       <p:sp>
         <p:nvSpPr>
-          <p:cNvPr id="31" name="TextBox 30"/>
+          <p:cNvPr id="32" name="TextBox 31"/>
           <p:cNvSpPr txBox="1"/>
           <p:nvPr/>
         </p:nvSpPr>
         <p:spPr>
           <a:xfrm>
-            <a:off x="9013698" y="5888736"/>
+            <a:off x="9013698" y="5888735"/>
             <a:ext cx="2425446" cy="228600"/>
           </a:xfrm>
           <a:prstGeom prst="rect">
@@ -17342,7 +16755,7 @@
       </p:sp>
       <p:sp>
         <p:nvSpPr>
-          <p:cNvPr id="32" name="Rectangle 31"/>
+          <p:cNvPr id="33" name="Rectangle 32"/>
           <p:cNvSpPr/>
           <p:nvPr/>
         </p:nvSpPr>
@@ -17391,7 +16804,7 @@
       </p:sp>
       <p:sp>
         <p:nvSpPr>
-          <p:cNvPr id="33" name="TextBox 32"/>
+          <p:cNvPr id="34" name="TextBox 33"/>
           <p:cNvSpPr txBox="1"/>
           <p:nvPr/>
         </p:nvSpPr>
@@ -17433,7 +16846,7 @@
       </p:sp>
       <p:sp>
         <p:nvSpPr>
-          <p:cNvPr id="34" name="TextBox 33"/>
+          <p:cNvPr id="35" name="TextBox 34"/>
           <p:cNvSpPr txBox="1"/>
           <p:nvPr/>
         </p:nvSpPr>
@@ -17475,7 +16888,7 @@
       </p:sp>
       <p:sp>
         <p:nvSpPr>
-          <p:cNvPr id="35" name="TextBox 34"/>
+          <p:cNvPr id="36" name="TextBox 35"/>
           <p:cNvSpPr txBox="1"/>
           <p:nvPr/>
         </p:nvSpPr>
@@ -17591,7 +17004,7 @@
         <p:spPr>
           <a:xfrm>
             <a:off x="640080" y="329184"/>
-            <a:ext cx="5303520" cy="182880"/>
+            <a:ext cx="9875520" cy="182880"/>
           </a:xfrm>
           <a:prstGeom prst="rect">
             <a:avLst/>
@@ -17632,48 +17045,6 @@
         </p:nvSpPr>
         <p:spPr>
           <a:xfrm>
-            <a:off x="5897880" y="310896"/>
-            <a:ext cx="4800600" cy="256032"/>
-          </a:xfrm>
-          <a:prstGeom prst="rect">
-            <a:avLst/>
-          </a:prstGeom>
-          <a:noFill/>
-        </p:spPr>
-        <p:txBody>
-          <a:bodyPr wrap="none" lIns="9144" rIns="9144" tIns="9144" bIns="9144" anchor="t">
-            <a:spAutoFit/>
-          </a:bodyPr>
-          <a:lstStyle/>
-          <a:p>
-            <a:pPr algn="r">
-              <a:spcAft>
-                <a:spcPts val="0"/>
-              </a:spcAft>
-              <a:defRPr sz="680" b="1">
-                <a:solidFill>
-                  <a:srgbClr val="4F6B00"/>
-                </a:solidFill>
-                <a:latin typeface="Inter"/>
-              </a:defRPr>
-            </a:pPr>
-            <a:r>
-              <a:rPr>
-                <a:latin typeface="Inter"/>
-              </a:rPr>
-              <a:t>Illustrative, Gradient Maintained — demo data, not the client's holdings or managers</a:t>
-            </a:r>
-          </a:p>
-        </p:txBody>
-      </p:sp>
-      <p:sp>
-        <p:nvSpPr>
-          <p:cNvPr id="5" name="TextBox 4"/>
-          <p:cNvSpPr txBox="1"/>
-          <p:nvPr/>
-        </p:nvSpPr>
-        <p:spPr>
-          <a:xfrm>
             <a:off x="640080" y="566928"/>
             <a:ext cx="10058400" cy="530352"/>
           </a:xfrm>
@@ -17710,7 +17081,7 @@
       </p:sp>
       <p:sp>
         <p:nvSpPr>
-          <p:cNvPr id="6" name="Rectangle 5"/>
+          <p:cNvPr id="5" name="Rectangle 4"/>
           <p:cNvSpPr/>
           <p:nvPr/>
         </p:nvSpPr>
@@ -17759,7 +17130,7 @@
       </p:sp>
       <p:sp>
         <p:nvSpPr>
-          <p:cNvPr id="7" name="Rectangle 6"/>
+          <p:cNvPr id="6" name="Rectangle 5"/>
           <p:cNvSpPr/>
           <p:nvPr/>
         </p:nvSpPr>
@@ -17808,7 +17179,7 @@
       </p:sp>
       <p:sp>
         <p:nvSpPr>
-          <p:cNvPr id="8" name="TextBox 7"/>
+          <p:cNvPr id="7" name="TextBox 6"/>
           <p:cNvSpPr txBox="1"/>
           <p:nvPr/>
         </p:nvSpPr>
@@ -17850,7 +17221,7 @@
       </p:sp>
       <p:sp>
         <p:nvSpPr>
-          <p:cNvPr id="9" name="TextBox 8"/>
+          <p:cNvPr id="8" name="TextBox 7"/>
           <p:cNvSpPr txBox="1"/>
           <p:nvPr/>
         </p:nvSpPr>
@@ -17892,7 +17263,7 @@
       </p:sp>
       <p:graphicFrame>
         <p:nvGraphicFramePr>
-          <p:cNvPr id="10" name="Table 9"/>
+          <p:cNvPr id="9" name="Table 8"/>
           <p:cNvGraphicFramePr>
             <a:graphicFrameLocks noGrp="1"/>
           </p:cNvGraphicFramePr>
@@ -18743,7 +18114,7 @@
       </p:graphicFrame>
       <p:sp>
         <p:nvSpPr>
-          <p:cNvPr id="11" name="TextBox 10"/>
+          <p:cNvPr id="10" name="TextBox 9"/>
           <p:cNvSpPr txBox="1"/>
           <p:nvPr/>
         </p:nvSpPr>
@@ -18785,7 +18156,7 @@
       </p:sp>
       <p:sp>
         <p:nvSpPr>
-          <p:cNvPr id="12" name="Rectangle 11"/>
+          <p:cNvPr id="11" name="Rectangle 10"/>
           <p:cNvSpPr/>
           <p:nvPr/>
         </p:nvSpPr>
@@ -18834,7 +18205,7 @@
       </p:sp>
       <p:sp>
         <p:nvSpPr>
-          <p:cNvPr id="13" name="TextBox 12"/>
+          <p:cNvPr id="12" name="TextBox 11"/>
           <p:cNvSpPr txBox="1"/>
           <p:nvPr/>
         </p:nvSpPr>
@@ -18876,7 +18247,7 @@
       </p:sp>
       <p:sp>
         <p:nvSpPr>
-          <p:cNvPr id="14" name="TextBox 13"/>
+          <p:cNvPr id="13" name="TextBox 12"/>
           <p:cNvSpPr txBox="1"/>
           <p:nvPr/>
         </p:nvSpPr>
@@ -18918,7 +18289,7 @@
       </p:sp>
       <p:sp>
         <p:nvSpPr>
-          <p:cNvPr id="15" name="TextBox 14"/>
+          <p:cNvPr id="14" name="TextBox 13"/>
           <p:cNvSpPr txBox="1"/>
           <p:nvPr/>
         </p:nvSpPr>
@@ -19033,48 +18404,6 @@
         </p:nvSpPr>
         <p:spPr>
           <a:xfrm>
-            <a:off x="5897880" y="310896"/>
-            <a:ext cx="4800600" cy="256032"/>
-          </a:xfrm>
-          <a:prstGeom prst="rect">
-            <a:avLst/>
-          </a:prstGeom>
-          <a:noFill/>
-        </p:spPr>
-        <p:txBody>
-          <a:bodyPr wrap="none" lIns="9144" rIns="9144" tIns="9144" bIns="9144" anchor="t">
-            <a:spAutoFit/>
-          </a:bodyPr>
-          <a:lstStyle/>
-          <a:p>
-            <a:pPr algn="r">
-              <a:spcAft>
-                <a:spcPts val="0"/>
-              </a:spcAft>
-              <a:defRPr sz="680" b="1">
-                <a:solidFill>
-                  <a:srgbClr val="4F6B00"/>
-                </a:solidFill>
-                <a:latin typeface="Inter"/>
-              </a:defRPr>
-            </a:pPr>
-            <a:r>
-              <a:rPr>
-                <a:latin typeface="Inter"/>
-              </a:rPr>
-              <a:t>Illustrative, Gradient Maintained — demo data, not the client's holdings or managers</a:t>
-            </a:r>
-          </a:p>
-        </p:txBody>
-      </p:sp>
-      <p:sp>
-        <p:nvSpPr>
-          <p:cNvPr id="4" name="TextBox 3"/>
-          <p:cNvSpPr txBox="1"/>
-          <p:nvPr/>
-        </p:nvSpPr>
-        <p:spPr>
-          <a:xfrm>
             <a:off x="640080" y="566928"/>
             <a:ext cx="10058400" cy="530352"/>
           </a:xfrm>
@@ -19111,7 +18440,7 @@
       </p:sp>
       <p:sp>
         <p:nvSpPr>
-          <p:cNvPr id="5" name="Rectangle 4"/>
+          <p:cNvPr id="4" name="Rectangle 3"/>
           <p:cNvSpPr/>
           <p:nvPr/>
         </p:nvSpPr>
@@ -19160,7 +18489,7 @@
       </p:sp>
       <p:sp>
         <p:nvSpPr>
-          <p:cNvPr id="6" name="Rectangle 5"/>
+          <p:cNvPr id="5" name="Rectangle 4"/>
           <p:cNvSpPr/>
           <p:nvPr/>
         </p:nvSpPr>
@@ -19209,7 +18538,7 @@
       </p:sp>
       <p:sp>
         <p:nvSpPr>
-          <p:cNvPr id="7" name="TextBox 6"/>
+          <p:cNvPr id="6" name="TextBox 5"/>
           <p:cNvSpPr txBox="1"/>
           <p:nvPr/>
         </p:nvSpPr>
@@ -19251,7 +18580,7 @@
       </p:sp>
       <p:sp>
         <p:nvSpPr>
-          <p:cNvPr id="8" name="TextBox 7"/>
+          <p:cNvPr id="7" name="TextBox 6"/>
           <p:cNvSpPr txBox="1"/>
           <p:nvPr/>
         </p:nvSpPr>
@@ -19293,7 +18622,7 @@
       </p:sp>
       <p:graphicFrame>
         <p:nvGraphicFramePr>
-          <p:cNvPr id="9" name="Table 8"/>
+          <p:cNvPr id="8" name="Table 7"/>
           <p:cNvGraphicFramePr>
             <a:graphicFrameLocks noGrp="1"/>
           </p:cNvGraphicFramePr>
@@ -19652,7 +18981,7 @@
       </p:graphicFrame>
       <p:sp>
         <p:nvSpPr>
-          <p:cNvPr id="10" name="Rectangle 9"/>
+          <p:cNvPr id="9" name="Rectangle 8"/>
           <p:cNvSpPr/>
           <p:nvPr/>
         </p:nvSpPr>
@@ -19701,7 +19030,7 @@
       </p:sp>
       <p:sp>
         <p:nvSpPr>
-          <p:cNvPr id="11" name="TextBox 10"/>
+          <p:cNvPr id="10" name="TextBox 9"/>
           <p:cNvSpPr txBox="1"/>
           <p:nvPr/>
         </p:nvSpPr>
@@ -19743,7 +19072,7 @@
       </p:sp>
       <p:sp>
         <p:nvSpPr>
-          <p:cNvPr id="12" name="TextBox 11"/>
+          <p:cNvPr id="11" name="TextBox 10"/>
           <p:cNvSpPr txBox="1"/>
           <p:nvPr/>
         </p:nvSpPr>
@@ -19785,7 +19114,7 @@
       </p:sp>
       <p:sp>
         <p:nvSpPr>
-          <p:cNvPr id="13" name="TextBox 12"/>
+          <p:cNvPr id="12" name="TextBox 11"/>
           <p:cNvSpPr txBox="1"/>
           <p:nvPr/>
         </p:nvSpPr>
@@ -19900,48 +19229,6 @@
         </p:nvSpPr>
         <p:spPr>
           <a:xfrm>
-            <a:off x="5897880" y="310896"/>
-            <a:ext cx="4800600" cy="256032"/>
-          </a:xfrm>
-          <a:prstGeom prst="rect">
-            <a:avLst/>
-          </a:prstGeom>
-          <a:noFill/>
-        </p:spPr>
-        <p:txBody>
-          <a:bodyPr wrap="none" lIns="9144" rIns="9144" tIns="9144" bIns="9144" anchor="t">
-            <a:spAutoFit/>
-          </a:bodyPr>
-          <a:lstStyle/>
-          <a:p>
-            <a:pPr algn="r">
-              <a:spcAft>
-                <a:spcPts val="0"/>
-              </a:spcAft>
-              <a:defRPr sz="680" b="1">
-                <a:solidFill>
-                  <a:srgbClr val="4F6B00"/>
-                </a:solidFill>
-                <a:latin typeface="Inter"/>
-              </a:defRPr>
-            </a:pPr>
-            <a:r>
-              <a:rPr>
-                <a:latin typeface="Inter"/>
-              </a:rPr>
-              <a:t>Illustrative, Gradient Maintained — demo data, not the client's holdings or managers</a:t>
-            </a:r>
-          </a:p>
-        </p:txBody>
-      </p:sp>
-      <p:sp>
-        <p:nvSpPr>
-          <p:cNvPr id="4" name="TextBox 3"/>
-          <p:cNvSpPr txBox="1"/>
-          <p:nvPr/>
-        </p:nvSpPr>
-        <p:spPr>
-          <a:xfrm>
             <a:off x="640080" y="566928"/>
             <a:ext cx="10058400" cy="530352"/>
           </a:xfrm>
@@ -19978,7 +19265,7 @@
       </p:sp>
       <p:sp>
         <p:nvSpPr>
-          <p:cNvPr id="5" name="Rectangle 4"/>
+          <p:cNvPr id="4" name="Rectangle 3"/>
           <p:cNvSpPr/>
           <p:nvPr/>
         </p:nvSpPr>
@@ -20027,7 +19314,7 @@
       </p:sp>
       <p:sp>
         <p:nvSpPr>
-          <p:cNvPr id="6" name="Rectangle 5"/>
+          <p:cNvPr id="5" name="Rectangle 4"/>
           <p:cNvSpPr/>
           <p:nvPr/>
         </p:nvSpPr>
@@ -20076,7 +19363,7 @@
       </p:sp>
       <p:sp>
         <p:nvSpPr>
-          <p:cNvPr id="7" name="TextBox 6"/>
+          <p:cNvPr id="6" name="TextBox 5"/>
           <p:cNvSpPr txBox="1"/>
           <p:nvPr/>
         </p:nvSpPr>
@@ -20118,7 +19405,7 @@
       </p:sp>
       <p:sp>
         <p:nvSpPr>
-          <p:cNvPr id="8" name="TextBox 7"/>
+          <p:cNvPr id="7" name="TextBox 6"/>
           <p:cNvSpPr txBox="1"/>
           <p:nvPr/>
         </p:nvSpPr>
@@ -20160,7 +19447,7 @@
       </p:sp>
       <p:graphicFrame>
         <p:nvGraphicFramePr>
-          <p:cNvPr id="9" name="Table 8"/>
+          <p:cNvPr id="8" name="Table 7"/>
           <p:cNvGraphicFramePr>
             <a:graphicFrameLocks noGrp="1"/>
           </p:cNvGraphicFramePr>
@@ -20720,7 +20007,7 @@
                         <a:rPr>
                           <a:latin typeface="Inter"/>
                         </a:rPr>
-                        <a:t>● Watch</a:t>
+                        <a:t>● Near limit</a:t>
                       </a:r>
                     </a:p>
                   </a:txBody>
@@ -20857,7 +20144,7 @@
                         <a:rPr>
                           <a:latin typeface="Inter"/>
                         </a:rPr>
-                        <a:t>● Watch</a:t>
+                        <a:t>● Near limit</a:t>
                       </a:r>
                     </a:p>
                   </a:txBody>
@@ -20994,7 +20281,7 @@
                         <a:rPr>
                           <a:latin typeface="Inter"/>
                         </a:rPr>
-                        <a:t>● Watch</a:t>
+                        <a:t>● Near limit</a:t>
                       </a:r>
                     </a:p>
                   </a:txBody>
@@ -21011,7 +20298,7 @@
       </p:graphicFrame>
       <p:sp>
         <p:nvSpPr>
-          <p:cNvPr id="10" name="TextBox 9"/>
+          <p:cNvPr id="9" name="TextBox 8"/>
           <p:cNvSpPr txBox="1"/>
           <p:nvPr/>
         </p:nvSpPr>
@@ -21053,7 +20340,7 @@
       </p:sp>
       <p:graphicFrame>
         <p:nvGraphicFramePr>
-          <p:cNvPr id="11" name="Table 10"/>
+          <p:cNvPr id="10" name="Table 9"/>
           <p:cNvGraphicFramePr>
             <a:graphicFrameLocks noGrp="1"/>
           </p:cNvGraphicFramePr>
@@ -21359,7 +20646,7 @@
       </p:graphicFrame>
       <p:sp>
         <p:nvSpPr>
-          <p:cNvPr id="12" name="Rectangle 11"/>
+          <p:cNvPr id="11" name="Rectangle 10"/>
           <p:cNvSpPr/>
           <p:nvPr/>
         </p:nvSpPr>
@@ -21408,7 +20695,7 @@
       </p:sp>
       <p:sp>
         <p:nvSpPr>
-          <p:cNvPr id="13" name="TextBox 12"/>
+          <p:cNvPr id="12" name="TextBox 11"/>
           <p:cNvSpPr txBox="1"/>
           <p:nvPr/>
         </p:nvSpPr>
@@ -21450,7 +20737,7 @@
       </p:sp>
       <p:sp>
         <p:nvSpPr>
-          <p:cNvPr id="14" name="TextBox 13"/>
+          <p:cNvPr id="13" name="TextBox 12"/>
           <p:cNvSpPr txBox="1"/>
           <p:nvPr/>
         </p:nvSpPr>
@@ -21492,7 +20779,7 @@
       </p:sp>
       <p:sp>
         <p:nvSpPr>
-          <p:cNvPr id="15" name="TextBox 14"/>
+          <p:cNvPr id="14" name="TextBox 13"/>
           <p:cNvSpPr txBox="1"/>
           <p:nvPr/>
         </p:nvSpPr>
@@ -21607,48 +20894,6 @@
         </p:nvSpPr>
         <p:spPr>
           <a:xfrm>
-            <a:off x="5897880" y="310896"/>
-            <a:ext cx="4800600" cy="256032"/>
-          </a:xfrm>
-          <a:prstGeom prst="rect">
-            <a:avLst/>
-          </a:prstGeom>
-          <a:noFill/>
-        </p:spPr>
-        <p:txBody>
-          <a:bodyPr wrap="none" lIns="9144" rIns="9144" tIns="9144" bIns="9144" anchor="t">
-            <a:spAutoFit/>
-          </a:bodyPr>
-          <a:lstStyle/>
-          <a:p>
-            <a:pPr algn="r">
-              <a:spcAft>
-                <a:spcPts val="0"/>
-              </a:spcAft>
-              <a:defRPr sz="680" b="1">
-                <a:solidFill>
-                  <a:srgbClr val="4F6B00"/>
-                </a:solidFill>
-                <a:latin typeface="Inter"/>
-              </a:defRPr>
-            </a:pPr>
-            <a:r>
-              <a:rPr>
-                <a:latin typeface="Inter"/>
-              </a:rPr>
-              <a:t>Illustrative, Gradient Maintained — demo data, not the client's holdings or managers</a:t>
-            </a:r>
-          </a:p>
-        </p:txBody>
-      </p:sp>
-      <p:sp>
-        <p:nvSpPr>
-          <p:cNvPr id="4" name="TextBox 3"/>
-          <p:cNvSpPr txBox="1"/>
-          <p:nvPr/>
-        </p:nvSpPr>
-        <p:spPr>
-          <a:xfrm>
             <a:off x="640080" y="566928"/>
             <a:ext cx="10058400" cy="530352"/>
           </a:xfrm>
@@ -21685,7 +20930,7 @@
       </p:sp>
       <p:sp>
         <p:nvSpPr>
-          <p:cNvPr id="5" name="Rectangle 4"/>
+          <p:cNvPr id="4" name="Rectangle 3"/>
           <p:cNvSpPr/>
           <p:nvPr/>
         </p:nvSpPr>
@@ -21734,7 +20979,7 @@
       </p:sp>
       <p:sp>
         <p:nvSpPr>
-          <p:cNvPr id="6" name="Rectangle 5"/>
+          <p:cNvPr id="5" name="Rectangle 4"/>
           <p:cNvSpPr/>
           <p:nvPr/>
         </p:nvSpPr>
@@ -21783,7 +21028,7 @@
       </p:sp>
       <p:sp>
         <p:nvSpPr>
-          <p:cNvPr id="7" name="TextBox 6"/>
+          <p:cNvPr id="6" name="TextBox 5"/>
           <p:cNvSpPr txBox="1"/>
           <p:nvPr/>
         </p:nvSpPr>
@@ -21825,7 +21070,7 @@
       </p:sp>
       <p:sp>
         <p:nvSpPr>
-          <p:cNvPr id="8" name="TextBox 7"/>
+          <p:cNvPr id="7" name="TextBox 6"/>
           <p:cNvSpPr txBox="1"/>
           <p:nvPr/>
         </p:nvSpPr>
@@ -21867,7 +21112,7 @@
       </p:sp>
       <p:graphicFrame>
         <p:nvGraphicFramePr>
-          <p:cNvPr id="9" name="Table 8"/>
+          <p:cNvPr id="8" name="Table 7"/>
           <p:cNvGraphicFramePr>
             <a:graphicFrameLocks noGrp="1"/>
           </p:cNvGraphicFramePr>
@@ -22553,7 +21798,7 @@
       </p:graphicFrame>
       <p:sp>
         <p:nvSpPr>
-          <p:cNvPr id="10" name="Rectangle 9"/>
+          <p:cNvPr id="9" name="Rectangle 8"/>
           <p:cNvSpPr/>
           <p:nvPr/>
         </p:nvSpPr>
@@ -22602,7 +21847,7 @@
       </p:sp>
       <p:sp>
         <p:nvSpPr>
-          <p:cNvPr id="11" name="Rectangle 10"/>
+          <p:cNvPr id="10" name="Rectangle 9"/>
           <p:cNvSpPr/>
           <p:nvPr/>
         </p:nvSpPr>
@@ -22651,7 +21896,7 @@
       </p:sp>
       <p:sp>
         <p:nvSpPr>
-          <p:cNvPr id="12" name="TextBox 11"/>
+          <p:cNvPr id="11" name="TextBox 10"/>
           <p:cNvSpPr txBox="1"/>
           <p:nvPr/>
         </p:nvSpPr>
@@ -22693,7 +21938,7 @@
       </p:sp>
       <p:sp>
         <p:nvSpPr>
-          <p:cNvPr id="13" name="TextBox 12"/>
+          <p:cNvPr id="12" name="TextBox 11"/>
           <p:cNvSpPr txBox="1"/>
           <p:nvPr/>
         </p:nvSpPr>
@@ -22735,7 +21980,7 @@
       </p:sp>
       <p:sp>
         <p:nvSpPr>
-          <p:cNvPr id="14" name="Rectangle 13"/>
+          <p:cNvPr id="13" name="Rectangle 12"/>
           <p:cNvSpPr/>
           <p:nvPr/>
         </p:nvSpPr>
@@ -22784,7 +22029,7 @@
       </p:sp>
       <p:sp>
         <p:nvSpPr>
-          <p:cNvPr id="15" name="TextBox 14"/>
+          <p:cNvPr id="14" name="TextBox 13"/>
           <p:cNvSpPr txBox="1"/>
           <p:nvPr/>
         </p:nvSpPr>
@@ -22826,7 +22071,7 @@
       </p:sp>
       <p:sp>
         <p:nvSpPr>
-          <p:cNvPr id="16" name="TextBox 15"/>
+          <p:cNvPr id="15" name="TextBox 14"/>
           <p:cNvSpPr txBox="1"/>
           <p:nvPr/>
         </p:nvSpPr>
@@ -22868,7 +22113,7 @@
       </p:sp>
       <p:sp>
         <p:nvSpPr>
-          <p:cNvPr id="17" name="TextBox 16"/>
+          <p:cNvPr id="16" name="TextBox 15"/>
           <p:cNvSpPr txBox="1"/>
           <p:nvPr/>
         </p:nvSpPr>
@@ -22983,48 +22228,6 @@
         </p:nvSpPr>
         <p:spPr>
           <a:xfrm>
-            <a:off x="5897880" y="310896"/>
-            <a:ext cx="4800600" cy="256032"/>
-          </a:xfrm>
-          <a:prstGeom prst="rect">
-            <a:avLst/>
-          </a:prstGeom>
-          <a:noFill/>
-        </p:spPr>
-        <p:txBody>
-          <a:bodyPr wrap="none" lIns="9144" rIns="9144" tIns="9144" bIns="9144" anchor="t">
-            <a:spAutoFit/>
-          </a:bodyPr>
-          <a:lstStyle/>
-          <a:p>
-            <a:pPr algn="r">
-              <a:spcAft>
-                <a:spcPts val="0"/>
-              </a:spcAft>
-              <a:defRPr sz="680" b="1">
-                <a:solidFill>
-                  <a:srgbClr val="4F6B00"/>
-                </a:solidFill>
-                <a:latin typeface="Inter"/>
-              </a:defRPr>
-            </a:pPr>
-            <a:r>
-              <a:rPr>
-                <a:latin typeface="Inter"/>
-              </a:rPr>
-              <a:t>Illustrative, Gradient Maintained — demo data, not the client's holdings or managers</a:t>
-            </a:r>
-          </a:p>
-        </p:txBody>
-      </p:sp>
-      <p:sp>
-        <p:nvSpPr>
-          <p:cNvPr id="4" name="TextBox 3"/>
-          <p:cNvSpPr txBox="1"/>
-          <p:nvPr/>
-        </p:nvSpPr>
-        <p:spPr>
-          <a:xfrm>
             <a:off x="640080" y="566928"/>
             <a:ext cx="10058400" cy="530352"/>
           </a:xfrm>
@@ -23061,7 +22264,7 @@
       </p:sp>
       <p:sp>
         <p:nvSpPr>
-          <p:cNvPr id="5" name="Rectangle 4"/>
+          <p:cNvPr id="4" name="Rectangle 3"/>
           <p:cNvSpPr/>
           <p:nvPr/>
         </p:nvSpPr>
@@ -23110,7 +22313,7 @@
       </p:sp>
       <p:sp>
         <p:nvSpPr>
-          <p:cNvPr id="6" name="Rectangle 5"/>
+          <p:cNvPr id="5" name="Rectangle 4"/>
           <p:cNvSpPr/>
           <p:nvPr/>
         </p:nvSpPr>
@@ -23159,7 +22362,7 @@
       </p:sp>
       <p:sp>
         <p:nvSpPr>
-          <p:cNvPr id="7" name="TextBox 6"/>
+          <p:cNvPr id="6" name="TextBox 5"/>
           <p:cNvSpPr txBox="1"/>
           <p:nvPr/>
         </p:nvSpPr>
@@ -23201,7 +22404,7 @@
       </p:sp>
       <p:sp>
         <p:nvSpPr>
-          <p:cNvPr id="8" name="TextBox 7"/>
+          <p:cNvPr id="7" name="TextBox 6"/>
           <p:cNvSpPr txBox="1"/>
           <p:nvPr/>
         </p:nvSpPr>
@@ -23243,7 +22446,7 @@
       </p:sp>
       <p:graphicFrame>
         <p:nvGraphicFramePr>
-          <p:cNvPr id="9" name="Chart 8"/>
+          <p:cNvPr id="8" name="Chart 7"/>
           <p:cNvGraphicFramePr>
             <a:graphicFrameLocks noGrp="1"/>
           </p:cNvGraphicFramePr>
@@ -23261,7 +22464,7 @@
       </p:graphicFrame>
       <p:sp>
         <p:nvSpPr>
-          <p:cNvPr id="10" name="Rectangle 9"/>
+          <p:cNvPr id="9" name="Rectangle 8"/>
           <p:cNvSpPr/>
           <p:nvPr/>
         </p:nvSpPr>
@@ -23310,7 +22513,7 @@
       </p:sp>
       <p:sp>
         <p:nvSpPr>
-          <p:cNvPr id="11" name="TextBox 10"/>
+          <p:cNvPr id="10" name="TextBox 9"/>
           <p:cNvSpPr txBox="1"/>
           <p:nvPr/>
         </p:nvSpPr>
@@ -23352,7 +22555,7 @@
       </p:sp>
       <p:sp>
         <p:nvSpPr>
-          <p:cNvPr id="12" name="TextBox 11"/>
+          <p:cNvPr id="11" name="TextBox 10"/>
           <p:cNvSpPr txBox="1"/>
           <p:nvPr/>
         </p:nvSpPr>
@@ -23394,7 +22597,7 @@
       </p:sp>
       <p:sp>
         <p:nvSpPr>
-          <p:cNvPr id="13" name="TextBox 12"/>
+          <p:cNvPr id="12" name="TextBox 11"/>
           <p:cNvSpPr txBox="1"/>
           <p:nvPr/>
         </p:nvSpPr>
@@ -23509,48 +22712,6 @@
         </p:nvSpPr>
         <p:spPr>
           <a:xfrm>
-            <a:off x="5897880" y="310896"/>
-            <a:ext cx="4800600" cy="256032"/>
-          </a:xfrm>
-          <a:prstGeom prst="rect">
-            <a:avLst/>
-          </a:prstGeom>
-          <a:noFill/>
-        </p:spPr>
-        <p:txBody>
-          <a:bodyPr wrap="none" lIns="9144" rIns="9144" tIns="9144" bIns="9144" anchor="t">
-            <a:spAutoFit/>
-          </a:bodyPr>
-          <a:lstStyle/>
-          <a:p>
-            <a:pPr algn="r">
-              <a:spcAft>
-                <a:spcPts val="0"/>
-              </a:spcAft>
-              <a:defRPr sz="680" b="1">
-                <a:solidFill>
-                  <a:srgbClr val="4F6B00"/>
-                </a:solidFill>
-                <a:latin typeface="Inter"/>
-              </a:defRPr>
-            </a:pPr>
-            <a:r>
-              <a:rPr>
-                <a:latin typeface="Inter"/>
-              </a:rPr>
-              <a:t>Illustrative, Gradient Maintained — demo data, not the client's holdings or managers</a:t>
-            </a:r>
-          </a:p>
-        </p:txBody>
-      </p:sp>
-      <p:sp>
-        <p:nvSpPr>
-          <p:cNvPr id="4" name="TextBox 3"/>
-          <p:cNvSpPr txBox="1"/>
-          <p:nvPr/>
-        </p:nvSpPr>
-        <p:spPr>
-          <a:xfrm>
             <a:off x="640080" y="566928"/>
             <a:ext cx="10058400" cy="530352"/>
           </a:xfrm>
@@ -23587,7 +22748,7 @@
       </p:sp>
       <p:sp>
         <p:nvSpPr>
-          <p:cNvPr id="5" name="Rectangle 4"/>
+          <p:cNvPr id="4" name="Rectangle 3"/>
           <p:cNvSpPr/>
           <p:nvPr/>
         </p:nvSpPr>
@@ -23636,7 +22797,7 @@
       </p:sp>
       <p:sp>
         <p:nvSpPr>
-          <p:cNvPr id="6" name="Rectangle 5"/>
+          <p:cNvPr id="5" name="Rectangle 4"/>
           <p:cNvSpPr/>
           <p:nvPr/>
         </p:nvSpPr>
@@ -23685,7 +22846,7 @@
       </p:sp>
       <p:sp>
         <p:nvSpPr>
-          <p:cNvPr id="7" name="TextBox 6"/>
+          <p:cNvPr id="6" name="TextBox 5"/>
           <p:cNvSpPr txBox="1"/>
           <p:nvPr/>
         </p:nvSpPr>
@@ -23727,7 +22888,7 @@
       </p:sp>
       <p:sp>
         <p:nvSpPr>
-          <p:cNvPr id="8" name="TextBox 7"/>
+          <p:cNvPr id="7" name="TextBox 6"/>
           <p:cNvSpPr txBox="1"/>
           <p:nvPr/>
         </p:nvSpPr>
@@ -23769,7 +22930,7 @@
       </p:sp>
       <p:graphicFrame>
         <p:nvGraphicFramePr>
-          <p:cNvPr id="9" name="Table 8"/>
+          <p:cNvPr id="8" name="Table 7"/>
           <p:cNvGraphicFramePr>
             <a:graphicFrameLocks noGrp="1"/>
           </p:cNvGraphicFramePr>
@@ -24346,7 +23507,7 @@
       </p:graphicFrame>
       <p:sp>
         <p:nvSpPr>
-          <p:cNvPr id="10" name="Rectangle 9"/>
+          <p:cNvPr id="9" name="Rectangle 8"/>
           <p:cNvSpPr/>
           <p:nvPr/>
         </p:nvSpPr>
@@ -24395,7 +23556,7 @@
       </p:sp>
       <p:sp>
         <p:nvSpPr>
-          <p:cNvPr id="11" name="Rectangle 10"/>
+          <p:cNvPr id="10" name="Rectangle 9"/>
           <p:cNvSpPr/>
           <p:nvPr/>
         </p:nvSpPr>
@@ -24444,7 +23605,7 @@
       </p:sp>
       <p:sp>
         <p:nvSpPr>
-          <p:cNvPr id="12" name="TextBox 11"/>
+          <p:cNvPr id="11" name="TextBox 10"/>
           <p:cNvSpPr txBox="1"/>
           <p:nvPr/>
         </p:nvSpPr>
@@ -24486,7 +23647,7 @@
       </p:sp>
       <p:sp>
         <p:nvSpPr>
-          <p:cNvPr id="13" name="TextBox 12"/>
+          <p:cNvPr id="12" name="TextBox 11"/>
           <p:cNvSpPr txBox="1"/>
           <p:nvPr/>
         </p:nvSpPr>
@@ -24528,7 +23689,7 @@
       </p:sp>
       <p:sp>
         <p:nvSpPr>
-          <p:cNvPr id="14" name="Rectangle 13"/>
+          <p:cNvPr id="13" name="Rectangle 12"/>
           <p:cNvSpPr/>
           <p:nvPr/>
         </p:nvSpPr>
@@ -24577,7 +23738,7 @@
       </p:sp>
       <p:sp>
         <p:nvSpPr>
-          <p:cNvPr id="15" name="TextBox 14"/>
+          <p:cNvPr id="14" name="TextBox 13"/>
           <p:cNvSpPr txBox="1"/>
           <p:nvPr/>
         </p:nvSpPr>
@@ -24619,7 +23780,7 @@
       </p:sp>
       <p:sp>
         <p:nvSpPr>
-          <p:cNvPr id="16" name="TextBox 15"/>
+          <p:cNvPr id="15" name="TextBox 14"/>
           <p:cNvSpPr txBox="1"/>
           <p:nvPr/>
         </p:nvSpPr>
@@ -24661,7 +23822,7 @@
       </p:sp>
       <p:sp>
         <p:nvSpPr>
-          <p:cNvPr id="17" name="TextBox 16"/>
+          <p:cNvPr id="16" name="TextBox 15"/>
           <p:cNvSpPr txBox="1"/>
           <p:nvPr/>
         </p:nvSpPr>
@@ -24776,48 +23937,6 @@
         </p:nvSpPr>
         <p:spPr>
           <a:xfrm>
-            <a:off x="5897880" y="310896"/>
-            <a:ext cx="4800600" cy="256032"/>
-          </a:xfrm>
-          <a:prstGeom prst="rect">
-            <a:avLst/>
-          </a:prstGeom>
-          <a:noFill/>
-        </p:spPr>
-        <p:txBody>
-          <a:bodyPr wrap="none" lIns="9144" rIns="9144" tIns="9144" bIns="9144" anchor="t">
-            <a:spAutoFit/>
-          </a:bodyPr>
-          <a:lstStyle/>
-          <a:p>
-            <a:pPr algn="r">
-              <a:spcAft>
-                <a:spcPts val="0"/>
-              </a:spcAft>
-              <a:defRPr sz="680" b="1">
-                <a:solidFill>
-                  <a:srgbClr val="4F6B00"/>
-                </a:solidFill>
-                <a:latin typeface="Inter"/>
-              </a:defRPr>
-            </a:pPr>
-            <a:r>
-              <a:rPr>
-                <a:latin typeface="Inter"/>
-              </a:rPr>
-              <a:t>Illustrative, Gradient Maintained — demo data, not the client's holdings or managers</a:t>
-            </a:r>
-          </a:p>
-        </p:txBody>
-      </p:sp>
-      <p:sp>
-        <p:nvSpPr>
-          <p:cNvPr id="4" name="TextBox 3"/>
-          <p:cNvSpPr txBox="1"/>
-          <p:nvPr/>
-        </p:nvSpPr>
-        <p:spPr>
-          <a:xfrm>
             <a:off x="640080" y="566928"/>
             <a:ext cx="10058400" cy="530352"/>
           </a:xfrm>
@@ -24854,7 +23973,7 @@
       </p:sp>
       <p:sp>
         <p:nvSpPr>
-          <p:cNvPr id="5" name="Rectangle 4"/>
+          <p:cNvPr id="4" name="Rectangle 3"/>
           <p:cNvSpPr/>
           <p:nvPr/>
         </p:nvSpPr>
@@ -24903,7 +24022,7 @@
       </p:sp>
       <p:sp>
         <p:nvSpPr>
-          <p:cNvPr id="6" name="Rectangle 5"/>
+          <p:cNvPr id="5" name="Rectangle 4"/>
           <p:cNvSpPr/>
           <p:nvPr/>
         </p:nvSpPr>
@@ -24952,7 +24071,7 @@
       </p:sp>
       <p:sp>
         <p:nvSpPr>
-          <p:cNvPr id="7" name="TextBox 6"/>
+          <p:cNvPr id="6" name="TextBox 5"/>
           <p:cNvSpPr txBox="1"/>
           <p:nvPr/>
         </p:nvSpPr>
@@ -24994,7 +24113,7 @@
       </p:sp>
       <p:sp>
         <p:nvSpPr>
-          <p:cNvPr id="8" name="TextBox 7"/>
+          <p:cNvPr id="7" name="TextBox 6"/>
           <p:cNvSpPr txBox="1"/>
           <p:nvPr/>
         </p:nvSpPr>
@@ -25036,7 +24155,7 @@
       </p:sp>
       <p:graphicFrame>
         <p:nvGraphicFramePr>
-          <p:cNvPr id="9" name="Table 8"/>
+          <p:cNvPr id="8" name="Table 7"/>
           <p:cNvGraphicFramePr>
             <a:graphicFrameLocks noGrp="1"/>
           </p:cNvGraphicFramePr>
@@ -25886,7 +25005,7 @@
       </p:graphicFrame>
       <p:sp>
         <p:nvSpPr>
-          <p:cNvPr id="10" name="TextBox 9"/>
+          <p:cNvPr id="9" name="TextBox 8"/>
           <p:cNvSpPr txBox="1"/>
           <p:nvPr/>
         </p:nvSpPr>
@@ -25928,7 +25047,7 @@
       </p:sp>
       <p:graphicFrame>
         <p:nvGraphicFramePr>
-          <p:cNvPr id="11" name="Table 10"/>
+          <p:cNvPr id="10" name="Table 9"/>
           <p:cNvGraphicFramePr>
             <a:graphicFrameLocks noGrp="1"/>
           </p:cNvGraphicFramePr>
@@ -26286,7 +25405,7 @@
       </p:graphicFrame>
       <p:sp>
         <p:nvSpPr>
-          <p:cNvPr id="12" name="Rectangle 11"/>
+          <p:cNvPr id="11" name="Rectangle 10"/>
           <p:cNvSpPr/>
           <p:nvPr/>
         </p:nvSpPr>
@@ -26335,7 +25454,7 @@
       </p:sp>
       <p:sp>
         <p:nvSpPr>
-          <p:cNvPr id="13" name="TextBox 12"/>
+          <p:cNvPr id="12" name="TextBox 11"/>
           <p:cNvSpPr txBox="1"/>
           <p:nvPr/>
         </p:nvSpPr>
@@ -26377,7 +25496,7 @@
       </p:sp>
       <p:sp>
         <p:nvSpPr>
-          <p:cNvPr id="14" name="TextBox 13"/>
+          <p:cNvPr id="13" name="TextBox 12"/>
           <p:cNvSpPr txBox="1"/>
           <p:nvPr/>
         </p:nvSpPr>
@@ -26419,7 +25538,7 @@
       </p:sp>
       <p:sp>
         <p:nvSpPr>
-          <p:cNvPr id="15" name="TextBox 14"/>
+          <p:cNvPr id="14" name="TextBox 13"/>
           <p:cNvSpPr txBox="1"/>
           <p:nvPr/>
         </p:nvSpPr>
@@ -26534,48 +25653,6 @@
         </p:nvSpPr>
         <p:spPr>
           <a:xfrm>
-            <a:off x="5897880" y="310896"/>
-            <a:ext cx="4800600" cy="256032"/>
-          </a:xfrm>
-          <a:prstGeom prst="rect">
-            <a:avLst/>
-          </a:prstGeom>
-          <a:noFill/>
-        </p:spPr>
-        <p:txBody>
-          <a:bodyPr wrap="none" lIns="9144" rIns="9144" tIns="9144" bIns="9144" anchor="t">
-            <a:spAutoFit/>
-          </a:bodyPr>
-          <a:lstStyle/>
-          <a:p>
-            <a:pPr algn="r">
-              <a:spcAft>
-                <a:spcPts val="0"/>
-              </a:spcAft>
-              <a:defRPr sz="680" b="1">
-                <a:solidFill>
-                  <a:srgbClr val="4F6B00"/>
-                </a:solidFill>
-                <a:latin typeface="Inter"/>
-              </a:defRPr>
-            </a:pPr>
-            <a:r>
-              <a:rPr>
-                <a:latin typeface="Inter"/>
-              </a:rPr>
-              <a:t>Illustrative, Gradient Maintained — demo data, not the client's holdings or managers</a:t>
-            </a:r>
-          </a:p>
-        </p:txBody>
-      </p:sp>
-      <p:sp>
-        <p:nvSpPr>
-          <p:cNvPr id="4" name="TextBox 3"/>
-          <p:cNvSpPr txBox="1"/>
-          <p:nvPr/>
-        </p:nvSpPr>
-        <p:spPr>
-          <a:xfrm>
             <a:off x="640080" y="566928"/>
             <a:ext cx="10058400" cy="530352"/>
           </a:xfrm>
@@ -26612,7 +25689,7 @@
       </p:sp>
       <p:sp>
         <p:nvSpPr>
-          <p:cNvPr id="5" name="Rectangle 4"/>
+          <p:cNvPr id="4" name="Rectangle 3"/>
           <p:cNvSpPr/>
           <p:nvPr/>
         </p:nvSpPr>
@@ -26661,7 +25738,7 @@
       </p:sp>
       <p:sp>
         <p:nvSpPr>
-          <p:cNvPr id="6" name="Rectangle 5"/>
+          <p:cNvPr id="5" name="Rectangle 4"/>
           <p:cNvSpPr/>
           <p:nvPr/>
         </p:nvSpPr>
@@ -26710,7 +25787,7 @@
       </p:sp>
       <p:sp>
         <p:nvSpPr>
-          <p:cNvPr id="7" name="TextBox 6"/>
+          <p:cNvPr id="6" name="TextBox 5"/>
           <p:cNvSpPr txBox="1"/>
           <p:nvPr/>
         </p:nvSpPr>
@@ -26752,7 +25829,7 @@
       </p:sp>
       <p:sp>
         <p:nvSpPr>
-          <p:cNvPr id="8" name="TextBox 7"/>
+          <p:cNvPr id="7" name="TextBox 6"/>
           <p:cNvSpPr txBox="1"/>
           <p:nvPr/>
         </p:nvSpPr>
@@ -26794,7 +25871,7 @@
       </p:sp>
       <p:graphicFrame>
         <p:nvGraphicFramePr>
-          <p:cNvPr id="9" name="Table 8"/>
+          <p:cNvPr id="8" name="Table 7"/>
           <p:cNvGraphicFramePr>
             <a:graphicFrameLocks noGrp="1"/>
           </p:cNvGraphicFramePr>
@@ -27371,7 +26448,7 @@
       </p:graphicFrame>
       <p:sp>
         <p:nvSpPr>
-          <p:cNvPr id="10" name="TextBox 9"/>
+          <p:cNvPr id="9" name="TextBox 8"/>
           <p:cNvSpPr txBox="1"/>
           <p:nvPr/>
         </p:nvSpPr>
@@ -27413,7 +26490,7 @@
       </p:sp>
       <p:graphicFrame>
         <p:nvGraphicFramePr>
-          <p:cNvPr id="11" name="Table 10"/>
+          <p:cNvPr id="10" name="Table 9"/>
           <p:cNvGraphicFramePr>
             <a:graphicFrameLocks noGrp="1"/>
           </p:cNvGraphicFramePr>
@@ -28127,7 +27204,7 @@
       </p:graphicFrame>
       <p:sp>
         <p:nvSpPr>
-          <p:cNvPr id="12" name="Rectangle 11"/>
+          <p:cNvPr id="11" name="Rectangle 10"/>
           <p:cNvSpPr/>
           <p:nvPr/>
         </p:nvSpPr>
@@ -28176,7 +27253,7 @@
       </p:sp>
       <p:sp>
         <p:nvSpPr>
-          <p:cNvPr id="13" name="TextBox 12"/>
+          <p:cNvPr id="12" name="TextBox 11"/>
           <p:cNvSpPr txBox="1"/>
           <p:nvPr/>
         </p:nvSpPr>
@@ -28218,7 +27295,7 @@
       </p:sp>
       <p:sp>
         <p:nvSpPr>
-          <p:cNvPr id="14" name="TextBox 13"/>
+          <p:cNvPr id="13" name="TextBox 12"/>
           <p:cNvSpPr txBox="1"/>
           <p:nvPr/>
         </p:nvSpPr>
@@ -28260,7 +27337,7 @@
       </p:sp>
       <p:sp>
         <p:nvSpPr>
-          <p:cNvPr id="15" name="TextBox 14"/>
+          <p:cNvPr id="14" name="TextBox 13"/>
           <p:cNvSpPr txBox="1"/>
           <p:nvPr/>
         </p:nvSpPr>
@@ -28375,48 +27452,6 @@
         </p:nvSpPr>
         <p:spPr>
           <a:xfrm>
-            <a:off x="5897880" y="310896"/>
-            <a:ext cx="4800600" cy="256032"/>
-          </a:xfrm>
-          <a:prstGeom prst="rect">
-            <a:avLst/>
-          </a:prstGeom>
-          <a:noFill/>
-        </p:spPr>
-        <p:txBody>
-          <a:bodyPr wrap="none" lIns="9144" rIns="9144" tIns="9144" bIns="9144" anchor="t">
-            <a:spAutoFit/>
-          </a:bodyPr>
-          <a:lstStyle/>
-          <a:p>
-            <a:pPr algn="r">
-              <a:spcAft>
-                <a:spcPts val="0"/>
-              </a:spcAft>
-              <a:defRPr sz="680" b="1">
-                <a:solidFill>
-                  <a:srgbClr val="4F6B00"/>
-                </a:solidFill>
-                <a:latin typeface="Inter"/>
-              </a:defRPr>
-            </a:pPr>
-            <a:r>
-              <a:rPr>
-                <a:latin typeface="Inter"/>
-              </a:rPr>
-              <a:t>Illustrative, Gradient Maintained — demo data, not the client's holdings or managers</a:t>
-            </a:r>
-          </a:p>
-        </p:txBody>
-      </p:sp>
-      <p:sp>
-        <p:nvSpPr>
-          <p:cNvPr id="4" name="TextBox 3"/>
-          <p:cNvSpPr txBox="1"/>
-          <p:nvPr/>
-        </p:nvSpPr>
-        <p:spPr>
-          <a:xfrm>
             <a:off x="640080" y="566928"/>
             <a:ext cx="10058400" cy="530352"/>
           </a:xfrm>
@@ -28453,7 +27488,7 @@
       </p:sp>
       <p:sp>
         <p:nvSpPr>
-          <p:cNvPr id="5" name="Rectangle 4"/>
+          <p:cNvPr id="4" name="Rectangle 3"/>
           <p:cNvSpPr/>
           <p:nvPr/>
         </p:nvSpPr>
@@ -28502,7 +27537,7 @@
       </p:sp>
       <p:sp>
         <p:nvSpPr>
-          <p:cNvPr id="6" name="Rectangle 5"/>
+          <p:cNvPr id="5" name="Rectangle 4"/>
           <p:cNvSpPr/>
           <p:nvPr/>
         </p:nvSpPr>
@@ -28551,7 +27586,7 @@
       </p:sp>
       <p:sp>
         <p:nvSpPr>
-          <p:cNvPr id="7" name="TextBox 6"/>
+          <p:cNvPr id="6" name="TextBox 5"/>
           <p:cNvSpPr txBox="1"/>
           <p:nvPr/>
         </p:nvSpPr>
@@ -28593,7 +27628,7 @@
       </p:sp>
       <p:graphicFrame>
         <p:nvGraphicFramePr>
-          <p:cNvPr id="8" name="Table 7"/>
+          <p:cNvPr id="7" name="Table 6"/>
           <p:cNvGraphicFramePr>
             <a:graphicFrameLocks noGrp="1"/>
           </p:cNvGraphicFramePr>
@@ -28742,7 +27777,7 @@
                         <a:rPr>
                           <a:latin typeface="Inter"/>
                         </a:rPr>
-                        <a:t>● available</a:t>
+                        <a:t>● Available</a:t>
                       </a:r>
                     </a:p>
                   </a:txBody>
@@ -28825,7 +27860,7 @@
                         <a:rPr>
                           <a:latin typeface="Inter"/>
                         </a:rPr>
-                        <a:t>● available</a:t>
+                        <a:t>● Available</a:t>
                       </a:r>
                     </a:p>
                   </a:txBody>
@@ -28908,7 +27943,7 @@
                         <a:rPr>
                           <a:latin typeface="Inter"/>
                         </a:rPr>
-                        <a:t>● available</a:t>
+                        <a:t>● Available</a:t>
                       </a:r>
                     </a:p>
                   </a:txBody>
@@ -28991,7 +28026,7 @@
                         <a:rPr>
                           <a:latin typeface="Inter"/>
                         </a:rPr>
-                        <a:t>● degraded</a:t>
+                        <a:t>● Incomplete</a:t>
                       </a:r>
                     </a:p>
                   </a:txBody>
@@ -29074,7 +28109,7 @@
                         <a:rPr>
                           <a:latin typeface="Inter"/>
                         </a:rPr>
-                        <a:t>● available</a:t>
+                        <a:t>● Available</a:t>
                       </a:r>
                     </a:p>
                   </a:txBody>
@@ -29101,7 +28136,7 @@
                         <a:rPr>
                           <a:latin typeface="Inter"/>
                         </a:rPr>
-                        <a:t>Governed classes and drawdown charts [S6]</a:t>
+                        <a:t>Asset classes and drawdown charts [S6]</a:t>
                       </a:r>
                     </a:p>
                   </a:txBody>
@@ -29157,7 +28192,7 @@
                         <a:rPr>
                           <a:latin typeface="Inter"/>
                         </a:rPr>
-                        <a:t>● degraded</a:t>
+                        <a:t>● Incomplete</a:t>
                       </a:r>
                     </a:p>
                   </a:txBody>
@@ -29240,7 +28275,7 @@
                         <a:rPr>
                           <a:latin typeface="Inter"/>
                         </a:rPr>
-                        <a:t>● unavailable</a:t>
+                        <a:t>● Not available</a:t>
                       </a:r>
                     </a:p>
                   </a:txBody>
@@ -29323,7 +28358,7 @@
                         <a:rPr>
                           <a:latin typeface="Inter"/>
                         </a:rPr>
-                        <a:t>● not licensed</a:t>
+                        <a:t>● Not licensed</a:t>
                       </a:r>
                     </a:p>
                   </a:txBody>
@@ -29350,7 +28385,7 @@
                         <a:rPr>
                           <a:latin typeface="Inter"/>
                         </a:rPr>
-                        <a:t>Not licensed ? Peer allocation context was skipped because peerIntelligence is not available for this organization. This construction report uses portfolio evidence only. [S1]</a:t>
+                        <a:t>Peer allocation context was skipped because peer allocation intelligence is not licensed for this organization. This construction report uses portfolio evidence only. [S1]</a:t>
                       </a:r>
                     </a:p>
                   </a:txBody>
@@ -29367,7 +28402,7 @@
       </p:graphicFrame>
       <p:sp>
         <p:nvSpPr>
-          <p:cNvPr id="9" name="Rectangle 8"/>
+          <p:cNvPr id="8" name="Rectangle 7"/>
           <p:cNvSpPr/>
           <p:nvPr/>
         </p:nvSpPr>
@@ -29416,7 +28451,7 @@
       </p:sp>
       <p:sp>
         <p:nvSpPr>
-          <p:cNvPr id="10" name="TextBox 9"/>
+          <p:cNvPr id="9" name="TextBox 8"/>
           <p:cNvSpPr txBox="1"/>
           <p:nvPr/>
         </p:nvSpPr>
@@ -29458,7 +28493,7 @@
       </p:sp>
       <p:sp>
         <p:nvSpPr>
-          <p:cNvPr id="11" name="TextBox 10"/>
+          <p:cNvPr id="10" name="TextBox 9"/>
           <p:cNvSpPr txBox="1"/>
           <p:nvPr/>
         </p:nvSpPr>
@@ -29500,7 +28535,7 @@
       </p:sp>
       <p:sp>
         <p:nvSpPr>
-          <p:cNvPr id="12" name="TextBox 11"/>
+          <p:cNvPr id="11" name="TextBox 10"/>
           <p:cNvSpPr txBox="1"/>
           <p:nvPr/>
         </p:nvSpPr>
@@ -29615,48 +28650,6 @@
         </p:nvSpPr>
         <p:spPr>
           <a:xfrm>
-            <a:off x="5897880" y="310896"/>
-            <a:ext cx="4800600" cy="256032"/>
-          </a:xfrm>
-          <a:prstGeom prst="rect">
-            <a:avLst/>
-          </a:prstGeom>
-          <a:noFill/>
-        </p:spPr>
-        <p:txBody>
-          <a:bodyPr wrap="none" lIns="9144" rIns="9144" tIns="9144" bIns="9144" anchor="t">
-            <a:spAutoFit/>
-          </a:bodyPr>
-          <a:lstStyle/>
-          <a:p>
-            <a:pPr algn="r">
-              <a:spcAft>
-                <a:spcPts val="0"/>
-              </a:spcAft>
-              <a:defRPr sz="680" b="1">
-                <a:solidFill>
-                  <a:srgbClr val="4F6B00"/>
-                </a:solidFill>
-                <a:latin typeface="Inter"/>
-              </a:defRPr>
-            </a:pPr>
-            <a:r>
-              <a:rPr>
-                <a:latin typeface="Inter"/>
-              </a:rPr>
-              <a:t>Illustrative, Gradient Maintained — demo data, not the client's holdings or managers</a:t>
-            </a:r>
-          </a:p>
-        </p:txBody>
-      </p:sp>
-      <p:sp>
-        <p:nvSpPr>
-          <p:cNvPr id="4" name="TextBox 3"/>
-          <p:cNvSpPr txBox="1"/>
-          <p:nvPr/>
-        </p:nvSpPr>
-        <p:spPr>
-          <a:xfrm>
             <a:off x="640080" y="566928"/>
             <a:ext cx="10058400" cy="530352"/>
           </a:xfrm>
@@ -29693,7 +28686,7 @@
       </p:sp>
       <p:sp>
         <p:nvSpPr>
-          <p:cNvPr id="5" name="Rectangle 4"/>
+          <p:cNvPr id="4" name="Rectangle 3"/>
           <p:cNvSpPr/>
           <p:nvPr/>
         </p:nvSpPr>
@@ -29742,7 +28735,7 @@
       </p:sp>
       <p:sp>
         <p:nvSpPr>
-          <p:cNvPr id="6" name="Rectangle 5"/>
+          <p:cNvPr id="5" name="Rectangle 4"/>
           <p:cNvSpPr/>
           <p:nvPr/>
         </p:nvSpPr>
@@ -29791,7 +28784,7 @@
       </p:sp>
       <p:sp>
         <p:nvSpPr>
-          <p:cNvPr id="7" name="TextBox 6"/>
+          <p:cNvPr id="6" name="TextBox 5"/>
           <p:cNvSpPr txBox="1"/>
           <p:nvPr/>
         </p:nvSpPr>
@@ -29833,7 +28826,7 @@
       </p:sp>
       <p:graphicFrame>
         <p:nvGraphicFramePr>
-          <p:cNvPr id="8" name="Table 7"/>
+          <p:cNvPr id="7" name="Table 6"/>
           <p:cNvGraphicFramePr>
             <a:graphicFrameLocks noGrp="1"/>
           </p:cNvGraphicFramePr>
@@ -29851,14 +28844,10 @@
               </a:tblPr>
               <a:tblGrid>
                 <a:gridCol w="2011680"/>
-                <a:gridCol w="1112139"/>
-                <a:gridCol w="1112139"/>
-                <a:gridCol w="1112139"/>
-                <a:gridCol w="1112139"/>
-                <a:gridCol w="1112139"/>
-                <a:gridCol w="1112139"/>
-                <a:gridCol w="1112139"/>
-                <a:gridCol w="1112139"/>
+                <a:gridCol w="2224278"/>
+                <a:gridCol w="2224278"/>
+                <a:gridCol w="2224278"/>
+                <a:gridCol w="2224278"/>
               </a:tblGrid>
               <a:tr h="521208">
                 <a:tc>
@@ -29932,7 +28921,7 @@
                         <a:rPr>
                           <a:latin typeface="Inter"/>
                         </a:rPr>
-                        <a:t>Basis</a:t>
+                        <a:t>Source</a:t>
                       </a:r>
                     </a:p>
                   </a:txBody>
@@ -29959,7 +28948,7 @@
                         <a:rPr>
                           <a:latin typeface="Inter"/>
                         </a:rPr>
-                        <a:t>Tool / view</a:t>
+                        <a:t>As of</a:t>
                       </a:r>
                     </a:p>
                   </a:txBody>
@@ -29986,115 +28975,7 @@
                         <a:rPr>
                           <a:latin typeface="Inter"/>
                         </a:rPr>
-                        <a:t>Key parameters</a:t>
-                      </a:r>
-                    </a:p>
-                  </a:txBody>
-                  <a:tcPr marL="54864" marR="54864" marT="27432" marB="27432" anchor="ctr">
-                    <a:solidFill>
-                      <a:srgbClr val="0D1117"/>
-                    </a:solidFill>
-                  </a:tcPr>
-                </a:tc>
-                <a:tc>
-                  <a:txBody>
-                    <a:bodyPr/>
-                    <a:lstStyle/>
-                    <a:p>
-                      <a:pPr>
-                        <a:defRPr sz="750" b="1">
-                          <a:solidFill>
-                            <a:srgbClr val="FFFFFF"/>
-                          </a:solidFill>
-                          <a:latin typeface="Inter"/>
-                        </a:defRPr>
-                      </a:pPr>
-                      <a:r>
-                        <a:rPr>
-                          <a:latin typeface="Inter"/>
-                        </a:rPr>
-                        <a:t>As of</a:t>
-                      </a:r>
-                    </a:p>
-                  </a:txBody>
-                  <a:tcPr marL="54864" marR="54864" marT="27432" marB="27432" anchor="ctr">
-                    <a:solidFill>
-                      <a:srgbClr val="0D1117"/>
-                    </a:solidFill>
-                  </a:tcPr>
-                </a:tc>
-                <a:tc>
-                  <a:txBody>
-                    <a:bodyPr/>
-                    <a:lstStyle/>
-                    <a:p>
-                      <a:pPr>
-                        <a:defRPr sz="750" b="1">
-                          <a:solidFill>
-                            <a:srgbClr val="FFFFFF"/>
-                          </a:solidFill>
-                          <a:latin typeface="Inter"/>
-                        </a:defRPr>
-                      </a:pPr>
-                      <a:r>
-                        <a:rPr>
-                          <a:latin typeface="Inter"/>
-                        </a:rPr>
-                        <a:t>Data scope</a:t>
-                      </a:r>
-                    </a:p>
-                  </a:txBody>
-                  <a:tcPr marL="54864" marR="54864" marT="27432" marB="27432" anchor="ctr">
-                    <a:solidFill>
-                      <a:srgbClr val="0D1117"/>
-                    </a:solidFill>
-                  </a:tcPr>
-                </a:tc>
-                <a:tc>
-                  <a:txBody>
-                    <a:bodyPr/>
-                    <a:lstStyle/>
-                    <a:p>
-                      <a:pPr>
-                        <a:defRPr sz="750" b="1">
-                          <a:solidFill>
-                            <a:srgbClr val="FFFFFF"/>
-                          </a:solidFill>
-                          <a:latin typeface="Inter"/>
-                        </a:defRPr>
-                      </a:pPr>
-                      <a:r>
-                        <a:rPr>
-                          <a:latin typeface="Inter"/>
-                        </a:rPr>
-                        <a:t>Validation</a:t>
-                      </a:r>
-                    </a:p>
-                  </a:txBody>
-                  <a:tcPr marL="54864" marR="54864" marT="27432" marB="27432" anchor="ctr">
-                    <a:solidFill>
-                      <a:srgbClr val="0D1117"/>
-                    </a:solidFill>
-                  </a:tcPr>
-                </a:tc>
-                <a:tc>
-                  <a:txBody>
-                    <a:bodyPr/>
-                    <a:lstStyle/>
-                    <a:p>
-                      <a:pPr>
-                        <a:defRPr sz="750" b="1">
-                          <a:solidFill>
-                            <a:srgbClr val="FFFFFF"/>
-                          </a:solidFill>
-                          <a:latin typeface="Inter"/>
-                        </a:defRPr>
-                      </a:pPr>
-                      <a:r>
-                        <a:rPr>
-                          <a:latin typeface="Inter"/>
-                        </a:rPr>
-                        <a:t>Digest</a:t>
+                        <a:t>Check</a:t>
                       </a:r>
                     </a:p>
                   </a:txBody>
@@ -30112,7 +28993,7 @@
                     <a:lstStyle/>
                     <a:p>
                       <a:pPr>
-                        <a:defRPr sz="650" b="1">
+                        <a:defRPr sz="720" b="1">
                           <a:solidFill>
                             <a:srgbClr val="0D1117"/>
                           </a:solidFill>
@@ -30139,7 +29020,7 @@
                     <a:lstStyle/>
                     <a:p>
                       <a:pPr>
-                        <a:defRPr sz="650" b="0">
+                        <a:defRPr sz="720" b="0">
                           <a:solidFill>
                             <a:srgbClr val="0D1117"/>
                           </a:solidFill>
@@ -30166,18 +29047,18 @@
                     <a:lstStyle/>
                     <a:p>
                       <a:pPr>
-                        <a:defRPr sz="650" b="0">
-                          <a:solidFill>
-                            <a:srgbClr val="0D1117"/>
-                          </a:solidFill>
-                          <a:latin typeface="Inter"/>
-                        </a:defRPr>
-                      </a:pPr>
-                      <a:r>
-                        <a:rPr>
-                          <a:latin typeface="Inter"/>
-                        </a:rPr>
-                        <a:t>gradient_tool</a:t>
+                        <a:defRPr sz="720" b="0">
+                          <a:solidFill>
+                            <a:srgbClr val="0D1117"/>
+                          </a:solidFill>
+                          <a:latin typeface="Inter"/>
+                        </a:defRPr>
+                      </a:pPr>
+                      <a:r>
+                        <a:rPr>
+                          <a:latin typeface="Inter"/>
+                        </a:rPr>
+                        <a:t>list_organizations; get_gradient_capabilities</a:t>
                       </a:r>
                     </a:p>
                   </a:txBody>
@@ -30193,18 +29074,18 @@
                     <a:lstStyle/>
                     <a:p>
                       <a:pPr>
-                        <a:defRPr sz="650" b="0">
-                          <a:solidFill>
-                            <a:srgbClr val="0D1117"/>
-                          </a:solidFill>
-                          <a:latin typeface="Inter"/>
-                        </a:defRPr>
-                      </a:pPr>
-                      <a:r>
-                        <a:rPr>
-                          <a:latin typeface="Inter"/>
-                        </a:rPr>
-                        <a:t>list_organizations; get_gradient_capabilities</a:t>
+                        <a:defRPr sz="720" b="0">
+                          <a:solidFill>
+                            <a:srgbClr val="0D1117"/>
+                          </a:solidFill>
+                          <a:latin typeface="Inter"/>
+                        </a:defRPr>
+                      </a:pPr>
+                      <a:r>
+                        <a:rPr>
+                          <a:latin typeface="Inter"/>
+                        </a:rPr>
+                        <a:t>2026-06-30</a:t>
                       </a:r>
                     </a:p>
                   </a:txBody>
@@ -30220,132 +29101,24 @@
                     <a:lstStyle/>
                     <a:p>
                       <a:pPr>
-                        <a:defRPr sz="650" b="0">
-                          <a:solidFill>
-                            <a:srgbClr val="0D1117"/>
-                          </a:solidFill>
-                          <a:latin typeface="Inter"/>
-                        </a:defRPr>
-                      </a:pPr>
-                      <a:r>
-                        <a:rPr>
-                          <a:latin typeface="Inter"/>
-                        </a:rPr>
-                        <a:t>organization=test</a:t>
-                      </a:r>
-                    </a:p>
-                  </a:txBody>
-                  <a:tcPr marL="54864" marR="54864" marT="27432" marB="27432" anchor="ctr">
-                    <a:solidFill>
-                      <a:srgbClr val="FFFFFF"/>
-                    </a:solidFill>
-                  </a:tcPr>
-                </a:tc>
-                <a:tc>
-                  <a:txBody>
-                    <a:bodyPr/>
-                    <a:lstStyle/>
-                    <a:p>
-                      <a:pPr>
-                        <a:defRPr sz="650" b="0">
-                          <a:solidFill>
-                            <a:srgbClr val="0D1117"/>
-                          </a:solidFill>
-                          <a:latin typeface="Inter"/>
-                        </a:defRPr>
-                      </a:pPr>
-                      <a:r>
-                        <a:rPr>
-                          <a:latin typeface="Inter"/>
-                        </a:rPr>
-                        <a:t>2026-06-30</a:t>
-                      </a:r>
-                    </a:p>
-                  </a:txBody>
-                  <a:tcPr marL="54864" marR="54864" marT="27432" marB="27432" anchor="ctr">
-                    <a:solidFill>
-                      <a:srgbClr val="FFFFFF"/>
-                    </a:solidFill>
-                  </a:tcPr>
-                </a:tc>
-                <a:tc>
-                  <a:txBody>
-                    <a:bodyPr/>
-                    <a:lstStyle/>
-                    <a:p>
-                      <a:pPr>
-                        <a:defRPr sz="650" b="0">
-                          <a:solidFill>
-                            <a:srgbClr val="0D1117"/>
-                          </a:solidFill>
-                          <a:latin typeface="Inter"/>
-                        </a:defRPr>
-                      </a:pPr>
-                      <a:r>
-                        <a:rPr>
-                          <a:latin typeface="Inter"/>
-                        </a:rPr>
-                        <a:t>Illustrative sample data</a:t>
-                      </a:r>
-                    </a:p>
-                  </a:txBody>
-                  <a:tcPr marL="54864" marR="54864" marT="27432" marB="27432" anchor="ctr">
-                    <a:solidFill>
-                      <a:srgbClr val="FFFFFF"/>
-                    </a:solidFill>
-                  </a:tcPr>
-                </a:tc>
-                <a:tc>
-                  <a:txBody>
-                    <a:bodyPr/>
-                    <a:lstStyle/>
-                    <a:p>
-                      <a:pPr>
-                        <a:defRPr sz="650" b="0">
-                          <a:solidFill>
-                            <a:srgbClr val="0D1117"/>
-                          </a:solidFill>
-                          <a:latin typeface="Inter"/>
-                        </a:defRPr>
-                      </a:pPr>
-                      <a:r>
-                        <a:rPr>
-                          <a:latin typeface="Inter"/>
-                        </a:rPr>
-                        <a:t>passed</a:t>
-                      </a:r>
-                    </a:p>
-                  </a:txBody>
-                  <a:tcPr marL="54864" marR="54864" marT="27432" marB="27432" anchor="ctr">
-                    <a:solidFill>
-                      <a:srgbClr val="FFFFFF"/>
-                    </a:solidFill>
-                  </a:tcPr>
-                </a:tc>
-                <a:tc>
-                  <a:txBody>
-                    <a:bodyPr/>
-                    <a:lstStyle/>
-                    <a:p>
-                      <a:pPr>
-                        <a:defRPr sz="650" b="0">
-                          <a:solidFill>
-                            <a:srgbClr val="0D1117"/>
-                          </a:solidFill>
-                          <a:latin typeface="Inter"/>
-                        </a:defRPr>
-                      </a:pPr>
-                      <a:r>
-                        <a:rPr>
-                          <a:latin typeface="Inter"/>
-                        </a:rPr>
-                        <a:t>sha256:aaaaaaaaaaaaaaaaaaaaaaaaaaaaaaaaaaaaaaaaaaaaaaaaaaaaaaaaaaaaaaaa</a:t>
-                      </a:r>
-                    </a:p>
-                  </a:txBody>
-                  <a:tcPr marL="54864" marR="54864" marT="27432" marB="27432" anchor="ctr">
-                    <a:solidFill>
-                      <a:srgbClr val="FFFFFF"/>
+                        <a:defRPr sz="720" b="1">
+                          <a:solidFill>
+                            <a:srgbClr val="C6F432"/>
+                          </a:solidFill>
+                          <a:latin typeface="Inter"/>
+                        </a:defRPr>
+                      </a:pPr>
+                      <a:r>
+                        <a:rPr>
+                          <a:latin typeface="Inter"/>
+                        </a:rPr>
+                        <a:t>● Passed</a:t>
+                      </a:r>
+                    </a:p>
+                  </a:txBody>
+                  <a:tcPr marL="54864" marR="54864" marT="27432" marB="27432" anchor="ctr">
+                    <a:solidFill>
+                      <a:srgbClr val="F5F7F9"/>
                     </a:solidFill>
                   </a:tcPr>
                 </a:tc>
@@ -30357,7 +29130,7 @@
                     <a:lstStyle/>
                     <a:p>
                       <a:pPr>
-                        <a:defRPr sz="650" b="1">
+                        <a:defRPr sz="720" b="1">
                           <a:solidFill>
                             <a:srgbClr val="0D1117"/>
                           </a:solidFill>
@@ -30384,7 +29157,7 @@
                     <a:lstStyle/>
                     <a:p>
                       <a:pPr>
-                        <a:defRPr sz="650" b="0">
+                        <a:defRPr sz="720" b="0">
                           <a:solidFill>
                             <a:srgbClr val="0D1117"/>
                           </a:solidFill>
@@ -30411,18 +29184,18 @@
                     <a:lstStyle/>
                     <a:p>
                       <a:pPr>
-                        <a:defRPr sz="650" b="0">
-                          <a:solidFill>
-                            <a:srgbClr val="0D1117"/>
-                          </a:solidFill>
-                          <a:latin typeface="Inter"/>
-                        </a:defRPr>
-                      </a:pPr>
-                      <a:r>
-                        <a:rPr>
-                          <a:latin typeface="Inter"/>
-                        </a:rPr>
-                        <a:t>gradient_tool</a:t>
+                        <a:defRPr sz="720" b="0">
+                          <a:solidFill>
+                            <a:srgbClr val="0D1117"/>
+                          </a:solidFill>
+                          <a:latin typeface="Inter"/>
+                        </a:defRPr>
+                      </a:pPr>
+                      <a:r>
+                        <a:rPr>
+                          <a:latin typeface="Inter"/>
+                        </a:rPr>
+                        <a:t>list_portfolios; get_portfolio_structure</a:t>
                       </a:r>
                     </a:p>
                   </a:txBody>
@@ -30438,18 +29211,18 @@
                     <a:lstStyle/>
                     <a:p>
                       <a:pPr>
-                        <a:defRPr sz="650" b="0">
-                          <a:solidFill>
-                            <a:srgbClr val="0D1117"/>
-                          </a:solidFill>
-                          <a:latin typeface="Inter"/>
-                        </a:defRPr>
-                      </a:pPr>
-                      <a:r>
-                        <a:rPr>
-                          <a:latin typeface="Inter"/>
-                        </a:rPr>
-                        <a:t>list_portfolios; get_portfolio_structure</a:t>
+                        <a:defRPr sz="720" b="0">
+                          <a:solidFill>
+                            <a:srgbClr val="0D1117"/>
+                          </a:solidFill>
+                          <a:latin typeface="Inter"/>
+                        </a:defRPr>
+                      </a:pPr>
+                      <a:r>
+                        <a:rPr>
+                          <a:latin typeface="Inter"/>
+                        </a:rPr>
+                        <a:t>2026-06-30</a:t>
                       </a:r>
                     </a:p>
                   </a:txBody>
@@ -30465,126 +29238,18 @@
                     <a:lstStyle/>
                     <a:p>
                       <a:pPr>
-                        <a:defRPr sz="650" b="0">
-                          <a:solidFill>
-                            <a:srgbClr val="0D1117"/>
-                          </a:solidFill>
-                          <a:latin typeface="Inter"/>
-                        </a:defRPr>
-                      </a:pPr>
-                      <a:r>
-                        <a:rPr>
-                          <a:latin typeface="Inter"/>
-                        </a:rPr>
-                        <a:t>allocation_tree</a:t>
-                      </a:r>
-                    </a:p>
-                  </a:txBody>
-                  <a:tcPr marL="54864" marR="54864" marT="27432" marB="27432" anchor="ctr">
-                    <a:solidFill>
-                      <a:srgbClr val="F5F7F9"/>
-                    </a:solidFill>
-                  </a:tcPr>
-                </a:tc>
-                <a:tc>
-                  <a:txBody>
-                    <a:bodyPr/>
-                    <a:lstStyle/>
-                    <a:p>
-                      <a:pPr>
-                        <a:defRPr sz="650" b="0">
-                          <a:solidFill>
-                            <a:srgbClr val="0D1117"/>
-                          </a:solidFill>
-                          <a:latin typeface="Inter"/>
-                        </a:defRPr>
-                      </a:pPr>
-                      <a:r>
-                        <a:rPr>
-                          <a:latin typeface="Inter"/>
-                        </a:rPr>
-                        <a:t>2026-06-30</a:t>
-                      </a:r>
-                    </a:p>
-                  </a:txBody>
-                  <a:tcPr marL="54864" marR="54864" marT="27432" marB="27432" anchor="ctr">
-                    <a:solidFill>
-                      <a:srgbClr val="F5F7F9"/>
-                    </a:solidFill>
-                  </a:tcPr>
-                </a:tc>
-                <a:tc>
-                  <a:txBody>
-                    <a:bodyPr/>
-                    <a:lstStyle/>
-                    <a:p>
-                      <a:pPr>
-                        <a:defRPr sz="650" b="0">
-                          <a:solidFill>
-                            <a:srgbClr val="0D1117"/>
-                          </a:solidFill>
-                          <a:latin typeface="Inter"/>
-                        </a:defRPr>
-                      </a:pPr>
-                      <a:r>
-                        <a:rPr>
-                          <a:latin typeface="Inter"/>
-                        </a:rPr>
-                        <a:t>Illustrative sample data</a:t>
-                      </a:r>
-                    </a:p>
-                  </a:txBody>
-                  <a:tcPr marL="54864" marR="54864" marT="27432" marB="27432" anchor="ctr">
-                    <a:solidFill>
-                      <a:srgbClr val="F5F7F9"/>
-                    </a:solidFill>
-                  </a:tcPr>
-                </a:tc>
-                <a:tc>
-                  <a:txBody>
-                    <a:bodyPr/>
-                    <a:lstStyle/>
-                    <a:p>
-                      <a:pPr>
-                        <a:defRPr sz="650" b="0">
-                          <a:solidFill>
-                            <a:srgbClr val="0D1117"/>
-                          </a:solidFill>
-                          <a:latin typeface="Inter"/>
-                        </a:defRPr>
-                      </a:pPr>
-                      <a:r>
-                        <a:rPr>
-                          <a:latin typeface="Inter"/>
-                        </a:rPr>
-                        <a:t>passed</a:t>
-                      </a:r>
-                    </a:p>
-                  </a:txBody>
-                  <a:tcPr marL="54864" marR="54864" marT="27432" marB="27432" anchor="ctr">
-                    <a:solidFill>
-                      <a:srgbClr val="F5F7F9"/>
-                    </a:solidFill>
-                  </a:tcPr>
-                </a:tc>
-                <a:tc>
-                  <a:txBody>
-                    <a:bodyPr/>
-                    <a:lstStyle/>
-                    <a:p>
-                      <a:pPr>
-                        <a:defRPr sz="650" b="0">
-                          <a:solidFill>
-                            <a:srgbClr val="0D1117"/>
-                          </a:solidFill>
-                          <a:latin typeface="Inter"/>
-                        </a:defRPr>
-                      </a:pPr>
-                      <a:r>
-                        <a:rPr>
-                          <a:latin typeface="Inter"/>
-                        </a:rPr>
-                        <a:t>sha256:aaaaaaaaaaaaaaaaaaaaaaaaaaaaaaaaaaaaaaaaaaaaaaaaaaaaaaaaaaaaaaaa</a:t>
+                        <a:defRPr sz="720" b="1">
+                          <a:solidFill>
+                            <a:srgbClr val="C6F432"/>
+                          </a:solidFill>
+                          <a:latin typeface="Inter"/>
+                        </a:defRPr>
+                      </a:pPr>
+                      <a:r>
+                        <a:rPr>
+                          <a:latin typeface="Inter"/>
+                        </a:rPr>
+                        <a:t>● Passed</a:t>
                       </a:r>
                     </a:p>
                   </a:txBody>
@@ -30602,7 +29267,7 @@
                     <a:lstStyle/>
                     <a:p>
                       <a:pPr>
-                        <a:defRPr sz="650" b="1">
+                        <a:defRPr sz="720" b="1">
                           <a:solidFill>
                             <a:srgbClr val="0D1117"/>
                           </a:solidFill>
@@ -30629,7 +29294,7 @@
                     <a:lstStyle/>
                     <a:p>
                       <a:pPr>
-                        <a:defRPr sz="650" b="0">
+                        <a:defRPr sz="720" b="0">
                           <a:solidFill>
                             <a:srgbClr val="0D1117"/>
                           </a:solidFill>
@@ -30656,18 +29321,18 @@
                     <a:lstStyle/>
                     <a:p>
                       <a:pPr>
-                        <a:defRPr sz="650" b="0">
-                          <a:solidFill>
-                            <a:srgbClr val="0D1117"/>
-                          </a:solidFill>
-                          <a:latin typeface="Inter"/>
-                        </a:defRPr>
-                      </a:pPr>
-                      <a:r>
-                        <a:rPr>
-                          <a:latin typeface="Inter"/>
-                        </a:rPr>
-                        <a:t>gradient_tool</a:t>
+                        <a:defRPr sz="720" b="0">
+                          <a:solidFill>
+                            <a:srgbClr val="0D1117"/>
+                          </a:solidFill>
+                          <a:latin typeface="Inter"/>
+                        </a:defRPr>
+                      </a:pPr>
+                      <a:r>
+                        <a:rPr>
+                          <a:latin typeface="Inter"/>
+                        </a:rPr>
+                        <a:t>check_portfolio_policy</a:t>
                       </a:r>
                     </a:p>
                   </a:txBody>
@@ -30683,18 +29348,18 @@
                     <a:lstStyle/>
                     <a:p>
                       <a:pPr>
-                        <a:defRPr sz="650" b="0">
-                          <a:solidFill>
-                            <a:srgbClr val="0D1117"/>
-                          </a:solidFill>
-                          <a:latin typeface="Inter"/>
-                        </a:defRPr>
-                      </a:pPr>
-                      <a:r>
-                        <a:rPr>
-                          <a:latin typeface="Inter"/>
-                        </a:rPr>
-                        <a:t>check_portfolio_policy</a:t>
+                        <a:defRPr sz="720" b="0">
+                          <a:solidFill>
+                            <a:srgbClr val="0D1117"/>
+                          </a:solidFill>
+                          <a:latin typeface="Inter"/>
+                        </a:defRPr>
+                      </a:pPr>
+                      <a:r>
+                        <a:rPr>
+                          <a:latin typeface="Inter"/>
+                        </a:rPr>
+                        <a:t>2026-06-30</a:t>
                       </a:r>
                     </a:p>
                   </a:txBody>
@@ -30710,132 +29375,24 @@
                     <a:lstStyle/>
                     <a:p>
                       <a:pPr>
-                        <a:defRPr sz="650" b="0">
-                          <a:solidFill>
-                            <a:srgbClr val="0D1117"/>
-                          </a:solidFill>
-                          <a:latin typeface="Inter"/>
-                        </a:defRPr>
-                      </a:pPr>
-                      <a:r>
-                        <a:rPr>
-                          <a:latin typeface="Inter"/>
-                        </a:rPr>
-                        <a:t>portfolio=test</a:t>
-                      </a:r>
-                    </a:p>
-                  </a:txBody>
-                  <a:tcPr marL="54864" marR="54864" marT="27432" marB="27432" anchor="ctr">
-                    <a:solidFill>
-                      <a:srgbClr val="FFFFFF"/>
-                    </a:solidFill>
-                  </a:tcPr>
-                </a:tc>
-                <a:tc>
-                  <a:txBody>
-                    <a:bodyPr/>
-                    <a:lstStyle/>
-                    <a:p>
-                      <a:pPr>
-                        <a:defRPr sz="650" b="0">
-                          <a:solidFill>
-                            <a:srgbClr val="0D1117"/>
-                          </a:solidFill>
-                          <a:latin typeface="Inter"/>
-                        </a:defRPr>
-                      </a:pPr>
-                      <a:r>
-                        <a:rPr>
-                          <a:latin typeface="Inter"/>
-                        </a:rPr>
-                        <a:t>2026-06-30</a:t>
-                      </a:r>
-                    </a:p>
-                  </a:txBody>
-                  <a:tcPr marL="54864" marR="54864" marT="27432" marB="27432" anchor="ctr">
-                    <a:solidFill>
-                      <a:srgbClr val="FFFFFF"/>
-                    </a:solidFill>
-                  </a:tcPr>
-                </a:tc>
-                <a:tc>
-                  <a:txBody>
-                    <a:bodyPr/>
-                    <a:lstStyle/>
-                    <a:p>
-                      <a:pPr>
-                        <a:defRPr sz="650" b="0">
-                          <a:solidFill>
-                            <a:srgbClr val="0D1117"/>
-                          </a:solidFill>
-                          <a:latin typeface="Inter"/>
-                        </a:defRPr>
-                      </a:pPr>
-                      <a:r>
-                        <a:rPr>
-                          <a:latin typeface="Inter"/>
-                        </a:rPr>
-                        <a:t>Illustrative sample data</a:t>
-                      </a:r>
-                    </a:p>
-                  </a:txBody>
-                  <a:tcPr marL="54864" marR="54864" marT="27432" marB="27432" anchor="ctr">
-                    <a:solidFill>
-                      <a:srgbClr val="FFFFFF"/>
-                    </a:solidFill>
-                  </a:tcPr>
-                </a:tc>
-                <a:tc>
-                  <a:txBody>
-                    <a:bodyPr/>
-                    <a:lstStyle/>
-                    <a:p>
-                      <a:pPr>
-                        <a:defRPr sz="650" b="0">
-                          <a:solidFill>
-                            <a:srgbClr val="0D1117"/>
-                          </a:solidFill>
-                          <a:latin typeface="Inter"/>
-                        </a:defRPr>
-                      </a:pPr>
-                      <a:r>
-                        <a:rPr>
-                          <a:latin typeface="Inter"/>
-                        </a:rPr>
-                        <a:t>passed</a:t>
-                      </a:r>
-                    </a:p>
-                  </a:txBody>
-                  <a:tcPr marL="54864" marR="54864" marT="27432" marB="27432" anchor="ctr">
-                    <a:solidFill>
-                      <a:srgbClr val="FFFFFF"/>
-                    </a:solidFill>
-                  </a:tcPr>
-                </a:tc>
-                <a:tc>
-                  <a:txBody>
-                    <a:bodyPr/>
-                    <a:lstStyle/>
-                    <a:p>
-                      <a:pPr>
-                        <a:defRPr sz="650" b="0">
-                          <a:solidFill>
-                            <a:srgbClr val="0D1117"/>
-                          </a:solidFill>
-                          <a:latin typeface="Inter"/>
-                        </a:defRPr>
-                      </a:pPr>
-                      <a:r>
-                        <a:rPr>
-                          <a:latin typeface="Inter"/>
-                        </a:rPr>
-                        <a:t>sha256:aaaaaaaaaaaaaaaaaaaaaaaaaaaaaaaaaaaaaaaaaaaaaaaaaaaaaaaaaaaaaaaa</a:t>
-                      </a:r>
-                    </a:p>
-                  </a:txBody>
-                  <a:tcPr marL="54864" marR="54864" marT="27432" marB="27432" anchor="ctr">
-                    <a:solidFill>
-                      <a:srgbClr val="FFFFFF"/>
+                        <a:defRPr sz="720" b="1">
+                          <a:solidFill>
+                            <a:srgbClr val="C6F432"/>
+                          </a:solidFill>
+                          <a:latin typeface="Inter"/>
+                        </a:defRPr>
+                      </a:pPr>
+                      <a:r>
+                        <a:rPr>
+                          <a:latin typeface="Inter"/>
+                        </a:rPr>
+                        <a:t>● Passed</a:t>
+                      </a:r>
+                    </a:p>
+                  </a:txBody>
+                  <a:tcPr marL="54864" marR="54864" marT="27432" marB="27432" anchor="ctr">
+                    <a:solidFill>
+                      <a:srgbClr val="F5F7F9"/>
                     </a:solidFill>
                   </a:tcPr>
                 </a:tc>
@@ -30847,7 +29404,7 @@
                     <a:lstStyle/>
                     <a:p>
                       <a:pPr>
-                        <a:defRPr sz="650" b="1">
+                        <a:defRPr sz="720" b="1">
                           <a:solidFill>
                             <a:srgbClr val="0D1117"/>
                           </a:solidFill>
@@ -30874,7 +29431,7 @@
                     <a:lstStyle/>
                     <a:p>
                       <a:pPr>
-                        <a:defRPr sz="650" b="0">
+                        <a:defRPr sz="720" b="0">
                           <a:solidFill>
                             <a:srgbClr val="0D1117"/>
                           </a:solidFill>
@@ -30901,18 +29458,18 @@
                     <a:lstStyle/>
                     <a:p>
                       <a:pPr>
-                        <a:defRPr sz="650" b="0">
-                          <a:solidFill>
-                            <a:srgbClr val="0D1117"/>
-                          </a:solidFill>
-                          <a:latin typeface="Inter"/>
-                        </a:defRPr>
-                      </a:pPr>
-                      <a:r>
-                        <a:rPr>
-                          <a:latin typeface="Inter"/>
-                        </a:rPr>
-                        <a:t>gradient_tool</a:t>
+                        <a:defRPr sz="720" b="0">
+                          <a:solidFill>
+                            <a:srgbClr val="0D1117"/>
+                          </a:solidFill>
+                          <a:latin typeface="Inter"/>
+                        </a:defRPr>
+                      </a:pPr>
+                      <a:r>
+                        <a:rPr>
+                          <a:latin typeface="Inter"/>
+                        </a:rPr>
+                        <a:t>get_portfolio_exposure</a:t>
                       </a:r>
                     </a:p>
                   </a:txBody>
@@ -30928,18 +29485,18 @@
                     <a:lstStyle/>
                     <a:p>
                       <a:pPr>
-                        <a:defRPr sz="650" b="0">
-                          <a:solidFill>
-                            <a:srgbClr val="0D1117"/>
-                          </a:solidFill>
-                          <a:latin typeface="Inter"/>
-                        </a:defRPr>
-                      </a:pPr>
-                      <a:r>
-                        <a:rPr>
-                          <a:latin typeface="Inter"/>
-                        </a:rPr>
-                        <a:t>get_portfolio_exposure</a:t>
+                        <a:defRPr sz="720" b="0">
+                          <a:solidFill>
+                            <a:srgbClr val="0D1117"/>
+                          </a:solidFill>
+                          <a:latin typeface="Inter"/>
+                        </a:defRPr>
+                      </a:pPr>
+                      <a:r>
+                        <a:rPr>
+                          <a:latin typeface="Inter"/>
+                        </a:rPr>
+                        <a:t>2026-06-30</a:t>
                       </a:r>
                     </a:p>
                   </a:txBody>
@@ -30955,126 +29512,18 @@
                     <a:lstStyle/>
                     <a:p>
                       <a:pPr>
-                        <a:defRPr sz="650" b="0">
-                          <a:solidFill>
-                            <a:srgbClr val="0D1117"/>
-                          </a:solidFill>
-                          <a:latin typeface="Inter"/>
-                        </a:defRPr>
-                      </a:pPr>
-                      <a:r>
-                        <a:rPr>
-                          <a:latin typeface="Inter"/>
-                        </a:rPr>
-                        <a:t>all pages</a:t>
-                      </a:r>
-                    </a:p>
-                  </a:txBody>
-                  <a:tcPr marL="54864" marR="54864" marT="27432" marB="27432" anchor="ctr">
-                    <a:solidFill>
-                      <a:srgbClr val="F5F7F9"/>
-                    </a:solidFill>
-                  </a:tcPr>
-                </a:tc>
-                <a:tc>
-                  <a:txBody>
-                    <a:bodyPr/>
-                    <a:lstStyle/>
-                    <a:p>
-                      <a:pPr>
-                        <a:defRPr sz="650" b="0">
-                          <a:solidFill>
-                            <a:srgbClr val="0D1117"/>
-                          </a:solidFill>
-                          <a:latin typeface="Inter"/>
-                        </a:defRPr>
-                      </a:pPr>
-                      <a:r>
-                        <a:rPr>
-                          <a:latin typeface="Inter"/>
-                        </a:rPr>
-                        <a:t>2026-06-30</a:t>
-                      </a:r>
-                    </a:p>
-                  </a:txBody>
-                  <a:tcPr marL="54864" marR="54864" marT="27432" marB="27432" anchor="ctr">
-                    <a:solidFill>
-                      <a:srgbClr val="F5F7F9"/>
-                    </a:solidFill>
-                  </a:tcPr>
-                </a:tc>
-                <a:tc>
-                  <a:txBody>
-                    <a:bodyPr/>
-                    <a:lstStyle/>
-                    <a:p>
-                      <a:pPr>
-                        <a:defRPr sz="650" b="0">
-                          <a:solidFill>
-                            <a:srgbClr val="0D1117"/>
-                          </a:solidFill>
-                          <a:latin typeface="Inter"/>
-                        </a:defRPr>
-                      </a:pPr>
-                      <a:r>
-                        <a:rPr>
-                          <a:latin typeface="Inter"/>
-                        </a:rPr>
-                        <a:t>Illustrative sample data</a:t>
-                      </a:r>
-                    </a:p>
-                  </a:txBody>
-                  <a:tcPr marL="54864" marR="54864" marT="27432" marB="27432" anchor="ctr">
-                    <a:solidFill>
-                      <a:srgbClr val="F5F7F9"/>
-                    </a:solidFill>
-                  </a:tcPr>
-                </a:tc>
-                <a:tc>
-                  <a:txBody>
-                    <a:bodyPr/>
-                    <a:lstStyle/>
-                    <a:p>
-                      <a:pPr>
-                        <a:defRPr sz="650" b="0">
-                          <a:solidFill>
-                            <a:srgbClr val="0D1117"/>
-                          </a:solidFill>
-                          <a:latin typeface="Inter"/>
-                        </a:defRPr>
-                      </a:pPr>
-                      <a:r>
-                        <a:rPr>
-                          <a:latin typeface="Inter"/>
-                        </a:rPr>
-                        <a:t>passed</a:t>
-                      </a:r>
-                    </a:p>
-                  </a:txBody>
-                  <a:tcPr marL="54864" marR="54864" marT="27432" marB="27432" anchor="ctr">
-                    <a:solidFill>
-                      <a:srgbClr val="F5F7F9"/>
-                    </a:solidFill>
-                  </a:tcPr>
-                </a:tc>
-                <a:tc>
-                  <a:txBody>
-                    <a:bodyPr/>
-                    <a:lstStyle/>
-                    <a:p>
-                      <a:pPr>
-                        <a:defRPr sz="650" b="0">
-                          <a:solidFill>
-                            <a:srgbClr val="0D1117"/>
-                          </a:solidFill>
-                          <a:latin typeface="Inter"/>
-                        </a:defRPr>
-                      </a:pPr>
-                      <a:r>
-                        <a:rPr>
-                          <a:latin typeface="Inter"/>
-                        </a:rPr>
-                        <a:t>sha256:aaaaaaaaaaaaaaaaaaaaaaaaaaaaaaaaaaaaaaaaaaaaaaaaaaaaaaaaaaaaaaaa</a:t>
+                        <a:defRPr sz="720" b="1">
+                          <a:solidFill>
+                            <a:srgbClr val="C6F432"/>
+                          </a:solidFill>
+                          <a:latin typeface="Inter"/>
+                        </a:defRPr>
+                      </a:pPr>
+                      <a:r>
+                        <a:rPr>
+                          <a:latin typeface="Inter"/>
+                        </a:rPr>
+                        <a:t>● Passed</a:t>
                       </a:r>
                     </a:p>
                   </a:txBody>
@@ -31092,7 +29541,7 @@
                     <a:lstStyle/>
                     <a:p>
                       <a:pPr>
-                        <a:defRPr sz="650" b="1">
+                        <a:defRPr sz="720" b="1">
                           <a:solidFill>
                             <a:srgbClr val="0D1117"/>
                           </a:solidFill>
@@ -31119,7 +29568,7 @@
                     <a:lstStyle/>
                     <a:p>
                       <a:pPr>
-                        <a:defRPr sz="650" b="0">
+                        <a:defRPr sz="720" b="0">
                           <a:solidFill>
                             <a:srgbClr val="0D1117"/>
                           </a:solidFill>
@@ -31146,18 +29595,18 @@
                     <a:lstStyle/>
                     <a:p>
                       <a:pPr>
-                        <a:defRPr sz="650" b="0">
-                          <a:solidFill>
-                            <a:srgbClr val="0D1117"/>
-                          </a:solidFill>
-                          <a:latin typeface="Inter"/>
-                        </a:defRPr>
-                      </a:pPr>
-                      <a:r>
-                        <a:rPr>
-                          <a:latin typeface="Inter"/>
-                        </a:rPr>
-                        <a:t>gradient_tool</a:t>
+                        <a:defRPr sz="720" b="0">
+                          <a:solidFill>
+                            <a:srgbClr val="0D1117"/>
+                          </a:solidFill>
+                          <a:latin typeface="Inter"/>
+                        </a:defRPr>
+                      </a:pPr>
+                      <a:r>
+                        <a:rPr>
+                          <a:latin typeface="Inter"/>
+                        </a:rPr>
+                        <a:t>get_portfolio_historical_returns; get_portfolio_attribution</a:t>
                       </a:r>
                     </a:p>
                   </a:txBody>
@@ -31173,18 +29622,18 @@
                     <a:lstStyle/>
                     <a:p>
                       <a:pPr>
-                        <a:defRPr sz="650" b="0">
-                          <a:solidFill>
-                            <a:srgbClr val="0D1117"/>
-                          </a:solidFill>
-                          <a:latin typeface="Inter"/>
-                        </a:defRPr>
-                      </a:pPr>
-                      <a:r>
-                        <a:rPr>
-                          <a:latin typeface="Inter"/>
-                        </a:rPr>
-                        <a:t>get_portfolio_historical_returns; get_portfolio_attribution</a:t>
+                        <a:defRPr sz="720" b="0">
+                          <a:solidFill>
+                            <a:srgbClr val="0D1117"/>
+                          </a:solidFill>
+                          <a:latin typeface="Inter"/>
+                        </a:defRPr>
+                      </a:pPr>
+                      <a:r>
+                        <a:rPr>
+                          <a:latin typeface="Inter"/>
+                        </a:rPr>
+                        <a:t>2026-06-30</a:t>
                       </a:r>
                     </a:p>
                   </a:txBody>
@@ -31200,132 +29649,24 @@
                     <a:lstStyle/>
                     <a:p>
                       <a:pPr>
-                        <a:defRPr sz="650" b="0">
-                          <a:solidFill>
-                            <a:srgbClr val="0D1117"/>
-                          </a:solidFill>
-                          <a:latin typeface="Inter"/>
-                        </a:defRPr>
-                      </a:pPr>
-                      <a:r>
-                        <a:rPr>
-                          <a:latin typeface="Inter"/>
-                        </a:rPr>
-                        <a:t>all sections</a:t>
-                      </a:r>
-                    </a:p>
-                  </a:txBody>
-                  <a:tcPr marL="54864" marR="54864" marT="27432" marB="27432" anchor="ctr">
-                    <a:solidFill>
-                      <a:srgbClr val="FFFFFF"/>
-                    </a:solidFill>
-                  </a:tcPr>
-                </a:tc>
-                <a:tc>
-                  <a:txBody>
-                    <a:bodyPr/>
-                    <a:lstStyle/>
-                    <a:p>
-                      <a:pPr>
-                        <a:defRPr sz="650" b="0">
-                          <a:solidFill>
-                            <a:srgbClr val="0D1117"/>
-                          </a:solidFill>
-                          <a:latin typeface="Inter"/>
-                        </a:defRPr>
-                      </a:pPr>
-                      <a:r>
-                        <a:rPr>
-                          <a:latin typeface="Inter"/>
-                        </a:rPr>
-                        <a:t>2026-06-30</a:t>
-                      </a:r>
-                    </a:p>
-                  </a:txBody>
-                  <a:tcPr marL="54864" marR="54864" marT="27432" marB="27432" anchor="ctr">
-                    <a:solidFill>
-                      <a:srgbClr val="FFFFFF"/>
-                    </a:solidFill>
-                  </a:tcPr>
-                </a:tc>
-                <a:tc>
-                  <a:txBody>
-                    <a:bodyPr/>
-                    <a:lstStyle/>
-                    <a:p>
-                      <a:pPr>
-                        <a:defRPr sz="650" b="0">
-                          <a:solidFill>
-                            <a:srgbClr val="0D1117"/>
-                          </a:solidFill>
-                          <a:latin typeface="Inter"/>
-                        </a:defRPr>
-                      </a:pPr>
-                      <a:r>
-                        <a:rPr>
-                          <a:latin typeface="Inter"/>
-                        </a:rPr>
-                        <a:t>Illustrative sample data</a:t>
-                      </a:r>
-                    </a:p>
-                  </a:txBody>
-                  <a:tcPr marL="54864" marR="54864" marT="27432" marB="27432" anchor="ctr">
-                    <a:solidFill>
-                      <a:srgbClr val="FFFFFF"/>
-                    </a:solidFill>
-                  </a:tcPr>
-                </a:tc>
-                <a:tc>
-                  <a:txBody>
-                    <a:bodyPr/>
-                    <a:lstStyle/>
-                    <a:p>
-                      <a:pPr>
-                        <a:defRPr sz="650" b="0">
-                          <a:solidFill>
-                            <a:srgbClr val="0D1117"/>
-                          </a:solidFill>
-                          <a:latin typeface="Inter"/>
-                        </a:defRPr>
-                      </a:pPr>
-                      <a:r>
-                        <a:rPr>
-                          <a:latin typeface="Inter"/>
-                        </a:rPr>
-                        <a:t>degraded</a:t>
-                      </a:r>
-                    </a:p>
-                  </a:txBody>
-                  <a:tcPr marL="54864" marR="54864" marT="27432" marB="27432" anchor="ctr">
-                    <a:solidFill>
-                      <a:srgbClr val="FFFFFF"/>
-                    </a:solidFill>
-                  </a:tcPr>
-                </a:tc>
-                <a:tc>
-                  <a:txBody>
-                    <a:bodyPr/>
-                    <a:lstStyle/>
-                    <a:p>
-                      <a:pPr>
-                        <a:defRPr sz="650" b="0">
-                          <a:solidFill>
-                            <a:srgbClr val="0D1117"/>
-                          </a:solidFill>
-                          <a:latin typeface="Inter"/>
-                        </a:defRPr>
-                      </a:pPr>
-                      <a:r>
-                        <a:rPr>
-                          <a:latin typeface="Inter"/>
-                        </a:rPr>
-                        <a:t>sha256:aaaaaaaaaaaaaaaaaaaaaaaaaaaaaaaaaaaaaaaaaaaaaaaaaaaaaaaaaaaaaaaa</a:t>
-                      </a:r>
-                    </a:p>
-                  </a:txBody>
-                  <a:tcPr marL="54864" marR="54864" marT="27432" marB="27432" anchor="ctr">
-                    <a:solidFill>
-                      <a:srgbClr val="FFFFFF"/>
+                        <a:defRPr sz="720" b="1">
+                          <a:solidFill>
+                            <a:srgbClr val="F2A93B"/>
+                          </a:solidFill>
+                          <a:latin typeface="Inter"/>
+                        </a:defRPr>
+                      </a:pPr>
+                      <a:r>
+                        <a:rPr>
+                          <a:latin typeface="Inter"/>
+                        </a:rPr>
+                        <a:t>● Incomplete</a:t>
+                      </a:r>
+                    </a:p>
+                  </a:txBody>
+                  <a:tcPr marL="54864" marR="54864" marT="27432" marB="27432" anchor="ctr">
+                    <a:solidFill>
+                      <a:srgbClr val="F5F7F9"/>
                     </a:solidFill>
                   </a:tcPr>
                 </a:tc>
@@ -31337,7 +29678,7 @@
                     <a:lstStyle/>
                     <a:p>
                       <a:pPr>
-                        <a:defRPr sz="650" b="1">
+                        <a:defRPr sz="720" b="1">
                           <a:solidFill>
                             <a:srgbClr val="0D1117"/>
                           </a:solidFill>
@@ -31364,7 +29705,7 @@
                     <a:lstStyle/>
                     <a:p>
                       <a:pPr>
-                        <a:defRPr sz="650" b="0">
+                        <a:defRPr sz="720" b="0">
                           <a:solidFill>
                             <a:srgbClr val="0D1117"/>
                           </a:solidFill>
@@ -31391,18 +29732,18 @@
                     <a:lstStyle/>
                     <a:p>
                       <a:pPr>
-                        <a:defRPr sz="650" b="0">
-                          <a:solidFill>
-                            <a:srgbClr val="0D1117"/>
-                          </a:solidFill>
-                          <a:latin typeface="Inter"/>
-                        </a:defRPr>
-                      </a:pPr>
-                      <a:r>
-                        <a:rPr>
-                          <a:latin typeface="Inter"/>
-                        </a:rPr>
-                        <a:t>gradient_tool</a:t>
+                        <a:defRPr sz="720" b="0">
+                          <a:solidFill>
+                            <a:srgbClr val="0D1117"/>
+                          </a:solidFill>
+                          <a:latin typeface="Inter"/>
+                        </a:defRPr>
+                      </a:pPr>
+                      <a:r>
+                        <a:rPr>
+                          <a:latin typeface="Inter"/>
+                        </a:rPr>
+                        <a:t>get_portfolio_exposure; get_capital_market_assumptions</a:t>
                       </a:r>
                     </a:p>
                   </a:txBody>
@@ -31418,18 +29759,18 @@
                     <a:lstStyle/>
                     <a:p>
                       <a:pPr>
-                        <a:defRPr sz="650" b="0">
-                          <a:solidFill>
-                            <a:srgbClr val="0D1117"/>
-                          </a:solidFill>
-                          <a:latin typeface="Inter"/>
-                        </a:defRPr>
-                      </a:pPr>
-                      <a:r>
-                        <a:rPr>
-                          <a:latin typeface="Inter"/>
-                        </a:rPr>
-                        <a:t>get_portfolio_exposure; get_capital_market_assumptions</a:t>
+                        <a:defRPr sz="720" b="0">
+                          <a:solidFill>
+                            <a:srgbClr val="0D1117"/>
+                          </a:solidFill>
+                          <a:latin typeface="Inter"/>
+                        </a:defRPr>
+                      </a:pPr>
+                      <a:r>
+                        <a:rPr>
+                          <a:latin typeface="Inter"/>
+                        </a:rPr>
+                        <a:t>2026-06-15</a:t>
                       </a:r>
                     </a:p>
                   </a:txBody>
@@ -31445,126 +29786,18 @@
                     <a:lstStyle/>
                     <a:p>
                       <a:pPr>
-                        <a:defRPr sz="650" b="0">
-                          <a:solidFill>
-                            <a:srgbClr val="0D1117"/>
-                          </a:solidFill>
-                          <a:latin typeface="Inter"/>
-                        </a:defRPr>
-                      </a:pPr>
-                      <a:r>
-                        <a:rPr>
-                          <a:latin typeface="Inter"/>
-                        </a:rPr>
-                        <a:t>commitments; baseline</a:t>
-                      </a:r>
-                    </a:p>
-                  </a:txBody>
-                  <a:tcPr marL="54864" marR="54864" marT="27432" marB="27432" anchor="ctr">
-                    <a:solidFill>
-                      <a:srgbClr val="F5F7F9"/>
-                    </a:solidFill>
-                  </a:tcPr>
-                </a:tc>
-                <a:tc>
-                  <a:txBody>
-                    <a:bodyPr/>
-                    <a:lstStyle/>
-                    <a:p>
-                      <a:pPr>
-                        <a:defRPr sz="650" b="0">
-                          <a:solidFill>
-                            <a:srgbClr val="0D1117"/>
-                          </a:solidFill>
-                          <a:latin typeface="Inter"/>
-                        </a:defRPr>
-                      </a:pPr>
-                      <a:r>
-                        <a:rPr>
-                          <a:latin typeface="Inter"/>
-                        </a:rPr>
-                        <a:t>2026-06-15</a:t>
-                      </a:r>
-                    </a:p>
-                  </a:txBody>
-                  <a:tcPr marL="54864" marR="54864" marT="27432" marB="27432" anchor="ctr">
-                    <a:solidFill>
-                      <a:srgbClr val="F5F7F9"/>
-                    </a:solidFill>
-                  </a:tcPr>
-                </a:tc>
-                <a:tc>
-                  <a:txBody>
-                    <a:bodyPr/>
-                    <a:lstStyle/>
-                    <a:p>
-                      <a:pPr>
-                        <a:defRPr sz="650" b="0">
-                          <a:solidFill>
-                            <a:srgbClr val="0D1117"/>
-                          </a:solidFill>
-                          <a:latin typeface="Inter"/>
-                        </a:defRPr>
-                      </a:pPr>
-                      <a:r>
-                        <a:rPr>
-                          <a:latin typeface="Inter"/>
-                        </a:rPr>
-                        <a:t>Illustrative sample data</a:t>
-                      </a:r>
-                    </a:p>
-                  </a:txBody>
-                  <a:tcPr marL="54864" marR="54864" marT="27432" marB="27432" anchor="ctr">
-                    <a:solidFill>
-                      <a:srgbClr val="F5F7F9"/>
-                    </a:solidFill>
-                  </a:tcPr>
-                </a:tc>
-                <a:tc>
-                  <a:txBody>
-                    <a:bodyPr/>
-                    <a:lstStyle/>
-                    <a:p>
-                      <a:pPr>
-                        <a:defRPr sz="650" b="0">
-                          <a:solidFill>
-                            <a:srgbClr val="0D1117"/>
-                          </a:solidFill>
-                          <a:latin typeface="Inter"/>
-                        </a:defRPr>
-                      </a:pPr>
-                      <a:r>
-                        <a:rPr>
-                          <a:latin typeface="Inter"/>
-                        </a:rPr>
-                        <a:t>passed</a:t>
-                      </a:r>
-                    </a:p>
-                  </a:txBody>
-                  <a:tcPr marL="54864" marR="54864" marT="27432" marB="27432" anchor="ctr">
-                    <a:solidFill>
-                      <a:srgbClr val="F5F7F9"/>
-                    </a:solidFill>
-                  </a:tcPr>
-                </a:tc>
-                <a:tc>
-                  <a:txBody>
-                    <a:bodyPr/>
-                    <a:lstStyle/>
-                    <a:p>
-                      <a:pPr>
-                        <a:defRPr sz="650" b="0">
-                          <a:solidFill>
-                            <a:srgbClr val="0D1117"/>
-                          </a:solidFill>
-                          <a:latin typeface="Inter"/>
-                        </a:defRPr>
-                      </a:pPr>
-                      <a:r>
-                        <a:rPr>
-                          <a:latin typeface="Inter"/>
-                        </a:rPr>
-                        <a:t>sha256:aaaaaaaaaaaaaaaaaaaaaaaaaaaaaaaaaaaaaaaaaaaaaaaaaaaaaaaaaaaaaaaa</a:t>
+                        <a:defRPr sz="720" b="1">
+                          <a:solidFill>
+                            <a:srgbClr val="C6F432"/>
+                          </a:solidFill>
+                          <a:latin typeface="Inter"/>
+                        </a:defRPr>
+                      </a:pPr>
+                      <a:r>
+                        <a:rPr>
+                          <a:latin typeface="Inter"/>
+                        </a:rPr>
+                        <a:t>● Passed</a:t>
                       </a:r>
                     </a:p>
                   </a:txBody>
@@ -31582,7 +29815,7 @@
                     <a:lstStyle/>
                     <a:p>
                       <a:pPr>
-                        <a:defRPr sz="650" b="1">
+                        <a:defRPr sz="720" b="1">
                           <a:solidFill>
                             <a:srgbClr val="0D1117"/>
                           </a:solidFill>
@@ -31609,7 +29842,7 @@
                     <a:lstStyle/>
                     <a:p>
                       <a:pPr>
-                        <a:defRPr sz="650" b="0">
+                        <a:defRPr sz="720" b="0">
                           <a:solidFill>
                             <a:srgbClr val="0D1117"/>
                           </a:solidFill>
@@ -31636,18 +29869,18 @@
                     <a:lstStyle/>
                     <a:p>
                       <a:pPr>
-                        <a:defRPr sz="650" b="0">
-                          <a:solidFill>
-                            <a:srgbClr val="0D1117"/>
-                          </a:solidFill>
-                          <a:latin typeface="Inter"/>
-                        </a:defRPr>
-                      </a:pPr>
-                      <a:r>
-                        <a:rPr>
-                          <a:latin typeface="Inter"/>
-                        </a:rPr>
-                        <a:t>gradient_tool</a:t>
+                        <a:defRPr sz="720" b="0">
+                          <a:solidFill>
+                            <a:srgbClr val="0D1117"/>
+                          </a:solidFill>
+                          <a:latin typeface="Inter"/>
+                        </a:defRPr>
+                      </a:pPr>
+                      <a:r>
+                        <a:rPr>
+                          <a:latin typeface="Inter"/>
+                        </a:rPr>
+                        <a:t>get_macro_conditions</a:t>
                       </a:r>
                     </a:p>
                   </a:txBody>
@@ -31663,18 +29896,18 @@
                     <a:lstStyle/>
                     <a:p>
                       <a:pPr>
-                        <a:defRPr sz="650" b="0">
-                          <a:solidFill>
-                            <a:srgbClr val="0D1117"/>
-                          </a:solidFill>
-                          <a:latin typeface="Inter"/>
-                        </a:defRPr>
-                      </a:pPr>
-                      <a:r>
-                        <a:rPr>
-                          <a:latin typeface="Inter"/>
-                        </a:rPr>
-                        <a:t>get_macro_conditions</a:t>
+                        <a:defRPr sz="720" b="0">
+                          <a:solidFill>
+                            <a:srgbClr val="0D1117"/>
+                          </a:solidFill>
+                          <a:latin typeface="Inter"/>
+                        </a:defRPr>
+                      </a:pPr>
+                      <a:r>
+                        <a:rPr>
+                          <a:latin typeface="Inter"/>
+                        </a:rPr>
+                        <a:t>2026-06-30</a:t>
                       </a:r>
                     </a:p>
                   </a:txBody>
@@ -31690,132 +29923,24 @@
                     <a:lstStyle/>
                     <a:p>
                       <a:pPr>
-                        <a:defRPr sz="650" b="0">
-                          <a:solidFill>
-                            <a:srgbClr val="0D1117"/>
-                          </a:solidFill>
-                          <a:latin typeface="Inter"/>
-                        </a:defRPr>
-                      </a:pPr>
-                      <a:r>
-                        <a:rPr>
-                          <a:latin typeface="Inter"/>
-                        </a:rPr>
-                        <a:t>illustrative</a:t>
-                      </a:r>
-                    </a:p>
-                  </a:txBody>
-                  <a:tcPr marL="54864" marR="54864" marT="27432" marB="27432" anchor="ctr">
-                    <a:solidFill>
-                      <a:srgbClr val="FFFFFF"/>
-                    </a:solidFill>
-                  </a:tcPr>
-                </a:tc>
-                <a:tc>
-                  <a:txBody>
-                    <a:bodyPr/>
-                    <a:lstStyle/>
-                    <a:p>
-                      <a:pPr>
-                        <a:defRPr sz="650" b="0">
-                          <a:solidFill>
-                            <a:srgbClr val="0D1117"/>
-                          </a:solidFill>
-                          <a:latin typeface="Inter"/>
-                        </a:defRPr>
-                      </a:pPr>
-                      <a:r>
-                        <a:rPr>
-                          <a:latin typeface="Inter"/>
-                        </a:rPr>
-                        <a:t>2026-06-30</a:t>
-                      </a:r>
-                    </a:p>
-                  </a:txBody>
-                  <a:tcPr marL="54864" marR="54864" marT="27432" marB="27432" anchor="ctr">
-                    <a:solidFill>
-                      <a:srgbClr val="FFFFFF"/>
-                    </a:solidFill>
-                  </a:tcPr>
-                </a:tc>
-                <a:tc>
-                  <a:txBody>
-                    <a:bodyPr/>
-                    <a:lstStyle/>
-                    <a:p>
-                      <a:pPr>
-                        <a:defRPr sz="650" b="0">
-                          <a:solidFill>
-                            <a:srgbClr val="0D1117"/>
-                          </a:solidFill>
-                          <a:latin typeface="Inter"/>
-                        </a:defRPr>
-                      </a:pPr>
-                      <a:r>
-                        <a:rPr>
-                          <a:latin typeface="Inter"/>
-                        </a:rPr>
-                        <a:t>Illustrative sample data</a:t>
-                      </a:r>
-                    </a:p>
-                  </a:txBody>
-                  <a:tcPr marL="54864" marR="54864" marT="27432" marB="27432" anchor="ctr">
-                    <a:solidFill>
-                      <a:srgbClr val="FFFFFF"/>
-                    </a:solidFill>
-                  </a:tcPr>
-                </a:tc>
-                <a:tc>
-                  <a:txBody>
-                    <a:bodyPr/>
-                    <a:lstStyle/>
-                    <a:p>
-                      <a:pPr>
-                        <a:defRPr sz="650" b="0">
-                          <a:solidFill>
-                            <a:srgbClr val="0D1117"/>
-                          </a:solidFill>
-                          <a:latin typeface="Inter"/>
-                        </a:defRPr>
-                      </a:pPr>
-                      <a:r>
-                        <a:rPr>
-                          <a:latin typeface="Inter"/>
-                        </a:rPr>
-                        <a:t>degraded</a:t>
-                      </a:r>
-                    </a:p>
-                  </a:txBody>
-                  <a:tcPr marL="54864" marR="54864" marT="27432" marB="27432" anchor="ctr">
-                    <a:solidFill>
-                      <a:srgbClr val="FFFFFF"/>
-                    </a:solidFill>
-                  </a:tcPr>
-                </a:tc>
-                <a:tc>
-                  <a:txBody>
-                    <a:bodyPr/>
-                    <a:lstStyle/>
-                    <a:p>
-                      <a:pPr>
-                        <a:defRPr sz="650" b="0">
-                          <a:solidFill>
-                            <a:srgbClr val="0D1117"/>
-                          </a:solidFill>
-                          <a:latin typeface="Inter"/>
-                        </a:defRPr>
-                      </a:pPr>
-                      <a:r>
-                        <a:rPr>
-                          <a:latin typeface="Inter"/>
-                        </a:rPr>
-                        <a:t>sha256:aaaaaaaaaaaaaaaaaaaaaaaaaaaaaaaaaaaaaaaaaaaaaaaaaaaaaaaaaaaaaaaa</a:t>
-                      </a:r>
-                    </a:p>
-                  </a:txBody>
-                  <a:tcPr marL="54864" marR="54864" marT="27432" marB="27432" anchor="ctr">
-                    <a:solidFill>
-                      <a:srgbClr val="FFFFFF"/>
+                        <a:defRPr sz="720" b="1">
+                          <a:solidFill>
+                            <a:srgbClr val="F2A93B"/>
+                          </a:solidFill>
+                          <a:latin typeface="Inter"/>
+                        </a:defRPr>
+                      </a:pPr>
+                      <a:r>
+                        <a:rPr>
+                          <a:latin typeface="Inter"/>
+                        </a:rPr>
+                        <a:t>● Incomplete</a:t>
+                      </a:r>
+                    </a:p>
+                  </a:txBody>
+                  <a:tcPr marL="54864" marR="54864" marT="27432" marB="27432" anchor="ctr">
+                    <a:solidFill>
+                      <a:srgbClr val="F5F7F9"/>
                     </a:solidFill>
                   </a:tcPr>
                 </a:tc>
@@ -31827,7 +29952,7 @@
                     <a:lstStyle/>
                     <a:p>
                       <a:pPr>
-                        <a:defRPr sz="650" b="1">
+                        <a:defRPr sz="720" b="1">
                           <a:solidFill>
                             <a:srgbClr val="0D1117"/>
                           </a:solidFill>
@@ -31854,7 +29979,7 @@
                     <a:lstStyle/>
                     <a:p>
                       <a:pPr>
-                        <a:defRPr sz="650" b="0">
+                        <a:defRPr sz="720" b="0">
                           <a:solidFill>
                             <a:srgbClr val="0D1117"/>
                           </a:solidFill>
@@ -31881,18 +30006,18 @@
                     <a:lstStyle/>
                     <a:p>
                       <a:pPr>
-                        <a:defRPr sz="650" b="0">
-                          <a:solidFill>
-                            <a:srgbClr val="0D1117"/>
-                          </a:solidFill>
-                          <a:latin typeface="Inter"/>
-                        </a:defRPr>
-                      </a:pPr>
-                      <a:r>
-                        <a:rPr>
-                          <a:latin typeface="Inter"/>
-                        </a:rPr>
-                        <a:t>gradient_tool</a:t>
+                        <a:defRPr sz="720" b="0">
+                          <a:solidFill>
+                            <a:srgbClr val="0D1117"/>
+                          </a:solidFill>
+                          <a:latin typeface="Inter"/>
+                        </a:defRPr>
+                      </a:pPr>
+                      <a:r>
+                        <a:rPr>
+                          <a:latin typeface="Inter"/>
+                        </a:rPr>
+                        <a:t>get_gradient_capabilities</a:t>
                       </a:r>
                     </a:p>
                   </a:txBody>
@@ -31908,18 +30033,18 @@
                     <a:lstStyle/>
                     <a:p>
                       <a:pPr>
-                        <a:defRPr sz="650" b="0">
-                          <a:solidFill>
-                            <a:srgbClr val="0D1117"/>
-                          </a:solidFill>
-                          <a:latin typeface="Inter"/>
-                        </a:defRPr>
-                      </a:pPr>
-                      <a:r>
-                        <a:rPr>
-                          <a:latin typeface="Inter"/>
-                        </a:rPr>
-                        <a:t>get_gradient_capabilities</a:t>
+                        <a:defRPr sz="720" b="0">
+                          <a:solidFill>
+                            <a:srgbClr val="0D1117"/>
+                          </a:solidFill>
+                          <a:latin typeface="Inter"/>
+                        </a:defRPr>
+                      </a:pPr>
+                      <a:r>
+                        <a:rPr>
+                          <a:latin typeface="Inter"/>
+                        </a:rPr>
+                        <a:t>2026-06-30</a:t>
                       </a:r>
                     </a:p>
                   </a:txBody>
@@ -31935,126 +30060,18 @@
                     <a:lstStyle/>
                     <a:p>
                       <a:pPr>
-                        <a:defRPr sz="650" b="0">
-                          <a:solidFill>
-                            <a:srgbClr val="0D1117"/>
-                          </a:solidFill>
-                          <a:latin typeface="Inter"/>
-                        </a:defRPr>
-                      </a:pPr>
-                      <a:r>
-                        <a:rPr>
-                          <a:latin typeface="Inter"/>
-                        </a:rPr>
-                        <a:t>illustrative</a:t>
-                      </a:r>
-                    </a:p>
-                  </a:txBody>
-                  <a:tcPr marL="54864" marR="54864" marT="27432" marB="27432" anchor="ctr">
-                    <a:solidFill>
-                      <a:srgbClr val="F5F7F9"/>
-                    </a:solidFill>
-                  </a:tcPr>
-                </a:tc>
-                <a:tc>
-                  <a:txBody>
-                    <a:bodyPr/>
-                    <a:lstStyle/>
-                    <a:p>
-                      <a:pPr>
-                        <a:defRPr sz="650" b="0">
-                          <a:solidFill>
-                            <a:srgbClr val="0D1117"/>
-                          </a:solidFill>
-                          <a:latin typeface="Inter"/>
-                        </a:defRPr>
-                      </a:pPr>
-                      <a:r>
-                        <a:rPr>
-                          <a:latin typeface="Inter"/>
-                        </a:rPr>
-                        <a:t>2026-06-30</a:t>
-                      </a:r>
-                    </a:p>
-                  </a:txBody>
-                  <a:tcPr marL="54864" marR="54864" marT="27432" marB="27432" anchor="ctr">
-                    <a:solidFill>
-                      <a:srgbClr val="F5F7F9"/>
-                    </a:solidFill>
-                  </a:tcPr>
-                </a:tc>
-                <a:tc>
-                  <a:txBody>
-                    <a:bodyPr/>
-                    <a:lstStyle/>
-                    <a:p>
-                      <a:pPr>
-                        <a:defRPr sz="650" b="0">
-                          <a:solidFill>
-                            <a:srgbClr val="0D1117"/>
-                          </a:solidFill>
-                          <a:latin typeface="Inter"/>
-                        </a:defRPr>
-                      </a:pPr>
-                      <a:r>
-                        <a:rPr>
-                          <a:latin typeface="Inter"/>
-                        </a:rPr>
-                        <a:t>Illustrative sample data</a:t>
-                      </a:r>
-                    </a:p>
-                  </a:txBody>
-                  <a:tcPr marL="54864" marR="54864" marT="27432" marB="27432" anchor="ctr">
-                    <a:solidFill>
-                      <a:srgbClr val="F5F7F9"/>
-                    </a:solidFill>
-                  </a:tcPr>
-                </a:tc>
-                <a:tc>
-                  <a:txBody>
-                    <a:bodyPr/>
-                    <a:lstStyle/>
-                    <a:p>
-                      <a:pPr>
-                        <a:defRPr sz="650" b="0">
-                          <a:solidFill>
-                            <a:srgbClr val="0D1117"/>
-                          </a:solidFill>
-                          <a:latin typeface="Inter"/>
-                        </a:defRPr>
-                      </a:pPr>
-                      <a:r>
-                        <a:rPr>
-                          <a:latin typeface="Inter"/>
-                        </a:rPr>
-                        <a:t>advisory</a:t>
-                      </a:r>
-                    </a:p>
-                  </a:txBody>
-                  <a:tcPr marL="54864" marR="54864" marT="27432" marB="27432" anchor="ctr">
-                    <a:solidFill>
-                      <a:srgbClr val="F5F7F9"/>
-                    </a:solidFill>
-                  </a:tcPr>
-                </a:tc>
-                <a:tc>
-                  <a:txBody>
-                    <a:bodyPr/>
-                    <a:lstStyle/>
-                    <a:p>
-                      <a:pPr>
-                        <a:defRPr sz="650" b="0">
-                          <a:solidFill>
-                            <a:srgbClr val="0D1117"/>
-                          </a:solidFill>
-                          <a:latin typeface="Inter"/>
-                        </a:defRPr>
-                      </a:pPr>
-                      <a:r>
-                        <a:rPr>
-                          <a:latin typeface="Inter"/>
-                        </a:rPr>
-                        <a:t>sha256:aaaaaaaaaaaaaaaaaaaaaaaaaaaaaaaaaaaaaaaaaaaaaaaaaaaaaaaaaaaaaaaa</a:t>
+                        <a:defRPr sz="720" b="1">
+                          <a:solidFill>
+                            <a:srgbClr val="F2A93B"/>
+                          </a:solidFill>
+                          <a:latin typeface="Inter"/>
+                        </a:defRPr>
+                      </a:pPr>
+                      <a:r>
+                        <a:rPr>
+                          <a:latin typeface="Inter"/>
+                        </a:rPr>
+                        <a:t>● Advisory</a:t>
                       </a:r>
                     </a:p>
                   </a:txBody>
@@ -32071,7 +30088,7 @@
       </p:graphicFrame>
       <p:sp>
         <p:nvSpPr>
-          <p:cNvPr id="9" name="TextBox 8"/>
+          <p:cNvPr id="8" name="TextBox 7"/>
           <p:cNvSpPr txBox="1"/>
           <p:nvPr/>
         </p:nvSpPr>
@@ -32113,7 +30130,7 @@
       </p:sp>
       <p:sp>
         <p:nvSpPr>
-          <p:cNvPr id="10" name="Rectangle 9"/>
+          <p:cNvPr id="9" name="Rectangle 8"/>
           <p:cNvSpPr/>
           <p:nvPr/>
         </p:nvSpPr>
@@ -32162,7 +30179,7 @@
       </p:sp>
       <p:sp>
         <p:nvSpPr>
-          <p:cNvPr id="11" name="TextBox 10"/>
+          <p:cNvPr id="10" name="TextBox 9"/>
           <p:cNvSpPr txBox="1"/>
           <p:nvPr/>
         </p:nvSpPr>
@@ -32204,7 +30221,7 @@
       </p:sp>
       <p:sp>
         <p:nvSpPr>
-          <p:cNvPr id="12" name="TextBox 11"/>
+          <p:cNvPr id="11" name="TextBox 10"/>
           <p:cNvSpPr txBox="1"/>
           <p:nvPr/>
         </p:nvSpPr>
@@ -32246,7 +30263,7 @@
       </p:sp>
       <p:sp>
         <p:nvSpPr>
-          <p:cNvPr id="13" name="TextBox 12"/>
+          <p:cNvPr id="12" name="TextBox 11"/>
           <p:cNvSpPr txBox="1"/>
           <p:nvPr/>
         </p:nvSpPr>
@@ -32361,48 +30378,6 @@
         </p:nvSpPr>
         <p:spPr>
           <a:xfrm>
-            <a:off x="5897880" y="310896"/>
-            <a:ext cx="4800600" cy="256032"/>
-          </a:xfrm>
-          <a:prstGeom prst="rect">
-            <a:avLst/>
-          </a:prstGeom>
-          <a:noFill/>
-        </p:spPr>
-        <p:txBody>
-          <a:bodyPr wrap="none" lIns="9144" rIns="9144" tIns="9144" bIns="9144" anchor="t">
-            <a:spAutoFit/>
-          </a:bodyPr>
-          <a:lstStyle/>
-          <a:p>
-            <a:pPr algn="r">
-              <a:spcAft>
-                <a:spcPts val="0"/>
-              </a:spcAft>
-              <a:defRPr sz="680" b="1">
-                <a:solidFill>
-                  <a:srgbClr val="4F6B00"/>
-                </a:solidFill>
-                <a:latin typeface="Inter"/>
-              </a:defRPr>
-            </a:pPr>
-            <a:r>
-              <a:rPr>
-                <a:latin typeface="Inter"/>
-              </a:rPr>
-              <a:t>Illustrative, Gradient Maintained — demo data, not the client's holdings or managers</a:t>
-            </a:r>
-          </a:p>
-        </p:txBody>
-      </p:sp>
-      <p:sp>
-        <p:nvSpPr>
-          <p:cNvPr id="4" name="TextBox 3"/>
-          <p:cNvSpPr txBox="1"/>
-          <p:nvPr/>
-        </p:nvSpPr>
-        <p:spPr>
-          <a:xfrm>
             <a:off x="640080" y="566928"/>
             <a:ext cx="10058400" cy="530352"/>
           </a:xfrm>
@@ -32439,7 +30414,7 @@
       </p:sp>
       <p:sp>
         <p:nvSpPr>
-          <p:cNvPr id="5" name="Rectangle 4"/>
+          <p:cNvPr id="4" name="Rectangle 3"/>
           <p:cNvSpPr/>
           <p:nvPr/>
         </p:nvSpPr>
@@ -32488,7 +30463,7 @@
       </p:sp>
       <p:sp>
         <p:nvSpPr>
-          <p:cNvPr id="6" name="Rectangle 5"/>
+          <p:cNvPr id="5" name="Rectangle 4"/>
           <p:cNvSpPr/>
           <p:nvPr/>
         </p:nvSpPr>
@@ -32537,7 +30512,7 @@
       </p:sp>
       <p:sp>
         <p:nvSpPr>
-          <p:cNvPr id="7" name="TextBox 6"/>
+          <p:cNvPr id="6" name="TextBox 5"/>
           <p:cNvSpPr txBox="1"/>
           <p:nvPr/>
         </p:nvSpPr>
@@ -32579,14 +30554,14 @@
       </p:sp>
       <p:sp>
         <p:nvSpPr>
-          <p:cNvPr id="8" name="Rectangle 7"/>
+          <p:cNvPr id="7" name="Rectangle 6"/>
           <p:cNvSpPr/>
           <p:nvPr/>
         </p:nvSpPr>
         <p:spPr>
           <a:xfrm>
             <a:off x="640080" y="1325880"/>
-            <a:ext cx="10908792" cy="966784"/>
+            <a:ext cx="10908792" cy="808799"/>
           </a:xfrm>
           <a:prstGeom prst="rect">
             <a:avLst/>
@@ -32628,14 +30603,14 @@
       </p:sp>
       <p:sp>
         <p:nvSpPr>
-          <p:cNvPr id="9" name="Rectangle 8"/>
+          <p:cNvPr id="8" name="Rectangle 7"/>
           <p:cNvSpPr/>
           <p:nvPr/>
         </p:nvSpPr>
         <p:spPr>
           <a:xfrm>
             <a:off x="640080" y="1325880"/>
-            <a:ext cx="54864" cy="966784"/>
+            <a:ext cx="54864" cy="808799"/>
           </a:xfrm>
           <a:prstGeom prst="rect">
             <a:avLst/>
@@ -32677,7 +30652,7 @@
       </p:sp>
       <p:sp>
         <p:nvSpPr>
-          <p:cNvPr id="10" name="TextBox 9"/>
+          <p:cNvPr id="9" name="TextBox 8"/>
           <p:cNvSpPr txBox="1"/>
           <p:nvPr/>
         </p:nvSpPr>
@@ -32719,14 +30694,14 @@
       </p:sp>
       <p:sp>
         <p:nvSpPr>
-          <p:cNvPr id="11" name="TextBox 10"/>
+          <p:cNvPr id="10" name="TextBox 9"/>
           <p:cNvSpPr txBox="1"/>
           <p:nvPr/>
         </p:nvSpPr>
         <p:spPr>
           <a:xfrm>
             <a:off x="804671" y="1719072"/>
-            <a:ext cx="10616184" cy="482152"/>
+            <a:ext cx="10616184" cy="324167"/>
           </a:xfrm>
           <a:prstGeom prst="rect">
             <a:avLst/>
@@ -32761,13 +30736,13 @@
       </p:sp>
       <p:sp>
         <p:nvSpPr>
-          <p:cNvPr id="12" name="TextBox 11"/>
+          <p:cNvPr id="11" name="TextBox 10"/>
           <p:cNvSpPr txBox="1"/>
           <p:nvPr/>
         </p:nvSpPr>
         <p:spPr>
           <a:xfrm>
-            <a:off x="640080" y="2402392"/>
+            <a:off x="640080" y="2244407"/>
             <a:ext cx="10908792" cy="201168"/>
           </a:xfrm>
           <a:prstGeom prst="rect">
@@ -32803,15 +30778,15 @@
       </p:sp>
       <p:graphicFrame>
         <p:nvGraphicFramePr>
-          <p:cNvPr id="13" name="Table 12"/>
+          <p:cNvPr id="12" name="Table 11"/>
           <p:cNvGraphicFramePr>
             <a:graphicFrameLocks noGrp="1"/>
           </p:cNvGraphicFramePr>
           <p:nvPr/>
         </p:nvGraphicFramePr>
         <p:xfrm>
-          <a:off x="640080" y="2676712"/>
-          <a:ext cx="10908792" cy="1365123"/>
+          <a:off x="640080" y="2518727"/>
+          <a:ext cx="10908792" cy="1097217"/>
         </p:xfrm>
         <a:graphic>
           <a:graphicData uri="http://schemas.openxmlformats.org/drawingml/2006/table">
@@ -32825,7 +30800,7 @@
                 <a:gridCol w="2965704"/>
                 <a:gridCol w="2965704"/>
               </a:tblGrid>
-              <a:tr h="341280">
+              <a:tr h="274304">
                 <a:tc>
                   <a:txBody>
                     <a:bodyPr/>
@@ -32935,7 +30910,7 @@
                   </a:tcPr>
                 </a:tc>
               </a:tr>
-              <a:tr h="341280">
+              <a:tr h="274304">
                 <a:tc>
                   <a:txBody>
                     <a:bodyPr/>
@@ -33045,7 +31020,7 @@
                   </a:tcPr>
                 </a:tc>
               </a:tr>
-              <a:tr h="341280">
+              <a:tr h="274304">
                 <a:tc>
                   <a:txBody>
                     <a:bodyPr/>
@@ -33155,7 +31130,7 @@
                   </a:tcPr>
                 </a:tc>
               </a:tr>
-              <a:tr h="341283">
+              <a:tr h="274305">
                 <a:tc>
                   <a:txBody>
                     <a:bodyPr/>
@@ -33271,14 +31246,14 @@
       </p:graphicFrame>
       <p:sp>
         <p:nvSpPr>
-          <p:cNvPr id="14" name="Rectangle 13"/>
+          <p:cNvPr id="13" name="Rectangle 12"/>
           <p:cNvSpPr/>
           <p:nvPr/>
         </p:nvSpPr>
         <p:spPr>
           <a:xfrm>
-            <a:off x="640080" y="4151563"/>
-            <a:ext cx="10908792" cy="783173"/>
+            <a:off x="640080" y="3725672"/>
+            <a:ext cx="10908792" cy="655192"/>
           </a:xfrm>
           <a:prstGeom prst="rect">
             <a:avLst/>
@@ -33320,14 +31295,14 @@
       </p:sp>
       <p:sp>
         <p:nvSpPr>
-          <p:cNvPr id="15" name="Rectangle 14"/>
+          <p:cNvPr id="14" name="Rectangle 13"/>
           <p:cNvSpPr/>
           <p:nvPr/>
         </p:nvSpPr>
         <p:spPr>
           <a:xfrm>
-            <a:off x="640080" y="4151563"/>
-            <a:ext cx="54864" cy="783173"/>
+            <a:off x="640080" y="3725672"/>
+            <a:ext cx="54864" cy="655192"/>
           </a:xfrm>
           <a:prstGeom prst="rect">
             <a:avLst/>
@@ -33369,13 +31344,13 @@
       </p:sp>
       <p:sp>
         <p:nvSpPr>
-          <p:cNvPr id="16" name="TextBox 15"/>
+          <p:cNvPr id="15" name="TextBox 14"/>
           <p:cNvSpPr txBox="1"/>
           <p:nvPr/>
         </p:nvSpPr>
         <p:spPr>
           <a:xfrm>
-            <a:off x="804671" y="4261291"/>
+            <a:off x="804671" y="3835400"/>
             <a:ext cx="10616184" cy="228600"/>
           </a:xfrm>
           <a:prstGeom prst="rect">
@@ -33411,14 +31386,14 @@
       </p:sp>
       <p:sp>
         <p:nvSpPr>
-          <p:cNvPr id="17" name="TextBox 16"/>
+          <p:cNvPr id="16" name="TextBox 15"/>
           <p:cNvSpPr txBox="1"/>
           <p:nvPr/>
         </p:nvSpPr>
         <p:spPr>
           <a:xfrm>
-            <a:off x="804671" y="4544755"/>
-            <a:ext cx="10616184" cy="298541"/>
+            <a:off x="804671" y="4118864"/>
+            <a:ext cx="10616184" cy="228600"/>
           </a:xfrm>
           <a:prstGeom prst="rect">
             <a:avLst/>
@@ -33453,14 +31428,14 @@
       </p:sp>
       <p:sp>
         <p:nvSpPr>
-          <p:cNvPr id="18" name="Rectangle 17"/>
+          <p:cNvPr id="17" name="Rectangle 16"/>
           <p:cNvSpPr/>
           <p:nvPr/>
         </p:nvSpPr>
         <p:spPr>
           <a:xfrm>
-            <a:off x="640080" y="5044464"/>
-            <a:ext cx="10908792" cy="1173455"/>
+            <a:off x="640080" y="4490593"/>
+            <a:ext cx="10908792" cy="808799"/>
           </a:xfrm>
           <a:prstGeom prst="rect">
             <a:avLst/>
@@ -33502,14 +31477,14 @@
       </p:sp>
       <p:sp>
         <p:nvSpPr>
-          <p:cNvPr id="19" name="Rectangle 18"/>
+          <p:cNvPr id="18" name="Rectangle 17"/>
           <p:cNvSpPr/>
           <p:nvPr/>
         </p:nvSpPr>
         <p:spPr>
           <a:xfrm>
-            <a:off x="640080" y="5044464"/>
-            <a:ext cx="54864" cy="1173455"/>
+            <a:off x="640080" y="4490593"/>
+            <a:ext cx="54864" cy="808799"/>
           </a:xfrm>
           <a:prstGeom prst="rect">
             <a:avLst/>
@@ -33551,13 +31526,13 @@
       </p:sp>
       <p:sp>
         <p:nvSpPr>
-          <p:cNvPr id="20" name="TextBox 19"/>
+          <p:cNvPr id="19" name="TextBox 18"/>
           <p:cNvSpPr txBox="1"/>
           <p:nvPr/>
         </p:nvSpPr>
         <p:spPr>
           <a:xfrm>
-            <a:off x="804671" y="5154192"/>
+            <a:off x="804671" y="4600321"/>
             <a:ext cx="10616184" cy="228600"/>
           </a:xfrm>
           <a:prstGeom prst="rect">
@@ -33586,21 +31561,21 @@
               <a:rPr>
                 <a:latin typeface="Inter"/>
               </a:rPr>
-              <a:t>Key judgment — headline signal</a:t>
+              <a:t>Key judgment — Valuation lag</a:t>
             </a:r>
           </a:p>
         </p:txBody>
       </p:sp>
       <p:sp>
         <p:nvSpPr>
-          <p:cNvPr id="21" name="TextBox 20"/>
+          <p:cNvPr id="20" name="TextBox 19"/>
           <p:cNvSpPr txBox="1"/>
           <p:nvPr/>
         </p:nvSpPr>
         <p:spPr>
           <a:xfrm>
-            <a:off x="804671" y="5437656"/>
-            <a:ext cx="10616184" cy="688823"/>
+            <a:off x="804671" y="4883785"/>
+            <a:ext cx="10616184" cy="324167"/>
           </a:xfrm>
           <a:prstGeom prst="rect">
             <a:avLst/>
@@ -33628,14 +31603,196 @@
               <a:rPr>
                 <a:latin typeface="Inter"/>
               </a:rPr>
-              <a:t>Observation: The sample report carries a valuation-lag signal above the clear threshold [S1]. Why it matters: This signal focuses oversight on the report's most decision-relevant condition. Uncertainty: Evidence coverage may exclude newer or more detailed observations. What would change the view: A governed refresh showing a different signal or breached threshold.</a:t>
+              <a:t>Observation: Valuation lag and the listed-versus-private mix both need monitoring [S1]. Why it matters: The 2.0pp shift to infrastructure and natural resources depends on current private marks. Uncertainty: Private valuations are reported with a lag. What would change the view: Refreshed marks that change the relative weights.</a:t>
             </a:r>
           </a:p>
         </p:txBody>
       </p:sp>
       <p:sp>
         <p:nvSpPr>
+          <p:cNvPr id="21" name="Rectangle 20"/>
+          <p:cNvSpPr/>
+          <p:nvPr/>
+        </p:nvSpPr>
+        <p:spPr>
+          <a:xfrm>
+            <a:off x="640080" y="5409120"/>
+            <a:ext cx="10908792" cy="808799"/>
+          </a:xfrm>
+          <a:prstGeom prst="rect">
+            <a:avLst/>
+          </a:prstGeom>
+          <a:solidFill>
+            <a:srgbClr val="F5F7F9"/>
+          </a:solidFill>
+          <a:ln>
+            <a:solidFill>
+              <a:srgbClr val="E3E7EC"/>
+            </a:solidFill>
+          </a:ln>
+        </p:spPr>
+        <p:style>
+          <a:lnRef idx="1">
+            <a:schemeClr val="accent1"/>
+          </a:lnRef>
+          <a:fillRef idx="3">
+            <a:schemeClr val="accent1"/>
+          </a:fillRef>
+          <a:effectRef idx="2">
+            <a:schemeClr val="accent1"/>
+          </a:effectRef>
+          <a:fontRef idx="minor">
+            <a:schemeClr val="lt1"/>
+          </a:fontRef>
+        </p:style>
+        <p:txBody>
+          <a:bodyPr rtlCol="0" anchor="ctr"/>
+          <a:lstStyle/>
+          <a:p>
+            <a:pPr algn="ctr">
+              <a:defRPr>
+                <a:latin typeface="Inter"/>
+              </a:defRPr>
+            </a:pPr>
+          </a:p>
+        </p:txBody>
+      </p:sp>
+      <p:sp>
+        <p:nvSpPr>
           <p:cNvPr id="22" name="Rectangle 21"/>
+          <p:cNvSpPr/>
+          <p:nvPr/>
+        </p:nvSpPr>
+        <p:spPr>
+          <a:xfrm>
+            <a:off x="640080" y="5409120"/>
+            <a:ext cx="54864" cy="808799"/>
+          </a:xfrm>
+          <a:prstGeom prst="rect">
+            <a:avLst/>
+          </a:prstGeom>
+          <a:solidFill>
+            <a:srgbClr val="0D1117"/>
+          </a:solidFill>
+          <a:ln>
+            <a:solidFill>
+              <a:srgbClr val="0D1117"/>
+            </a:solidFill>
+          </a:ln>
+        </p:spPr>
+        <p:style>
+          <a:lnRef idx="1">
+            <a:schemeClr val="accent1"/>
+          </a:lnRef>
+          <a:fillRef idx="3">
+            <a:schemeClr val="accent1"/>
+          </a:fillRef>
+          <a:effectRef idx="2">
+            <a:schemeClr val="accent1"/>
+          </a:effectRef>
+          <a:fontRef idx="minor">
+            <a:schemeClr val="lt1"/>
+          </a:fontRef>
+        </p:style>
+        <p:txBody>
+          <a:bodyPr rtlCol="0" anchor="ctr"/>
+          <a:lstStyle/>
+          <a:p>
+            <a:pPr algn="ctr">
+              <a:defRPr>
+                <a:latin typeface="Inter"/>
+              </a:defRPr>
+            </a:pPr>
+          </a:p>
+        </p:txBody>
+      </p:sp>
+      <p:sp>
+        <p:nvSpPr>
+          <p:cNvPr id="23" name="TextBox 22"/>
+          <p:cNvSpPr txBox="1"/>
+          <p:nvPr/>
+        </p:nvSpPr>
+        <p:spPr>
+          <a:xfrm>
+            <a:off x="804671" y="5518848"/>
+            <a:ext cx="10616184" cy="228600"/>
+          </a:xfrm>
+          <a:prstGeom prst="rect">
+            <a:avLst/>
+          </a:prstGeom>
+          <a:noFill/>
+        </p:spPr>
+        <p:txBody>
+          <a:bodyPr wrap="none" lIns="9144" rIns="9144" tIns="9144" bIns="9144" anchor="t">
+            <a:spAutoFit/>
+          </a:bodyPr>
+          <a:lstStyle/>
+          <a:p>
+            <a:pPr algn="l">
+              <a:spcAft>
+                <a:spcPts val="0"/>
+              </a:spcAft>
+              <a:defRPr sz="1000" b="1">
+                <a:solidFill>
+                  <a:srgbClr val="0D1117"/>
+                </a:solidFill>
+                <a:latin typeface="Inter"/>
+              </a:defRPr>
+            </a:pPr>
+            <a:r>
+              <a:rPr>
+                <a:latin typeface="Inter"/>
+              </a:rPr>
+              <a:t>Key judgment — Sleeve size</a:t>
+            </a:r>
+          </a:p>
+        </p:txBody>
+      </p:sp>
+      <p:sp>
+        <p:nvSpPr>
+          <p:cNvPr id="24" name="TextBox 23"/>
+          <p:cNvSpPr txBox="1"/>
+          <p:nvPr/>
+        </p:nvSpPr>
+        <p:spPr>
+          <a:xfrm>
+            <a:off x="804671" y="5802312"/>
+            <a:ext cx="10616184" cy="324167"/>
+          </a:xfrm>
+          <a:prstGeom prst="rect">
+            <a:avLst/>
+          </a:prstGeom>
+          <a:noFill/>
+        </p:spPr>
+        <p:txBody>
+          <a:bodyPr wrap="none" lIns="9144" rIns="9144" tIns="9144" bIns="9144" anchor="t">
+            <a:spAutoFit/>
+          </a:bodyPr>
+          <a:lstStyle/>
+          <a:p>
+            <a:pPr algn="l">
+              <a:spcAft>
+                <a:spcPts val="0"/>
+              </a:spcAft>
+              <a:defRPr sz="950" b="0">
+                <a:solidFill>
+                  <a:srgbClr val="4A5563"/>
+                </a:solidFill>
+                <a:latin typeface="Inter"/>
+              </a:defRPr>
+            </a:pPr>
+            <a:r>
+              <a:rPr>
+                <a:latin typeface="Inter"/>
+              </a:rPr>
+              <a:t>Observation: Real assets are 15.0% of total NAV [S2]. Why it matters: The proposal reshapes the sleeve without changing its total. Uncertainty: The weight moves with listed real estate prices. What would change the view: A drift of more than 1pp before funding.</a:t>
+            </a:r>
+          </a:p>
+        </p:txBody>
+      </p:sp>
+      <p:sp>
+        <p:nvSpPr>
+          <p:cNvPr id="25" name="Rectangle 24"/>
           <p:cNvSpPr/>
           <p:nvPr/>
         </p:nvSpPr>
@@ -33684,7 +31841,7 @@
       </p:sp>
       <p:sp>
         <p:nvSpPr>
-          <p:cNvPr id="23" name="TextBox 22"/>
+          <p:cNvPr id="26" name="TextBox 25"/>
           <p:cNvSpPr txBox="1"/>
           <p:nvPr/>
         </p:nvSpPr>
@@ -33719,14 +31876,14 @@
               <a:rPr>
                 <a:latin typeface="Inter"/>
               </a:rPr>
-              <a:t>Sources: S1 · S3 · S4 · S7 · S8</a:t>
+              <a:t>Sources: S1 · S2 · S3 · S4 · S7 · S8</a:t>
             </a:r>
           </a:p>
         </p:txBody>
       </p:sp>
       <p:sp>
         <p:nvSpPr>
-          <p:cNvPr id="24" name="TextBox 23"/>
+          <p:cNvPr id="27" name="TextBox 26"/>
           <p:cNvSpPr txBox="1"/>
           <p:nvPr/>
         </p:nvSpPr>
@@ -33768,7 +31925,7 @@
       </p:sp>
       <p:sp>
         <p:nvSpPr>
-          <p:cNvPr id="25" name="TextBox 24"/>
+          <p:cNvPr id="28" name="TextBox 27"/>
           <p:cNvSpPr txBox="1"/>
           <p:nvPr/>
         </p:nvSpPr>
@@ -33883,48 +32040,6 @@
         </p:nvSpPr>
         <p:spPr>
           <a:xfrm>
-            <a:off x="5897880" y="310896"/>
-            <a:ext cx="4800600" cy="256032"/>
-          </a:xfrm>
-          <a:prstGeom prst="rect">
-            <a:avLst/>
-          </a:prstGeom>
-          <a:noFill/>
-        </p:spPr>
-        <p:txBody>
-          <a:bodyPr wrap="none" lIns="9144" rIns="9144" tIns="9144" bIns="9144" anchor="t">
-            <a:spAutoFit/>
-          </a:bodyPr>
-          <a:lstStyle/>
-          <a:p>
-            <a:pPr algn="r">
-              <a:spcAft>
-                <a:spcPts val="0"/>
-              </a:spcAft>
-              <a:defRPr sz="680" b="1">
-                <a:solidFill>
-                  <a:srgbClr val="4F6B00"/>
-                </a:solidFill>
-                <a:latin typeface="Inter"/>
-              </a:defRPr>
-            </a:pPr>
-            <a:r>
-              <a:rPr>
-                <a:latin typeface="Inter"/>
-              </a:rPr>
-              <a:t>Illustrative, Gradient Maintained — demo data, not the client's holdings or managers</a:t>
-            </a:r>
-          </a:p>
-        </p:txBody>
-      </p:sp>
-      <p:sp>
-        <p:nvSpPr>
-          <p:cNvPr id="4" name="TextBox 3"/>
-          <p:cNvSpPr txBox="1"/>
-          <p:nvPr/>
-        </p:nvSpPr>
-        <p:spPr>
-          <a:xfrm>
             <a:off x="640080" y="566928"/>
             <a:ext cx="10058400" cy="530352"/>
           </a:xfrm>
@@ -33954,14 +32069,14 @@
               <a:rPr>
                 <a:latin typeface="Inter"/>
               </a:rPr>
-              <a:t>Appendix — Server Metric Methods and Disclosures</a:t>
+              <a:t>Appendix — Sources and methods — continued</a:t>
             </a:r>
           </a:p>
         </p:txBody>
       </p:sp>
       <p:sp>
         <p:nvSpPr>
-          <p:cNvPr id="5" name="Rectangle 4"/>
+          <p:cNvPr id="4" name="Rectangle 3"/>
           <p:cNvSpPr/>
           <p:nvPr/>
         </p:nvSpPr>
@@ -34010,7 +32125,7 @@
       </p:sp>
       <p:sp>
         <p:nvSpPr>
-          <p:cNvPr id="6" name="Rectangle 5"/>
+          <p:cNvPr id="5" name="Rectangle 4"/>
           <p:cNvSpPr/>
           <p:nvPr/>
         </p:nvSpPr>
@@ -34059,7 +32174,7 @@
       </p:sp>
       <p:sp>
         <p:nvSpPr>
-          <p:cNvPr id="7" name="TextBox 6"/>
+          <p:cNvPr id="6" name="TextBox 5"/>
           <p:cNvSpPr txBox="1"/>
           <p:nvPr/>
         </p:nvSpPr>
@@ -34094,14 +32209,14 @@
               <a:rPr>
                 <a:latin typeface="Inter"/>
               </a:rPr>
-              <a:t>B</a:t>
+              <a:t>A</a:t>
             </a:r>
           </a:p>
         </p:txBody>
       </p:sp>
       <p:sp>
         <p:nvSpPr>
-          <p:cNvPr id="8" name="TextBox 7"/>
+          <p:cNvPr id="7" name="TextBox 6"/>
           <p:cNvSpPr txBox="1"/>
           <p:nvPr/>
         </p:nvSpPr>
@@ -34136,14 +32251,14 @@
               <a:rPr>
                 <a:latin typeface="Inter"/>
               </a:rPr>
-              <a:t>SERVER METRIC METHODS</a:t>
+              <a:t>SOURCE AUDIT TRAIL</a:t>
             </a:r>
           </a:p>
         </p:txBody>
       </p:sp>
       <p:graphicFrame>
         <p:nvGraphicFramePr>
-          <p:cNvPr id="9" name="Table 8"/>
+          <p:cNvPr id="8" name="Table 7"/>
           <p:cNvGraphicFramePr>
             <a:graphicFrameLocks noGrp="1"/>
           </p:cNvGraphicFramePr>
@@ -34151,7 +32266,1289 @@
         </p:nvGraphicFramePr>
         <p:xfrm>
           <a:off x="640080" y="1600200"/>
-          <a:ext cx="10908792" cy="1701889"/>
+          <a:ext cx="10908792" cy="4416552"/>
+        </p:xfrm>
+        <a:graphic>
+          <a:graphicData uri="http://schemas.openxmlformats.org/drawingml/2006/table">
+            <a:tbl>
+              <a:tblPr firstRow="1" bandRow="1">
+                <a:tableStyleId>{5C22544A-7EE6-4342-B048-85BDC9FD1C3A}</a:tableStyleId>
+              </a:tblPr>
+              <a:tblGrid>
+                <a:gridCol w="2011680"/>
+                <a:gridCol w="4448556"/>
+                <a:gridCol w="4448556"/>
+              </a:tblGrid>
+              <a:tr h="490728">
+                <a:tc>
+                  <a:txBody>
+                    <a:bodyPr/>
+                    <a:lstStyle/>
+                    <a:p>
+                      <a:pPr>
+                        <a:defRPr sz="750" b="1">
+                          <a:solidFill>
+                            <a:srgbClr val="FFFFFF"/>
+                          </a:solidFill>
+                          <a:latin typeface="Inter"/>
+                        </a:defRPr>
+                      </a:pPr>
+                      <a:r>
+                        <a:rPr>
+                          <a:latin typeface="Inter"/>
+                        </a:rPr>
+                        <a:t>Tag</a:t>
+                      </a:r>
+                    </a:p>
+                  </a:txBody>
+                  <a:tcPr marL="54864" marR="54864" marT="27432" marB="27432" anchor="ctr">
+                    <a:solidFill>
+                      <a:srgbClr val="0D1117"/>
+                    </a:solidFill>
+                  </a:tcPr>
+                </a:tc>
+                <a:tc>
+                  <a:txBody>
+                    <a:bodyPr/>
+                    <a:lstStyle/>
+                    <a:p>
+                      <a:pPr>
+                        <a:defRPr sz="750" b="1">
+                          <a:solidFill>
+                            <a:srgbClr val="FFFFFF"/>
+                          </a:solidFill>
+                          <a:latin typeface="Inter"/>
+                        </a:defRPr>
+                      </a:pPr>
+                      <a:r>
+                        <a:rPr>
+                          <a:latin typeface="Inter"/>
+                        </a:rPr>
+                        <a:t>Key parameters</a:t>
+                      </a:r>
+                    </a:p>
+                  </a:txBody>
+                  <a:tcPr marL="54864" marR="54864" marT="27432" marB="27432" anchor="ctr">
+                    <a:solidFill>
+                      <a:srgbClr val="0D1117"/>
+                    </a:solidFill>
+                  </a:tcPr>
+                </a:tc>
+                <a:tc>
+                  <a:txBody>
+                    <a:bodyPr/>
+                    <a:lstStyle/>
+                    <a:p>
+                      <a:pPr>
+                        <a:defRPr sz="750" b="1">
+                          <a:solidFill>
+                            <a:srgbClr val="FFFFFF"/>
+                          </a:solidFill>
+                          <a:latin typeface="Inter"/>
+                        </a:defRPr>
+                      </a:pPr>
+                      <a:r>
+                        <a:rPr>
+                          <a:latin typeface="Inter"/>
+                        </a:rPr>
+                        <a:t>Digest</a:t>
+                      </a:r>
+                    </a:p>
+                  </a:txBody>
+                  <a:tcPr marL="54864" marR="54864" marT="27432" marB="27432" anchor="ctr">
+                    <a:solidFill>
+                      <a:srgbClr val="0D1117"/>
+                    </a:solidFill>
+                  </a:tcPr>
+                </a:tc>
+              </a:tr>
+              <a:tr h="490728">
+                <a:tc>
+                  <a:txBody>
+                    <a:bodyPr/>
+                    <a:lstStyle/>
+                    <a:p>
+                      <a:pPr>
+                        <a:defRPr sz="800" b="1">
+                          <a:solidFill>
+                            <a:srgbClr val="0D1117"/>
+                          </a:solidFill>
+                          <a:latin typeface="Inter"/>
+                        </a:defRPr>
+                      </a:pPr>
+                      <a:r>
+                        <a:rPr>
+                          <a:latin typeface="Inter"/>
+                        </a:rPr>
+                        <a:t>S1</a:t>
+                      </a:r>
+                    </a:p>
+                  </a:txBody>
+                  <a:tcPr marL="54864" marR="54864" marT="27432" marB="27432" anchor="ctr">
+                    <a:solidFill>
+                      <a:srgbClr val="FFFFFF"/>
+                    </a:solidFill>
+                  </a:tcPr>
+                </a:tc>
+                <a:tc>
+                  <a:txBody>
+                    <a:bodyPr/>
+                    <a:lstStyle/>
+                    <a:p>
+                      <a:pPr>
+                        <a:defRPr sz="800" b="0">
+                          <a:solidFill>
+                            <a:srgbClr val="0D1117"/>
+                          </a:solidFill>
+                          <a:latin typeface="Inter"/>
+                        </a:defRPr>
+                      </a:pPr>
+                      <a:r>
+                        <a:rPr>
+                          <a:latin typeface="Inter"/>
+                        </a:rPr>
+                        <a:t>organization=test</a:t>
+                      </a:r>
+                    </a:p>
+                  </a:txBody>
+                  <a:tcPr marL="54864" marR="54864" marT="27432" marB="27432" anchor="ctr">
+                    <a:solidFill>
+                      <a:srgbClr val="FFFFFF"/>
+                    </a:solidFill>
+                  </a:tcPr>
+                </a:tc>
+                <a:tc>
+                  <a:txBody>
+                    <a:bodyPr/>
+                    <a:lstStyle/>
+                    <a:p>
+                      <a:pPr>
+                        <a:defRPr sz="800" b="0">
+                          <a:solidFill>
+                            <a:srgbClr val="0D1117"/>
+                          </a:solidFill>
+                          <a:latin typeface="Inter"/>
+                        </a:defRPr>
+                      </a:pPr>
+                      <a:r>
+                        <a:rPr>
+                          <a:latin typeface="Inter"/>
+                        </a:rPr>
+                        <a:t>sha256:aaaaaaaaaaaaaaaaaaaaaaaaaaaaaaaaaaaaaaaaaaaaaaaaaaaaaaaaaaaaaaaa</a:t>
+                      </a:r>
+                    </a:p>
+                  </a:txBody>
+                  <a:tcPr marL="54864" marR="54864" marT="27432" marB="27432" anchor="ctr">
+                    <a:solidFill>
+                      <a:srgbClr val="FFFFFF"/>
+                    </a:solidFill>
+                  </a:tcPr>
+                </a:tc>
+              </a:tr>
+              <a:tr h="490728">
+                <a:tc>
+                  <a:txBody>
+                    <a:bodyPr/>
+                    <a:lstStyle/>
+                    <a:p>
+                      <a:pPr>
+                        <a:defRPr sz="800" b="1">
+                          <a:solidFill>
+                            <a:srgbClr val="0D1117"/>
+                          </a:solidFill>
+                          <a:latin typeface="Inter"/>
+                        </a:defRPr>
+                      </a:pPr>
+                      <a:r>
+                        <a:rPr>
+                          <a:latin typeface="Inter"/>
+                        </a:rPr>
+                        <a:t>S2</a:t>
+                      </a:r>
+                    </a:p>
+                  </a:txBody>
+                  <a:tcPr marL="54864" marR="54864" marT="27432" marB="27432" anchor="ctr">
+                    <a:solidFill>
+                      <a:srgbClr val="F5F7F9"/>
+                    </a:solidFill>
+                  </a:tcPr>
+                </a:tc>
+                <a:tc>
+                  <a:txBody>
+                    <a:bodyPr/>
+                    <a:lstStyle/>
+                    <a:p>
+                      <a:pPr>
+                        <a:defRPr sz="800" b="0">
+                          <a:solidFill>
+                            <a:srgbClr val="0D1117"/>
+                          </a:solidFill>
+                          <a:latin typeface="Inter"/>
+                        </a:defRPr>
+                      </a:pPr>
+                      <a:r>
+                        <a:rPr>
+                          <a:latin typeface="Inter"/>
+                        </a:rPr>
+                        <a:t>allocation_tree</a:t>
+                      </a:r>
+                    </a:p>
+                  </a:txBody>
+                  <a:tcPr marL="54864" marR="54864" marT="27432" marB="27432" anchor="ctr">
+                    <a:solidFill>
+                      <a:srgbClr val="F5F7F9"/>
+                    </a:solidFill>
+                  </a:tcPr>
+                </a:tc>
+                <a:tc>
+                  <a:txBody>
+                    <a:bodyPr/>
+                    <a:lstStyle/>
+                    <a:p>
+                      <a:pPr>
+                        <a:defRPr sz="800" b="0">
+                          <a:solidFill>
+                            <a:srgbClr val="0D1117"/>
+                          </a:solidFill>
+                          <a:latin typeface="Inter"/>
+                        </a:defRPr>
+                      </a:pPr>
+                      <a:r>
+                        <a:rPr>
+                          <a:latin typeface="Inter"/>
+                        </a:rPr>
+                        <a:t>sha256:aaaaaaaaaaaaaaaaaaaaaaaaaaaaaaaaaaaaaaaaaaaaaaaaaaaaaaaaaaaaaaaa</a:t>
+                      </a:r>
+                    </a:p>
+                  </a:txBody>
+                  <a:tcPr marL="54864" marR="54864" marT="27432" marB="27432" anchor="ctr">
+                    <a:solidFill>
+                      <a:srgbClr val="F5F7F9"/>
+                    </a:solidFill>
+                  </a:tcPr>
+                </a:tc>
+              </a:tr>
+              <a:tr h="490728">
+                <a:tc>
+                  <a:txBody>
+                    <a:bodyPr/>
+                    <a:lstStyle/>
+                    <a:p>
+                      <a:pPr>
+                        <a:defRPr sz="800" b="1">
+                          <a:solidFill>
+                            <a:srgbClr val="0D1117"/>
+                          </a:solidFill>
+                          <a:latin typeface="Inter"/>
+                        </a:defRPr>
+                      </a:pPr>
+                      <a:r>
+                        <a:rPr>
+                          <a:latin typeface="Inter"/>
+                        </a:rPr>
+                        <a:t>S3</a:t>
+                      </a:r>
+                    </a:p>
+                  </a:txBody>
+                  <a:tcPr marL="54864" marR="54864" marT="27432" marB="27432" anchor="ctr">
+                    <a:solidFill>
+                      <a:srgbClr val="FFFFFF"/>
+                    </a:solidFill>
+                  </a:tcPr>
+                </a:tc>
+                <a:tc>
+                  <a:txBody>
+                    <a:bodyPr/>
+                    <a:lstStyle/>
+                    <a:p>
+                      <a:pPr>
+                        <a:defRPr sz="800" b="0">
+                          <a:solidFill>
+                            <a:srgbClr val="0D1117"/>
+                          </a:solidFill>
+                          <a:latin typeface="Inter"/>
+                        </a:defRPr>
+                      </a:pPr>
+                      <a:r>
+                        <a:rPr>
+                          <a:latin typeface="Inter"/>
+                        </a:rPr>
+                        <a:t>portfolio=test</a:t>
+                      </a:r>
+                    </a:p>
+                  </a:txBody>
+                  <a:tcPr marL="54864" marR="54864" marT="27432" marB="27432" anchor="ctr">
+                    <a:solidFill>
+                      <a:srgbClr val="FFFFFF"/>
+                    </a:solidFill>
+                  </a:tcPr>
+                </a:tc>
+                <a:tc>
+                  <a:txBody>
+                    <a:bodyPr/>
+                    <a:lstStyle/>
+                    <a:p>
+                      <a:pPr>
+                        <a:defRPr sz="800" b="0">
+                          <a:solidFill>
+                            <a:srgbClr val="0D1117"/>
+                          </a:solidFill>
+                          <a:latin typeface="Inter"/>
+                        </a:defRPr>
+                      </a:pPr>
+                      <a:r>
+                        <a:rPr>
+                          <a:latin typeface="Inter"/>
+                        </a:rPr>
+                        <a:t>sha256:aaaaaaaaaaaaaaaaaaaaaaaaaaaaaaaaaaaaaaaaaaaaaaaaaaaaaaaaaaaaaaaa</a:t>
+                      </a:r>
+                    </a:p>
+                  </a:txBody>
+                  <a:tcPr marL="54864" marR="54864" marT="27432" marB="27432" anchor="ctr">
+                    <a:solidFill>
+                      <a:srgbClr val="FFFFFF"/>
+                    </a:solidFill>
+                  </a:tcPr>
+                </a:tc>
+              </a:tr>
+              <a:tr h="490728">
+                <a:tc>
+                  <a:txBody>
+                    <a:bodyPr/>
+                    <a:lstStyle/>
+                    <a:p>
+                      <a:pPr>
+                        <a:defRPr sz="800" b="1">
+                          <a:solidFill>
+                            <a:srgbClr val="0D1117"/>
+                          </a:solidFill>
+                          <a:latin typeface="Inter"/>
+                        </a:defRPr>
+                      </a:pPr>
+                      <a:r>
+                        <a:rPr>
+                          <a:latin typeface="Inter"/>
+                        </a:rPr>
+                        <a:t>S4</a:t>
+                      </a:r>
+                    </a:p>
+                  </a:txBody>
+                  <a:tcPr marL="54864" marR="54864" marT="27432" marB="27432" anchor="ctr">
+                    <a:solidFill>
+                      <a:srgbClr val="F5F7F9"/>
+                    </a:solidFill>
+                  </a:tcPr>
+                </a:tc>
+                <a:tc>
+                  <a:txBody>
+                    <a:bodyPr/>
+                    <a:lstStyle/>
+                    <a:p>
+                      <a:pPr>
+                        <a:defRPr sz="800" b="0">
+                          <a:solidFill>
+                            <a:srgbClr val="0D1117"/>
+                          </a:solidFill>
+                          <a:latin typeface="Inter"/>
+                        </a:defRPr>
+                      </a:pPr>
+                      <a:r>
+                        <a:rPr>
+                          <a:latin typeface="Inter"/>
+                        </a:rPr>
+                        <a:t>all pages</a:t>
+                      </a:r>
+                    </a:p>
+                  </a:txBody>
+                  <a:tcPr marL="54864" marR="54864" marT="27432" marB="27432" anchor="ctr">
+                    <a:solidFill>
+                      <a:srgbClr val="F5F7F9"/>
+                    </a:solidFill>
+                  </a:tcPr>
+                </a:tc>
+                <a:tc>
+                  <a:txBody>
+                    <a:bodyPr/>
+                    <a:lstStyle/>
+                    <a:p>
+                      <a:pPr>
+                        <a:defRPr sz="800" b="0">
+                          <a:solidFill>
+                            <a:srgbClr val="0D1117"/>
+                          </a:solidFill>
+                          <a:latin typeface="Inter"/>
+                        </a:defRPr>
+                      </a:pPr>
+                      <a:r>
+                        <a:rPr>
+                          <a:latin typeface="Inter"/>
+                        </a:rPr>
+                        <a:t>sha256:aaaaaaaaaaaaaaaaaaaaaaaaaaaaaaaaaaaaaaaaaaaaaaaaaaaaaaaaaaaaaaaa</a:t>
+                      </a:r>
+                    </a:p>
+                  </a:txBody>
+                  <a:tcPr marL="54864" marR="54864" marT="27432" marB="27432" anchor="ctr">
+                    <a:solidFill>
+                      <a:srgbClr val="F5F7F9"/>
+                    </a:solidFill>
+                  </a:tcPr>
+                </a:tc>
+              </a:tr>
+              <a:tr h="490728">
+                <a:tc>
+                  <a:txBody>
+                    <a:bodyPr/>
+                    <a:lstStyle/>
+                    <a:p>
+                      <a:pPr>
+                        <a:defRPr sz="800" b="1">
+                          <a:solidFill>
+                            <a:srgbClr val="0D1117"/>
+                          </a:solidFill>
+                          <a:latin typeface="Inter"/>
+                        </a:defRPr>
+                      </a:pPr>
+                      <a:r>
+                        <a:rPr>
+                          <a:latin typeface="Inter"/>
+                        </a:rPr>
+                        <a:t>S5</a:t>
+                      </a:r>
+                    </a:p>
+                  </a:txBody>
+                  <a:tcPr marL="54864" marR="54864" marT="27432" marB="27432" anchor="ctr">
+                    <a:solidFill>
+                      <a:srgbClr val="FFFFFF"/>
+                    </a:solidFill>
+                  </a:tcPr>
+                </a:tc>
+                <a:tc>
+                  <a:txBody>
+                    <a:bodyPr/>
+                    <a:lstStyle/>
+                    <a:p>
+                      <a:pPr>
+                        <a:defRPr sz="800" b="0">
+                          <a:solidFill>
+                            <a:srgbClr val="0D1117"/>
+                          </a:solidFill>
+                          <a:latin typeface="Inter"/>
+                        </a:defRPr>
+                      </a:pPr>
+                      <a:r>
+                        <a:rPr>
+                          <a:latin typeface="Inter"/>
+                        </a:rPr>
+                        <a:t>all sections</a:t>
+                      </a:r>
+                    </a:p>
+                  </a:txBody>
+                  <a:tcPr marL="54864" marR="54864" marT="27432" marB="27432" anchor="ctr">
+                    <a:solidFill>
+                      <a:srgbClr val="FFFFFF"/>
+                    </a:solidFill>
+                  </a:tcPr>
+                </a:tc>
+                <a:tc>
+                  <a:txBody>
+                    <a:bodyPr/>
+                    <a:lstStyle/>
+                    <a:p>
+                      <a:pPr>
+                        <a:defRPr sz="800" b="0">
+                          <a:solidFill>
+                            <a:srgbClr val="0D1117"/>
+                          </a:solidFill>
+                          <a:latin typeface="Inter"/>
+                        </a:defRPr>
+                      </a:pPr>
+                      <a:r>
+                        <a:rPr>
+                          <a:latin typeface="Inter"/>
+                        </a:rPr>
+                        <a:t>sha256:aaaaaaaaaaaaaaaaaaaaaaaaaaaaaaaaaaaaaaaaaaaaaaaaaaaaaaaaaaaaaaaa</a:t>
+                      </a:r>
+                    </a:p>
+                  </a:txBody>
+                  <a:tcPr marL="54864" marR="54864" marT="27432" marB="27432" anchor="ctr">
+                    <a:solidFill>
+                      <a:srgbClr val="FFFFFF"/>
+                    </a:solidFill>
+                  </a:tcPr>
+                </a:tc>
+              </a:tr>
+              <a:tr h="490728">
+                <a:tc>
+                  <a:txBody>
+                    <a:bodyPr/>
+                    <a:lstStyle/>
+                    <a:p>
+                      <a:pPr>
+                        <a:defRPr sz="800" b="1">
+                          <a:solidFill>
+                            <a:srgbClr val="0D1117"/>
+                          </a:solidFill>
+                          <a:latin typeface="Inter"/>
+                        </a:defRPr>
+                      </a:pPr>
+                      <a:r>
+                        <a:rPr>
+                          <a:latin typeface="Inter"/>
+                        </a:rPr>
+                        <a:t>S6</a:t>
+                      </a:r>
+                    </a:p>
+                  </a:txBody>
+                  <a:tcPr marL="54864" marR="54864" marT="27432" marB="27432" anchor="ctr">
+                    <a:solidFill>
+                      <a:srgbClr val="F5F7F9"/>
+                    </a:solidFill>
+                  </a:tcPr>
+                </a:tc>
+                <a:tc>
+                  <a:txBody>
+                    <a:bodyPr/>
+                    <a:lstStyle/>
+                    <a:p>
+                      <a:pPr>
+                        <a:defRPr sz="800" b="0">
+                          <a:solidFill>
+                            <a:srgbClr val="0D1117"/>
+                          </a:solidFill>
+                          <a:latin typeface="Inter"/>
+                        </a:defRPr>
+                      </a:pPr>
+                      <a:r>
+                        <a:rPr>
+                          <a:latin typeface="Inter"/>
+                        </a:rPr>
+                        <a:t>commitments; baseline</a:t>
+                      </a:r>
+                    </a:p>
+                  </a:txBody>
+                  <a:tcPr marL="54864" marR="54864" marT="27432" marB="27432" anchor="ctr">
+                    <a:solidFill>
+                      <a:srgbClr val="F5F7F9"/>
+                    </a:solidFill>
+                  </a:tcPr>
+                </a:tc>
+                <a:tc>
+                  <a:txBody>
+                    <a:bodyPr/>
+                    <a:lstStyle/>
+                    <a:p>
+                      <a:pPr>
+                        <a:defRPr sz="800" b="0">
+                          <a:solidFill>
+                            <a:srgbClr val="0D1117"/>
+                          </a:solidFill>
+                          <a:latin typeface="Inter"/>
+                        </a:defRPr>
+                      </a:pPr>
+                      <a:r>
+                        <a:rPr>
+                          <a:latin typeface="Inter"/>
+                        </a:rPr>
+                        <a:t>sha256:aaaaaaaaaaaaaaaaaaaaaaaaaaaaaaaaaaaaaaaaaaaaaaaaaaaaaaaaaaaaaaaa</a:t>
+                      </a:r>
+                    </a:p>
+                  </a:txBody>
+                  <a:tcPr marL="54864" marR="54864" marT="27432" marB="27432" anchor="ctr">
+                    <a:solidFill>
+                      <a:srgbClr val="F5F7F9"/>
+                    </a:solidFill>
+                  </a:tcPr>
+                </a:tc>
+              </a:tr>
+              <a:tr h="490728">
+                <a:tc>
+                  <a:txBody>
+                    <a:bodyPr/>
+                    <a:lstStyle/>
+                    <a:p>
+                      <a:pPr>
+                        <a:defRPr sz="800" b="1">
+                          <a:solidFill>
+                            <a:srgbClr val="0D1117"/>
+                          </a:solidFill>
+                          <a:latin typeface="Inter"/>
+                        </a:defRPr>
+                      </a:pPr>
+                      <a:r>
+                        <a:rPr>
+                          <a:latin typeface="Inter"/>
+                        </a:rPr>
+                        <a:t>S7</a:t>
+                      </a:r>
+                    </a:p>
+                  </a:txBody>
+                  <a:tcPr marL="54864" marR="54864" marT="27432" marB="27432" anchor="ctr">
+                    <a:solidFill>
+                      <a:srgbClr val="FFFFFF"/>
+                    </a:solidFill>
+                  </a:tcPr>
+                </a:tc>
+                <a:tc>
+                  <a:txBody>
+                    <a:bodyPr/>
+                    <a:lstStyle/>
+                    <a:p>
+                      <a:pPr>
+                        <a:defRPr sz="800" b="0">
+                          <a:solidFill>
+                            <a:srgbClr val="0D1117"/>
+                          </a:solidFill>
+                          <a:latin typeface="Inter"/>
+                        </a:defRPr>
+                      </a:pPr>
+                      <a:r>
+                        <a:rPr>
+                          <a:latin typeface="Inter"/>
+                        </a:rPr>
+                        <a:t>illustrative</a:t>
+                      </a:r>
+                    </a:p>
+                  </a:txBody>
+                  <a:tcPr marL="54864" marR="54864" marT="27432" marB="27432" anchor="ctr">
+                    <a:solidFill>
+                      <a:srgbClr val="FFFFFF"/>
+                    </a:solidFill>
+                  </a:tcPr>
+                </a:tc>
+                <a:tc>
+                  <a:txBody>
+                    <a:bodyPr/>
+                    <a:lstStyle/>
+                    <a:p>
+                      <a:pPr>
+                        <a:defRPr sz="800" b="0">
+                          <a:solidFill>
+                            <a:srgbClr val="0D1117"/>
+                          </a:solidFill>
+                          <a:latin typeface="Inter"/>
+                        </a:defRPr>
+                      </a:pPr>
+                      <a:r>
+                        <a:rPr>
+                          <a:latin typeface="Inter"/>
+                        </a:rPr>
+                        <a:t>sha256:aaaaaaaaaaaaaaaaaaaaaaaaaaaaaaaaaaaaaaaaaaaaaaaaaaaaaaaaaaaaaaaa</a:t>
+                      </a:r>
+                    </a:p>
+                  </a:txBody>
+                  <a:tcPr marL="54864" marR="54864" marT="27432" marB="27432" anchor="ctr">
+                    <a:solidFill>
+                      <a:srgbClr val="FFFFFF"/>
+                    </a:solidFill>
+                  </a:tcPr>
+                </a:tc>
+              </a:tr>
+              <a:tr h="490728">
+                <a:tc>
+                  <a:txBody>
+                    <a:bodyPr/>
+                    <a:lstStyle/>
+                    <a:p>
+                      <a:pPr>
+                        <a:defRPr sz="800" b="1">
+                          <a:solidFill>
+                            <a:srgbClr val="0D1117"/>
+                          </a:solidFill>
+                          <a:latin typeface="Inter"/>
+                        </a:defRPr>
+                      </a:pPr>
+                      <a:r>
+                        <a:rPr>
+                          <a:latin typeface="Inter"/>
+                        </a:rPr>
+                        <a:t>S8</a:t>
+                      </a:r>
+                    </a:p>
+                  </a:txBody>
+                  <a:tcPr marL="54864" marR="54864" marT="27432" marB="27432" anchor="ctr">
+                    <a:solidFill>
+                      <a:srgbClr val="F5F7F9"/>
+                    </a:solidFill>
+                  </a:tcPr>
+                </a:tc>
+                <a:tc>
+                  <a:txBody>
+                    <a:bodyPr/>
+                    <a:lstStyle/>
+                    <a:p>
+                      <a:pPr>
+                        <a:defRPr sz="800" b="0">
+                          <a:solidFill>
+                            <a:srgbClr val="0D1117"/>
+                          </a:solidFill>
+                          <a:latin typeface="Inter"/>
+                        </a:defRPr>
+                      </a:pPr>
+                      <a:r>
+                        <a:rPr>
+                          <a:latin typeface="Inter"/>
+                        </a:rPr>
+                        <a:t>illustrative</a:t>
+                      </a:r>
+                    </a:p>
+                  </a:txBody>
+                  <a:tcPr marL="54864" marR="54864" marT="27432" marB="27432" anchor="ctr">
+                    <a:solidFill>
+                      <a:srgbClr val="F5F7F9"/>
+                    </a:solidFill>
+                  </a:tcPr>
+                </a:tc>
+                <a:tc>
+                  <a:txBody>
+                    <a:bodyPr/>
+                    <a:lstStyle/>
+                    <a:p>
+                      <a:pPr>
+                        <a:defRPr sz="800" b="0">
+                          <a:solidFill>
+                            <a:srgbClr val="0D1117"/>
+                          </a:solidFill>
+                          <a:latin typeface="Inter"/>
+                        </a:defRPr>
+                      </a:pPr>
+                      <a:r>
+                        <a:rPr>
+                          <a:latin typeface="Inter"/>
+                        </a:rPr>
+                        <a:t>sha256:aaaaaaaaaaaaaaaaaaaaaaaaaaaaaaaaaaaaaaaaaaaaaaaaaaaaaaaaaaaaaaaa</a:t>
+                      </a:r>
+                    </a:p>
+                  </a:txBody>
+                  <a:tcPr marL="54864" marR="54864" marT="27432" marB="27432" anchor="ctr">
+                    <a:solidFill>
+                      <a:srgbClr val="F5F7F9"/>
+                    </a:solidFill>
+                  </a:tcPr>
+                </a:tc>
+              </a:tr>
+            </a:tbl>
+          </a:graphicData>
+        </a:graphic>
+      </p:graphicFrame>
+      <p:sp>
+        <p:nvSpPr>
+          <p:cNvPr id="9" name="TextBox 8"/>
+          <p:cNvSpPr txBox="1"/>
+          <p:nvPr/>
+        </p:nvSpPr>
+        <p:spPr>
+          <a:xfrm>
+            <a:off x="640080" y="6035040"/>
+            <a:ext cx="10908792" cy="164592"/>
+          </a:xfrm>
+          <a:prstGeom prst="rect">
+            <a:avLst/>
+          </a:prstGeom>
+          <a:noFill/>
+        </p:spPr>
+        <p:txBody>
+          <a:bodyPr wrap="none" lIns="9144" rIns="9144" tIns="9144" bIns="9144" anchor="t">
+            <a:spAutoFit/>
+          </a:bodyPr>
+          <a:lstStyle/>
+          <a:p>
+            <a:pPr algn="l">
+              <a:spcAft>
+                <a:spcPts val="0"/>
+              </a:spcAft>
+              <a:defRPr sz="680" b="0">
+                <a:solidFill>
+                  <a:srgbClr val="8A94A1"/>
+                </a:solidFill>
+                <a:latin typeface="Inter"/>
+              </a:defRPr>
+            </a:pPr>
+            <a:r>
+              <a:rPr>
+                <a:latin typeface="Inter"/>
+              </a:rPr>
+              <a:t>Data scope for every source: Illustrative sample data. Each digest is the SHA-256 fingerprint of the exact data the report used.</a:t>
+            </a:r>
+          </a:p>
+        </p:txBody>
+      </p:sp>
+      <p:sp>
+        <p:nvSpPr>
+          <p:cNvPr id="10" name="Rectangle 9"/>
+          <p:cNvSpPr/>
+          <p:nvPr/>
+        </p:nvSpPr>
+        <p:spPr>
+          <a:xfrm>
+            <a:off x="640080" y="6446520"/>
+            <a:ext cx="10908792" cy="9144"/>
+          </a:xfrm>
+          <a:prstGeom prst="rect">
+            <a:avLst/>
+          </a:prstGeom>
+          <a:solidFill>
+            <a:srgbClr val="E3E7EC"/>
+          </a:solidFill>
+          <a:ln>
+            <a:solidFill>
+              <a:srgbClr val="E3E7EC"/>
+            </a:solidFill>
+          </a:ln>
+        </p:spPr>
+        <p:style>
+          <a:lnRef idx="1">
+            <a:schemeClr val="accent1"/>
+          </a:lnRef>
+          <a:fillRef idx="3">
+            <a:schemeClr val="accent1"/>
+          </a:fillRef>
+          <a:effectRef idx="2">
+            <a:schemeClr val="accent1"/>
+          </a:effectRef>
+          <a:fontRef idx="minor">
+            <a:schemeClr val="lt1"/>
+          </a:fontRef>
+        </p:style>
+        <p:txBody>
+          <a:bodyPr rtlCol="0" anchor="ctr"/>
+          <a:lstStyle/>
+          <a:p>
+            <a:pPr algn="ctr">
+              <a:defRPr>
+                <a:latin typeface="Inter"/>
+              </a:defRPr>
+            </a:pPr>
+          </a:p>
+        </p:txBody>
+      </p:sp>
+      <p:sp>
+        <p:nvSpPr>
+          <p:cNvPr id="11" name="TextBox 10"/>
+          <p:cNvSpPr txBox="1"/>
+          <p:nvPr/>
+        </p:nvSpPr>
+        <p:spPr>
+          <a:xfrm>
+            <a:off x="640080" y="6501384"/>
+            <a:ext cx="4297680" cy="146304"/>
+          </a:xfrm>
+          <a:prstGeom prst="rect">
+            <a:avLst/>
+          </a:prstGeom>
+          <a:noFill/>
+        </p:spPr>
+        <p:txBody>
+          <a:bodyPr wrap="none" lIns="9144" rIns="9144" tIns="9144" bIns="9144" anchor="t">
+            <a:spAutoFit/>
+          </a:bodyPr>
+          <a:lstStyle/>
+          <a:p>
+            <a:pPr algn="l">
+              <a:spcAft>
+                <a:spcPts val="0"/>
+              </a:spcAft>
+              <a:defRPr sz="650" b="0">
+                <a:solidFill>
+                  <a:srgbClr val="8A94A1"/>
+                </a:solidFill>
+                <a:latin typeface="Inter"/>
+              </a:defRPr>
+            </a:pPr>
+            <a:r>
+              <a:rPr>
+                <a:latin typeface="Inter"/>
+              </a:rPr>
+              <a:t>Sources: S1 · S2 · S3 · S4 · S5 · S6 · S7 · S8</a:t>
+            </a:r>
+          </a:p>
+        </p:txBody>
+      </p:sp>
+      <p:sp>
+        <p:nvSpPr>
+          <p:cNvPr id="12" name="TextBox 11"/>
+          <p:cNvSpPr txBox="1"/>
+          <p:nvPr/>
+        </p:nvSpPr>
+        <p:spPr>
+          <a:xfrm>
+            <a:off x="4480560" y="6501384"/>
+            <a:ext cx="5303520" cy="146304"/>
+          </a:xfrm>
+          <a:prstGeom prst="rect">
+            <a:avLst/>
+          </a:prstGeom>
+          <a:noFill/>
+        </p:spPr>
+        <p:txBody>
+          <a:bodyPr wrap="none" lIns="9144" rIns="9144" tIns="9144" bIns="9144" anchor="t">
+            <a:spAutoFit/>
+          </a:bodyPr>
+          <a:lstStyle/>
+          <a:p>
+            <a:pPr algn="ctr">
+              <a:spcAft>
+                <a:spcPts val="0"/>
+              </a:spcAft>
+              <a:defRPr sz="650" b="0">
+                <a:solidFill>
+                  <a:srgbClr val="8A94A1"/>
+                </a:solidFill>
+                <a:latin typeface="Inter"/>
+              </a:defRPr>
+            </a:pPr>
+            <a:r>
+              <a:rPr>
+                <a:latin typeface="Inter"/>
+              </a:rPr>
+              <a:t>Confidential — Investment Committee · Data as of 2026-06-30</a:t>
+            </a:r>
+          </a:p>
+        </p:txBody>
+      </p:sp>
+      <p:sp>
+        <p:nvSpPr>
+          <p:cNvPr id="13" name="TextBox 12"/>
+          <p:cNvSpPr txBox="1"/>
+          <p:nvPr/>
+        </p:nvSpPr>
+        <p:spPr>
+          <a:xfrm>
+            <a:off x="10287000" y="6501384"/>
+            <a:ext cx="1261872" cy="146304"/>
+          </a:xfrm>
+          <a:prstGeom prst="rect">
+            <a:avLst/>
+          </a:prstGeom>
+          <a:noFill/>
+        </p:spPr>
+        <p:txBody>
+          <a:bodyPr wrap="none" lIns="9144" rIns="9144" tIns="9144" bIns="9144" anchor="t">
+            <a:spAutoFit/>
+          </a:bodyPr>
+          <a:lstStyle/>
+          <a:p>
+            <a:pPr algn="r">
+              <a:spcAft>
+                <a:spcPts val="0"/>
+              </a:spcAft>
+              <a:defRPr sz="650" b="0">
+                <a:solidFill>
+                  <a:srgbClr val="8A94A1"/>
+                </a:solidFill>
+                <a:latin typeface="Inter"/>
+              </a:defRPr>
+            </a:pPr>
+            <a:r>
+              <a:rPr>
+                <a:latin typeface="Inter"/>
+              </a:rPr>
+              <a:t>30</a:t>
+            </a:r>
+          </a:p>
+        </p:txBody>
+      </p:sp>
+    </p:spTree>
+  </p:cSld>
+  <p:clrMapOvr>
+    <a:masterClrMapping/>
+  </p:clrMapOvr>
+</p:sld>
+</file>
+
+<file path=ppt/slides/slide31.xml><?xml version="1.0" encoding="utf-8"?>
+<p:sld xmlns:a="http://schemas.openxmlformats.org/drawingml/2006/main" xmlns:p="http://schemas.openxmlformats.org/presentationml/2006/main" xmlns:r="http://schemas.openxmlformats.org/officeDocument/2006/relationships">
+  <p:cSld>
+    <p:spTree>
+      <p:nvGrpSpPr>
+        <p:cNvPr id="1" name=""/>
+        <p:cNvGrpSpPr/>
+        <p:nvPr/>
+      </p:nvGrpSpPr>
+      <p:grpSpPr/>
+      <p:sp>
+        <p:nvSpPr>
+          <p:cNvPr id="2" name="Rectangle 1"/>
+          <p:cNvSpPr/>
+          <p:nvPr/>
+        </p:nvSpPr>
+        <p:spPr>
+          <a:xfrm>
+            <a:off x="0" y="0"/>
+            <a:ext cx="12191695" cy="6858000"/>
+          </a:xfrm>
+          <a:prstGeom prst="rect">
+            <a:avLst/>
+          </a:prstGeom>
+          <a:solidFill>
+            <a:srgbClr val="FFFFFF"/>
+          </a:solidFill>
+          <a:ln>
+            <a:solidFill>
+              <a:srgbClr val="FFFFFF"/>
+            </a:solidFill>
+          </a:ln>
+        </p:spPr>
+        <p:style>
+          <a:lnRef idx="1">
+            <a:schemeClr val="accent1"/>
+          </a:lnRef>
+          <a:fillRef idx="3">
+            <a:schemeClr val="accent1"/>
+          </a:fillRef>
+          <a:effectRef idx="2">
+            <a:schemeClr val="accent1"/>
+          </a:effectRef>
+          <a:fontRef idx="minor">
+            <a:schemeClr val="lt1"/>
+          </a:fontRef>
+        </p:style>
+        <p:txBody>
+          <a:bodyPr rtlCol="0" anchor="ctr"/>
+          <a:lstStyle/>
+          <a:p>
+            <a:pPr algn="ctr">
+              <a:defRPr>
+                <a:latin typeface="Inter"/>
+              </a:defRPr>
+            </a:pPr>
+          </a:p>
+        </p:txBody>
+      </p:sp>
+      <p:sp>
+        <p:nvSpPr>
+          <p:cNvPr id="3" name="TextBox 2"/>
+          <p:cNvSpPr txBox="1"/>
+          <p:nvPr/>
+        </p:nvSpPr>
+        <p:spPr>
+          <a:xfrm>
+            <a:off x="640080" y="566928"/>
+            <a:ext cx="10058400" cy="530352"/>
+          </a:xfrm>
+          <a:prstGeom prst="rect">
+            <a:avLst/>
+          </a:prstGeom>
+          <a:noFill/>
+        </p:spPr>
+        <p:txBody>
+          <a:bodyPr wrap="none" lIns="9144" rIns="9144" tIns="9144" bIns="9144" anchor="t">
+            <a:spAutoFit/>
+          </a:bodyPr>
+          <a:lstStyle/>
+          <a:p>
+            <a:pPr algn="l">
+              <a:spcAft>
+                <a:spcPts val="0"/>
+              </a:spcAft>
+              <a:defRPr sz="2300" b="1">
+                <a:solidFill>
+                  <a:srgbClr val="0D1117"/>
+                </a:solidFill>
+                <a:latin typeface="Inter"/>
+              </a:defRPr>
+            </a:pPr>
+            <a:r>
+              <a:rPr>
+                <a:latin typeface="Inter"/>
+              </a:rPr>
+              <a:t>Appendix — Server Metric Methods and Disclosures</a:t>
+            </a:r>
+          </a:p>
+        </p:txBody>
+      </p:sp>
+      <p:sp>
+        <p:nvSpPr>
+          <p:cNvPr id="4" name="Rectangle 3"/>
+          <p:cNvSpPr/>
+          <p:nvPr/>
+        </p:nvSpPr>
+        <p:spPr>
+          <a:xfrm>
+            <a:off x="640080" y="1115568"/>
+            <a:ext cx="10908792" cy="18288"/>
+          </a:xfrm>
+          <a:prstGeom prst="rect">
+            <a:avLst/>
+          </a:prstGeom>
+          <a:solidFill>
+            <a:srgbClr val="0D1117"/>
+          </a:solidFill>
+          <a:ln>
+            <a:solidFill>
+              <a:srgbClr val="0D1117"/>
+            </a:solidFill>
+          </a:ln>
+        </p:spPr>
+        <p:style>
+          <a:lnRef idx="1">
+            <a:schemeClr val="accent1"/>
+          </a:lnRef>
+          <a:fillRef idx="3">
+            <a:schemeClr val="accent1"/>
+          </a:fillRef>
+          <a:effectRef idx="2">
+            <a:schemeClr val="accent1"/>
+          </a:effectRef>
+          <a:fontRef idx="minor">
+            <a:schemeClr val="lt1"/>
+          </a:fontRef>
+        </p:style>
+        <p:txBody>
+          <a:bodyPr rtlCol="0" anchor="ctr"/>
+          <a:lstStyle/>
+          <a:p>
+            <a:pPr algn="ctr">
+              <a:defRPr>
+                <a:latin typeface="Inter"/>
+              </a:defRPr>
+            </a:pPr>
+          </a:p>
+        </p:txBody>
+      </p:sp>
+      <p:sp>
+        <p:nvSpPr>
+          <p:cNvPr id="5" name="Rectangle 4"/>
+          <p:cNvSpPr/>
+          <p:nvPr/>
+        </p:nvSpPr>
+        <p:spPr>
+          <a:xfrm>
+            <a:off x="11018520" y="502920"/>
+            <a:ext cx="530352" cy="393192"/>
+          </a:xfrm>
+          <a:prstGeom prst="rect">
+            <a:avLst/>
+          </a:prstGeom>
+          <a:solidFill>
+            <a:srgbClr val="9AA5B1"/>
+          </a:solidFill>
+          <a:ln>
+            <a:solidFill>
+              <a:srgbClr val="9AA5B1"/>
+            </a:solidFill>
+          </a:ln>
+        </p:spPr>
+        <p:style>
+          <a:lnRef idx="1">
+            <a:schemeClr val="accent1"/>
+          </a:lnRef>
+          <a:fillRef idx="3">
+            <a:schemeClr val="accent1"/>
+          </a:fillRef>
+          <a:effectRef idx="2">
+            <a:schemeClr val="accent1"/>
+          </a:effectRef>
+          <a:fontRef idx="minor">
+            <a:schemeClr val="lt1"/>
+          </a:fontRef>
+        </p:style>
+        <p:txBody>
+          <a:bodyPr rtlCol="0" anchor="ctr"/>
+          <a:lstStyle/>
+          <a:p>
+            <a:pPr algn="ctr">
+              <a:defRPr>
+                <a:latin typeface="Inter"/>
+              </a:defRPr>
+            </a:pPr>
+          </a:p>
+        </p:txBody>
+      </p:sp>
+      <p:sp>
+        <p:nvSpPr>
+          <p:cNvPr id="6" name="TextBox 5"/>
+          <p:cNvSpPr txBox="1"/>
+          <p:nvPr/>
+        </p:nvSpPr>
+        <p:spPr>
+          <a:xfrm>
+            <a:off x="11045952" y="557784"/>
+            <a:ext cx="475488" cy="182880"/>
+          </a:xfrm>
+          <a:prstGeom prst="rect">
+            <a:avLst/>
+          </a:prstGeom>
+          <a:noFill/>
+        </p:spPr>
+        <p:txBody>
+          <a:bodyPr wrap="none" lIns="9144" rIns="9144" tIns="9144" bIns="9144" anchor="t">
+            <a:spAutoFit/>
+          </a:bodyPr>
+          <a:lstStyle/>
+          <a:p>
+            <a:pPr algn="ctr">
+              <a:spcAft>
+                <a:spcPts val="0"/>
+              </a:spcAft>
+              <a:defRPr sz="1000" b="1">
+                <a:solidFill>
+                  <a:srgbClr val="0D1117"/>
+                </a:solidFill>
+                <a:latin typeface="Inter"/>
+              </a:defRPr>
+            </a:pPr>
+            <a:r>
+              <a:rPr>
+                <a:latin typeface="Inter"/>
+              </a:rPr>
+              <a:t>B</a:t>
+            </a:r>
+          </a:p>
+        </p:txBody>
+      </p:sp>
+      <p:sp>
+        <p:nvSpPr>
+          <p:cNvPr id="7" name="TextBox 6"/>
+          <p:cNvSpPr txBox="1"/>
+          <p:nvPr/>
+        </p:nvSpPr>
+        <p:spPr>
+          <a:xfrm>
+            <a:off x="640080" y="1325880"/>
+            <a:ext cx="10908792" cy="201168"/>
+          </a:xfrm>
+          <a:prstGeom prst="rect">
+            <a:avLst/>
+          </a:prstGeom>
+          <a:noFill/>
+        </p:spPr>
+        <p:txBody>
+          <a:bodyPr wrap="none" lIns="9144" rIns="9144" tIns="9144" bIns="9144" anchor="t">
+            <a:spAutoFit/>
+          </a:bodyPr>
+          <a:lstStyle/>
+          <a:p>
+            <a:pPr algn="l">
+              <a:spcAft>
+                <a:spcPts val="0"/>
+              </a:spcAft>
+              <a:defRPr sz="720" b="1">
+                <a:solidFill>
+                  <a:srgbClr val="4A5563"/>
+                </a:solidFill>
+                <a:latin typeface="Inter"/>
+              </a:defRPr>
+            </a:pPr>
+            <a:r>
+              <a:rPr>
+                <a:latin typeface="Inter"/>
+              </a:rPr>
+              <a:t>SERVER METRIC METHODS</a:t>
+            </a:r>
+          </a:p>
+        </p:txBody>
+      </p:sp>
+      <p:graphicFrame>
+        <p:nvGraphicFramePr>
+          <p:cNvPr id="8" name="Table 7"/>
+          <p:cNvGraphicFramePr>
+            <a:graphicFrameLocks noGrp="1"/>
+          </p:cNvGraphicFramePr>
+          <p:nvPr/>
+        </p:nvGraphicFramePr>
+        <p:xfrm>
+          <a:off x="640080" y="1600200"/>
+          <a:ext cx="10908792" cy="2581330"/>
         </p:xfrm>
         <a:graphic>
           <a:graphicData uri="http://schemas.openxmlformats.org/drawingml/2006/table">
@@ -34166,7 +33563,7 @@
                 <a:gridCol w="2224278"/>
                 <a:gridCol w="2224278"/>
               </a:tblGrid>
-              <a:tr h="567296">
+              <a:tr h="860443">
                 <a:tc>
                   <a:txBody>
                     <a:bodyPr/>
@@ -34303,7 +33700,7 @@
                   </a:tcPr>
                 </a:tc>
               </a:tr>
-              <a:tr h="567296">
+              <a:tr h="860443">
                 <a:tc>
                   <a:txBody>
                     <a:bodyPr/>
@@ -34440,7 +33837,7 @@
                   </a:tcPr>
                 </a:tc>
               </a:tr>
-              <a:tr h="567297">
+              <a:tr h="860444">
                 <a:tc>
                   <a:txBody>
                     <a:bodyPr/>
@@ -34583,14 +33980,14 @@
       </p:graphicFrame>
       <p:sp>
         <p:nvSpPr>
-          <p:cNvPr id="10" name="TextBox 9"/>
+          <p:cNvPr id="9" name="TextBox 8"/>
           <p:cNvSpPr txBox="1"/>
           <p:nvPr/>
         </p:nvSpPr>
         <p:spPr>
           <a:xfrm>
-            <a:off x="640080" y="3411817"/>
-            <a:ext cx="10908792" cy="2806102"/>
+            <a:off x="640080" y="4291258"/>
+            <a:ext cx="10908792" cy="1926661"/>
           </a:xfrm>
           <a:prstGeom prst="rect">
             <a:avLst/>
@@ -34618,7 +34015,7 @@
               <a:rPr>
                 <a:latin typeface="Inter"/>
               </a:rPr>
-              <a:t>•  Private real-assets valuations may lag the report date [S4].</a:t>
+              <a:t>•  Private valuations may lag the report date [S4]; forward values are assumptions, not forecasts [S6].</a:t>
             </a:r>
           </a:p>
           <a:p>
@@ -34637,7 +34034,7 @@
               <a:rPr>
                 <a:latin typeface="Inter"/>
               </a:rPr>
-              <a:t>•  Forward values are assumptions, not forecasts or guarantees [S6].</a:t>
+              <a:t>•  Drawdown charts cover closed-end sleeves only [S6]; commodity and linker mappings were not provided [S8].</a:t>
             </a:r>
           </a:p>
           <a:p>
@@ -34656,71 +34053,14 @@
               <a:rPr>
                 <a:latin typeface="Inter"/>
               </a:rPr>
-              <a:t>•  Commodity and inflation-linked CMA mappings are not provided [S8].</a:t>
+              <a:t>•  Strategy Lab results are calculated separately. AI-assisted; not investment, legal or compliance advice.</a:t>
             </a:r>
           </a:p>
-          <a:p>
-            <a:pPr algn="l">
-              <a:spcAft>
-                <a:spcPts val="500"/>
-              </a:spcAft>
-              <a:defRPr sz="1050" b="0">
-                <a:solidFill>
-                  <a:srgbClr val="0D1117"/>
-                </a:solidFill>
-                <a:latin typeface="Inter"/>
-              </a:defRPr>
-            </a:pPr>
-            <a:r>
-              <a:rPr>
-                <a:latin typeface="Inter"/>
-              </a:rPr>
-              <a:t>•  Drawdown charts apply only to closed-end sleeves [S6].</a:t>
-            </a:r>
-          </a:p>
-          <a:p>
-            <a:pPr algn="l">
-              <a:spcAft>
-                <a:spcPts val="500"/>
-              </a:spcAft>
-              <a:defRPr sz="1050" b="0">
-                <a:solidFill>
-                  <a:srgbClr val="0D1117"/>
-                </a:solidFill>
-                <a:latin typeface="Inter"/>
-              </a:defRPr>
-            </a:pPr>
-            <a:r>
-              <a:rPr>
-                <a:latin typeface="Inter"/>
-              </a:rPr>
-              <a:t>•  Portfolio Analytics and Strategy Lab are separate analytical scopes.</a:t>
-            </a:r>
-          </a:p>
-          <a:p>
-            <a:pPr algn="l">
-              <a:spcAft>
-                <a:spcPts val="500"/>
-              </a:spcAft>
-              <a:defRPr sz="1050" b="0">
-                <a:solidFill>
-                  <a:srgbClr val="0D1117"/>
-                </a:solidFill>
-                <a:latin typeface="Inter"/>
-              </a:defRPr>
-            </a:pPr>
-            <a:r>
-              <a:rPr>
-                <a:latin typeface="Inter"/>
-              </a:rPr>
-              <a:t>•  This AI-assisted construction analysis is not investment, legal or compliance advice.</a:t>
-            </a:r>
-          </a:p>
-        </p:txBody>
-      </p:sp>
-      <p:sp>
-        <p:nvSpPr>
-          <p:cNvPr id="11" name="Rectangle 10"/>
+        </p:txBody>
+      </p:sp>
+      <p:sp>
+        <p:nvSpPr>
+          <p:cNvPr id="10" name="Rectangle 9"/>
           <p:cNvSpPr/>
           <p:nvPr/>
         </p:nvSpPr>
@@ -34769,7 +34109,7 @@
       </p:sp>
       <p:sp>
         <p:nvSpPr>
-          <p:cNvPr id="12" name="TextBox 11"/>
+          <p:cNvPr id="11" name="TextBox 10"/>
           <p:cNvSpPr txBox="1"/>
           <p:nvPr/>
         </p:nvSpPr>
@@ -34811,7 +34151,7 @@
       </p:sp>
       <p:sp>
         <p:nvSpPr>
-          <p:cNvPr id="13" name="TextBox 12"/>
+          <p:cNvPr id="12" name="TextBox 11"/>
           <p:cNvSpPr txBox="1"/>
           <p:nvPr/>
         </p:nvSpPr>
@@ -34853,7 +34193,7 @@
       </p:sp>
       <p:sp>
         <p:nvSpPr>
-          <p:cNvPr id="14" name="TextBox 13"/>
+          <p:cNvPr id="13" name="TextBox 12"/>
           <p:cNvSpPr txBox="1"/>
           <p:nvPr/>
         </p:nvSpPr>
@@ -34888,7 +34228,7 @@
               <a:rPr>
                 <a:latin typeface="Inter"/>
               </a:rPr>
-              <a:t>30</a:t>
+              <a:t>31</a:t>
             </a:r>
           </a:p>
         </p:txBody>
@@ -34968,48 +34308,6 @@
         </p:nvSpPr>
         <p:spPr>
           <a:xfrm>
-            <a:off x="5897880" y="310896"/>
-            <a:ext cx="4800600" cy="256032"/>
-          </a:xfrm>
-          <a:prstGeom prst="rect">
-            <a:avLst/>
-          </a:prstGeom>
-          <a:noFill/>
-        </p:spPr>
-        <p:txBody>
-          <a:bodyPr wrap="none" lIns="9144" rIns="9144" tIns="9144" bIns="9144" anchor="t">
-            <a:spAutoFit/>
-          </a:bodyPr>
-          <a:lstStyle/>
-          <a:p>
-            <a:pPr algn="r">
-              <a:spcAft>
-                <a:spcPts val="0"/>
-              </a:spcAft>
-              <a:defRPr sz="680" b="1">
-                <a:solidFill>
-                  <a:srgbClr val="4F6B00"/>
-                </a:solidFill>
-                <a:latin typeface="Inter"/>
-              </a:defRPr>
-            </a:pPr>
-            <a:r>
-              <a:rPr>
-                <a:latin typeface="Inter"/>
-              </a:rPr>
-              <a:t>Illustrative, Gradient Maintained — demo data, not the client's holdings or managers</a:t>
-            </a:r>
-          </a:p>
-        </p:txBody>
-      </p:sp>
-      <p:sp>
-        <p:nvSpPr>
-          <p:cNvPr id="4" name="TextBox 3"/>
-          <p:cNvSpPr txBox="1"/>
-          <p:nvPr/>
-        </p:nvSpPr>
-        <p:spPr>
-          <a:xfrm>
             <a:off x="640080" y="566928"/>
             <a:ext cx="10058400" cy="530352"/>
           </a:xfrm>
@@ -35046,7 +34344,7 @@
       </p:sp>
       <p:sp>
         <p:nvSpPr>
-          <p:cNvPr id="5" name="Rectangle 4"/>
+          <p:cNvPr id="4" name="Rectangle 3"/>
           <p:cNvSpPr/>
           <p:nvPr/>
         </p:nvSpPr>
@@ -35095,7 +34393,7 @@
       </p:sp>
       <p:sp>
         <p:nvSpPr>
-          <p:cNvPr id="6" name="Rectangle 5"/>
+          <p:cNvPr id="5" name="Rectangle 4"/>
           <p:cNvSpPr/>
           <p:nvPr/>
         </p:nvSpPr>
@@ -35144,7 +34442,7 @@
       </p:sp>
       <p:sp>
         <p:nvSpPr>
-          <p:cNvPr id="7" name="TextBox 6"/>
+          <p:cNvPr id="6" name="TextBox 5"/>
           <p:cNvSpPr txBox="1"/>
           <p:nvPr/>
         </p:nvSpPr>
@@ -35186,14 +34484,14 @@
       </p:sp>
       <p:sp>
         <p:nvSpPr>
-          <p:cNvPr id="8" name="Rectangle 7"/>
+          <p:cNvPr id="7" name="Rectangle 6"/>
           <p:cNvSpPr/>
           <p:nvPr/>
         </p:nvSpPr>
         <p:spPr>
           <a:xfrm>
             <a:off x="640080" y="1325880"/>
-            <a:ext cx="10908792" cy="2160255"/>
+            <a:ext cx="10908792" cy="4892040"/>
           </a:xfrm>
           <a:prstGeom prst="rect">
             <a:avLst/>
@@ -35235,14 +34533,14 @@
       </p:sp>
       <p:sp>
         <p:nvSpPr>
-          <p:cNvPr id="9" name="Rectangle 8"/>
+          <p:cNvPr id="8" name="Rectangle 7"/>
           <p:cNvSpPr/>
           <p:nvPr/>
         </p:nvSpPr>
         <p:spPr>
           <a:xfrm>
             <a:off x="640080" y="1325880"/>
-            <a:ext cx="54864" cy="2160255"/>
+            <a:ext cx="54864" cy="4892040"/>
           </a:xfrm>
           <a:prstGeom prst="rect">
             <a:avLst/>
@@ -35284,7 +34582,7 @@
       </p:sp>
       <p:sp>
         <p:nvSpPr>
-          <p:cNvPr id="10" name="TextBox 9"/>
+          <p:cNvPr id="9" name="TextBox 8"/>
           <p:cNvSpPr txBox="1"/>
           <p:nvPr/>
         </p:nvSpPr>
@@ -35319,21 +34617,21 @@
               <a:rPr>
                 <a:latin typeface="Inter"/>
               </a:rPr>
-              <a:t>Key judgment — primary measure</a:t>
+              <a:t>Key judgment — Policy limit</a:t>
             </a:r>
           </a:p>
         </p:txBody>
       </p:sp>
       <p:sp>
         <p:nvSpPr>
-          <p:cNvPr id="11" name="TextBox 10"/>
+          <p:cNvPr id="10" name="TextBox 9"/>
           <p:cNvSpPr txBox="1"/>
           <p:nvPr/>
         </p:nvSpPr>
         <p:spPr>
           <a:xfrm>
             <a:off x="804671" y="1719072"/>
-            <a:ext cx="10616184" cy="1675623"/>
+            <a:ext cx="10616184" cy="4407408"/>
           </a:xfrm>
           <a:prstGeom prst="rect">
             <a:avLst/>
@@ -35361,196 +34659,14 @@
               <a:rPr>
                 <a:latin typeface="Inter"/>
               </a:rPr>
-              <a:t>Observation: Real-assets weight is 15.0% in the review evidence [S2]. Why it matters: This measure establishes the baseline for comparing later governed results. Uncertainty: The source basis may omit newer observations outside the reviewed evidence. What would change the view: A refreshed source report showing a change above 1%.</a:t>
+              <a:t>Observation: The real-assets allocation is near its policy limit [S3]. Why it matters: Funding must be staged so the sleeve stays inside its range. Uncertainty: The limit test uses lagged private valuations. What would change the view: A valuation refresh that moves the sleeve away from the limit.</a:t>
             </a:r>
           </a:p>
         </p:txBody>
       </p:sp>
       <p:sp>
         <p:nvSpPr>
-          <p:cNvPr id="12" name="Rectangle 11"/>
-          <p:cNvSpPr/>
-          <p:nvPr/>
-        </p:nvSpPr>
-        <p:spPr>
-          <a:xfrm>
-            <a:off x="640080" y="3595863"/>
-            <a:ext cx="10908792" cy="2622056"/>
-          </a:xfrm>
-          <a:prstGeom prst="rect">
-            <a:avLst/>
-          </a:prstGeom>
-          <a:solidFill>
-            <a:srgbClr val="F5F7F9"/>
-          </a:solidFill>
-          <a:ln>
-            <a:solidFill>
-              <a:srgbClr val="E3E7EC"/>
-            </a:solidFill>
-          </a:ln>
-        </p:spPr>
-        <p:style>
-          <a:lnRef idx="1">
-            <a:schemeClr val="accent1"/>
-          </a:lnRef>
-          <a:fillRef idx="3">
-            <a:schemeClr val="accent1"/>
-          </a:fillRef>
-          <a:effectRef idx="2">
-            <a:schemeClr val="accent1"/>
-          </a:effectRef>
-          <a:fontRef idx="minor">
-            <a:schemeClr val="lt1"/>
-          </a:fontRef>
-        </p:style>
-        <p:txBody>
-          <a:bodyPr rtlCol="0" anchor="ctr"/>
-          <a:lstStyle/>
-          <a:p>
-            <a:pPr algn="ctr">
-              <a:defRPr>
-                <a:latin typeface="Inter"/>
-              </a:defRPr>
-            </a:pPr>
-          </a:p>
-        </p:txBody>
-      </p:sp>
-      <p:sp>
-        <p:nvSpPr>
-          <p:cNvPr id="13" name="Rectangle 12"/>
-          <p:cNvSpPr/>
-          <p:nvPr/>
-        </p:nvSpPr>
-        <p:spPr>
-          <a:xfrm>
-            <a:off x="640080" y="3595863"/>
-            <a:ext cx="54864" cy="2622056"/>
-          </a:xfrm>
-          <a:prstGeom prst="rect">
-            <a:avLst/>
-          </a:prstGeom>
-          <a:solidFill>
-            <a:srgbClr val="0D1117"/>
-          </a:solidFill>
-          <a:ln>
-            <a:solidFill>
-              <a:srgbClr val="0D1117"/>
-            </a:solidFill>
-          </a:ln>
-        </p:spPr>
-        <p:style>
-          <a:lnRef idx="1">
-            <a:schemeClr val="accent1"/>
-          </a:lnRef>
-          <a:fillRef idx="3">
-            <a:schemeClr val="accent1"/>
-          </a:fillRef>
-          <a:effectRef idx="2">
-            <a:schemeClr val="accent1"/>
-          </a:effectRef>
-          <a:fontRef idx="minor">
-            <a:schemeClr val="lt1"/>
-          </a:fontRef>
-        </p:style>
-        <p:txBody>
-          <a:bodyPr rtlCol="0" anchor="ctr"/>
-          <a:lstStyle/>
-          <a:p>
-            <a:pPr algn="ctr">
-              <a:defRPr>
-                <a:latin typeface="Inter"/>
-              </a:defRPr>
-            </a:pPr>
-          </a:p>
-        </p:txBody>
-      </p:sp>
-      <p:sp>
-        <p:nvSpPr>
-          <p:cNvPr id="14" name="TextBox 13"/>
-          <p:cNvSpPr txBox="1"/>
-          <p:nvPr/>
-        </p:nvSpPr>
-        <p:spPr>
-          <a:xfrm>
-            <a:off x="804671" y="3705591"/>
-            <a:ext cx="10616184" cy="228600"/>
-          </a:xfrm>
-          <a:prstGeom prst="rect">
-            <a:avLst/>
-          </a:prstGeom>
-          <a:noFill/>
-        </p:spPr>
-        <p:txBody>
-          <a:bodyPr wrap="none" lIns="9144" rIns="9144" tIns="9144" bIns="9144" anchor="t">
-            <a:spAutoFit/>
-          </a:bodyPr>
-          <a:lstStyle/>
-          <a:p>
-            <a:pPr algn="l">
-              <a:spcAft>
-                <a:spcPts val="0"/>
-              </a:spcAft>
-              <a:defRPr sz="1000" b="1">
-                <a:solidFill>
-                  <a:srgbClr val="0D1117"/>
-                </a:solidFill>
-                <a:latin typeface="Inter"/>
-              </a:defRPr>
-            </a:pPr>
-            <a:r>
-              <a:rPr>
-                <a:latin typeface="Inter"/>
-              </a:rPr>
-              <a:t>Key judgment — monitoring priority</a:t>
-            </a:r>
-          </a:p>
-        </p:txBody>
-      </p:sp>
-      <p:sp>
-        <p:nvSpPr>
-          <p:cNvPr id="15" name="TextBox 14"/>
-          <p:cNvSpPr txBox="1"/>
-          <p:nvPr/>
-        </p:nvSpPr>
-        <p:spPr>
-          <a:xfrm>
-            <a:off x="804671" y="3989055"/>
-            <a:ext cx="10616184" cy="2137424"/>
-          </a:xfrm>
-          <a:prstGeom prst="rect">
-            <a:avLst/>
-          </a:prstGeom>
-          <a:noFill/>
-        </p:spPr>
-        <p:txBody>
-          <a:bodyPr wrap="none" lIns="9144" rIns="9144" tIns="9144" bIns="9144" anchor="t">
-            <a:spAutoFit/>
-          </a:bodyPr>
-          <a:lstStyle/>
-          <a:p>
-            <a:pPr algn="l">
-              <a:spcAft>
-                <a:spcPts val="0"/>
-              </a:spcAft>
-              <a:defRPr sz="950" b="0">
-                <a:solidFill>
-                  <a:srgbClr val="4A5563"/>
-                </a:solidFill>
-                <a:latin typeface="Inter"/>
-              </a:defRPr>
-            </a:pPr>
-            <a:r>
-              <a:rPr>
-                <a:latin typeface="Inter"/>
-              </a:rPr>
-              <a:t>Observation: Policy status is Watch rather than Clear in the review evidence [S3]. Why it matters: This result determines which item receives priority in the next monitoring cycle. Uncertainty: Supporting coverage may omit later filings or corroborating detail. What would change the view: A new filing or report that resolves the item or changes it by 1%.</a:t>
-            </a:r>
-          </a:p>
-        </p:txBody>
-      </p:sp>
-      <p:sp>
-        <p:nvSpPr>
-          <p:cNvPr id="16" name="Rectangle 15"/>
+          <p:cNvPr id="11" name="Rectangle 10"/>
           <p:cNvSpPr/>
           <p:nvPr/>
         </p:nvSpPr>
@@ -35599,7 +34715,7 @@
       </p:sp>
       <p:sp>
         <p:nvSpPr>
-          <p:cNvPr id="17" name="TextBox 16"/>
+          <p:cNvPr id="12" name="TextBox 11"/>
           <p:cNvSpPr txBox="1"/>
           <p:nvPr/>
         </p:nvSpPr>
@@ -35634,14 +34750,14 @@
               <a:rPr>
                 <a:latin typeface="Inter"/>
               </a:rPr>
-              <a:t>Sources: S2 · S3</a:t>
+              <a:t>Sources: S3</a:t>
             </a:r>
           </a:p>
         </p:txBody>
       </p:sp>
       <p:sp>
         <p:nvSpPr>
-          <p:cNvPr id="18" name="TextBox 17"/>
+          <p:cNvPr id="13" name="TextBox 12"/>
           <p:cNvSpPr txBox="1"/>
           <p:nvPr/>
         </p:nvSpPr>
@@ -35683,7 +34799,7 @@
       </p:sp>
       <p:sp>
         <p:nvSpPr>
-          <p:cNvPr id="19" name="TextBox 18"/>
+          <p:cNvPr id="14" name="TextBox 13"/>
           <p:cNvSpPr txBox="1"/>
           <p:nvPr/>
         </p:nvSpPr>
@@ -35798,48 +34914,6 @@
         </p:nvSpPr>
         <p:spPr>
           <a:xfrm>
-            <a:off x="5897880" y="310896"/>
-            <a:ext cx="4800600" cy="256032"/>
-          </a:xfrm>
-          <a:prstGeom prst="rect">
-            <a:avLst/>
-          </a:prstGeom>
-          <a:noFill/>
-        </p:spPr>
-        <p:txBody>
-          <a:bodyPr wrap="none" lIns="9144" rIns="9144" tIns="9144" bIns="9144" anchor="t">
-            <a:spAutoFit/>
-          </a:bodyPr>
-          <a:lstStyle/>
-          <a:p>
-            <a:pPr algn="r">
-              <a:spcAft>
-                <a:spcPts val="0"/>
-              </a:spcAft>
-              <a:defRPr sz="680" b="1">
-                <a:solidFill>
-                  <a:srgbClr val="4F6B00"/>
-                </a:solidFill>
-                <a:latin typeface="Inter"/>
-              </a:defRPr>
-            </a:pPr>
-            <a:r>
-              <a:rPr>
-                <a:latin typeface="Inter"/>
-              </a:rPr>
-              <a:t>Illustrative, Gradient Maintained — demo data, not the client's holdings or managers</a:t>
-            </a:r>
-          </a:p>
-        </p:txBody>
-      </p:sp>
-      <p:sp>
-        <p:nvSpPr>
-          <p:cNvPr id="4" name="TextBox 3"/>
-          <p:cNvSpPr txBox="1"/>
-          <p:nvPr/>
-        </p:nvSpPr>
-        <p:spPr>
-          <a:xfrm>
             <a:off x="640080" y="566928"/>
             <a:ext cx="10058400" cy="530352"/>
           </a:xfrm>
@@ -35876,7 +34950,7 @@
       </p:sp>
       <p:sp>
         <p:nvSpPr>
-          <p:cNvPr id="5" name="Rectangle 4"/>
+          <p:cNvPr id="4" name="Rectangle 3"/>
           <p:cNvSpPr/>
           <p:nvPr/>
         </p:nvSpPr>
@@ -35925,7 +34999,7 @@
       </p:sp>
       <p:sp>
         <p:nvSpPr>
-          <p:cNvPr id="6" name="Rectangle 5"/>
+          <p:cNvPr id="5" name="Rectangle 4"/>
           <p:cNvSpPr/>
           <p:nvPr/>
         </p:nvSpPr>
@@ -35974,7 +35048,7 @@
       </p:sp>
       <p:sp>
         <p:nvSpPr>
-          <p:cNvPr id="7" name="TextBox 6"/>
+          <p:cNvPr id="6" name="TextBox 5"/>
           <p:cNvSpPr txBox="1"/>
           <p:nvPr/>
         </p:nvSpPr>
@@ -36016,7 +35090,7 @@
       </p:sp>
       <p:graphicFrame>
         <p:nvGraphicFramePr>
-          <p:cNvPr id="8" name="Table 7"/>
+          <p:cNvPr id="7" name="Table 6"/>
           <p:cNvGraphicFramePr>
             <a:graphicFrameLocks noGrp="1"/>
           </p:cNvGraphicFramePr>
@@ -36378,7 +35452,7 @@
       </p:graphicFrame>
       <p:sp>
         <p:nvSpPr>
-          <p:cNvPr id="9" name="TextBox 8"/>
+          <p:cNvPr id="8" name="TextBox 7"/>
           <p:cNvSpPr txBox="1"/>
           <p:nvPr/>
         </p:nvSpPr>
@@ -36420,7 +35494,7 @@
       </p:sp>
       <p:graphicFrame>
         <p:nvGraphicFramePr>
-          <p:cNvPr id="10" name="Table 9"/>
+          <p:cNvPr id="9" name="Table 8"/>
           <p:cNvGraphicFramePr>
             <a:graphicFrameLocks noGrp="1"/>
           </p:cNvGraphicFramePr>
@@ -36953,7 +36027,7 @@
                         <a:rPr>
                           <a:latin typeface="Inter"/>
                         </a:rPr>
-                        <a:t>● Watch</a:t>
+                        <a:t>● Near limit</a:t>
                       </a:r>
                     </a:p>
                   </a:txBody>
@@ -36997,7 +36071,7 @@
       </p:graphicFrame>
       <p:sp>
         <p:nvSpPr>
-          <p:cNvPr id="11" name="Rectangle 10"/>
+          <p:cNvPr id="10" name="Rectangle 9"/>
           <p:cNvSpPr/>
           <p:nvPr/>
         </p:nvSpPr>
@@ -37046,7 +36120,7 @@
       </p:sp>
       <p:sp>
         <p:nvSpPr>
-          <p:cNvPr id="12" name="TextBox 11"/>
+          <p:cNvPr id="11" name="TextBox 10"/>
           <p:cNvSpPr txBox="1"/>
           <p:nvPr/>
         </p:nvSpPr>
@@ -37088,7 +36162,7 @@
       </p:sp>
       <p:sp>
         <p:nvSpPr>
-          <p:cNvPr id="13" name="TextBox 12"/>
+          <p:cNvPr id="12" name="TextBox 11"/>
           <p:cNvSpPr txBox="1"/>
           <p:nvPr/>
         </p:nvSpPr>
@@ -37130,7 +36204,7 @@
       </p:sp>
       <p:sp>
         <p:nvSpPr>
-          <p:cNvPr id="14" name="TextBox 13"/>
+          <p:cNvPr id="13" name="TextBox 12"/>
           <p:cNvSpPr txBox="1"/>
           <p:nvPr/>
         </p:nvSpPr>
@@ -37245,48 +36319,6 @@
         </p:nvSpPr>
         <p:spPr>
           <a:xfrm>
-            <a:off x="5897880" y="310896"/>
-            <a:ext cx="4800600" cy="256032"/>
-          </a:xfrm>
-          <a:prstGeom prst="rect">
-            <a:avLst/>
-          </a:prstGeom>
-          <a:noFill/>
-        </p:spPr>
-        <p:txBody>
-          <a:bodyPr wrap="none" lIns="9144" rIns="9144" tIns="9144" bIns="9144" anchor="t">
-            <a:spAutoFit/>
-          </a:bodyPr>
-          <a:lstStyle/>
-          <a:p>
-            <a:pPr algn="r">
-              <a:spcAft>
-                <a:spcPts val="0"/>
-              </a:spcAft>
-              <a:defRPr sz="680" b="1">
-                <a:solidFill>
-                  <a:srgbClr val="4F6B00"/>
-                </a:solidFill>
-                <a:latin typeface="Inter"/>
-              </a:defRPr>
-            </a:pPr>
-            <a:r>
-              <a:rPr>
-                <a:latin typeface="Inter"/>
-              </a:rPr>
-              <a:t>Illustrative, Gradient Maintained — demo data, not the client's holdings or managers</a:t>
-            </a:r>
-          </a:p>
-        </p:txBody>
-      </p:sp>
-      <p:sp>
-        <p:nvSpPr>
-          <p:cNvPr id="4" name="TextBox 3"/>
-          <p:cNvSpPr txBox="1"/>
-          <p:nvPr/>
-        </p:nvSpPr>
-        <p:spPr>
-          <a:xfrm>
             <a:off x="640080" y="566928"/>
             <a:ext cx="10058400" cy="530352"/>
           </a:xfrm>
@@ -37323,7 +36355,7 @@
       </p:sp>
       <p:sp>
         <p:nvSpPr>
-          <p:cNvPr id="5" name="Rectangle 4"/>
+          <p:cNvPr id="4" name="Rectangle 3"/>
           <p:cNvSpPr/>
           <p:nvPr/>
         </p:nvSpPr>
@@ -37372,7 +36404,7 @@
       </p:sp>
       <p:sp>
         <p:nvSpPr>
-          <p:cNvPr id="6" name="Rectangle 5"/>
+          <p:cNvPr id="5" name="Rectangle 4"/>
           <p:cNvSpPr/>
           <p:nvPr/>
         </p:nvSpPr>
@@ -37421,7 +36453,7 @@
       </p:sp>
       <p:sp>
         <p:nvSpPr>
-          <p:cNvPr id="7" name="TextBox 6"/>
+          <p:cNvPr id="6" name="TextBox 5"/>
           <p:cNvSpPr txBox="1"/>
           <p:nvPr/>
         </p:nvSpPr>
@@ -37463,7 +36495,7 @@
       </p:sp>
       <p:sp>
         <p:nvSpPr>
-          <p:cNvPr id="8" name="TextBox 7"/>
+          <p:cNvPr id="7" name="TextBox 6"/>
           <p:cNvSpPr txBox="1"/>
           <p:nvPr/>
         </p:nvSpPr>
@@ -37505,7 +36537,7 @@
       </p:sp>
       <p:graphicFrame>
         <p:nvGraphicFramePr>
-          <p:cNvPr id="9" name="Chart 8"/>
+          <p:cNvPr id="8" name="Chart 7"/>
           <p:cNvGraphicFramePr>
             <a:graphicFrameLocks noGrp="1"/>
           </p:cNvGraphicFramePr>
@@ -37523,7 +36555,7 @@
       </p:graphicFrame>
       <p:sp>
         <p:nvSpPr>
-          <p:cNvPr id="10" name="Rectangle 9"/>
+          <p:cNvPr id="9" name="Rectangle 8"/>
           <p:cNvSpPr/>
           <p:nvPr/>
         </p:nvSpPr>
@@ -37572,7 +36604,7 @@
       </p:sp>
       <p:sp>
         <p:nvSpPr>
-          <p:cNvPr id="11" name="TextBox 10"/>
+          <p:cNvPr id="10" name="TextBox 9"/>
           <p:cNvSpPr txBox="1"/>
           <p:nvPr/>
         </p:nvSpPr>
@@ -37614,7 +36646,7 @@
       </p:sp>
       <p:sp>
         <p:nvSpPr>
-          <p:cNvPr id="12" name="TextBox 11"/>
+          <p:cNvPr id="11" name="TextBox 10"/>
           <p:cNvSpPr txBox="1"/>
           <p:nvPr/>
         </p:nvSpPr>
@@ -37656,7 +36688,7 @@
       </p:sp>
       <p:sp>
         <p:nvSpPr>
-          <p:cNvPr id="13" name="TextBox 12"/>
+          <p:cNvPr id="12" name="TextBox 11"/>
           <p:cNvSpPr txBox="1"/>
           <p:nvPr/>
         </p:nvSpPr>
@@ -37771,48 +36803,6 @@
         </p:nvSpPr>
         <p:spPr>
           <a:xfrm>
-            <a:off x="5897880" y="310896"/>
-            <a:ext cx="4800600" cy="256032"/>
-          </a:xfrm>
-          <a:prstGeom prst="rect">
-            <a:avLst/>
-          </a:prstGeom>
-          <a:noFill/>
-        </p:spPr>
-        <p:txBody>
-          <a:bodyPr wrap="none" lIns="9144" rIns="9144" tIns="9144" bIns="9144" anchor="t">
-            <a:spAutoFit/>
-          </a:bodyPr>
-          <a:lstStyle/>
-          <a:p>
-            <a:pPr algn="r">
-              <a:spcAft>
-                <a:spcPts val="0"/>
-              </a:spcAft>
-              <a:defRPr sz="680" b="1">
-                <a:solidFill>
-                  <a:srgbClr val="4F6B00"/>
-                </a:solidFill>
-                <a:latin typeface="Inter"/>
-              </a:defRPr>
-            </a:pPr>
-            <a:r>
-              <a:rPr>
-                <a:latin typeface="Inter"/>
-              </a:rPr>
-              <a:t>Illustrative, Gradient Maintained — demo data, not the client's holdings or managers</a:t>
-            </a:r>
-          </a:p>
-        </p:txBody>
-      </p:sp>
-      <p:sp>
-        <p:nvSpPr>
-          <p:cNvPr id="4" name="TextBox 3"/>
-          <p:cNvSpPr txBox="1"/>
-          <p:nvPr/>
-        </p:nvSpPr>
-        <p:spPr>
-          <a:xfrm>
             <a:off x="640080" y="566928"/>
             <a:ext cx="10058400" cy="530352"/>
           </a:xfrm>
@@ -37849,7 +36839,7 @@
       </p:sp>
       <p:sp>
         <p:nvSpPr>
-          <p:cNvPr id="5" name="Rectangle 4"/>
+          <p:cNvPr id="4" name="Rectangle 3"/>
           <p:cNvSpPr/>
           <p:nvPr/>
         </p:nvSpPr>
@@ -37898,7 +36888,7 @@
       </p:sp>
       <p:sp>
         <p:nvSpPr>
-          <p:cNvPr id="6" name="Rectangle 5"/>
+          <p:cNvPr id="5" name="Rectangle 4"/>
           <p:cNvSpPr/>
           <p:nvPr/>
         </p:nvSpPr>
@@ -37947,7 +36937,7 @@
       </p:sp>
       <p:sp>
         <p:nvSpPr>
-          <p:cNvPr id="7" name="TextBox 6"/>
+          <p:cNvPr id="6" name="TextBox 5"/>
           <p:cNvSpPr txBox="1"/>
           <p:nvPr/>
         </p:nvSpPr>
@@ -37989,7 +36979,7 @@
       </p:sp>
       <p:sp>
         <p:nvSpPr>
-          <p:cNvPr id="8" name="TextBox 7"/>
+          <p:cNvPr id="7" name="TextBox 6"/>
           <p:cNvSpPr txBox="1"/>
           <p:nvPr/>
         </p:nvSpPr>
@@ -38031,7 +37021,7 @@
       </p:sp>
       <p:graphicFrame>
         <p:nvGraphicFramePr>
-          <p:cNvPr id="9" name="Table 8"/>
+          <p:cNvPr id="8" name="Table 7"/>
           <p:cNvGraphicFramePr>
             <a:graphicFrameLocks noGrp="1"/>
           </p:cNvGraphicFramePr>
@@ -39209,7 +38199,7 @@
       </p:graphicFrame>
       <p:sp>
         <p:nvSpPr>
-          <p:cNvPr id="10" name="TextBox 9"/>
+          <p:cNvPr id="9" name="TextBox 8"/>
           <p:cNvSpPr txBox="1"/>
           <p:nvPr/>
         </p:nvSpPr>
@@ -39251,7 +38241,7 @@
       </p:sp>
       <p:sp>
         <p:nvSpPr>
-          <p:cNvPr id="11" name="Rectangle 10"/>
+          <p:cNvPr id="10" name="Rectangle 9"/>
           <p:cNvSpPr/>
           <p:nvPr/>
         </p:nvSpPr>
@@ -39300,7 +38290,7 @@
       </p:sp>
       <p:sp>
         <p:nvSpPr>
-          <p:cNvPr id="12" name="TextBox 11"/>
+          <p:cNvPr id="11" name="TextBox 10"/>
           <p:cNvSpPr txBox="1"/>
           <p:nvPr/>
         </p:nvSpPr>
@@ -39342,7 +38332,7 @@
       </p:sp>
       <p:sp>
         <p:nvSpPr>
-          <p:cNvPr id="13" name="TextBox 12"/>
+          <p:cNvPr id="12" name="TextBox 11"/>
           <p:cNvSpPr txBox="1"/>
           <p:nvPr/>
         </p:nvSpPr>
@@ -39384,7 +38374,7 @@
       </p:sp>
       <p:sp>
         <p:nvSpPr>
-          <p:cNvPr id="14" name="TextBox 13"/>
+          <p:cNvPr id="13" name="TextBox 12"/>
           <p:cNvSpPr txBox="1"/>
           <p:nvPr/>
         </p:nvSpPr>
@@ -39500,7 +38490,7 @@
         <p:spPr>
           <a:xfrm>
             <a:off x="640080" y="329184"/>
-            <a:ext cx="5303520" cy="182880"/>
+            <a:ext cx="9875520" cy="182880"/>
           </a:xfrm>
           <a:prstGeom prst="rect">
             <a:avLst/>
@@ -39541,48 +38531,6 @@
         </p:nvSpPr>
         <p:spPr>
           <a:xfrm>
-            <a:off x="5897880" y="310896"/>
-            <a:ext cx="4800600" cy="256032"/>
-          </a:xfrm>
-          <a:prstGeom prst="rect">
-            <a:avLst/>
-          </a:prstGeom>
-          <a:noFill/>
-        </p:spPr>
-        <p:txBody>
-          <a:bodyPr wrap="none" lIns="9144" rIns="9144" tIns="9144" bIns="9144" anchor="t">
-            <a:spAutoFit/>
-          </a:bodyPr>
-          <a:lstStyle/>
-          <a:p>
-            <a:pPr algn="r">
-              <a:spcAft>
-                <a:spcPts val="0"/>
-              </a:spcAft>
-              <a:defRPr sz="680" b="1">
-                <a:solidFill>
-                  <a:srgbClr val="4F6B00"/>
-                </a:solidFill>
-                <a:latin typeface="Inter"/>
-              </a:defRPr>
-            </a:pPr>
-            <a:r>
-              <a:rPr>
-                <a:latin typeface="Inter"/>
-              </a:rPr>
-              <a:t>Illustrative, Gradient Maintained — demo data, not the client's holdings or managers</a:t>
-            </a:r>
-          </a:p>
-        </p:txBody>
-      </p:sp>
-      <p:sp>
-        <p:nvSpPr>
-          <p:cNvPr id="5" name="TextBox 4"/>
-          <p:cNvSpPr txBox="1"/>
-          <p:nvPr/>
-        </p:nvSpPr>
-        <p:spPr>
-          <a:xfrm>
             <a:off x="640080" y="566928"/>
             <a:ext cx="10058400" cy="530352"/>
           </a:xfrm>
@@ -39619,7 +38567,7 @@
       </p:sp>
       <p:sp>
         <p:nvSpPr>
-          <p:cNvPr id="6" name="Rectangle 5"/>
+          <p:cNvPr id="5" name="Rectangle 4"/>
           <p:cNvSpPr/>
           <p:nvPr/>
         </p:nvSpPr>
@@ -39668,7 +38616,7 @@
       </p:sp>
       <p:sp>
         <p:nvSpPr>
-          <p:cNvPr id="7" name="Rectangle 6"/>
+          <p:cNvPr id="6" name="Rectangle 5"/>
           <p:cNvSpPr/>
           <p:nvPr/>
         </p:nvSpPr>
@@ -39717,7 +38665,7 @@
       </p:sp>
       <p:sp>
         <p:nvSpPr>
-          <p:cNvPr id="8" name="TextBox 7"/>
+          <p:cNvPr id="7" name="TextBox 6"/>
           <p:cNvSpPr txBox="1"/>
           <p:nvPr/>
         </p:nvSpPr>
@@ -39759,7 +38707,7 @@
       </p:sp>
       <p:sp>
         <p:nvSpPr>
-          <p:cNvPr id="9" name="TextBox 8"/>
+          <p:cNvPr id="8" name="TextBox 7"/>
           <p:cNvSpPr txBox="1"/>
           <p:nvPr/>
         </p:nvSpPr>
@@ -39801,7 +38749,7 @@
       </p:sp>
       <p:sp>
         <p:nvSpPr>
-          <p:cNvPr id="10" name="TextBox 9"/>
+          <p:cNvPr id="9" name="TextBox 8"/>
           <p:cNvSpPr txBox="1"/>
           <p:nvPr/>
         </p:nvSpPr>
@@ -39843,7 +38791,7 @@
       </p:sp>
       <p:sp>
         <p:nvSpPr>
-          <p:cNvPr id="11" name="Rectangle 10"/>
+          <p:cNvPr id="10" name="Rectangle 9"/>
           <p:cNvSpPr/>
           <p:nvPr/>
         </p:nvSpPr>
@@ -39892,7 +38840,7 @@
       </p:sp>
       <p:sp>
         <p:nvSpPr>
-          <p:cNvPr id="12" name="Oval 11"/>
+          <p:cNvPr id="11" name="Oval 10"/>
           <p:cNvSpPr/>
           <p:nvPr/>
         </p:nvSpPr>
@@ -39941,7 +38889,7 @@
       </p:sp>
       <p:sp>
         <p:nvSpPr>
-          <p:cNvPr id="13" name="Rectangle 12"/>
+          <p:cNvPr id="12" name="Rectangle 11"/>
           <p:cNvSpPr/>
           <p:nvPr/>
         </p:nvSpPr>
@@ -39990,7 +38938,7 @@
       </p:sp>
       <p:sp>
         <p:nvSpPr>
-          <p:cNvPr id="14" name="TextBox 13"/>
+          <p:cNvPr id="13" name="TextBox 12"/>
           <p:cNvSpPr txBox="1"/>
           <p:nvPr/>
         </p:nvSpPr>
@@ -40032,7 +38980,7 @@
       </p:sp>
       <p:sp>
         <p:nvSpPr>
-          <p:cNvPr id="15" name="Rectangle 14"/>
+          <p:cNvPr id="14" name="Rectangle 13"/>
           <p:cNvSpPr/>
           <p:nvPr/>
         </p:nvSpPr>
@@ -40081,7 +39029,7 @@
       </p:sp>
       <p:sp>
         <p:nvSpPr>
-          <p:cNvPr id="16" name="Oval 15"/>
+          <p:cNvPr id="15" name="Oval 14"/>
           <p:cNvSpPr/>
           <p:nvPr/>
         </p:nvSpPr>
@@ -40130,7 +39078,7 @@
       </p:sp>
       <p:sp>
         <p:nvSpPr>
-          <p:cNvPr id="17" name="Rectangle 16"/>
+          <p:cNvPr id="16" name="Rectangle 15"/>
           <p:cNvSpPr/>
           <p:nvPr/>
         </p:nvSpPr>
@@ -40179,7 +39127,7 @@
       </p:sp>
       <p:sp>
         <p:nvSpPr>
-          <p:cNvPr id="18" name="TextBox 17"/>
+          <p:cNvPr id="17" name="TextBox 16"/>
           <p:cNvSpPr txBox="1"/>
           <p:nvPr/>
         </p:nvSpPr>
@@ -40221,7 +39169,7 @@
       </p:sp>
       <p:sp>
         <p:nvSpPr>
-          <p:cNvPr id="19" name="Rectangle 18"/>
+          <p:cNvPr id="18" name="Rectangle 17"/>
           <p:cNvSpPr/>
           <p:nvPr/>
         </p:nvSpPr>
@@ -40270,7 +39218,7 @@
       </p:sp>
       <p:sp>
         <p:nvSpPr>
-          <p:cNvPr id="20" name="Oval 19"/>
+          <p:cNvPr id="19" name="Oval 18"/>
           <p:cNvSpPr/>
           <p:nvPr/>
         </p:nvSpPr>
@@ -40319,7 +39267,7 @@
       </p:sp>
       <p:sp>
         <p:nvSpPr>
-          <p:cNvPr id="21" name="Rectangle 20"/>
+          <p:cNvPr id="20" name="Rectangle 19"/>
           <p:cNvSpPr/>
           <p:nvPr/>
         </p:nvSpPr>
@@ -40368,7 +39316,7 @@
       </p:sp>
       <p:sp>
         <p:nvSpPr>
-          <p:cNvPr id="22" name="TextBox 21"/>
+          <p:cNvPr id="21" name="TextBox 20"/>
           <p:cNvSpPr txBox="1"/>
           <p:nvPr/>
         </p:nvSpPr>
@@ -40410,7 +39358,7 @@
       </p:sp>
       <p:sp>
         <p:nvSpPr>
-          <p:cNvPr id="23" name="Rectangle 22"/>
+          <p:cNvPr id="22" name="Rectangle 21"/>
           <p:cNvSpPr/>
           <p:nvPr/>
         </p:nvSpPr>
@@ -40459,7 +39407,7 @@
       </p:sp>
       <p:sp>
         <p:nvSpPr>
-          <p:cNvPr id="24" name="Oval 23"/>
+          <p:cNvPr id="23" name="Oval 22"/>
           <p:cNvSpPr/>
           <p:nvPr/>
         </p:nvSpPr>
@@ -40508,7 +39456,7 @@
       </p:sp>
       <p:sp>
         <p:nvSpPr>
-          <p:cNvPr id="25" name="Rectangle 24"/>
+          <p:cNvPr id="24" name="Rectangle 23"/>
           <p:cNvSpPr/>
           <p:nvPr/>
         </p:nvSpPr>
@@ -40557,7 +39505,7 @@
       </p:sp>
       <p:sp>
         <p:nvSpPr>
-          <p:cNvPr id="26" name="TextBox 25"/>
+          <p:cNvPr id="25" name="TextBox 24"/>
           <p:cNvSpPr txBox="1"/>
           <p:nvPr/>
         </p:nvSpPr>
@@ -40599,7 +39547,7 @@
       </p:sp>
       <p:sp>
         <p:nvSpPr>
-          <p:cNvPr id="27" name="Rectangle 26"/>
+          <p:cNvPr id="26" name="Rectangle 25"/>
           <p:cNvSpPr/>
           <p:nvPr/>
         </p:nvSpPr>
@@ -40648,7 +39596,7 @@
       </p:sp>
       <p:sp>
         <p:nvSpPr>
-          <p:cNvPr id="28" name="Oval 27"/>
+          <p:cNvPr id="27" name="Oval 26"/>
           <p:cNvSpPr/>
           <p:nvPr/>
         </p:nvSpPr>
@@ -40697,7 +39645,7 @@
       </p:sp>
       <p:sp>
         <p:nvSpPr>
-          <p:cNvPr id="29" name="Rectangle 28"/>
+          <p:cNvPr id="28" name="Rectangle 27"/>
           <p:cNvSpPr/>
           <p:nvPr/>
         </p:nvSpPr>
@@ -40746,7 +39694,7 @@
       </p:sp>
       <p:sp>
         <p:nvSpPr>
-          <p:cNvPr id="30" name="Rectangle 29"/>
+          <p:cNvPr id="29" name="Rectangle 28"/>
           <p:cNvSpPr/>
           <p:nvPr/>
         </p:nvSpPr>
@@ -40795,7 +39743,7 @@
       </p:sp>
       <p:sp>
         <p:nvSpPr>
-          <p:cNvPr id="31" name="TextBox 30"/>
+          <p:cNvPr id="30" name="TextBox 29"/>
           <p:cNvSpPr txBox="1"/>
           <p:nvPr/>
         </p:nvSpPr>
@@ -40837,7 +39785,7 @@
       </p:sp>
       <p:graphicFrame>
         <p:nvGraphicFramePr>
-          <p:cNvPr id="32" name="Chart 31"/>
+          <p:cNvPr id="31" name="Chart 30"/>
           <p:cNvGraphicFramePr>
             <a:graphicFrameLocks noGrp="1"/>
           </p:cNvGraphicFramePr>
@@ -40855,7 +39803,7 @@
       </p:graphicFrame>
       <p:sp>
         <p:nvSpPr>
-          <p:cNvPr id="33" name="Rectangle 32"/>
+          <p:cNvPr id="32" name="Rectangle 31"/>
           <p:cNvSpPr/>
           <p:nvPr/>
         </p:nvSpPr>
@@ -40904,7 +39852,7 @@
       </p:sp>
       <p:sp>
         <p:nvSpPr>
-          <p:cNvPr id="34" name="TextBox 33"/>
+          <p:cNvPr id="33" name="TextBox 32"/>
           <p:cNvSpPr txBox="1"/>
           <p:nvPr/>
         </p:nvSpPr>
@@ -40946,7 +39894,7 @@
       </p:sp>
       <p:sp>
         <p:nvSpPr>
-          <p:cNvPr id="35" name="TextBox 34"/>
+          <p:cNvPr id="34" name="TextBox 33"/>
           <p:cNvSpPr txBox="1"/>
           <p:nvPr/>
         </p:nvSpPr>
@@ -40988,7 +39936,7 @@
       </p:sp>
       <p:sp>
         <p:nvSpPr>
-          <p:cNvPr id="36" name="TextBox 35"/>
+          <p:cNvPr id="35" name="TextBox 34"/>
           <p:cNvSpPr txBox="1"/>
           <p:nvPr/>
         </p:nvSpPr>
@@ -41104,7 +40052,7 @@
         <p:spPr>
           <a:xfrm>
             <a:off x="640080" y="329184"/>
-            <a:ext cx="5303520" cy="182880"/>
+            <a:ext cx="9875520" cy="182880"/>
           </a:xfrm>
           <a:prstGeom prst="rect">
             <a:avLst/>
@@ -41145,48 +40093,6 @@
         </p:nvSpPr>
         <p:spPr>
           <a:xfrm>
-            <a:off x="5897880" y="310896"/>
-            <a:ext cx="4800600" cy="256032"/>
-          </a:xfrm>
-          <a:prstGeom prst="rect">
-            <a:avLst/>
-          </a:prstGeom>
-          <a:noFill/>
-        </p:spPr>
-        <p:txBody>
-          <a:bodyPr wrap="none" lIns="9144" rIns="9144" tIns="9144" bIns="9144" anchor="t">
-            <a:spAutoFit/>
-          </a:bodyPr>
-          <a:lstStyle/>
-          <a:p>
-            <a:pPr algn="r">
-              <a:spcAft>
-                <a:spcPts val="0"/>
-              </a:spcAft>
-              <a:defRPr sz="680" b="1">
-                <a:solidFill>
-                  <a:srgbClr val="4F6B00"/>
-                </a:solidFill>
-                <a:latin typeface="Inter"/>
-              </a:defRPr>
-            </a:pPr>
-            <a:r>
-              <a:rPr>
-                <a:latin typeface="Inter"/>
-              </a:rPr>
-              <a:t>Illustrative, Gradient Maintained — demo data, not the client's holdings or managers</a:t>
-            </a:r>
-          </a:p>
-        </p:txBody>
-      </p:sp>
-      <p:sp>
-        <p:nvSpPr>
-          <p:cNvPr id="5" name="TextBox 4"/>
-          <p:cNvSpPr txBox="1"/>
-          <p:nvPr/>
-        </p:nvSpPr>
-        <p:spPr>
-          <a:xfrm>
             <a:off x="640080" y="566928"/>
             <a:ext cx="10058400" cy="530352"/>
           </a:xfrm>
@@ -41223,7 +40129,7 @@
       </p:sp>
       <p:sp>
         <p:nvSpPr>
-          <p:cNvPr id="6" name="Rectangle 5"/>
+          <p:cNvPr id="5" name="Rectangle 4"/>
           <p:cNvSpPr/>
           <p:nvPr/>
         </p:nvSpPr>
@@ -41272,7 +40178,7 @@
       </p:sp>
       <p:sp>
         <p:nvSpPr>
-          <p:cNvPr id="7" name="Rectangle 6"/>
+          <p:cNvPr id="6" name="Rectangle 5"/>
           <p:cNvSpPr/>
           <p:nvPr/>
         </p:nvSpPr>
@@ -41321,7 +40227,7 @@
       </p:sp>
       <p:sp>
         <p:nvSpPr>
-          <p:cNvPr id="8" name="TextBox 7"/>
+          <p:cNvPr id="7" name="TextBox 6"/>
           <p:cNvSpPr txBox="1"/>
           <p:nvPr/>
         </p:nvSpPr>
@@ -41363,7 +40269,7 @@
       </p:sp>
       <p:sp>
         <p:nvSpPr>
-          <p:cNvPr id="9" name="TextBox 8"/>
+          <p:cNvPr id="8" name="TextBox 7"/>
           <p:cNvSpPr txBox="1"/>
           <p:nvPr/>
         </p:nvSpPr>
@@ -41405,7 +40311,7 @@
       </p:sp>
       <p:graphicFrame>
         <p:nvGraphicFramePr>
-          <p:cNvPr id="10" name="Chart 9"/>
+          <p:cNvPr id="9" name="Chart 8"/>
           <p:cNvGraphicFramePr>
             <a:graphicFrameLocks noGrp="1"/>
           </p:cNvGraphicFramePr>
@@ -41423,7 +40329,7 @@
       </p:graphicFrame>
       <p:sp>
         <p:nvSpPr>
-          <p:cNvPr id="11" name="Rectangle 10"/>
+          <p:cNvPr id="10" name="Rectangle 9"/>
           <p:cNvSpPr/>
           <p:nvPr/>
         </p:nvSpPr>
@@ -41472,7 +40378,7 @@
       </p:sp>
       <p:sp>
         <p:nvSpPr>
-          <p:cNvPr id="12" name="TextBox 11"/>
+          <p:cNvPr id="11" name="TextBox 10"/>
           <p:cNvSpPr txBox="1"/>
           <p:nvPr/>
         </p:nvSpPr>
@@ -41514,7 +40420,7 @@
       </p:sp>
       <p:sp>
         <p:nvSpPr>
-          <p:cNvPr id="13" name="TextBox 12"/>
+          <p:cNvPr id="12" name="TextBox 11"/>
           <p:cNvSpPr txBox="1"/>
           <p:nvPr/>
         </p:nvSpPr>
@@ -41556,7 +40462,7 @@
       </p:sp>
       <p:sp>
         <p:nvSpPr>
-          <p:cNvPr id="14" name="TextBox 13"/>
+          <p:cNvPr id="13" name="TextBox 12"/>
           <p:cNvSpPr txBox="1"/>
           <p:nvPr/>
         </p:nvSpPr>
